--- a/presentation/fleetmind-aws-architecture.pptx
+++ b/presentation/fleetmind-aws-architecture.pptx
@@ -2412,9 +2412,9 @@
                 <a:solidFill>
                   <a:srgbClr val="FFFFFF"/>
                 </a:solidFill>
-                <a:latin typeface="Microsoft JhengHei" pitchFamily="34" charset="0"/>
-                <a:ea typeface="Microsoft JhengHei" pitchFamily="34" charset="-122"/>
-                <a:cs typeface="Microsoft JhengHei" pitchFamily="34" charset="-120"/>
+                <a:latin typeface="Hiragino Sans" pitchFamily="34" charset="0"/>
+                <a:ea typeface="Hiragino Sans" pitchFamily="34" charset="-122"/>
+                <a:cs typeface="Hiragino Sans" pitchFamily="34" charset="-120"/>
               </a:rPr>
               <a:t>k =</a:t>
             </a:r>
@@ -2451,9 +2451,9 @@
                 <a:solidFill>
                   <a:srgbClr val="2A9D8F"/>
                 </a:solidFill>
-                <a:latin typeface="Microsoft JhengHei" pitchFamily="34" charset="0"/>
-                <a:ea typeface="Microsoft JhengHei" pitchFamily="34" charset="-122"/>
-                <a:cs typeface="Microsoft JhengHei" pitchFamily="34" charset="-120"/>
+                <a:latin typeface="Hiragino Sans" pitchFamily="34" charset="0"/>
+                <a:ea typeface="Hiragino Sans" pitchFamily="34" charset="-122"/>
+                <a:cs typeface="Hiragino Sans" pitchFamily="34" charset="-120"/>
               </a:rPr>
               <a:t>FOC</a:t>
             </a:r>
@@ -2513,9 +2513,9 @@
                 <a:solidFill>
                   <a:srgbClr val="F4A72B"/>
                 </a:solidFill>
-                <a:latin typeface="Microsoft JhengHei" pitchFamily="34" charset="0"/>
-                <a:ea typeface="Microsoft JhengHei" pitchFamily="34" charset="-122"/>
-                <a:cs typeface="Microsoft JhengHei" pitchFamily="34" charset="-120"/>
+                <a:latin typeface="Hiragino Sans" pitchFamily="34" charset="0"/>
+                <a:ea typeface="Hiragino Sans" pitchFamily="34" charset="-122"/>
+                <a:cs typeface="Hiragino Sans" pitchFamily="34" charset="-120"/>
               </a:rPr>
               <a:t>STW³</a:t>
             </a:r>
@@ -2552,9 +2552,9 @@
                 <a:solidFill>
                   <a:srgbClr val="C7D6E4"/>
                 </a:solidFill>
-                <a:latin typeface="Microsoft JhengHei" pitchFamily="34" charset="0"/>
-                <a:ea typeface="Microsoft JhengHei" pitchFamily="34" charset="-122"/>
-                <a:cs typeface="Microsoft JhengHei" pitchFamily="34" charset="-120"/>
+                <a:latin typeface="Hiragino Sans" pitchFamily="34" charset="0"/>
+                <a:ea typeface="Hiragino Sans" pitchFamily="34" charset="-122"/>
+                <a:cs typeface="Hiragino Sans" pitchFamily="34" charset="-120"/>
               </a:rPr>
               <a:t>ISO 19030 · 船體效能指標</a:t>
             </a:r>
@@ -2591,9 +2591,9 @@
                 <a:solidFill>
                   <a:srgbClr val="F4A72B"/>
                 </a:solidFill>
-                <a:latin typeface="Microsoft JhengHei" pitchFamily="34" charset="0"/>
-                <a:ea typeface="Microsoft JhengHei" pitchFamily="34" charset="-122"/>
-                <a:cs typeface="Microsoft JhengHei" pitchFamily="34" charset="-120"/>
+                <a:latin typeface="Hiragino Sans" pitchFamily="34" charset="0"/>
+                <a:ea typeface="Hiragino Sans" pitchFamily="34" charset="-122"/>
+                <a:cs typeface="Hiragino Sans" pitchFamily="34" charset="-120"/>
               </a:rPr>
               <a:t>FLEETMIND · AWS ARCHITECTURE</a:t>
             </a:r>
@@ -2633,9 +2633,9 @@
                 <a:solidFill>
                   <a:srgbClr val="FFFFFF"/>
                 </a:solidFill>
-                <a:latin typeface="Microsoft JhengHei" pitchFamily="34" charset="0"/>
-                <a:ea typeface="Microsoft JhengHei" pitchFamily="34" charset="-122"/>
-                <a:cs typeface="Microsoft JhengHei" pitchFamily="34" charset="-120"/>
+                <a:latin typeface="Hiragino Sans" pitchFamily="34" charset="0"/>
+                <a:ea typeface="Hiragino Sans" pitchFamily="34" charset="-122"/>
+                <a:cs typeface="Hiragino Sans" pitchFamily="34" charset="-120"/>
               </a:rPr>
               <a:t>AWS 架構藍圖</a:t>
             </a:r>
@@ -2653,9 +2653,9 @@
                 <a:solidFill>
                   <a:srgbClr val="FFFFFF"/>
                 </a:solidFill>
-                <a:latin typeface="Microsoft JhengHei" pitchFamily="34" charset="0"/>
-                <a:ea typeface="Microsoft JhengHei" pitchFamily="34" charset="-122"/>
-                <a:cs typeface="Microsoft JhengHei" pitchFamily="34" charset="-120"/>
+                <a:latin typeface="Hiragino Sans" pitchFamily="34" charset="0"/>
+                <a:ea typeface="Hiragino Sans" pitchFamily="34" charset="-122"/>
+                <a:cs typeface="Hiragino Sans" pitchFamily="34" charset="-120"/>
               </a:rPr>
               <a:t>與五種上雲路徑</a:t>
             </a:r>
@@ -2695,9 +2695,9 @@
                 <a:solidFill>
                   <a:srgbClr val="2A9D8F"/>
                 </a:solidFill>
-                <a:latin typeface="Microsoft JhengHei" pitchFamily="34" charset="0"/>
-                <a:ea typeface="Microsoft JhengHei" pitchFamily="34" charset="-122"/>
-                <a:cs typeface="Microsoft JhengHei" pitchFamily="34" charset="-120"/>
+                <a:latin typeface="Hiragino Sans" pitchFamily="34" charset="0"/>
+                <a:ea typeface="Hiragino Sans" pitchFamily="34" charset="-122"/>
+                <a:cs typeface="Hiragino Sans" pitchFamily="34" charset="-120"/>
               </a:rPr>
               <a:t>一套船舶效能決策系統 — 從已上線的 Fargate demo 到全艦隊營運平台</a:t>
             </a:r>
@@ -2730,13 +2730,13 @@
               <a:buNone/>
             </a:pPr>
             <a:r>
-              <a:rPr lang="en-US" sz="1600" i="1" dirty="0">
+              <a:rPr lang="en-US" sz="1600" dirty="0">
                 <a:solidFill>
                   <a:srgbClr val="F4A72B"/>
                 </a:solidFill>
-                <a:latin typeface="Microsoft JhengHei" pitchFamily="34" charset="0"/>
-                <a:ea typeface="Microsoft JhengHei" pitchFamily="34" charset="-122"/>
-                <a:cs typeface="Microsoft JhengHei" pitchFamily="34" charset="-120"/>
+                <a:latin typeface="Hiragino Sans" pitchFamily="34" charset="0"/>
+                <a:ea typeface="Hiragino Sans" pitchFamily="34" charset="-122"/>
+                <a:cs typeface="Hiragino Sans" pitchFamily="34" charset="-120"/>
               </a:rPr>
               <a:t>數字來自計算　語言來自 AI　決策留給人</a:t>
             </a:r>
@@ -2809,9 +2809,9 @@
                 <a:solidFill>
                   <a:srgbClr val="FFFFFF"/>
                 </a:solidFill>
-                <a:latin typeface="Microsoft JhengHei" pitchFamily="34" charset="0"/>
-                <a:ea typeface="Microsoft JhengHei" pitchFamily="34" charset="-122"/>
-                <a:cs typeface="Microsoft JhengHei" pitchFamily="34" charset="-120"/>
+                <a:latin typeface="Hiragino Sans" pitchFamily="34" charset="0"/>
+                <a:ea typeface="Hiragino Sans" pitchFamily="34" charset="-122"/>
+                <a:cs typeface="Hiragino Sans" pitchFamily="34" charset="-120"/>
               </a:rPr>
               <a:t>15 艘 × 5 年</a:t>
             </a:r>
@@ -2848,9 +2848,9 @@
                 <a:solidFill>
                   <a:srgbClr val="C7D6E4"/>
                 </a:solidFill>
-                <a:latin typeface="Microsoft JhengHei" pitchFamily="34" charset="0"/>
-                <a:ea typeface="Microsoft JhengHei" pitchFamily="34" charset="-122"/>
-                <a:cs typeface="Microsoft JhengHei" pitchFamily="34" charset="-120"/>
+                <a:latin typeface="Hiragino Sans" pitchFamily="34" charset="0"/>
+                <a:ea typeface="Hiragino Sans" pitchFamily="34" charset="-122"/>
+                <a:cs typeface="Hiragino Sans" pitchFamily="34" charset="-120"/>
               </a:rPr>
               <a:t>同型船 · 2021–2025 正午報表</a:t>
             </a:r>
@@ -2887,9 +2887,9 @@
                 <a:solidFill>
                   <a:srgbClr val="FFFFFF"/>
                 </a:solidFill>
-                <a:latin typeface="Microsoft JhengHei" pitchFamily="34" charset="0"/>
-                <a:ea typeface="Microsoft JhengHei" pitchFamily="34" charset="-122"/>
-                <a:cs typeface="Microsoft JhengHei" pitchFamily="34" charset="-120"/>
+                <a:latin typeface="Hiragino Sans" pitchFamily="34" charset="0"/>
+                <a:ea typeface="Hiragino Sans" pitchFamily="34" charset="-122"/>
+                <a:cs typeface="Hiragino Sans" pitchFamily="34" charset="-120"/>
               </a:rPr>
               <a:t>21.8%</a:t>
             </a:r>
@@ -2926,9 +2926,9 @@
                 <a:solidFill>
                   <a:srgbClr val="C7D6E4"/>
                 </a:solidFill>
-                <a:latin typeface="Microsoft JhengHei" pitchFamily="34" charset="0"/>
-                <a:ea typeface="Microsoft JhengHei" pitchFamily="34" charset="-122"/>
-                <a:cs typeface="Microsoft JhengHei" pitchFamily="34" charset="-120"/>
+                <a:latin typeface="Hiragino Sans" pitchFamily="34" charset="0"/>
+                <a:ea typeface="Hiragino Sans" pitchFamily="34" charset="-122"/>
+                <a:cs typeface="Hiragino Sans" pitchFamily="34" charset="-120"/>
               </a:rPr>
               <a:t>S11 最嚴重 Speed Loss · 539 有效日</a:t>
             </a:r>
@@ -2965,9 +2965,9 @@
                 <a:solidFill>
                   <a:srgbClr val="FFFFFF"/>
                 </a:solidFill>
-                <a:latin typeface="Microsoft JhengHei" pitchFamily="34" charset="0"/>
-                <a:ea typeface="Microsoft JhengHei" pitchFamily="34" charset="-122"/>
-                <a:cs typeface="Microsoft JhengHei" pitchFamily="34" charset="-120"/>
+                <a:latin typeface="Hiragino Sans" pitchFamily="34" charset="0"/>
+                <a:ea typeface="Hiragino Sans" pitchFamily="34" charset="-122"/>
+                <a:cs typeface="Hiragino Sans" pitchFamily="34" charset="-120"/>
               </a:rPr>
               <a:t>Day1 上線</a:t>
             </a:r>
@@ -3004,9 +3004,9 @@
                 <a:solidFill>
                   <a:srgbClr val="C7D6E4"/>
                 </a:solidFill>
-                <a:latin typeface="Microsoft JhengHei" pitchFamily="34" charset="0"/>
-                <a:ea typeface="Microsoft JhengHei" pitchFamily="34" charset="-122"/>
-                <a:cs typeface="Microsoft JhengHei" pitchFamily="34" charset="-120"/>
+                <a:latin typeface="Hiragino Sans" pitchFamily="34" charset="0"/>
+                <a:ea typeface="Hiragino Sans" pitchFamily="34" charset="-122"/>
+                <a:cs typeface="Hiragino Sans" pitchFamily="34" charset="-120"/>
               </a:rPr>
               <a:t>帳號 516665228894 · us-east-1</a:t>
             </a:r>
@@ -3118,9 +3118,9 @@
                 <a:solidFill>
                   <a:srgbClr val="F4A72B"/>
                 </a:solidFill>
-                <a:latin typeface="Microsoft JhengHei" pitchFamily="34" charset="0"/>
-                <a:ea typeface="Microsoft JhengHei" pitchFamily="34" charset="-122"/>
-                <a:cs typeface="Microsoft JhengHei" pitchFamily="34" charset="-120"/>
+                <a:latin typeface="Hiragino Sans" pitchFamily="34" charset="0"/>
+                <a:ea typeface="Hiragino Sans" pitchFamily="34" charset="-122"/>
+                <a:cs typeface="Hiragino Sans" pitchFamily="34" charset="-120"/>
               </a:rPr>
               <a:t>Live　</a:t>
             </a:r>
@@ -3132,9 +3132,9 @@
                 <a:solidFill>
                   <a:srgbClr val="2A9D8F"/>
                 </a:solidFill>
-                <a:latin typeface="Microsoft JhengHei" pitchFamily="34" charset="0"/>
-                <a:ea typeface="Microsoft JhengHei" pitchFamily="34" charset="-122"/>
-                <a:cs typeface="Microsoft JhengHei" pitchFamily="34" charset="-120"/>
+                <a:latin typeface="Hiragino Sans" pitchFamily="34" charset="0"/>
+                <a:ea typeface="Hiragino Sans" pitchFamily="34" charset="-122"/>
+                <a:cs typeface="Hiragino Sans" pitchFamily="34" charset="-120"/>
               </a:rPr>
               <a:t>http://fleetmind-alb-330672315.us-east-1.elb.amazonaws.com</a:t>
             </a:r>
@@ -3356,9 +3356,9 @@
                 <a:solidFill>
                   <a:srgbClr val="FFFFFF"/>
                 </a:solidFill>
-                <a:latin typeface="Microsoft JhengHei" pitchFamily="34" charset="0"/>
-                <a:ea typeface="Microsoft JhengHei" pitchFamily="34" charset="-122"/>
-                <a:cs typeface="Microsoft JhengHei" pitchFamily="34" charset="-120"/>
+                <a:latin typeface="Hiragino Sans" pitchFamily="34" charset="0"/>
+                <a:ea typeface="Hiragino Sans" pitchFamily="34" charset="-122"/>
+                <a:cs typeface="Hiragino Sans" pitchFamily="34" charset="-120"/>
               </a:rPr>
               <a:t>10</a:t>
             </a:r>
@@ -3370,9 +3370,9 @@
                 <a:solidFill>
                   <a:srgbClr val="8FA8BD"/>
                 </a:solidFill>
-                <a:latin typeface="Microsoft JhengHei" pitchFamily="34" charset="0"/>
-                <a:ea typeface="Microsoft JhengHei" pitchFamily="34" charset="-122"/>
-                <a:cs typeface="Microsoft JhengHei" pitchFamily="34" charset="-120"/>
+                <a:latin typeface="Hiragino Sans" pitchFamily="34" charset="0"/>
+                <a:ea typeface="Hiragino Sans" pitchFamily="34" charset="-122"/>
+                <a:cs typeface="Hiragino Sans" pitchFamily="34" charset="-120"/>
               </a:rPr>
               <a:t>  /  15</a:t>
             </a:r>
@@ -3409,9 +3409,9 @@
                 <a:solidFill>
                   <a:srgbClr val="F4A72B"/>
                 </a:solidFill>
-                <a:latin typeface="Microsoft JhengHei" pitchFamily="34" charset="0"/>
-                <a:ea typeface="Microsoft JhengHei" pitchFamily="34" charset="-122"/>
-                <a:cs typeface="Microsoft JhengHei" pitchFamily="34" charset="-120"/>
+                <a:latin typeface="Hiragino Sans" pitchFamily="34" charset="0"/>
+                <a:ea typeface="Hiragino Sans" pitchFamily="34" charset="-122"/>
+                <a:cs typeface="Hiragino Sans" pitchFamily="34" charset="-120"/>
               </a:rPr>
               <a:t>MULTI-REGION · ACTIVE-ACTIVE</a:t>
             </a:r>
@@ -3448,9 +3448,9 @@
                 <a:solidFill>
                   <a:srgbClr val="FFFFFF"/>
                 </a:solidFill>
-                <a:latin typeface="Microsoft JhengHei" pitchFamily="34" charset="0"/>
-                <a:ea typeface="Microsoft JhengHei" pitchFamily="34" charset="-122"/>
-                <a:cs typeface="Microsoft JhengHei" pitchFamily="34" charset="-120"/>
+                <a:latin typeface="Hiragino Sans" pitchFamily="34" charset="0"/>
+                <a:ea typeface="Hiragino Sans" pitchFamily="34" charset="-122"/>
+                <a:cs typeface="Hiragino Sans" pitchFamily="34" charset="-120"/>
               </a:rPr>
               <a:t>多區域 Active-Active + 即時告警與災備</a:t>
             </a:r>
@@ -3510,13 +3510,13 @@
               <a:buNone/>
             </a:pPr>
             <a:r>
-              <a:rPr lang="en-US" sz="1250" i="1" dirty="0">
+              <a:rPr lang="en-US" sz="1250" dirty="0">
                 <a:solidFill>
                   <a:srgbClr val="C7D6E4"/>
                 </a:solidFill>
-                <a:latin typeface="Microsoft JhengHei" pitchFamily="34" charset="0"/>
-                <a:ea typeface="Microsoft JhengHei" pitchFamily="34" charset="-122"/>
-                <a:cs typeface="Microsoft JhengHei" pitchFamily="34" charset="-120"/>
+                <a:latin typeface="Hiragino Sans" pitchFamily="34" charset="0"/>
+                <a:ea typeface="Hiragino Sans" pitchFamily="34" charset="-122"/>
+                <a:cs typeface="Hiragino Sans" pitchFamily="34" charset="-120"/>
               </a:rPr>
               <a:t>不同國家船務端就近接入 → Route 53 智慧路由到兩個 active 區域；一區故障自動切換、跨區雙向複製，資料不丟、服務不中斷。</a:t>
             </a:r>
@@ -3585,9 +3585,9 @@
                 <a:solidFill>
                   <a:srgbClr val="FFFFFF"/>
                 </a:solidFill>
-                <a:latin typeface="Microsoft JhengHei" pitchFamily="34" charset="0"/>
-                <a:ea typeface="Microsoft JhengHei" pitchFamily="34" charset="-122"/>
-                <a:cs typeface="Microsoft JhengHei" pitchFamily="34" charset="-120"/>
+                <a:latin typeface="Hiragino Sans" pitchFamily="34" charset="0"/>
+                <a:ea typeface="Hiragino Sans" pitchFamily="34" charset="-122"/>
+                <a:cs typeface="Hiragino Sans" pitchFamily="34" charset="-120"/>
               </a:rPr>
               <a:t>亞洲船務端
 </a:t>
@@ -3603,9 +3603,9 @@
                 <a:solidFill>
                   <a:srgbClr val="C7D6E4"/>
                 </a:solidFill>
-                <a:latin typeface="Microsoft JhengHei" pitchFamily="34" charset="0"/>
-                <a:ea typeface="Microsoft JhengHei" pitchFamily="34" charset="-122"/>
-                <a:cs typeface="Microsoft JhengHei" pitchFamily="34" charset="-120"/>
+                <a:latin typeface="Hiragino Sans" pitchFamily="34" charset="0"/>
+                <a:ea typeface="Hiragino Sans" pitchFamily="34" charset="-122"/>
+                <a:cs typeface="Hiragino Sans" pitchFamily="34" charset="-120"/>
               </a:rPr>
               <a:t>日 · 台 · 韓 · 星</a:t>
             </a:r>
@@ -3674,9 +3674,9 @@
                 <a:solidFill>
                   <a:srgbClr val="FFFFFF"/>
                 </a:solidFill>
-                <a:latin typeface="Microsoft JhengHei" pitchFamily="34" charset="0"/>
-                <a:ea typeface="Microsoft JhengHei" pitchFamily="34" charset="-122"/>
-                <a:cs typeface="Microsoft JhengHei" pitchFamily="34" charset="-120"/>
+                <a:latin typeface="Hiragino Sans" pitchFamily="34" charset="0"/>
+                <a:ea typeface="Hiragino Sans" pitchFamily="34" charset="-122"/>
+                <a:cs typeface="Hiragino Sans" pitchFamily="34" charset="-120"/>
               </a:rPr>
               <a:t>歐美船務端
 </a:t>
@@ -3692,9 +3692,9 @@
                 <a:solidFill>
                   <a:srgbClr val="C7D6E4"/>
                 </a:solidFill>
-                <a:latin typeface="Microsoft JhengHei" pitchFamily="34" charset="0"/>
-                <a:ea typeface="Microsoft JhengHei" pitchFamily="34" charset="-122"/>
-                <a:cs typeface="Microsoft JhengHei" pitchFamily="34" charset="-120"/>
+                <a:latin typeface="Hiragino Sans" pitchFamily="34" charset="0"/>
+                <a:ea typeface="Hiragino Sans" pitchFamily="34" charset="-122"/>
+                <a:cs typeface="Hiragino Sans" pitchFamily="34" charset="-120"/>
               </a:rPr>
               <a:t>EU · US</a:t>
             </a:r>
@@ -3785,9 +3785,9 @@
                 <a:solidFill>
                   <a:srgbClr val="FFFFFF"/>
                 </a:solidFill>
-                <a:latin typeface="Microsoft JhengHei" pitchFamily="34" charset="0"/>
-                <a:ea typeface="Microsoft JhengHei" pitchFamily="34" charset="-122"/>
-                <a:cs typeface="Microsoft JhengHei" pitchFamily="34" charset="-120"/>
+                <a:latin typeface="Hiragino Sans" pitchFamily="34" charset="0"/>
+                <a:ea typeface="Hiragino Sans" pitchFamily="34" charset="-122"/>
+                <a:cs typeface="Hiragino Sans" pitchFamily="34" charset="-120"/>
               </a:rPr>
               <a:t>R53</a:t>
             </a:r>
@@ -3827,9 +3827,9 @@
                 <a:solidFill>
                   <a:srgbClr val="FFFFFF"/>
                 </a:solidFill>
-                <a:latin typeface="Microsoft JhengHei" pitchFamily="34" charset="0"/>
-                <a:ea typeface="Microsoft JhengHei" pitchFamily="34" charset="-122"/>
-                <a:cs typeface="Microsoft JhengHei" pitchFamily="34" charset="-120"/>
+                <a:latin typeface="Hiragino Sans" pitchFamily="34" charset="0"/>
+                <a:ea typeface="Hiragino Sans" pitchFamily="34" charset="-122"/>
+                <a:cs typeface="Hiragino Sans" pitchFamily="34" charset="-120"/>
               </a:rPr>
               <a:t>Route 53
 </a:t>
@@ -3845,9 +3845,9 @@
                 <a:solidFill>
                   <a:srgbClr val="2A9D8F"/>
                 </a:solidFill>
-                <a:latin typeface="Microsoft JhengHei" pitchFamily="34" charset="0"/>
-                <a:ea typeface="Microsoft JhengHei" pitchFamily="34" charset="-122"/>
-                <a:cs typeface="Microsoft JhengHei" pitchFamily="34" charset="-120"/>
+                <a:latin typeface="Hiragino Sans" pitchFamily="34" charset="0"/>
+                <a:ea typeface="Hiragino Sans" pitchFamily="34" charset="-122"/>
+                <a:cs typeface="Hiragino Sans" pitchFamily="34" charset="-120"/>
               </a:rPr>
               <a:t>地理 / 延遲路由 · 健康檢查 failover</a:t>
             </a:r>
@@ -4097,9 +4097,9 @@
                 <a:solidFill>
                   <a:srgbClr val="FFFFFF"/>
                 </a:solidFill>
-                <a:latin typeface="Microsoft JhengHei" pitchFamily="34" charset="0"/>
-                <a:ea typeface="Microsoft JhengHei" pitchFamily="34" charset="-122"/>
-                <a:cs typeface="Microsoft JhengHei" pitchFamily="34" charset="-120"/>
+                <a:latin typeface="Hiragino Sans" pitchFamily="34" charset="0"/>
+                <a:ea typeface="Hiragino Sans" pitchFamily="34" charset="-122"/>
+                <a:cs typeface="Hiragino Sans" pitchFamily="34" charset="-120"/>
               </a:rPr>
               <a:t>區域 A</a:t>
             </a:r>
@@ -4111,9 +4111,9 @@
                 <a:solidFill>
                   <a:srgbClr val="C7D6E4"/>
                 </a:solidFill>
-                <a:latin typeface="Microsoft JhengHei" pitchFamily="34" charset="0"/>
-                <a:ea typeface="Microsoft JhengHei" pitchFamily="34" charset="-122"/>
-                <a:cs typeface="Microsoft JhengHei" pitchFamily="34" charset="-120"/>
+                <a:latin typeface="Hiragino Sans" pitchFamily="34" charset="0"/>
+                <a:ea typeface="Hiragino Sans" pitchFamily="34" charset="-122"/>
+                <a:cs typeface="Hiragino Sans" pitchFamily="34" charset="-120"/>
               </a:rPr>
               <a:t>　ap-northeast-1（東京）</a:t>
             </a:r>
@@ -4172,9 +4172,9 @@
                 <a:solidFill>
                   <a:srgbClr val="FFFFFF"/>
                 </a:solidFill>
-                <a:latin typeface="Microsoft JhengHei" pitchFamily="34" charset="0"/>
-                <a:ea typeface="Microsoft JhengHei" pitchFamily="34" charset="-122"/>
-                <a:cs typeface="Microsoft JhengHei" pitchFamily="34" charset="-120"/>
+                <a:latin typeface="Hiragino Sans" pitchFamily="34" charset="0"/>
+                <a:ea typeface="Hiragino Sans" pitchFamily="34" charset="-122"/>
+                <a:cs typeface="Hiragino Sans" pitchFamily="34" charset="-120"/>
               </a:rPr>
               <a:t>ACTIVE</a:t>
             </a:r>
@@ -4272,9 +4272,9 @@
                 <a:solidFill>
                   <a:srgbClr val="FFFFFF"/>
                 </a:solidFill>
-                <a:latin typeface="Microsoft JhengHei" pitchFamily="34" charset="0"/>
-                <a:ea typeface="Microsoft JhengHei" pitchFamily="34" charset="-122"/>
-                <a:cs typeface="Microsoft JhengHei" pitchFamily="34" charset="-120"/>
+                <a:latin typeface="Hiragino Sans" pitchFamily="34" charset="0"/>
+                <a:ea typeface="Hiragino Sans" pitchFamily="34" charset="-122"/>
+                <a:cs typeface="Hiragino Sans" pitchFamily="34" charset="-120"/>
               </a:rPr>
               <a:t>ALB</a:t>
             </a:r>
@@ -4314,9 +4314,9 @@
                 <a:solidFill>
                   <a:srgbClr val="FFFFFF"/>
                 </a:solidFill>
-                <a:latin typeface="Microsoft JhengHei" pitchFamily="34" charset="0"/>
-                <a:ea typeface="Microsoft JhengHei" pitchFamily="34" charset="-122"/>
-                <a:cs typeface="Microsoft JhengHei" pitchFamily="34" charset="-120"/>
+                <a:latin typeface="Hiragino Sans" pitchFamily="34" charset="0"/>
+                <a:ea typeface="Hiragino Sans" pitchFamily="34" charset="-122"/>
+                <a:cs typeface="Hiragino Sans" pitchFamily="34" charset="-120"/>
               </a:rPr>
               <a:t>ALB</a:t>
             </a:r>
@@ -4356,9 +4356,9 @@
                 <a:solidFill>
                   <a:srgbClr val="C7D6E4"/>
                 </a:solidFill>
-                <a:latin typeface="Microsoft JhengHei" pitchFamily="34" charset="0"/>
-                <a:ea typeface="Microsoft JhengHei" pitchFamily="34" charset="-122"/>
-                <a:cs typeface="Microsoft JhengHei" pitchFamily="34" charset="-120"/>
+                <a:latin typeface="Hiragino Sans" pitchFamily="34" charset="0"/>
+                <a:ea typeface="Hiragino Sans" pitchFamily="34" charset="-122"/>
+                <a:cs typeface="Hiragino Sans" pitchFamily="34" charset="-120"/>
               </a:rPr>
               <a:t>區域入口</a:t>
             </a:r>
@@ -4456,9 +4456,9 @@
                 <a:solidFill>
                   <a:srgbClr val="FFFFFF"/>
                 </a:solidFill>
-                <a:latin typeface="Microsoft JhengHei" pitchFamily="34" charset="0"/>
-                <a:ea typeface="Microsoft JhengHei" pitchFamily="34" charset="-122"/>
-                <a:cs typeface="Microsoft JhengHei" pitchFamily="34" charset="-120"/>
+                <a:latin typeface="Hiragino Sans" pitchFamily="34" charset="0"/>
+                <a:ea typeface="Hiragino Sans" pitchFamily="34" charset="-122"/>
+                <a:cs typeface="Hiragino Sans" pitchFamily="34" charset="-120"/>
               </a:rPr>
               <a:t>ECS</a:t>
             </a:r>
@@ -4498,9 +4498,9 @@
                 <a:solidFill>
                   <a:srgbClr val="FFFFFF"/>
                 </a:solidFill>
-                <a:latin typeface="Microsoft JhengHei" pitchFamily="34" charset="0"/>
-                <a:ea typeface="Microsoft JhengHei" pitchFamily="34" charset="-122"/>
-                <a:cs typeface="Microsoft JhengHei" pitchFamily="34" charset="-120"/>
+                <a:latin typeface="Hiragino Sans" pitchFamily="34" charset="0"/>
+                <a:ea typeface="Hiragino Sans" pitchFamily="34" charset="-122"/>
+                <a:cs typeface="Hiragino Sans" pitchFamily="34" charset="-120"/>
               </a:rPr>
               <a:t>ECS</a:t>
             </a:r>
@@ -4540,9 +4540,9 @@
                 <a:solidFill>
                   <a:srgbClr val="C7D6E4"/>
                 </a:solidFill>
-                <a:latin typeface="Microsoft JhengHei" pitchFamily="34" charset="0"/>
-                <a:ea typeface="Microsoft JhengHei" pitchFamily="34" charset="-122"/>
-                <a:cs typeface="Microsoft JhengHei" pitchFamily="34" charset="-120"/>
+                <a:latin typeface="Hiragino Sans" pitchFamily="34" charset="0"/>
+                <a:ea typeface="Hiragino Sans" pitchFamily="34" charset="-122"/>
+                <a:cs typeface="Hiragino Sans" pitchFamily="34" charset="-120"/>
               </a:rPr>
               <a:t>私有子網</a:t>
             </a:r>
@@ -4664,9 +4664,9 @@
                 <a:solidFill>
                   <a:srgbClr val="0A2540"/>
                 </a:solidFill>
-                <a:latin typeface="Microsoft JhengHei" pitchFamily="34" charset="0"/>
-                <a:ea typeface="Microsoft JhengHei" pitchFamily="34" charset="-122"/>
-                <a:cs typeface="Microsoft JhengHei" pitchFamily="34" charset="-120"/>
+                <a:latin typeface="Hiragino Sans" pitchFamily="34" charset="0"/>
+                <a:ea typeface="Hiragino Sans" pitchFamily="34" charset="-122"/>
+                <a:cs typeface="Hiragino Sans" pitchFamily="34" charset="-120"/>
               </a:rPr>
               <a:t>DDB</a:t>
             </a:r>
@@ -4706,9 +4706,9 @@
                 <a:solidFill>
                   <a:srgbClr val="FFFFFF"/>
                 </a:solidFill>
-                <a:latin typeface="Microsoft JhengHei" pitchFamily="34" charset="0"/>
-                <a:ea typeface="Microsoft JhengHei" pitchFamily="34" charset="-122"/>
-                <a:cs typeface="Microsoft JhengHei" pitchFamily="34" charset="-120"/>
+                <a:latin typeface="Hiragino Sans" pitchFamily="34" charset="0"/>
+                <a:ea typeface="Hiragino Sans" pitchFamily="34" charset="-122"/>
+                <a:cs typeface="Hiragino Sans" pitchFamily="34" charset="-120"/>
               </a:rPr>
               <a:t>DynamoDB</a:t>
             </a:r>
@@ -4748,9 +4748,9 @@
                 <a:solidFill>
                   <a:srgbClr val="C7D6E4"/>
                 </a:solidFill>
-                <a:latin typeface="Microsoft JhengHei" pitchFamily="34" charset="0"/>
-                <a:ea typeface="Microsoft JhengHei" pitchFamily="34" charset="-122"/>
-                <a:cs typeface="Microsoft JhengHei" pitchFamily="34" charset="-120"/>
+                <a:latin typeface="Hiragino Sans" pitchFamily="34" charset="0"/>
+                <a:ea typeface="Hiragino Sans" pitchFamily="34" charset="-122"/>
+                <a:cs typeface="Hiragino Sans" pitchFamily="34" charset="-120"/>
               </a:rPr>
               <a:t>Global Table</a:t>
             </a:r>
@@ -4848,9 +4848,9 @@
                 <a:solidFill>
                   <a:srgbClr val="FFFFFF"/>
                 </a:solidFill>
-                <a:latin typeface="Microsoft JhengHei" pitchFamily="34" charset="0"/>
-                <a:ea typeface="Microsoft JhengHei" pitchFamily="34" charset="-122"/>
-                <a:cs typeface="Microsoft JhengHei" pitchFamily="34" charset="-120"/>
+                <a:latin typeface="Hiragino Sans" pitchFamily="34" charset="0"/>
+                <a:ea typeface="Hiragino Sans" pitchFamily="34" charset="-122"/>
+                <a:cs typeface="Hiragino Sans" pitchFamily="34" charset="-120"/>
               </a:rPr>
               <a:t>S3</a:t>
             </a:r>
@@ -4890,9 +4890,9 @@
                 <a:solidFill>
                   <a:srgbClr val="FFFFFF"/>
                 </a:solidFill>
-                <a:latin typeface="Microsoft JhengHei" pitchFamily="34" charset="0"/>
-                <a:ea typeface="Microsoft JhengHei" pitchFamily="34" charset="-122"/>
-                <a:cs typeface="Microsoft JhengHei" pitchFamily="34" charset="-120"/>
+                <a:latin typeface="Hiragino Sans" pitchFamily="34" charset="0"/>
+                <a:ea typeface="Hiragino Sans" pitchFamily="34" charset="-122"/>
+                <a:cs typeface="Hiragino Sans" pitchFamily="34" charset="-120"/>
               </a:rPr>
               <a:t>S3</a:t>
             </a:r>
@@ -4932,9 +4932,9 @@
                 <a:solidFill>
                   <a:srgbClr val="C7D6E4"/>
                 </a:solidFill>
-                <a:latin typeface="Microsoft JhengHei" pitchFamily="34" charset="0"/>
-                <a:ea typeface="Microsoft JhengHei" pitchFamily="34" charset="-122"/>
-                <a:cs typeface="Microsoft JhengHei" pitchFamily="34" charset="-120"/>
+                <a:latin typeface="Hiragino Sans" pitchFamily="34" charset="0"/>
+                <a:ea typeface="Hiragino Sans" pitchFamily="34" charset="-122"/>
+                <a:cs typeface="Hiragino Sans" pitchFamily="34" charset="-120"/>
               </a:rPr>
               <a:t>跨區複製源</a:t>
             </a:r>
@@ -5042,9 +5042,9 @@
                 <a:solidFill>
                   <a:srgbClr val="FFFFFF"/>
                 </a:solidFill>
-                <a:latin typeface="Microsoft JhengHei" pitchFamily="34" charset="0"/>
-                <a:ea typeface="Microsoft JhengHei" pitchFamily="34" charset="-122"/>
-                <a:cs typeface="Microsoft JhengHei" pitchFamily="34" charset="-120"/>
+                <a:latin typeface="Hiragino Sans" pitchFamily="34" charset="0"/>
+                <a:ea typeface="Hiragino Sans" pitchFamily="34" charset="-122"/>
+                <a:cs typeface="Hiragino Sans" pitchFamily="34" charset="-120"/>
               </a:rPr>
               <a:t>區域 B</a:t>
             </a:r>
@@ -5056,9 +5056,9 @@
                 <a:solidFill>
                   <a:srgbClr val="C7D6E4"/>
                 </a:solidFill>
-                <a:latin typeface="Microsoft JhengHei" pitchFamily="34" charset="0"/>
-                <a:ea typeface="Microsoft JhengHei" pitchFamily="34" charset="-122"/>
-                <a:cs typeface="Microsoft JhengHei" pitchFamily="34" charset="-120"/>
+                <a:latin typeface="Hiragino Sans" pitchFamily="34" charset="0"/>
+                <a:ea typeface="Hiragino Sans" pitchFamily="34" charset="-122"/>
+                <a:cs typeface="Hiragino Sans" pitchFamily="34" charset="-120"/>
               </a:rPr>
               <a:t>　us-east-1（維吉尼亞）</a:t>
             </a:r>
@@ -5117,9 +5117,9 @@
                 <a:solidFill>
                   <a:srgbClr val="FFFFFF"/>
                 </a:solidFill>
-                <a:latin typeface="Microsoft JhengHei" pitchFamily="34" charset="0"/>
-                <a:ea typeface="Microsoft JhengHei" pitchFamily="34" charset="-122"/>
-                <a:cs typeface="Microsoft JhengHei" pitchFamily="34" charset="-120"/>
+                <a:latin typeface="Hiragino Sans" pitchFamily="34" charset="0"/>
+                <a:ea typeface="Hiragino Sans" pitchFamily="34" charset="-122"/>
+                <a:cs typeface="Hiragino Sans" pitchFamily="34" charset="-120"/>
               </a:rPr>
               <a:t>ACTIVE</a:t>
             </a:r>
@@ -5217,9 +5217,9 @@
                 <a:solidFill>
                   <a:srgbClr val="FFFFFF"/>
                 </a:solidFill>
-                <a:latin typeface="Microsoft JhengHei" pitchFamily="34" charset="0"/>
-                <a:ea typeface="Microsoft JhengHei" pitchFamily="34" charset="-122"/>
-                <a:cs typeface="Microsoft JhengHei" pitchFamily="34" charset="-120"/>
+                <a:latin typeface="Hiragino Sans" pitchFamily="34" charset="0"/>
+                <a:ea typeface="Hiragino Sans" pitchFamily="34" charset="-122"/>
+                <a:cs typeface="Hiragino Sans" pitchFamily="34" charset="-120"/>
               </a:rPr>
               <a:t>ALB</a:t>
             </a:r>
@@ -5259,9 +5259,9 @@
                 <a:solidFill>
                   <a:srgbClr val="FFFFFF"/>
                 </a:solidFill>
-                <a:latin typeface="Microsoft JhengHei" pitchFamily="34" charset="0"/>
-                <a:ea typeface="Microsoft JhengHei" pitchFamily="34" charset="-122"/>
-                <a:cs typeface="Microsoft JhengHei" pitchFamily="34" charset="-120"/>
+                <a:latin typeface="Hiragino Sans" pitchFamily="34" charset="0"/>
+                <a:ea typeface="Hiragino Sans" pitchFamily="34" charset="-122"/>
+                <a:cs typeface="Hiragino Sans" pitchFamily="34" charset="-120"/>
               </a:rPr>
               <a:t>ALB</a:t>
             </a:r>
@@ -5301,9 +5301,9 @@
                 <a:solidFill>
                   <a:srgbClr val="C7D6E4"/>
                 </a:solidFill>
-                <a:latin typeface="Microsoft JhengHei" pitchFamily="34" charset="0"/>
-                <a:ea typeface="Microsoft JhengHei" pitchFamily="34" charset="-122"/>
-                <a:cs typeface="Microsoft JhengHei" pitchFamily="34" charset="-120"/>
+                <a:latin typeface="Hiragino Sans" pitchFamily="34" charset="0"/>
+                <a:ea typeface="Hiragino Sans" pitchFamily="34" charset="-122"/>
+                <a:cs typeface="Hiragino Sans" pitchFamily="34" charset="-120"/>
               </a:rPr>
               <a:t>區域入口</a:t>
             </a:r>
@@ -5401,9 +5401,9 @@
                 <a:solidFill>
                   <a:srgbClr val="FFFFFF"/>
                 </a:solidFill>
-                <a:latin typeface="Microsoft JhengHei" pitchFamily="34" charset="0"/>
-                <a:ea typeface="Microsoft JhengHei" pitchFamily="34" charset="-122"/>
-                <a:cs typeface="Microsoft JhengHei" pitchFamily="34" charset="-120"/>
+                <a:latin typeface="Hiragino Sans" pitchFamily="34" charset="0"/>
+                <a:ea typeface="Hiragino Sans" pitchFamily="34" charset="-122"/>
+                <a:cs typeface="Hiragino Sans" pitchFamily="34" charset="-120"/>
               </a:rPr>
               <a:t>ECS</a:t>
             </a:r>
@@ -5443,9 +5443,9 @@
                 <a:solidFill>
                   <a:srgbClr val="FFFFFF"/>
                 </a:solidFill>
-                <a:latin typeface="Microsoft JhengHei" pitchFamily="34" charset="0"/>
-                <a:ea typeface="Microsoft JhengHei" pitchFamily="34" charset="-122"/>
-                <a:cs typeface="Microsoft JhengHei" pitchFamily="34" charset="-120"/>
+                <a:latin typeface="Hiragino Sans" pitchFamily="34" charset="0"/>
+                <a:ea typeface="Hiragino Sans" pitchFamily="34" charset="-122"/>
+                <a:cs typeface="Hiragino Sans" pitchFamily="34" charset="-120"/>
               </a:rPr>
               <a:t>ECS</a:t>
             </a:r>
@@ -5485,9 +5485,9 @@
                 <a:solidFill>
                   <a:srgbClr val="C7D6E4"/>
                 </a:solidFill>
-                <a:latin typeface="Microsoft JhengHei" pitchFamily="34" charset="0"/>
-                <a:ea typeface="Microsoft JhengHei" pitchFamily="34" charset="-122"/>
-                <a:cs typeface="Microsoft JhengHei" pitchFamily="34" charset="-120"/>
+                <a:latin typeface="Hiragino Sans" pitchFamily="34" charset="0"/>
+                <a:ea typeface="Hiragino Sans" pitchFamily="34" charset="-122"/>
+                <a:cs typeface="Hiragino Sans" pitchFamily="34" charset="-120"/>
               </a:rPr>
               <a:t>私有子網</a:t>
             </a:r>
@@ -5609,9 +5609,9 @@
                 <a:solidFill>
                   <a:srgbClr val="0A2540"/>
                 </a:solidFill>
-                <a:latin typeface="Microsoft JhengHei" pitchFamily="34" charset="0"/>
-                <a:ea typeface="Microsoft JhengHei" pitchFamily="34" charset="-122"/>
-                <a:cs typeface="Microsoft JhengHei" pitchFamily="34" charset="-120"/>
+                <a:latin typeface="Hiragino Sans" pitchFamily="34" charset="0"/>
+                <a:ea typeface="Hiragino Sans" pitchFamily="34" charset="-122"/>
+                <a:cs typeface="Hiragino Sans" pitchFamily="34" charset="-120"/>
               </a:rPr>
               <a:t>DDB</a:t>
             </a:r>
@@ -5651,9 +5651,9 @@
                 <a:solidFill>
                   <a:srgbClr val="FFFFFF"/>
                 </a:solidFill>
-                <a:latin typeface="Microsoft JhengHei" pitchFamily="34" charset="0"/>
-                <a:ea typeface="Microsoft JhengHei" pitchFamily="34" charset="-122"/>
-                <a:cs typeface="Microsoft JhengHei" pitchFamily="34" charset="-120"/>
+                <a:latin typeface="Hiragino Sans" pitchFamily="34" charset="0"/>
+                <a:ea typeface="Hiragino Sans" pitchFamily="34" charset="-122"/>
+                <a:cs typeface="Hiragino Sans" pitchFamily="34" charset="-120"/>
               </a:rPr>
               <a:t>DynamoDB</a:t>
             </a:r>
@@ -5693,9 +5693,9 @@
                 <a:solidFill>
                   <a:srgbClr val="C7D6E4"/>
                 </a:solidFill>
-                <a:latin typeface="Microsoft JhengHei" pitchFamily="34" charset="0"/>
-                <a:ea typeface="Microsoft JhengHei" pitchFamily="34" charset="-122"/>
-                <a:cs typeface="Microsoft JhengHei" pitchFamily="34" charset="-120"/>
+                <a:latin typeface="Hiragino Sans" pitchFamily="34" charset="0"/>
+                <a:ea typeface="Hiragino Sans" pitchFamily="34" charset="-122"/>
+                <a:cs typeface="Hiragino Sans" pitchFamily="34" charset="-120"/>
               </a:rPr>
               <a:t>Global Table</a:t>
             </a:r>
@@ -5793,9 +5793,9 @@
                 <a:solidFill>
                   <a:srgbClr val="FFFFFF"/>
                 </a:solidFill>
-                <a:latin typeface="Microsoft JhengHei" pitchFamily="34" charset="0"/>
-                <a:ea typeface="Microsoft JhengHei" pitchFamily="34" charset="-122"/>
-                <a:cs typeface="Microsoft JhengHei" pitchFamily="34" charset="-120"/>
+                <a:latin typeface="Hiragino Sans" pitchFamily="34" charset="0"/>
+                <a:ea typeface="Hiragino Sans" pitchFamily="34" charset="-122"/>
+                <a:cs typeface="Hiragino Sans" pitchFamily="34" charset="-120"/>
               </a:rPr>
               <a:t>S3</a:t>
             </a:r>
@@ -5835,9 +5835,9 @@
                 <a:solidFill>
                   <a:srgbClr val="FFFFFF"/>
                 </a:solidFill>
-                <a:latin typeface="Microsoft JhengHei" pitchFamily="34" charset="0"/>
-                <a:ea typeface="Microsoft JhengHei" pitchFamily="34" charset="-122"/>
-                <a:cs typeface="Microsoft JhengHei" pitchFamily="34" charset="-120"/>
+                <a:latin typeface="Hiragino Sans" pitchFamily="34" charset="0"/>
+                <a:ea typeface="Hiragino Sans" pitchFamily="34" charset="-122"/>
+                <a:cs typeface="Hiragino Sans" pitchFamily="34" charset="-120"/>
               </a:rPr>
               <a:t>S3</a:t>
             </a:r>
@@ -5877,9 +5877,9 @@
                 <a:solidFill>
                   <a:srgbClr val="C7D6E4"/>
                 </a:solidFill>
-                <a:latin typeface="Microsoft JhengHei" pitchFamily="34" charset="0"/>
-                <a:ea typeface="Microsoft JhengHei" pitchFamily="34" charset="-122"/>
-                <a:cs typeface="Microsoft JhengHei" pitchFamily="34" charset="-120"/>
+                <a:latin typeface="Hiragino Sans" pitchFamily="34" charset="0"/>
+                <a:ea typeface="Hiragino Sans" pitchFamily="34" charset="-122"/>
+                <a:cs typeface="Hiragino Sans" pitchFamily="34" charset="-120"/>
               </a:rPr>
               <a:t>跨區複製源</a:t>
             </a:r>
@@ -5945,9 +5945,9 @@
                 <a:solidFill>
                   <a:srgbClr val="F4A72B"/>
                 </a:solidFill>
-                <a:latin typeface="Microsoft JhengHei" pitchFamily="34" charset="0"/>
-                <a:ea typeface="Microsoft JhengHei" pitchFamily="34" charset="-122"/>
-                <a:cs typeface="Microsoft JhengHei" pitchFamily="34" charset="-120"/>
+                <a:latin typeface="Hiragino Sans" pitchFamily="34" charset="0"/>
+                <a:ea typeface="Hiragino Sans" pitchFamily="34" charset="-122"/>
+                <a:cs typeface="Hiragino Sans" pitchFamily="34" charset="-120"/>
               </a:rPr>
               <a:t>跨區複製 · 匯總</a:t>
             </a:r>
@@ -6009,9 +6009,9 @@
                 <a:solidFill>
                   <a:srgbClr val="F4A72B"/>
                 </a:solidFill>
-                <a:latin typeface="Microsoft JhengHei" pitchFamily="34" charset="0"/>
-                <a:ea typeface="Microsoft JhengHei" pitchFamily="34" charset="-122"/>
-                <a:cs typeface="Microsoft JhengHei" pitchFamily="34" charset="-120"/>
+                <a:latin typeface="Hiragino Sans" pitchFamily="34" charset="0"/>
+                <a:ea typeface="Hiragino Sans" pitchFamily="34" charset="-122"/>
+                <a:cs typeface="Hiragino Sans" pitchFamily="34" charset="-120"/>
               </a:rPr>
               <a:t>DynamoDB
 </a:t>
@@ -6027,9 +6027,9 @@
                 <a:solidFill>
                   <a:srgbClr val="C7D6E4"/>
                 </a:solidFill>
-                <a:latin typeface="Microsoft JhengHei" pitchFamily="34" charset="0"/>
-                <a:ea typeface="Microsoft JhengHei" pitchFamily="34" charset="-122"/>
-                <a:cs typeface="Microsoft JhengHei" pitchFamily="34" charset="-120"/>
+                <a:latin typeface="Hiragino Sans" pitchFamily="34" charset="0"/>
+                <a:ea typeface="Hiragino Sans" pitchFamily="34" charset="-122"/>
+                <a:cs typeface="Hiragino Sans" pitchFamily="34" charset="-120"/>
               </a:rPr>
               <a:t>Global Tables ⇄ 雙向</a:t>
             </a:r>
@@ -6091,9 +6091,9 @@
                 <a:solidFill>
                   <a:srgbClr val="2A9D8F"/>
                 </a:solidFill>
-                <a:latin typeface="Microsoft JhengHei" pitchFamily="34" charset="0"/>
-                <a:ea typeface="Microsoft JhengHei" pitchFamily="34" charset="-122"/>
-                <a:cs typeface="Microsoft JhengHei" pitchFamily="34" charset="-120"/>
+                <a:latin typeface="Hiragino Sans" pitchFamily="34" charset="0"/>
+                <a:ea typeface="Hiragino Sans" pitchFamily="34" charset="-122"/>
+                <a:cs typeface="Hiragino Sans" pitchFamily="34" charset="-120"/>
               </a:rPr>
               <a:t>S3 CRR
 </a:t>
@@ -6109,9 +6109,9 @@
                 <a:solidFill>
                   <a:srgbClr val="C7D6E4"/>
                 </a:solidFill>
-                <a:latin typeface="Microsoft JhengHei" pitchFamily="34" charset="0"/>
-                <a:ea typeface="Microsoft JhengHei" pitchFamily="34" charset="-122"/>
-                <a:cs typeface="Microsoft JhengHei" pitchFamily="34" charset="-120"/>
+                <a:latin typeface="Hiragino Sans" pitchFamily="34" charset="0"/>
+                <a:ea typeface="Hiragino Sans" pitchFamily="34" charset="-122"/>
+                <a:cs typeface="Hiragino Sans" pitchFamily="34" charset="-120"/>
               </a:rPr>
               <a:t>跨區複製備份</a:t>
             </a:r>
@@ -6173,9 +6173,9 @@
                 <a:solidFill>
                   <a:srgbClr val="C7D6E4"/>
                 </a:solidFill>
-                <a:latin typeface="Microsoft JhengHei" pitchFamily="34" charset="0"/>
-                <a:ea typeface="Microsoft JhengHei" pitchFamily="34" charset="-122"/>
-                <a:cs typeface="Microsoft JhengHei" pitchFamily="34" charset="-120"/>
+                <a:latin typeface="Hiragino Sans" pitchFamily="34" charset="0"/>
+                <a:ea typeface="Hiragino Sans" pitchFamily="34" charset="-122"/>
+                <a:cs typeface="Hiragino Sans" pitchFamily="34" charset="-120"/>
               </a:rPr>
               <a:t>EventBridge
 </a:t>
@@ -6191,9 +6191,9 @@
                 <a:solidFill>
                   <a:srgbClr val="C7D6E4"/>
                 </a:solidFill>
-                <a:latin typeface="Microsoft JhengHei" pitchFamily="34" charset="0"/>
-                <a:ea typeface="Microsoft JhengHei" pitchFamily="34" charset="-122"/>
-                <a:cs typeface="Microsoft JhengHei" pitchFamily="34" charset="-120"/>
+                <a:latin typeface="Hiragino Sans" pitchFamily="34" charset="0"/>
+                <a:ea typeface="Hiragino Sans" pitchFamily="34" charset="-122"/>
+                <a:cs typeface="Hiragino Sans" pitchFamily="34" charset="-120"/>
               </a:rPr>
               <a:t>跨區匯總</a:t>
             </a:r>
@@ -6255,9 +6255,9 @@
                 <a:solidFill>
                   <a:srgbClr val="E76F51"/>
                 </a:solidFill>
-                <a:latin typeface="Microsoft JhengHei" pitchFamily="34" charset="0"/>
-                <a:ea typeface="Microsoft JhengHei" pitchFamily="34" charset="-122"/>
-                <a:cs typeface="Microsoft JhengHei" pitchFamily="34" charset="-120"/>
+                <a:latin typeface="Hiragino Sans" pitchFamily="34" charset="0"/>
+                <a:ea typeface="Hiragino Sans" pitchFamily="34" charset="-122"/>
+                <a:cs typeface="Hiragino Sans" pitchFamily="34" charset="-120"/>
               </a:rPr>
               <a:t>SNS / SES
 </a:t>
@@ -6273,9 +6273,9 @@
                 <a:solidFill>
                   <a:srgbClr val="C7D6E4"/>
                 </a:solidFill>
-                <a:latin typeface="Microsoft JhengHei" pitchFamily="34" charset="0"/>
-                <a:ea typeface="Microsoft JhengHei" pitchFamily="34" charset="-122"/>
-                <a:cs typeface="Microsoft JhengHei" pitchFamily="34" charset="-120"/>
+                <a:latin typeface="Hiragino Sans" pitchFamily="34" charset="0"/>
+                <a:ea typeface="Hiragino Sans" pitchFamily="34" charset="-122"/>
+                <a:cs typeface="Hiragino Sans" pitchFamily="34" charset="-120"/>
               </a:rPr>
               <a:t>即時告警</a:t>
             </a:r>
@@ -6394,9 +6394,9 @@
                 <a:solidFill>
                   <a:srgbClr val="F4A72B"/>
                 </a:solidFill>
-                <a:latin typeface="Microsoft JhengHei" pitchFamily="34" charset="0"/>
-                <a:ea typeface="Microsoft JhengHei" pitchFamily="34" charset="-122"/>
-                <a:cs typeface="Microsoft JhengHei" pitchFamily="34" charset="-120"/>
+                <a:latin typeface="Hiragino Sans" pitchFamily="34" charset="0"/>
+                <a:ea typeface="Hiragino Sans" pitchFamily="34" charset="-122"/>
+                <a:cs typeface="Hiragino Sans" pitchFamily="34" charset="-120"/>
               </a:rPr>
               <a:t>◆ 一區故障　</a:t>
             </a:r>
@@ -6411,9 +6411,9 @@
                 <a:solidFill>
                   <a:srgbClr val="FFFFFF"/>
                 </a:solidFill>
-                <a:latin typeface="Microsoft JhengHei" pitchFamily="34" charset="0"/>
-                <a:ea typeface="Microsoft JhengHei" pitchFamily="34" charset="-122"/>
-                <a:cs typeface="Microsoft JhengHei" pitchFamily="34" charset="-120"/>
+                <a:latin typeface="Hiragino Sans" pitchFamily="34" charset="0"/>
+                <a:ea typeface="Hiragino Sans" pitchFamily="34" charset="-122"/>
+                <a:cs typeface="Hiragino Sans" pitchFamily="34" charset="-120"/>
               </a:rPr>
               <a:t>健康檢查失敗 → Route 53 自動剔除故障區、流量全導健康區；DynamoDB Global Tables 已雙向同步、S3 CRR 已備份 → RPO≈0、資料不丟、對外服務不中斷。</a:t>
             </a:r>
@@ -6635,9 +6635,9 @@
                 <a:solidFill>
                   <a:srgbClr val="FFFFFF"/>
                 </a:solidFill>
-                <a:latin typeface="Microsoft JhengHei" pitchFamily="34" charset="0"/>
-                <a:ea typeface="Microsoft JhengHei" pitchFamily="34" charset="-122"/>
-                <a:cs typeface="Microsoft JhengHei" pitchFamily="34" charset="-120"/>
+                <a:latin typeface="Hiragino Sans" pitchFamily="34" charset="0"/>
+                <a:ea typeface="Hiragino Sans" pitchFamily="34" charset="-122"/>
+                <a:cs typeface="Hiragino Sans" pitchFamily="34" charset="-120"/>
               </a:rPr>
               <a:t>11</a:t>
             </a:r>
@@ -6649,9 +6649,9 @@
                 <a:solidFill>
                   <a:srgbClr val="8FA8BD"/>
                 </a:solidFill>
-                <a:latin typeface="Microsoft JhengHei" pitchFamily="34" charset="0"/>
-                <a:ea typeface="Microsoft JhengHei" pitchFamily="34" charset="-122"/>
-                <a:cs typeface="Microsoft JhengHei" pitchFamily="34" charset="-120"/>
+                <a:latin typeface="Hiragino Sans" pitchFamily="34" charset="0"/>
+                <a:ea typeface="Hiragino Sans" pitchFamily="34" charset="-122"/>
+                <a:cs typeface="Hiragino Sans" pitchFamily="34" charset="-120"/>
               </a:rPr>
               <a:t>  /  15</a:t>
             </a:r>
@@ -6688,9 +6688,9 @@
                 <a:solidFill>
                   <a:srgbClr val="F4A72B"/>
                 </a:solidFill>
-                <a:latin typeface="Microsoft JhengHei" pitchFamily="34" charset="0"/>
-                <a:ea typeface="Microsoft JhengHei" pitchFamily="34" charset="-122"/>
-                <a:cs typeface="Microsoft JhengHei" pitchFamily="34" charset="-120"/>
+                <a:latin typeface="Hiragino Sans" pitchFamily="34" charset="0"/>
+                <a:ea typeface="Hiragino Sans" pitchFamily="34" charset="-122"/>
+                <a:cs typeface="Hiragino Sans" pitchFamily="34" charset="-120"/>
               </a:rPr>
               <a:t>SIDE-BY-SIDE</a:t>
             </a:r>
@@ -6727,9 +6727,9 @@
                 <a:solidFill>
                   <a:srgbClr val="FFFFFF"/>
                 </a:solidFill>
-                <a:latin typeface="Microsoft JhengHei" pitchFamily="34" charset="0"/>
-                <a:ea typeface="Microsoft JhengHei" pitchFamily="34" charset="-122"/>
-                <a:cs typeface="Microsoft JhengHei" pitchFamily="34" charset="-120"/>
+                <a:latin typeface="Hiragino Sans" pitchFamily="34" charset="0"/>
+                <a:ea typeface="Hiragino Sans" pitchFamily="34" charset="-122"/>
+                <a:cs typeface="Hiragino Sans" pitchFamily="34" charset="-120"/>
               </a:rPr>
               <a:t>五案比較 — 現行方案 A 為出賽基準線</a:t>
             </a:r>
@@ -6782,16 +6782,16 @@
                           <a:solidFill>
                             <a:srgbClr val="FFFFFF"/>
                           </a:solidFill>
-                          <a:latin typeface="Microsoft JhengHei" pitchFamily="34" charset="0"/>
-                          <a:ea typeface="Microsoft JhengHei" pitchFamily="34" charset="-122"/>
-                          <a:cs typeface="Microsoft JhengHei" pitchFamily="34" charset="-120"/>
+                          <a:latin typeface="Hiragino Sans" pitchFamily="34" charset="0"/>
+                          <a:ea typeface="Hiragino Sans" pitchFamily="34" charset="-122"/>
+                          <a:cs typeface="Hiragino Sans" pitchFamily="34" charset="-120"/>
                         </a:rPr>
                         <a:t>方案</a:t>
                       </a:r>
                       <a:endParaRPr lang="en-US" sz="1150" dirty="0">
-                        <a:latin typeface="Microsoft JhengHei" charset="0"/>
-                        <a:ea typeface="Microsoft JhengHei" charset="0"/>
-                        <a:cs typeface="Microsoft JhengHei" charset="0"/>
+                        <a:latin typeface="Hiragino Sans" charset="0"/>
+                        <a:ea typeface="Hiragino Sans" charset="0"/>
+                        <a:cs typeface="Hiragino Sans" charset="0"/>
                       </a:endParaRPr>
                     </a:p>
                   </a:txBody>
@@ -6850,16 +6850,16 @@
                           <a:solidFill>
                             <a:srgbClr val="FFFFFF"/>
                           </a:solidFill>
-                          <a:latin typeface="Microsoft JhengHei" pitchFamily="34" charset="0"/>
-                          <a:ea typeface="Microsoft JhengHei" pitchFamily="34" charset="-122"/>
-                          <a:cs typeface="Microsoft JhengHei" pitchFamily="34" charset="-120"/>
+                          <a:latin typeface="Hiragino Sans" pitchFamily="34" charset="0"/>
+                          <a:ea typeface="Hiragino Sans" pitchFamily="34" charset="-122"/>
+                          <a:cs typeface="Hiragino Sans" pitchFamily="34" charset="-120"/>
                         </a:rPr>
                         <a:t>運算</a:t>
                       </a:r>
                       <a:endParaRPr lang="en-US" sz="1150" dirty="0">
-                        <a:latin typeface="Microsoft JhengHei" charset="0"/>
-                        <a:ea typeface="Microsoft JhengHei" charset="0"/>
-                        <a:cs typeface="Microsoft JhengHei" charset="0"/>
+                        <a:latin typeface="Hiragino Sans" charset="0"/>
+                        <a:ea typeface="Hiragino Sans" charset="0"/>
+                        <a:cs typeface="Hiragino Sans" charset="0"/>
                       </a:endParaRPr>
                     </a:p>
                   </a:txBody>
@@ -6918,16 +6918,16 @@
                           <a:solidFill>
                             <a:srgbClr val="FFFFFF"/>
                           </a:solidFill>
-                          <a:latin typeface="Microsoft JhengHei" pitchFamily="34" charset="0"/>
-                          <a:ea typeface="Microsoft JhengHei" pitchFamily="34" charset="-122"/>
-                          <a:cs typeface="Microsoft JhengHei" pitchFamily="34" charset="-120"/>
+                          <a:latin typeface="Hiragino Sans" pitchFamily="34" charset="0"/>
+                          <a:ea typeface="Hiragino Sans" pitchFamily="34" charset="-122"/>
+                          <a:cs typeface="Hiragino Sans" pitchFamily="34" charset="-120"/>
                         </a:rPr>
                         <a:t>入口 / URL</a:t>
                       </a:r>
                       <a:endParaRPr lang="en-US" sz="1150" dirty="0">
-                        <a:latin typeface="Microsoft JhengHei" charset="0"/>
-                        <a:ea typeface="Microsoft JhengHei" charset="0"/>
-                        <a:cs typeface="Microsoft JhengHei" charset="0"/>
+                        <a:latin typeface="Hiragino Sans" charset="0"/>
+                        <a:ea typeface="Hiragino Sans" charset="0"/>
+                        <a:cs typeface="Hiragino Sans" charset="0"/>
                       </a:endParaRPr>
                     </a:p>
                   </a:txBody>
@@ -6986,16 +6986,16 @@
                           <a:solidFill>
                             <a:srgbClr val="FFFFFF"/>
                           </a:solidFill>
-                          <a:latin typeface="Microsoft JhengHei" pitchFamily="34" charset="0"/>
-                          <a:ea typeface="Microsoft JhengHei" pitchFamily="34" charset="-122"/>
-                          <a:cs typeface="Microsoft JhengHei" pitchFamily="34" charset="-120"/>
+                          <a:latin typeface="Hiragino Sans" pitchFamily="34" charset="0"/>
+                          <a:ea typeface="Hiragino Sans" pitchFamily="34" charset="-122"/>
+                          <a:cs typeface="Hiragino Sans" pitchFamily="34" charset="-120"/>
                         </a:rPr>
                         <a:t>閒置成本</a:t>
                       </a:r>
                       <a:endParaRPr lang="en-US" sz="1150" dirty="0">
-                        <a:latin typeface="Microsoft JhengHei" charset="0"/>
-                        <a:ea typeface="Microsoft JhengHei" charset="0"/>
-                        <a:cs typeface="Microsoft JhengHei" charset="0"/>
+                        <a:latin typeface="Hiragino Sans" charset="0"/>
+                        <a:ea typeface="Hiragino Sans" charset="0"/>
+                        <a:cs typeface="Hiragino Sans" charset="0"/>
                       </a:endParaRPr>
                     </a:p>
                   </a:txBody>
@@ -7054,16 +7054,16 @@
                           <a:solidFill>
                             <a:srgbClr val="FFFFFF"/>
                           </a:solidFill>
-                          <a:latin typeface="Microsoft JhengHei" pitchFamily="34" charset="0"/>
-                          <a:ea typeface="Microsoft JhengHei" pitchFamily="34" charset="-122"/>
-                          <a:cs typeface="Microsoft JhengHei" pitchFamily="34" charset="-120"/>
+                          <a:latin typeface="Hiragino Sans" pitchFamily="34" charset="0"/>
+                          <a:ea typeface="Hiragino Sans" pitchFamily="34" charset="-122"/>
+                          <a:cs typeface="Hiragino Sans" pitchFamily="34" charset="-120"/>
                         </a:rPr>
                         <a:t>維運</a:t>
                       </a:r>
                       <a:endParaRPr lang="en-US" sz="1150" dirty="0">
-                        <a:latin typeface="Microsoft JhengHei" charset="0"/>
-                        <a:ea typeface="Microsoft JhengHei" charset="0"/>
-                        <a:cs typeface="Microsoft JhengHei" charset="0"/>
+                        <a:latin typeface="Hiragino Sans" charset="0"/>
+                        <a:ea typeface="Hiragino Sans" charset="0"/>
+                        <a:cs typeface="Hiragino Sans" charset="0"/>
                       </a:endParaRPr>
                     </a:p>
                   </a:txBody>
@@ -7122,16 +7122,16 @@
                           <a:solidFill>
                             <a:srgbClr val="FFFFFF"/>
                           </a:solidFill>
-                          <a:latin typeface="Microsoft JhengHei" pitchFamily="34" charset="0"/>
-                          <a:ea typeface="Microsoft JhengHei" pitchFamily="34" charset="-122"/>
-                          <a:cs typeface="Microsoft JhengHei" pitchFamily="34" charset="-120"/>
+                          <a:latin typeface="Hiragino Sans" pitchFamily="34" charset="0"/>
+                          <a:ea typeface="Hiragino Sans" pitchFamily="34" charset="-122"/>
+                          <a:cs typeface="Hiragino Sans" pitchFamily="34" charset="-120"/>
                         </a:rPr>
                         <a:t>冷啟</a:t>
                       </a:r>
                       <a:endParaRPr lang="en-US" sz="1150" dirty="0">
-                        <a:latin typeface="Microsoft JhengHei" charset="0"/>
-                        <a:ea typeface="Microsoft JhengHei" charset="0"/>
-                        <a:cs typeface="Microsoft JhengHei" charset="0"/>
+                        <a:latin typeface="Hiragino Sans" charset="0"/>
+                        <a:ea typeface="Hiragino Sans" charset="0"/>
+                        <a:cs typeface="Hiragino Sans" charset="0"/>
                       </a:endParaRPr>
                     </a:p>
                   </a:txBody>
@@ -7190,16 +7190,16 @@
                           <a:solidFill>
                             <a:srgbClr val="FFFFFF"/>
                           </a:solidFill>
-                          <a:latin typeface="Microsoft JhengHei" pitchFamily="34" charset="0"/>
-                          <a:ea typeface="Microsoft JhengHei" pitchFamily="34" charset="-122"/>
-                          <a:cs typeface="Microsoft JhengHei" pitchFamily="34" charset="-120"/>
+                          <a:latin typeface="Hiragino Sans" pitchFamily="34" charset="0"/>
+                          <a:ea typeface="Hiragino Sans" pitchFamily="34" charset="-122"/>
+                          <a:cs typeface="Hiragino Sans" pitchFamily="34" charset="-120"/>
                         </a:rPr>
                         <a:t>黑客松適配</a:t>
                       </a:r>
                       <a:endParaRPr lang="en-US" sz="1150" dirty="0">
-                        <a:latin typeface="Microsoft JhengHei" charset="0"/>
-                        <a:ea typeface="Microsoft JhengHei" charset="0"/>
-                        <a:cs typeface="Microsoft JhengHei" charset="0"/>
+                        <a:latin typeface="Hiragino Sans" charset="0"/>
+                        <a:ea typeface="Hiragino Sans" charset="0"/>
+                        <a:cs typeface="Hiragino Sans" charset="0"/>
                       </a:endParaRPr>
                     </a:p>
                   </a:txBody>
@@ -7260,16 +7260,16 @@
                           <a:solidFill>
                             <a:srgbClr val="FFFFFF"/>
                           </a:solidFill>
-                          <a:latin typeface="Microsoft JhengHei" pitchFamily="34" charset="0"/>
-                          <a:ea typeface="Microsoft JhengHei" pitchFamily="34" charset="-122"/>
-                          <a:cs typeface="Microsoft JhengHei" pitchFamily="34" charset="-120"/>
+                          <a:latin typeface="Hiragino Sans" pitchFamily="34" charset="0"/>
+                          <a:ea typeface="Hiragino Sans" pitchFamily="34" charset="-122"/>
+                          <a:cs typeface="Hiragino Sans" pitchFamily="34" charset="-120"/>
                         </a:rPr>
                         <a:t>A 現行 ★</a:t>
                       </a:r>
                       <a:endParaRPr lang="en-US" sz="1050" dirty="0">
-                        <a:latin typeface="Microsoft JhengHei" charset="0"/>
-                        <a:ea typeface="Microsoft JhengHei" charset="0"/>
-                        <a:cs typeface="Microsoft JhengHei" charset="0"/>
+                        <a:latin typeface="Hiragino Sans" charset="0"/>
+                        <a:ea typeface="Hiragino Sans" charset="0"/>
+                        <a:cs typeface="Hiragino Sans" charset="0"/>
                       </a:endParaRPr>
                     </a:p>
                   </a:txBody>
@@ -7328,16 +7328,16 @@
                           <a:solidFill>
                             <a:srgbClr val="C7D6E4"/>
                           </a:solidFill>
-                          <a:latin typeface="Microsoft JhengHei" pitchFamily="34" charset="0"/>
-                          <a:ea typeface="Microsoft JhengHei" pitchFamily="34" charset="-122"/>
-                          <a:cs typeface="Microsoft JhengHei" pitchFamily="34" charset="-120"/>
+                          <a:latin typeface="Hiragino Sans" pitchFamily="34" charset="0"/>
+                          <a:ea typeface="Hiragino Sans" pitchFamily="34" charset="-122"/>
+                          <a:cs typeface="Hiragino Sans" pitchFamily="34" charset="-120"/>
                         </a:rPr>
                         <a:t>ECS Fargate 容器常駐</a:t>
                       </a:r>
                       <a:endParaRPr lang="en-US" sz="1050" dirty="0">
-                        <a:latin typeface="Microsoft JhengHei" charset="0"/>
-                        <a:ea typeface="Microsoft JhengHei" charset="0"/>
-                        <a:cs typeface="Microsoft JhengHei" charset="0"/>
+                        <a:latin typeface="Hiragino Sans" charset="0"/>
+                        <a:ea typeface="Hiragino Sans" charset="0"/>
+                        <a:cs typeface="Hiragino Sans" charset="0"/>
                       </a:endParaRPr>
                     </a:p>
                   </a:txBody>
@@ -7396,16 +7396,16 @@
                           <a:solidFill>
                             <a:srgbClr val="C7D6E4"/>
                           </a:solidFill>
-                          <a:latin typeface="Microsoft JhengHei" pitchFamily="34" charset="0"/>
-                          <a:ea typeface="Microsoft JhengHei" pitchFamily="34" charset="-122"/>
-                          <a:cs typeface="Microsoft JhengHei" pitchFamily="34" charset="-120"/>
+                          <a:latin typeface="Hiragino Sans" pitchFamily="34" charset="0"/>
+                          <a:ea typeface="Hiragino Sans" pitchFamily="34" charset="-122"/>
+                          <a:cs typeface="Hiragino Sans" pitchFamily="34" charset="-120"/>
                         </a:rPr>
                         <a:t>ALB 靜態 URL</a:t>
                       </a:r>
                       <a:endParaRPr lang="en-US" sz="1050" dirty="0">
-                        <a:latin typeface="Microsoft JhengHei" charset="0"/>
-                        <a:ea typeface="Microsoft JhengHei" charset="0"/>
-                        <a:cs typeface="Microsoft JhengHei" charset="0"/>
+                        <a:latin typeface="Hiragino Sans" charset="0"/>
+                        <a:ea typeface="Hiragino Sans" charset="0"/>
+                        <a:cs typeface="Hiragino Sans" charset="0"/>
                       </a:endParaRPr>
                     </a:p>
                   </a:txBody>
@@ -7464,16 +7464,16 @@
                           <a:solidFill>
                             <a:srgbClr val="C7D6E4"/>
                           </a:solidFill>
-                          <a:latin typeface="Microsoft JhengHei" pitchFamily="34" charset="0"/>
-                          <a:ea typeface="Microsoft JhengHei" pitchFamily="34" charset="-122"/>
-                          <a:cs typeface="Microsoft JhengHei" pitchFamily="34" charset="-120"/>
+                          <a:latin typeface="Hiragino Sans" pitchFamily="34" charset="0"/>
+                          <a:ea typeface="Hiragino Sans" pitchFamily="34" charset="-122"/>
+                          <a:cs typeface="Hiragino Sans" pitchFamily="34" charset="-120"/>
                         </a:rPr>
                         <a:t>低（小時費）</a:t>
                       </a:r>
                       <a:endParaRPr lang="en-US" sz="1050" dirty="0">
-                        <a:latin typeface="Microsoft JhengHei" charset="0"/>
-                        <a:ea typeface="Microsoft JhengHei" charset="0"/>
-                        <a:cs typeface="Microsoft JhengHei" charset="0"/>
+                        <a:latin typeface="Hiragino Sans" charset="0"/>
+                        <a:ea typeface="Hiragino Sans" charset="0"/>
+                        <a:cs typeface="Hiragino Sans" charset="0"/>
                       </a:endParaRPr>
                     </a:p>
                   </a:txBody>
@@ -7532,16 +7532,16 @@
                           <a:solidFill>
                             <a:srgbClr val="C7D6E4"/>
                           </a:solidFill>
-                          <a:latin typeface="Microsoft JhengHei" pitchFamily="34" charset="0"/>
-                          <a:ea typeface="Microsoft JhengHei" pitchFamily="34" charset="-122"/>
-                          <a:cs typeface="Microsoft JhengHei" pitchFamily="34" charset="-120"/>
+                          <a:latin typeface="Hiragino Sans" pitchFamily="34" charset="0"/>
+                          <a:ea typeface="Hiragino Sans" pitchFamily="34" charset="-122"/>
+                          <a:cs typeface="Hiragino Sans" pitchFamily="34" charset="-120"/>
                         </a:rPr>
                         <a:t>中（VPC/IAM）</a:t>
                       </a:r>
                       <a:endParaRPr lang="en-US" sz="1050" dirty="0">
-                        <a:latin typeface="Microsoft JhengHei" charset="0"/>
-                        <a:ea typeface="Microsoft JhengHei" charset="0"/>
-                        <a:cs typeface="Microsoft JhengHei" charset="0"/>
+                        <a:latin typeface="Hiragino Sans" charset="0"/>
+                        <a:ea typeface="Hiragino Sans" charset="0"/>
+                        <a:cs typeface="Hiragino Sans" charset="0"/>
                       </a:endParaRPr>
                     </a:p>
                   </a:txBody>
@@ -7600,16 +7600,16 @@
                           <a:solidFill>
                             <a:srgbClr val="C7D6E4"/>
                           </a:solidFill>
-                          <a:latin typeface="Microsoft JhengHei" pitchFamily="34" charset="0"/>
-                          <a:ea typeface="Microsoft JhengHei" pitchFamily="34" charset="-122"/>
-                          <a:cs typeface="Microsoft JhengHei" pitchFamily="34" charset="-120"/>
+                          <a:latin typeface="Hiragino Sans" pitchFamily="34" charset="0"/>
+                          <a:ea typeface="Hiragino Sans" pitchFamily="34" charset="-122"/>
+                          <a:cs typeface="Hiragino Sans" pitchFamily="34" charset="-120"/>
                         </a:rPr>
                         <a:t>無冷啟（常駐）</a:t>
                       </a:r>
                       <a:endParaRPr lang="en-US" sz="1050" dirty="0">
-                        <a:latin typeface="Microsoft JhengHei" charset="0"/>
-                        <a:ea typeface="Microsoft JhengHei" charset="0"/>
-                        <a:cs typeface="Microsoft JhengHei" charset="0"/>
+                        <a:latin typeface="Hiragino Sans" charset="0"/>
+                        <a:ea typeface="Hiragino Sans" charset="0"/>
+                        <a:cs typeface="Hiragino Sans" charset="0"/>
                       </a:endParaRPr>
                     </a:p>
                   </a:txBody>
@@ -7668,16 +7668,16 @@
                           <a:solidFill>
                             <a:srgbClr val="2A9D8F"/>
                           </a:solidFill>
-                          <a:latin typeface="Microsoft JhengHei" pitchFamily="34" charset="0"/>
-                          <a:ea typeface="Microsoft JhengHei" pitchFamily="34" charset="-122"/>
-                          <a:cs typeface="Microsoft JhengHei" pitchFamily="34" charset="-120"/>
+                          <a:latin typeface="Hiragino Sans" pitchFamily="34" charset="0"/>
+                          <a:ea typeface="Hiragino Sans" pitchFamily="34" charset="-122"/>
+                          <a:cs typeface="Hiragino Sans" pitchFamily="34" charset="-120"/>
                         </a:rPr>
                         <a:t>★ 最高 · 已上線</a:t>
                       </a:r>
                       <a:endParaRPr lang="en-US" sz="1050" dirty="0">
-                        <a:latin typeface="Microsoft JhengHei" charset="0"/>
-                        <a:ea typeface="Microsoft JhengHei" charset="0"/>
-                        <a:cs typeface="Microsoft JhengHei" charset="0"/>
+                        <a:latin typeface="Hiragino Sans" charset="0"/>
+                        <a:ea typeface="Hiragino Sans" charset="0"/>
+                        <a:cs typeface="Hiragino Sans" charset="0"/>
                       </a:endParaRPr>
                     </a:p>
                   </a:txBody>
@@ -7738,16 +7738,16 @@
                           <a:solidFill>
                             <a:srgbClr val="FFFFFF"/>
                           </a:solidFill>
-                          <a:latin typeface="Microsoft JhengHei" pitchFamily="34" charset="0"/>
-                          <a:ea typeface="Microsoft JhengHei" pitchFamily="34" charset="-122"/>
-                          <a:cs typeface="Microsoft JhengHei" pitchFamily="34" charset="-120"/>
+                          <a:latin typeface="Hiragino Sans" pitchFamily="34" charset="0"/>
+                          <a:ea typeface="Hiragino Sans" pitchFamily="34" charset="-122"/>
+                          <a:cs typeface="Hiragino Sans" pitchFamily="34" charset="-120"/>
                         </a:rPr>
                         <a:t>B Serverless</a:t>
                       </a:r>
                       <a:endParaRPr lang="en-US" sz="1050" dirty="0">
-                        <a:latin typeface="Microsoft JhengHei" charset="0"/>
-                        <a:ea typeface="Microsoft JhengHei" charset="0"/>
-                        <a:cs typeface="Microsoft JhengHei" charset="0"/>
+                        <a:latin typeface="Hiragino Sans" charset="0"/>
+                        <a:ea typeface="Hiragino Sans" charset="0"/>
+                        <a:cs typeface="Hiragino Sans" charset="0"/>
                       </a:endParaRPr>
                     </a:p>
                   </a:txBody>
@@ -7806,16 +7806,16 @@
                           <a:solidFill>
                             <a:srgbClr val="C7D6E4"/>
                           </a:solidFill>
-                          <a:latin typeface="Microsoft JhengHei" pitchFamily="34" charset="0"/>
-                          <a:ea typeface="Microsoft JhengHei" pitchFamily="34" charset="-122"/>
-                          <a:cs typeface="Microsoft JhengHei" pitchFamily="34" charset="-120"/>
+                          <a:latin typeface="Hiragino Sans" pitchFamily="34" charset="0"/>
+                          <a:ea typeface="Hiragino Sans" pitchFamily="34" charset="-122"/>
+                          <a:cs typeface="Hiragino Sans" pitchFamily="34" charset="-120"/>
                         </a:rPr>
                         <a:t>Lambda 按呼叫</a:t>
                       </a:r>
                       <a:endParaRPr lang="en-US" sz="1050" dirty="0">
-                        <a:latin typeface="Microsoft JhengHei" charset="0"/>
-                        <a:ea typeface="Microsoft JhengHei" charset="0"/>
-                        <a:cs typeface="Microsoft JhengHei" charset="0"/>
+                        <a:latin typeface="Hiragino Sans" charset="0"/>
+                        <a:ea typeface="Hiragino Sans" charset="0"/>
+                        <a:cs typeface="Hiragino Sans" charset="0"/>
                       </a:endParaRPr>
                     </a:p>
                   </a:txBody>
@@ -7874,16 +7874,16 @@
                           <a:solidFill>
                             <a:srgbClr val="C7D6E4"/>
                           </a:solidFill>
-                          <a:latin typeface="Microsoft JhengHei" pitchFamily="34" charset="0"/>
-                          <a:ea typeface="Microsoft JhengHei" pitchFamily="34" charset="-122"/>
-                          <a:cs typeface="Microsoft JhengHei" pitchFamily="34" charset="-120"/>
+                          <a:latin typeface="Hiragino Sans" pitchFamily="34" charset="0"/>
+                          <a:ea typeface="Hiragino Sans" pitchFamily="34" charset="-122"/>
+                          <a:cs typeface="Hiragino Sans" pitchFamily="34" charset="-120"/>
                         </a:rPr>
                         <a:t>API Gateway</a:t>
                       </a:r>
                       <a:endParaRPr lang="en-US" sz="1050" dirty="0">
-                        <a:latin typeface="Microsoft JhengHei" charset="0"/>
-                        <a:ea typeface="Microsoft JhengHei" charset="0"/>
-                        <a:cs typeface="Microsoft JhengHei" charset="0"/>
+                        <a:latin typeface="Hiragino Sans" charset="0"/>
+                        <a:ea typeface="Hiragino Sans" charset="0"/>
+                        <a:cs typeface="Hiragino Sans" charset="0"/>
                       </a:endParaRPr>
                     </a:p>
                   </a:txBody>
@@ -7942,16 +7942,16 @@
                           <a:solidFill>
                             <a:srgbClr val="2A9D8F"/>
                           </a:solidFill>
-                          <a:latin typeface="Microsoft JhengHei" pitchFamily="34" charset="0"/>
-                          <a:ea typeface="Microsoft JhengHei" pitchFamily="34" charset="-122"/>
-                          <a:cs typeface="Microsoft JhengHei" pitchFamily="34" charset="-120"/>
+                          <a:latin typeface="Hiragino Sans" pitchFamily="34" charset="0"/>
+                          <a:ea typeface="Hiragino Sans" pitchFamily="34" charset="-122"/>
+                          <a:cs typeface="Hiragino Sans" pitchFamily="34" charset="-120"/>
                         </a:rPr>
                         <a:t>極低（近零）</a:t>
                       </a:r>
                       <a:endParaRPr lang="en-US" sz="1050" dirty="0">
-                        <a:latin typeface="Microsoft JhengHei" charset="0"/>
-                        <a:ea typeface="Microsoft JhengHei" charset="0"/>
-                        <a:cs typeface="Microsoft JhengHei" charset="0"/>
+                        <a:latin typeface="Hiragino Sans" charset="0"/>
+                        <a:ea typeface="Hiragino Sans" charset="0"/>
+                        <a:cs typeface="Hiragino Sans" charset="0"/>
                       </a:endParaRPr>
                     </a:p>
                   </a:txBody>
@@ -8010,16 +8010,16 @@
                           <a:solidFill>
                             <a:srgbClr val="C7D6E4"/>
                           </a:solidFill>
-                          <a:latin typeface="Microsoft JhengHei" pitchFamily="34" charset="0"/>
-                          <a:ea typeface="Microsoft JhengHei" pitchFamily="34" charset="-122"/>
-                          <a:cs typeface="Microsoft JhengHei" pitchFamily="34" charset="-120"/>
+                          <a:latin typeface="Hiragino Sans" pitchFamily="34" charset="0"/>
+                          <a:ea typeface="Hiragino Sans" pitchFamily="34" charset="-122"/>
+                          <a:cs typeface="Hiragino Sans" pitchFamily="34" charset="-120"/>
                         </a:rPr>
                         <a:t>中（元件多）</a:t>
                       </a:r>
                       <a:endParaRPr lang="en-US" sz="1050" dirty="0">
-                        <a:latin typeface="Microsoft JhengHei" charset="0"/>
-                        <a:ea typeface="Microsoft JhengHei" charset="0"/>
-                        <a:cs typeface="Microsoft JhengHei" charset="0"/>
+                        <a:latin typeface="Hiragino Sans" charset="0"/>
+                        <a:ea typeface="Hiragino Sans" charset="0"/>
+                        <a:cs typeface="Hiragino Sans" charset="0"/>
                       </a:endParaRPr>
                     </a:p>
                   </a:txBody>
@@ -8078,16 +8078,16 @@
                           <a:solidFill>
                             <a:srgbClr val="E76F51"/>
                           </a:solidFill>
-                          <a:latin typeface="Microsoft JhengHei" pitchFamily="34" charset="0"/>
-                          <a:ea typeface="Microsoft JhengHei" pitchFamily="34" charset="-122"/>
-                          <a:cs typeface="Microsoft JhengHei" pitchFamily="34" charset="-120"/>
+                          <a:latin typeface="Hiragino Sans" pitchFamily="34" charset="0"/>
+                          <a:ea typeface="Hiragino Sans" pitchFamily="34" charset="-122"/>
+                          <a:cs typeface="Hiragino Sans" pitchFamily="34" charset="-120"/>
                         </a:rPr>
                         <a:t>冷（Java Lambda）</a:t>
                       </a:r>
                       <a:endParaRPr lang="en-US" sz="1050" dirty="0">
-                        <a:latin typeface="Microsoft JhengHei" charset="0"/>
-                        <a:ea typeface="Microsoft JhengHei" charset="0"/>
-                        <a:cs typeface="Microsoft JhengHei" charset="0"/>
+                        <a:latin typeface="Hiragino Sans" charset="0"/>
+                        <a:ea typeface="Hiragino Sans" charset="0"/>
+                        <a:cs typeface="Hiragino Sans" charset="0"/>
                       </a:endParaRPr>
                     </a:p>
                   </a:txBody>
@@ -8146,16 +8146,16 @@
                           <a:solidFill>
                             <a:srgbClr val="F4A72B"/>
                           </a:solidFill>
-                          <a:latin typeface="Microsoft JhengHei" pitchFamily="34" charset="0"/>
-                          <a:ea typeface="Microsoft JhengHei" pitchFamily="34" charset="-122"/>
-                          <a:cs typeface="Microsoft JhengHei" pitchFamily="34" charset="-120"/>
+                          <a:latin typeface="Hiragino Sans" pitchFamily="34" charset="0"/>
+                          <a:ea typeface="Hiragino Sans" pitchFamily="34" charset="-122"/>
+                          <a:cs typeface="Hiragino Sans" pitchFamily="34" charset="-120"/>
                         </a:rPr>
                         <a:t>中</a:t>
                       </a:r>
                       <a:endParaRPr lang="en-US" sz="1050" dirty="0">
-                        <a:latin typeface="Microsoft JhengHei" charset="0"/>
-                        <a:ea typeface="Microsoft JhengHei" charset="0"/>
-                        <a:cs typeface="Microsoft JhengHei" charset="0"/>
+                        <a:latin typeface="Hiragino Sans" charset="0"/>
+                        <a:ea typeface="Hiragino Sans" charset="0"/>
+                        <a:cs typeface="Hiragino Sans" charset="0"/>
                       </a:endParaRPr>
                     </a:p>
                   </a:txBody>
@@ -8216,16 +8216,16 @@
                           <a:solidFill>
                             <a:srgbClr val="FFFFFF"/>
                           </a:solidFill>
-                          <a:latin typeface="Microsoft JhengHei" pitchFamily="34" charset="0"/>
-                          <a:ea typeface="Microsoft JhengHei" pitchFamily="34" charset="-122"/>
-                          <a:cs typeface="Microsoft JhengHei" pitchFamily="34" charset="-120"/>
+                          <a:latin typeface="Hiragino Sans" pitchFamily="34" charset="0"/>
+                          <a:ea typeface="Hiragino Sans" pitchFamily="34" charset="-122"/>
+                          <a:cs typeface="Hiragino Sans" pitchFamily="34" charset="-120"/>
                         </a:rPr>
                         <a:t>C App Runner</a:t>
                       </a:r>
                       <a:endParaRPr lang="en-US" sz="1050" dirty="0">
-                        <a:latin typeface="Microsoft JhengHei" charset="0"/>
-                        <a:ea typeface="Microsoft JhengHei" charset="0"/>
-                        <a:cs typeface="Microsoft JhengHei" charset="0"/>
+                        <a:latin typeface="Hiragino Sans" charset="0"/>
+                        <a:ea typeface="Hiragino Sans" charset="0"/>
+                        <a:cs typeface="Hiragino Sans" charset="0"/>
                       </a:endParaRPr>
                     </a:p>
                   </a:txBody>
@@ -8284,16 +8284,16 @@
                           <a:solidFill>
                             <a:srgbClr val="C7D6E4"/>
                           </a:solidFill>
-                          <a:latin typeface="Microsoft JhengHei" pitchFamily="34" charset="0"/>
-                          <a:ea typeface="Microsoft JhengHei" pitchFamily="34" charset="-122"/>
-                          <a:cs typeface="Microsoft JhengHei" pitchFamily="34" charset="-120"/>
+                          <a:latin typeface="Hiragino Sans" pitchFamily="34" charset="0"/>
+                          <a:ea typeface="Hiragino Sans" pitchFamily="34" charset="-122"/>
+                          <a:cs typeface="Hiragino Sans" pitchFamily="34" charset="-120"/>
                         </a:rPr>
                         <a:t>全託管容器</a:t>
                       </a:r>
                       <a:endParaRPr lang="en-US" sz="1050" dirty="0">
-                        <a:latin typeface="Microsoft JhengHei" charset="0"/>
-                        <a:ea typeface="Microsoft JhengHei" charset="0"/>
-                        <a:cs typeface="Microsoft JhengHei" charset="0"/>
+                        <a:latin typeface="Hiragino Sans" charset="0"/>
+                        <a:ea typeface="Hiragino Sans" charset="0"/>
+                        <a:cs typeface="Hiragino Sans" charset="0"/>
                       </a:endParaRPr>
                     </a:p>
                   </a:txBody>
@@ -8352,16 +8352,16 @@
                           <a:solidFill>
                             <a:srgbClr val="C7D6E4"/>
                           </a:solidFill>
-                          <a:latin typeface="Microsoft JhengHei" pitchFamily="34" charset="0"/>
-                          <a:ea typeface="Microsoft JhengHei" pitchFamily="34" charset="-122"/>
-                          <a:cs typeface="Microsoft JhengHei" pitchFamily="34" charset="-120"/>
+                          <a:latin typeface="Hiragino Sans" pitchFamily="34" charset="0"/>
+                          <a:ea typeface="Hiragino Sans" pitchFamily="34" charset="-122"/>
+                          <a:cs typeface="Hiragino Sans" pitchFamily="34" charset="-120"/>
                         </a:rPr>
                         <a:t>App Runner HTTPS</a:t>
                       </a:r>
                       <a:endParaRPr lang="en-US" sz="1050" dirty="0">
-                        <a:latin typeface="Microsoft JhengHei" charset="0"/>
-                        <a:ea typeface="Microsoft JhengHei" charset="0"/>
-                        <a:cs typeface="Microsoft JhengHei" charset="0"/>
+                        <a:latin typeface="Hiragino Sans" charset="0"/>
+                        <a:ea typeface="Hiragino Sans" charset="0"/>
+                        <a:cs typeface="Hiragino Sans" charset="0"/>
                       </a:endParaRPr>
                     </a:p>
                   </a:txBody>
@@ -8420,16 +8420,16 @@
                           <a:solidFill>
                             <a:srgbClr val="C7D6E4"/>
                           </a:solidFill>
-                          <a:latin typeface="Microsoft JhengHei" pitchFamily="34" charset="0"/>
-                          <a:ea typeface="Microsoft JhengHei" pitchFamily="34" charset="-122"/>
-                          <a:cs typeface="Microsoft JhengHei" pitchFamily="34" charset="-120"/>
+                          <a:latin typeface="Hiragino Sans" pitchFamily="34" charset="0"/>
+                          <a:ea typeface="Hiragino Sans" pitchFamily="34" charset="-122"/>
+                          <a:cs typeface="Hiragino Sans" pitchFamily="34" charset="-120"/>
                         </a:rPr>
                         <a:t>低-中</a:t>
                       </a:r>
                       <a:endParaRPr lang="en-US" sz="1050" dirty="0">
-                        <a:latin typeface="Microsoft JhengHei" charset="0"/>
-                        <a:ea typeface="Microsoft JhengHei" charset="0"/>
-                        <a:cs typeface="Microsoft JhengHei" charset="0"/>
+                        <a:latin typeface="Hiragino Sans" charset="0"/>
+                        <a:ea typeface="Hiragino Sans" charset="0"/>
+                        <a:cs typeface="Hiragino Sans" charset="0"/>
                       </a:endParaRPr>
                     </a:p>
                   </a:txBody>
@@ -8488,16 +8488,16 @@
                           <a:solidFill>
                             <a:srgbClr val="2A9D8F"/>
                           </a:solidFill>
-                          <a:latin typeface="Microsoft JhengHei" pitchFamily="34" charset="0"/>
-                          <a:ea typeface="Microsoft JhengHei" pitchFamily="34" charset="-122"/>
-                          <a:cs typeface="Microsoft JhengHei" pitchFamily="34" charset="-120"/>
+                          <a:latin typeface="Hiragino Sans" pitchFamily="34" charset="0"/>
+                          <a:ea typeface="Hiragino Sans" pitchFamily="34" charset="-122"/>
+                          <a:cs typeface="Hiragino Sans" pitchFamily="34" charset="-120"/>
                         </a:rPr>
                         <a:t>最低（免 ALB/VPC）</a:t>
                       </a:r>
                       <a:endParaRPr lang="en-US" sz="1050" dirty="0">
-                        <a:latin typeface="Microsoft JhengHei" charset="0"/>
-                        <a:ea typeface="Microsoft JhengHei" charset="0"/>
-                        <a:cs typeface="Microsoft JhengHei" charset="0"/>
+                        <a:latin typeface="Hiragino Sans" charset="0"/>
+                        <a:ea typeface="Hiragino Sans" charset="0"/>
+                        <a:cs typeface="Hiragino Sans" charset="0"/>
                       </a:endParaRPr>
                     </a:p>
                   </a:txBody>
@@ -8556,16 +8556,16 @@
                           <a:solidFill>
                             <a:srgbClr val="C7D6E4"/>
                           </a:solidFill>
-                          <a:latin typeface="Microsoft JhengHei" pitchFamily="34" charset="0"/>
-                          <a:ea typeface="Microsoft JhengHei" pitchFamily="34" charset="-122"/>
-                          <a:cs typeface="Microsoft JhengHei" pitchFamily="34" charset="-120"/>
+                          <a:latin typeface="Hiragino Sans" pitchFamily="34" charset="0"/>
+                          <a:ea typeface="Hiragino Sans" pitchFamily="34" charset="-122"/>
+                          <a:cs typeface="Hiragino Sans" pitchFamily="34" charset="-120"/>
                         </a:rPr>
                         <a:t>無冷啟</a:t>
                       </a:r>
                       <a:endParaRPr lang="en-US" sz="1050" dirty="0">
-                        <a:latin typeface="Microsoft JhengHei" charset="0"/>
-                        <a:ea typeface="Microsoft JhengHei" charset="0"/>
-                        <a:cs typeface="Microsoft JhengHei" charset="0"/>
+                        <a:latin typeface="Hiragino Sans" charset="0"/>
+                        <a:ea typeface="Hiragino Sans" charset="0"/>
+                        <a:cs typeface="Hiragino Sans" charset="0"/>
                       </a:endParaRPr>
                     </a:p>
                   </a:txBody>
@@ -8624,16 +8624,16 @@
                           <a:solidFill>
                             <a:srgbClr val="E76F51"/>
                           </a:solidFill>
-                          <a:latin typeface="Microsoft JhengHei" pitchFamily="34" charset="0"/>
-                          <a:ea typeface="Microsoft JhengHei" pitchFamily="34" charset="-122"/>
-                          <a:cs typeface="Microsoft JhengHei" pitchFamily="34" charset="-120"/>
+                          <a:latin typeface="Hiragino Sans" pitchFamily="34" charset="0"/>
+                          <a:ea typeface="Hiragino Sans" pitchFamily="34" charset="-122"/>
+                          <a:cs typeface="Hiragino Sans" pitchFamily="34" charset="-120"/>
                         </a:rPr>
                         <a:t>低 · 帳號受阻</a:t>
                       </a:r>
                       <a:endParaRPr lang="en-US" sz="1050" dirty="0">
-                        <a:latin typeface="Microsoft JhengHei" charset="0"/>
-                        <a:ea typeface="Microsoft JhengHei" charset="0"/>
-                        <a:cs typeface="Microsoft JhengHei" charset="0"/>
+                        <a:latin typeface="Hiragino Sans" charset="0"/>
+                        <a:ea typeface="Hiragino Sans" charset="0"/>
+                        <a:cs typeface="Hiragino Sans" charset="0"/>
                       </a:endParaRPr>
                     </a:p>
                   </a:txBody>
@@ -8694,16 +8694,16 @@
                           <a:solidFill>
                             <a:srgbClr val="FFFFFF"/>
                           </a:solidFill>
-                          <a:latin typeface="Microsoft JhengHei" pitchFamily="34" charset="0"/>
-                          <a:ea typeface="Microsoft JhengHei" pitchFamily="34" charset="-122"/>
-                          <a:cs typeface="Microsoft JhengHei" pitchFamily="34" charset="-120"/>
+                          <a:latin typeface="Hiragino Sans" pitchFamily="34" charset="0"/>
+                          <a:ea typeface="Hiragino Sans" pitchFamily="34" charset="-122"/>
+                          <a:cs typeface="Hiragino Sans" pitchFamily="34" charset="-120"/>
                         </a:rPr>
                         <a:t>D EC2+Docker</a:t>
                       </a:r>
                       <a:endParaRPr lang="en-US" sz="1050" dirty="0">
-                        <a:latin typeface="Microsoft JhengHei" charset="0"/>
-                        <a:ea typeface="Microsoft JhengHei" charset="0"/>
-                        <a:cs typeface="Microsoft JhengHei" charset="0"/>
+                        <a:latin typeface="Hiragino Sans" charset="0"/>
+                        <a:ea typeface="Hiragino Sans" charset="0"/>
+                        <a:cs typeface="Hiragino Sans" charset="0"/>
                       </a:endParaRPr>
                     </a:p>
                   </a:txBody>
@@ -8762,16 +8762,16 @@
                           <a:solidFill>
                             <a:srgbClr val="C7D6E4"/>
                           </a:solidFill>
-                          <a:latin typeface="Microsoft JhengHei" pitchFamily="34" charset="0"/>
-                          <a:ea typeface="Microsoft JhengHei" pitchFamily="34" charset="-122"/>
-                          <a:cs typeface="Microsoft JhengHei" pitchFamily="34" charset="-120"/>
+                          <a:latin typeface="Hiragino Sans" pitchFamily="34" charset="0"/>
+                          <a:ea typeface="Hiragino Sans" pitchFamily="34" charset="-122"/>
+                          <a:cs typeface="Hiragino Sans" pitchFamily="34" charset="-120"/>
                         </a:rPr>
                         <a:t>單台 EC2 常駐</a:t>
                       </a:r>
                       <a:endParaRPr lang="en-US" sz="1050" dirty="0">
-                        <a:latin typeface="Microsoft JhengHei" charset="0"/>
-                        <a:ea typeface="Microsoft JhengHei" charset="0"/>
-                        <a:cs typeface="Microsoft JhengHei" charset="0"/>
+                        <a:latin typeface="Hiragino Sans" charset="0"/>
+                        <a:ea typeface="Hiragino Sans" charset="0"/>
+                        <a:cs typeface="Hiragino Sans" charset="0"/>
                       </a:endParaRPr>
                     </a:p>
                   </a:txBody>
@@ -8830,16 +8830,16 @@
                           <a:solidFill>
                             <a:srgbClr val="C7D6E4"/>
                           </a:solidFill>
-                          <a:latin typeface="Microsoft JhengHei" pitchFamily="34" charset="0"/>
-                          <a:ea typeface="Microsoft JhengHei" pitchFamily="34" charset="-122"/>
-                          <a:cs typeface="Microsoft JhengHei" pitchFamily="34" charset="-120"/>
+                          <a:latin typeface="Hiragino Sans" pitchFamily="34" charset="0"/>
+                          <a:ea typeface="Hiragino Sans" pitchFamily="34" charset="-122"/>
+                          <a:cs typeface="Hiragino Sans" pitchFamily="34" charset="-120"/>
                         </a:rPr>
                         <a:t>Elastic IP</a:t>
                       </a:r>
                       <a:endParaRPr lang="en-US" sz="1050" dirty="0">
-                        <a:latin typeface="Microsoft JhengHei" charset="0"/>
-                        <a:ea typeface="Microsoft JhengHei" charset="0"/>
-                        <a:cs typeface="Microsoft JhengHei" charset="0"/>
+                        <a:latin typeface="Hiragino Sans" charset="0"/>
+                        <a:ea typeface="Hiragino Sans" charset="0"/>
+                        <a:cs typeface="Hiragino Sans" charset="0"/>
                       </a:endParaRPr>
                     </a:p>
                   </a:txBody>
@@ -8898,16 +8898,16 @@
                           <a:solidFill>
                             <a:srgbClr val="2A9D8F"/>
                           </a:solidFill>
-                          <a:latin typeface="Microsoft JhengHei" pitchFamily="34" charset="0"/>
-                          <a:ea typeface="Microsoft JhengHei" pitchFamily="34" charset="-122"/>
-                          <a:cs typeface="Microsoft JhengHei" pitchFamily="34" charset="-120"/>
+                          <a:latin typeface="Hiragino Sans" pitchFamily="34" charset="0"/>
+                          <a:ea typeface="Hiragino Sans" pitchFamily="34" charset="-122"/>
+                          <a:cs typeface="Hiragino Sans" pitchFamily="34" charset="-120"/>
                         </a:rPr>
                         <a:t>最低（單台）</a:t>
                       </a:r>
                       <a:endParaRPr lang="en-US" sz="1050" dirty="0">
-                        <a:latin typeface="Microsoft JhengHei" charset="0"/>
-                        <a:ea typeface="Microsoft JhengHei" charset="0"/>
-                        <a:cs typeface="Microsoft JhengHei" charset="0"/>
+                        <a:latin typeface="Hiragino Sans" charset="0"/>
+                        <a:ea typeface="Hiragino Sans" charset="0"/>
+                        <a:cs typeface="Hiragino Sans" charset="0"/>
                       </a:endParaRPr>
                     </a:p>
                   </a:txBody>
@@ -8966,16 +8966,16 @@
                           <a:solidFill>
                             <a:srgbClr val="E76F51"/>
                           </a:solidFill>
-                          <a:latin typeface="Microsoft JhengHei" pitchFamily="34" charset="0"/>
-                          <a:ea typeface="Microsoft JhengHei" pitchFamily="34" charset="-122"/>
-                          <a:cs typeface="Microsoft JhengHei" pitchFamily="34" charset="-120"/>
+                          <a:latin typeface="Hiragino Sans" pitchFamily="34" charset="0"/>
+                          <a:ea typeface="Hiragino Sans" pitchFamily="34" charset="-122"/>
+                          <a:cs typeface="Hiragino Sans" pitchFamily="34" charset="-120"/>
                         </a:rPr>
                         <a:t>高（自管/單點）</a:t>
                       </a:r>
                       <a:endParaRPr lang="en-US" sz="1050" dirty="0">
-                        <a:latin typeface="Microsoft JhengHei" charset="0"/>
-                        <a:ea typeface="Microsoft JhengHei" charset="0"/>
-                        <a:cs typeface="Microsoft JhengHei" charset="0"/>
+                        <a:latin typeface="Hiragino Sans" charset="0"/>
+                        <a:ea typeface="Hiragino Sans" charset="0"/>
+                        <a:cs typeface="Hiragino Sans" charset="0"/>
                       </a:endParaRPr>
                     </a:p>
                   </a:txBody>
@@ -9034,16 +9034,16 @@
                           <a:solidFill>
                             <a:srgbClr val="C7D6E4"/>
                           </a:solidFill>
-                          <a:latin typeface="Microsoft JhengHei" pitchFamily="34" charset="0"/>
-                          <a:ea typeface="Microsoft JhengHei" pitchFamily="34" charset="-122"/>
-                          <a:cs typeface="Microsoft JhengHei" pitchFamily="34" charset="-120"/>
+                          <a:latin typeface="Hiragino Sans" pitchFamily="34" charset="0"/>
+                          <a:ea typeface="Hiragino Sans" pitchFamily="34" charset="-122"/>
+                          <a:cs typeface="Hiragino Sans" pitchFamily="34" charset="-120"/>
                         </a:rPr>
                         <a:t>無冷啟</a:t>
                       </a:r>
                       <a:endParaRPr lang="en-US" sz="1050" dirty="0">
-                        <a:latin typeface="Microsoft JhengHei" charset="0"/>
-                        <a:ea typeface="Microsoft JhengHei" charset="0"/>
-                        <a:cs typeface="Microsoft JhengHei" charset="0"/>
+                        <a:latin typeface="Hiragino Sans" charset="0"/>
+                        <a:ea typeface="Hiragino Sans" charset="0"/>
+                        <a:cs typeface="Hiragino Sans" charset="0"/>
                       </a:endParaRPr>
                     </a:p>
                   </a:txBody>
@@ -9102,16 +9102,16 @@
                           <a:solidFill>
                             <a:srgbClr val="F4A72B"/>
                           </a:solidFill>
-                          <a:latin typeface="Microsoft JhengHei" pitchFamily="34" charset="0"/>
-                          <a:ea typeface="Microsoft JhengHei" pitchFamily="34" charset="-122"/>
-                          <a:cs typeface="Microsoft JhengHei" pitchFamily="34" charset="-120"/>
+                          <a:latin typeface="Hiragino Sans" pitchFamily="34" charset="0"/>
+                          <a:ea typeface="Hiragino Sans" pitchFamily="34" charset="-122"/>
+                          <a:cs typeface="Hiragino Sans" pitchFamily="34" charset="-120"/>
                         </a:rPr>
                         <a:t>中 · 保底</a:t>
                       </a:r>
                       <a:endParaRPr lang="en-US" sz="1050" dirty="0">
-                        <a:latin typeface="Microsoft JhengHei" charset="0"/>
-                        <a:ea typeface="Microsoft JhengHei" charset="0"/>
-                        <a:cs typeface="Microsoft JhengHei" charset="0"/>
+                        <a:latin typeface="Hiragino Sans" charset="0"/>
+                        <a:ea typeface="Hiragino Sans" charset="0"/>
+                        <a:cs typeface="Hiragino Sans" charset="0"/>
                       </a:endParaRPr>
                     </a:p>
                   </a:txBody>
@@ -9172,16 +9172,16 @@
                           <a:solidFill>
                             <a:srgbClr val="FFFFFF"/>
                           </a:solidFill>
-                          <a:latin typeface="Microsoft JhengHei" pitchFamily="34" charset="0"/>
-                          <a:ea typeface="Microsoft JhengHei" pitchFamily="34" charset="-122"/>
-                          <a:cs typeface="Microsoft JhengHei" pitchFamily="34" charset="-120"/>
+                          <a:latin typeface="Hiragino Sans" pitchFamily="34" charset="0"/>
+                          <a:ea typeface="Hiragino Sans" pitchFamily="34" charset="-122"/>
+                          <a:cs typeface="Hiragino Sans" pitchFamily="34" charset="-120"/>
                         </a:rPr>
                         <a:t>E 資料管線</a:t>
                       </a:r>
                       <a:endParaRPr lang="en-US" sz="1050" dirty="0">
-                        <a:latin typeface="Microsoft JhengHei" charset="0"/>
-                        <a:ea typeface="Microsoft JhengHei" charset="0"/>
-                        <a:cs typeface="Microsoft JhengHei" charset="0"/>
+                        <a:latin typeface="Hiragino Sans" charset="0"/>
+                        <a:ea typeface="Hiragino Sans" charset="0"/>
+                        <a:cs typeface="Hiragino Sans" charset="0"/>
                       </a:endParaRPr>
                     </a:p>
                   </a:txBody>
@@ -9240,16 +9240,16 @@
                           <a:solidFill>
                             <a:srgbClr val="C7D6E4"/>
                           </a:solidFill>
-                          <a:latin typeface="Microsoft JhengHei" pitchFamily="34" charset="0"/>
-                          <a:ea typeface="Microsoft JhengHei" pitchFamily="34" charset="-122"/>
-                          <a:cs typeface="Microsoft JhengHei" pitchFamily="34" charset="-120"/>
+                          <a:latin typeface="Hiragino Sans" pitchFamily="34" charset="0"/>
+                          <a:ea typeface="Hiragino Sans" pitchFamily="34" charset="-122"/>
+                          <a:cs typeface="Hiragino Sans" pitchFamily="34" charset="-120"/>
                         </a:rPr>
                         <a:t>Fargate + Glue/Athena</a:t>
                       </a:r>
                       <a:endParaRPr lang="en-US" sz="1050" dirty="0">
-                        <a:latin typeface="Microsoft JhengHei" charset="0"/>
-                        <a:ea typeface="Microsoft JhengHei" charset="0"/>
-                        <a:cs typeface="Microsoft JhengHei" charset="0"/>
+                        <a:latin typeface="Hiragino Sans" charset="0"/>
+                        <a:ea typeface="Hiragino Sans" charset="0"/>
+                        <a:cs typeface="Hiragino Sans" charset="0"/>
                       </a:endParaRPr>
                     </a:p>
                   </a:txBody>
@@ -9308,16 +9308,16 @@
                           <a:solidFill>
                             <a:srgbClr val="C7D6E4"/>
                           </a:solidFill>
-                          <a:latin typeface="Microsoft JhengHei" pitchFamily="34" charset="0"/>
-                          <a:ea typeface="Microsoft JhengHei" pitchFamily="34" charset="-122"/>
-                          <a:cs typeface="Microsoft JhengHei" pitchFamily="34" charset="-120"/>
+                          <a:latin typeface="Hiragino Sans" pitchFamily="34" charset="0"/>
+                          <a:ea typeface="Hiragino Sans" pitchFamily="34" charset="-122"/>
+                          <a:cs typeface="Hiragino Sans" pitchFamily="34" charset="-120"/>
                         </a:rPr>
                         <a:t>App / QuickSight</a:t>
                       </a:r>
                       <a:endParaRPr lang="en-US" sz="1050" dirty="0">
-                        <a:latin typeface="Microsoft JhengHei" charset="0"/>
-                        <a:ea typeface="Microsoft JhengHei" charset="0"/>
-                        <a:cs typeface="Microsoft JhengHei" charset="0"/>
+                        <a:latin typeface="Hiragino Sans" charset="0"/>
+                        <a:ea typeface="Hiragino Sans" charset="0"/>
+                        <a:cs typeface="Hiragino Sans" charset="0"/>
                       </a:endParaRPr>
                     </a:p>
                   </a:txBody>
@@ -9376,16 +9376,16 @@
                           <a:solidFill>
                             <a:srgbClr val="E76F51"/>
                           </a:solidFill>
-                          <a:latin typeface="Microsoft JhengHei" pitchFamily="34" charset="0"/>
-                          <a:ea typeface="Microsoft JhengHei" pitchFamily="34" charset="-122"/>
-                          <a:cs typeface="Microsoft JhengHei" pitchFamily="34" charset="-120"/>
+                          <a:latin typeface="Hiragino Sans" pitchFamily="34" charset="0"/>
+                          <a:ea typeface="Hiragino Sans" pitchFamily="34" charset="-122"/>
+                          <a:cs typeface="Hiragino Sans" pitchFamily="34" charset="-120"/>
                         </a:rPr>
                         <a:t>中高（掃描+授權）</a:t>
                       </a:r>
                       <a:endParaRPr lang="en-US" sz="1050" dirty="0">
-                        <a:latin typeface="Microsoft JhengHei" charset="0"/>
-                        <a:ea typeface="Microsoft JhengHei" charset="0"/>
-                        <a:cs typeface="Microsoft JhengHei" charset="0"/>
+                        <a:latin typeface="Hiragino Sans" charset="0"/>
+                        <a:ea typeface="Hiragino Sans" charset="0"/>
+                        <a:cs typeface="Hiragino Sans" charset="0"/>
                       </a:endParaRPr>
                     </a:p>
                   </a:txBody>
@@ -9444,16 +9444,16 @@
                           <a:solidFill>
                             <a:srgbClr val="E76F51"/>
                           </a:solidFill>
-                          <a:latin typeface="Microsoft JhengHei" pitchFamily="34" charset="0"/>
-                          <a:ea typeface="Microsoft JhengHei" pitchFamily="34" charset="-122"/>
-                          <a:cs typeface="Microsoft JhengHei" pitchFamily="34" charset="-120"/>
+                          <a:latin typeface="Hiragino Sans" pitchFamily="34" charset="0"/>
+                          <a:ea typeface="Hiragino Sans" pitchFamily="34" charset="-122"/>
+                          <a:cs typeface="Hiragino Sans" pitchFamily="34" charset="-120"/>
                         </a:rPr>
                         <a:t>高（多層）</a:t>
                       </a:r>
                       <a:endParaRPr lang="en-US" sz="1050" dirty="0">
-                        <a:latin typeface="Microsoft JhengHei" charset="0"/>
-                        <a:ea typeface="Microsoft JhengHei" charset="0"/>
-                        <a:cs typeface="Microsoft JhengHei" charset="0"/>
+                        <a:latin typeface="Hiragino Sans" charset="0"/>
+                        <a:ea typeface="Hiragino Sans" charset="0"/>
+                        <a:cs typeface="Hiragino Sans" charset="0"/>
                       </a:endParaRPr>
                     </a:p>
                   </a:txBody>
@@ -9512,16 +9512,16 @@
                           <a:solidFill>
                             <a:srgbClr val="C7D6E4"/>
                           </a:solidFill>
-                          <a:latin typeface="Microsoft JhengHei" pitchFamily="34" charset="0"/>
-                          <a:ea typeface="Microsoft JhengHei" pitchFamily="34" charset="-122"/>
-                          <a:cs typeface="Microsoft JhengHei" pitchFamily="34" charset="-120"/>
+                          <a:latin typeface="Hiragino Sans" pitchFamily="34" charset="0"/>
+                          <a:ea typeface="Hiragino Sans" pitchFamily="34" charset="-122"/>
+                          <a:cs typeface="Hiragino Sans" pitchFamily="34" charset="-120"/>
                         </a:rPr>
                         <a:t>—</a:t>
                       </a:r>
                       <a:endParaRPr lang="en-US" sz="1050" dirty="0">
-                        <a:latin typeface="Microsoft JhengHei" charset="0"/>
-                        <a:ea typeface="Microsoft JhengHei" charset="0"/>
-                        <a:cs typeface="Microsoft JhengHei" charset="0"/>
+                        <a:latin typeface="Hiragino Sans" charset="0"/>
+                        <a:ea typeface="Hiragino Sans" charset="0"/>
+                        <a:cs typeface="Hiragino Sans" charset="0"/>
                       </a:endParaRPr>
                     </a:p>
                   </a:txBody>
@@ -9580,16 +9580,16 @@
                           <a:solidFill>
                             <a:srgbClr val="F4A72B"/>
                           </a:solidFill>
-                          <a:latin typeface="Microsoft JhengHei" pitchFamily="34" charset="0"/>
-                          <a:ea typeface="Microsoft JhengHei" pitchFamily="34" charset="-122"/>
-                          <a:cs typeface="Microsoft JhengHei" pitchFamily="34" charset="-120"/>
+                          <a:latin typeface="Hiragino Sans" pitchFamily="34" charset="0"/>
+                          <a:ea typeface="Hiragino Sans" pitchFamily="34" charset="-122"/>
+                          <a:cs typeface="Hiragino Sans" pitchFamily="34" charset="-120"/>
                         </a:rPr>
                         <a:t>低 · 藍圖價值高</a:t>
                       </a:r>
                       <a:endParaRPr lang="en-US" sz="1050" dirty="0">
-                        <a:latin typeface="Microsoft JhengHei" charset="0"/>
-                        <a:ea typeface="Microsoft JhengHei" charset="0"/>
-                        <a:cs typeface="Microsoft JhengHei" charset="0"/>
+                        <a:latin typeface="Hiragino Sans" charset="0"/>
+                        <a:ea typeface="Hiragino Sans" charset="0"/>
+                        <a:cs typeface="Hiragino Sans" charset="0"/>
                       </a:endParaRPr>
                     </a:p>
                   </a:txBody>
@@ -9689,9 +9689,9 @@
                 <a:solidFill>
                   <a:srgbClr val="C7D6E4"/>
                 </a:solidFill>
-                <a:latin typeface="Microsoft JhengHei" pitchFamily="34" charset="0"/>
-                <a:ea typeface="Microsoft JhengHei" pitchFamily="34" charset="-122"/>
-                <a:cs typeface="Microsoft JhengHei" pitchFamily="34" charset="-120"/>
+                <a:latin typeface="Hiragino Sans" pitchFamily="34" charset="0"/>
+                <a:ea typeface="Hiragino Sans" pitchFamily="34" charset="-122"/>
+                <a:cs typeface="Hiragino Sans" pitchFamily="34" charset="-120"/>
               </a:rPr>
               <a:t>已上線 / 佳</a:t>
             </a:r>
@@ -9748,9 +9748,9 @@
                 <a:solidFill>
                   <a:srgbClr val="C7D6E4"/>
                 </a:solidFill>
-                <a:latin typeface="Microsoft JhengHei" pitchFamily="34" charset="0"/>
-                <a:ea typeface="Microsoft JhengHei" pitchFamily="34" charset="-122"/>
-                <a:cs typeface="Microsoft JhengHei" pitchFamily="34" charset="-120"/>
+                <a:latin typeface="Hiragino Sans" pitchFamily="34" charset="0"/>
+                <a:ea typeface="Hiragino Sans" pitchFamily="34" charset="-122"/>
+                <a:cs typeface="Hiragino Sans" pitchFamily="34" charset="-120"/>
               </a:rPr>
               <a:t>需注意</a:t>
             </a:r>
@@ -9807,9 +9807,9 @@
                 <a:solidFill>
                   <a:srgbClr val="C7D6E4"/>
                 </a:solidFill>
-                <a:latin typeface="Microsoft JhengHei" pitchFamily="34" charset="0"/>
-                <a:ea typeface="Microsoft JhengHei" pitchFamily="34" charset="-122"/>
-                <a:cs typeface="Microsoft JhengHei" pitchFamily="34" charset="-120"/>
+                <a:latin typeface="Hiragino Sans" pitchFamily="34" charset="0"/>
+                <a:ea typeface="Hiragino Sans" pitchFamily="34" charset="-122"/>
+                <a:cs typeface="Hiragino Sans" pitchFamily="34" charset="-120"/>
               </a:rPr>
               <a:t>受阻 / 高風險</a:t>
             </a:r>
@@ -9885,9 +9885,9 @@
                 <a:solidFill>
                   <a:srgbClr val="2A9D8F"/>
                 </a:solidFill>
-                <a:latin typeface="Microsoft JhengHei" pitchFamily="34" charset="0"/>
-                <a:ea typeface="Microsoft JhengHei" pitchFamily="34" charset="-122"/>
-                <a:cs typeface="Microsoft JhengHei" pitchFamily="34" charset="-120"/>
+                <a:latin typeface="Hiragino Sans" pitchFamily="34" charset="0"/>
+                <a:ea typeface="Hiragino Sans" pitchFamily="34" charset="-122"/>
+                <a:cs typeface="Hiragino Sans" pitchFamily="34" charset="-120"/>
               </a:rPr>
               <a:t>判讀　</a:t>
             </a:r>
@@ -9902,9 +9902,9 @@
                 <a:solidFill>
                   <a:srgbClr val="FFFFFF"/>
                 </a:solidFill>
-                <a:latin typeface="Microsoft JhengHei" pitchFamily="34" charset="0"/>
-                <a:ea typeface="Microsoft JhengHei" pitchFamily="34" charset="-122"/>
-                <a:cs typeface="Microsoft JhengHei" pitchFamily="34" charset="-120"/>
+                <a:latin typeface="Hiragino Sans" pitchFamily="34" charset="0"/>
+                <a:ea typeface="Hiragino Sans" pitchFamily="34" charset="-122"/>
+                <a:cs typeface="Hiragino Sans" pitchFamily="34" charset="-120"/>
               </a:rPr>
               <a:t>3 天黑客松以 </a:t>
             </a:r>
@@ -9919,9 +9919,9 @@
                 <a:solidFill>
                   <a:srgbClr val="F4A72B"/>
                 </a:solidFill>
-                <a:latin typeface="Microsoft JhengHei" pitchFamily="34" charset="0"/>
-                <a:ea typeface="Microsoft JhengHei" pitchFamily="34" charset="-122"/>
-                <a:cs typeface="Microsoft JhengHei" pitchFamily="34" charset="-120"/>
+                <a:latin typeface="Hiragino Sans" pitchFamily="34" charset="0"/>
+                <a:ea typeface="Hiragino Sans" pitchFamily="34" charset="-122"/>
+                <a:cs typeface="Hiragino Sans" pitchFamily="34" charset="-120"/>
               </a:rPr>
               <a:t>A（現行強化）</a:t>
             </a:r>
@@ -9936,9 +9936,9 @@
                 <a:solidFill>
                   <a:srgbClr val="FFFFFF"/>
                 </a:solidFill>
-                <a:latin typeface="Microsoft JhengHei" pitchFamily="34" charset="0"/>
-                <a:ea typeface="Microsoft JhengHei" pitchFamily="34" charset="-122"/>
-                <a:cs typeface="Microsoft JhengHei" pitchFamily="34" charset="-120"/>
+                <a:latin typeface="Hiragino Sans" pitchFamily="34" charset="0"/>
+                <a:ea typeface="Hiragino Sans" pitchFamily="34" charset="-122"/>
+                <a:cs typeface="Hiragino Sans" pitchFamily="34" charset="-120"/>
               </a:rPr>
               <a:t> 為主線出賽（已上線、風險最低）；</a:t>
             </a:r>
@@ -9953,9 +9953,9 @@
                 <a:solidFill>
                   <a:srgbClr val="F4A72B"/>
                 </a:solidFill>
-                <a:latin typeface="Microsoft JhengHei" pitchFamily="34" charset="0"/>
-                <a:ea typeface="Microsoft JhengHei" pitchFamily="34" charset="-122"/>
-                <a:cs typeface="Microsoft JhengHei" pitchFamily="34" charset="-120"/>
+                <a:latin typeface="Hiragino Sans" pitchFamily="34" charset="0"/>
+                <a:ea typeface="Hiragino Sans" pitchFamily="34" charset="-122"/>
+                <a:cs typeface="Hiragino Sans" pitchFamily="34" charset="-120"/>
               </a:rPr>
               <a:t>D（EC2）</a:t>
             </a:r>
@@ -9970,9 +9970,9 @@
                 <a:solidFill>
                   <a:srgbClr val="FFFFFF"/>
                 </a:solidFill>
-                <a:latin typeface="Microsoft JhengHei" pitchFamily="34" charset="0"/>
-                <a:ea typeface="Microsoft JhengHei" pitchFamily="34" charset="-122"/>
-                <a:cs typeface="Microsoft JhengHei" pitchFamily="34" charset="-120"/>
+                <a:latin typeface="Hiragino Sans" pitchFamily="34" charset="0"/>
+                <a:ea typeface="Hiragino Sans" pitchFamily="34" charset="-122"/>
+                <a:cs typeface="Hiragino Sans" pitchFamily="34" charset="-120"/>
               </a:rPr>
               <a:t> 為托管服務受阻時的保底；</a:t>
             </a:r>
@@ -9987,9 +9987,9 @@
                 <a:solidFill>
                   <a:srgbClr val="F4A72B"/>
                 </a:solidFill>
-                <a:latin typeface="Microsoft JhengHei" pitchFamily="34" charset="0"/>
-                <a:ea typeface="Microsoft JhengHei" pitchFamily="34" charset="-122"/>
-                <a:cs typeface="Microsoft JhengHei" pitchFamily="34" charset="-120"/>
+                <a:latin typeface="Hiragino Sans" pitchFamily="34" charset="0"/>
+                <a:ea typeface="Hiragino Sans" pitchFamily="34" charset="-122"/>
+                <a:cs typeface="Hiragino Sans" pitchFamily="34" charset="-120"/>
               </a:rPr>
               <a:t>B / E</a:t>
             </a:r>
@@ -10004,9 +10004,9 @@
                 <a:solidFill>
                   <a:srgbClr val="FFFFFF"/>
                 </a:solidFill>
-                <a:latin typeface="Microsoft JhengHei" pitchFamily="34" charset="0"/>
-                <a:ea typeface="Microsoft JhengHei" pitchFamily="34" charset="-122"/>
-                <a:cs typeface="Microsoft JhengHei" pitchFamily="34" charset="-120"/>
+                <a:latin typeface="Hiragino Sans" pitchFamily="34" charset="0"/>
+                <a:ea typeface="Hiragino Sans" pitchFamily="34" charset="-122"/>
+                <a:cs typeface="Hiragino Sans" pitchFamily="34" charset="-120"/>
               </a:rPr>
               <a:t> 作為資料驅動與全艦隊願景的演進方向寫進簡報。C 因帳號 AccessDenied 暫不採用。</a:t>
             </a:r>
@@ -10228,9 +10228,9 @@
                 <a:solidFill>
                   <a:srgbClr val="FFFFFF"/>
                 </a:solidFill>
-                <a:latin typeface="Microsoft JhengHei" pitchFamily="34" charset="0"/>
-                <a:ea typeface="Microsoft JhengHei" pitchFamily="34" charset="-122"/>
-                <a:cs typeface="Microsoft JhengHei" pitchFamily="34" charset="-120"/>
+                <a:latin typeface="Hiragino Sans" pitchFamily="34" charset="0"/>
+                <a:ea typeface="Hiragino Sans" pitchFamily="34" charset="-122"/>
+                <a:cs typeface="Hiragino Sans" pitchFamily="34" charset="-120"/>
               </a:rPr>
               <a:t>12</a:t>
             </a:r>
@@ -10242,9 +10242,9 @@
                 <a:solidFill>
                   <a:srgbClr val="8FA8BD"/>
                 </a:solidFill>
-                <a:latin typeface="Microsoft JhengHei" pitchFamily="34" charset="0"/>
-                <a:ea typeface="Microsoft JhengHei" pitchFamily="34" charset="-122"/>
-                <a:cs typeface="Microsoft JhengHei" pitchFamily="34" charset="-120"/>
+                <a:latin typeface="Hiragino Sans" pitchFamily="34" charset="0"/>
+                <a:ea typeface="Hiragino Sans" pitchFamily="34" charset="-122"/>
+                <a:cs typeface="Hiragino Sans" pitchFamily="34" charset="-120"/>
               </a:rPr>
               <a:t>  /  15</a:t>
             </a:r>
@@ -10281,9 +10281,9 @@
                 <a:solidFill>
                   <a:srgbClr val="F4A72B"/>
                 </a:solidFill>
-                <a:latin typeface="Microsoft JhengHei" pitchFamily="34" charset="0"/>
-                <a:ea typeface="Microsoft JhengHei" pitchFamily="34" charset="-122"/>
-                <a:cs typeface="Microsoft JhengHei" pitchFamily="34" charset="-120"/>
+                <a:latin typeface="Hiragino Sans" pitchFamily="34" charset="0"/>
+                <a:ea typeface="Hiragino Sans" pitchFamily="34" charset="-122"/>
+                <a:cs typeface="Hiragino Sans" pitchFamily="34" charset="-120"/>
               </a:rPr>
               <a:t>ROADMAP</a:t>
             </a:r>
@@ -10320,9 +10320,9 @@
                 <a:solidFill>
                   <a:srgbClr val="FFFFFF"/>
                 </a:solidFill>
-                <a:latin typeface="Microsoft JhengHei" pitchFamily="34" charset="0"/>
-                <a:ea typeface="Microsoft JhengHei" pitchFamily="34" charset="-122"/>
-                <a:cs typeface="Microsoft JhengHei" pitchFamily="34" charset="-120"/>
+                <a:latin typeface="Hiragino Sans" pitchFamily="34" charset="0"/>
+                <a:ea typeface="Hiragino Sans" pitchFamily="34" charset="-122"/>
+                <a:cs typeface="Hiragino Sans" pitchFamily="34" charset="-120"/>
               </a:rPr>
               <a:t>從 15 艘 demo 到全艦隊即時營運平台</a:t>
             </a:r>
@@ -10429,9 +10429,9 @@
                 <a:solidFill>
                   <a:srgbClr val="FFFFFF"/>
                 </a:solidFill>
-                <a:latin typeface="Microsoft JhengHei" pitchFamily="34" charset="0"/>
-                <a:ea typeface="Microsoft JhengHei" pitchFamily="34" charset="-122"/>
-                <a:cs typeface="Microsoft JhengHei" pitchFamily="34" charset="-120"/>
+                <a:latin typeface="Hiragino Sans" pitchFamily="34" charset="0"/>
+                <a:ea typeface="Hiragino Sans" pitchFamily="34" charset="-122"/>
+                <a:cs typeface="Hiragino Sans" pitchFamily="34" charset="-120"/>
               </a:rPr>
               <a:t>現在</a:t>
             </a:r>
@@ -10546,9 +10546,9 @@
                 <a:solidFill>
                   <a:srgbClr val="FFFFFF"/>
                 </a:solidFill>
-                <a:latin typeface="Microsoft JhengHei" pitchFamily="34" charset="0"/>
-                <a:ea typeface="Microsoft JhengHei" pitchFamily="34" charset="-122"/>
-                <a:cs typeface="Microsoft JhengHei" pitchFamily="34" charset="-120"/>
+                <a:latin typeface="Hiragino Sans" pitchFamily="34" charset="0"/>
+                <a:ea typeface="Hiragino Sans" pitchFamily="34" charset="-122"/>
+                <a:cs typeface="Hiragino Sans" pitchFamily="34" charset="-120"/>
               </a:rPr>
               <a:t>Phase 0 · Demo</a:t>
             </a:r>
@@ -10592,9 +10592,9 @@
                 <a:solidFill>
                   <a:srgbClr val="C7D6E4"/>
                 </a:solidFill>
-                <a:latin typeface="Microsoft JhengHei" pitchFamily="34" charset="0"/>
-                <a:ea typeface="Microsoft JhengHei" pitchFamily="34" charset="-122"/>
-                <a:cs typeface="Microsoft JhengHei" pitchFamily="34" charset="-120"/>
+                <a:latin typeface="Hiragino Sans" pitchFamily="34" charset="0"/>
+                <a:ea typeface="Hiragino Sans" pitchFamily="34" charset="-122"/>
+                <a:cs typeface="Hiragino Sans" pitchFamily="34" charset="-120"/>
               </a:rPr>
               <a:t>15 艘 · 5 年報表</a:t>
             </a:r>
@@ -10616,9 +10616,9 @@
                 <a:solidFill>
                   <a:srgbClr val="C7D6E4"/>
                 </a:solidFill>
-                <a:latin typeface="Microsoft JhengHei" pitchFamily="34" charset="0"/>
-                <a:ea typeface="Microsoft JhengHei" pitchFamily="34" charset="-122"/>
-                <a:cs typeface="Microsoft JhengHei" pitchFamily="34" charset="-120"/>
+                <a:latin typeface="Hiragino Sans" pitchFamily="34" charset="0"/>
+                <a:ea typeface="Hiragino Sans" pitchFamily="34" charset="-122"/>
+                <a:cs typeface="Hiragino Sans" pitchFamily="34" charset="-120"/>
               </a:rPr>
               <a:t>baked real-metrics.json</a:t>
             </a:r>
@@ -10640,9 +10640,9 @@
                 <a:solidFill>
                   <a:srgbClr val="C7D6E4"/>
                 </a:solidFill>
-                <a:latin typeface="Microsoft JhengHei" pitchFamily="34" charset="0"/>
-                <a:ea typeface="Microsoft JhengHei" pitchFamily="34" charset="-122"/>
-                <a:cs typeface="Microsoft JhengHei" pitchFamily="34" charset="-120"/>
+                <a:latin typeface="Hiragino Sans" pitchFamily="34" charset="0"/>
+                <a:ea typeface="Hiragino Sans" pitchFamily="34" charset="-122"/>
+                <a:cs typeface="Hiragino Sans" pitchFamily="34" charset="-120"/>
               </a:rPr>
               <a:t>ECS Fargate + ALB 已上線</a:t>
             </a:r>
@@ -10726,9 +10726,9 @@
                 <a:solidFill>
                   <a:srgbClr val="FFFFFF"/>
                 </a:solidFill>
-                <a:latin typeface="Microsoft JhengHei" pitchFamily="34" charset="0"/>
-                <a:ea typeface="Microsoft JhengHei" pitchFamily="34" charset="-122"/>
-                <a:cs typeface="Microsoft JhengHei" pitchFamily="34" charset="-120"/>
+                <a:latin typeface="Hiragino Sans" pitchFamily="34" charset="0"/>
+                <a:ea typeface="Hiragino Sans" pitchFamily="34" charset="-122"/>
+                <a:cs typeface="Hiragino Sans" pitchFamily="34" charset="-120"/>
               </a:rPr>
               <a:t>近期</a:t>
             </a:r>
@@ -10843,9 +10843,9 @@
                 <a:solidFill>
                   <a:srgbClr val="FFFFFF"/>
                 </a:solidFill>
-                <a:latin typeface="Microsoft JhengHei" pitchFamily="34" charset="0"/>
-                <a:ea typeface="Microsoft JhengHei" pitchFamily="34" charset="-122"/>
-                <a:cs typeface="Microsoft JhengHei" pitchFamily="34" charset="-120"/>
+                <a:latin typeface="Hiragino Sans" pitchFamily="34" charset="0"/>
+                <a:ea typeface="Hiragino Sans" pitchFamily="34" charset="-122"/>
+                <a:cs typeface="Hiragino Sans" pitchFamily="34" charset="-120"/>
               </a:rPr>
               <a:t>Phase 1 · 資料驅動</a:t>
             </a:r>
@@ -10889,9 +10889,9 @@
                 <a:solidFill>
                   <a:srgbClr val="C7D6E4"/>
                 </a:solidFill>
-                <a:latin typeface="Microsoft JhengHei" pitchFamily="34" charset="0"/>
-                <a:ea typeface="Microsoft JhengHei" pitchFamily="34" charset="-122"/>
-                <a:cs typeface="Microsoft JhengHei" pitchFamily="34" charset="-120"/>
+                <a:latin typeface="Hiragino Sans" pitchFamily="34" charset="0"/>
+                <a:ea typeface="Hiragino Sans" pitchFamily="34" charset="-122"/>
+                <a:cs typeface="Hiragino Sans" pitchFamily="34" charset="-120"/>
               </a:rPr>
               <a:t>系統介接 ingest API</a:t>
             </a:r>
@@ -10913,9 +10913,9 @@
                 <a:solidFill>
                   <a:srgbClr val="C7D6E4"/>
                 </a:solidFill>
-                <a:latin typeface="Microsoft JhengHei" pitchFamily="34" charset="0"/>
-                <a:ea typeface="Microsoft JhengHei" pitchFamily="34" charset="-122"/>
-                <a:cs typeface="Microsoft JhengHei" pitchFamily="34" charset="-120"/>
+                <a:latin typeface="Hiragino Sans" pitchFamily="34" charset="0"/>
+                <a:ea typeface="Hiragino Sans" pitchFamily="34" charset="-122"/>
+                <a:cs typeface="Hiragino Sans" pitchFamily="34" charset="-120"/>
               </a:rPr>
               <a:t>檔案上傳 CSV/xlsx</a:t>
             </a:r>
@@ -10937,9 +10937,9 @@
                 <a:solidFill>
                   <a:srgbClr val="C7D6E4"/>
                 </a:solidFill>
-                <a:latin typeface="Microsoft JhengHei" pitchFamily="34" charset="0"/>
-                <a:ea typeface="Microsoft JhengHei" pitchFamily="34" charset="-122"/>
-                <a:cs typeface="Microsoft JhengHei" pitchFamily="34" charset="-120"/>
+                <a:latin typeface="Hiragino Sans" pitchFamily="34" charset="0"/>
+                <a:ea typeface="Hiragino Sans" pitchFamily="34" charset="-122"/>
+                <a:cs typeface="Hiragino Sans" pitchFamily="34" charset="-120"/>
               </a:rPr>
               <a:t>後台設定門檻/通道/燃料對應</a:t>
             </a:r>
@@ -11023,9 +11023,9 @@
                 <a:solidFill>
                   <a:srgbClr val="FFFFFF"/>
                 </a:solidFill>
-                <a:latin typeface="Microsoft JhengHei" pitchFamily="34" charset="0"/>
-                <a:ea typeface="Microsoft JhengHei" pitchFamily="34" charset="-122"/>
-                <a:cs typeface="Microsoft JhengHei" pitchFamily="34" charset="-120"/>
+                <a:latin typeface="Hiragino Sans" pitchFamily="34" charset="0"/>
+                <a:ea typeface="Hiragino Sans" pitchFamily="34" charset="-122"/>
+                <a:cs typeface="Hiragino Sans" pitchFamily="34" charset="-120"/>
               </a:rPr>
               <a:t>中期</a:t>
             </a:r>
@@ -11140,9 +11140,9 @@
                 <a:solidFill>
                   <a:srgbClr val="FFFFFF"/>
                 </a:solidFill>
-                <a:latin typeface="Microsoft JhengHei" pitchFamily="34" charset="0"/>
-                <a:ea typeface="Microsoft JhengHei" pitchFamily="34" charset="-122"/>
-                <a:cs typeface="Microsoft JhengHei" pitchFamily="34" charset="-120"/>
+                <a:latin typeface="Hiragino Sans" pitchFamily="34" charset="0"/>
+                <a:ea typeface="Hiragino Sans" pitchFamily="34" charset="-122"/>
+                <a:cs typeface="Hiragino Sans" pitchFamily="34" charset="-120"/>
               </a:rPr>
               <a:t>Phase 2 · 全艦隊 + BI</a:t>
             </a:r>
@@ -11186,9 +11186,9 @@
                 <a:solidFill>
                   <a:srgbClr val="C7D6E4"/>
                 </a:solidFill>
-                <a:latin typeface="Microsoft JhengHei" pitchFamily="34" charset="0"/>
-                <a:ea typeface="Microsoft JhengHei" pitchFamily="34" charset="-122"/>
-                <a:cs typeface="Microsoft JhengHei" pitchFamily="34" charset="-120"/>
+                <a:latin typeface="Hiragino Sans" pitchFamily="34" charset="0"/>
+                <a:ea typeface="Hiragino Sans" pitchFamily="34" charset="-122"/>
+                <a:cs typeface="Hiragino Sans" pitchFamily="34" charset="-120"/>
               </a:rPr>
               <a:t>Serverless / 事件驅動重算</a:t>
             </a:r>
@@ -11210,9 +11210,9 @@
                 <a:solidFill>
                   <a:srgbClr val="C7D6E4"/>
                 </a:solidFill>
-                <a:latin typeface="Microsoft JhengHei" pitchFamily="34" charset="0"/>
-                <a:ea typeface="Microsoft JhengHei" pitchFamily="34" charset="-122"/>
-                <a:cs typeface="Microsoft JhengHei" pitchFamily="34" charset="-120"/>
+                <a:latin typeface="Hiragino Sans" pitchFamily="34" charset="0"/>
+                <a:ea typeface="Hiragino Sans" pitchFamily="34" charset="-122"/>
+                <a:cs typeface="Hiragino Sans" pitchFamily="34" charset="-120"/>
               </a:rPr>
               <a:t>擴到 97 艘同架構</a:t>
             </a:r>
@@ -11234,9 +11234,9 @@
                 <a:solidFill>
                   <a:srgbClr val="C7D6E4"/>
                 </a:solidFill>
-                <a:latin typeface="Microsoft JhengHei" pitchFamily="34" charset="0"/>
-                <a:ea typeface="Microsoft JhengHei" pitchFamily="34" charset="-122"/>
-                <a:cs typeface="Microsoft JhengHei" pitchFamily="34" charset="-120"/>
+                <a:latin typeface="Hiragino Sans" pitchFamily="34" charset="0"/>
+                <a:ea typeface="Hiragino Sans" pitchFamily="34" charset="-122"/>
+                <a:cs typeface="Hiragino Sans" pitchFamily="34" charset="-120"/>
               </a:rPr>
               <a:t>QuickSight / Athena 自助 BI</a:t>
             </a:r>
@@ -11320,9 +11320,9 @@
                 <a:solidFill>
                   <a:srgbClr val="0A2540"/>
                 </a:solidFill>
-                <a:latin typeface="Microsoft JhengHei" pitchFamily="34" charset="0"/>
-                <a:ea typeface="Microsoft JhengHei" pitchFamily="34" charset="-122"/>
-                <a:cs typeface="Microsoft JhengHei" pitchFamily="34" charset="-120"/>
+                <a:latin typeface="Hiragino Sans" pitchFamily="34" charset="0"/>
+                <a:ea typeface="Hiragino Sans" pitchFamily="34" charset="-122"/>
+                <a:cs typeface="Hiragino Sans" pitchFamily="34" charset="-120"/>
               </a:rPr>
               <a:t>願景</a:t>
             </a:r>
@@ -11437,9 +11437,9 @@
                 <a:solidFill>
                   <a:srgbClr val="0A2540"/>
                 </a:solidFill>
-                <a:latin typeface="Microsoft JhengHei" pitchFamily="34" charset="0"/>
-                <a:ea typeface="Microsoft JhengHei" pitchFamily="34" charset="-122"/>
-                <a:cs typeface="Microsoft JhengHei" pitchFamily="34" charset="-120"/>
+                <a:latin typeface="Hiragino Sans" pitchFamily="34" charset="0"/>
+                <a:ea typeface="Hiragino Sans" pitchFamily="34" charset="-122"/>
+                <a:cs typeface="Hiragino Sans" pitchFamily="34" charset="-120"/>
               </a:rPr>
               <a:t>Phase 3 · 即時 + ML</a:t>
             </a:r>
@@ -11483,9 +11483,9 @@
                 <a:solidFill>
                   <a:srgbClr val="C7D6E4"/>
                 </a:solidFill>
-                <a:latin typeface="Microsoft JhengHei" pitchFamily="34" charset="0"/>
-                <a:ea typeface="Microsoft JhengHei" pitchFamily="34" charset="-122"/>
-                <a:cs typeface="Microsoft JhengHei" pitchFamily="34" charset="-120"/>
+                <a:latin typeface="Hiragino Sans" pitchFamily="34" charset="0"/>
+                <a:ea typeface="Hiragino Sans" pitchFamily="34" charset="-122"/>
+                <a:cs typeface="Hiragino Sans" pitchFamily="34" charset="-120"/>
               </a:rPr>
               <a:t>IoT Core 船端即時遙測</a:t>
             </a:r>
@@ -11507,9 +11507,9 @@
                 <a:solidFill>
                   <a:srgbClr val="C7D6E4"/>
                 </a:solidFill>
-                <a:latin typeface="Microsoft JhengHei" pitchFamily="34" charset="0"/>
-                <a:ea typeface="Microsoft JhengHei" pitchFamily="34" charset="-122"/>
-                <a:cs typeface="Microsoft JhengHei" pitchFamily="34" charset="-120"/>
+                <a:latin typeface="Hiragino Sans" pitchFamily="34" charset="0"/>
+                <a:ea typeface="Hiragino Sans" pitchFamily="34" charset="-122"/>
+                <a:cs typeface="Hiragino Sans" pitchFamily="34" charset="-120"/>
               </a:rPr>
               <a:t>SageMaker 油耗/衰退預測</a:t>
             </a:r>
@@ -11531,9 +11531,9 @@
                 <a:solidFill>
                   <a:srgbClr val="C7D6E4"/>
                 </a:solidFill>
-                <a:latin typeface="Microsoft JhengHei" pitchFamily="34" charset="0"/>
-                <a:ea typeface="Microsoft JhengHei" pitchFamily="34" charset="-122"/>
-                <a:cs typeface="Microsoft JhengHei" pitchFamily="34" charset="-120"/>
+                <a:latin typeface="Hiragino Sans" pitchFamily="34" charset="0"/>
+                <a:ea typeface="Hiragino Sans" pitchFamily="34" charset="-122"/>
+                <a:cs typeface="Hiragino Sans" pitchFamily="34" charset="-120"/>
               </a:rPr>
               <a:t>近即時 Speed Loss 偵測</a:t>
             </a:r>
@@ -11602,9 +11602,9 @@
                 <a:solidFill>
                   <a:srgbClr val="F4A72B"/>
                 </a:solidFill>
-                <a:latin typeface="Microsoft JhengHei" pitchFamily="34" charset="0"/>
-                <a:ea typeface="Microsoft JhengHei" pitchFamily="34" charset="-122"/>
-                <a:cs typeface="Microsoft JhengHei" pitchFamily="34" charset="-120"/>
+                <a:latin typeface="Hiragino Sans" pitchFamily="34" charset="0"/>
+                <a:ea typeface="Hiragino Sans" pitchFamily="34" charset="-122"/>
+                <a:cs typeface="Hiragino Sans" pitchFamily="34" charset="-120"/>
               </a:rPr>
               <a:t>落地三扇門　</a:t>
             </a:r>
@@ -11619,9 +11619,9 @@
                 <a:solidFill>
                   <a:srgbClr val="FFFFFF"/>
                 </a:solidFill>
-                <a:latin typeface="Microsoft JhengHei" pitchFamily="34" charset="0"/>
-                <a:ea typeface="Microsoft JhengHei" pitchFamily="34" charset="-122"/>
-                <a:cs typeface="Microsoft JhengHei" pitchFamily="34" charset="-120"/>
+                <a:latin typeface="Hiragino Sans" pitchFamily="34" charset="0"/>
+                <a:ea typeface="Hiragino Sans" pitchFamily="34" charset="-122"/>
+                <a:cs typeface="Hiragino Sans" pitchFamily="34" charset="-120"/>
               </a:rPr>
               <a:t>① 系統介接（TMS 推 noon report → 觸發重算）　② 檔案上傳（CSV/xlsx dryRun 預覽再落庫）　③ 後台設定（門檻 / 告警通道 / 燃料對應表 / 資料來源模式）</a:t>
             </a:r>
@@ -11843,9 +11843,9 @@
                 <a:solidFill>
                   <a:srgbClr val="FFFFFF"/>
                 </a:solidFill>
-                <a:latin typeface="Microsoft JhengHei" pitchFamily="34" charset="0"/>
-                <a:ea typeface="Microsoft JhengHei" pitchFamily="34" charset="-122"/>
-                <a:cs typeface="Microsoft JhengHei" pitchFamily="34" charset="-120"/>
+                <a:latin typeface="Hiragino Sans" pitchFamily="34" charset="0"/>
+                <a:ea typeface="Hiragino Sans" pitchFamily="34" charset="-122"/>
+                <a:cs typeface="Hiragino Sans" pitchFamily="34" charset="-120"/>
               </a:rPr>
               <a:t>13</a:t>
             </a:r>
@@ -11857,9 +11857,9 @@
                 <a:solidFill>
                   <a:srgbClr val="8FA8BD"/>
                 </a:solidFill>
-                <a:latin typeface="Microsoft JhengHei" pitchFamily="34" charset="0"/>
-                <a:ea typeface="Microsoft JhengHei" pitchFamily="34" charset="-122"/>
-                <a:cs typeface="Microsoft JhengHei" pitchFamily="34" charset="-120"/>
+                <a:latin typeface="Hiragino Sans" pitchFamily="34" charset="0"/>
+                <a:ea typeface="Hiragino Sans" pitchFamily="34" charset="-122"/>
+                <a:cs typeface="Hiragino Sans" pitchFamily="34" charset="-120"/>
               </a:rPr>
               <a:t>  /  15</a:t>
             </a:r>
@@ -11896,9 +11896,9 @@
                 <a:solidFill>
                   <a:srgbClr val="F4A72B"/>
                 </a:solidFill>
-                <a:latin typeface="Microsoft JhengHei" pitchFamily="34" charset="0"/>
-                <a:ea typeface="Microsoft JhengHei" pitchFamily="34" charset="-122"/>
-                <a:cs typeface="Microsoft JhengHei" pitchFamily="34" charset="-120"/>
+                <a:latin typeface="Hiragino Sans" pitchFamily="34" charset="0"/>
+                <a:ea typeface="Hiragino Sans" pitchFamily="34" charset="-122"/>
+                <a:cs typeface="Hiragino Sans" pitchFamily="34" charset="-120"/>
               </a:rPr>
               <a:t>DECISION CASCADE</a:t>
             </a:r>
@@ -11935,9 +11935,9 @@
                 <a:solidFill>
                   <a:srgbClr val="FFFFFF"/>
                 </a:solidFill>
-                <a:latin typeface="Microsoft JhengHei" pitchFamily="34" charset="0"/>
-                <a:ea typeface="Microsoft JhengHei" pitchFamily="34" charset="-122"/>
-                <a:cs typeface="Microsoft JhengHei" pitchFamily="34" charset="-120"/>
+                <a:latin typeface="Hiragino Sans" pitchFamily="34" charset="0"/>
+                <a:ea typeface="Hiragino Sans" pitchFamily="34" charset="-122"/>
+                <a:cs typeface="Hiragino Sans" pitchFamily="34" charset="-120"/>
               </a:rPr>
               <a:t>決策級聯：正常 → 注意 → 行動</a:t>
             </a:r>
@@ -11997,13 +11997,13 @@
               <a:buNone/>
             </a:pPr>
             <a:r>
-              <a:rPr lang="en-US" sz="1250" i="1" dirty="0">
+              <a:rPr lang="en-US" sz="1250" dirty="0">
                 <a:solidFill>
                   <a:srgbClr val="C7D6E4"/>
                 </a:solidFill>
-                <a:latin typeface="Microsoft JhengHei" pitchFamily="34" charset="0"/>
-                <a:ea typeface="Microsoft JhengHei" pitchFamily="34" charset="-122"/>
-                <a:cs typeface="Microsoft JhengHei" pitchFamily="34" charset="-120"/>
+                <a:latin typeface="Hiragino Sans" pitchFamily="34" charset="0"/>
+                <a:ea typeface="Hiragino Sans" pitchFamily="34" charset="-122"/>
+                <a:cs typeface="Hiragino Sans" pitchFamily="34" charset="-120"/>
               </a:rPr>
               <a:t>同一套已上線服務，依 Speed Loss 對可調門檻的位置，把船分成三種決策狀態 — 數字觸發流程，最後一步永遠留給人。</a:t>
             </a:r>
@@ -12118,9 +12118,9 @@
                 <a:solidFill>
                   <a:srgbClr val="FFFFFF"/>
                 </a:solidFill>
-                <a:latin typeface="Microsoft JhengHei" pitchFamily="34" charset="0"/>
-                <a:ea typeface="Microsoft JhengHei" pitchFamily="34" charset="-122"/>
-                <a:cs typeface="Microsoft JhengHei" pitchFamily="34" charset="-120"/>
+                <a:latin typeface="Hiragino Sans" pitchFamily="34" charset="0"/>
+                <a:ea typeface="Hiragino Sans" pitchFamily="34" charset="-122"/>
+                <a:cs typeface="Hiragino Sans" pitchFamily="34" charset="-120"/>
               </a:rPr>
               <a:t>01　</a:t>
             </a:r>
@@ -12132,9 +12132,9 @@
                 <a:solidFill>
                   <a:srgbClr val="FFFFFF"/>
                 </a:solidFill>
-                <a:latin typeface="Microsoft JhengHei" pitchFamily="34" charset="0"/>
-                <a:ea typeface="Microsoft JhengHei" pitchFamily="34" charset="-122"/>
-                <a:cs typeface="Microsoft JhengHei" pitchFamily="34" charset="-120"/>
+                <a:latin typeface="Hiragino Sans" pitchFamily="34" charset="0"/>
+                <a:ea typeface="Hiragino Sans" pitchFamily="34" charset="-122"/>
+                <a:cs typeface="Hiragino Sans" pitchFamily="34" charset="-120"/>
               </a:rPr>
               <a:t>正常</a:t>
             </a:r>
@@ -12171,9 +12171,9 @@
                 <a:solidFill>
                   <a:srgbClr val="2A9D8F"/>
                 </a:solidFill>
-                <a:latin typeface="Microsoft JhengHei" pitchFamily="34" charset="0"/>
-                <a:ea typeface="Microsoft JhengHei" pitchFamily="34" charset="-122"/>
-                <a:cs typeface="Microsoft JhengHei" pitchFamily="34" charset="-120"/>
+                <a:latin typeface="Hiragino Sans" pitchFamily="34" charset="0"/>
+                <a:ea typeface="Hiragino Sans" pitchFamily="34" charset="-122"/>
+                <a:cs typeface="Hiragino Sans" pitchFamily="34" charset="-120"/>
               </a:rPr>
               <a:t>條件</a:t>
             </a:r>
@@ -12213,9 +12213,9 @@
                 <a:solidFill>
                   <a:srgbClr val="FFFFFF"/>
                 </a:solidFill>
-                <a:latin typeface="Microsoft JhengHei" pitchFamily="34" charset="0"/>
-                <a:ea typeface="Microsoft JhengHei" pitchFamily="34" charset="-122"/>
-                <a:cs typeface="Microsoft JhengHei" pitchFamily="34" charset="-120"/>
+                <a:latin typeface="Hiragino Sans" pitchFamily="34" charset="0"/>
+                <a:ea typeface="Hiragino Sans" pitchFamily="34" charset="-122"/>
+                <a:cs typeface="Hiragino Sans" pitchFamily="34" charset="-120"/>
               </a:rPr>
               <a:t>Speed Loss 低於門檻</a:t>
             </a:r>
@@ -12233,9 +12233,9 @@
                 <a:solidFill>
                   <a:srgbClr val="FFFFFF"/>
                 </a:solidFill>
-                <a:latin typeface="Microsoft JhengHei" pitchFamily="34" charset="0"/>
-                <a:ea typeface="Microsoft JhengHei" pitchFamily="34" charset="-122"/>
-                <a:cs typeface="Microsoft JhengHei" pitchFamily="34" charset="-120"/>
+                <a:latin typeface="Hiragino Sans" pitchFamily="34" charset="0"/>
+                <a:ea typeface="Hiragino Sans" pitchFamily="34" charset="-122"/>
+                <a:cs typeface="Hiragino Sans" pitchFamily="34" charset="-120"/>
               </a:rPr>
               <a:t>品質旗標通過</a:t>
             </a:r>
@@ -12272,9 +12272,9 @@
                 <a:solidFill>
                   <a:srgbClr val="2A9D8F"/>
                 </a:solidFill>
-                <a:latin typeface="Microsoft JhengHei" pitchFamily="34" charset="0"/>
-                <a:ea typeface="Microsoft JhengHei" pitchFamily="34" charset="-122"/>
-                <a:cs typeface="Microsoft JhengHei" pitchFamily="34" charset="-120"/>
+                <a:latin typeface="Hiragino Sans" pitchFamily="34" charset="0"/>
+                <a:ea typeface="Hiragino Sans" pitchFamily="34" charset="-122"/>
+                <a:cs typeface="Hiragino Sans" pitchFamily="34" charset="-120"/>
               </a:rPr>
               <a:t>系統動作</a:t>
             </a:r>
@@ -12318,9 +12318,9 @@
                 <a:solidFill>
                   <a:srgbClr val="C7D6E4"/>
                 </a:solidFill>
-                <a:latin typeface="Microsoft JhengHei" pitchFamily="34" charset="0"/>
-                <a:ea typeface="Microsoft JhengHei" pitchFamily="34" charset="-122"/>
-                <a:cs typeface="Microsoft JhengHei" pitchFamily="34" charset="-120"/>
+                <a:latin typeface="Hiragino Sans" pitchFamily="34" charset="0"/>
+                <a:ea typeface="Hiragino Sans" pitchFamily="34" charset="-122"/>
+                <a:cs typeface="Hiragino Sans" pitchFamily="34" charset="-120"/>
               </a:rPr>
               <a:t>看板綠燈、持續監測</a:t>
             </a:r>
@@ -12342,9 +12342,9 @@
                 <a:solidFill>
                   <a:srgbClr val="C7D6E4"/>
                 </a:solidFill>
-                <a:latin typeface="Microsoft JhengHei" pitchFamily="34" charset="0"/>
-                <a:ea typeface="Microsoft JhengHei" pitchFamily="34" charset="-122"/>
-                <a:cs typeface="Microsoft JhengHei" pitchFamily="34" charset="-120"/>
+                <a:latin typeface="Hiragino Sans" pitchFamily="34" charset="0"/>
+                <a:ea typeface="Hiragino Sans" pitchFamily="34" charset="-122"/>
+                <a:cs typeface="Hiragino Sans" pitchFamily="34" charset="-120"/>
               </a:rPr>
               <a:t>無需人工介入</a:t>
             </a:r>
@@ -12403,9 +12403,9 @@
                 <a:solidFill>
                   <a:srgbClr val="5A6B7B"/>
                 </a:solidFill>
-                <a:latin typeface="Microsoft JhengHei" pitchFamily="34" charset="0"/>
-                <a:ea typeface="Microsoft JhengHei" pitchFamily="34" charset="-122"/>
-                <a:cs typeface="Microsoft JhengHei" pitchFamily="34" charset="-120"/>
+                <a:latin typeface="Hiragino Sans" pitchFamily="34" charset="0"/>
+                <a:ea typeface="Hiragino Sans" pitchFamily="34" charset="-122"/>
+                <a:cs typeface="Hiragino Sans" pitchFamily="34" charset="-120"/>
               </a:rPr>
               <a:t>例　</a:t>
             </a:r>
@@ -12417,9 +12417,9 @@
                 <a:solidFill>
                   <a:srgbClr val="0A2540"/>
                 </a:solidFill>
-                <a:latin typeface="Microsoft JhengHei" pitchFamily="34" charset="0"/>
-                <a:ea typeface="Microsoft JhengHei" pitchFamily="34" charset="-122"/>
-                <a:cs typeface="Microsoft JhengHei" pitchFamily="34" charset="-120"/>
+                <a:latin typeface="Hiragino Sans" pitchFamily="34" charset="0"/>
+                <a:ea typeface="Hiragino Sans" pitchFamily="34" charset="-122"/>
+                <a:cs typeface="Hiragino Sans" pitchFamily="34" charset="-120"/>
               </a:rPr>
               <a:t>多數船</a:t>
             </a:r>
@@ -12558,9 +12558,9 @@
                 <a:solidFill>
                   <a:srgbClr val="0A2540"/>
                 </a:solidFill>
-                <a:latin typeface="Microsoft JhengHei" pitchFamily="34" charset="0"/>
-                <a:ea typeface="Microsoft JhengHei" pitchFamily="34" charset="-122"/>
-                <a:cs typeface="Microsoft JhengHei" pitchFamily="34" charset="-120"/>
+                <a:latin typeface="Hiragino Sans" pitchFamily="34" charset="0"/>
+                <a:ea typeface="Hiragino Sans" pitchFamily="34" charset="-122"/>
+                <a:cs typeface="Hiragino Sans" pitchFamily="34" charset="-120"/>
               </a:rPr>
               <a:t>02　</a:t>
             </a:r>
@@ -12572,9 +12572,9 @@
                 <a:solidFill>
                   <a:srgbClr val="0A2540"/>
                 </a:solidFill>
-                <a:latin typeface="Microsoft JhengHei" pitchFamily="34" charset="0"/>
-                <a:ea typeface="Microsoft JhengHei" pitchFamily="34" charset="-122"/>
-                <a:cs typeface="Microsoft JhengHei" pitchFamily="34" charset="-120"/>
+                <a:latin typeface="Hiragino Sans" pitchFamily="34" charset="0"/>
+                <a:ea typeface="Hiragino Sans" pitchFamily="34" charset="-122"/>
+                <a:cs typeface="Hiragino Sans" pitchFamily="34" charset="-120"/>
               </a:rPr>
               <a:t>注意</a:t>
             </a:r>
@@ -12611,9 +12611,9 @@
                 <a:solidFill>
                   <a:srgbClr val="2A9D8F"/>
                 </a:solidFill>
-                <a:latin typeface="Microsoft JhengHei" pitchFamily="34" charset="0"/>
-                <a:ea typeface="Microsoft JhengHei" pitchFamily="34" charset="-122"/>
-                <a:cs typeface="Microsoft JhengHei" pitchFamily="34" charset="-120"/>
+                <a:latin typeface="Hiragino Sans" pitchFamily="34" charset="0"/>
+                <a:ea typeface="Hiragino Sans" pitchFamily="34" charset="-122"/>
+                <a:cs typeface="Hiragino Sans" pitchFamily="34" charset="-120"/>
               </a:rPr>
               <a:t>條件</a:t>
             </a:r>
@@ -12653,9 +12653,9 @@
                 <a:solidFill>
                   <a:srgbClr val="FFFFFF"/>
                 </a:solidFill>
-                <a:latin typeface="Microsoft JhengHei" pitchFamily="34" charset="0"/>
-                <a:ea typeface="Microsoft JhengHei" pitchFamily="34" charset="-122"/>
-                <a:cs typeface="Microsoft JhengHei" pitchFamily="34" charset="-120"/>
+                <a:latin typeface="Hiragino Sans" pitchFamily="34" charset="0"/>
+                <a:ea typeface="Hiragino Sans" pitchFamily="34" charset="-122"/>
+                <a:cs typeface="Hiragino Sans" pitchFamily="34" charset="-120"/>
               </a:rPr>
               <a:t>接近 / 跨越門檻</a:t>
             </a:r>
@@ -12673,9 +12673,9 @@
                 <a:solidFill>
                   <a:srgbClr val="FFFFFF"/>
                 </a:solidFill>
-                <a:latin typeface="Microsoft JhengHei" pitchFamily="34" charset="0"/>
-                <a:ea typeface="Microsoft JhengHei" pitchFamily="34" charset="-122"/>
-                <a:cs typeface="Microsoft JhengHei" pitchFamily="34" charset="-120"/>
+                <a:latin typeface="Hiragino Sans" pitchFamily="34" charset="0"/>
+                <a:ea typeface="Hiragino Sans" pitchFamily="34" charset="-122"/>
+                <a:cs typeface="Hiragino Sans" pitchFamily="34" charset="-120"/>
               </a:rPr>
               <a:t>進 review 佇列</a:t>
             </a:r>
@@ -12712,9 +12712,9 @@
                 <a:solidFill>
                   <a:srgbClr val="2A9D8F"/>
                 </a:solidFill>
-                <a:latin typeface="Microsoft JhengHei" pitchFamily="34" charset="0"/>
-                <a:ea typeface="Microsoft JhengHei" pitchFamily="34" charset="-122"/>
-                <a:cs typeface="Microsoft JhengHei" pitchFamily="34" charset="-120"/>
+                <a:latin typeface="Hiragino Sans" pitchFamily="34" charset="0"/>
+                <a:ea typeface="Hiragino Sans" pitchFamily="34" charset="-122"/>
+                <a:cs typeface="Hiragino Sans" pitchFamily="34" charset="-120"/>
               </a:rPr>
               <a:t>系統動作</a:t>
             </a:r>
@@ -12758,9 +12758,9 @@
                 <a:solidFill>
                   <a:srgbClr val="C7D6E4"/>
                 </a:solidFill>
-                <a:latin typeface="Microsoft JhengHei" pitchFamily="34" charset="0"/>
-                <a:ea typeface="Microsoft JhengHei" pitchFamily="34" charset="-122"/>
-                <a:cs typeface="Microsoft JhengHei" pitchFamily="34" charset="-120"/>
+                <a:latin typeface="Hiragino Sans" pitchFamily="34" charset="0"/>
+                <a:ea typeface="Hiragino Sans" pitchFamily="34" charset="-122"/>
+                <a:cs typeface="Hiragino Sans" pitchFamily="34" charset="-120"/>
               </a:rPr>
               <a:t>Bedrock 產證據簡報</a:t>
             </a:r>
@@ -12782,9 +12782,9 @@
                 <a:solidFill>
                   <a:srgbClr val="C7D6E4"/>
                 </a:solidFill>
-                <a:latin typeface="Microsoft JhengHei" pitchFamily="34" charset="0"/>
-                <a:ea typeface="Microsoft JhengHei" pitchFamily="34" charset="-122"/>
-                <a:cs typeface="Microsoft JhengHei" pitchFamily="34" charset="-120"/>
+                <a:latin typeface="Hiragino Sans" pitchFamily="34" charset="0"/>
+                <a:ea typeface="Hiragino Sans" pitchFamily="34" charset="-122"/>
+                <a:cs typeface="Hiragino Sans" pitchFamily="34" charset="-120"/>
               </a:rPr>
               <a:t>看板黃燈、reviewPriority 排序</a:t>
             </a:r>
@@ -12843,9 +12843,9 @@
                 <a:solidFill>
                   <a:srgbClr val="5A6B7B"/>
                 </a:solidFill>
-                <a:latin typeface="Microsoft JhengHei" pitchFamily="34" charset="0"/>
-                <a:ea typeface="Microsoft JhengHei" pitchFamily="34" charset="-122"/>
-                <a:cs typeface="Microsoft JhengHei" pitchFamily="34" charset="-120"/>
+                <a:latin typeface="Hiragino Sans" pitchFamily="34" charset="0"/>
+                <a:ea typeface="Hiragino Sans" pitchFamily="34" charset="-122"/>
+                <a:cs typeface="Hiragino Sans" pitchFamily="34" charset="-120"/>
               </a:rPr>
               <a:t>例　</a:t>
             </a:r>
@@ -12857,9 +12857,9 @@
                 <a:solidFill>
                   <a:srgbClr val="0A2540"/>
                 </a:solidFill>
-                <a:latin typeface="Microsoft JhengHei" pitchFamily="34" charset="0"/>
-                <a:ea typeface="Microsoft JhengHei" pitchFamily="34" charset="-122"/>
-                <a:cs typeface="Microsoft JhengHei" pitchFamily="34" charset="-120"/>
+                <a:latin typeface="Hiragino Sans" pitchFamily="34" charset="0"/>
+                <a:ea typeface="Hiragino Sans" pitchFamily="34" charset="-122"/>
+                <a:cs typeface="Hiragino Sans" pitchFamily="34" charset="-120"/>
               </a:rPr>
               <a:t>S23 · 8.9%</a:t>
             </a:r>
@@ -12998,9 +12998,9 @@
                 <a:solidFill>
                   <a:srgbClr val="FFFFFF"/>
                 </a:solidFill>
-                <a:latin typeface="Microsoft JhengHei" pitchFamily="34" charset="0"/>
-                <a:ea typeface="Microsoft JhengHei" pitchFamily="34" charset="-122"/>
-                <a:cs typeface="Microsoft JhengHei" pitchFamily="34" charset="-120"/>
+                <a:latin typeface="Hiragino Sans" pitchFamily="34" charset="0"/>
+                <a:ea typeface="Hiragino Sans" pitchFamily="34" charset="-122"/>
+                <a:cs typeface="Hiragino Sans" pitchFamily="34" charset="-120"/>
               </a:rPr>
               <a:t>03　</a:t>
             </a:r>
@@ -13012,9 +13012,9 @@
                 <a:solidFill>
                   <a:srgbClr val="FFFFFF"/>
                 </a:solidFill>
-                <a:latin typeface="Microsoft JhengHei" pitchFamily="34" charset="0"/>
-                <a:ea typeface="Microsoft JhengHei" pitchFamily="34" charset="-122"/>
-                <a:cs typeface="Microsoft JhengHei" pitchFamily="34" charset="-120"/>
+                <a:latin typeface="Hiragino Sans" pitchFamily="34" charset="0"/>
+                <a:ea typeface="Hiragino Sans" pitchFamily="34" charset="-122"/>
+                <a:cs typeface="Hiragino Sans" pitchFamily="34" charset="-120"/>
               </a:rPr>
               <a:t>行動</a:t>
             </a:r>
@@ -13051,9 +13051,9 @@
                 <a:solidFill>
                   <a:srgbClr val="2A9D8F"/>
                 </a:solidFill>
-                <a:latin typeface="Microsoft JhengHei" pitchFamily="34" charset="0"/>
-                <a:ea typeface="Microsoft JhengHei" pitchFamily="34" charset="-122"/>
-                <a:cs typeface="Microsoft JhengHei" pitchFamily="34" charset="-120"/>
+                <a:latin typeface="Hiragino Sans" pitchFamily="34" charset="0"/>
+                <a:ea typeface="Hiragino Sans" pitchFamily="34" charset="-122"/>
+                <a:cs typeface="Hiragino Sans" pitchFamily="34" charset="-120"/>
               </a:rPr>
               <a:t>條件</a:t>
             </a:r>
@@ -13093,9 +13093,9 @@
                 <a:solidFill>
                   <a:srgbClr val="FFFFFF"/>
                 </a:solidFill>
-                <a:latin typeface="Microsoft JhengHei" pitchFamily="34" charset="0"/>
-                <a:ea typeface="Microsoft JhengHei" pitchFamily="34" charset="-122"/>
-                <a:cs typeface="Microsoft JhengHei" pitchFamily="34" charset="-120"/>
+                <a:latin typeface="Hiragino Sans" pitchFamily="34" charset="0"/>
+                <a:ea typeface="Hiragino Sans" pitchFamily="34" charset="-122"/>
+                <a:cs typeface="Hiragino Sans" pitchFamily="34" charset="-120"/>
               </a:rPr>
               <a:t>持續跨越 + 高信心</a:t>
             </a:r>
@@ -13113,9 +13113,9 @@
                 <a:solidFill>
                   <a:srgbClr val="FFFFFF"/>
                 </a:solidFill>
-                <a:latin typeface="Microsoft JhengHei" pitchFamily="34" charset="0"/>
-                <a:ea typeface="Microsoft JhengHei" pitchFamily="34" charset="-122"/>
-                <a:cs typeface="Microsoft JhengHei" pitchFamily="34" charset="-120"/>
+                <a:latin typeface="Hiragino Sans" pitchFamily="34" charset="0"/>
+                <a:ea typeface="Hiragino Sans" pitchFamily="34" charset="-122"/>
+                <a:cs typeface="Hiragino Sans" pitchFamily="34" charset="-120"/>
               </a:rPr>
               <a:t>觸發告警扇出</a:t>
             </a:r>
@@ -13152,9 +13152,9 @@
                 <a:solidFill>
                   <a:srgbClr val="2A9D8F"/>
                 </a:solidFill>
-                <a:latin typeface="Microsoft JhengHei" pitchFamily="34" charset="0"/>
-                <a:ea typeface="Microsoft JhengHei" pitchFamily="34" charset="-122"/>
-                <a:cs typeface="Microsoft JhengHei" pitchFamily="34" charset="-120"/>
+                <a:latin typeface="Hiragino Sans" pitchFamily="34" charset="0"/>
+                <a:ea typeface="Hiragino Sans" pitchFamily="34" charset="-122"/>
+                <a:cs typeface="Hiragino Sans" pitchFamily="34" charset="-120"/>
               </a:rPr>
               <a:t>系統動作</a:t>
             </a:r>
@@ -13198,9 +13198,9 @@
                 <a:solidFill>
                   <a:srgbClr val="C7D6E4"/>
                 </a:solidFill>
-                <a:latin typeface="Microsoft JhengHei" pitchFamily="34" charset="0"/>
-                <a:ea typeface="Microsoft JhengHei" pitchFamily="34" charset="-122"/>
-                <a:cs typeface="Microsoft JhengHei" pitchFamily="34" charset="-120"/>
+                <a:latin typeface="Hiragino Sans" pitchFamily="34" charset="0"/>
+                <a:ea typeface="Hiragino Sans" pitchFamily="34" charset="-122"/>
+                <a:cs typeface="Hiragino Sans" pitchFamily="34" charset="-120"/>
               </a:rPr>
               <a:t>/alerts/notify → SNS 告警</a:t>
             </a:r>
@@ -13222,9 +13222,9 @@
                 <a:solidFill>
                   <a:srgbClr val="C7D6E4"/>
                 </a:solidFill>
-                <a:latin typeface="Microsoft JhengHei" pitchFamily="34" charset="0"/>
-                <a:ea typeface="Microsoft JhengHei" pitchFamily="34" charset="-122"/>
-                <a:cs typeface="Microsoft JhengHei" pitchFamily="34" charset="-120"/>
+                <a:latin typeface="Hiragino Sans" pitchFamily="34" charset="0"/>
+                <a:ea typeface="Hiragino Sans" pitchFamily="34" charset="-122"/>
+                <a:cs typeface="Hiragino Sans" pitchFamily="34" charset="-120"/>
               </a:rPr>
               <a:t>人安排水下檢查 / 清洗 / 打磨</a:t>
             </a:r>
@@ -13283,9 +13283,9 @@
                 <a:solidFill>
                   <a:srgbClr val="5A6B7B"/>
                 </a:solidFill>
-                <a:latin typeface="Microsoft JhengHei" pitchFamily="34" charset="0"/>
-                <a:ea typeface="Microsoft JhengHei" pitchFamily="34" charset="-122"/>
-                <a:cs typeface="Microsoft JhengHei" pitchFamily="34" charset="-120"/>
+                <a:latin typeface="Hiragino Sans" pitchFamily="34" charset="0"/>
+                <a:ea typeface="Hiragino Sans" pitchFamily="34" charset="-122"/>
+                <a:cs typeface="Hiragino Sans" pitchFamily="34" charset="-120"/>
               </a:rPr>
               <a:t>例　</a:t>
             </a:r>
@@ -13297,9 +13297,9 @@
                 <a:solidFill>
                   <a:srgbClr val="0A2540"/>
                 </a:solidFill>
-                <a:latin typeface="Microsoft JhengHei" pitchFamily="34" charset="0"/>
-                <a:ea typeface="Microsoft JhengHei" pitchFamily="34" charset="-122"/>
-                <a:cs typeface="Microsoft JhengHei" pitchFamily="34" charset="-120"/>
+                <a:latin typeface="Hiragino Sans" pitchFamily="34" charset="0"/>
+                <a:ea typeface="Hiragino Sans" pitchFamily="34" charset="-122"/>
+                <a:cs typeface="Hiragino Sans" pitchFamily="34" charset="-120"/>
               </a:rPr>
               <a:t>S11 · 21.8%</a:t>
             </a:r>
@@ -13336,9 +13336,9 @@
                 <a:solidFill>
                   <a:srgbClr val="C7D6E4"/>
                 </a:solidFill>
-                <a:latin typeface="Microsoft JhengHei" pitchFamily="34" charset="0"/>
-                <a:ea typeface="Microsoft JhengHei" pitchFamily="34" charset="-122"/>
-                <a:cs typeface="Microsoft JhengHei" pitchFamily="34" charset="-120"/>
+                <a:latin typeface="Hiragino Sans" pitchFamily="34" charset="0"/>
+                <a:ea typeface="Hiragino Sans" pitchFamily="34" charset="-122"/>
+                <a:cs typeface="Hiragino Sans" pitchFamily="34" charset="-120"/>
               </a:rPr>
               <a:t>常態監測中</a:t>
             </a:r>
@@ -13375,9 +13375,9 @@
                 <a:solidFill>
                   <a:srgbClr val="C7D6E4"/>
                 </a:solidFill>
-                <a:latin typeface="Microsoft JhengHei" pitchFamily="34" charset="0"/>
-                <a:ea typeface="Microsoft JhengHei" pitchFamily="34" charset="-122"/>
-                <a:cs typeface="Microsoft JhengHei" pitchFamily="34" charset="-120"/>
+                <a:latin typeface="Hiragino Sans" pitchFamily="34" charset="0"/>
+                <a:ea typeface="Hiragino Sans" pitchFamily="34" charset="-122"/>
+                <a:cs typeface="Hiragino Sans" pitchFamily="34" charset="-120"/>
               </a:rPr>
               <a:t>n=506 · HIGH · priority 2</a:t>
             </a:r>
@@ -13414,9 +13414,9 @@
                 <a:solidFill>
                   <a:srgbClr val="C7D6E4"/>
                 </a:solidFill>
-                <a:latin typeface="Microsoft JhengHei" pitchFamily="34" charset="0"/>
-                <a:ea typeface="Microsoft JhengHei" pitchFamily="34" charset="-122"/>
-                <a:cs typeface="Microsoft JhengHei" pitchFamily="34" charset="-120"/>
+                <a:latin typeface="Hiragino Sans" pitchFamily="34" charset="0"/>
+                <a:ea typeface="Hiragino Sans" pitchFamily="34" charset="-122"/>
+                <a:cs typeface="Hiragino Sans" pitchFamily="34" charset="-120"/>
               </a:rPr>
               <a:t>539 有效日 · 691 天未清 · priority 1</a:t>
             </a:r>
@@ -13485,9 +13485,9 @@
                 <a:solidFill>
                   <a:srgbClr val="F4A72B"/>
                 </a:solidFill>
-                <a:latin typeface="Microsoft JhengHei" pitchFamily="34" charset="0"/>
-                <a:ea typeface="Microsoft JhengHei" pitchFamily="34" charset="-122"/>
-                <a:cs typeface="Microsoft JhengHei" pitchFamily="34" charset="-120"/>
+                <a:latin typeface="Hiragino Sans" pitchFamily="34" charset="0"/>
+                <a:ea typeface="Hiragino Sans" pitchFamily="34" charset="-122"/>
+                <a:cs typeface="Hiragino Sans" pitchFamily="34" charset="-120"/>
               </a:rPr>
               <a:t>◆ 人在迴路　</a:t>
             </a:r>
@@ -13502,9 +13502,9 @@
                 <a:solidFill>
                   <a:srgbClr val="FFFFFF"/>
                 </a:solidFill>
-                <a:latin typeface="Microsoft JhengHei" pitchFamily="34" charset="0"/>
-                <a:ea typeface="Microsoft JhengHei" pitchFamily="34" charset="-122"/>
-                <a:cs typeface="Microsoft JhengHei" pitchFamily="34" charset="-120"/>
+                <a:latin typeface="Hiragino Sans" pitchFamily="34" charset="0"/>
+                <a:ea typeface="Hiragino Sans" pitchFamily="34" charset="-122"/>
+                <a:cs typeface="Hiragino Sans" pitchFamily="34" charset="-120"/>
               </a:rPr>
               <a:t>門檻可調（/config/threshold）、扇出通道可換（SNS → SES / Slack）。系統只做「更快、可解釋、可行動」的證據，清不清、何時清由海事專家拍板。</a:t>
             </a:r>
@@ -13726,9 +13726,9 @@
                 <a:solidFill>
                   <a:srgbClr val="FFFFFF"/>
                 </a:solidFill>
-                <a:latin typeface="Microsoft JhengHei" pitchFamily="34" charset="0"/>
-                <a:ea typeface="Microsoft JhengHei" pitchFamily="34" charset="-122"/>
-                <a:cs typeface="Microsoft JhengHei" pitchFamily="34" charset="-120"/>
+                <a:latin typeface="Hiragino Sans" pitchFamily="34" charset="0"/>
+                <a:ea typeface="Hiragino Sans" pitchFamily="34" charset="-122"/>
+                <a:cs typeface="Hiragino Sans" pitchFamily="34" charset="-120"/>
               </a:rPr>
               <a:t>14</a:t>
             </a:r>
@@ -13740,9 +13740,9 @@
                 <a:solidFill>
                   <a:srgbClr val="8FA8BD"/>
                 </a:solidFill>
-                <a:latin typeface="Microsoft JhengHei" pitchFamily="34" charset="0"/>
-                <a:ea typeface="Microsoft JhengHei" pitchFamily="34" charset="-122"/>
-                <a:cs typeface="Microsoft JhengHei" pitchFamily="34" charset="-120"/>
+                <a:latin typeface="Hiragino Sans" pitchFamily="34" charset="0"/>
+                <a:ea typeface="Hiragino Sans" pitchFamily="34" charset="-122"/>
+                <a:cs typeface="Hiragino Sans" pitchFamily="34" charset="-120"/>
               </a:rPr>
               <a:t>  /  15</a:t>
             </a:r>
@@ -13843,9 +13843,9 @@
                 <a:solidFill>
                   <a:srgbClr val="F4A72B"/>
                 </a:solidFill>
-                <a:latin typeface="Microsoft JhengHei" pitchFamily="34" charset="0"/>
-                <a:ea typeface="Microsoft JhengHei" pitchFamily="34" charset="-122"/>
-                <a:cs typeface="Microsoft JhengHei" pitchFamily="34" charset="-120"/>
+                <a:latin typeface="Hiragino Sans" pitchFamily="34" charset="0"/>
+                <a:ea typeface="Hiragino Sans" pitchFamily="34" charset="-122"/>
+                <a:cs typeface="Hiragino Sans" pitchFamily="34" charset="-120"/>
               </a:rPr>
               <a:t>LIVE DEMO</a:t>
             </a:r>
@@ -13882,9 +13882,9 @@
                 <a:solidFill>
                   <a:srgbClr val="FFFFFF"/>
                 </a:solidFill>
-                <a:latin typeface="Microsoft JhengHei" pitchFamily="34" charset="0"/>
-                <a:ea typeface="Microsoft JhengHei" pitchFamily="34" charset="-122"/>
-                <a:cs typeface="Microsoft JhengHei" pitchFamily="34" charset="-120"/>
+                <a:latin typeface="Hiragino Sans" pitchFamily="34" charset="0"/>
+                <a:ea typeface="Hiragino Sans" pitchFamily="34" charset="-122"/>
+                <a:cs typeface="Hiragino Sans" pitchFamily="34" charset="-120"/>
               </a:rPr>
               <a:t>現場導覽：一個穩定 URL，三個入口</a:t>
             </a:r>
@@ -13948,9 +13948,9 @@
                 <a:solidFill>
                   <a:srgbClr val="C7D6E4"/>
                 </a:solidFill>
-                <a:latin typeface="Microsoft JhengHei" pitchFamily="34" charset="0"/>
-                <a:ea typeface="Microsoft JhengHei" pitchFamily="34" charset="-122"/>
-                <a:cs typeface="Microsoft JhengHei" pitchFamily="34" charset="-120"/>
+                <a:latin typeface="Hiragino Sans" pitchFamily="34" charset="0"/>
+                <a:ea typeface="Hiragino Sans" pitchFamily="34" charset="-122"/>
+                <a:cs typeface="Hiragino Sans" pitchFamily="34" charset="-120"/>
               </a:rPr>
               <a:t>同一顆 Fargate 容器、同一個 ALB 靜態網域，task 重啟不換位址 — 三個頁面現場可直接打開。</a:t>
             </a:r>
@@ -14048,9 +14048,9 @@
                 <a:solidFill>
                   <a:srgbClr val="FFFFFF"/>
                 </a:solidFill>
-                <a:latin typeface="Microsoft JhengHei" pitchFamily="34" charset="0"/>
-                <a:ea typeface="Microsoft JhengHei" pitchFamily="34" charset="-122"/>
-                <a:cs typeface="Microsoft JhengHei" pitchFamily="34" charset="-120"/>
+                <a:latin typeface="Hiragino Sans" pitchFamily="34" charset="0"/>
+                <a:ea typeface="Hiragino Sans" pitchFamily="34" charset="-122"/>
+                <a:cs typeface="Hiragino Sans" pitchFamily="34" charset="-120"/>
               </a:rPr>
               <a:t>1</a:t>
             </a:r>
@@ -14087,9 +14087,9 @@
                 <a:solidFill>
                   <a:srgbClr val="FFFFFF"/>
                 </a:solidFill>
-                <a:latin typeface="Microsoft JhengHei" pitchFamily="34" charset="0"/>
-                <a:ea typeface="Microsoft JhengHei" pitchFamily="34" charset="-122"/>
-                <a:cs typeface="Microsoft JhengHei" pitchFamily="34" charset="-120"/>
+                <a:latin typeface="Hiragino Sans" pitchFamily="34" charset="0"/>
+                <a:ea typeface="Hiragino Sans" pitchFamily="34" charset="-122"/>
+                <a:cs typeface="Hiragino Sans" pitchFamily="34" charset="-120"/>
               </a:rPr>
               <a:t>產品首頁</a:t>
             </a:r>
@@ -14148,9 +14148,9 @@
                 <a:solidFill>
                   <a:srgbClr val="F4A72B"/>
                 </a:solidFill>
-                <a:latin typeface="Microsoft JhengHei" pitchFamily="34" charset="0"/>
-                <a:ea typeface="Microsoft JhengHei" pitchFamily="34" charset="-122"/>
-                <a:cs typeface="Microsoft JhengHei" pitchFamily="34" charset="-120"/>
+                <a:latin typeface="Hiragino Sans" pitchFamily="34" charset="0"/>
+                <a:ea typeface="Hiragino Sans" pitchFamily="34" charset="-122"/>
+                <a:cs typeface="Hiragino Sans" pitchFamily="34" charset="-120"/>
               </a:rPr>
               <a:t>/</a:t>
             </a:r>
@@ -14190,9 +14190,9 @@
                 <a:solidFill>
                   <a:srgbClr val="C7D6E4"/>
                 </a:solidFill>
-                <a:latin typeface="Microsoft JhengHei" pitchFamily="34" charset="0"/>
-                <a:ea typeface="Microsoft JhengHei" pitchFamily="34" charset="-122"/>
-                <a:cs typeface="Microsoft JhengHei" pitchFamily="34" charset="-120"/>
+                <a:latin typeface="Hiragino Sans" pitchFamily="34" charset="0"/>
+                <a:ea typeface="Hiragino Sans" pitchFamily="34" charset="-122"/>
+                <a:cs typeface="Hiragino Sans" pitchFamily="34" charset="-120"/>
               </a:rPr>
               <a:t>命題、方法（ISO 19030 · k=FOC/STW³）與價值主張概覽</a:t>
             </a:r>
@@ -14290,9 +14290,9 @@
                 <a:solidFill>
                   <a:srgbClr val="FFFFFF"/>
                 </a:solidFill>
-                <a:latin typeface="Microsoft JhengHei" pitchFamily="34" charset="0"/>
-                <a:ea typeface="Microsoft JhengHei" pitchFamily="34" charset="-122"/>
-                <a:cs typeface="Microsoft JhengHei" pitchFamily="34" charset="-120"/>
+                <a:latin typeface="Hiragino Sans" pitchFamily="34" charset="0"/>
+                <a:ea typeface="Hiragino Sans" pitchFamily="34" charset="-122"/>
+                <a:cs typeface="Hiragino Sans" pitchFamily="34" charset="-120"/>
               </a:rPr>
               <a:t>2</a:t>
             </a:r>
@@ -14329,9 +14329,9 @@
                 <a:solidFill>
                   <a:srgbClr val="FFFFFF"/>
                 </a:solidFill>
-                <a:latin typeface="Microsoft JhengHei" pitchFamily="34" charset="0"/>
-                <a:ea typeface="Microsoft JhengHei" pitchFamily="34" charset="-122"/>
-                <a:cs typeface="Microsoft JhengHei" pitchFamily="34" charset="-120"/>
+                <a:latin typeface="Hiragino Sans" pitchFamily="34" charset="0"/>
+                <a:ea typeface="Hiragino Sans" pitchFamily="34" charset="-122"/>
+                <a:cs typeface="Hiragino Sans" pitchFamily="34" charset="-120"/>
               </a:rPr>
               <a:t>決策看板</a:t>
             </a:r>
@@ -14390,9 +14390,9 @@
                 <a:solidFill>
                   <a:srgbClr val="F4A72B"/>
                 </a:solidFill>
-                <a:latin typeface="Microsoft JhengHei" pitchFamily="34" charset="0"/>
-                <a:ea typeface="Microsoft JhengHei" pitchFamily="34" charset="-122"/>
-                <a:cs typeface="Microsoft JhengHei" pitchFamily="34" charset="-120"/>
+                <a:latin typeface="Hiragino Sans" pitchFamily="34" charset="0"/>
+                <a:ea typeface="Hiragino Sans" pitchFamily="34" charset="-122"/>
+                <a:cs typeface="Hiragino Sans" pitchFamily="34" charset="-120"/>
               </a:rPr>
               <a:t>/dashboard.html</a:t>
             </a:r>
@@ -14432,9 +14432,9 @@
                 <a:solidFill>
                   <a:srgbClr val="C7D6E4"/>
                 </a:solidFill>
-                <a:latin typeface="Microsoft JhengHei" pitchFamily="34" charset="0"/>
-                <a:ea typeface="Microsoft JhengHei" pitchFamily="34" charset="-122"/>
-                <a:cs typeface="Microsoft JhengHei" pitchFamily="34" charset="-120"/>
+                <a:latin typeface="Hiragino Sans" pitchFamily="34" charset="0"/>
+                <a:ea typeface="Hiragino Sans" pitchFamily="34" charset="-122"/>
+                <a:cs typeface="Hiragino Sans" pitchFamily="34" charset="-120"/>
               </a:rPr>
               <a:t>15 艘 Speed Loss 排序、證據序列、AI 簡報與可調門檻</a:t>
             </a:r>
@@ -14532,9 +14532,9 @@
                 <a:solidFill>
                   <a:srgbClr val="FFFFFF"/>
                 </a:solidFill>
-                <a:latin typeface="Microsoft JhengHei" pitchFamily="34" charset="0"/>
-                <a:ea typeface="Microsoft JhengHei" pitchFamily="34" charset="-122"/>
-                <a:cs typeface="Microsoft JhengHei" pitchFamily="34" charset="-120"/>
+                <a:latin typeface="Hiragino Sans" pitchFamily="34" charset="0"/>
+                <a:ea typeface="Hiragino Sans" pitchFamily="34" charset="-122"/>
+                <a:cs typeface="Hiragino Sans" pitchFamily="34" charset="-120"/>
               </a:rPr>
               <a:t>3</a:t>
             </a:r>
@@ -14571,9 +14571,9 @@
                 <a:solidFill>
                   <a:srgbClr val="FFFFFF"/>
                 </a:solidFill>
-                <a:latin typeface="Microsoft JhengHei" pitchFamily="34" charset="0"/>
-                <a:ea typeface="Microsoft JhengHei" pitchFamily="34" charset="-122"/>
-                <a:cs typeface="Microsoft JhengHei" pitchFamily="34" charset="-120"/>
+                <a:latin typeface="Hiragino Sans" pitchFamily="34" charset="0"/>
+                <a:ea typeface="Hiragino Sans" pitchFamily="34" charset="-122"/>
+                <a:cs typeface="Hiragino Sans" pitchFamily="34" charset="-120"/>
               </a:rPr>
               <a:t>架構互動圖</a:t>
             </a:r>
@@ -14632,9 +14632,9 @@
                 <a:solidFill>
                   <a:srgbClr val="F4A72B"/>
                 </a:solidFill>
-                <a:latin typeface="Microsoft JhengHei" pitchFamily="34" charset="0"/>
-                <a:ea typeface="Microsoft JhengHei" pitchFamily="34" charset="-122"/>
-                <a:cs typeface="Microsoft JhengHei" pitchFamily="34" charset="-120"/>
+                <a:latin typeface="Hiragino Sans" pitchFamily="34" charset="0"/>
+                <a:ea typeface="Hiragino Sans" pitchFamily="34" charset="-122"/>
+                <a:cs typeface="Hiragino Sans" pitchFamily="34" charset="-120"/>
               </a:rPr>
               <a:t>/architecture.html</a:t>
             </a:r>
@@ -14674,9 +14674,9 @@
                 <a:solidFill>
                   <a:srgbClr val="C7D6E4"/>
                 </a:solidFill>
-                <a:latin typeface="Microsoft JhengHei" pitchFamily="34" charset="0"/>
-                <a:ea typeface="Microsoft JhengHei" pitchFamily="34" charset="-122"/>
-                <a:cs typeface="Microsoft JhengHei" pitchFamily="34" charset="-120"/>
+                <a:latin typeface="Hiragino Sans" pitchFamily="34" charset="0"/>
+                <a:ea typeface="Hiragino Sans" pitchFamily="34" charset="-122"/>
+                <a:cs typeface="Hiragino Sans" pitchFamily="34" charset="-120"/>
               </a:rPr>
               <a:t>本簡報架構的網頁版：服務節點、資料流與方案對照</a:t>
             </a:r>
@@ -14742,9 +14742,9 @@
                 <a:solidFill>
                   <a:srgbClr val="2A9D8F"/>
                 </a:solidFill>
-                <a:latin typeface="Microsoft JhengHei" pitchFamily="34" charset="0"/>
-                <a:ea typeface="Microsoft JhengHei" pitchFamily="34" charset="-122"/>
-                <a:cs typeface="Microsoft JhengHei" pitchFamily="34" charset="-120"/>
+                <a:latin typeface="Hiragino Sans" pitchFamily="34" charset="0"/>
+                <a:ea typeface="Hiragino Sans" pitchFamily="34" charset="-122"/>
+                <a:cs typeface="Hiragino Sans" pitchFamily="34" charset="-120"/>
               </a:rPr>
               <a:t>Base　</a:t>
             </a:r>
@@ -14756,9 +14756,9 @@
                 <a:solidFill>
                   <a:srgbClr val="FFFFFF"/>
                 </a:solidFill>
-                <a:latin typeface="Microsoft JhengHei" pitchFamily="34" charset="0"/>
-                <a:ea typeface="Microsoft JhengHei" pitchFamily="34" charset="-122"/>
-                <a:cs typeface="Microsoft JhengHei" pitchFamily="34" charset="-120"/>
+                <a:latin typeface="Hiragino Sans" pitchFamily="34" charset="0"/>
+                <a:ea typeface="Hiragino Sans" pitchFamily="34" charset="-122"/>
+                <a:cs typeface="Hiragino Sans" pitchFamily="34" charset="-120"/>
               </a:rPr>
               <a:t>http://fleetmind-alb-330672315.us-east-1.elb.amazonaws.com</a:t>
             </a:r>
@@ -14795,9 +14795,9 @@
                 <a:solidFill>
                   <a:srgbClr val="C7D6E4"/>
                 </a:solidFill>
-                <a:latin typeface="Microsoft JhengHei" pitchFamily="34" charset="0"/>
-                <a:ea typeface="Microsoft JhengHei" pitchFamily="34" charset="-122"/>
-                <a:cs typeface="Microsoft JhengHei" pitchFamily="34" charset="-120"/>
+                <a:latin typeface="Hiragino Sans" pitchFamily="34" charset="0"/>
+                <a:ea typeface="Hiragino Sans" pitchFamily="34" charset="-122"/>
+                <a:cs typeface="Hiragino Sans" pitchFamily="34" charset="-120"/>
               </a:rPr>
               <a:t>帳號 516665228894 · us-east-1 · ECS Fargate (ARM64) 常駐 · ALB 靜態 URL 不換位址</a:t>
             </a:r>
@@ -14890,8 +14890,8 @@
         </p:nvSpPr>
         <p:spPr>
           <a:xfrm>
-            <a:off x="0" y="0"/>
-            <a:ext cx="12191695" cy="1280160"/>
+            <a:off x="0" y="5303520"/>
+            <a:ext cx="12191695" cy="1554480"/>
           </a:xfrm>
           <a:prstGeom prst="rect">
             <a:avLst/>
@@ -14907,28 +14907,6 @@
       <p:sp>
         <p:nvSpPr>
           <p:cNvPr id="5" name="Shape 2"/>
-          <p:cNvSpPr/>
-          <p:nvPr/>
-        </p:nvSpPr>
-        <p:spPr>
-          <a:xfrm>
-            <a:off x="0" y="5303520"/>
-            <a:ext cx="12191695" cy="1554480"/>
-          </a:xfrm>
-          <a:prstGeom prst="rect">
-            <a:avLst/>
-          </a:prstGeom>
-          <a:solidFill>
-            <a:srgbClr val="0A2540">
-              <a:alpha val="86000"/>
-            </a:srgbClr>
-          </a:solidFill>
-          <a:ln/>
-        </p:spPr>
-      </p:sp>
-      <p:sp>
-        <p:nvSpPr>
-          <p:cNvPr id="6" name="Shape 3"/>
           <p:cNvSpPr/>
           <p:nvPr/>
         </p:nvSpPr>
@@ -14950,7 +14928,7 @@
       </p:sp>
       <p:sp>
         <p:nvSpPr>
-          <p:cNvPr id="7" name="Shape 4"/>
+          <p:cNvPr id="6" name="Shape 3"/>
           <p:cNvSpPr/>
           <p:nvPr/>
         </p:nvSpPr>
@@ -14972,7 +14950,7 @@
       </p:sp>
       <p:sp>
         <p:nvSpPr>
-          <p:cNvPr id="8" name="Shape 5"/>
+          <p:cNvPr id="7" name="Shape 4"/>
           <p:cNvSpPr/>
           <p:nvPr/>
         </p:nvSpPr>
@@ -14992,7 +14970,7 @@
       </p:sp>
       <p:sp>
         <p:nvSpPr>
-          <p:cNvPr id="9" name="Shape 6"/>
+          <p:cNvPr id="8" name="Shape 5"/>
           <p:cNvSpPr/>
           <p:nvPr/>
         </p:nvSpPr>
@@ -15014,7 +14992,7 @@
       </p:sp>
       <p:sp>
         <p:nvSpPr>
-          <p:cNvPr id="10" name="Shape 7"/>
+          <p:cNvPr id="9" name="Shape 6"/>
           <p:cNvSpPr/>
           <p:nvPr/>
         </p:nvSpPr>
@@ -15036,7 +15014,7 @@
       </p:sp>
       <p:sp>
         <p:nvSpPr>
-          <p:cNvPr id="11" name="Shape 8"/>
+          <p:cNvPr id="10" name="Shape 7"/>
           <p:cNvSpPr/>
           <p:nvPr/>
         </p:nvSpPr>
@@ -15056,7 +15034,7 @@
       </p:sp>
       <p:sp>
         <p:nvSpPr>
-          <p:cNvPr id="12" name="Shape 9"/>
+          <p:cNvPr id="11" name="Shape 8"/>
           <p:cNvSpPr/>
           <p:nvPr/>
         </p:nvSpPr>
@@ -15087,7 +15065,7 @@
       </p:sp>
       <p:sp>
         <p:nvSpPr>
-          <p:cNvPr id="13" name="Text 10"/>
+          <p:cNvPr id="12" name="Text 9"/>
           <p:cNvSpPr/>
           <p:nvPr/>
         </p:nvSpPr>
@@ -15114,9 +15092,9 @@
                 <a:solidFill>
                   <a:srgbClr val="2A9D8F"/>
                 </a:solidFill>
-                <a:latin typeface="Microsoft JhengHei" pitchFamily="34" charset="0"/>
-                <a:ea typeface="Microsoft JhengHei" pitchFamily="34" charset="-122"/>
-                <a:cs typeface="Microsoft JhengHei" pitchFamily="34" charset="-120"/>
+                <a:latin typeface="Hiragino Sans" pitchFamily="34" charset="0"/>
+                <a:ea typeface="Hiragino Sans" pitchFamily="34" charset="-122"/>
+                <a:cs typeface="Hiragino Sans" pitchFamily="34" charset="-120"/>
               </a:rPr>
               <a:t>一個命題，五種上雲路徑</a:t>
             </a:r>
@@ -15126,7 +15104,7 @@
       </p:sp>
       <p:sp>
         <p:nvSpPr>
-          <p:cNvPr id="14" name="Text 11"/>
+          <p:cNvPr id="13" name="Text 10"/>
           <p:cNvSpPr/>
           <p:nvPr/>
         </p:nvSpPr>
@@ -15156,9 +15134,9 @@
                 <a:solidFill>
                   <a:srgbClr val="FFFFFF"/>
                 </a:solidFill>
-                <a:latin typeface="Microsoft JhengHei" pitchFamily="34" charset="0"/>
-                <a:ea typeface="Microsoft JhengHei" pitchFamily="34" charset="-122"/>
-                <a:cs typeface="Microsoft JhengHei" pitchFamily="34" charset="-120"/>
+                <a:latin typeface="Hiragino Sans" pitchFamily="34" charset="0"/>
+                <a:ea typeface="Hiragino Sans" pitchFamily="34" charset="-122"/>
+                <a:cs typeface="Hiragino Sans" pitchFamily="34" charset="-120"/>
               </a:rPr>
               <a:t>穩穩 demo，</a:t>
             </a:r>
@@ -15176,9 +15154,9 @@
                 <a:solidFill>
                   <a:srgbClr val="FFFFFF"/>
                 </a:solidFill>
-                <a:latin typeface="Microsoft JhengHei" pitchFamily="34" charset="0"/>
-                <a:ea typeface="Microsoft JhengHei" pitchFamily="34" charset="-122"/>
-                <a:cs typeface="Microsoft JhengHei" pitchFamily="34" charset="-120"/>
+                <a:latin typeface="Hiragino Sans" pitchFamily="34" charset="0"/>
+                <a:ea typeface="Hiragino Sans" pitchFamily="34" charset="-122"/>
+                <a:cs typeface="Hiragino Sans" pitchFamily="34" charset="-120"/>
               </a:rPr>
               <a:t>也留得住未來</a:t>
             </a:r>
@@ -15188,7 +15166,7 @@
       </p:sp>
       <p:sp>
         <p:nvSpPr>
-          <p:cNvPr id="15" name="Text 12"/>
+          <p:cNvPr id="14" name="Text 11"/>
           <p:cNvSpPr/>
           <p:nvPr/>
         </p:nvSpPr>
@@ -15218,9 +15196,9 @@
                 <a:solidFill>
                   <a:srgbClr val="C7D6E4"/>
                 </a:solidFill>
-                <a:latin typeface="Microsoft JhengHei" pitchFamily="34" charset="0"/>
-                <a:ea typeface="Microsoft JhengHei" pitchFamily="34" charset="-122"/>
-                <a:cs typeface="Microsoft JhengHei" pitchFamily="34" charset="-120"/>
+                <a:latin typeface="Hiragino Sans" pitchFamily="34" charset="0"/>
+                <a:ea typeface="Hiragino Sans" pitchFamily="34" charset="-122"/>
+                <a:cs typeface="Hiragino Sans" pitchFamily="34" charset="-120"/>
               </a:rPr>
               <a:t>以已上線的 Fargate + ALB 為基準線穩定出賽，用 EC2 保底、用 Serverless 與資料分析管線描繪從 15 艘到全艦隊的營運藍圖 — 讓數字站得住、決策留給人。</a:t>
             </a:r>
@@ -15230,7 +15208,7 @@
       </p:sp>
       <p:sp>
         <p:nvSpPr>
-          <p:cNvPr id="16" name="Shape 13"/>
+          <p:cNvPr id="15" name="Shape 12"/>
           <p:cNvSpPr/>
           <p:nvPr/>
         </p:nvSpPr>
@@ -15266,7 +15244,7 @@
       </p:sp>
       <p:sp>
         <p:nvSpPr>
-          <p:cNvPr id="17" name="Text 14"/>
+          <p:cNvPr id="16" name="Text 13"/>
           <p:cNvSpPr/>
           <p:nvPr/>
         </p:nvSpPr>
@@ -15293,9 +15271,9 @@
                 <a:solidFill>
                   <a:srgbClr val="F4A72B"/>
                 </a:solidFill>
-                <a:latin typeface="Microsoft JhengHei" pitchFamily="34" charset="0"/>
-                <a:ea typeface="Microsoft JhengHei" pitchFamily="34" charset="-122"/>
-                <a:cs typeface="Microsoft JhengHei" pitchFamily="34" charset="-120"/>
+                <a:latin typeface="Hiragino Sans" pitchFamily="34" charset="0"/>
+                <a:ea typeface="Hiragino Sans" pitchFamily="34" charset="-122"/>
+                <a:cs typeface="Hiragino Sans" pitchFamily="34" charset="-120"/>
               </a:rPr>
               <a:t>Live Demo　</a:t>
             </a:r>
@@ -15307,9 +15285,9 @@
                 <a:solidFill>
                   <a:srgbClr val="FFFFFF"/>
                 </a:solidFill>
-                <a:latin typeface="Microsoft JhengHei" pitchFamily="34" charset="0"/>
-                <a:ea typeface="Microsoft JhengHei" pitchFamily="34" charset="-122"/>
-                <a:cs typeface="Microsoft JhengHei" pitchFamily="34" charset="-120"/>
+                <a:latin typeface="Hiragino Sans" pitchFamily="34" charset="0"/>
+                <a:ea typeface="Hiragino Sans" pitchFamily="34" charset="-122"/>
+                <a:cs typeface="Hiragino Sans" pitchFamily="34" charset="-120"/>
               </a:rPr>
               <a:t>http://fleetmind-alb-330672315.us-east-1.elb.amazonaws.com</a:t>
             </a:r>
@@ -15319,7 +15297,7 @@
       </p:sp>
       <p:sp>
         <p:nvSpPr>
-          <p:cNvPr id="18" name="Text 15"/>
+          <p:cNvPr id="17" name="Text 14"/>
           <p:cNvSpPr/>
           <p:nvPr/>
         </p:nvSpPr>
@@ -15346,9 +15324,9 @@
                 <a:solidFill>
                   <a:srgbClr val="C7D6E4"/>
                 </a:solidFill>
-                <a:latin typeface="Microsoft JhengHei" pitchFamily="34" charset="0"/>
-                <a:ea typeface="Microsoft JhengHei" pitchFamily="34" charset="-122"/>
-                <a:cs typeface="Microsoft JhengHei" pitchFamily="34" charset="-120"/>
+                <a:latin typeface="Hiragino Sans" pitchFamily="34" charset="0"/>
+                <a:ea typeface="Hiragino Sans" pitchFamily="34" charset="-122"/>
+                <a:cs typeface="Hiragino Sans" pitchFamily="34" charset="-120"/>
               </a:rPr>
               <a:t>帳號 516665228894 · us-east-1 · ECS Fargate (ARM64) + ALB + ECR + Bedrock (Claude Haiku) + SNS</a:t>
             </a:r>
@@ -15358,7 +15336,7 @@
       </p:sp>
       <p:sp>
         <p:nvSpPr>
-          <p:cNvPr id="19" name="Text 16"/>
+          <p:cNvPr id="18" name="Text 15"/>
           <p:cNvSpPr/>
           <p:nvPr/>
         </p:nvSpPr>
@@ -15381,13 +15359,13 @@
               <a:buNone/>
             </a:pPr>
             <a:r>
-              <a:rPr lang="en-US" sz="1400" i="1" dirty="0">
+              <a:rPr lang="en-US" sz="1400" dirty="0">
                 <a:solidFill>
                   <a:srgbClr val="2A9D8F"/>
                 </a:solidFill>
-                <a:latin typeface="Microsoft JhengHei" pitchFamily="34" charset="0"/>
-                <a:ea typeface="Microsoft JhengHei" pitchFamily="34" charset="-122"/>
-                <a:cs typeface="Microsoft JhengHei" pitchFamily="34" charset="-120"/>
+                <a:latin typeface="Hiragino Sans" pitchFamily="34" charset="0"/>
+                <a:ea typeface="Hiragino Sans" pitchFamily="34" charset="-122"/>
+                <a:cs typeface="Hiragino Sans" pitchFamily="34" charset="-120"/>
               </a:rPr>
               <a:t>FleetMind　數字來自計算　語言來自 AI　決策留給人</a:t>
             </a:r>
@@ -15609,9 +15587,9 @@
                 <a:solidFill>
                   <a:srgbClr val="FFFFFF"/>
                 </a:solidFill>
-                <a:latin typeface="Microsoft JhengHei" pitchFamily="34" charset="0"/>
-                <a:ea typeface="Microsoft JhengHei" pitchFamily="34" charset="-122"/>
-                <a:cs typeface="Microsoft JhengHei" pitchFamily="34" charset="-120"/>
+                <a:latin typeface="Hiragino Sans" pitchFamily="34" charset="0"/>
+                <a:ea typeface="Hiragino Sans" pitchFamily="34" charset="-122"/>
+                <a:cs typeface="Hiragino Sans" pitchFamily="34" charset="-120"/>
               </a:rPr>
               <a:t>02</a:t>
             </a:r>
@@ -15623,9 +15601,9 @@
                 <a:solidFill>
                   <a:srgbClr val="8FA8BD"/>
                 </a:solidFill>
-                <a:latin typeface="Microsoft JhengHei" pitchFamily="34" charset="0"/>
-                <a:ea typeface="Microsoft JhengHei" pitchFamily="34" charset="-122"/>
-                <a:cs typeface="Microsoft JhengHei" pitchFamily="34" charset="-120"/>
+                <a:latin typeface="Hiragino Sans" pitchFamily="34" charset="0"/>
+                <a:ea typeface="Hiragino Sans" pitchFamily="34" charset="-122"/>
+                <a:cs typeface="Hiragino Sans" pitchFamily="34" charset="-120"/>
               </a:rPr>
               <a:t>  /  15</a:t>
             </a:r>
@@ -15662,9 +15640,9 @@
                 <a:solidFill>
                   <a:srgbClr val="F4A72B"/>
                 </a:solidFill>
-                <a:latin typeface="Microsoft JhengHei" pitchFamily="34" charset="0"/>
-                <a:ea typeface="Microsoft JhengHei" pitchFamily="34" charset="-122"/>
-                <a:cs typeface="Microsoft JhengHei" pitchFamily="34" charset="-120"/>
+                <a:latin typeface="Hiragino Sans" pitchFamily="34" charset="0"/>
+                <a:ea typeface="Hiragino Sans" pitchFamily="34" charset="-122"/>
+                <a:cs typeface="Hiragino Sans" pitchFamily="34" charset="-120"/>
               </a:rPr>
               <a:t>ONE-PAGER</a:t>
             </a:r>
@@ -15701,9 +15679,9 @@
                 <a:solidFill>
                   <a:srgbClr val="FFFFFF"/>
                 </a:solidFill>
-                <a:latin typeface="Microsoft JhengHei" pitchFamily="34" charset="0"/>
-                <a:ea typeface="Microsoft JhengHei" pitchFamily="34" charset="-122"/>
-                <a:cs typeface="Microsoft JhengHei" pitchFamily="34" charset="-120"/>
+                <a:latin typeface="Hiragino Sans" pitchFamily="34" charset="0"/>
+                <a:ea typeface="Hiragino Sans" pitchFamily="34" charset="-122"/>
+                <a:cs typeface="Hiragino Sans" pitchFamily="34" charset="-120"/>
               </a:rPr>
               <a:t>一頁看懂：一個命題、一套現行架構、五種方案</a:t>
             </a:r>
@@ -15779,9 +15757,9 @@
                 <a:solidFill>
                   <a:srgbClr val="F4A72B"/>
                 </a:solidFill>
-                <a:latin typeface="Microsoft JhengHei" pitchFamily="34" charset="0"/>
-                <a:ea typeface="Microsoft JhengHei" pitchFamily="34" charset="-122"/>
-                <a:cs typeface="Microsoft JhengHei" pitchFamily="34" charset="-120"/>
+                <a:latin typeface="Hiragino Sans" pitchFamily="34" charset="0"/>
+                <a:ea typeface="Hiragino Sans" pitchFamily="34" charset="-122"/>
+                <a:cs typeface="Hiragino Sans" pitchFamily="34" charset="-120"/>
               </a:rPr>
               <a:t>命題　</a:t>
             </a:r>
@@ -15796,9 +15774,9 @@
                 <a:solidFill>
                   <a:srgbClr val="FFFFFF"/>
                 </a:solidFill>
-                <a:latin typeface="Microsoft JhengHei" pitchFamily="34" charset="0"/>
-                <a:ea typeface="Microsoft JhengHei" pitchFamily="34" charset="-122"/>
-                <a:cs typeface="Microsoft JhengHei" pitchFamily="34" charset="-120"/>
+                <a:latin typeface="Hiragino Sans" pitchFamily="34" charset="0"/>
+                <a:ea typeface="Hiragino Sans" pitchFamily="34" charset="-122"/>
+                <a:cs typeface="Hiragino Sans" pitchFamily="34" charset="-120"/>
               </a:rPr>
               <a:t>15 艘同型船、5 年正午報表，依 ISO 19030 以 k=FOC/STW³ 偵測船體污損 Speed Loss，把「何時清、值不值、省多少」變成可計算、可解釋、人可拍板的決策支援。</a:t>
             </a:r>
@@ -15835,9 +15813,9 @@
                 <a:solidFill>
                   <a:srgbClr val="2A9D8F"/>
                 </a:solidFill>
-                <a:latin typeface="Microsoft JhengHei" pitchFamily="34" charset="0"/>
-                <a:ea typeface="Microsoft JhengHei" pitchFamily="34" charset="-122"/>
-                <a:cs typeface="Microsoft JhengHei" pitchFamily="34" charset="-120"/>
+                <a:latin typeface="Hiragino Sans" pitchFamily="34" charset="0"/>
+                <a:ea typeface="Hiragino Sans" pitchFamily="34" charset="-122"/>
+                <a:cs typeface="Hiragino Sans" pitchFamily="34" charset="-120"/>
               </a:rPr>
               <a:t>現行架構（已部署）</a:t>
             </a:r>
@@ -15935,9 +15913,9 @@
                 <a:solidFill>
                   <a:srgbClr val="FFFFFF"/>
                 </a:solidFill>
-                <a:latin typeface="Microsoft JhengHei" pitchFamily="34" charset="0"/>
-                <a:ea typeface="Microsoft JhengHei" pitchFamily="34" charset="-122"/>
-                <a:cs typeface="Microsoft JhengHei" pitchFamily="34" charset="-120"/>
+                <a:latin typeface="Hiragino Sans" pitchFamily="34" charset="0"/>
+                <a:ea typeface="Hiragino Sans" pitchFamily="34" charset="-122"/>
+                <a:cs typeface="Hiragino Sans" pitchFamily="34" charset="-120"/>
               </a:rPr>
               <a:t>F</a:t>
             </a:r>
@@ -15977,9 +15955,9 @@
                 <a:solidFill>
                   <a:srgbClr val="FFFFFF"/>
                 </a:solidFill>
-                <a:latin typeface="Microsoft JhengHei" pitchFamily="34" charset="0"/>
-                <a:ea typeface="Microsoft JhengHei" pitchFamily="34" charset="-122"/>
-                <a:cs typeface="Microsoft JhengHei" pitchFamily="34" charset="-120"/>
+                <a:latin typeface="Hiragino Sans" pitchFamily="34" charset="0"/>
+                <a:ea typeface="Hiragino Sans" pitchFamily="34" charset="-122"/>
+                <a:cs typeface="Hiragino Sans" pitchFamily="34" charset="-120"/>
               </a:rPr>
               <a:t>ECS Fargate</a:t>
             </a:r>
@@ -16019,9 +15997,9 @@
                 <a:solidFill>
                   <a:srgbClr val="C7D6E4"/>
                 </a:solidFill>
-                <a:latin typeface="Microsoft JhengHei" pitchFamily="34" charset="0"/>
-                <a:ea typeface="Microsoft JhengHei" pitchFamily="34" charset="-122"/>
-                <a:cs typeface="Microsoft JhengHei" pitchFamily="34" charset="-120"/>
+                <a:latin typeface="Hiragino Sans" pitchFamily="34" charset="0"/>
+                <a:ea typeface="Hiragino Sans" pitchFamily="34" charset="-122"/>
+                <a:cs typeface="Hiragino Sans" pitchFamily="34" charset="-120"/>
               </a:rPr>
               <a:t>ARM64 容器</a:t>
             </a:r>
@@ -16143,9 +16121,9 @@
                 <a:solidFill>
                   <a:srgbClr val="FFFFFF"/>
                 </a:solidFill>
-                <a:latin typeface="Microsoft JhengHei" pitchFamily="34" charset="0"/>
-                <a:ea typeface="Microsoft JhengHei" pitchFamily="34" charset="-122"/>
-                <a:cs typeface="Microsoft JhengHei" pitchFamily="34" charset="-120"/>
+                <a:latin typeface="Hiragino Sans" pitchFamily="34" charset="0"/>
+                <a:ea typeface="Hiragino Sans" pitchFamily="34" charset="-122"/>
+                <a:cs typeface="Hiragino Sans" pitchFamily="34" charset="-120"/>
               </a:rPr>
               <a:t>ALB</a:t>
             </a:r>
@@ -16185,9 +16163,9 @@
                 <a:solidFill>
                   <a:srgbClr val="FFFFFF"/>
                 </a:solidFill>
-                <a:latin typeface="Microsoft JhengHei" pitchFamily="34" charset="0"/>
-                <a:ea typeface="Microsoft JhengHei" pitchFamily="34" charset="-122"/>
-                <a:cs typeface="Microsoft JhengHei" pitchFamily="34" charset="-120"/>
+                <a:latin typeface="Hiragino Sans" pitchFamily="34" charset="0"/>
+                <a:ea typeface="Hiragino Sans" pitchFamily="34" charset="-122"/>
+                <a:cs typeface="Hiragino Sans" pitchFamily="34" charset="-120"/>
               </a:rPr>
               <a:t>ALB</a:t>
             </a:r>
@@ -16227,9 +16205,9 @@
                 <a:solidFill>
                   <a:srgbClr val="C7D6E4"/>
                 </a:solidFill>
-                <a:latin typeface="Microsoft JhengHei" pitchFamily="34" charset="0"/>
-                <a:ea typeface="Microsoft JhengHei" pitchFamily="34" charset="-122"/>
-                <a:cs typeface="Microsoft JhengHei" pitchFamily="34" charset="-120"/>
+                <a:latin typeface="Hiragino Sans" pitchFamily="34" charset="0"/>
+                <a:ea typeface="Hiragino Sans" pitchFamily="34" charset="-122"/>
+                <a:cs typeface="Hiragino Sans" pitchFamily="34" charset="-120"/>
               </a:rPr>
               <a:t>靜態 URL</a:t>
             </a:r>
@@ -16351,9 +16329,9 @@
                 <a:solidFill>
                   <a:srgbClr val="FFFFFF"/>
                 </a:solidFill>
-                <a:latin typeface="Microsoft JhengHei" pitchFamily="34" charset="0"/>
-                <a:ea typeface="Microsoft JhengHei" pitchFamily="34" charset="-122"/>
-                <a:cs typeface="Microsoft JhengHei" pitchFamily="34" charset="-120"/>
+                <a:latin typeface="Hiragino Sans" pitchFamily="34" charset="0"/>
+                <a:ea typeface="Hiragino Sans" pitchFamily="34" charset="-122"/>
+                <a:cs typeface="Hiragino Sans" pitchFamily="34" charset="-120"/>
               </a:rPr>
               <a:t>ECR</a:t>
             </a:r>
@@ -16393,9 +16371,9 @@
                 <a:solidFill>
                   <a:srgbClr val="FFFFFF"/>
                 </a:solidFill>
-                <a:latin typeface="Microsoft JhengHei" pitchFamily="34" charset="0"/>
-                <a:ea typeface="Microsoft JhengHei" pitchFamily="34" charset="-122"/>
-                <a:cs typeface="Microsoft JhengHei" pitchFamily="34" charset="-120"/>
+                <a:latin typeface="Hiragino Sans" pitchFamily="34" charset="0"/>
+                <a:ea typeface="Hiragino Sans" pitchFamily="34" charset="-122"/>
+                <a:cs typeface="Hiragino Sans" pitchFamily="34" charset="-120"/>
               </a:rPr>
               <a:t>ECR</a:t>
             </a:r>
@@ -16435,9 +16413,9 @@
                 <a:solidFill>
                   <a:srgbClr val="C7D6E4"/>
                 </a:solidFill>
-                <a:latin typeface="Microsoft JhengHei" pitchFamily="34" charset="0"/>
-                <a:ea typeface="Microsoft JhengHei" pitchFamily="34" charset="-122"/>
-                <a:cs typeface="Microsoft JhengHei" pitchFamily="34" charset="-120"/>
+                <a:latin typeface="Hiragino Sans" pitchFamily="34" charset="0"/>
+                <a:ea typeface="Hiragino Sans" pitchFamily="34" charset="-122"/>
+                <a:cs typeface="Hiragino Sans" pitchFamily="34" charset="-120"/>
               </a:rPr>
               <a:t>映像倉庫</a:t>
             </a:r>
@@ -16559,9 +16537,9 @@
                 <a:solidFill>
                   <a:srgbClr val="FFFFFF"/>
                 </a:solidFill>
-                <a:latin typeface="Microsoft JhengHei" pitchFamily="34" charset="0"/>
-                <a:ea typeface="Microsoft JhengHei" pitchFamily="34" charset="-122"/>
-                <a:cs typeface="Microsoft JhengHei" pitchFamily="34" charset="-120"/>
+                <a:latin typeface="Hiragino Sans" pitchFamily="34" charset="0"/>
+                <a:ea typeface="Hiragino Sans" pitchFamily="34" charset="-122"/>
+                <a:cs typeface="Hiragino Sans" pitchFamily="34" charset="-120"/>
               </a:rPr>
               <a:t>AI</a:t>
             </a:r>
@@ -16601,9 +16579,9 @@
                 <a:solidFill>
                   <a:srgbClr val="FFFFFF"/>
                 </a:solidFill>
-                <a:latin typeface="Microsoft JhengHei" pitchFamily="34" charset="0"/>
-                <a:ea typeface="Microsoft JhengHei" pitchFamily="34" charset="-122"/>
-                <a:cs typeface="Microsoft JhengHei" pitchFamily="34" charset="-120"/>
+                <a:latin typeface="Hiragino Sans" pitchFamily="34" charset="0"/>
+                <a:ea typeface="Hiragino Sans" pitchFamily="34" charset="-122"/>
+                <a:cs typeface="Hiragino Sans" pitchFamily="34" charset="-120"/>
               </a:rPr>
               <a:t>Bedrock</a:t>
             </a:r>
@@ -16643,9 +16621,9 @@
                 <a:solidFill>
                   <a:srgbClr val="C7D6E4"/>
                 </a:solidFill>
-                <a:latin typeface="Microsoft JhengHei" pitchFamily="34" charset="0"/>
-                <a:ea typeface="Microsoft JhengHei" pitchFamily="34" charset="-122"/>
-                <a:cs typeface="Microsoft JhengHei" pitchFamily="34" charset="-120"/>
+                <a:latin typeface="Hiragino Sans" pitchFamily="34" charset="0"/>
+                <a:ea typeface="Hiragino Sans" pitchFamily="34" charset="-122"/>
+                <a:cs typeface="Hiragino Sans" pitchFamily="34" charset="-120"/>
               </a:rPr>
               <a:t>Claude Haiku</a:t>
             </a:r>
@@ -16767,9 +16745,9 @@
                 <a:solidFill>
                   <a:srgbClr val="FFFFFF"/>
                 </a:solidFill>
-                <a:latin typeface="Microsoft JhengHei" pitchFamily="34" charset="0"/>
-                <a:ea typeface="Microsoft JhengHei" pitchFamily="34" charset="-122"/>
-                <a:cs typeface="Microsoft JhengHei" pitchFamily="34" charset="-120"/>
+                <a:latin typeface="Hiragino Sans" pitchFamily="34" charset="0"/>
+                <a:ea typeface="Hiragino Sans" pitchFamily="34" charset="-122"/>
+                <a:cs typeface="Hiragino Sans" pitchFamily="34" charset="-120"/>
               </a:rPr>
               <a:t>SNS</a:t>
             </a:r>
@@ -16809,9 +16787,9 @@
                 <a:solidFill>
                   <a:srgbClr val="FFFFFF"/>
                 </a:solidFill>
-                <a:latin typeface="Microsoft JhengHei" pitchFamily="34" charset="0"/>
-                <a:ea typeface="Microsoft JhengHei" pitchFamily="34" charset="-122"/>
-                <a:cs typeface="Microsoft JhengHei" pitchFamily="34" charset="-120"/>
+                <a:latin typeface="Hiragino Sans" pitchFamily="34" charset="0"/>
+                <a:ea typeface="Hiragino Sans" pitchFamily="34" charset="-122"/>
+                <a:cs typeface="Hiragino Sans" pitchFamily="34" charset="-120"/>
               </a:rPr>
               <a:t>SNS</a:t>
             </a:r>
@@ -16851,9 +16829,9 @@
                 <a:solidFill>
                   <a:srgbClr val="C7D6E4"/>
                 </a:solidFill>
-                <a:latin typeface="Microsoft JhengHei" pitchFamily="34" charset="0"/>
-                <a:ea typeface="Microsoft JhengHei" pitchFamily="34" charset="-122"/>
-                <a:cs typeface="Microsoft JhengHei" pitchFamily="34" charset="-120"/>
+                <a:latin typeface="Hiragino Sans" pitchFamily="34" charset="0"/>
+                <a:ea typeface="Hiragino Sans" pitchFamily="34" charset="-122"/>
+                <a:cs typeface="Hiragino Sans" pitchFamily="34" charset="-120"/>
               </a:rPr>
               <a:t>告警扇出</a:t>
             </a:r>
@@ -16890,9 +16868,9 @@
                 <a:solidFill>
                   <a:srgbClr val="2A9D8F"/>
                 </a:solidFill>
-                <a:latin typeface="Microsoft JhengHei" pitchFamily="34" charset="0"/>
-                <a:ea typeface="Microsoft JhengHei" pitchFamily="34" charset="-122"/>
-                <a:cs typeface="Microsoft JhengHei" pitchFamily="34" charset="-120"/>
+                <a:latin typeface="Hiragino Sans" pitchFamily="34" charset="0"/>
+                <a:ea typeface="Hiragino Sans" pitchFamily="34" charset="-122"/>
+                <a:cs typeface="Hiragino Sans" pitchFamily="34" charset="-120"/>
               </a:rPr>
               <a:t>五種上雲方案</a:t>
             </a:r>
@@ -16990,9 +16968,9 @@
                 <a:solidFill>
                   <a:srgbClr val="FFFFFF"/>
                 </a:solidFill>
-                <a:latin typeface="Microsoft JhengHei" pitchFamily="34" charset="0"/>
-                <a:ea typeface="Microsoft JhengHei" pitchFamily="34" charset="-122"/>
-                <a:cs typeface="Microsoft JhengHei" pitchFamily="34" charset="-120"/>
+                <a:latin typeface="Hiragino Sans" pitchFamily="34" charset="0"/>
+                <a:ea typeface="Hiragino Sans" pitchFamily="34" charset="-122"/>
+                <a:cs typeface="Hiragino Sans" pitchFamily="34" charset="-120"/>
               </a:rPr>
               <a:t>A</a:t>
             </a:r>
@@ -17029,9 +17007,9 @@
                 <a:solidFill>
                   <a:srgbClr val="FFFFFF"/>
                 </a:solidFill>
-                <a:latin typeface="Microsoft JhengHei" pitchFamily="34" charset="0"/>
-                <a:ea typeface="Microsoft JhengHei" pitchFamily="34" charset="-122"/>
-                <a:cs typeface="Microsoft JhengHei" pitchFamily="34" charset="-120"/>
+                <a:latin typeface="Hiragino Sans" pitchFamily="34" charset="0"/>
+                <a:ea typeface="Hiragino Sans" pitchFamily="34" charset="-122"/>
+                <a:cs typeface="Hiragino Sans" pitchFamily="34" charset="-120"/>
               </a:rPr>
               <a:t>現行強化</a:t>
             </a:r>
@@ -17068,9 +17046,9 @@
                 <a:solidFill>
                   <a:srgbClr val="C7D6E4"/>
                 </a:solidFill>
-                <a:latin typeface="Microsoft JhengHei" pitchFamily="34" charset="0"/>
-                <a:ea typeface="Microsoft JhengHei" pitchFamily="34" charset="-122"/>
-                <a:cs typeface="Microsoft JhengHei" pitchFamily="34" charset="-120"/>
+                <a:latin typeface="Hiragino Sans" pitchFamily="34" charset="0"/>
+                <a:ea typeface="Hiragino Sans" pitchFamily="34" charset="-122"/>
+                <a:cs typeface="Hiragino Sans" pitchFamily="34" charset="-120"/>
               </a:rPr>
               <a:t>Fargate + ALB</a:t>
             </a:r>
@@ -17168,9 +17146,9 @@
                 <a:solidFill>
                   <a:srgbClr val="FFFFFF"/>
                 </a:solidFill>
-                <a:latin typeface="Microsoft JhengHei" pitchFamily="34" charset="0"/>
-                <a:ea typeface="Microsoft JhengHei" pitchFamily="34" charset="-122"/>
-                <a:cs typeface="Microsoft JhengHei" pitchFamily="34" charset="-120"/>
+                <a:latin typeface="Hiragino Sans" pitchFamily="34" charset="0"/>
+                <a:ea typeface="Hiragino Sans" pitchFamily="34" charset="-122"/>
+                <a:cs typeface="Hiragino Sans" pitchFamily="34" charset="-120"/>
               </a:rPr>
               <a:t>B</a:t>
             </a:r>
@@ -17207,9 +17185,9 @@
                 <a:solidFill>
                   <a:srgbClr val="FFFFFF"/>
                 </a:solidFill>
-                <a:latin typeface="Microsoft JhengHei" pitchFamily="34" charset="0"/>
-                <a:ea typeface="Microsoft JhengHei" pitchFamily="34" charset="-122"/>
-                <a:cs typeface="Microsoft JhengHei" pitchFamily="34" charset="-120"/>
+                <a:latin typeface="Hiragino Sans" pitchFamily="34" charset="0"/>
+                <a:ea typeface="Hiragino Sans" pitchFamily="34" charset="-122"/>
+                <a:cs typeface="Hiragino Sans" pitchFamily="34" charset="-120"/>
               </a:rPr>
               <a:t>全 Serverless</a:t>
             </a:r>
@@ -17246,9 +17224,9 @@
                 <a:solidFill>
                   <a:srgbClr val="C7D6E4"/>
                 </a:solidFill>
-                <a:latin typeface="Microsoft JhengHei" pitchFamily="34" charset="0"/>
-                <a:ea typeface="Microsoft JhengHei" pitchFamily="34" charset="-122"/>
-                <a:cs typeface="Microsoft JhengHei" pitchFamily="34" charset="-120"/>
+                <a:latin typeface="Hiragino Sans" pitchFamily="34" charset="0"/>
+                <a:ea typeface="Hiragino Sans" pitchFamily="34" charset="-122"/>
+                <a:cs typeface="Hiragino Sans" pitchFamily="34" charset="-120"/>
               </a:rPr>
               <a:t>APIGW + Lambda</a:t>
             </a:r>
@@ -17346,9 +17324,9 @@
                 <a:solidFill>
                   <a:srgbClr val="FFFFFF"/>
                 </a:solidFill>
-                <a:latin typeface="Microsoft JhengHei" pitchFamily="34" charset="0"/>
-                <a:ea typeface="Microsoft JhengHei" pitchFamily="34" charset="-122"/>
-                <a:cs typeface="Microsoft JhengHei" pitchFamily="34" charset="-120"/>
+                <a:latin typeface="Hiragino Sans" pitchFamily="34" charset="0"/>
+                <a:ea typeface="Hiragino Sans" pitchFamily="34" charset="-122"/>
+                <a:cs typeface="Hiragino Sans" pitchFamily="34" charset="-120"/>
               </a:rPr>
               <a:t>C</a:t>
             </a:r>
@@ -17385,9 +17363,9 @@
                 <a:solidFill>
                   <a:srgbClr val="FFFFFF"/>
                 </a:solidFill>
-                <a:latin typeface="Microsoft JhengHei" pitchFamily="34" charset="0"/>
-                <a:ea typeface="Microsoft JhengHei" pitchFamily="34" charset="-122"/>
-                <a:cs typeface="Microsoft JhengHei" pitchFamily="34" charset="-120"/>
+                <a:latin typeface="Hiragino Sans" pitchFamily="34" charset="0"/>
+                <a:ea typeface="Hiragino Sans" pitchFamily="34" charset="-122"/>
+                <a:cs typeface="Hiragino Sans" pitchFamily="34" charset="-120"/>
               </a:rPr>
               <a:t>App Runner</a:t>
             </a:r>
@@ -17424,9 +17402,9 @@
                 <a:solidFill>
                   <a:srgbClr val="C7D6E4"/>
                 </a:solidFill>
-                <a:latin typeface="Microsoft JhengHei" pitchFamily="34" charset="0"/>
-                <a:ea typeface="Microsoft JhengHei" pitchFamily="34" charset="-122"/>
-                <a:cs typeface="Microsoft JhengHei" pitchFamily="34" charset="-120"/>
+                <a:latin typeface="Hiragino Sans" pitchFamily="34" charset="0"/>
+                <a:ea typeface="Hiragino Sans" pitchFamily="34" charset="-122"/>
+                <a:cs typeface="Hiragino Sans" pitchFamily="34" charset="-120"/>
               </a:rPr>
               <a:t>零 infra（受阻）</a:t>
             </a:r>
@@ -17524,9 +17502,9 @@
                 <a:solidFill>
                   <a:srgbClr val="FFFFFF"/>
                 </a:solidFill>
-                <a:latin typeface="Microsoft JhengHei" pitchFamily="34" charset="0"/>
-                <a:ea typeface="Microsoft JhengHei" pitchFamily="34" charset="-122"/>
-                <a:cs typeface="Microsoft JhengHei" pitchFamily="34" charset="-120"/>
+                <a:latin typeface="Hiragino Sans" pitchFamily="34" charset="0"/>
+                <a:ea typeface="Hiragino Sans" pitchFamily="34" charset="-122"/>
+                <a:cs typeface="Hiragino Sans" pitchFamily="34" charset="-120"/>
               </a:rPr>
               <a:t>D</a:t>
             </a:r>
@@ -17563,9 +17541,9 @@
                 <a:solidFill>
                   <a:srgbClr val="FFFFFF"/>
                 </a:solidFill>
-                <a:latin typeface="Microsoft JhengHei" pitchFamily="34" charset="0"/>
-                <a:ea typeface="Microsoft JhengHei" pitchFamily="34" charset="-122"/>
-                <a:cs typeface="Microsoft JhengHei" pitchFamily="34" charset="-120"/>
+                <a:latin typeface="Hiragino Sans" pitchFamily="34" charset="0"/>
+                <a:ea typeface="Hiragino Sans" pitchFamily="34" charset="-122"/>
+                <a:cs typeface="Hiragino Sans" pitchFamily="34" charset="-120"/>
               </a:rPr>
               <a:t>EC2 + Docker</a:t>
             </a:r>
@@ -17602,9 +17580,9 @@
                 <a:solidFill>
                   <a:srgbClr val="C7D6E4"/>
                 </a:solidFill>
-                <a:latin typeface="Microsoft JhengHei" pitchFamily="34" charset="0"/>
-                <a:ea typeface="Microsoft JhengHei" pitchFamily="34" charset="-122"/>
-                <a:cs typeface="Microsoft JhengHei" pitchFamily="34" charset="-120"/>
+                <a:latin typeface="Hiragino Sans" pitchFamily="34" charset="0"/>
+                <a:ea typeface="Hiragino Sans" pitchFamily="34" charset="-122"/>
+                <a:cs typeface="Hiragino Sans" pitchFamily="34" charset="-120"/>
               </a:rPr>
               <a:t>最省保底</a:t>
             </a:r>
@@ -17702,9 +17680,9 @@
                 <a:solidFill>
                   <a:srgbClr val="0A2540"/>
                 </a:solidFill>
-                <a:latin typeface="Microsoft JhengHei" pitchFamily="34" charset="0"/>
-                <a:ea typeface="Microsoft JhengHei" pitchFamily="34" charset="-122"/>
-                <a:cs typeface="Microsoft JhengHei" pitchFamily="34" charset="-120"/>
+                <a:latin typeface="Hiragino Sans" pitchFamily="34" charset="0"/>
+                <a:ea typeface="Hiragino Sans" pitchFamily="34" charset="-122"/>
+                <a:cs typeface="Hiragino Sans" pitchFamily="34" charset="-120"/>
               </a:rPr>
               <a:t>E</a:t>
             </a:r>
@@ -17741,9 +17719,9 @@
                 <a:solidFill>
                   <a:srgbClr val="FFFFFF"/>
                 </a:solidFill>
-                <a:latin typeface="Microsoft JhengHei" pitchFamily="34" charset="0"/>
-                <a:ea typeface="Microsoft JhengHei" pitchFamily="34" charset="-122"/>
-                <a:cs typeface="Microsoft JhengHei" pitchFamily="34" charset="-120"/>
+                <a:latin typeface="Hiragino Sans" pitchFamily="34" charset="0"/>
+                <a:ea typeface="Hiragino Sans" pitchFamily="34" charset="-122"/>
+                <a:cs typeface="Hiragino Sans" pitchFamily="34" charset="-120"/>
               </a:rPr>
               <a:t>資料分析管線</a:t>
             </a:r>
@@ -17780,9 +17758,9 @@
                 <a:solidFill>
                   <a:srgbClr val="C7D6E4"/>
                 </a:solidFill>
-                <a:latin typeface="Microsoft JhengHei" pitchFamily="34" charset="0"/>
-                <a:ea typeface="Microsoft JhengHei" pitchFamily="34" charset="-122"/>
-                <a:cs typeface="Microsoft JhengHei" pitchFamily="34" charset="-120"/>
+                <a:latin typeface="Hiragino Sans" pitchFamily="34" charset="0"/>
+                <a:ea typeface="Hiragino Sans" pitchFamily="34" charset="-122"/>
+                <a:cs typeface="Hiragino Sans" pitchFamily="34" charset="-120"/>
               </a:rPr>
               <a:t>S3 + BI + ML 未來式</a:t>
             </a:r>
@@ -17815,13 +17793,13 @@
               <a:buNone/>
             </a:pPr>
             <a:r>
-              <a:rPr lang="en-US" sz="1150" i="1" dirty="0">
+              <a:rPr lang="en-US" sz="1150" dirty="0">
                 <a:solidFill>
                   <a:srgbClr val="C7D6E4"/>
                 </a:solidFill>
-                <a:latin typeface="Microsoft JhengHei" pitchFamily="34" charset="0"/>
-                <a:ea typeface="Microsoft JhengHei" pitchFamily="34" charset="-122"/>
-                <a:cs typeface="Microsoft JhengHei" pitchFamily="34" charset="-120"/>
+                <a:latin typeface="Hiragino Sans" pitchFamily="34" charset="0"/>
+                <a:ea typeface="Hiragino Sans" pitchFamily="34" charset="-122"/>
+                <a:cs typeface="Hiragino Sans" pitchFamily="34" charset="-120"/>
               </a:rPr>
               <a:t>A 是已上線基準線；E 是全艦隊願景路線圖；B / C / D 是中間的取捨光譜。</a:t>
             </a:r>
@@ -18043,9 +18021,9 @@
                 <a:solidFill>
                   <a:srgbClr val="FFFFFF"/>
                 </a:solidFill>
-                <a:latin typeface="Microsoft JhengHei" pitchFamily="34" charset="0"/>
-                <a:ea typeface="Microsoft JhengHei" pitchFamily="34" charset="-122"/>
-                <a:cs typeface="Microsoft JhengHei" pitchFamily="34" charset="-120"/>
+                <a:latin typeface="Hiragino Sans" pitchFamily="34" charset="0"/>
+                <a:ea typeface="Hiragino Sans" pitchFamily="34" charset="-122"/>
+                <a:cs typeface="Hiragino Sans" pitchFamily="34" charset="-120"/>
               </a:rPr>
               <a:t>03</a:t>
             </a:r>
@@ -18057,9 +18035,9 @@
                 <a:solidFill>
                   <a:srgbClr val="8FA8BD"/>
                 </a:solidFill>
-                <a:latin typeface="Microsoft JhengHei" pitchFamily="34" charset="0"/>
-                <a:ea typeface="Microsoft JhengHei" pitchFamily="34" charset="-122"/>
-                <a:cs typeface="Microsoft JhengHei" pitchFamily="34" charset="-120"/>
+                <a:latin typeface="Hiragino Sans" pitchFamily="34" charset="0"/>
+                <a:ea typeface="Hiragino Sans" pitchFamily="34" charset="-122"/>
+                <a:cs typeface="Hiragino Sans" pitchFamily="34" charset="-120"/>
               </a:rPr>
               <a:t>  /  15</a:t>
             </a:r>
@@ -18096,9 +18074,9 @@
                 <a:solidFill>
                   <a:srgbClr val="F4A72B"/>
                 </a:solidFill>
-                <a:latin typeface="Microsoft JhengHei" pitchFamily="34" charset="0"/>
-                <a:ea typeface="Microsoft JhengHei" pitchFamily="34" charset="-122"/>
-                <a:cs typeface="Microsoft JhengHei" pitchFamily="34" charset="-120"/>
+                <a:latin typeface="Hiragino Sans" pitchFamily="34" charset="0"/>
+                <a:ea typeface="Hiragino Sans" pitchFamily="34" charset="-122"/>
+                <a:cs typeface="Hiragino Sans" pitchFamily="34" charset="-120"/>
               </a:rPr>
               <a:t>DEPLOYED · DAY1 實測上線</a:t>
             </a:r>
@@ -18135,9 +18113,9 @@
                 <a:solidFill>
                   <a:srgbClr val="FFFFFF"/>
                 </a:solidFill>
-                <a:latin typeface="Microsoft JhengHei" pitchFamily="34" charset="0"/>
-                <a:ea typeface="Microsoft JhengHei" pitchFamily="34" charset="-122"/>
-                <a:cs typeface="Microsoft JhengHei" pitchFamily="34" charset="-120"/>
+                <a:latin typeface="Hiragino Sans" pitchFamily="34" charset="0"/>
+                <a:ea typeface="Hiragino Sans" pitchFamily="34" charset="-122"/>
+                <a:cs typeface="Hiragino Sans" pitchFamily="34" charset="-120"/>
               </a:rPr>
               <a:t>現行架構：ECS Fargate + ALB 單服務容器</a:t>
             </a:r>
@@ -18196,9 +18174,9 @@
                 <a:solidFill>
                   <a:srgbClr val="FFFFFF"/>
                 </a:solidFill>
-                <a:latin typeface="Microsoft JhengHei" pitchFamily="34" charset="0"/>
-                <a:ea typeface="Microsoft JhengHei" pitchFamily="34" charset="-122"/>
-                <a:cs typeface="Microsoft JhengHei" pitchFamily="34" charset="-120"/>
+                <a:latin typeface="Hiragino Sans" pitchFamily="34" charset="0"/>
+                <a:ea typeface="Hiragino Sans" pitchFamily="34" charset="-122"/>
+                <a:cs typeface="Hiragino Sans" pitchFamily="34" charset="-120"/>
               </a:rPr>
               <a:t>成本 低</a:t>
             </a:r>
@@ -18257,9 +18235,9 @@
                 <a:solidFill>
                   <a:srgbClr val="FFFFFF"/>
                 </a:solidFill>
-                <a:latin typeface="Microsoft JhengHei" pitchFamily="34" charset="0"/>
-                <a:ea typeface="Microsoft JhengHei" pitchFamily="34" charset="-122"/>
-                <a:cs typeface="Microsoft JhengHei" pitchFamily="34" charset="-120"/>
+                <a:latin typeface="Hiragino Sans" pitchFamily="34" charset="0"/>
+                <a:ea typeface="Hiragino Sans" pitchFamily="34" charset="-122"/>
+                <a:cs typeface="Hiragino Sans" pitchFamily="34" charset="-120"/>
               </a:rPr>
               <a:t>黑客松 ★ 最高</a:t>
             </a:r>
@@ -18325,9 +18303,9 @@
                 <a:solidFill>
                   <a:srgbClr val="C7D6E4"/>
                 </a:solidFill>
-                <a:latin typeface="Microsoft JhengHei" pitchFamily="34" charset="0"/>
-                <a:ea typeface="Microsoft JhengHei" pitchFamily="34" charset="-122"/>
-                <a:cs typeface="Microsoft JhengHei" pitchFamily="34" charset="-120"/>
+                <a:latin typeface="Hiragino Sans" pitchFamily="34" charset="0"/>
+                <a:ea typeface="Hiragino Sans" pitchFamily="34" charset="-122"/>
+                <a:cs typeface="Hiragino Sans" pitchFamily="34" charset="-120"/>
               </a:rPr>
               <a:t>存取</a:t>
             </a:r>
@@ -18393,9 +18371,9 @@
                 <a:solidFill>
                   <a:srgbClr val="C7D6E4"/>
                 </a:solidFill>
-                <a:latin typeface="Microsoft JhengHei" pitchFamily="34" charset="0"/>
-                <a:ea typeface="Microsoft JhengHei" pitchFamily="34" charset="-122"/>
-                <a:cs typeface="Microsoft JhengHei" pitchFamily="34" charset="-120"/>
+                <a:latin typeface="Hiragino Sans" pitchFamily="34" charset="0"/>
+                <a:ea typeface="Hiragino Sans" pitchFamily="34" charset="-122"/>
+                <a:cs typeface="Hiragino Sans" pitchFamily="34" charset="-120"/>
               </a:rPr>
               <a:t>入口</a:t>
             </a:r>
@@ -18461,9 +18439,9 @@
                 <a:solidFill>
                   <a:srgbClr val="2A9D8F"/>
                 </a:solidFill>
-                <a:latin typeface="Microsoft JhengHei" pitchFamily="34" charset="0"/>
-                <a:ea typeface="Microsoft JhengHei" pitchFamily="34" charset="-122"/>
-                <a:cs typeface="Microsoft JhengHei" pitchFamily="34" charset="-120"/>
+                <a:latin typeface="Hiragino Sans" pitchFamily="34" charset="0"/>
+                <a:ea typeface="Hiragino Sans" pitchFamily="34" charset="-122"/>
+                <a:cs typeface="Hiragino Sans" pitchFamily="34" charset="-120"/>
               </a:rPr>
               <a:t>執行 · 映像</a:t>
             </a:r>
@@ -18529,9 +18507,9 @@
                 <a:solidFill>
                   <a:srgbClr val="F4A72B"/>
                 </a:solidFill>
-                <a:latin typeface="Microsoft JhengHei" pitchFamily="34" charset="0"/>
-                <a:ea typeface="Microsoft JhengHei" pitchFamily="34" charset="-122"/>
-                <a:cs typeface="Microsoft JhengHei" pitchFamily="34" charset="-120"/>
+                <a:latin typeface="Hiragino Sans" pitchFamily="34" charset="0"/>
+                <a:ea typeface="Hiragino Sans" pitchFamily="34" charset="-122"/>
+                <a:cs typeface="Hiragino Sans" pitchFamily="34" charset="-120"/>
               </a:rPr>
               <a:t>AI · 通知</a:t>
             </a:r>
@@ -18629,9 +18607,9 @@
                 <a:solidFill>
                   <a:srgbClr val="0A2540"/>
                 </a:solidFill>
-                <a:latin typeface="Microsoft JhengHei" pitchFamily="34" charset="0"/>
-                <a:ea typeface="Microsoft JhengHei" pitchFamily="34" charset="-122"/>
-                <a:cs typeface="Microsoft JhengHei" pitchFamily="34" charset="-120"/>
+                <a:latin typeface="Hiragino Sans" pitchFamily="34" charset="0"/>
+                <a:ea typeface="Hiragino Sans" pitchFamily="34" charset="-122"/>
+                <a:cs typeface="Hiragino Sans" pitchFamily="34" charset="-120"/>
               </a:rPr>
               <a:t>GET</a:t>
             </a:r>
@@ -18671,9 +18649,9 @@
                 <a:solidFill>
                   <a:srgbClr val="FFFFFF"/>
                 </a:solidFill>
-                <a:latin typeface="Microsoft JhengHei" pitchFamily="34" charset="0"/>
-                <a:ea typeface="Microsoft JhengHei" pitchFamily="34" charset="-122"/>
-                <a:cs typeface="Microsoft JhengHei" pitchFamily="34" charset="-120"/>
+                <a:latin typeface="Hiragino Sans" pitchFamily="34" charset="0"/>
+                <a:ea typeface="Hiragino Sans" pitchFamily="34" charset="-122"/>
+                <a:cs typeface="Hiragino Sans" pitchFamily="34" charset="-120"/>
               </a:rPr>
               <a:t>評審 / 瀏覽器</a:t>
             </a:r>
@@ -18713,9 +18691,9 @@
                 <a:solidFill>
                   <a:srgbClr val="C7D6E4"/>
                 </a:solidFill>
-                <a:latin typeface="Microsoft JhengHei" pitchFamily="34" charset="0"/>
-                <a:ea typeface="Microsoft JhengHei" pitchFamily="34" charset="-122"/>
-                <a:cs typeface="Microsoft JhengHei" pitchFamily="34" charset="-120"/>
+                <a:latin typeface="Hiragino Sans" pitchFamily="34" charset="0"/>
+                <a:ea typeface="Hiragino Sans" pitchFamily="34" charset="-122"/>
+                <a:cs typeface="Hiragino Sans" pitchFamily="34" charset="-120"/>
               </a:rPr>
               <a:t>HTTP 請求</a:t>
             </a:r>
@@ -18813,9 +18791,9 @@
                 <a:solidFill>
                   <a:srgbClr val="FFFFFF"/>
                 </a:solidFill>
-                <a:latin typeface="Microsoft JhengHei" pitchFamily="34" charset="0"/>
-                <a:ea typeface="Microsoft JhengHei" pitchFamily="34" charset="-122"/>
-                <a:cs typeface="Microsoft JhengHei" pitchFamily="34" charset="-120"/>
+                <a:latin typeface="Hiragino Sans" pitchFamily="34" charset="0"/>
+                <a:ea typeface="Hiragino Sans" pitchFamily="34" charset="-122"/>
+                <a:cs typeface="Hiragino Sans" pitchFamily="34" charset="-120"/>
               </a:rPr>
               <a:t>ALB</a:t>
             </a:r>
@@ -18855,9 +18833,9 @@
                 <a:solidFill>
                   <a:srgbClr val="FFFFFF"/>
                 </a:solidFill>
-                <a:latin typeface="Microsoft JhengHei" pitchFamily="34" charset="0"/>
-                <a:ea typeface="Microsoft JhengHei" pitchFamily="34" charset="-122"/>
-                <a:cs typeface="Microsoft JhengHei" pitchFamily="34" charset="-120"/>
+                <a:latin typeface="Hiragino Sans" pitchFamily="34" charset="0"/>
+                <a:ea typeface="Hiragino Sans" pitchFamily="34" charset="-122"/>
+                <a:cs typeface="Hiragino Sans" pitchFamily="34" charset="-120"/>
               </a:rPr>
               <a:t>ALB</a:t>
             </a:r>
@@ -18897,9 +18875,9 @@
                 <a:solidFill>
                   <a:srgbClr val="C7D6E4"/>
                 </a:solidFill>
-                <a:latin typeface="Microsoft JhengHei" pitchFamily="34" charset="0"/>
-                <a:ea typeface="Microsoft JhengHei" pitchFamily="34" charset="-122"/>
-                <a:cs typeface="Microsoft JhengHei" pitchFamily="34" charset="-120"/>
+                <a:latin typeface="Hiragino Sans" pitchFamily="34" charset="0"/>
+                <a:ea typeface="Hiragino Sans" pitchFamily="34" charset="-122"/>
+                <a:cs typeface="Hiragino Sans" pitchFamily="34" charset="-120"/>
               </a:rPr>
               <a:t>靜態 URL</a:t>
             </a:r>
@@ -18997,9 +18975,9 @@
                 <a:solidFill>
                   <a:srgbClr val="FFFFFF"/>
                 </a:solidFill>
-                <a:latin typeface="Microsoft JhengHei" pitchFamily="34" charset="0"/>
-                <a:ea typeface="Microsoft JhengHei" pitchFamily="34" charset="-122"/>
-                <a:cs typeface="Microsoft JhengHei" pitchFamily="34" charset="-120"/>
+                <a:latin typeface="Hiragino Sans" pitchFamily="34" charset="0"/>
+                <a:ea typeface="Hiragino Sans" pitchFamily="34" charset="-122"/>
+                <a:cs typeface="Hiragino Sans" pitchFamily="34" charset="-120"/>
               </a:rPr>
               <a:t>F</a:t>
             </a:r>
@@ -19039,9 +19017,9 @@
                 <a:solidFill>
                   <a:srgbClr val="FFFFFF"/>
                 </a:solidFill>
-                <a:latin typeface="Microsoft JhengHei" pitchFamily="34" charset="0"/>
-                <a:ea typeface="Microsoft JhengHei" pitchFamily="34" charset="-122"/>
-                <a:cs typeface="Microsoft JhengHei" pitchFamily="34" charset="-120"/>
+                <a:latin typeface="Hiragino Sans" pitchFamily="34" charset="0"/>
+                <a:ea typeface="Hiragino Sans" pitchFamily="34" charset="-122"/>
+                <a:cs typeface="Hiragino Sans" pitchFamily="34" charset="-120"/>
               </a:rPr>
               <a:t>ECS Fargate</a:t>
             </a:r>
@@ -19081,9 +19059,9 @@
                 <a:solidFill>
                   <a:srgbClr val="C7D6E4"/>
                 </a:solidFill>
-                <a:latin typeface="Microsoft JhengHei" pitchFamily="34" charset="0"/>
-                <a:ea typeface="Microsoft JhengHei" pitchFamily="34" charset="-122"/>
-                <a:cs typeface="Microsoft JhengHei" pitchFamily="34" charset="-120"/>
+                <a:latin typeface="Hiragino Sans" pitchFamily="34" charset="0"/>
+                <a:ea typeface="Hiragino Sans" pitchFamily="34" charset="-122"/>
+                <a:cs typeface="Hiragino Sans" pitchFamily="34" charset="-120"/>
               </a:rPr>
               <a:t>ARM64 · :8080</a:t>
             </a:r>
@@ -19181,9 +19159,9 @@
                 <a:solidFill>
                   <a:srgbClr val="FFFFFF"/>
                 </a:solidFill>
-                <a:latin typeface="Microsoft JhengHei" pitchFamily="34" charset="0"/>
-                <a:ea typeface="Microsoft JhengHei" pitchFamily="34" charset="-122"/>
-                <a:cs typeface="Microsoft JhengHei" pitchFamily="34" charset="-120"/>
+                <a:latin typeface="Hiragino Sans" pitchFamily="34" charset="0"/>
+                <a:ea typeface="Hiragino Sans" pitchFamily="34" charset="-122"/>
+                <a:cs typeface="Hiragino Sans" pitchFamily="34" charset="-120"/>
               </a:rPr>
               <a:t>ECR</a:t>
             </a:r>
@@ -19223,9 +19201,9 @@
                 <a:solidFill>
                   <a:srgbClr val="FFFFFF"/>
                 </a:solidFill>
-                <a:latin typeface="Microsoft JhengHei" pitchFamily="34" charset="0"/>
-                <a:ea typeface="Microsoft JhengHei" pitchFamily="34" charset="-122"/>
-                <a:cs typeface="Microsoft JhengHei" pitchFamily="34" charset="-120"/>
+                <a:latin typeface="Hiragino Sans" pitchFamily="34" charset="0"/>
+                <a:ea typeface="Hiragino Sans" pitchFamily="34" charset="-122"/>
+                <a:cs typeface="Hiragino Sans" pitchFamily="34" charset="-120"/>
               </a:rPr>
               <a:t>ECR</a:t>
             </a:r>
@@ -19265,9 +19243,9 @@
                 <a:solidFill>
                   <a:srgbClr val="C7D6E4"/>
                 </a:solidFill>
-                <a:latin typeface="Microsoft JhengHei" pitchFamily="34" charset="0"/>
-                <a:ea typeface="Microsoft JhengHei" pitchFamily="34" charset="-122"/>
-                <a:cs typeface="Microsoft JhengHei" pitchFamily="34" charset="-120"/>
+                <a:latin typeface="Hiragino Sans" pitchFamily="34" charset="0"/>
+                <a:ea typeface="Hiragino Sans" pitchFamily="34" charset="-122"/>
+                <a:cs typeface="Hiragino Sans" pitchFamily="34" charset="-120"/>
               </a:rPr>
               <a:t>映像 · 資料烤入</a:t>
             </a:r>
@@ -19365,9 +19343,9 @@
                 <a:solidFill>
                   <a:srgbClr val="FFFFFF"/>
                 </a:solidFill>
-                <a:latin typeface="Microsoft JhengHei" pitchFamily="34" charset="0"/>
-                <a:ea typeface="Microsoft JhengHei" pitchFamily="34" charset="-122"/>
-                <a:cs typeface="Microsoft JhengHei" pitchFamily="34" charset="-120"/>
+                <a:latin typeface="Hiragino Sans" pitchFamily="34" charset="0"/>
+                <a:ea typeface="Hiragino Sans" pitchFamily="34" charset="-122"/>
+                <a:cs typeface="Hiragino Sans" pitchFamily="34" charset="-120"/>
               </a:rPr>
               <a:t>AI</a:t>
             </a:r>
@@ -19407,9 +19385,9 @@
                 <a:solidFill>
                   <a:srgbClr val="FFFFFF"/>
                 </a:solidFill>
-                <a:latin typeface="Microsoft JhengHei" pitchFamily="34" charset="0"/>
-                <a:ea typeface="Microsoft JhengHei" pitchFamily="34" charset="-122"/>
-                <a:cs typeface="Microsoft JhengHei" pitchFamily="34" charset="-120"/>
+                <a:latin typeface="Hiragino Sans" pitchFamily="34" charset="0"/>
+                <a:ea typeface="Hiragino Sans" pitchFamily="34" charset="-122"/>
+                <a:cs typeface="Hiragino Sans" pitchFamily="34" charset="-120"/>
               </a:rPr>
               <a:t>Bedrock · Claude Haiku</a:t>
             </a:r>
@@ -19449,9 +19427,9 @@
                 <a:solidFill>
                   <a:srgbClr val="C7D6E4"/>
                 </a:solidFill>
-                <a:latin typeface="Microsoft JhengHei" pitchFamily="34" charset="0"/>
-                <a:ea typeface="Microsoft JhengHei" pitchFamily="34" charset="-122"/>
-                <a:cs typeface="Microsoft JhengHei" pitchFamily="34" charset="-120"/>
+                <a:latin typeface="Hiragino Sans" pitchFamily="34" charset="0"/>
+                <a:ea typeface="Hiragino Sans" pitchFamily="34" charset="-122"/>
+                <a:cs typeface="Hiragino Sans" pitchFamily="34" charset="-120"/>
               </a:rPr>
               <a:t>Converse · guardrail 驗 cited 數值</a:t>
             </a:r>
@@ -19549,9 +19527,9 @@
                 <a:solidFill>
                   <a:srgbClr val="FFFFFF"/>
                 </a:solidFill>
-                <a:latin typeface="Microsoft JhengHei" pitchFamily="34" charset="0"/>
-                <a:ea typeface="Microsoft JhengHei" pitchFamily="34" charset="-122"/>
-                <a:cs typeface="Microsoft JhengHei" pitchFamily="34" charset="-120"/>
+                <a:latin typeface="Hiragino Sans" pitchFamily="34" charset="0"/>
+                <a:ea typeface="Hiragino Sans" pitchFamily="34" charset="-122"/>
+                <a:cs typeface="Hiragino Sans" pitchFamily="34" charset="-120"/>
               </a:rPr>
               <a:t>SNS</a:t>
             </a:r>
@@ -19591,9 +19569,9 @@
                 <a:solidFill>
                   <a:srgbClr val="FFFFFF"/>
                 </a:solidFill>
-                <a:latin typeface="Microsoft JhengHei" pitchFamily="34" charset="0"/>
-                <a:ea typeface="Microsoft JhengHei" pitchFamily="34" charset="-122"/>
-                <a:cs typeface="Microsoft JhengHei" pitchFamily="34" charset="-120"/>
+                <a:latin typeface="Hiragino Sans" pitchFamily="34" charset="0"/>
+                <a:ea typeface="Hiragino Sans" pitchFamily="34" charset="-122"/>
+                <a:cs typeface="Hiragino Sans" pitchFamily="34" charset="-120"/>
               </a:rPr>
               <a:t>SNS · fleetmind-alerts</a:t>
             </a:r>
@@ -19633,9 +19611,9 @@
                 <a:solidFill>
                   <a:srgbClr val="C7D6E4"/>
                 </a:solidFill>
-                <a:latin typeface="Microsoft JhengHei" pitchFamily="34" charset="0"/>
-                <a:ea typeface="Microsoft JhengHei" pitchFamily="34" charset="-122"/>
-                <a:cs typeface="Microsoft JhengHei" pitchFamily="34" charset="-120"/>
+                <a:latin typeface="Hiragino Sans" pitchFamily="34" charset="0"/>
+                <a:ea typeface="Hiragino Sans" pitchFamily="34" charset="-122"/>
+                <a:cs typeface="Hiragino Sans" pitchFamily="34" charset="-120"/>
               </a:rPr>
               <a:t>告警扇出</a:t>
             </a:r>
@@ -19814,9 +19792,9 @@
                 <a:solidFill>
                   <a:srgbClr val="FFFFFF"/>
                 </a:solidFill>
-                <a:latin typeface="Microsoft JhengHei" pitchFamily="34" charset="0"/>
-                <a:ea typeface="Microsoft JhengHei" pitchFamily="34" charset="-122"/>
-                <a:cs typeface="Microsoft JhengHei" pitchFamily="34" charset="-120"/>
+                <a:latin typeface="Hiragino Sans" pitchFamily="34" charset="0"/>
+                <a:ea typeface="Hiragino Sans" pitchFamily="34" charset="-122"/>
+                <a:cs typeface="Hiragino Sans" pitchFamily="34" charset="-120"/>
               </a:rPr>
               <a:t>IAM　exec role 拉 ECR · task role 授 Bedrock + SNS</a:t>
             </a:r>
@@ -19875,9 +19853,9 @@
                 <a:solidFill>
                   <a:srgbClr val="FFFFFF"/>
                 </a:solidFill>
-                <a:latin typeface="Microsoft JhengHei" pitchFamily="34" charset="0"/>
-                <a:ea typeface="Microsoft JhengHei" pitchFamily="34" charset="-122"/>
-                <a:cs typeface="Microsoft JhengHei" pitchFamily="34" charset="-120"/>
+                <a:latin typeface="Hiragino Sans" pitchFamily="34" charset="0"/>
+                <a:ea typeface="Hiragino Sans" pitchFamily="34" charset="-122"/>
+                <a:cs typeface="Hiragino Sans" pitchFamily="34" charset="-120"/>
               </a:rPr>
               <a:t>CloudWatch Logs　/fleetmind/api</a:t>
             </a:r>
@@ -19950,9 +19928,9 @@
                 <a:solidFill>
                   <a:srgbClr val="2A9D8F"/>
                 </a:solidFill>
-                <a:latin typeface="Microsoft JhengHei" pitchFamily="34" charset="0"/>
-                <a:ea typeface="Microsoft JhengHei" pitchFamily="34" charset="-122"/>
-                <a:cs typeface="Microsoft JhengHei" pitchFamily="34" charset="-120"/>
+                <a:latin typeface="Hiragino Sans" pitchFamily="34" charset="0"/>
+                <a:ea typeface="Hiragino Sans" pitchFamily="34" charset="-122"/>
+                <a:cs typeface="Hiragino Sans" pitchFamily="34" charset="-120"/>
               </a:rPr>
               <a:t>資料流</a:t>
             </a:r>
@@ -19996,9 +19974,9 @@
                 <a:solidFill>
                   <a:srgbClr val="C7D6E4"/>
                 </a:solidFill>
-                <a:latin typeface="Microsoft JhengHei" pitchFamily="34" charset="0"/>
-                <a:ea typeface="Microsoft JhengHei" pitchFamily="34" charset="-122"/>
-                <a:cs typeface="Microsoft JhengHei" pitchFamily="34" charset="-120"/>
+                <a:latin typeface="Hiragino Sans" pitchFamily="34" charset="0"/>
+                <a:ea typeface="Hiragino Sans" pitchFamily="34" charset="-122"/>
+                <a:cs typeface="Hiragino Sans" pitchFamily="34" charset="-120"/>
               </a:rPr>
               <a:t>離線　core-calc 讀 15 船 2021–2025 正午報表，跑 ISO 19030 k 與品質旗標 → MetricsExportCli 產 real-metrics.json</a:t>
             </a:r>
@@ -20020,9 +19998,9 @@
                 <a:solidFill>
                   <a:srgbClr val="C7D6E4"/>
                 </a:solidFill>
-                <a:latin typeface="Microsoft JhengHei" pitchFamily="34" charset="0"/>
-                <a:ea typeface="Microsoft JhengHei" pitchFamily="34" charset="-122"/>
-                <a:cs typeface="Microsoft JhengHei" pitchFamily="34" charset="-120"/>
+                <a:latin typeface="Hiragino Sans" pitchFamily="34" charset="0"/>
+                <a:ea typeface="Hiragino Sans" pitchFamily="34" charset="-122"/>
+                <a:cs typeface="Hiragino Sans" pitchFamily="34" charset="-120"/>
               </a:rPr>
               <a:t>Build　Dockerfile COPY real-metrics.json 一起打包 jar → 推 ECR</a:t>
             </a:r>
@@ -20044,9 +20022,9 @@
                 <a:solidFill>
                   <a:srgbClr val="C7D6E4"/>
                 </a:solidFill>
-                <a:latin typeface="Microsoft JhengHei" pitchFamily="34" charset="0"/>
-                <a:ea typeface="Microsoft JhengHei" pitchFamily="34" charset="-122"/>
-                <a:cs typeface="Microsoft JhengHei" pitchFamily="34" charset="-120"/>
+                <a:latin typeface="Hiragino Sans" pitchFamily="34" charset="0"/>
+                <a:ea typeface="Hiragino Sans" pitchFamily="34" charset="-122"/>
+                <a:cs typeface="Hiragino Sans" pitchFamily="34" charset="-120"/>
               </a:rPr>
               <a:t>Runtime　評審 → ALB → Fargate 回決策看板 + REST（/fleet/summary、/vessels/{id}/decision、/config/threshold…）</a:t>
             </a:r>
@@ -20068,9 +20046,9 @@
                 <a:solidFill>
                   <a:srgbClr val="C7D6E4"/>
                 </a:solidFill>
-                <a:latin typeface="Microsoft JhengHei" pitchFamily="34" charset="0"/>
-                <a:ea typeface="Microsoft JhengHei" pitchFamily="34" charset="-122"/>
-                <a:cs typeface="Microsoft JhengHei" pitchFamily="34" charset="-120"/>
+                <a:latin typeface="Hiragino Sans" pitchFamily="34" charset="0"/>
+                <a:ea typeface="Hiragino Sans" pitchFamily="34" charset="-122"/>
+                <a:cs typeface="Hiragino Sans" pitchFamily="34" charset="-120"/>
               </a:rPr>
               <a:t>AI 簡報　/ai-brief → Bedrock Converse → guardrail 驗 cited 數值</a:t>
             </a:r>
@@ -20092,9 +20070,9 @@
                 <a:solidFill>
                   <a:srgbClr val="C7D6E4"/>
                 </a:solidFill>
-                <a:latin typeface="Microsoft JhengHei" pitchFamily="34" charset="0"/>
-                <a:ea typeface="Microsoft JhengHei" pitchFamily="34" charset="-122"/>
-                <a:cs typeface="Microsoft JhengHei" pitchFamily="34" charset="-120"/>
+                <a:latin typeface="Hiragino Sans" pitchFamily="34" charset="0"/>
+                <a:ea typeface="Hiragino Sans" pitchFamily="34" charset="-122"/>
+                <a:cs typeface="Hiragino Sans" pitchFamily="34" charset="-120"/>
               </a:rPr>
               <a:t>告警　門檻跨越 → /alerts/notify → SNS Publish</a:t>
             </a:r>
@@ -20167,9 +20145,9 @@
                 <a:solidFill>
                   <a:srgbClr val="F4A72B"/>
                 </a:solidFill>
-                <a:latin typeface="Microsoft JhengHei" pitchFamily="34" charset="0"/>
-                <a:ea typeface="Microsoft JhengHei" pitchFamily="34" charset="-122"/>
-                <a:cs typeface="Microsoft JhengHei" pitchFamily="34" charset="-120"/>
+                <a:latin typeface="Hiragino Sans" pitchFamily="34" charset="0"/>
+                <a:ea typeface="Hiragino Sans" pitchFamily="34" charset="-122"/>
+                <a:cs typeface="Hiragino Sans" pitchFamily="34" charset="-120"/>
               </a:rPr>
               <a:t>為什麼是它 — demo 風險最低</a:t>
             </a:r>
@@ -20213,9 +20191,9 @@
                 <a:solidFill>
                   <a:srgbClr val="FFFFFF"/>
                 </a:solidFill>
-                <a:latin typeface="Microsoft JhengHei" pitchFamily="34" charset="0"/>
-                <a:ea typeface="Microsoft JhengHei" pitchFamily="34" charset="-122"/>
-                <a:cs typeface="Microsoft JhengHei" pitchFamily="34" charset="-120"/>
+                <a:latin typeface="Hiragino Sans" pitchFamily="34" charset="0"/>
+                <a:ea typeface="Hiragino Sans" pitchFamily="34" charset="-122"/>
+                <a:cs typeface="Hiragino Sans" pitchFamily="34" charset="-120"/>
               </a:rPr>
               <a:t>單一部署單元、單一 codebase，3 天內最好 debug 與彩排</a:t>
             </a:r>
@@ -20237,9 +20215,9 @@
                 <a:solidFill>
                   <a:srgbClr val="FFFFFF"/>
                 </a:solidFill>
-                <a:latin typeface="Microsoft JhengHei" pitchFamily="34" charset="0"/>
-                <a:ea typeface="Microsoft JhengHei" pitchFamily="34" charset="-122"/>
-                <a:cs typeface="Microsoft JhengHei" pitchFamily="34" charset="-120"/>
+                <a:latin typeface="Hiragino Sans" pitchFamily="34" charset="0"/>
+                <a:ea typeface="Hiragino Sans" pitchFamily="34" charset="-122"/>
+                <a:cs typeface="Hiragino Sans" pitchFamily="34" charset="-120"/>
               </a:rPr>
               <a:t>資料烤進映像＝零外部資料相依，冷啟即有真資料（repo 不含企業資料）</a:t>
             </a:r>
@@ -20261,9 +20239,9 @@
                 <a:solidFill>
                   <a:srgbClr val="FFFFFF"/>
                 </a:solidFill>
-                <a:latin typeface="Microsoft JhengHei" pitchFamily="34" charset="0"/>
-                <a:ea typeface="Microsoft JhengHei" pitchFamily="34" charset="-122"/>
-                <a:cs typeface="Microsoft JhengHei" pitchFamily="34" charset="-120"/>
+                <a:latin typeface="Hiragino Sans" pitchFamily="34" charset="0"/>
+                <a:ea typeface="Hiragino Sans" pitchFamily="34" charset="-122"/>
+                <a:cs typeface="Hiragino Sans" pitchFamily="34" charset="-120"/>
               </a:rPr>
               <a:t>ALB 給穩定 URL，task 重啟換 IP 不會讓 live demo 連結失效</a:t>
             </a:r>
@@ -20285,9 +20263,9 @@
                 <a:solidFill>
                   <a:srgbClr val="FFFFFF"/>
                 </a:solidFill>
-                <a:latin typeface="Microsoft JhengHei" pitchFamily="34" charset="0"/>
-                <a:ea typeface="Microsoft JhengHei" pitchFamily="34" charset="-122"/>
-                <a:cs typeface="Microsoft JhengHei" pitchFamily="34" charset="-120"/>
+                <a:latin typeface="Hiragino Sans" pitchFamily="34" charset="0"/>
+                <a:ea typeface="Hiragino Sans" pitchFamily="34" charset="-122"/>
+                <a:cs typeface="Hiragino Sans" pitchFamily="34" charset="-120"/>
               </a:rPr>
               <a:t>Bedrock + SNS 已實測打通，Email 告警與可調門檻需求已滿足</a:t>
             </a:r>
@@ -20309,9 +20287,9 @@
                 <a:solidFill>
                   <a:srgbClr val="FFFFFF"/>
                 </a:solidFill>
-                <a:latin typeface="Microsoft JhengHei" pitchFamily="34" charset="0"/>
-                <a:ea typeface="Microsoft JhengHei" pitchFamily="34" charset="-122"/>
-                <a:cs typeface="Microsoft JhengHei" pitchFamily="34" charset="-120"/>
+                <a:latin typeface="Hiragino Sans" pitchFamily="34" charset="0"/>
+                <a:ea typeface="Hiragino Sans" pitchFamily="34" charset="-122"/>
+                <a:cs typeface="Hiragino Sans" pitchFamily="34" charset="-120"/>
               </a:rPr>
               <a:t>ARM64 Fargate 成本低、免管 EC2 / OS patch</a:t>
             </a:r>
@@ -20533,9 +20511,9 @@
                 <a:solidFill>
                   <a:srgbClr val="FFFFFF"/>
                 </a:solidFill>
-                <a:latin typeface="Microsoft JhengHei" pitchFamily="34" charset="0"/>
-                <a:ea typeface="Microsoft JhengHei" pitchFamily="34" charset="-122"/>
-                <a:cs typeface="Microsoft JhengHei" pitchFamily="34" charset="-120"/>
+                <a:latin typeface="Hiragino Sans" pitchFamily="34" charset="0"/>
+                <a:ea typeface="Hiragino Sans" pitchFamily="34" charset="-122"/>
+                <a:cs typeface="Hiragino Sans" pitchFamily="34" charset="-120"/>
               </a:rPr>
               <a:t>04</a:t>
             </a:r>
@@ -20547,9 +20525,9 @@
                 <a:solidFill>
                   <a:srgbClr val="8FA8BD"/>
                 </a:solidFill>
-                <a:latin typeface="Microsoft JhengHei" pitchFamily="34" charset="0"/>
-                <a:ea typeface="Microsoft JhengHei" pitchFamily="34" charset="-122"/>
-                <a:cs typeface="Microsoft JhengHei" pitchFamily="34" charset="-120"/>
+                <a:latin typeface="Hiragino Sans" pitchFamily="34" charset="0"/>
+                <a:ea typeface="Hiragino Sans" pitchFamily="34" charset="-122"/>
+                <a:cs typeface="Hiragino Sans" pitchFamily="34" charset="-120"/>
               </a:rPr>
               <a:t>  /  15</a:t>
             </a:r>
@@ -20586,9 +20564,9 @@
                 <a:solidFill>
                   <a:srgbClr val="F4A72B"/>
                 </a:solidFill>
-                <a:latin typeface="Microsoft JhengHei" pitchFamily="34" charset="0"/>
-                <a:ea typeface="Microsoft JhengHei" pitchFamily="34" charset="-122"/>
-                <a:cs typeface="Microsoft JhengHei" pitchFamily="34" charset="-120"/>
+                <a:latin typeface="Hiragino Sans" pitchFamily="34" charset="0"/>
+                <a:ea typeface="Hiragino Sans" pitchFamily="34" charset="-122"/>
+                <a:cs typeface="Hiragino Sans" pitchFamily="34" charset="-120"/>
               </a:rPr>
               <a:t>方案 A · 現行強化版</a:t>
             </a:r>
@@ -20625,9 +20603,9 @@
                 <a:solidFill>
                   <a:srgbClr val="FFFFFF"/>
                 </a:solidFill>
-                <a:latin typeface="Microsoft JhengHei" pitchFamily="34" charset="0"/>
-                <a:ea typeface="Microsoft JhengHei" pitchFamily="34" charset="-122"/>
-                <a:cs typeface="Microsoft JhengHei" pitchFamily="34" charset="-120"/>
+                <a:latin typeface="Hiragino Sans" pitchFamily="34" charset="0"/>
+                <a:ea typeface="Hiragino Sans" pitchFamily="34" charset="-122"/>
+                <a:cs typeface="Hiragino Sans" pitchFamily="34" charset="-120"/>
               </a:rPr>
               <a:t>維持 Fargate + ALB + Bedrock + SNS</a:t>
             </a:r>
@@ -20686,9 +20664,9 @@
                 <a:solidFill>
                   <a:srgbClr val="FFFFFF"/>
                 </a:solidFill>
-                <a:latin typeface="Microsoft JhengHei" pitchFamily="34" charset="0"/>
-                <a:ea typeface="Microsoft JhengHei" pitchFamily="34" charset="-122"/>
-                <a:cs typeface="Microsoft JhengHei" pitchFamily="34" charset="-120"/>
+                <a:latin typeface="Hiragino Sans" pitchFamily="34" charset="0"/>
+                <a:ea typeface="Hiragino Sans" pitchFamily="34" charset="-122"/>
+                <a:cs typeface="Hiragino Sans" pitchFamily="34" charset="-120"/>
               </a:rPr>
               <a:t>成本 低</a:t>
             </a:r>
@@ -20747,9 +20725,9 @@
                 <a:solidFill>
                   <a:srgbClr val="FFFFFF"/>
                 </a:solidFill>
-                <a:latin typeface="Microsoft JhengHei" pitchFamily="34" charset="0"/>
-                <a:ea typeface="Microsoft JhengHei" pitchFamily="34" charset="-122"/>
-                <a:cs typeface="Microsoft JhengHei" pitchFamily="34" charset="-120"/>
+                <a:latin typeface="Hiragino Sans" pitchFamily="34" charset="0"/>
+                <a:ea typeface="Hiragino Sans" pitchFamily="34" charset="-122"/>
+                <a:cs typeface="Hiragino Sans" pitchFamily="34" charset="-120"/>
               </a:rPr>
               <a:t>黑客松 ★ 最高</a:t>
             </a:r>
@@ -20809,13 +20787,13 @@
               <a:buNone/>
             </a:pPr>
             <a:r>
-              <a:rPr lang="en-US" sz="1200" i="1" dirty="0">
+              <a:rPr lang="en-US" sz="1200" dirty="0">
                 <a:solidFill>
                   <a:srgbClr val="C7D6E4"/>
                 </a:solidFill>
-                <a:latin typeface="Microsoft JhengHei" pitchFamily="34" charset="0"/>
-                <a:ea typeface="Microsoft JhengHei" pitchFamily="34" charset="-122"/>
-                <a:cs typeface="Microsoft JhengHei" pitchFamily="34" charset="-120"/>
+                <a:latin typeface="Hiragino Sans" pitchFamily="34" charset="0"/>
+                <a:ea typeface="Hiragino Sans" pitchFamily="34" charset="-122"/>
+                <a:cs typeface="Hiragino Sans" pitchFamily="34" charset="-120"/>
               </a:rPr>
               <a:t>沿用現行單服務容器，把 demo 臨時做法收斂為正式 ECS Service（desiredCount 維持、健檢失敗自動重拉）。評審計分板上可交付性最高、demo 風險最低的基準線。</a:t>
             </a:r>
@@ -20852,9 +20830,9 @@
                 <a:solidFill>
                   <a:srgbClr val="2A9D8F"/>
                 </a:solidFill>
-                <a:latin typeface="Microsoft JhengHei" pitchFamily="34" charset="0"/>
-                <a:ea typeface="Microsoft JhengHei" pitchFamily="34" charset="-122"/>
-                <a:cs typeface="Microsoft JhengHei" pitchFamily="34" charset="-120"/>
+                <a:latin typeface="Hiragino Sans" pitchFamily="34" charset="0"/>
+                <a:ea typeface="Hiragino Sans" pitchFamily="34" charset="-122"/>
+                <a:cs typeface="Hiragino Sans" pitchFamily="34" charset="-120"/>
               </a:rPr>
               <a:t>服務組成</a:t>
             </a:r>
@@ -20952,9 +20930,9 @@
                 <a:solidFill>
                   <a:srgbClr val="FFFFFF"/>
                 </a:solidFill>
-                <a:latin typeface="Microsoft JhengHei" pitchFamily="34" charset="0"/>
-                <a:ea typeface="Microsoft JhengHei" pitchFamily="34" charset="-122"/>
-                <a:cs typeface="Microsoft JhengHei" pitchFamily="34" charset="-120"/>
+                <a:latin typeface="Hiragino Sans" pitchFamily="34" charset="0"/>
+                <a:ea typeface="Hiragino Sans" pitchFamily="34" charset="-122"/>
+                <a:cs typeface="Hiragino Sans" pitchFamily="34" charset="-120"/>
               </a:rPr>
               <a:t>F</a:t>
             </a:r>
@@ -20994,9 +20972,9 @@
                 <a:solidFill>
                   <a:srgbClr val="FFFFFF"/>
                 </a:solidFill>
-                <a:latin typeface="Microsoft JhengHei" pitchFamily="34" charset="0"/>
-                <a:ea typeface="Microsoft JhengHei" pitchFamily="34" charset="-122"/>
-                <a:cs typeface="Microsoft JhengHei" pitchFamily="34" charset="-120"/>
+                <a:latin typeface="Hiragino Sans" pitchFamily="34" charset="0"/>
+                <a:ea typeface="Hiragino Sans" pitchFamily="34" charset="-122"/>
+                <a:cs typeface="Hiragino Sans" pitchFamily="34" charset="-120"/>
               </a:rPr>
               <a:t>ECS Service</a:t>
             </a:r>
@@ -21014,9 +20992,9 @@
                 <a:solidFill>
                   <a:srgbClr val="FFFFFF"/>
                 </a:solidFill>
-                <a:latin typeface="Microsoft JhengHei" pitchFamily="34" charset="0"/>
-                <a:ea typeface="Microsoft JhengHei" pitchFamily="34" charset="-122"/>
-                <a:cs typeface="Microsoft JhengHei" pitchFamily="34" charset="-120"/>
+                <a:latin typeface="Hiragino Sans" pitchFamily="34" charset="0"/>
+                <a:ea typeface="Hiragino Sans" pitchFamily="34" charset="-122"/>
+                <a:cs typeface="Hiragino Sans" pitchFamily="34" charset="-120"/>
               </a:rPr>
               <a:t>+ Fargate</a:t>
             </a:r>
@@ -21056,9 +21034,9 @@
                 <a:solidFill>
                   <a:srgbClr val="C7D6E4"/>
                 </a:solidFill>
-                <a:latin typeface="Microsoft JhengHei" pitchFamily="34" charset="0"/>
-                <a:ea typeface="Microsoft JhengHei" pitchFamily="34" charset="-122"/>
-                <a:cs typeface="Microsoft JhengHei" pitchFamily="34" charset="-120"/>
+                <a:latin typeface="Hiragino Sans" pitchFamily="34" charset="0"/>
+                <a:ea typeface="Hiragino Sans" pitchFamily="34" charset="-122"/>
+                <a:cs typeface="Hiragino Sans" pitchFamily="34" charset="-120"/>
               </a:rPr>
               <a:t>常駐 · 自動重拉</a:t>
             </a:r>
@@ -21180,9 +21158,9 @@
                 <a:solidFill>
                   <a:srgbClr val="FFFFFF"/>
                 </a:solidFill>
-                <a:latin typeface="Microsoft JhengHei" pitchFamily="34" charset="0"/>
-                <a:ea typeface="Microsoft JhengHei" pitchFamily="34" charset="-122"/>
-                <a:cs typeface="Microsoft JhengHei" pitchFamily="34" charset="-120"/>
+                <a:latin typeface="Hiragino Sans" pitchFamily="34" charset="0"/>
+                <a:ea typeface="Hiragino Sans" pitchFamily="34" charset="-122"/>
+                <a:cs typeface="Hiragino Sans" pitchFamily="34" charset="-120"/>
               </a:rPr>
               <a:t>ALB</a:t>
             </a:r>
@@ -21222,9 +21200,9 @@
                 <a:solidFill>
                   <a:srgbClr val="FFFFFF"/>
                 </a:solidFill>
-                <a:latin typeface="Microsoft JhengHei" pitchFamily="34" charset="0"/>
-                <a:ea typeface="Microsoft JhengHei" pitchFamily="34" charset="-122"/>
-                <a:cs typeface="Microsoft JhengHei" pitchFamily="34" charset="-120"/>
+                <a:latin typeface="Hiragino Sans" pitchFamily="34" charset="0"/>
+                <a:ea typeface="Hiragino Sans" pitchFamily="34" charset="-122"/>
+                <a:cs typeface="Hiragino Sans" pitchFamily="34" charset="-120"/>
               </a:rPr>
               <a:t>ALB</a:t>
             </a:r>
@@ -21264,9 +21242,9 @@
                 <a:solidFill>
                   <a:srgbClr val="C7D6E4"/>
                 </a:solidFill>
-                <a:latin typeface="Microsoft JhengHei" pitchFamily="34" charset="0"/>
-                <a:ea typeface="Microsoft JhengHei" pitchFamily="34" charset="-122"/>
-                <a:cs typeface="Microsoft JhengHei" pitchFamily="34" charset="-120"/>
+                <a:latin typeface="Hiragino Sans" pitchFamily="34" charset="0"/>
+                <a:ea typeface="Hiragino Sans" pitchFamily="34" charset="-122"/>
+                <a:cs typeface="Hiragino Sans" pitchFamily="34" charset="-120"/>
               </a:rPr>
               <a:t>靜態 URL</a:t>
             </a:r>
@@ -21388,9 +21366,9 @@
                 <a:solidFill>
                   <a:srgbClr val="FFFFFF"/>
                 </a:solidFill>
-                <a:latin typeface="Microsoft JhengHei" pitchFamily="34" charset="0"/>
-                <a:ea typeface="Microsoft JhengHei" pitchFamily="34" charset="-122"/>
-                <a:cs typeface="Microsoft JhengHei" pitchFamily="34" charset="-120"/>
+                <a:latin typeface="Hiragino Sans" pitchFamily="34" charset="0"/>
+                <a:ea typeface="Hiragino Sans" pitchFamily="34" charset="-122"/>
+                <a:cs typeface="Hiragino Sans" pitchFamily="34" charset="-120"/>
               </a:rPr>
               <a:t>ECR</a:t>
             </a:r>
@@ -21430,9 +21408,9 @@
                 <a:solidFill>
                   <a:srgbClr val="FFFFFF"/>
                 </a:solidFill>
-                <a:latin typeface="Microsoft JhengHei" pitchFamily="34" charset="0"/>
-                <a:ea typeface="Microsoft JhengHei" pitchFamily="34" charset="-122"/>
-                <a:cs typeface="Microsoft JhengHei" pitchFamily="34" charset="-120"/>
+                <a:latin typeface="Hiragino Sans" pitchFamily="34" charset="0"/>
+                <a:ea typeface="Hiragino Sans" pitchFamily="34" charset="-122"/>
+                <a:cs typeface="Hiragino Sans" pitchFamily="34" charset="-120"/>
               </a:rPr>
               <a:t>ECR</a:t>
             </a:r>
@@ -21472,9 +21450,9 @@
                 <a:solidFill>
                   <a:srgbClr val="C7D6E4"/>
                 </a:solidFill>
-                <a:latin typeface="Microsoft JhengHei" pitchFamily="34" charset="0"/>
-                <a:ea typeface="Microsoft JhengHei" pitchFamily="34" charset="-122"/>
-                <a:cs typeface="Microsoft JhengHei" pitchFamily="34" charset="-120"/>
+                <a:latin typeface="Hiragino Sans" pitchFamily="34" charset="0"/>
+                <a:ea typeface="Hiragino Sans" pitchFamily="34" charset="-122"/>
+                <a:cs typeface="Hiragino Sans" pitchFamily="34" charset="-120"/>
               </a:rPr>
               <a:t>arm64 映像</a:t>
             </a:r>
@@ -21596,9 +21574,9 @@
                 <a:solidFill>
                   <a:srgbClr val="FFFFFF"/>
                 </a:solidFill>
-                <a:latin typeface="Microsoft JhengHei" pitchFamily="34" charset="0"/>
-                <a:ea typeface="Microsoft JhengHei" pitchFamily="34" charset="-122"/>
-                <a:cs typeface="Microsoft JhengHei" pitchFamily="34" charset="-120"/>
+                <a:latin typeface="Hiragino Sans" pitchFamily="34" charset="0"/>
+                <a:ea typeface="Hiragino Sans" pitchFamily="34" charset="-122"/>
+                <a:cs typeface="Hiragino Sans" pitchFamily="34" charset="-120"/>
               </a:rPr>
               <a:t>AI</a:t>
             </a:r>
@@ -21638,9 +21616,9 @@
                 <a:solidFill>
                   <a:srgbClr val="FFFFFF"/>
                 </a:solidFill>
-                <a:latin typeface="Microsoft JhengHei" pitchFamily="34" charset="0"/>
-                <a:ea typeface="Microsoft JhengHei" pitchFamily="34" charset="-122"/>
-                <a:cs typeface="Microsoft JhengHei" pitchFamily="34" charset="-120"/>
+                <a:latin typeface="Hiragino Sans" pitchFamily="34" charset="0"/>
+                <a:ea typeface="Hiragino Sans" pitchFamily="34" charset="-122"/>
+                <a:cs typeface="Hiragino Sans" pitchFamily="34" charset="-120"/>
               </a:rPr>
               <a:t>Bedrock</a:t>
             </a:r>
@@ -21680,9 +21658,9 @@
                 <a:solidFill>
                   <a:srgbClr val="C7D6E4"/>
                 </a:solidFill>
-                <a:latin typeface="Microsoft JhengHei" pitchFamily="34" charset="0"/>
-                <a:ea typeface="Microsoft JhengHei" pitchFamily="34" charset="-122"/>
-                <a:cs typeface="Microsoft JhengHei" pitchFamily="34" charset="-120"/>
+                <a:latin typeface="Hiragino Sans" pitchFamily="34" charset="0"/>
+                <a:ea typeface="Hiragino Sans" pitchFamily="34" charset="-122"/>
+                <a:cs typeface="Hiragino Sans" pitchFamily="34" charset="-120"/>
               </a:rPr>
               <a:t>Claude Haiku</a:t>
             </a:r>
@@ -21804,9 +21782,9 @@
                 <a:solidFill>
                   <a:srgbClr val="FFFFFF"/>
                 </a:solidFill>
-                <a:latin typeface="Microsoft JhengHei" pitchFamily="34" charset="0"/>
-                <a:ea typeface="Microsoft JhengHei" pitchFamily="34" charset="-122"/>
-                <a:cs typeface="Microsoft JhengHei" pitchFamily="34" charset="-120"/>
+                <a:latin typeface="Hiragino Sans" pitchFamily="34" charset="0"/>
+                <a:ea typeface="Hiragino Sans" pitchFamily="34" charset="-122"/>
+                <a:cs typeface="Hiragino Sans" pitchFamily="34" charset="-120"/>
               </a:rPr>
               <a:t>SNS</a:t>
             </a:r>
@@ -21846,9 +21824,9 @@
                 <a:solidFill>
                   <a:srgbClr val="FFFFFF"/>
                 </a:solidFill>
-                <a:latin typeface="Microsoft JhengHei" pitchFamily="34" charset="0"/>
-                <a:ea typeface="Microsoft JhengHei" pitchFamily="34" charset="-122"/>
-                <a:cs typeface="Microsoft JhengHei" pitchFamily="34" charset="-120"/>
+                <a:latin typeface="Hiragino Sans" pitchFamily="34" charset="0"/>
+                <a:ea typeface="Hiragino Sans" pitchFamily="34" charset="-122"/>
+                <a:cs typeface="Hiragino Sans" pitchFamily="34" charset="-120"/>
               </a:rPr>
               <a:t>SNS</a:t>
             </a:r>
@@ -21888,9 +21866,9 @@
                 <a:solidFill>
                   <a:srgbClr val="C7D6E4"/>
                 </a:solidFill>
-                <a:latin typeface="Microsoft JhengHei" pitchFamily="34" charset="0"/>
-                <a:ea typeface="Microsoft JhengHei" pitchFamily="34" charset="-122"/>
-                <a:cs typeface="Microsoft JhengHei" pitchFamily="34" charset="-120"/>
+                <a:latin typeface="Hiragino Sans" pitchFamily="34" charset="0"/>
+                <a:ea typeface="Hiragino Sans" pitchFamily="34" charset="-122"/>
+                <a:cs typeface="Hiragino Sans" pitchFamily="34" charset="-120"/>
               </a:rPr>
               <a:t>告警</a:t>
             </a:r>
@@ -22012,9 +21990,9 @@
                 <a:solidFill>
                   <a:srgbClr val="FFFFFF"/>
                 </a:solidFill>
-                <a:latin typeface="Microsoft JhengHei" pitchFamily="34" charset="0"/>
-                <a:ea typeface="Microsoft JhengHei" pitchFamily="34" charset="-122"/>
-                <a:cs typeface="Microsoft JhengHei" pitchFamily="34" charset="-120"/>
+                <a:latin typeface="Hiragino Sans" pitchFamily="34" charset="0"/>
+                <a:ea typeface="Hiragino Sans" pitchFamily="34" charset="-122"/>
+                <a:cs typeface="Hiragino Sans" pitchFamily="34" charset="-120"/>
               </a:rPr>
               <a:t>CW</a:t>
             </a:r>
@@ -22054,9 +22032,9 @@
                 <a:solidFill>
                   <a:srgbClr val="FFFFFF"/>
                 </a:solidFill>
-                <a:latin typeface="Microsoft JhengHei" pitchFamily="34" charset="0"/>
-                <a:ea typeface="Microsoft JhengHei" pitchFamily="34" charset="-122"/>
-                <a:cs typeface="Microsoft JhengHei" pitchFamily="34" charset="-120"/>
+                <a:latin typeface="Hiragino Sans" pitchFamily="34" charset="0"/>
+                <a:ea typeface="Hiragino Sans" pitchFamily="34" charset="-122"/>
+                <a:cs typeface="Hiragino Sans" pitchFamily="34" charset="-120"/>
               </a:rPr>
               <a:t>CloudWatch</a:t>
             </a:r>
@@ -22074,9 +22052,9 @@
                 <a:solidFill>
                   <a:srgbClr val="FFFFFF"/>
                 </a:solidFill>
-                <a:latin typeface="Microsoft JhengHei" pitchFamily="34" charset="0"/>
-                <a:ea typeface="Microsoft JhengHei" pitchFamily="34" charset="-122"/>
-                <a:cs typeface="Microsoft JhengHei" pitchFamily="34" charset="-120"/>
+                <a:latin typeface="Hiragino Sans" pitchFamily="34" charset="0"/>
+                <a:ea typeface="Hiragino Sans" pitchFamily="34" charset="-122"/>
+                <a:cs typeface="Hiragino Sans" pitchFamily="34" charset="-120"/>
               </a:rPr>
               <a:t>Alarms</a:t>
             </a:r>
@@ -22116,9 +22094,9 @@
                 <a:solidFill>
                   <a:srgbClr val="C7D6E4"/>
                 </a:solidFill>
-                <a:latin typeface="Microsoft JhengHei" pitchFamily="34" charset="0"/>
-                <a:ea typeface="Microsoft JhengHei" pitchFamily="34" charset="-122"/>
-                <a:cs typeface="Microsoft JhengHei" pitchFamily="34" charset="-120"/>
+                <a:latin typeface="Hiragino Sans" pitchFamily="34" charset="0"/>
+                <a:ea typeface="Hiragino Sans" pitchFamily="34" charset="-122"/>
+                <a:cs typeface="Hiragino Sans" pitchFamily="34" charset="-120"/>
               </a:rPr>
               <a:t>日誌 + 健康</a:t>
             </a:r>
@@ -22233,9 +22211,9 @@
                 <a:solidFill>
                   <a:srgbClr val="FFFFFF"/>
                 </a:solidFill>
-                <a:latin typeface="Microsoft JhengHei" pitchFamily="34" charset="0"/>
-                <a:ea typeface="Microsoft JhengHei" pitchFamily="34" charset="-122"/>
-                <a:cs typeface="Microsoft JhengHei" pitchFamily="34" charset="-120"/>
+                <a:latin typeface="Hiragino Sans" pitchFamily="34" charset="0"/>
+                <a:ea typeface="Hiragino Sans" pitchFamily="34" charset="-122"/>
+                <a:cs typeface="Hiragino Sans" pitchFamily="34" charset="-120"/>
               </a:rPr>
               <a:t>● 優勢</a:t>
             </a:r>
@@ -22279,9 +22257,9 @@
                 <a:solidFill>
                   <a:srgbClr val="C7D6E4"/>
                 </a:solidFill>
-                <a:latin typeface="Microsoft JhengHei" pitchFamily="34" charset="0"/>
-                <a:ea typeface="Microsoft JhengHei" pitchFamily="34" charset="-122"/>
-                <a:cs typeface="Microsoft JhengHei" pitchFamily="34" charset="-120"/>
+                <a:latin typeface="Hiragino Sans" pitchFamily="34" charset="0"/>
+                <a:ea typeface="Hiragino Sans" pitchFamily="34" charset="-122"/>
+                <a:cs typeface="Hiragino Sans" pitchFamily="34" charset="-120"/>
               </a:rPr>
               <a:t>與已上線架構一致，Day3 重跑成本最低、最可靠</a:t>
             </a:r>
@@ -22303,9 +22281,9 @@
                 <a:solidFill>
                   <a:srgbClr val="C7D6E4"/>
                 </a:solidFill>
-                <a:latin typeface="Microsoft JhengHei" pitchFamily="34" charset="0"/>
-                <a:ea typeface="Microsoft JhengHei" pitchFamily="34" charset="-122"/>
-                <a:cs typeface="Microsoft JhengHei" pitchFamily="34" charset="-120"/>
+                <a:latin typeface="Hiragino Sans" pitchFamily="34" charset="0"/>
+                <a:ea typeface="Hiragino Sans" pitchFamily="34" charset="-122"/>
+                <a:cs typeface="Hiragino Sans" pitchFamily="34" charset="-120"/>
               </a:rPr>
               <a:t>單 codebase 好維護、好彩排</a:t>
             </a:r>
@@ -22327,9 +22305,9 @@
                 <a:solidFill>
                   <a:srgbClr val="C7D6E4"/>
                 </a:solidFill>
-                <a:latin typeface="Microsoft JhengHei" pitchFamily="34" charset="0"/>
-                <a:ea typeface="Microsoft JhengHei" pitchFamily="34" charset="-122"/>
-                <a:cs typeface="Microsoft JhengHei" pitchFamily="34" charset="-120"/>
+                <a:latin typeface="Hiragino Sans" pitchFamily="34" charset="0"/>
+                <a:ea typeface="Hiragino Sans" pitchFamily="34" charset="-122"/>
+                <a:cs typeface="Hiragino Sans" pitchFamily="34" charset="-120"/>
               </a:rPr>
               <a:t>ALB 靜態 URL 解決臨時 IP 問題</a:t>
             </a:r>
@@ -22351,9 +22329,9 @@
                 <a:solidFill>
                   <a:srgbClr val="C7D6E4"/>
                 </a:solidFill>
-                <a:latin typeface="Microsoft JhengHei" pitchFamily="34" charset="0"/>
-                <a:ea typeface="Microsoft JhengHei" pitchFamily="34" charset="-122"/>
-                <a:cs typeface="Microsoft JhengHei" pitchFamily="34" charset="-120"/>
+                <a:latin typeface="Hiragino Sans" pitchFamily="34" charset="0"/>
+                <a:ea typeface="Hiragino Sans" pitchFamily="34" charset="-122"/>
+                <a:cs typeface="Hiragino Sans" pitchFamily="34" charset="-120"/>
               </a:rPr>
               <a:t>Bedrock / SNS 已實測，Email + 門檻需求即刻滿足</a:t>
             </a:r>
@@ -22468,9 +22446,9 @@
                 <a:solidFill>
                   <a:srgbClr val="FFFFFF"/>
                 </a:solidFill>
-                <a:latin typeface="Microsoft JhengHei" pitchFamily="34" charset="0"/>
-                <a:ea typeface="Microsoft JhengHei" pitchFamily="34" charset="-122"/>
-                <a:cs typeface="Microsoft JhengHei" pitchFamily="34" charset="-120"/>
+                <a:latin typeface="Hiragino Sans" pitchFamily="34" charset="0"/>
+                <a:ea typeface="Hiragino Sans" pitchFamily="34" charset="-122"/>
+                <a:cs typeface="Hiragino Sans" pitchFamily="34" charset="-120"/>
               </a:rPr>
               <a:t>▲ 取捨 / 風險</a:t>
             </a:r>
@@ -22514,9 +22492,9 @@
                 <a:solidFill>
                   <a:srgbClr val="C7D6E4"/>
                 </a:solidFill>
-                <a:latin typeface="Microsoft JhengHei" pitchFamily="34" charset="0"/>
-                <a:ea typeface="Microsoft JhengHei" pitchFamily="34" charset="-122"/>
-                <a:cs typeface="Microsoft JhengHei" pitchFamily="34" charset="-120"/>
+                <a:latin typeface="Hiragino Sans" pitchFamily="34" charset="0"/>
+                <a:ea typeface="Hiragino Sans" pitchFamily="34" charset="-122"/>
+                <a:cs typeface="Hiragino Sans" pitchFamily="34" charset="-120"/>
               </a:rPr>
               <a:t>非資料驅動，更新資料要重 build / 重部署</a:t>
             </a:r>
@@ -22538,9 +22516,9 @@
                 <a:solidFill>
                   <a:srgbClr val="C7D6E4"/>
                 </a:solidFill>
-                <a:latin typeface="Microsoft JhengHei" pitchFamily="34" charset="0"/>
-                <a:ea typeface="Microsoft JhengHei" pitchFamily="34" charset="-122"/>
-                <a:cs typeface="Microsoft JhengHei" pitchFamily="34" charset="-120"/>
+                <a:latin typeface="Hiragino Sans" pitchFamily="34" charset="0"/>
+                <a:ea typeface="Hiragino Sans" pitchFamily="34" charset="-122"/>
+                <a:cs typeface="Hiragino Sans" pitchFamily="34" charset="-120"/>
               </a:rPr>
               <a:t>無 BI 自助分析層</a:t>
             </a:r>
@@ -22562,9 +22540,9 @@
                 <a:solidFill>
                   <a:srgbClr val="C7D6E4"/>
                 </a:solidFill>
-                <a:latin typeface="Microsoft JhengHei" pitchFamily="34" charset="0"/>
-                <a:ea typeface="Microsoft JhengHei" pitchFamily="34" charset="-122"/>
-                <a:cs typeface="Microsoft JhengHei" pitchFamily="34" charset="-120"/>
+                <a:latin typeface="Hiragino Sans" pitchFamily="34" charset="0"/>
+                <a:ea typeface="Hiragino Sans" pitchFamily="34" charset="-122"/>
+                <a:cs typeface="Hiragino Sans" pitchFamily="34" charset="-120"/>
               </a:rPr>
               <a:t>VPC / ALB / 雙 IAM 設定較多，臨時憑證到期需重跑</a:t>
             </a:r>
@@ -22586,9 +22564,9 @@
                 <a:solidFill>
                   <a:srgbClr val="C7D6E4"/>
                 </a:solidFill>
-                <a:latin typeface="Microsoft JhengHei" pitchFamily="34" charset="0"/>
-                <a:ea typeface="Microsoft JhengHei" pitchFamily="34" charset="-122"/>
-                <a:cs typeface="Microsoft JhengHei" pitchFamily="34" charset="-120"/>
+                <a:latin typeface="Hiragino Sans" pitchFamily="34" charset="0"/>
+                <a:ea typeface="Hiragino Sans" pitchFamily="34" charset="-122"/>
+                <a:cs typeface="Hiragino Sans" pitchFamily="34" charset="-120"/>
               </a:rPr>
               <a:t>架構創新度普通，技術 / 創意分不突出</a:t>
             </a:r>
@@ -22657,9 +22635,9 @@
                 <a:solidFill>
                   <a:srgbClr val="F4A72B"/>
                 </a:solidFill>
-                <a:latin typeface="Microsoft JhengHei" pitchFamily="34" charset="0"/>
-                <a:ea typeface="Microsoft JhengHei" pitchFamily="34" charset="-122"/>
-                <a:cs typeface="Microsoft JhengHei" pitchFamily="34" charset="-120"/>
+                <a:latin typeface="Hiragino Sans" pitchFamily="34" charset="0"/>
+                <a:ea typeface="Hiragino Sans" pitchFamily="34" charset="-122"/>
+                <a:cs typeface="Hiragino Sans" pitchFamily="34" charset="-120"/>
               </a:rPr>
               <a:t>◆ 何時選　</a:t>
             </a:r>
@@ -22674,9 +22652,9 @@
                 <a:solidFill>
                   <a:srgbClr val="FFFFFF"/>
                 </a:solidFill>
-                <a:latin typeface="Microsoft JhengHei" pitchFamily="34" charset="0"/>
-                <a:ea typeface="Microsoft JhengHei" pitchFamily="34" charset="-122"/>
-                <a:cs typeface="Microsoft JhengHei" pitchFamily="34" charset="-120"/>
+                <a:latin typeface="Hiragino Sans" pitchFamily="34" charset="0"/>
+                <a:ea typeface="Hiragino Sans" pitchFamily="34" charset="-122"/>
+                <a:cs typeface="Hiragino Sans" pitchFamily="34" charset="-120"/>
               </a:rPr>
               <a:t>首要目標是穩穩 demo、時間有限、要把工程師的 Email／告警／可調門檻需求確定交付時的預設選擇。</a:t>
             </a:r>
@@ -22898,9 +22876,9 @@
                 <a:solidFill>
                   <a:srgbClr val="FFFFFF"/>
                 </a:solidFill>
-                <a:latin typeface="Microsoft JhengHei" pitchFamily="34" charset="0"/>
-                <a:ea typeface="Microsoft JhengHei" pitchFamily="34" charset="-122"/>
-                <a:cs typeface="Microsoft JhengHei" pitchFamily="34" charset="-120"/>
+                <a:latin typeface="Hiragino Sans" pitchFamily="34" charset="0"/>
+                <a:ea typeface="Hiragino Sans" pitchFamily="34" charset="-122"/>
+                <a:cs typeface="Hiragino Sans" pitchFamily="34" charset="-120"/>
               </a:rPr>
               <a:t>05</a:t>
             </a:r>
@@ -22912,9 +22890,9 @@
                 <a:solidFill>
                   <a:srgbClr val="8FA8BD"/>
                 </a:solidFill>
-                <a:latin typeface="Microsoft JhengHei" pitchFamily="34" charset="0"/>
-                <a:ea typeface="Microsoft JhengHei" pitchFamily="34" charset="-122"/>
-                <a:cs typeface="Microsoft JhengHei" pitchFamily="34" charset="-120"/>
+                <a:latin typeface="Hiragino Sans" pitchFamily="34" charset="0"/>
+                <a:ea typeface="Hiragino Sans" pitchFamily="34" charset="-122"/>
+                <a:cs typeface="Hiragino Sans" pitchFamily="34" charset="-120"/>
               </a:rPr>
               <a:t>  /  15</a:t>
             </a:r>
@@ -22951,9 +22929,9 @@
                 <a:solidFill>
                   <a:srgbClr val="F4A72B"/>
                 </a:solidFill>
-                <a:latin typeface="Microsoft JhengHei" pitchFamily="34" charset="0"/>
-                <a:ea typeface="Microsoft JhengHei" pitchFamily="34" charset="-122"/>
-                <a:cs typeface="Microsoft JhengHei" pitchFamily="34" charset="-120"/>
+                <a:latin typeface="Hiragino Sans" pitchFamily="34" charset="0"/>
+                <a:ea typeface="Hiragino Sans" pitchFamily="34" charset="-122"/>
+                <a:cs typeface="Hiragino Sans" pitchFamily="34" charset="-120"/>
               </a:rPr>
               <a:t>方案 B · 全 SERVERLESS</a:t>
             </a:r>
@@ -22990,9 +22968,9 @@
                 <a:solidFill>
                   <a:srgbClr val="FFFFFF"/>
                 </a:solidFill>
-                <a:latin typeface="Microsoft JhengHei" pitchFamily="34" charset="0"/>
-                <a:ea typeface="Microsoft JhengHei" pitchFamily="34" charset="-122"/>
-                <a:cs typeface="Microsoft JhengHei" pitchFamily="34" charset="-120"/>
+                <a:latin typeface="Hiragino Sans" pitchFamily="34" charset="0"/>
+                <a:ea typeface="Hiragino Sans" pitchFamily="34" charset="-122"/>
+                <a:cs typeface="Hiragino Sans" pitchFamily="34" charset="-120"/>
               </a:rPr>
               <a:t>API Gateway + Lambda + DynamoDB（資料驅動）</a:t>
             </a:r>
@@ -23051,9 +23029,9 @@
                 <a:solidFill>
                   <a:srgbClr val="FFFFFF"/>
                 </a:solidFill>
-                <a:latin typeface="Microsoft JhengHei" pitchFamily="34" charset="0"/>
-                <a:ea typeface="Microsoft JhengHei" pitchFamily="34" charset="-122"/>
-                <a:cs typeface="Microsoft JhengHei" pitchFamily="34" charset="-120"/>
+                <a:latin typeface="Hiragino Sans" pitchFamily="34" charset="0"/>
+                <a:ea typeface="Hiragino Sans" pitchFamily="34" charset="-122"/>
+                <a:cs typeface="Hiragino Sans" pitchFamily="34" charset="-120"/>
               </a:rPr>
               <a:t>成本 極低</a:t>
             </a:r>
@@ -23112,9 +23090,9 @@
                 <a:solidFill>
                   <a:srgbClr val="18293B"/>
                 </a:solidFill>
-                <a:latin typeface="Microsoft JhengHei" pitchFamily="34" charset="0"/>
-                <a:ea typeface="Microsoft JhengHei" pitchFamily="34" charset="-122"/>
-                <a:cs typeface="Microsoft JhengHei" pitchFamily="34" charset="-120"/>
+                <a:latin typeface="Hiragino Sans" pitchFamily="34" charset="0"/>
+                <a:ea typeface="Hiragino Sans" pitchFamily="34" charset="-122"/>
+                <a:cs typeface="Hiragino Sans" pitchFamily="34" charset="-120"/>
               </a:rPr>
               <a:t>黑客松 中</a:t>
             </a:r>
@@ -23174,13 +23152,13 @@
               <a:buNone/>
             </a:pPr>
             <a:r>
-              <a:rPr lang="en-US" sz="1200" i="1" dirty="0">
+              <a:rPr lang="en-US" sz="1200" dirty="0">
                 <a:solidFill>
                   <a:srgbClr val="C7D6E4"/>
                 </a:solidFill>
-                <a:latin typeface="Microsoft JhengHei" pitchFamily="34" charset="0"/>
-                <a:ea typeface="Microsoft JhengHei" pitchFamily="34" charset="-122"/>
-                <a:cs typeface="Microsoft JhengHei" pitchFamily="34" charset="-120"/>
+                <a:latin typeface="Hiragino Sans" pitchFamily="34" charset="0"/>
+                <a:ea typeface="Hiragino Sans" pitchFamily="34" charset="-122"/>
+                <a:cs typeface="Hiragino Sans" pitchFamily="34" charset="-120"/>
               </a:rPr>
               <a:t>把單服務拆成 API Gateway + Lambda 後端、S3 托管前端與原始報表、DynamoDB 存 metrics 與門檻、EventBridge 排程重算。零常駐、按呼叫計費、天生資料驅動。</a:t>
             </a:r>
@@ -23217,9 +23195,9 @@
                 <a:solidFill>
                   <a:srgbClr val="2A9D8F"/>
                 </a:solidFill>
-                <a:latin typeface="Microsoft JhengHei" pitchFamily="34" charset="0"/>
-                <a:ea typeface="Microsoft JhengHei" pitchFamily="34" charset="-122"/>
-                <a:cs typeface="Microsoft JhengHei" pitchFamily="34" charset="-120"/>
+                <a:latin typeface="Hiragino Sans" pitchFamily="34" charset="0"/>
+                <a:ea typeface="Hiragino Sans" pitchFamily="34" charset="-122"/>
+                <a:cs typeface="Hiragino Sans" pitchFamily="34" charset="-120"/>
               </a:rPr>
               <a:t>服務組成</a:t>
             </a:r>
@@ -23317,9 +23295,9 @@
                 <a:solidFill>
                   <a:srgbClr val="FFFFFF"/>
                 </a:solidFill>
-                <a:latin typeface="Microsoft JhengHei" pitchFamily="34" charset="0"/>
-                <a:ea typeface="Microsoft JhengHei" pitchFamily="34" charset="-122"/>
-                <a:cs typeface="Microsoft JhengHei" pitchFamily="34" charset="-120"/>
+                <a:latin typeface="Hiragino Sans" pitchFamily="34" charset="0"/>
+                <a:ea typeface="Hiragino Sans" pitchFamily="34" charset="-122"/>
+                <a:cs typeface="Hiragino Sans" pitchFamily="34" charset="-120"/>
               </a:rPr>
               <a:t>API</a:t>
             </a:r>
@@ -23359,9 +23337,9 @@
                 <a:solidFill>
                   <a:srgbClr val="FFFFFF"/>
                 </a:solidFill>
-                <a:latin typeface="Microsoft JhengHei" pitchFamily="34" charset="0"/>
-                <a:ea typeface="Microsoft JhengHei" pitchFamily="34" charset="-122"/>
-                <a:cs typeface="Microsoft JhengHei" pitchFamily="34" charset="-120"/>
+                <a:latin typeface="Hiragino Sans" pitchFamily="34" charset="0"/>
+                <a:ea typeface="Hiragino Sans" pitchFamily="34" charset="-122"/>
+                <a:cs typeface="Hiragino Sans" pitchFamily="34" charset="-120"/>
               </a:rPr>
               <a:t>API</a:t>
             </a:r>
@@ -23379,9 +23357,9 @@
                 <a:solidFill>
                   <a:srgbClr val="FFFFFF"/>
                 </a:solidFill>
-                <a:latin typeface="Microsoft JhengHei" pitchFamily="34" charset="0"/>
-                <a:ea typeface="Microsoft JhengHei" pitchFamily="34" charset="-122"/>
-                <a:cs typeface="Microsoft JhengHei" pitchFamily="34" charset="-120"/>
+                <a:latin typeface="Hiragino Sans" pitchFamily="34" charset="0"/>
+                <a:ea typeface="Hiragino Sans" pitchFamily="34" charset="-122"/>
+                <a:cs typeface="Hiragino Sans" pitchFamily="34" charset="-120"/>
               </a:rPr>
               <a:t>Gateway</a:t>
             </a:r>
@@ -23421,9 +23399,9 @@
                 <a:solidFill>
                   <a:srgbClr val="C7D6E4"/>
                 </a:solidFill>
-                <a:latin typeface="Microsoft JhengHei" pitchFamily="34" charset="0"/>
-                <a:ea typeface="Microsoft JhengHei" pitchFamily="34" charset="-122"/>
-                <a:cs typeface="Microsoft JhengHei" pitchFamily="34" charset="-120"/>
+                <a:latin typeface="Hiragino Sans" pitchFamily="34" charset="0"/>
+                <a:ea typeface="Hiragino Sans" pitchFamily="34" charset="-122"/>
+                <a:cs typeface="Hiragino Sans" pitchFamily="34" charset="-120"/>
               </a:rPr>
               <a:t>HTTP API 入口</a:t>
             </a:r>
@@ -23545,9 +23523,9 @@
                 <a:solidFill>
                   <a:srgbClr val="FFFFFF"/>
                 </a:solidFill>
-                <a:latin typeface="Microsoft JhengHei" pitchFamily="34" charset="0"/>
-                <a:ea typeface="Microsoft JhengHei" pitchFamily="34" charset="-122"/>
-                <a:cs typeface="Microsoft JhengHei" pitchFamily="34" charset="-120"/>
+                <a:latin typeface="Hiragino Sans" pitchFamily="34" charset="0"/>
+                <a:ea typeface="Hiragino Sans" pitchFamily="34" charset="-122"/>
+                <a:cs typeface="Hiragino Sans" pitchFamily="34" charset="-120"/>
               </a:rPr>
               <a:t>λ</a:t>
             </a:r>
@@ -23587,9 +23565,9 @@
                 <a:solidFill>
                   <a:srgbClr val="FFFFFF"/>
                 </a:solidFill>
-                <a:latin typeface="Microsoft JhengHei" pitchFamily="34" charset="0"/>
-                <a:ea typeface="Microsoft JhengHei" pitchFamily="34" charset="-122"/>
-                <a:cs typeface="Microsoft JhengHei" pitchFamily="34" charset="-120"/>
+                <a:latin typeface="Hiragino Sans" pitchFamily="34" charset="0"/>
+                <a:ea typeface="Hiragino Sans" pitchFamily="34" charset="-122"/>
+                <a:cs typeface="Hiragino Sans" pitchFamily="34" charset="-120"/>
               </a:rPr>
               <a:t>Lambda</a:t>
             </a:r>
@@ -23607,9 +23585,9 @@
                 <a:solidFill>
                   <a:srgbClr val="FFFFFF"/>
                 </a:solidFill>
-                <a:latin typeface="Microsoft JhengHei" pitchFamily="34" charset="0"/>
-                <a:ea typeface="Microsoft JhengHei" pitchFamily="34" charset="-122"/>
-                <a:cs typeface="Microsoft JhengHei" pitchFamily="34" charset="-120"/>
+                <a:latin typeface="Hiragino Sans" pitchFamily="34" charset="0"/>
+                <a:ea typeface="Hiragino Sans" pitchFamily="34" charset="-122"/>
+                <a:cs typeface="Hiragino Sans" pitchFamily="34" charset="-120"/>
               </a:rPr>
               <a:t>Java 21</a:t>
             </a:r>
@@ -23649,9 +23627,9 @@
                 <a:solidFill>
                   <a:srgbClr val="C7D6E4"/>
                 </a:solidFill>
-                <a:latin typeface="Microsoft JhengHei" pitchFamily="34" charset="0"/>
-                <a:ea typeface="Microsoft JhengHei" pitchFamily="34" charset="-122"/>
-                <a:cs typeface="Microsoft JhengHei" pitchFamily="34" charset="-120"/>
+                <a:latin typeface="Hiragino Sans" pitchFamily="34" charset="0"/>
+                <a:ea typeface="Hiragino Sans" pitchFamily="34" charset="-122"/>
+                <a:cs typeface="Hiragino Sans" pitchFamily="34" charset="-120"/>
               </a:rPr>
               <a:t>無狀態運算</a:t>
             </a:r>
@@ -23773,9 +23751,9 @@
                 <a:solidFill>
                   <a:srgbClr val="FFFFFF"/>
                 </a:solidFill>
-                <a:latin typeface="Microsoft JhengHei" pitchFamily="34" charset="0"/>
-                <a:ea typeface="Microsoft JhengHei" pitchFamily="34" charset="-122"/>
-                <a:cs typeface="Microsoft JhengHei" pitchFamily="34" charset="-120"/>
+                <a:latin typeface="Hiragino Sans" pitchFamily="34" charset="0"/>
+                <a:ea typeface="Hiragino Sans" pitchFamily="34" charset="-122"/>
+                <a:cs typeface="Hiragino Sans" pitchFamily="34" charset="-120"/>
               </a:rPr>
               <a:t>S3</a:t>
             </a:r>
@@ -23815,9 +23793,9 @@
                 <a:solidFill>
                   <a:srgbClr val="FFFFFF"/>
                 </a:solidFill>
-                <a:latin typeface="Microsoft JhengHei" pitchFamily="34" charset="0"/>
-                <a:ea typeface="Microsoft JhengHei" pitchFamily="34" charset="-122"/>
-                <a:cs typeface="Microsoft JhengHei" pitchFamily="34" charset="-120"/>
+                <a:latin typeface="Hiragino Sans" pitchFamily="34" charset="0"/>
+                <a:ea typeface="Hiragino Sans" pitchFamily="34" charset="-122"/>
+                <a:cs typeface="Hiragino Sans" pitchFamily="34" charset="-120"/>
               </a:rPr>
               <a:t>S3</a:t>
             </a:r>
@@ -23857,9 +23835,9 @@
                 <a:solidFill>
                   <a:srgbClr val="C7D6E4"/>
                 </a:solidFill>
-                <a:latin typeface="Microsoft JhengHei" pitchFamily="34" charset="0"/>
-                <a:ea typeface="Microsoft JhengHei" pitchFamily="34" charset="-122"/>
-                <a:cs typeface="Microsoft JhengHei" pitchFamily="34" charset="-120"/>
+                <a:latin typeface="Hiragino Sans" pitchFamily="34" charset="0"/>
+                <a:ea typeface="Hiragino Sans" pitchFamily="34" charset="-122"/>
+                <a:cs typeface="Hiragino Sans" pitchFamily="34" charset="-120"/>
               </a:rPr>
               <a:t>靜態站 + raw 報表</a:t>
             </a:r>
@@ -23981,9 +23959,9 @@
                 <a:solidFill>
                   <a:srgbClr val="FFFFFF"/>
                 </a:solidFill>
-                <a:latin typeface="Microsoft JhengHei" pitchFamily="34" charset="0"/>
-                <a:ea typeface="Microsoft JhengHei" pitchFamily="34" charset="-122"/>
-                <a:cs typeface="Microsoft JhengHei" pitchFamily="34" charset="-120"/>
+                <a:latin typeface="Hiragino Sans" pitchFamily="34" charset="0"/>
+                <a:ea typeface="Hiragino Sans" pitchFamily="34" charset="-122"/>
+                <a:cs typeface="Hiragino Sans" pitchFamily="34" charset="-120"/>
               </a:rPr>
               <a:t>DB</a:t>
             </a:r>
@@ -24023,9 +24001,9 @@
                 <a:solidFill>
                   <a:srgbClr val="FFFFFF"/>
                 </a:solidFill>
-                <a:latin typeface="Microsoft JhengHei" pitchFamily="34" charset="0"/>
-                <a:ea typeface="Microsoft JhengHei" pitchFamily="34" charset="-122"/>
-                <a:cs typeface="Microsoft JhengHei" pitchFamily="34" charset="-120"/>
+                <a:latin typeface="Hiragino Sans" pitchFamily="34" charset="0"/>
+                <a:ea typeface="Hiragino Sans" pitchFamily="34" charset="-122"/>
+                <a:cs typeface="Hiragino Sans" pitchFamily="34" charset="-120"/>
               </a:rPr>
               <a:t>DynamoDB</a:t>
             </a:r>
@@ -24065,9 +24043,9 @@
                 <a:solidFill>
                   <a:srgbClr val="C7D6E4"/>
                 </a:solidFill>
-                <a:latin typeface="Microsoft JhengHei" pitchFamily="34" charset="0"/>
-                <a:ea typeface="Microsoft JhengHei" pitchFamily="34" charset="-122"/>
-                <a:cs typeface="Microsoft JhengHei" pitchFamily="34" charset="-120"/>
+                <a:latin typeface="Hiragino Sans" pitchFamily="34" charset="0"/>
+                <a:ea typeface="Hiragino Sans" pitchFamily="34" charset="-122"/>
+                <a:cs typeface="Hiragino Sans" pitchFamily="34" charset="-120"/>
               </a:rPr>
               <a:t>metrics / 門檻</a:t>
             </a:r>
@@ -24189,9 +24167,9 @@
                 <a:solidFill>
                   <a:srgbClr val="FFFFFF"/>
                 </a:solidFill>
-                <a:latin typeface="Microsoft JhengHei" pitchFamily="34" charset="0"/>
-                <a:ea typeface="Microsoft JhengHei" pitchFamily="34" charset="-122"/>
-                <a:cs typeface="Microsoft JhengHei" pitchFamily="34" charset="-120"/>
+                <a:latin typeface="Hiragino Sans" pitchFamily="34" charset="0"/>
+                <a:ea typeface="Hiragino Sans" pitchFamily="34" charset="-122"/>
+                <a:cs typeface="Hiragino Sans" pitchFamily="34" charset="-120"/>
               </a:rPr>
               <a:t>EVT</a:t>
             </a:r>
@@ -24231,9 +24209,9 @@
                 <a:solidFill>
                   <a:srgbClr val="FFFFFF"/>
                 </a:solidFill>
-                <a:latin typeface="Microsoft JhengHei" pitchFamily="34" charset="0"/>
-                <a:ea typeface="Microsoft JhengHei" pitchFamily="34" charset="-122"/>
-                <a:cs typeface="Microsoft JhengHei" pitchFamily="34" charset="-120"/>
+                <a:latin typeface="Hiragino Sans" pitchFamily="34" charset="0"/>
+                <a:ea typeface="Hiragino Sans" pitchFamily="34" charset="-122"/>
+                <a:cs typeface="Hiragino Sans" pitchFamily="34" charset="-120"/>
               </a:rPr>
               <a:t>EventBridge</a:t>
             </a:r>
@@ -24273,9 +24251,9 @@
                 <a:solidFill>
                   <a:srgbClr val="C7D6E4"/>
                 </a:solidFill>
-                <a:latin typeface="Microsoft JhengHei" pitchFamily="34" charset="0"/>
-                <a:ea typeface="Microsoft JhengHei" pitchFamily="34" charset="-122"/>
-                <a:cs typeface="Microsoft JhengHei" pitchFamily="34" charset="-120"/>
+                <a:latin typeface="Hiragino Sans" pitchFamily="34" charset="0"/>
+                <a:ea typeface="Hiragino Sans" pitchFamily="34" charset="-122"/>
+                <a:cs typeface="Hiragino Sans" pitchFamily="34" charset="-120"/>
               </a:rPr>
               <a:t>排程重算</a:t>
             </a:r>
@@ -24397,9 +24375,9 @@
                 <a:solidFill>
                   <a:srgbClr val="FFFFFF"/>
                 </a:solidFill>
-                <a:latin typeface="Microsoft JhengHei" pitchFamily="34" charset="0"/>
-                <a:ea typeface="Microsoft JhengHei" pitchFamily="34" charset="-122"/>
-                <a:cs typeface="Microsoft JhengHei" pitchFamily="34" charset="-120"/>
+                <a:latin typeface="Hiragino Sans" pitchFamily="34" charset="0"/>
+                <a:ea typeface="Hiragino Sans" pitchFamily="34" charset="-122"/>
+                <a:cs typeface="Hiragino Sans" pitchFamily="34" charset="-120"/>
               </a:rPr>
               <a:t>AI</a:t>
             </a:r>
@@ -24439,9 +24417,9 @@
                 <a:solidFill>
                   <a:srgbClr val="FFFFFF"/>
                 </a:solidFill>
-                <a:latin typeface="Microsoft JhengHei" pitchFamily="34" charset="0"/>
-                <a:ea typeface="Microsoft JhengHei" pitchFamily="34" charset="-122"/>
-                <a:cs typeface="Microsoft JhengHei" pitchFamily="34" charset="-120"/>
+                <a:latin typeface="Hiragino Sans" pitchFamily="34" charset="0"/>
+                <a:ea typeface="Hiragino Sans" pitchFamily="34" charset="-122"/>
+                <a:cs typeface="Hiragino Sans" pitchFamily="34" charset="-120"/>
               </a:rPr>
               <a:t>Bedrock</a:t>
             </a:r>
@@ -24481,9 +24459,9 @@
                 <a:solidFill>
                   <a:srgbClr val="C7D6E4"/>
                 </a:solidFill>
-                <a:latin typeface="Microsoft JhengHei" pitchFamily="34" charset="0"/>
-                <a:ea typeface="Microsoft JhengHei" pitchFamily="34" charset="-122"/>
-                <a:cs typeface="Microsoft JhengHei" pitchFamily="34" charset="-120"/>
+                <a:latin typeface="Hiragino Sans" pitchFamily="34" charset="0"/>
+                <a:ea typeface="Hiragino Sans" pitchFamily="34" charset="-122"/>
+                <a:cs typeface="Hiragino Sans" pitchFamily="34" charset="-120"/>
               </a:rPr>
               <a:t>AI 簡報</a:t>
             </a:r>
@@ -24605,9 +24583,9 @@
                 <a:solidFill>
                   <a:srgbClr val="FFFFFF"/>
                 </a:solidFill>
-                <a:latin typeface="Microsoft JhengHei" pitchFamily="34" charset="0"/>
-                <a:ea typeface="Microsoft JhengHei" pitchFamily="34" charset="-122"/>
-                <a:cs typeface="Microsoft JhengHei" pitchFamily="34" charset="-120"/>
+                <a:latin typeface="Hiragino Sans" pitchFamily="34" charset="0"/>
+                <a:ea typeface="Hiragino Sans" pitchFamily="34" charset="-122"/>
+                <a:cs typeface="Hiragino Sans" pitchFamily="34" charset="-120"/>
               </a:rPr>
               <a:t>SES</a:t>
             </a:r>
@@ -24647,9 +24625,9 @@
                 <a:solidFill>
                   <a:srgbClr val="FFFFFF"/>
                 </a:solidFill>
-                <a:latin typeface="Microsoft JhengHei" pitchFamily="34" charset="0"/>
-                <a:ea typeface="Microsoft JhengHei" pitchFamily="34" charset="-122"/>
-                <a:cs typeface="Microsoft JhengHei" pitchFamily="34" charset="-120"/>
+                <a:latin typeface="Hiragino Sans" pitchFamily="34" charset="0"/>
+                <a:ea typeface="Hiragino Sans" pitchFamily="34" charset="-122"/>
+                <a:cs typeface="Hiragino Sans" pitchFamily="34" charset="-120"/>
               </a:rPr>
               <a:t>SES / SNS</a:t>
             </a:r>
@@ -24689,9 +24667,9 @@
                 <a:solidFill>
                   <a:srgbClr val="C7D6E4"/>
                 </a:solidFill>
-                <a:latin typeface="Microsoft JhengHei" pitchFamily="34" charset="0"/>
-                <a:ea typeface="Microsoft JhengHei" pitchFamily="34" charset="-122"/>
-                <a:cs typeface="Microsoft JhengHei" pitchFamily="34" charset="-120"/>
+                <a:latin typeface="Hiragino Sans" pitchFamily="34" charset="0"/>
+                <a:ea typeface="Hiragino Sans" pitchFamily="34" charset="-122"/>
+                <a:cs typeface="Hiragino Sans" pitchFamily="34" charset="-120"/>
               </a:rPr>
               <a:t>Email 告警</a:t>
             </a:r>
@@ -24806,9 +24784,9 @@
                 <a:solidFill>
                   <a:srgbClr val="FFFFFF"/>
                 </a:solidFill>
-                <a:latin typeface="Microsoft JhengHei" pitchFamily="34" charset="0"/>
-                <a:ea typeface="Microsoft JhengHei" pitchFamily="34" charset="-122"/>
-                <a:cs typeface="Microsoft JhengHei" pitchFamily="34" charset="-120"/>
+                <a:latin typeface="Hiragino Sans" pitchFamily="34" charset="0"/>
+                <a:ea typeface="Hiragino Sans" pitchFamily="34" charset="-122"/>
+                <a:cs typeface="Hiragino Sans" pitchFamily="34" charset="-120"/>
               </a:rPr>
               <a:t>● 優勢</a:t>
             </a:r>
@@ -24852,9 +24830,9 @@
                 <a:solidFill>
                   <a:srgbClr val="C7D6E4"/>
                 </a:solidFill>
-                <a:latin typeface="Microsoft JhengHei" pitchFamily="34" charset="0"/>
-                <a:ea typeface="Microsoft JhengHei" pitchFamily="34" charset="-122"/>
-                <a:cs typeface="Microsoft JhengHei" pitchFamily="34" charset="-120"/>
+                <a:latin typeface="Hiragino Sans" pitchFamily="34" charset="0"/>
+                <a:ea typeface="Hiragino Sans" pitchFamily="34" charset="-122"/>
+                <a:cs typeface="Hiragino Sans" pitchFamily="34" charset="-120"/>
               </a:rPr>
               <a:t>天生資料驅動：新報表進 S3 自動重算，命中 15→97 艘敘事</a:t>
             </a:r>
@@ -24876,9 +24854,9 @@
                 <a:solidFill>
                   <a:srgbClr val="C7D6E4"/>
                 </a:solidFill>
-                <a:latin typeface="Microsoft JhengHei" pitchFamily="34" charset="0"/>
-                <a:ea typeface="Microsoft JhengHei" pitchFamily="34" charset="-122"/>
-                <a:cs typeface="Microsoft JhengHei" pitchFamily="34" charset="-120"/>
+                <a:latin typeface="Hiragino Sans" pitchFamily="34" charset="0"/>
+                <a:ea typeface="Hiragino Sans" pitchFamily="34" charset="-122"/>
+                <a:cs typeface="Hiragino Sans" pitchFamily="34" charset="-120"/>
               </a:rPr>
               <a:t>按呼叫計費、零閒置成本、自動擴縮</a:t>
             </a:r>
@@ -24900,9 +24878,9 @@
                 <a:solidFill>
                   <a:srgbClr val="C7D6E4"/>
                 </a:solidFill>
-                <a:latin typeface="Microsoft JhengHei" pitchFamily="34" charset="0"/>
-                <a:ea typeface="Microsoft JhengHei" pitchFamily="34" charset="-122"/>
-                <a:cs typeface="Microsoft JhengHei" pitchFamily="34" charset="-120"/>
+                <a:latin typeface="Hiragino Sans" pitchFamily="34" charset="0"/>
+                <a:ea typeface="Hiragino Sans" pitchFamily="34" charset="-122"/>
+                <a:cs typeface="Hiragino Sans" pitchFamily="34" charset="-120"/>
               </a:rPr>
               <a:t>EventBridge 排程 + SES Email 直接命中告警需求</a:t>
             </a:r>
@@ -24924,9 +24902,9 @@
                 <a:solidFill>
                   <a:srgbClr val="C7D6E4"/>
                 </a:solidFill>
-                <a:latin typeface="Microsoft JhengHei" pitchFamily="34" charset="0"/>
-                <a:ea typeface="Microsoft JhengHei" pitchFamily="34" charset="-122"/>
-                <a:cs typeface="Microsoft JhengHei" pitchFamily="34" charset="-120"/>
+                <a:latin typeface="Hiragino Sans" pitchFamily="34" charset="0"/>
+                <a:ea typeface="Hiragino Sans" pitchFamily="34" charset="-122"/>
+                <a:cs typeface="Hiragino Sans" pitchFamily="34" charset="-120"/>
               </a:rPr>
               <a:t>各 handler 解耦，單點改動不動全局</a:t>
             </a:r>
@@ -25041,9 +25019,9 @@
                 <a:solidFill>
                   <a:srgbClr val="FFFFFF"/>
                 </a:solidFill>
-                <a:latin typeface="Microsoft JhengHei" pitchFamily="34" charset="0"/>
-                <a:ea typeface="Microsoft JhengHei" pitchFamily="34" charset="-122"/>
-                <a:cs typeface="Microsoft JhengHei" pitchFamily="34" charset="-120"/>
+                <a:latin typeface="Hiragino Sans" pitchFamily="34" charset="0"/>
+                <a:ea typeface="Hiragino Sans" pitchFamily="34" charset="-122"/>
+                <a:cs typeface="Hiragino Sans" pitchFamily="34" charset="-120"/>
               </a:rPr>
               <a:t>▲ 取捨 / 風險</a:t>
             </a:r>
@@ -25087,9 +25065,9 @@
                 <a:solidFill>
                   <a:srgbClr val="C7D6E4"/>
                 </a:solidFill>
-                <a:latin typeface="Microsoft JhengHei" pitchFamily="34" charset="0"/>
-                <a:ea typeface="Microsoft JhengHei" pitchFamily="34" charset="-122"/>
-                <a:cs typeface="Microsoft JhengHei" pitchFamily="34" charset="-120"/>
+                <a:latin typeface="Hiragino Sans" pitchFamily="34" charset="0"/>
+                <a:ea typeface="Hiragino Sans" pitchFamily="34" charset="-122"/>
+                <a:cs typeface="Hiragino Sans" pitchFamily="34" charset="-120"/>
               </a:rPr>
               <a:t>monolith 拆多 Lambda + IaC，3 天工作量與整合風險大增</a:t>
             </a:r>
@@ -25111,9 +25089,9 @@
                 <a:solidFill>
                   <a:srgbClr val="C7D6E4"/>
                 </a:solidFill>
-                <a:latin typeface="Microsoft JhengHei" pitchFamily="34" charset="0"/>
-                <a:ea typeface="Microsoft JhengHei" pitchFamily="34" charset="-122"/>
-                <a:cs typeface="Microsoft JhengHei" pitchFamily="34" charset="-120"/>
+                <a:latin typeface="Hiragino Sans" pitchFamily="34" charset="0"/>
+                <a:ea typeface="Hiragino Sans" pitchFamily="34" charset="-122"/>
+                <a:cs typeface="Hiragino Sans" pitchFamily="34" charset="-120"/>
               </a:rPr>
               <a:t>Java Lambda 冷啟延遲可能拖慢 demo 首打</a:t>
             </a:r>
@@ -25135,9 +25113,9 @@
                 <a:solidFill>
                   <a:srgbClr val="C7D6E4"/>
                 </a:solidFill>
-                <a:latin typeface="Microsoft JhengHei" pitchFamily="34" charset="0"/>
-                <a:ea typeface="Microsoft JhengHei" pitchFamily="34" charset="-122"/>
-                <a:cs typeface="Microsoft JhengHei" pitchFamily="34" charset="-120"/>
+                <a:latin typeface="Hiragino Sans" pitchFamily="34" charset="0"/>
+                <a:ea typeface="Hiragino Sans" pitchFamily="34" charset="-122"/>
+                <a:cs typeface="Hiragino Sans" pitchFamily="34" charset="-120"/>
               </a:rPr>
               <a:t>本機難完整重現 APIGW+Lambda+DynamoDB，除錯較難</a:t>
             </a:r>
@@ -25159,9 +25137,9 @@
                 <a:solidFill>
                   <a:srgbClr val="C7D6E4"/>
                 </a:solidFill>
-                <a:latin typeface="Microsoft JhengHei" pitchFamily="34" charset="0"/>
-                <a:ea typeface="Microsoft JhengHei" pitchFamily="34" charset="-122"/>
-                <a:cs typeface="Microsoft JhengHei" pitchFamily="34" charset="-120"/>
+                <a:latin typeface="Hiragino Sans" pitchFamily="34" charset="0"/>
+                <a:ea typeface="Hiragino Sans" pitchFamily="34" charset="-122"/>
+                <a:cs typeface="Hiragino Sans" pitchFamily="34" charset="-120"/>
               </a:rPr>
               <a:t>元件變多，臨時憑證下佈署面更廣、易出錯</a:t>
             </a:r>
@@ -25230,9 +25208,9 @@
                 <a:solidFill>
                   <a:srgbClr val="F4A72B"/>
                 </a:solidFill>
-                <a:latin typeface="Microsoft JhengHei" pitchFamily="34" charset="0"/>
-                <a:ea typeface="Microsoft JhengHei" pitchFamily="34" charset="-122"/>
-                <a:cs typeface="Microsoft JhengHei" pitchFamily="34" charset="-120"/>
+                <a:latin typeface="Hiragino Sans" pitchFamily="34" charset="0"/>
+                <a:ea typeface="Hiragino Sans" pitchFamily="34" charset="-122"/>
+                <a:cs typeface="Hiragino Sans" pitchFamily="34" charset="-120"/>
               </a:rPr>
               <a:t>◆ 何時選　</a:t>
             </a:r>
@@ -25247,9 +25225,9 @@
                 <a:solidFill>
                   <a:srgbClr val="FFFFFF"/>
                 </a:solidFill>
-                <a:latin typeface="Microsoft JhengHei" pitchFamily="34" charset="0"/>
-                <a:ea typeface="Microsoft JhengHei" pitchFamily="34" charset="-122"/>
-                <a:cs typeface="Microsoft JhengHei" pitchFamily="34" charset="-120"/>
+                <a:latin typeface="Hiragino Sans" pitchFamily="34" charset="0"/>
+                <a:ea typeface="Hiragino Sans" pitchFamily="34" charset="-122"/>
+                <a:cs typeface="Hiragino Sans" pitchFamily="34" charset="-120"/>
               </a:rPr>
               <a:t>要強調資料驅動、自動擴縮與『15→97 艘同架構』，且團隊有把握在時限內完成拆分與整合時。</a:t>
             </a:r>
@@ -25471,9 +25449,9 @@
                 <a:solidFill>
                   <a:srgbClr val="FFFFFF"/>
                 </a:solidFill>
-                <a:latin typeface="Microsoft JhengHei" pitchFamily="34" charset="0"/>
-                <a:ea typeface="Microsoft JhengHei" pitchFamily="34" charset="-122"/>
-                <a:cs typeface="Microsoft JhengHei" pitchFamily="34" charset="-120"/>
+                <a:latin typeface="Hiragino Sans" pitchFamily="34" charset="0"/>
+                <a:ea typeface="Hiragino Sans" pitchFamily="34" charset="-122"/>
+                <a:cs typeface="Hiragino Sans" pitchFamily="34" charset="-120"/>
               </a:rPr>
               <a:t>06</a:t>
             </a:r>
@@ -25485,9 +25463,9 @@
                 <a:solidFill>
                   <a:srgbClr val="8FA8BD"/>
                 </a:solidFill>
-                <a:latin typeface="Microsoft JhengHei" pitchFamily="34" charset="0"/>
-                <a:ea typeface="Microsoft JhengHei" pitchFamily="34" charset="-122"/>
-                <a:cs typeface="Microsoft JhengHei" pitchFamily="34" charset="-120"/>
+                <a:latin typeface="Hiragino Sans" pitchFamily="34" charset="0"/>
+                <a:ea typeface="Hiragino Sans" pitchFamily="34" charset="-122"/>
+                <a:cs typeface="Hiragino Sans" pitchFamily="34" charset="-120"/>
               </a:rPr>
               <a:t>  /  15</a:t>
             </a:r>
@@ -25524,9 +25502,9 @@
                 <a:solidFill>
                   <a:srgbClr val="F4A72B"/>
                 </a:solidFill>
-                <a:latin typeface="Microsoft JhengHei" pitchFamily="34" charset="0"/>
-                <a:ea typeface="Microsoft JhengHei" pitchFamily="34" charset="-122"/>
-                <a:cs typeface="Microsoft JhengHei" pitchFamily="34" charset="-120"/>
+                <a:latin typeface="Hiragino Sans" pitchFamily="34" charset="0"/>
+                <a:ea typeface="Hiragino Sans" pitchFamily="34" charset="-122"/>
+                <a:cs typeface="Hiragino Sans" pitchFamily="34" charset="-120"/>
               </a:rPr>
               <a:t>方案 C · APP RUNNER</a:t>
             </a:r>
@@ -25563,9 +25541,9 @@
                 <a:solidFill>
                   <a:srgbClr val="FFFFFF"/>
                 </a:solidFill>
-                <a:latin typeface="Microsoft JhengHei" pitchFamily="34" charset="0"/>
-                <a:ea typeface="Microsoft JhengHei" pitchFamily="34" charset="-122"/>
-                <a:cs typeface="Microsoft JhengHei" pitchFamily="34" charset="-120"/>
+                <a:latin typeface="Hiragino Sans" pitchFamily="34" charset="0"/>
+                <a:ea typeface="Hiragino Sans" pitchFamily="34" charset="-122"/>
+                <a:cs typeface="Hiragino Sans" pitchFamily="34" charset="-120"/>
               </a:rPr>
               <a:t>全託管容器，零 infra（本次受帳號權限阻擋）</a:t>
             </a:r>
@@ -25624,9 +25602,9 @@
                 <a:solidFill>
                   <a:srgbClr val="FFFFFF"/>
                 </a:solidFill>
-                <a:latin typeface="Microsoft JhengHei" pitchFamily="34" charset="0"/>
-                <a:ea typeface="Microsoft JhengHei" pitchFamily="34" charset="-122"/>
-                <a:cs typeface="Microsoft JhengHei" pitchFamily="34" charset="-120"/>
+                <a:latin typeface="Hiragino Sans" pitchFamily="34" charset="0"/>
+                <a:ea typeface="Hiragino Sans" pitchFamily="34" charset="-122"/>
+                <a:cs typeface="Hiragino Sans" pitchFamily="34" charset="-120"/>
               </a:rPr>
               <a:t>成本 低-中</a:t>
             </a:r>
@@ -25685,9 +25663,9 @@
                 <a:solidFill>
                   <a:srgbClr val="18293B"/>
                 </a:solidFill>
-                <a:latin typeface="Microsoft JhengHei" pitchFamily="34" charset="0"/>
-                <a:ea typeface="Microsoft JhengHei" pitchFamily="34" charset="-122"/>
-                <a:cs typeface="Microsoft JhengHei" pitchFamily="34" charset="-120"/>
+                <a:latin typeface="Hiragino Sans" pitchFamily="34" charset="0"/>
+                <a:ea typeface="Hiragino Sans" pitchFamily="34" charset="-122"/>
+                <a:cs typeface="Hiragino Sans" pitchFamily="34" charset="-120"/>
               </a:rPr>
               <a:t>黑客松 低 · 受阻</a:t>
             </a:r>
@@ -25747,13 +25725,13 @@
               <a:buNone/>
             </a:pPr>
             <a:r>
-              <a:rPr lang="en-US" sz="1200" i="1" dirty="0">
+              <a:rPr lang="en-US" sz="1200" dirty="0">
                 <a:solidFill>
                   <a:srgbClr val="C7D6E4"/>
                 </a:solidFill>
-                <a:latin typeface="Microsoft JhengHei" pitchFamily="34" charset="0"/>
-                <a:ea typeface="Microsoft JhengHei" pitchFamily="34" charset="-122"/>
-                <a:cs typeface="Microsoft JhengHei" pitchFamily="34" charset="-120"/>
+                <a:latin typeface="Hiragino Sans" pitchFamily="34" charset="0"/>
+                <a:ea typeface="Hiragino Sans" pitchFamily="34" charset="-122"/>
+                <a:cs typeface="Hiragino Sans" pitchFamily="34" charset="-120"/>
               </a:rPr>
               <a:t>同一顆 Spring Boot 映像改由 App Runner 從 ECR 拉起，AWS 全託管 HTTPS / 負載平衡 / 自動擴縮，免自建 ALB/VPC/SG。惟本 workshop 帳號 App Runner 實測 AccessDenied，只能列對照。</a:t>
             </a:r>
@@ -25790,9 +25768,9 @@
                 <a:solidFill>
                   <a:srgbClr val="2A9D8F"/>
                 </a:solidFill>
-                <a:latin typeface="Microsoft JhengHei" pitchFamily="34" charset="0"/>
-                <a:ea typeface="Microsoft JhengHei" pitchFamily="34" charset="-122"/>
-                <a:cs typeface="Microsoft JhengHei" pitchFamily="34" charset="-120"/>
+                <a:latin typeface="Hiragino Sans" pitchFamily="34" charset="0"/>
+                <a:ea typeface="Hiragino Sans" pitchFamily="34" charset="-122"/>
+                <a:cs typeface="Hiragino Sans" pitchFamily="34" charset="-120"/>
               </a:rPr>
               <a:t>服務組成</a:t>
             </a:r>
@@ -25890,9 +25868,9 @@
                 <a:solidFill>
                   <a:srgbClr val="FFFFFF"/>
                 </a:solidFill>
-                <a:latin typeface="Microsoft JhengHei" pitchFamily="34" charset="0"/>
-                <a:ea typeface="Microsoft JhengHei" pitchFamily="34" charset="-122"/>
-                <a:cs typeface="Microsoft JhengHei" pitchFamily="34" charset="-120"/>
+                <a:latin typeface="Hiragino Sans" pitchFamily="34" charset="0"/>
+                <a:ea typeface="Hiragino Sans" pitchFamily="34" charset="-122"/>
+                <a:cs typeface="Hiragino Sans" pitchFamily="34" charset="-120"/>
               </a:rPr>
               <a:t>AR</a:t>
             </a:r>
@@ -25932,9 +25910,9 @@
                 <a:solidFill>
                   <a:srgbClr val="FFFFFF"/>
                 </a:solidFill>
-                <a:latin typeface="Microsoft JhengHei" pitchFamily="34" charset="0"/>
-                <a:ea typeface="Microsoft JhengHei" pitchFamily="34" charset="-122"/>
-                <a:cs typeface="Microsoft JhengHei" pitchFamily="34" charset="-120"/>
+                <a:latin typeface="Hiragino Sans" pitchFamily="34" charset="0"/>
+                <a:ea typeface="Hiragino Sans" pitchFamily="34" charset="-122"/>
+                <a:cs typeface="Hiragino Sans" pitchFamily="34" charset="-120"/>
               </a:rPr>
               <a:t>App Runner</a:t>
             </a:r>
@@ -25974,9 +25952,9 @@
                 <a:solidFill>
                   <a:srgbClr val="C7D6E4"/>
                 </a:solidFill>
-                <a:latin typeface="Microsoft JhengHei" pitchFamily="34" charset="0"/>
-                <a:ea typeface="Microsoft JhengHei" pitchFamily="34" charset="-122"/>
-                <a:cs typeface="Microsoft JhengHei" pitchFamily="34" charset="-120"/>
+                <a:latin typeface="Hiragino Sans" pitchFamily="34" charset="0"/>
+                <a:ea typeface="Hiragino Sans" pitchFamily="34" charset="-122"/>
+                <a:cs typeface="Hiragino Sans" pitchFamily="34" charset="-120"/>
               </a:rPr>
               <a:t>全託管 · HTTPS</a:t>
             </a:r>
@@ -26098,9 +26076,9 @@
                 <a:solidFill>
                   <a:srgbClr val="FFFFFF"/>
                 </a:solidFill>
-                <a:latin typeface="Microsoft JhengHei" pitchFamily="34" charset="0"/>
-                <a:ea typeface="Microsoft JhengHei" pitchFamily="34" charset="-122"/>
-                <a:cs typeface="Microsoft JhengHei" pitchFamily="34" charset="-120"/>
+                <a:latin typeface="Hiragino Sans" pitchFamily="34" charset="0"/>
+                <a:ea typeface="Hiragino Sans" pitchFamily="34" charset="-122"/>
+                <a:cs typeface="Hiragino Sans" pitchFamily="34" charset="-120"/>
               </a:rPr>
               <a:t>ECR</a:t>
             </a:r>
@@ -26140,9 +26118,9 @@
                 <a:solidFill>
                   <a:srgbClr val="FFFFFF"/>
                 </a:solidFill>
-                <a:latin typeface="Microsoft JhengHei" pitchFamily="34" charset="0"/>
-                <a:ea typeface="Microsoft JhengHei" pitchFamily="34" charset="-122"/>
-                <a:cs typeface="Microsoft JhengHei" pitchFamily="34" charset="-120"/>
+                <a:latin typeface="Hiragino Sans" pitchFamily="34" charset="0"/>
+                <a:ea typeface="Hiragino Sans" pitchFamily="34" charset="-122"/>
+                <a:cs typeface="Hiragino Sans" pitchFamily="34" charset="-120"/>
               </a:rPr>
               <a:t>ECR</a:t>
             </a:r>
@@ -26182,9 +26160,9 @@
                 <a:solidFill>
                   <a:srgbClr val="C7D6E4"/>
                 </a:solidFill>
-                <a:latin typeface="Microsoft JhengHei" pitchFamily="34" charset="0"/>
-                <a:ea typeface="Microsoft JhengHei" pitchFamily="34" charset="-122"/>
-                <a:cs typeface="Microsoft JhengHei" pitchFamily="34" charset="-120"/>
+                <a:latin typeface="Hiragino Sans" pitchFamily="34" charset="0"/>
+                <a:ea typeface="Hiragino Sans" pitchFamily="34" charset="-122"/>
+                <a:cs typeface="Hiragino Sans" pitchFamily="34" charset="-120"/>
               </a:rPr>
               <a:t>同一顆 arm64 映像</a:t>
             </a:r>
@@ -26306,9 +26284,9 @@
                 <a:solidFill>
                   <a:srgbClr val="FFFFFF"/>
                 </a:solidFill>
-                <a:latin typeface="Microsoft JhengHei" pitchFamily="34" charset="0"/>
-                <a:ea typeface="Microsoft JhengHei" pitchFamily="34" charset="-122"/>
-                <a:cs typeface="Microsoft JhengHei" pitchFamily="34" charset="-120"/>
+                <a:latin typeface="Hiragino Sans" pitchFamily="34" charset="0"/>
+                <a:ea typeface="Hiragino Sans" pitchFamily="34" charset="-122"/>
+                <a:cs typeface="Hiragino Sans" pitchFamily="34" charset="-120"/>
               </a:rPr>
               <a:t>AI</a:t>
             </a:r>
@@ -26348,9 +26326,9 @@
                 <a:solidFill>
                   <a:srgbClr val="FFFFFF"/>
                 </a:solidFill>
-                <a:latin typeface="Microsoft JhengHei" pitchFamily="34" charset="0"/>
-                <a:ea typeface="Microsoft JhengHei" pitchFamily="34" charset="-122"/>
-                <a:cs typeface="Microsoft JhengHei" pitchFamily="34" charset="-120"/>
+                <a:latin typeface="Hiragino Sans" pitchFamily="34" charset="0"/>
+                <a:ea typeface="Hiragino Sans" pitchFamily="34" charset="-122"/>
+                <a:cs typeface="Hiragino Sans" pitchFamily="34" charset="-120"/>
               </a:rPr>
               <a:t>Bedrock</a:t>
             </a:r>
@@ -26390,9 +26368,9 @@
                 <a:solidFill>
                   <a:srgbClr val="C7D6E4"/>
                 </a:solidFill>
-                <a:latin typeface="Microsoft JhengHei" pitchFamily="34" charset="0"/>
-                <a:ea typeface="Microsoft JhengHei" pitchFamily="34" charset="-122"/>
-                <a:cs typeface="Microsoft JhengHei" pitchFamily="34" charset="-120"/>
+                <a:latin typeface="Hiragino Sans" pitchFamily="34" charset="0"/>
+                <a:ea typeface="Hiragino Sans" pitchFamily="34" charset="-122"/>
+                <a:cs typeface="Hiragino Sans" pitchFamily="34" charset="-120"/>
               </a:rPr>
               <a:t>AI 簡報</a:t>
             </a:r>
@@ -26514,9 +26492,9 @@
                 <a:solidFill>
                   <a:srgbClr val="FFFFFF"/>
                 </a:solidFill>
-                <a:latin typeface="Microsoft JhengHei" pitchFamily="34" charset="0"/>
-                <a:ea typeface="Microsoft JhengHei" pitchFamily="34" charset="-122"/>
-                <a:cs typeface="Microsoft JhengHei" pitchFamily="34" charset="-120"/>
+                <a:latin typeface="Hiragino Sans" pitchFamily="34" charset="0"/>
+                <a:ea typeface="Hiragino Sans" pitchFamily="34" charset="-122"/>
+                <a:cs typeface="Hiragino Sans" pitchFamily="34" charset="-120"/>
               </a:rPr>
               <a:t>SNS</a:t>
             </a:r>
@@ -26556,9 +26534,9 @@
                 <a:solidFill>
                   <a:srgbClr val="FFFFFF"/>
                 </a:solidFill>
-                <a:latin typeface="Microsoft JhengHei" pitchFamily="34" charset="0"/>
-                <a:ea typeface="Microsoft JhengHei" pitchFamily="34" charset="-122"/>
-                <a:cs typeface="Microsoft JhengHei" pitchFamily="34" charset="-120"/>
+                <a:latin typeface="Hiragino Sans" pitchFamily="34" charset="0"/>
+                <a:ea typeface="Hiragino Sans" pitchFamily="34" charset="-122"/>
+                <a:cs typeface="Hiragino Sans" pitchFamily="34" charset="-120"/>
               </a:rPr>
               <a:t>SNS</a:t>
             </a:r>
@@ -26598,9 +26576,9 @@
                 <a:solidFill>
                   <a:srgbClr val="C7D6E4"/>
                 </a:solidFill>
-                <a:latin typeface="Microsoft JhengHei" pitchFamily="34" charset="0"/>
-                <a:ea typeface="Microsoft JhengHei" pitchFamily="34" charset="-122"/>
-                <a:cs typeface="Microsoft JhengHei" pitchFamily="34" charset="-120"/>
+                <a:latin typeface="Hiragino Sans" pitchFamily="34" charset="0"/>
+                <a:ea typeface="Hiragino Sans" pitchFamily="34" charset="-122"/>
+                <a:cs typeface="Hiragino Sans" pitchFamily="34" charset="-120"/>
               </a:rPr>
               <a:t>告警</a:t>
             </a:r>
@@ -26722,9 +26700,9 @@
                 <a:solidFill>
                   <a:srgbClr val="FFFFFF"/>
                 </a:solidFill>
-                <a:latin typeface="Microsoft JhengHei" pitchFamily="34" charset="0"/>
-                <a:ea typeface="Microsoft JhengHei" pitchFamily="34" charset="-122"/>
-                <a:cs typeface="Microsoft JhengHei" pitchFamily="34" charset="-120"/>
+                <a:latin typeface="Hiragino Sans" pitchFamily="34" charset="0"/>
+                <a:ea typeface="Hiragino Sans" pitchFamily="34" charset="-122"/>
+                <a:cs typeface="Hiragino Sans" pitchFamily="34" charset="-120"/>
               </a:rPr>
               <a:t>IAM</a:t>
             </a:r>
@@ -26764,9 +26742,9 @@
                 <a:solidFill>
                   <a:srgbClr val="FFFFFF"/>
                 </a:solidFill>
-                <a:latin typeface="Microsoft JhengHei" pitchFamily="34" charset="0"/>
-                <a:ea typeface="Microsoft JhengHei" pitchFamily="34" charset="-122"/>
-                <a:cs typeface="Microsoft JhengHei" pitchFamily="34" charset="-120"/>
+                <a:latin typeface="Hiragino Sans" pitchFamily="34" charset="0"/>
+                <a:ea typeface="Hiragino Sans" pitchFamily="34" charset="-122"/>
+                <a:cs typeface="Hiragino Sans" pitchFamily="34" charset="-120"/>
               </a:rPr>
               <a:t>IAM</a:t>
             </a:r>
@@ -26806,9 +26784,9 @@
                 <a:solidFill>
                   <a:srgbClr val="C7D6E4"/>
                 </a:solidFill>
-                <a:latin typeface="Microsoft JhengHei" pitchFamily="34" charset="0"/>
-                <a:ea typeface="Microsoft JhengHei" pitchFamily="34" charset="-122"/>
-                <a:cs typeface="Microsoft JhengHei" pitchFamily="34" charset="-120"/>
+                <a:latin typeface="Hiragino Sans" pitchFamily="34" charset="0"/>
+                <a:ea typeface="Hiragino Sans" pitchFamily="34" charset="-122"/>
+                <a:cs typeface="Hiragino Sans" pitchFamily="34" charset="-120"/>
               </a:rPr>
               <a:t>access / instance role</a:t>
             </a:r>
@@ -26923,9 +26901,9 @@
                 <a:solidFill>
                   <a:srgbClr val="FFFFFF"/>
                 </a:solidFill>
-                <a:latin typeface="Microsoft JhengHei" pitchFamily="34" charset="0"/>
-                <a:ea typeface="Microsoft JhengHei" pitchFamily="34" charset="-122"/>
-                <a:cs typeface="Microsoft JhengHei" pitchFamily="34" charset="-120"/>
+                <a:latin typeface="Hiragino Sans" pitchFamily="34" charset="0"/>
+                <a:ea typeface="Hiragino Sans" pitchFamily="34" charset="-122"/>
+                <a:cs typeface="Hiragino Sans" pitchFamily="34" charset="-120"/>
               </a:rPr>
               <a:t>● 優勢</a:t>
             </a:r>
@@ -26969,9 +26947,9 @@
                 <a:solidFill>
                   <a:srgbClr val="C7D6E4"/>
                 </a:solidFill>
-                <a:latin typeface="Microsoft JhengHei" pitchFamily="34" charset="0"/>
-                <a:ea typeface="Microsoft JhengHei" pitchFamily="34" charset="-122"/>
-                <a:cs typeface="Microsoft JhengHei" pitchFamily="34" charset="-120"/>
+                <a:latin typeface="Hiragino Sans" pitchFamily="34" charset="0"/>
+                <a:ea typeface="Hiragino Sans" pitchFamily="34" charset="-122"/>
+                <a:cs typeface="Hiragino Sans" pitchFamily="34" charset="-120"/>
               </a:rPr>
               <a:t>管理面最少：免 ALB/VPC/SG/target group，設定步驟最短</a:t>
             </a:r>
@@ -26993,9 +26971,9 @@
                 <a:solidFill>
                   <a:srgbClr val="C7D6E4"/>
                 </a:solidFill>
-                <a:latin typeface="Microsoft JhengHei" pitchFamily="34" charset="0"/>
-                <a:ea typeface="Microsoft JhengHei" pitchFamily="34" charset="-122"/>
-                <a:cs typeface="Microsoft JhengHei" pitchFamily="34" charset="-120"/>
+                <a:latin typeface="Hiragino Sans" pitchFamily="34" charset="0"/>
+                <a:ea typeface="Hiragino Sans" pitchFamily="34" charset="-122"/>
+                <a:cs typeface="Hiragino Sans" pitchFamily="34" charset="-120"/>
               </a:rPr>
               <a:t>沿用同一映像與 codebase，遷移成本近零</a:t>
             </a:r>
@@ -27017,9 +26995,9 @@
                 <a:solidFill>
                   <a:srgbClr val="C7D6E4"/>
                 </a:solidFill>
-                <a:latin typeface="Microsoft JhengHei" pitchFamily="34" charset="0"/>
-                <a:ea typeface="Microsoft JhengHei" pitchFamily="34" charset="-122"/>
-                <a:cs typeface="Microsoft JhengHei" pitchFamily="34" charset="-120"/>
+                <a:latin typeface="Hiragino Sans" pitchFamily="34" charset="0"/>
+                <a:ea typeface="Hiragino Sans" pitchFamily="34" charset="-122"/>
+                <a:cs typeface="Hiragino Sans" pitchFamily="34" charset="-120"/>
               </a:rPr>
               <a:t>內建 HTTPS + 穩定網域 + 自動擴縮，demo URL 天生穩定</a:t>
             </a:r>
@@ -27041,9 +27019,9 @@
                 <a:solidFill>
                   <a:srgbClr val="C7D6E4"/>
                 </a:solidFill>
-                <a:latin typeface="Microsoft JhengHei" pitchFamily="34" charset="0"/>
-                <a:ea typeface="Microsoft JhengHei" pitchFamily="34" charset="-122"/>
-                <a:cs typeface="Microsoft JhengHei" pitchFamily="34" charset="-120"/>
+                <a:latin typeface="Hiragino Sans" pitchFamily="34" charset="0"/>
+                <a:ea typeface="Hiragino Sans" pitchFamily="34" charset="-122"/>
+                <a:cs typeface="Hiragino Sans" pitchFamily="34" charset="-120"/>
               </a:rPr>
               <a:t>維持單服務好除錯特性</a:t>
             </a:r>
@@ -27158,9 +27136,9 @@
                 <a:solidFill>
                   <a:srgbClr val="FFFFFF"/>
                 </a:solidFill>
-                <a:latin typeface="Microsoft JhengHei" pitchFamily="34" charset="0"/>
-                <a:ea typeface="Microsoft JhengHei" pitchFamily="34" charset="-122"/>
-                <a:cs typeface="Microsoft JhengHei" pitchFamily="34" charset="-120"/>
+                <a:latin typeface="Hiragino Sans" pitchFamily="34" charset="0"/>
+                <a:ea typeface="Hiragino Sans" pitchFamily="34" charset="-122"/>
+                <a:cs typeface="Hiragino Sans" pitchFamily="34" charset="-120"/>
               </a:rPr>
               <a:t>▲ 取捨 / 風險</a:t>
             </a:r>
@@ -27204,9 +27182,9 @@
                 <a:solidFill>
                   <a:srgbClr val="C7D6E4"/>
                 </a:solidFill>
-                <a:latin typeface="Microsoft JhengHei" pitchFamily="34" charset="0"/>
-                <a:ea typeface="Microsoft JhengHei" pitchFamily="34" charset="-122"/>
-                <a:cs typeface="Microsoft JhengHei" pitchFamily="34" charset="-120"/>
+                <a:latin typeface="Hiragino Sans" pitchFamily="34" charset="0"/>
+                <a:ea typeface="Hiragino Sans" pitchFamily="34" charset="-122"/>
+                <a:cs typeface="Hiragino Sans" pitchFamily="34" charset="-120"/>
               </a:rPr>
               <a:t>本 workshop 帳號 App Runner AccessDenied → 決定性阻斷</a:t>
             </a:r>
@@ -27228,9 +27206,9 @@
                 <a:solidFill>
                   <a:srgbClr val="C7D6E4"/>
                 </a:solidFill>
-                <a:latin typeface="Microsoft JhengHei" pitchFamily="34" charset="0"/>
-                <a:ea typeface="Microsoft JhengHei" pitchFamily="34" charset="-122"/>
-                <a:cs typeface="Microsoft JhengHei" pitchFamily="34" charset="-120"/>
+                <a:latin typeface="Hiragino Sans" pitchFamily="34" charset="0"/>
+                <a:ea typeface="Hiragino Sans" pitchFamily="34" charset="-122"/>
+                <a:cs typeface="Hiragino Sans" pitchFamily="34" charset="-120"/>
               </a:rPr>
               <a:t>與 Fargate 一樣非資料驅動、更新要重 build 映像</a:t>
             </a:r>
@@ -27252,9 +27230,9 @@
                 <a:solidFill>
                   <a:srgbClr val="C7D6E4"/>
                 </a:solidFill>
-                <a:latin typeface="Microsoft JhengHei" pitchFamily="34" charset="0"/>
-                <a:ea typeface="Microsoft JhengHei" pitchFamily="34" charset="-122"/>
-                <a:cs typeface="Microsoft JhengHei" pitchFamily="34" charset="-120"/>
+                <a:latin typeface="Hiragino Sans" pitchFamily="34" charset="0"/>
+                <a:ea typeface="Hiragino Sans" pitchFamily="34" charset="-122"/>
+                <a:cs typeface="Hiragino Sans" pitchFamily="34" charset="-120"/>
               </a:rPr>
               <a:t>客製網路 / 私有子網彈性不如 ECS</a:t>
             </a:r>
@@ -27276,9 +27254,9 @@
                 <a:solidFill>
                   <a:srgbClr val="C7D6E4"/>
                 </a:solidFill>
-                <a:latin typeface="Microsoft JhengHei" pitchFamily="34" charset="0"/>
-                <a:ea typeface="Microsoft JhengHei" pitchFamily="34" charset="-122"/>
-                <a:cs typeface="Microsoft JhengHei" pitchFamily="34" charset="-120"/>
+                <a:latin typeface="Hiragino Sans" pitchFamily="34" charset="0"/>
+                <a:ea typeface="Hiragino Sans" pitchFamily="34" charset="-122"/>
+                <a:cs typeface="Hiragino Sans" pitchFamily="34" charset="-120"/>
               </a:rPr>
               <a:t>區域 / 映像限制較多，遇權限問題無替代路徑</a:t>
             </a:r>
@@ -27347,9 +27325,9 @@
                 <a:solidFill>
                   <a:srgbClr val="F4A72B"/>
                 </a:solidFill>
-                <a:latin typeface="Microsoft JhengHei" pitchFamily="34" charset="0"/>
-                <a:ea typeface="Microsoft JhengHei" pitchFamily="34" charset="-122"/>
-                <a:cs typeface="Microsoft JhengHei" pitchFamily="34" charset="-120"/>
+                <a:latin typeface="Hiragino Sans" pitchFamily="34" charset="0"/>
+                <a:ea typeface="Hiragino Sans" pitchFamily="34" charset="-122"/>
+                <a:cs typeface="Hiragino Sans" pitchFamily="34" charset="-120"/>
               </a:rPr>
               <a:t>◆ 何時選　</a:t>
             </a:r>
@@ -27364,9 +27342,9 @@
                 <a:solidFill>
                   <a:srgbClr val="FFFFFF"/>
                 </a:solidFill>
-                <a:latin typeface="Microsoft JhengHei" pitchFamily="34" charset="0"/>
-                <a:ea typeface="Microsoft JhengHei" pitchFamily="34" charset="-122"/>
-                <a:cs typeface="Microsoft JhengHei" pitchFamily="34" charset="-120"/>
+                <a:latin typeface="Hiragino Sans" pitchFamily="34" charset="0"/>
+                <a:ea typeface="Hiragino Sans" pitchFamily="34" charset="-122"/>
+                <a:cs typeface="Hiragino Sans" pitchFamily="34" charset="-120"/>
               </a:rPr>
               <a:t>帳號放行 App Runner、想用最少 infra 步驟托管同一顆容器、不想碰 ALB/VPC 時（本次因 AccessDenied 不建議作主線）。</a:t>
             </a:r>
@@ -27588,9 +27566,9 @@
                 <a:solidFill>
                   <a:srgbClr val="FFFFFF"/>
                 </a:solidFill>
-                <a:latin typeface="Microsoft JhengHei" pitchFamily="34" charset="0"/>
-                <a:ea typeface="Microsoft JhengHei" pitchFamily="34" charset="-122"/>
-                <a:cs typeface="Microsoft JhengHei" pitchFamily="34" charset="-120"/>
+                <a:latin typeface="Hiragino Sans" pitchFamily="34" charset="0"/>
+                <a:ea typeface="Hiragino Sans" pitchFamily="34" charset="-122"/>
+                <a:cs typeface="Hiragino Sans" pitchFamily="34" charset="-120"/>
               </a:rPr>
               <a:t>07</a:t>
             </a:r>
@@ -27602,9 +27580,9 @@
                 <a:solidFill>
                   <a:srgbClr val="8FA8BD"/>
                 </a:solidFill>
-                <a:latin typeface="Microsoft JhengHei" pitchFamily="34" charset="0"/>
-                <a:ea typeface="Microsoft JhengHei" pitchFamily="34" charset="-122"/>
-                <a:cs typeface="Microsoft JhengHei" pitchFamily="34" charset="-120"/>
+                <a:latin typeface="Hiragino Sans" pitchFamily="34" charset="0"/>
+                <a:ea typeface="Hiragino Sans" pitchFamily="34" charset="-122"/>
+                <a:cs typeface="Hiragino Sans" pitchFamily="34" charset="-120"/>
               </a:rPr>
               <a:t>  /  15</a:t>
             </a:r>
@@ -27641,9 +27619,9 @@
                 <a:solidFill>
                   <a:srgbClr val="F4A72B"/>
                 </a:solidFill>
-                <a:latin typeface="Microsoft JhengHei" pitchFamily="34" charset="0"/>
-                <a:ea typeface="Microsoft JhengHei" pitchFamily="34" charset="-122"/>
-                <a:cs typeface="Microsoft JhengHei" pitchFamily="34" charset="-120"/>
+                <a:latin typeface="Hiragino Sans" pitchFamily="34" charset="0"/>
+                <a:ea typeface="Hiragino Sans" pitchFamily="34" charset="-122"/>
+                <a:cs typeface="Hiragino Sans" pitchFamily="34" charset="-120"/>
               </a:rPr>
               <a:t>方案 D · EC2 + DOCKER</a:t>
             </a:r>
@@ -27680,9 +27658,9 @@
                 <a:solidFill>
                   <a:srgbClr val="FFFFFF"/>
                 </a:solidFill>
-                <a:latin typeface="Microsoft JhengHei" pitchFamily="34" charset="0"/>
-                <a:ea typeface="Microsoft JhengHei" pitchFamily="34" charset="-122"/>
-                <a:cs typeface="Microsoft JhengHei" pitchFamily="34" charset="-120"/>
+                <a:latin typeface="Hiragino Sans" pitchFamily="34" charset="0"/>
+                <a:ea typeface="Hiragino Sans" pitchFamily="34" charset="-122"/>
+                <a:cs typeface="Hiragino Sans" pitchFamily="34" charset="-120"/>
               </a:rPr>
               <a:t>單台虛機 docker run，最省最可控的保底路線</a:t>
             </a:r>
@@ -27741,9 +27719,9 @@
                 <a:solidFill>
                   <a:srgbClr val="FFFFFF"/>
                 </a:solidFill>
-                <a:latin typeface="Microsoft JhengHei" pitchFamily="34" charset="0"/>
-                <a:ea typeface="Microsoft JhengHei" pitchFamily="34" charset="-122"/>
-                <a:cs typeface="Microsoft JhengHei" pitchFamily="34" charset="-120"/>
+                <a:latin typeface="Hiragino Sans" pitchFamily="34" charset="0"/>
+                <a:ea typeface="Hiragino Sans" pitchFamily="34" charset="-122"/>
+                <a:cs typeface="Hiragino Sans" pitchFamily="34" charset="-120"/>
               </a:rPr>
               <a:t>成本 最低</a:t>
             </a:r>
@@ -27802,9 +27780,9 @@
                 <a:solidFill>
                   <a:srgbClr val="18293B"/>
                 </a:solidFill>
-                <a:latin typeface="Microsoft JhengHei" pitchFamily="34" charset="0"/>
-                <a:ea typeface="Microsoft JhengHei" pitchFamily="34" charset="-122"/>
-                <a:cs typeface="Microsoft JhengHei" pitchFamily="34" charset="-120"/>
+                <a:latin typeface="Hiragino Sans" pitchFamily="34" charset="0"/>
+                <a:ea typeface="Hiragino Sans" pitchFamily="34" charset="-122"/>
+                <a:cs typeface="Hiragino Sans" pitchFamily="34" charset="-120"/>
               </a:rPr>
               <a:t>黑客松 中 · 保底</a:t>
             </a:r>
@@ -27864,13 +27842,13 @@
               <a:buNone/>
             </a:pPr>
             <a:r>
-              <a:rPr lang="en-US" sz="1200" i="1" dirty="0">
+              <a:rPr lang="en-US" sz="1200" dirty="0">
                 <a:solidFill>
                   <a:srgbClr val="C7D6E4"/>
                 </a:solidFill>
-                <a:latin typeface="Microsoft JhengHei" pitchFamily="34" charset="0"/>
-                <a:ea typeface="Microsoft JhengHei" pitchFamily="34" charset="-122"/>
-                <a:cs typeface="Microsoft JhengHei" pitchFamily="34" charset="-120"/>
+                <a:latin typeface="Hiragino Sans" pitchFamily="34" charset="0"/>
+                <a:ea typeface="Hiragino Sans" pitchFamily="34" charset="-122"/>
+                <a:cs typeface="Hiragino Sans" pitchFamily="34" charset="-120"/>
               </a:rPr>
               <a:t>開一台 EC2（Graviton t4g / x86），docker run 同一顆映像，綁 Elastic IP 得固定位址，安全群組開 8080/443。完全掌控 OS / 網路 / 生命週期，成本壓到最低，無託管服務依賴。</a:t>
             </a:r>
@@ -27907,9 +27885,9 @@
                 <a:solidFill>
                   <a:srgbClr val="2A9D8F"/>
                 </a:solidFill>
-                <a:latin typeface="Microsoft JhengHei" pitchFamily="34" charset="0"/>
-                <a:ea typeface="Microsoft JhengHei" pitchFamily="34" charset="-122"/>
-                <a:cs typeface="Microsoft JhengHei" pitchFamily="34" charset="-120"/>
+                <a:latin typeface="Hiragino Sans" pitchFamily="34" charset="0"/>
+                <a:ea typeface="Hiragino Sans" pitchFamily="34" charset="-122"/>
+                <a:cs typeface="Hiragino Sans" pitchFamily="34" charset="-120"/>
               </a:rPr>
               <a:t>服務組成</a:t>
             </a:r>
@@ -28007,9 +27985,9 @@
                 <a:solidFill>
                   <a:srgbClr val="FFFFFF"/>
                 </a:solidFill>
-                <a:latin typeface="Microsoft JhengHei" pitchFamily="34" charset="0"/>
-                <a:ea typeface="Microsoft JhengHei" pitchFamily="34" charset="-122"/>
-                <a:cs typeface="Microsoft JhengHei" pitchFamily="34" charset="-120"/>
+                <a:latin typeface="Hiragino Sans" pitchFamily="34" charset="0"/>
+                <a:ea typeface="Hiragino Sans" pitchFamily="34" charset="-122"/>
+                <a:cs typeface="Hiragino Sans" pitchFamily="34" charset="-120"/>
               </a:rPr>
               <a:t>EC2</a:t>
             </a:r>
@@ -28049,9 +28027,9 @@
                 <a:solidFill>
                   <a:srgbClr val="FFFFFF"/>
                 </a:solidFill>
-                <a:latin typeface="Microsoft JhengHei" pitchFamily="34" charset="0"/>
-                <a:ea typeface="Microsoft JhengHei" pitchFamily="34" charset="-122"/>
-                <a:cs typeface="Microsoft JhengHei" pitchFamily="34" charset="-120"/>
+                <a:latin typeface="Hiragino Sans" pitchFamily="34" charset="0"/>
+                <a:ea typeface="Hiragino Sans" pitchFamily="34" charset="-122"/>
+                <a:cs typeface="Hiragino Sans" pitchFamily="34" charset="-120"/>
               </a:rPr>
               <a:t>EC2</a:t>
             </a:r>
@@ -28069,9 +28047,9 @@
                 <a:solidFill>
                   <a:srgbClr val="FFFFFF"/>
                 </a:solidFill>
-                <a:latin typeface="Microsoft JhengHei" pitchFamily="34" charset="0"/>
-                <a:ea typeface="Microsoft JhengHei" pitchFamily="34" charset="-122"/>
-                <a:cs typeface="Microsoft JhengHei" pitchFamily="34" charset="-120"/>
+                <a:latin typeface="Hiragino Sans" pitchFamily="34" charset="0"/>
+                <a:ea typeface="Hiragino Sans" pitchFamily="34" charset="-122"/>
+                <a:cs typeface="Hiragino Sans" pitchFamily="34" charset="-120"/>
               </a:rPr>
               <a:t>Graviton</a:t>
             </a:r>
@@ -28111,9 +28089,9 @@
                 <a:solidFill>
                   <a:srgbClr val="C7D6E4"/>
                 </a:solidFill>
-                <a:latin typeface="Microsoft JhengHei" pitchFamily="34" charset="0"/>
-                <a:ea typeface="Microsoft JhengHei" pitchFamily="34" charset="-122"/>
-                <a:cs typeface="Microsoft JhengHei" pitchFamily="34" charset="-120"/>
+                <a:latin typeface="Hiragino Sans" pitchFamily="34" charset="0"/>
+                <a:ea typeface="Hiragino Sans" pitchFamily="34" charset="-122"/>
+                <a:cs typeface="Hiragino Sans" pitchFamily="34" charset="-120"/>
               </a:rPr>
               <a:t>docker run 容器</a:t>
             </a:r>
@@ -28235,9 +28213,9 @@
                 <a:solidFill>
                   <a:srgbClr val="FFFFFF"/>
                 </a:solidFill>
-                <a:latin typeface="Microsoft JhengHei" pitchFamily="34" charset="0"/>
-                <a:ea typeface="Microsoft JhengHei" pitchFamily="34" charset="-122"/>
-                <a:cs typeface="Microsoft JhengHei" pitchFamily="34" charset="-120"/>
+                <a:latin typeface="Hiragino Sans" pitchFamily="34" charset="0"/>
+                <a:ea typeface="Hiragino Sans" pitchFamily="34" charset="-122"/>
+                <a:cs typeface="Hiragino Sans" pitchFamily="34" charset="-120"/>
               </a:rPr>
               <a:t>IP</a:t>
             </a:r>
@@ -28277,9 +28255,9 @@
                 <a:solidFill>
                   <a:srgbClr val="FFFFFF"/>
                 </a:solidFill>
-                <a:latin typeface="Microsoft JhengHei" pitchFamily="34" charset="0"/>
-                <a:ea typeface="Microsoft JhengHei" pitchFamily="34" charset="-122"/>
-                <a:cs typeface="Microsoft JhengHei" pitchFamily="34" charset="-120"/>
+                <a:latin typeface="Hiragino Sans" pitchFamily="34" charset="0"/>
+                <a:ea typeface="Hiragino Sans" pitchFamily="34" charset="-122"/>
+                <a:cs typeface="Hiragino Sans" pitchFamily="34" charset="-120"/>
               </a:rPr>
               <a:t>Elastic IP</a:t>
             </a:r>
@@ -28319,9 +28297,9 @@
                 <a:solidFill>
                   <a:srgbClr val="C7D6E4"/>
                 </a:solidFill>
-                <a:latin typeface="Microsoft JhengHei" pitchFamily="34" charset="0"/>
-                <a:ea typeface="Microsoft JhengHei" pitchFamily="34" charset="-122"/>
-                <a:cs typeface="Microsoft JhengHei" pitchFamily="34" charset="-120"/>
+                <a:latin typeface="Hiragino Sans" pitchFamily="34" charset="0"/>
+                <a:ea typeface="Hiragino Sans" pitchFamily="34" charset="-122"/>
+                <a:cs typeface="Hiragino Sans" pitchFamily="34" charset="-120"/>
               </a:rPr>
               <a:t>固定公網位址</a:t>
             </a:r>
@@ -28443,9 +28421,9 @@
                 <a:solidFill>
                   <a:srgbClr val="FFFFFF"/>
                 </a:solidFill>
-                <a:latin typeface="Microsoft JhengHei" pitchFamily="34" charset="0"/>
-                <a:ea typeface="Microsoft JhengHei" pitchFamily="34" charset="-122"/>
-                <a:cs typeface="Microsoft JhengHei" pitchFamily="34" charset="-120"/>
+                <a:latin typeface="Hiragino Sans" pitchFamily="34" charset="0"/>
+                <a:ea typeface="Hiragino Sans" pitchFamily="34" charset="-122"/>
+                <a:cs typeface="Hiragino Sans" pitchFamily="34" charset="-120"/>
               </a:rPr>
               <a:t>ECR</a:t>
             </a:r>
@@ -28485,9 +28463,9 @@
                 <a:solidFill>
                   <a:srgbClr val="FFFFFF"/>
                 </a:solidFill>
-                <a:latin typeface="Microsoft JhengHei" pitchFamily="34" charset="0"/>
-                <a:ea typeface="Microsoft JhengHei" pitchFamily="34" charset="-122"/>
-                <a:cs typeface="Microsoft JhengHei" pitchFamily="34" charset="-120"/>
+                <a:latin typeface="Hiragino Sans" pitchFamily="34" charset="0"/>
+                <a:ea typeface="Hiragino Sans" pitchFamily="34" charset="-122"/>
+                <a:cs typeface="Hiragino Sans" pitchFamily="34" charset="-120"/>
               </a:rPr>
               <a:t>ECR /</a:t>
             </a:r>
@@ -28505,9 +28483,9 @@
                 <a:solidFill>
                   <a:srgbClr val="FFFFFF"/>
                 </a:solidFill>
-                <a:latin typeface="Microsoft JhengHei" pitchFamily="34" charset="0"/>
-                <a:ea typeface="Microsoft JhengHei" pitchFamily="34" charset="-122"/>
-                <a:cs typeface="Microsoft JhengHei" pitchFamily="34" charset="-120"/>
+                <a:latin typeface="Hiragino Sans" pitchFamily="34" charset="0"/>
+                <a:ea typeface="Hiragino Sans" pitchFamily="34" charset="-122"/>
+                <a:cs typeface="Hiragino Sans" pitchFamily="34" charset="-120"/>
               </a:rPr>
               <a:t>本機映像</a:t>
             </a:r>
@@ -28547,9 +28525,9 @@
                 <a:solidFill>
                   <a:srgbClr val="C7D6E4"/>
                 </a:solidFill>
-                <a:latin typeface="Microsoft JhengHei" pitchFamily="34" charset="0"/>
-                <a:ea typeface="Microsoft JhengHei" pitchFamily="34" charset="-122"/>
-                <a:cs typeface="Microsoft JhengHei" pitchFamily="34" charset="-120"/>
+                <a:latin typeface="Hiragino Sans" pitchFamily="34" charset="0"/>
+                <a:ea typeface="Hiragino Sans" pitchFamily="34" charset="-122"/>
+                <a:cs typeface="Hiragino Sans" pitchFamily="34" charset="-120"/>
               </a:rPr>
               <a:t>pull 或 docker load</a:t>
             </a:r>
@@ -28671,9 +28649,9 @@
                 <a:solidFill>
                   <a:srgbClr val="FFFFFF"/>
                 </a:solidFill>
-                <a:latin typeface="Microsoft JhengHei" pitchFamily="34" charset="0"/>
-                <a:ea typeface="Microsoft JhengHei" pitchFamily="34" charset="-122"/>
-                <a:cs typeface="Microsoft JhengHei" pitchFamily="34" charset="-120"/>
+                <a:latin typeface="Hiragino Sans" pitchFamily="34" charset="0"/>
+                <a:ea typeface="Hiragino Sans" pitchFamily="34" charset="-122"/>
+                <a:cs typeface="Hiragino Sans" pitchFamily="34" charset="-120"/>
               </a:rPr>
               <a:t>SG</a:t>
             </a:r>
@@ -28713,9 +28691,9 @@
                 <a:solidFill>
                   <a:srgbClr val="FFFFFF"/>
                 </a:solidFill>
-                <a:latin typeface="Microsoft JhengHei" pitchFamily="34" charset="0"/>
-                <a:ea typeface="Microsoft JhengHei" pitchFamily="34" charset="-122"/>
-                <a:cs typeface="Microsoft JhengHei" pitchFamily="34" charset="-120"/>
+                <a:latin typeface="Hiragino Sans" pitchFamily="34" charset="0"/>
+                <a:ea typeface="Hiragino Sans" pitchFamily="34" charset="-122"/>
+                <a:cs typeface="Hiragino Sans" pitchFamily="34" charset="-120"/>
               </a:rPr>
               <a:t>Security</a:t>
             </a:r>
@@ -28733,9 +28711,9 @@
                 <a:solidFill>
                   <a:srgbClr val="FFFFFF"/>
                 </a:solidFill>
-                <a:latin typeface="Microsoft JhengHei" pitchFamily="34" charset="0"/>
-                <a:ea typeface="Microsoft JhengHei" pitchFamily="34" charset="-122"/>
-                <a:cs typeface="Microsoft JhengHei" pitchFamily="34" charset="-120"/>
+                <a:latin typeface="Hiragino Sans" pitchFamily="34" charset="0"/>
+                <a:ea typeface="Hiragino Sans" pitchFamily="34" charset="-122"/>
+                <a:cs typeface="Hiragino Sans" pitchFamily="34" charset="-120"/>
               </a:rPr>
               <a:t>Group</a:t>
             </a:r>
@@ -28775,9 +28753,9 @@
                 <a:solidFill>
                   <a:srgbClr val="C7D6E4"/>
                 </a:solidFill>
-                <a:latin typeface="Microsoft JhengHei" pitchFamily="34" charset="0"/>
-                <a:ea typeface="Microsoft JhengHei" pitchFamily="34" charset="-122"/>
-                <a:cs typeface="Microsoft JhengHei" pitchFamily="34" charset="-120"/>
+                <a:latin typeface="Hiragino Sans" pitchFamily="34" charset="0"/>
+                <a:ea typeface="Hiragino Sans" pitchFamily="34" charset="-122"/>
+                <a:cs typeface="Hiragino Sans" pitchFamily="34" charset="-120"/>
               </a:rPr>
               <a:t>開 8080/443</a:t>
             </a:r>
@@ -28899,9 +28877,9 @@
                 <a:solidFill>
                   <a:srgbClr val="FFFFFF"/>
                 </a:solidFill>
-                <a:latin typeface="Microsoft JhengHei" pitchFamily="34" charset="0"/>
-                <a:ea typeface="Microsoft JhengHei" pitchFamily="34" charset="-122"/>
-                <a:cs typeface="Microsoft JhengHei" pitchFamily="34" charset="-120"/>
+                <a:latin typeface="Hiragino Sans" pitchFamily="34" charset="0"/>
+                <a:ea typeface="Hiragino Sans" pitchFamily="34" charset="-122"/>
+                <a:cs typeface="Hiragino Sans" pitchFamily="34" charset="-120"/>
               </a:rPr>
               <a:t>AI</a:t>
             </a:r>
@@ -28941,9 +28919,9 @@
                 <a:solidFill>
                   <a:srgbClr val="FFFFFF"/>
                 </a:solidFill>
-                <a:latin typeface="Microsoft JhengHei" pitchFamily="34" charset="0"/>
-                <a:ea typeface="Microsoft JhengHei" pitchFamily="34" charset="-122"/>
-                <a:cs typeface="Microsoft JhengHei" pitchFamily="34" charset="-120"/>
+                <a:latin typeface="Hiragino Sans" pitchFamily="34" charset="0"/>
+                <a:ea typeface="Hiragino Sans" pitchFamily="34" charset="-122"/>
+                <a:cs typeface="Hiragino Sans" pitchFamily="34" charset="-120"/>
               </a:rPr>
               <a:t>Bedrock</a:t>
             </a:r>
@@ -28983,9 +28961,9 @@
                 <a:solidFill>
                   <a:srgbClr val="C7D6E4"/>
                 </a:solidFill>
-                <a:latin typeface="Microsoft JhengHei" pitchFamily="34" charset="0"/>
-                <a:ea typeface="Microsoft JhengHei" pitchFamily="34" charset="-122"/>
-                <a:cs typeface="Microsoft JhengHei" pitchFamily="34" charset="-120"/>
+                <a:latin typeface="Hiragino Sans" pitchFamily="34" charset="0"/>
+                <a:ea typeface="Hiragino Sans" pitchFamily="34" charset="-122"/>
+                <a:cs typeface="Hiragino Sans" pitchFamily="34" charset="-120"/>
               </a:rPr>
               <a:t>instance role</a:t>
             </a:r>
@@ -29107,9 +29085,9 @@
                 <a:solidFill>
                   <a:srgbClr val="FFFFFF"/>
                 </a:solidFill>
-                <a:latin typeface="Microsoft JhengHei" pitchFamily="34" charset="0"/>
-                <a:ea typeface="Microsoft JhengHei" pitchFamily="34" charset="-122"/>
-                <a:cs typeface="Microsoft JhengHei" pitchFamily="34" charset="-120"/>
+                <a:latin typeface="Hiragino Sans" pitchFamily="34" charset="0"/>
+                <a:ea typeface="Hiragino Sans" pitchFamily="34" charset="-122"/>
+                <a:cs typeface="Hiragino Sans" pitchFamily="34" charset="-120"/>
               </a:rPr>
               <a:t>SNS</a:t>
             </a:r>
@@ -29149,9 +29127,9 @@
                 <a:solidFill>
                   <a:srgbClr val="FFFFFF"/>
                 </a:solidFill>
-                <a:latin typeface="Microsoft JhengHei" pitchFamily="34" charset="0"/>
-                <a:ea typeface="Microsoft JhengHei" pitchFamily="34" charset="-122"/>
-                <a:cs typeface="Microsoft JhengHei" pitchFamily="34" charset="-120"/>
+                <a:latin typeface="Hiragino Sans" pitchFamily="34" charset="0"/>
+                <a:ea typeface="Hiragino Sans" pitchFamily="34" charset="-122"/>
+                <a:cs typeface="Hiragino Sans" pitchFamily="34" charset="-120"/>
               </a:rPr>
               <a:t>SNS</a:t>
             </a:r>
@@ -29191,9 +29169,9 @@
                 <a:solidFill>
                   <a:srgbClr val="C7D6E4"/>
                 </a:solidFill>
-                <a:latin typeface="Microsoft JhengHei" pitchFamily="34" charset="0"/>
-                <a:ea typeface="Microsoft JhengHei" pitchFamily="34" charset="-122"/>
-                <a:cs typeface="Microsoft JhengHei" pitchFamily="34" charset="-120"/>
+                <a:latin typeface="Hiragino Sans" pitchFamily="34" charset="0"/>
+                <a:ea typeface="Hiragino Sans" pitchFamily="34" charset="-122"/>
+                <a:cs typeface="Hiragino Sans" pitchFamily="34" charset="-120"/>
               </a:rPr>
               <a:t>告警</a:t>
             </a:r>
@@ -29308,9 +29286,9 @@
                 <a:solidFill>
                   <a:srgbClr val="FFFFFF"/>
                 </a:solidFill>
-                <a:latin typeface="Microsoft JhengHei" pitchFamily="34" charset="0"/>
-                <a:ea typeface="Microsoft JhengHei" pitchFamily="34" charset="-122"/>
-                <a:cs typeface="Microsoft JhengHei" pitchFamily="34" charset="-120"/>
+                <a:latin typeface="Hiragino Sans" pitchFamily="34" charset="0"/>
+                <a:ea typeface="Hiragino Sans" pitchFamily="34" charset="-122"/>
+                <a:cs typeface="Hiragino Sans" pitchFamily="34" charset="-120"/>
               </a:rPr>
               <a:t>● 優勢</a:t>
             </a:r>
@@ -29354,9 +29332,9 @@
                 <a:solidFill>
                   <a:srgbClr val="C7D6E4"/>
                 </a:solidFill>
-                <a:latin typeface="Microsoft JhengHei" pitchFamily="34" charset="0"/>
-                <a:ea typeface="Microsoft JhengHei" pitchFamily="34" charset="-122"/>
-                <a:cs typeface="Microsoft JhengHei" pitchFamily="34" charset="-120"/>
+                <a:latin typeface="Hiragino Sans" pitchFamily="34" charset="0"/>
+                <a:ea typeface="Hiragino Sans" pitchFamily="34" charset="-122"/>
+                <a:cs typeface="Hiragino Sans" pitchFamily="34" charset="-120"/>
               </a:rPr>
               <a:t>成本最低、最可控：一台機器全包，無託管服務加價</a:t>
             </a:r>
@@ -29378,9 +29356,9 @@
                 <a:solidFill>
                   <a:srgbClr val="C7D6E4"/>
                 </a:solidFill>
-                <a:latin typeface="Microsoft JhengHei" pitchFamily="34" charset="0"/>
-                <a:ea typeface="Microsoft JhengHei" pitchFamily="34" charset="-122"/>
-                <a:cs typeface="Microsoft JhengHei" pitchFamily="34" charset="-120"/>
+                <a:latin typeface="Hiragino Sans" pitchFamily="34" charset="0"/>
+                <a:ea typeface="Hiragino Sans" pitchFamily="34" charset="-122"/>
+                <a:cs typeface="Hiragino Sans" pitchFamily="34" charset="-120"/>
               </a:rPr>
               <a:t>Elastic IP 給固定位址，重啟不換 IP</a:t>
             </a:r>
@@ -29402,9 +29380,9 @@
                 <a:solidFill>
                   <a:srgbClr val="C7D6E4"/>
                 </a:solidFill>
-                <a:latin typeface="Microsoft JhengHei" pitchFamily="34" charset="0"/>
-                <a:ea typeface="Microsoft JhengHei" pitchFamily="34" charset="-122"/>
-                <a:cs typeface="Microsoft JhengHei" pitchFamily="34" charset="-120"/>
+                <a:latin typeface="Hiragino Sans" pitchFamily="34" charset="0"/>
+                <a:ea typeface="Hiragino Sans" pitchFamily="34" charset="-122"/>
+                <a:cs typeface="Hiragino Sans" pitchFamily="34" charset="-120"/>
               </a:rPr>
               <a:t>本機 docker 行為與 EC2 幾乎一致，除錯最直覺</a:t>
             </a:r>
@@ -29426,9 +29404,9 @@
                 <a:solidFill>
                   <a:srgbClr val="C7D6E4"/>
                 </a:solidFill>
-                <a:latin typeface="Microsoft JhengHei" pitchFamily="34" charset="0"/>
-                <a:ea typeface="Microsoft JhengHei" pitchFamily="34" charset="-122"/>
-                <a:cs typeface="Microsoft JhengHei" pitchFamily="34" charset="-120"/>
+                <a:latin typeface="Hiragino Sans" pitchFamily="34" charset="0"/>
+                <a:ea typeface="Hiragino Sans" pitchFamily="34" charset="-122"/>
+                <a:cs typeface="Hiragino Sans" pitchFamily="34" charset="-120"/>
               </a:rPr>
               <a:t>無 App Runner/ALB 權限依賴，帳號 EC2 已實測可用</a:t>
             </a:r>
@@ -29543,9 +29521,9 @@
                 <a:solidFill>
                   <a:srgbClr val="FFFFFF"/>
                 </a:solidFill>
-                <a:latin typeface="Microsoft JhengHei" pitchFamily="34" charset="0"/>
-                <a:ea typeface="Microsoft JhengHei" pitchFamily="34" charset="-122"/>
-                <a:cs typeface="Microsoft JhengHei" pitchFamily="34" charset="-120"/>
+                <a:latin typeface="Hiragino Sans" pitchFamily="34" charset="0"/>
+                <a:ea typeface="Hiragino Sans" pitchFamily="34" charset="-122"/>
+                <a:cs typeface="Hiragino Sans" pitchFamily="34" charset="-120"/>
               </a:rPr>
               <a:t>▲ 取捨 / 風險</a:t>
             </a:r>
@@ -29589,9 +29567,9 @@
                 <a:solidFill>
                   <a:srgbClr val="C7D6E4"/>
                 </a:solidFill>
-                <a:latin typeface="Microsoft JhengHei" pitchFamily="34" charset="0"/>
-                <a:ea typeface="Microsoft JhengHei" pitchFamily="34" charset="-122"/>
-                <a:cs typeface="Microsoft JhengHei" pitchFamily="34" charset="-120"/>
+                <a:latin typeface="Hiragino Sans" pitchFamily="34" charset="0"/>
+                <a:ea typeface="Hiragino Sans" pitchFamily="34" charset="-122"/>
+                <a:cs typeface="Hiragino Sans" pitchFamily="34" charset="-120"/>
               </a:rPr>
               <a:t>要自管 OS patch / Docker / 重啟 / 健康監控，無自動復原</a:t>
             </a:r>
@@ -29613,9 +29591,9 @@
                 <a:solidFill>
                   <a:srgbClr val="C7D6E4"/>
                 </a:solidFill>
-                <a:latin typeface="Microsoft JhengHei" pitchFamily="34" charset="0"/>
-                <a:ea typeface="Microsoft JhengHei" pitchFamily="34" charset="-122"/>
-                <a:cs typeface="Microsoft JhengHei" pitchFamily="34" charset="-120"/>
+                <a:latin typeface="Hiragino Sans" pitchFamily="34" charset="0"/>
+                <a:ea typeface="Hiragino Sans" pitchFamily="34" charset="-122"/>
+                <a:cs typeface="Hiragino Sans" pitchFamily="34" charset="-120"/>
               </a:rPr>
               <a:t>單台＝單點故障，掛了 demo 就斷（需手動重拉）</a:t>
             </a:r>
@@ -29637,9 +29615,9 @@
                 <a:solidFill>
                   <a:srgbClr val="C7D6E4"/>
                 </a:solidFill>
-                <a:latin typeface="Microsoft JhengHei" pitchFamily="34" charset="0"/>
-                <a:ea typeface="Microsoft JhengHei" pitchFamily="34" charset="-122"/>
-                <a:cs typeface="Microsoft JhengHei" pitchFamily="34" charset="-120"/>
+                <a:latin typeface="Hiragino Sans" pitchFamily="34" charset="0"/>
+                <a:ea typeface="Hiragino Sans" pitchFamily="34" charset="-122"/>
+                <a:cs typeface="Hiragino Sans" pitchFamily="34" charset="-120"/>
               </a:rPr>
               <a:t>HTTPS 要自己配（反代 / 憑證），比 ALB 麻煩</a:t>
             </a:r>
@@ -29661,9 +29639,9 @@
                 <a:solidFill>
                   <a:srgbClr val="C7D6E4"/>
                 </a:solidFill>
-                <a:latin typeface="Microsoft JhengHei" pitchFamily="34" charset="0"/>
-                <a:ea typeface="Microsoft JhengHei" pitchFamily="34" charset="-122"/>
-                <a:cs typeface="Microsoft JhengHei" pitchFamily="34" charset="-120"/>
+                <a:latin typeface="Hiragino Sans" pitchFamily="34" charset="0"/>
+                <a:ea typeface="Hiragino Sans" pitchFamily="34" charset="-122"/>
+                <a:cs typeface="Hiragino Sans" pitchFamily="34" charset="-120"/>
               </a:rPr>
               <a:t>非資料驅動、無自動擴縮，擴展敘事最弱</a:t>
             </a:r>
@@ -29732,9 +29710,9 @@
                 <a:solidFill>
                   <a:srgbClr val="F4A72B"/>
                 </a:solidFill>
-                <a:latin typeface="Microsoft JhengHei" pitchFamily="34" charset="0"/>
-                <a:ea typeface="Microsoft JhengHei" pitchFamily="34" charset="-122"/>
-                <a:cs typeface="Microsoft JhengHei" pitchFamily="34" charset="-120"/>
+                <a:latin typeface="Hiragino Sans" pitchFamily="34" charset="0"/>
+                <a:ea typeface="Hiragino Sans" pitchFamily="34" charset="-122"/>
+                <a:cs typeface="Hiragino Sans" pitchFamily="34" charset="-120"/>
               </a:rPr>
               <a:t>◆ 何時選　</a:t>
             </a:r>
@@ -29749,9 +29727,9 @@
                 <a:solidFill>
                   <a:srgbClr val="FFFFFF"/>
                 </a:solidFill>
-                <a:latin typeface="Microsoft JhengHei" pitchFamily="34" charset="0"/>
-                <a:ea typeface="Microsoft JhengHei" pitchFamily="34" charset="-122"/>
-                <a:cs typeface="Microsoft JhengHei" pitchFamily="34" charset="-120"/>
+                <a:latin typeface="Hiragino Sans" pitchFamily="34" charset="0"/>
+                <a:ea typeface="Hiragino Sans" pitchFamily="34" charset="-122"/>
+                <a:cs typeface="Hiragino Sans" pitchFamily="34" charset="-120"/>
               </a:rPr>
               <a:t>要極致省成本、完全掌控，或托管服務權限受阻時，需要一條一定跑得起來的保底部署。</a:t>
             </a:r>
@@ -29973,9 +29951,9 @@
                 <a:solidFill>
                   <a:srgbClr val="FFFFFF"/>
                 </a:solidFill>
-                <a:latin typeface="Microsoft JhengHei" pitchFamily="34" charset="0"/>
-                <a:ea typeface="Microsoft JhengHei" pitchFamily="34" charset="-122"/>
-                <a:cs typeface="Microsoft JhengHei" pitchFamily="34" charset="-120"/>
+                <a:latin typeface="Hiragino Sans" pitchFamily="34" charset="0"/>
+                <a:ea typeface="Hiragino Sans" pitchFamily="34" charset="-122"/>
+                <a:cs typeface="Hiragino Sans" pitchFamily="34" charset="-120"/>
               </a:rPr>
               <a:t>08</a:t>
             </a:r>
@@ -29987,9 +29965,9 @@
                 <a:solidFill>
                   <a:srgbClr val="8FA8BD"/>
                 </a:solidFill>
-                <a:latin typeface="Microsoft JhengHei" pitchFamily="34" charset="0"/>
-                <a:ea typeface="Microsoft JhengHei" pitchFamily="34" charset="-122"/>
-                <a:cs typeface="Microsoft JhengHei" pitchFamily="34" charset="-120"/>
+                <a:latin typeface="Hiragino Sans" pitchFamily="34" charset="0"/>
+                <a:ea typeface="Hiragino Sans" pitchFamily="34" charset="-122"/>
+                <a:cs typeface="Hiragino Sans" pitchFamily="34" charset="-120"/>
               </a:rPr>
               <a:t>  /  15</a:t>
             </a:r>
@@ -30026,9 +30004,9 @@
                 <a:solidFill>
                   <a:srgbClr val="F4A72B"/>
                 </a:solidFill>
-                <a:latin typeface="Microsoft JhengHei" pitchFamily="34" charset="0"/>
-                <a:ea typeface="Microsoft JhengHei" pitchFamily="34" charset="-122"/>
-                <a:cs typeface="Microsoft JhengHei" pitchFamily="34" charset="-120"/>
+                <a:latin typeface="Hiragino Sans" pitchFamily="34" charset="0"/>
+                <a:ea typeface="Hiragino Sans" pitchFamily="34" charset="-122"/>
+                <a:cs typeface="Hiragino Sans" pitchFamily="34" charset="-120"/>
               </a:rPr>
               <a:t>方案 E · 完整資料分析管線（未來式）</a:t>
             </a:r>
@@ -30065,9 +30043,9 @@
                 <a:solidFill>
                   <a:srgbClr val="FFFFFF"/>
                 </a:solidFill>
-                <a:latin typeface="Microsoft JhengHei" pitchFamily="34" charset="0"/>
-                <a:ea typeface="Microsoft JhengHei" pitchFamily="34" charset="-122"/>
-                <a:cs typeface="Microsoft JhengHei" pitchFamily="34" charset="-120"/>
+                <a:latin typeface="Hiragino Sans" pitchFamily="34" charset="0"/>
+                <a:ea typeface="Hiragino Sans" pitchFamily="34" charset="-122"/>
+                <a:cs typeface="Hiragino Sans" pitchFamily="34" charset="-120"/>
               </a:rPr>
               <a:t>S3 Lake → ETL → Athena/Timestream → App + BI + ML</a:t>
             </a:r>
@@ -30126,9 +30104,9 @@
                 <a:solidFill>
                   <a:srgbClr val="FFFFFF"/>
                 </a:solidFill>
-                <a:latin typeface="Microsoft JhengHei" pitchFamily="34" charset="0"/>
-                <a:ea typeface="Microsoft JhengHei" pitchFamily="34" charset="-122"/>
-                <a:cs typeface="Microsoft JhengHei" pitchFamily="34" charset="-120"/>
+                <a:latin typeface="Hiragino Sans" pitchFamily="34" charset="0"/>
+                <a:ea typeface="Hiragino Sans" pitchFamily="34" charset="-122"/>
+                <a:cs typeface="Hiragino Sans" pitchFamily="34" charset="-120"/>
               </a:rPr>
               <a:t>成本 中高</a:t>
             </a:r>
@@ -30187,9 +30165,9 @@
                 <a:solidFill>
                   <a:srgbClr val="18293B"/>
                 </a:solidFill>
-                <a:latin typeface="Microsoft JhengHei" pitchFamily="34" charset="0"/>
-                <a:ea typeface="Microsoft JhengHei" pitchFamily="34" charset="-122"/>
-                <a:cs typeface="Microsoft JhengHei" pitchFamily="34" charset="-120"/>
+                <a:latin typeface="Hiragino Sans" pitchFamily="34" charset="0"/>
+                <a:ea typeface="Hiragino Sans" pitchFamily="34" charset="-122"/>
+                <a:cs typeface="Hiragino Sans" pitchFamily="34" charset="-120"/>
               </a:rPr>
               <a:t>黑客松 低 · 藍圖高</a:t>
             </a:r>
@@ -30249,13 +30227,13 @@
               <a:buNone/>
             </a:pPr>
             <a:r>
-              <a:rPr lang="en-US" sz="1200" i="1" dirty="0">
+              <a:rPr lang="en-US" sz="1200" dirty="0">
                 <a:solidFill>
                   <a:srgbClr val="C7D6E4"/>
                 </a:solidFill>
-                <a:latin typeface="Microsoft JhengHei" pitchFamily="34" charset="0"/>
-                <a:ea typeface="Microsoft JhengHei" pitchFamily="34" charset="-122"/>
-                <a:cs typeface="Microsoft JhengHei" pitchFamily="34" charset="-120"/>
+                <a:latin typeface="Hiragino Sans" pitchFamily="34" charset="0"/>
+                <a:ea typeface="Hiragino Sans" pitchFamily="34" charset="-122"/>
+                <a:cs typeface="Hiragino Sans" pitchFamily="34" charset="-120"/>
               </a:rPr>
               <a:t>企業級藍圖：正午報表落 S3 data lake，Glue/Lambda ETL 清洗換算，Athena（批量）/ Timestream（時序）查詢，App 供決策看板，QuickSight 自助 BI，Bedrock/SageMaker 預測，未來接 IoT Core 收船端遙測。</a:t>
             </a:r>
@@ -30292,9 +30270,9 @@
                 <a:solidFill>
                   <a:srgbClr val="2A9D8F"/>
                 </a:solidFill>
-                <a:latin typeface="Microsoft JhengHei" pitchFamily="34" charset="0"/>
-                <a:ea typeface="Microsoft JhengHei" pitchFamily="34" charset="-122"/>
-                <a:cs typeface="Microsoft JhengHei" pitchFamily="34" charset="-120"/>
+                <a:latin typeface="Hiragino Sans" pitchFamily="34" charset="0"/>
+                <a:ea typeface="Hiragino Sans" pitchFamily="34" charset="-122"/>
+                <a:cs typeface="Hiragino Sans" pitchFamily="34" charset="-120"/>
               </a:rPr>
               <a:t>服務組成</a:t>
             </a:r>
@@ -30392,9 +30370,9 @@
                 <a:solidFill>
                   <a:srgbClr val="FFFFFF"/>
                 </a:solidFill>
-                <a:latin typeface="Microsoft JhengHei" pitchFamily="34" charset="0"/>
-                <a:ea typeface="Microsoft JhengHei" pitchFamily="34" charset="-122"/>
-                <a:cs typeface="Microsoft JhengHei" pitchFamily="34" charset="-120"/>
+                <a:latin typeface="Hiragino Sans" pitchFamily="34" charset="0"/>
+                <a:ea typeface="Hiragino Sans" pitchFamily="34" charset="-122"/>
+                <a:cs typeface="Hiragino Sans" pitchFamily="34" charset="-120"/>
               </a:rPr>
               <a:t>S3</a:t>
             </a:r>
@@ -30434,9 +30412,9 @@
                 <a:solidFill>
                   <a:srgbClr val="FFFFFF"/>
                 </a:solidFill>
-                <a:latin typeface="Microsoft JhengHei" pitchFamily="34" charset="0"/>
-                <a:ea typeface="Microsoft JhengHei" pitchFamily="34" charset="-122"/>
-                <a:cs typeface="Microsoft JhengHei" pitchFamily="34" charset="-120"/>
+                <a:latin typeface="Hiragino Sans" pitchFamily="34" charset="0"/>
+                <a:ea typeface="Hiragino Sans" pitchFamily="34" charset="-122"/>
+                <a:cs typeface="Hiragino Sans" pitchFamily="34" charset="-120"/>
               </a:rPr>
               <a:t>S3</a:t>
             </a:r>
@@ -30454,9 +30432,9 @@
                 <a:solidFill>
                   <a:srgbClr val="FFFFFF"/>
                 </a:solidFill>
-                <a:latin typeface="Microsoft JhengHei" pitchFamily="34" charset="0"/>
-                <a:ea typeface="Microsoft JhengHei" pitchFamily="34" charset="-122"/>
-                <a:cs typeface="Microsoft JhengHei" pitchFamily="34" charset="-120"/>
+                <a:latin typeface="Hiragino Sans" pitchFamily="34" charset="0"/>
+                <a:ea typeface="Hiragino Sans" pitchFamily="34" charset="-122"/>
+                <a:cs typeface="Hiragino Sans" pitchFamily="34" charset="-120"/>
               </a:rPr>
               <a:t>Data Lake</a:t>
             </a:r>
@@ -30496,9 +30474,9 @@
                 <a:solidFill>
                   <a:srgbClr val="C7D6E4"/>
                 </a:solidFill>
-                <a:latin typeface="Microsoft JhengHei" pitchFamily="34" charset="0"/>
-                <a:ea typeface="Microsoft JhengHei" pitchFamily="34" charset="-122"/>
-                <a:cs typeface="Microsoft JhengHei" pitchFamily="34" charset="-120"/>
+                <a:latin typeface="Hiragino Sans" pitchFamily="34" charset="0"/>
+                <a:ea typeface="Hiragino Sans" pitchFamily="34" charset="-122"/>
+                <a:cs typeface="Hiragino Sans" pitchFamily="34" charset="-120"/>
               </a:rPr>
               <a:t>raw / curated</a:t>
             </a:r>
@@ -30620,9 +30598,9 @@
                 <a:solidFill>
                   <a:srgbClr val="0A2540"/>
                 </a:solidFill>
-                <a:latin typeface="Microsoft JhengHei" pitchFamily="34" charset="0"/>
-                <a:ea typeface="Microsoft JhengHei" pitchFamily="34" charset="-122"/>
-                <a:cs typeface="Microsoft JhengHei" pitchFamily="34" charset="-120"/>
+                <a:latin typeface="Hiragino Sans" pitchFamily="34" charset="0"/>
+                <a:ea typeface="Hiragino Sans" pitchFamily="34" charset="-122"/>
+                <a:cs typeface="Hiragino Sans" pitchFamily="34" charset="-120"/>
               </a:rPr>
               <a:t>ETL</a:t>
             </a:r>
@@ -30662,9 +30640,9 @@
                 <a:solidFill>
                   <a:srgbClr val="FFFFFF"/>
                 </a:solidFill>
-                <a:latin typeface="Microsoft JhengHei" pitchFamily="34" charset="0"/>
-                <a:ea typeface="Microsoft JhengHei" pitchFamily="34" charset="-122"/>
-                <a:cs typeface="Microsoft JhengHei" pitchFamily="34" charset="-120"/>
+                <a:latin typeface="Hiragino Sans" pitchFamily="34" charset="0"/>
+                <a:ea typeface="Hiragino Sans" pitchFamily="34" charset="-122"/>
+                <a:cs typeface="Hiragino Sans" pitchFamily="34" charset="-120"/>
               </a:rPr>
               <a:t>Glue /</a:t>
             </a:r>
@@ -30682,9 +30660,9 @@
                 <a:solidFill>
                   <a:srgbClr val="FFFFFF"/>
                 </a:solidFill>
-                <a:latin typeface="Microsoft JhengHei" pitchFamily="34" charset="0"/>
-                <a:ea typeface="Microsoft JhengHei" pitchFamily="34" charset="-122"/>
-                <a:cs typeface="Microsoft JhengHei" pitchFamily="34" charset="-120"/>
+                <a:latin typeface="Hiragino Sans" pitchFamily="34" charset="0"/>
+                <a:ea typeface="Hiragino Sans" pitchFamily="34" charset="-122"/>
+                <a:cs typeface="Hiragino Sans" pitchFamily="34" charset="-120"/>
               </a:rPr>
               <a:t>Lambda ETL</a:t>
             </a:r>
@@ -30724,9 +30702,9 @@
                 <a:solidFill>
                   <a:srgbClr val="C7D6E4"/>
                 </a:solidFill>
-                <a:latin typeface="Microsoft JhengHei" pitchFamily="34" charset="0"/>
-                <a:ea typeface="Microsoft JhengHei" pitchFamily="34" charset="-122"/>
-                <a:cs typeface="Microsoft JhengHei" pitchFamily="34" charset="-120"/>
+                <a:latin typeface="Hiragino Sans" pitchFamily="34" charset="0"/>
+                <a:ea typeface="Hiragino Sans" pitchFamily="34" charset="-122"/>
+                <a:cs typeface="Hiragino Sans" pitchFamily="34" charset="-120"/>
               </a:rPr>
               <a:t>ISO 19030 換算</a:t>
             </a:r>
@@ -30848,9 +30826,9 @@
                 <a:solidFill>
                   <a:srgbClr val="0A2540"/>
                 </a:solidFill>
-                <a:latin typeface="Microsoft JhengHei" pitchFamily="34" charset="0"/>
-                <a:ea typeface="Microsoft JhengHei" pitchFamily="34" charset="-122"/>
-                <a:cs typeface="Microsoft JhengHei" pitchFamily="34" charset="-120"/>
+                <a:latin typeface="Hiragino Sans" pitchFamily="34" charset="0"/>
+                <a:ea typeface="Hiragino Sans" pitchFamily="34" charset="-122"/>
+                <a:cs typeface="Hiragino Sans" pitchFamily="34" charset="-120"/>
               </a:rPr>
               <a:t>SQL</a:t>
             </a:r>
@@ -30890,9 +30868,9 @@
                 <a:solidFill>
                   <a:srgbClr val="FFFFFF"/>
                 </a:solidFill>
-                <a:latin typeface="Microsoft JhengHei" pitchFamily="34" charset="0"/>
-                <a:ea typeface="Microsoft JhengHei" pitchFamily="34" charset="-122"/>
-                <a:cs typeface="Microsoft JhengHei" pitchFamily="34" charset="-120"/>
+                <a:latin typeface="Hiragino Sans" pitchFamily="34" charset="0"/>
+                <a:ea typeface="Hiragino Sans" pitchFamily="34" charset="-122"/>
+                <a:cs typeface="Hiragino Sans" pitchFamily="34" charset="-120"/>
               </a:rPr>
               <a:t>Athena /</a:t>
             </a:r>
@@ -30910,9 +30888,9 @@
                 <a:solidFill>
                   <a:srgbClr val="FFFFFF"/>
                 </a:solidFill>
-                <a:latin typeface="Microsoft JhengHei" pitchFamily="34" charset="0"/>
-                <a:ea typeface="Microsoft JhengHei" pitchFamily="34" charset="-122"/>
-                <a:cs typeface="Microsoft JhengHei" pitchFamily="34" charset="-120"/>
+                <a:latin typeface="Hiragino Sans" pitchFamily="34" charset="0"/>
+                <a:ea typeface="Hiragino Sans" pitchFamily="34" charset="-122"/>
+                <a:cs typeface="Hiragino Sans" pitchFamily="34" charset="-120"/>
               </a:rPr>
               <a:t>Timestream</a:t>
             </a:r>
@@ -30952,9 +30930,9 @@
                 <a:solidFill>
                   <a:srgbClr val="C7D6E4"/>
                 </a:solidFill>
-                <a:latin typeface="Microsoft JhengHei" pitchFamily="34" charset="0"/>
-                <a:ea typeface="Microsoft JhengHei" pitchFamily="34" charset="-122"/>
-                <a:cs typeface="Microsoft JhengHei" pitchFamily="34" charset="-120"/>
+                <a:latin typeface="Hiragino Sans" pitchFamily="34" charset="0"/>
+                <a:ea typeface="Hiragino Sans" pitchFamily="34" charset="-122"/>
+                <a:cs typeface="Hiragino Sans" pitchFamily="34" charset="-120"/>
               </a:rPr>
               <a:t>SQL / 時序</a:t>
             </a:r>
@@ -31076,9 +31054,9 @@
                 <a:solidFill>
                   <a:srgbClr val="FFFFFF"/>
                 </a:solidFill>
-                <a:latin typeface="Microsoft JhengHei" pitchFamily="34" charset="0"/>
-                <a:ea typeface="Microsoft JhengHei" pitchFamily="34" charset="-122"/>
-                <a:cs typeface="Microsoft JhengHei" pitchFamily="34" charset="-120"/>
+                <a:latin typeface="Hiragino Sans" pitchFamily="34" charset="0"/>
+                <a:ea typeface="Hiragino Sans" pitchFamily="34" charset="-122"/>
+                <a:cs typeface="Hiragino Sans" pitchFamily="34" charset="-120"/>
               </a:rPr>
               <a:t>APP</a:t>
             </a:r>
@@ -31118,9 +31096,9 @@
                 <a:solidFill>
                   <a:srgbClr val="FFFFFF"/>
                 </a:solidFill>
-                <a:latin typeface="Microsoft JhengHei" pitchFamily="34" charset="0"/>
-                <a:ea typeface="Microsoft JhengHei" pitchFamily="34" charset="-122"/>
-                <a:cs typeface="Microsoft JhengHei" pitchFamily="34" charset="-120"/>
+                <a:latin typeface="Hiragino Sans" pitchFamily="34" charset="0"/>
+                <a:ea typeface="Hiragino Sans" pitchFamily="34" charset="-122"/>
+                <a:cs typeface="Hiragino Sans" pitchFamily="34" charset="-120"/>
               </a:rPr>
               <a:t>Spring</a:t>
             </a:r>
@@ -31138,9 +31116,9 @@
                 <a:solidFill>
                   <a:srgbClr val="FFFFFF"/>
                 </a:solidFill>
-                <a:latin typeface="Microsoft JhengHei" pitchFamily="34" charset="0"/>
-                <a:ea typeface="Microsoft JhengHei" pitchFamily="34" charset="-122"/>
-                <a:cs typeface="Microsoft JhengHei" pitchFamily="34" charset="-120"/>
+                <a:latin typeface="Hiragino Sans" pitchFamily="34" charset="0"/>
+                <a:ea typeface="Hiragino Sans" pitchFamily="34" charset="-122"/>
+                <a:cs typeface="Hiragino Sans" pitchFamily="34" charset="-120"/>
               </a:rPr>
               <a:t>Boot App</a:t>
             </a:r>
@@ -31180,9 +31158,9 @@
                 <a:solidFill>
                   <a:srgbClr val="C7D6E4"/>
                 </a:solidFill>
-                <a:latin typeface="Microsoft JhengHei" pitchFamily="34" charset="0"/>
-                <a:ea typeface="Microsoft JhengHei" pitchFamily="34" charset="-122"/>
-                <a:cs typeface="Microsoft JhengHei" pitchFamily="34" charset="-120"/>
+                <a:latin typeface="Hiragino Sans" pitchFamily="34" charset="0"/>
+                <a:ea typeface="Hiragino Sans" pitchFamily="34" charset="-122"/>
+                <a:cs typeface="Hiragino Sans" pitchFamily="34" charset="-120"/>
               </a:rPr>
               <a:t>決策看板</a:t>
             </a:r>
@@ -31304,9 +31282,9 @@
                 <a:solidFill>
                   <a:srgbClr val="0A2540"/>
                 </a:solidFill>
-                <a:latin typeface="Microsoft JhengHei" pitchFamily="34" charset="0"/>
-                <a:ea typeface="Microsoft JhengHei" pitchFamily="34" charset="-122"/>
-                <a:cs typeface="Microsoft JhengHei" pitchFamily="34" charset="-120"/>
+                <a:latin typeface="Hiragino Sans" pitchFamily="34" charset="0"/>
+                <a:ea typeface="Hiragino Sans" pitchFamily="34" charset="-122"/>
+                <a:cs typeface="Hiragino Sans" pitchFamily="34" charset="-120"/>
               </a:rPr>
               <a:t>BI</a:t>
             </a:r>
@@ -31346,9 +31324,9 @@
                 <a:solidFill>
                   <a:srgbClr val="FFFFFF"/>
                 </a:solidFill>
-                <a:latin typeface="Microsoft JhengHei" pitchFamily="34" charset="0"/>
-                <a:ea typeface="Microsoft JhengHei" pitchFamily="34" charset="-122"/>
-                <a:cs typeface="Microsoft JhengHei" pitchFamily="34" charset="-120"/>
+                <a:latin typeface="Hiragino Sans" pitchFamily="34" charset="0"/>
+                <a:ea typeface="Hiragino Sans" pitchFamily="34" charset="-122"/>
+                <a:cs typeface="Hiragino Sans" pitchFamily="34" charset="-120"/>
               </a:rPr>
               <a:t>QuickSight</a:t>
             </a:r>
@@ -31388,9 +31366,9 @@
                 <a:solidFill>
                   <a:srgbClr val="C7D6E4"/>
                 </a:solidFill>
-                <a:latin typeface="Microsoft JhengHei" pitchFamily="34" charset="0"/>
-                <a:ea typeface="Microsoft JhengHei" pitchFamily="34" charset="-122"/>
-                <a:cs typeface="Microsoft JhengHei" pitchFamily="34" charset="-120"/>
+                <a:latin typeface="Hiragino Sans" pitchFamily="34" charset="0"/>
+                <a:ea typeface="Hiragino Sans" pitchFamily="34" charset="-122"/>
+                <a:cs typeface="Hiragino Sans" pitchFamily="34" charset="-120"/>
               </a:rPr>
               <a:t>自助 BI</a:t>
             </a:r>
@@ -31512,9 +31490,9 @@
                 <a:solidFill>
                   <a:srgbClr val="FFFFFF"/>
                 </a:solidFill>
-                <a:latin typeface="Microsoft JhengHei" pitchFamily="34" charset="0"/>
-                <a:ea typeface="Microsoft JhengHei" pitchFamily="34" charset="-122"/>
-                <a:cs typeface="Microsoft JhengHei" pitchFamily="34" charset="-120"/>
+                <a:latin typeface="Hiragino Sans" pitchFamily="34" charset="0"/>
+                <a:ea typeface="Hiragino Sans" pitchFamily="34" charset="-122"/>
+                <a:cs typeface="Hiragino Sans" pitchFamily="34" charset="-120"/>
               </a:rPr>
               <a:t>ML</a:t>
             </a:r>
@@ -31554,9 +31532,9 @@
                 <a:solidFill>
                   <a:srgbClr val="FFFFFF"/>
                 </a:solidFill>
-                <a:latin typeface="Microsoft JhengHei" pitchFamily="34" charset="0"/>
-                <a:ea typeface="Microsoft JhengHei" pitchFamily="34" charset="-122"/>
-                <a:cs typeface="Microsoft JhengHei" pitchFamily="34" charset="-120"/>
+                <a:latin typeface="Hiragino Sans" pitchFamily="34" charset="0"/>
+                <a:ea typeface="Hiragino Sans" pitchFamily="34" charset="-122"/>
+                <a:cs typeface="Hiragino Sans" pitchFamily="34" charset="-120"/>
               </a:rPr>
               <a:t>Bedrock /</a:t>
             </a:r>
@@ -31574,9 +31552,9 @@
                 <a:solidFill>
                   <a:srgbClr val="FFFFFF"/>
                 </a:solidFill>
-                <a:latin typeface="Microsoft JhengHei" pitchFamily="34" charset="0"/>
-                <a:ea typeface="Microsoft JhengHei" pitchFamily="34" charset="-122"/>
-                <a:cs typeface="Microsoft JhengHei" pitchFamily="34" charset="-120"/>
+                <a:latin typeface="Hiragino Sans" pitchFamily="34" charset="0"/>
+                <a:ea typeface="Hiragino Sans" pitchFamily="34" charset="-122"/>
+                <a:cs typeface="Hiragino Sans" pitchFamily="34" charset="-120"/>
               </a:rPr>
               <a:t>SageMaker</a:t>
             </a:r>
@@ -31616,9 +31594,9 @@
                 <a:solidFill>
                   <a:srgbClr val="C7D6E4"/>
                 </a:solidFill>
-                <a:latin typeface="Microsoft JhengHei" pitchFamily="34" charset="0"/>
-                <a:ea typeface="Microsoft JhengHei" pitchFamily="34" charset="-122"/>
-                <a:cs typeface="Microsoft JhengHei" pitchFamily="34" charset="-120"/>
+                <a:latin typeface="Hiragino Sans" pitchFamily="34" charset="0"/>
+                <a:ea typeface="Hiragino Sans" pitchFamily="34" charset="-122"/>
+                <a:cs typeface="Hiragino Sans" pitchFamily="34" charset="-120"/>
               </a:rPr>
               <a:t>簡報 + 預測</a:t>
             </a:r>
@@ -31740,9 +31718,9 @@
                 <a:solidFill>
                   <a:srgbClr val="FFFFFF"/>
                 </a:solidFill>
-                <a:latin typeface="Microsoft JhengHei" pitchFamily="34" charset="0"/>
-                <a:ea typeface="Microsoft JhengHei" pitchFamily="34" charset="-122"/>
-                <a:cs typeface="Microsoft JhengHei" pitchFamily="34" charset="-120"/>
+                <a:latin typeface="Hiragino Sans" pitchFamily="34" charset="0"/>
+                <a:ea typeface="Hiragino Sans" pitchFamily="34" charset="-122"/>
+                <a:cs typeface="Hiragino Sans" pitchFamily="34" charset="-120"/>
               </a:rPr>
               <a:t>IoT</a:t>
             </a:r>
@@ -31782,9 +31760,9 @@
                 <a:solidFill>
                   <a:srgbClr val="FFFFFF"/>
                 </a:solidFill>
-                <a:latin typeface="Microsoft JhengHei" pitchFamily="34" charset="0"/>
-                <a:ea typeface="Microsoft JhengHei" pitchFamily="34" charset="-122"/>
-                <a:cs typeface="Microsoft JhengHei" pitchFamily="34" charset="-120"/>
+                <a:latin typeface="Hiragino Sans" pitchFamily="34" charset="0"/>
+                <a:ea typeface="Hiragino Sans" pitchFamily="34" charset="-122"/>
+                <a:cs typeface="Hiragino Sans" pitchFamily="34" charset="-120"/>
               </a:rPr>
               <a:t>IoT Core</a:t>
             </a:r>
@@ -31824,9 +31802,9 @@
                 <a:solidFill>
                   <a:srgbClr val="C7D6E4"/>
                 </a:solidFill>
-                <a:latin typeface="Microsoft JhengHei" pitchFamily="34" charset="0"/>
-                <a:ea typeface="Microsoft JhengHei" pitchFamily="34" charset="-122"/>
-                <a:cs typeface="Microsoft JhengHei" pitchFamily="34" charset="-120"/>
+                <a:latin typeface="Hiragino Sans" pitchFamily="34" charset="0"/>
+                <a:ea typeface="Hiragino Sans" pitchFamily="34" charset="-122"/>
+                <a:cs typeface="Hiragino Sans" pitchFamily="34" charset="-120"/>
               </a:rPr>
               <a:t>未來遙測</a:t>
             </a:r>
@@ -31941,9 +31919,9 @@
                 <a:solidFill>
                   <a:srgbClr val="FFFFFF"/>
                 </a:solidFill>
-                <a:latin typeface="Microsoft JhengHei" pitchFamily="34" charset="0"/>
-                <a:ea typeface="Microsoft JhengHei" pitchFamily="34" charset="-122"/>
-                <a:cs typeface="Microsoft JhengHei" pitchFamily="34" charset="-120"/>
+                <a:latin typeface="Hiragino Sans" pitchFamily="34" charset="0"/>
+                <a:ea typeface="Hiragino Sans" pitchFamily="34" charset="-122"/>
+                <a:cs typeface="Hiragino Sans" pitchFamily="34" charset="-120"/>
               </a:rPr>
               <a:t>● 優勢</a:t>
             </a:r>
@@ -31987,9 +31965,9 @@
                 <a:solidFill>
                   <a:srgbClr val="C7D6E4"/>
                 </a:solidFill>
-                <a:latin typeface="Microsoft JhengHei" pitchFamily="34" charset="0"/>
-                <a:ea typeface="Microsoft JhengHei" pitchFamily="34" charset="-122"/>
-                <a:cs typeface="Microsoft JhengHei" pitchFamily="34" charset="-120"/>
+                <a:latin typeface="Hiragino Sans" pitchFamily="34" charset="0"/>
+                <a:ea typeface="Hiragino Sans" pitchFamily="34" charset="-122"/>
+                <a:cs typeface="Hiragino Sans" pitchFamily="34" charset="-120"/>
               </a:rPr>
               <a:t>最完整企業級藍圖，命中『企業資料應用說明』與 15→97 艘擴展敘事</a:t>
             </a:r>
@@ -32011,9 +31989,9 @@
                 <a:solidFill>
                   <a:srgbClr val="C7D6E4"/>
                 </a:solidFill>
-                <a:latin typeface="Microsoft JhengHei" pitchFamily="34" charset="0"/>
-                <a:ea typeface="Microsoft JhengHei" pitchFamily="34" charset="-122"/>
-                <a:cs typeface="Microsoft JhengHei" pitchFamily="34" charset="-120"/>
+                <a:latin typeface="Hiragino Sans" pitchFamily="34" charset="0"/>
+                <a:ea typeface="Hiragino Sans" pitchFamily="34" charset="-122"/>
+                <a:cs typeface="Hiragino Sans" pitchFamily="34" charset="-120"/>
               </a:rPr>
               <a:t>資料驅動 + BI 自助分析 + 預測 + 即時遙測，商用與願景分最高</a:t>
             </a:r>
@@ -32035,9 +32013,9 @@
                 <a:solidFill>
                   <a:srgbClr val="C7D6E4"/>
                 </a:solidFill>
-                <a:latin typeface="Microsoft JhengHei" pitchFamily="34" charset="0"/>
-                <a:ea typeface="Microsoft JhengHei" pitchFamily="34" charset="-122"/>
-                <a:cs typeface="Microsoft JhengHei" pitchFamily="34" charset="-120"/>
+                <a:latin typeface="Hiragino Sans" pitchFamily="34" charset="0"/>
+                <a:ea typeface="Hiragino Sans" pitchFamily="34" charset="-122"/>
+                <a:cs typeface="Hiragino Sans" pitchFamily="34" charset="-120"/>
               </a:rPr>
               <a:t>S3 單一資料源、分層清晰，符合資料治理與封存要求</a:t>
             </a:r>
@@ -32059,9 +32037,9 @@
                 <a:solidFill>
                   <a:srgbClr val="C7D6E4"/>
                 </a:solidFill>
-                <a:latin typeface="Microsoft JhengHei" pitchFamily="34" charset="0"/>
-                <a:ea typeface="Microsoft JhengHei" pitchFamily="34" charset="-122"/>
-                <a:cs typeface="Microsoft JhengHei" pitchFamily="34" charset="-120"/>
+                <a:latin typeface="Hiragino Sans" pitchFamily="34" charset="0"/>
+                <a:ea typeface="Hiragino Sans" pitchFamily="34" charset="-122"/>
+                <a:cs typeface="Hiragino Sans" pitchFamily="34" charset="-120"/>
               </a:rPr>
               <a:t>Athena/Timestream/QuickSight 全託管，長期可營運</a:t>
             </a:r>
@@ -32176,9 +32154,9 @@
                 <a:solidFill>
                   <a:srgbClr val="FFFFFF"/>
                 </a:solidFill>
-                <a:latin typeface="Microsoft JhengHei" pitchFamily="34" charset="0"/>
-                <a:ea typeface="Microsoft JhengHei" pitchFamily="34" charset="-122"/>
-                <a:cs typeface="Microsoft JhengHei" pitchFamily="34" charset="-120"/>
+                <a:latin typeface="Hiragino Sans" pitchFamily="34" charset="0"/>
+                <a:ea typeface="Hiragino Sans" pitchFamily="34" charset="-122"/>
+                <a:cs typeface="Hiragino Sans" pitchFamily="34" charset="-120"/>
               </a:rPr>
               <a:t>▲ 取捨 / 風險</a:t>
             </a:r>
@@ -32222,9 +32200,9 @@
                 <a:solidFill>
                   <a:srgbClr val="C7D6E4"/>
                 </a:solidFill>
-                <a:latin typeface="Microsoft JhengHei" pitchFamily="34" charset="0"/>
-                <a:ea typeface="Microsoft JhengHei" pitchFamily="34" charset="-122"/>
-                <a:cs typeface="Microsoft JhengHei" pitchFamily="34" charset="-120"/>
+                <a:latin typeface="Hiragino Sans" pitchFamily="34" charset="0"/>
+                <a:ea typeface="Hiragino Sans" pitchFamily="34" charset="-122"/>
+                <a:cs typeface="Hiragino Sans" pitchFamily="34" charset="-120"/>
               </a:rPr>
               <a:t>元件最多、整合最重，3 天內不可能全做完，只能藍圖 + 局部 PoC</a:t>
             </a:r>
@@ -32246,9 +32224,9 @@
                 <a:solidFill>
                   <a:srgbClr val="C7D6E4"/>
                 </a:solidFill>
-                <a:latin typeface="Microsoft JhengHei" pitchFamily="34" charset="0"/>
-                <a:ea typeface="Microsoft JhengHei" pitchFamily="34" charset="-122"/>
-                <a:cs typeface="Microsoft JhengHei" pitchFamily="34" charset="-120"/>
+                <a:latin typeface="Hiragino Sans" pitchFamily="34" charset="0"/>
+                <a:ea typeface="Hiragino Sans" pitchFamily="34" charset="-122"/>
+                <a:cs typeface="Hiragino Sans" pitchFamily="34" charset="-120"/>
               </a:rPr>
               <a:t>SageMaker / IoT Core 屬 stretch，現場跑真流程風險高</a:t>
             </a:r>
@@ -32270,9 +32248,9 @@
                 <a:solidFill>
                   <a:srgbClr val="C7D6E4"/>
                 </a:solidFill>
-                <a:latin typeface="Microsoft JhengHei" pitchFamily="34" charset="0"/>
-                <a:ea typeface="Microsoft JhengHei" pitchFamily="34" charset="-122"/>
-                <a:cs typeface="Microsoft JhengHei" pitchFamily="34" charset="-120"/>
+                <a:latin typeface="Hiragino Sans" pitchFamily="34" charset="0"/>
+                <a:ea typeface="Hiragino Sans" pitchFamily="34" charset="-122"/>
+                <a:cs typeface="Hiragino Sans" pitchFamily="34" charset="-120"/>
               </a:rPr>
               <a:t>多查詢 / BI 層學習與設定成本高，易在時限內卡住</a:t>
             </a:r>
@@ -32294,9 +32272,9 @@
                 <a:solidFill>
                   <a:srgbClr val="C7D6E4"/>
                 </a:solidFill>
-                <a:latin typeface="Microsoft JhengHei" pitchFamily="34" charset="0"/>
-                <a:ea typeface="Microsoft JhengHei" pitchFamily="34" charset="-122"/>
-                <a:cs typeface="Microsoft JhengHei" pitchFamily="34" charset="-120"/>
+                <a:latin typeface="Hiragino Sans" pitchFamily="34" charset="0"/>
+                <a:ea typeface="Hiragino Sans" pitchFamily="34" charset="-122"/>
+                <a:cs typeface="Hiragino Sans" pitchFamily="34" charset="-120"/>
               </a:rPr>
               <a:t>過度工程對 hackathon 反而稀釋 demo 焦點</a:t>
             </a:r>
@@ -32365,9 +32343,9 @@
                 <a:solidFill>
                   <a:srgbClr val="F4A72B"/>
                 </a:solidFill>
-                <a:latin typeface="Microsoft JhengHei" pitchFamily="34" charset="0"/>
-                <a:ea typeface="Microsoft JhengHei" pitchFamily="34" charset="-122"/>
-                <a:cs typeface="Microsoft JhengHei" pitchFamily="34" charset="-120"/>
+                <a:latin typeface="Hiragino Sans" pitchFamily="34" charset="0"/>
+                <a:ea typeface="Hiragino Sans" pitchFamily="34" charset="-122"/>
+                <a:cs typeface="Hiragino Sans" pitchFamily="34" charset="-120"/>
               </a:rPr>
               <a:t>◆ 何時選　</a:t>
             </a:r>
@@ -32382,9 +32360,9 @@
                 <a:solidFill>
                   <a:srgbClr val="FFFFFF"/>
                 </a:solidFill>
-                <a:latin typeface="Microsoft JhengHei" pitchFamily="34" charset="0"/>
-                <a:ea typeface="Microsoft JhengHei" pitchFamily="34" charset="-122"/>
-                <a:cs typeface="Microsoft JhengHei" pitchFamily="34" charset="-120"/>
+                <a:latin typeface="Hiragino Sans" pitchFamily="34" charset="0"/>
+                <a:ea typeface="Hiragino Sans" pitchFamily="34" charset="-122"/>
+                <a:cs typeface="Hiragino Sans" pitchFamily="34" charset="-120"/>
               </a:rPr>
               <a:t>要在簡報中展示從 hackathon demo 到全艦隊營運平台的完整演進路線圖、拿商用價值與願景分，而非現場實跑時。</a:t>
             </a:r>
@@ -32606,9 +32584,9 @@
                 <a:solidFill>
                   <a:srgbClr val="FFFFFF"/>
                 </a:solidFill>
-                <a:latin typeface="Microsoft JhengHei" pitchFamily="34" charset="0"/>
-                <a:ea typeface="Microsoft JhengHei" pitchFamily="34" charset="-122"/>
-                <a:cs typeface="Microsoft JhengHei" pitchFamily="34" charset="-120"/>
+                <a:latin typeface="Hiragino Sans" pitchFamily="34" charset="0"/>
+                <a:ea typeface="Hiragino Sans" pitchFamily="34" charset="-122"/>
+                <a:cs typeface="Hiragino Sans" pitchFamily="34" charset="-120"/>
               </a:rPr>
               <a:t>09</a:t>
             </a:r>
@@ -32620,9 +32598,9 @@
                 <a:solidFill>
                   <a:srgbClr val="8FA8BD"/>
                 </a:solidFill>
-                <a:latin typeface="Microsoft JhengHei" pitchFamily="34" charset="0"/>
-                <a:ea typeface="Microsoft JhengHei" pitchFamily="34" charset="-122"/>
-                <a:cs typeface="Microsoft JhengHei" pitchFamily="34" charset="-120"/>
+                <a:latin typeface="Hiragino Sans" pitchFamily="34" charset="0"/>
+                <a:ea typeface="Hiragino Sans" pitchFamily="34" charset="-122"/>
+                <a:cs typeface="Hiragino Sans" pitchFamily="34" charset="-120"/>
               </a:rPr>
               <a:t>  /  15</a:t>
             </a:r>
@@ -32659,9 +32637,9 @@
                 <a:solidFill>
                   <a:srgbClr val="F4A72B"/>
                 </a:solidFill>
-                <a:latin typeface="Microsoft JhengHei" pitchFamily="34" charset="0"/>
-                <a:ea typeface="Microsoft JhengHei" pitchFamily="34" charset="-122"/>
-                <a:cs typeface="Microsoft JhengHei" pitchFamily="34" charset="-120"/>
+                <a:latin typeface="Hiragino Sans" pitchFamily="34" charset="0"/>
+                <a:ea typeface="Hiragino Sans" pitchFamily="34" charset="-122"/>
+                <a:cs typeface="Hiragino Sans" pitchFamily="34" charset="-120"/>
               </a:rPr>
               <a:t>SECURITY · 縱深防禦</a:t>
             </a:r>
@@ -32698,9 +32676,9 @@
                 <a:solidFill>
                   <a:srgbClr val="FFFFFF"/>
                 </a:solidFill>
-                <a:latin typeface="Microsoft JhengHei" pitchFamily="34" charset="0"/>
-                <a:ea typeface="Microsoft JhengHei" pitchFamily="34" charset="-122"/>
-                <a:cs typeface="Microsoft JhengHei" pitchFamily="34" charset="-120"/>
+                <a:latin typeface="Hiragino Sans" pitchFamily="34" charset="0"/>
+                <a:ea typeface="Hiragino Sans" pitchFamily="34" charset="-122"/>
+                <a:cs typeface="Hiragino Sans" pitchFamily="34" charset="-120"/>
               </a:rPr>
               <a:t>資安：VPC 隔離 + GuardDuty</a:t>
             </a:r>
@@ -32760,13 +32738,13 @@
               <a:buNone/>
             </a:pPr>
             <a:r>
-              <a:rPr lang="en-US" sz="1250" i="1" dirty="0">
+              <a:rPr lang="en-US" sz="1250" dirty="0">
                 <a:solidFill>
                   <a:srgbClr val="C7D6E4"/>
                 </a:solidFill>
-                <a:latin typeface="Microsoft JhengHei" pitchFamily="34" charset="0"/>
-                <a:ea typeface="Microsoft JhengHei" pitchFamily="34" charset="-122"/>
-                <a:cs typeface="Microsoft JhengHei" pitchFamily="34" charset="-120"/>
+                <a:latin typeface="Hiragino Sans" pitchFamily="34" charset="0"/>
+                <a:ea typeface="Hiragino Sans" pitchFamily="34" charset="-122"/>
+                <a:cs typeface="Hiragino Sans" pitchFamily="34" charset="-120"/>
               </a:rPr>
               <a:t>縱深防禦 (defense in depth)：邊緣擋量、VPC 最小暴露、帳號級偵測、全程加密與稽核 — 逐層收斂攻擊面，任一層被突破，下一層仍在。</a:t>
             </a:r>
@@ -32832,9 +32810,9 @@
                 <a:solidFill>
                   <a:srgbClr val="2A9D8F"/>
                 </a:solidFill>
-                <a:latin typeface="Microsoft JhengHei" pitchFamily="34" charset="0"/>
-                <a:ea typeface="Microsoft JhengHei" pitchFamily="34" charset="-122"/>
-                <a:cs typeface="Microsoft JhengHei" pitchFamily="34" charset="-120"/>
+                <a:latin typeface="Hiragino Sans" pitchFamily="34" charset="0"/>
+                <a:ea typeface="Hiragino Sans" pitchFamily="34" charset="-122"/>
+                <a:cs typeface="Hiragino Sans" pitchFamily="34" charset="-120"/>
               </a:rPr>
               <a:t>① 邊緣</a:t>
             </a:r>
@@ -32871,9 +32849,9 @@
                 <a:solidFill>
                   <a:srgbClr val="C7D6E4"/>
                 </a:solidFill>
-                <a:latin typeface="Microsoft JhengHei" pitchFamily="34" charset="0"/>
-                <a:ea typeface="Microsoft JhengHei" pitchFamily="34" charset="-122"/>
-                <a:cs typeface="Microsoft JhengHei" pitchFamily="34" charset="-120"/>
+                <a:latin typeface="Hiragino Sans" pitchFamily="34" charset="0"/>
+                <a:ea typeface="Hiragino Sans" pitchFamily="34" charset="-122"/>
+                <a:cs typeface="Hiragino Sans" pitchFamily="34" charset="-120"/>
               </a:rPr>
               <a:t>擋量 · L7 過濾</a:t>
             </a:r>
@@ -32971,9 +32949,9 @@
                 <a:solidFill>
                   <a:srgbClr val="FFFFFF"/>
                 </a:solidFill>
-                <a:latin typeface="Microsoft JhengHei" pitchFamily="34" charset="0"/>
-                <a:ea typeface="Microsoft JhengHei" pitchFamily="34" charset="-122"/>
-                <a:cs typeface="Microsoft JhengHei" pitchFamily="34" charset="-120"/>
+                <a:latin typeface="Hiragino Sans" pitchFamily="34" charset="0"/>
+                <a:ea typeface="Hiragino Sans" pitchFamily="34" charset="-122"/>
+                <a:cs typeface="Hiragino Sans" pitchFamily="34" charset="-120"/>
               </a:rPr>
               <a:t>SLD</a:t>
             </a:r>
@@ -33013,9 +32991,9 @@
                 <a:solidFill>
                   <a:srgbClr val="FFFFFF"/>
                 </a:solidFill>
-                <a:latin typeface="Microsoft JhengHei" pitchFamily="34" charset="0"/>
-                <a:ea typeface="Microsoft JhengHei" pitchFamily="34" charset="-122"/>
-                <a:cs typeface="Microsoft JhengHei" pitchFamily="34" charset="-120"/>
+                <a:latin typeface="Hiragino Sans" pitchFamily="34" charset="0"/>
+                <a:ea typeface="Hiragino Sans" pitchFamily="34" charset="-122"/>
+                <a:cs typeface="Hiragino Sans" pitchFamily="34" charset="-120"/>
               </a:rPr>
               <a:t>AWS Shield</a:t>
             </a:r>
@@ -33055,9 +33033,9 @@
                 <a:solidFill>
                   <a:srgbClr val="C7D6E4"/>
                 </a:solidFill>
-                <a:latin typeface="Microsoft JhengHei" pitchFamily="34" charset="0"/>
-                <a:ea typeface="Microsoft JhengHei" pitchFamily="34" charset="-122"/>
-                <a:cs typeface="Microsoft JhengHei" pitchFamily="34" charset="-120"/>
+                <a:latin typeface="Hiragino Sans" pitchFamily="34" charset="0"/>
+                <a:ea typeface="Hiragino Sans" pitchFamily="34" charset="-122"/>
+                <a:cs typeface="Hiragino Sans" pitchFamily="34" charset="-120"/>
               </a:rPr>
               <a:t>DDoS 防護</a:t>
             </a:r>
@@ -33155,9 +33133,9 @@
                 <a:solidFill>
                   <a:srgbClr val="FFFFFF"/>
                 </a:solidFill>
-                <a:latin typeface="Microsoft JhengHei" pitchFamily="34" charset="0"/>
-                <a:ea typeface="Microsoft JhengHei" pitchFamily="34" charset="-122"/>
-                <a:cs typeface="Microsoft JhengHei" pitchFamily="34" charset="-120"/>
+                <a:latin typeface="Hiragino Sans" pitchFamily="34" charset="0"/>
+                <a:ea typeface="Hiragino Sans" pitchFamily="34" charset="-122"/>
+                <a:cs typeface="Hiragino Sans" pitchFamily="34" charset="-120"/>
               </a:rPr>
               <a:t>WAF</a:t>
             </a:r>
@@ -33197,9 +33175,9 @@
                 <a:solidFill>
                   <a:srgbClr val="FFFFFF"/>
                 </a:solidFill>
-                <a:latin typeface="Microsoft JhengHei" pitchFamily="34" charset="0"/>
-                <a:ea typeface="Microsoft JhengHei" pitchFamily="34" charset="-122"/>
-                <a:cs typeface="Microsoft JhengHei" pitchFamily="34" charset="-120"/>
+                <a:latin typeface="Hiragino Sans" pitchFamily="34" charset="0"/>
+                <a:ea typeface="Hiragino Sans" pitchFamily="34" charset="-122"/>
+                <a:cs typeface="Hiragino Sans" pitchFamily="34" charset="-120"/>
               </a:rPr>
               <a:t>AWS WAF</a:t>
             </a:r>
@@ -33239,9 +33217,9 @@
                 <a:solidFill>
                   <a:srgbClr val="C7D6E4"/>
                 </a:solidFill>
-                <a:latin typeface="Microsoft JhengHei" pitchFamily="34" charset="0"/>
-                <a:ea typeface="Microsoft JhengHei" pitchFamily="34" charset="-122"/>
-                <a:cs typeface="Microsoft JhengHei" pitchFamily="34" charset="-120"/>
+                <a:latin typeface="Hiragino Sans" pitchFamily="34" charset="0"/>
+                <a:ea typeface="Hiragino Sans" pitchFamily="34" charset="-122"/>
+                <a:cs typeface="Hiragino Sans" pitchFamily="34" charset="-120"/>
               </a:rPr>
               <a:t>L7 規則過濾</a:t>
             </a:r>
@@ -33307,9 +33285,9 @@
                 <a:solidFill>
                   <a:srgbClr val="2A9D8F"/>
                 </a:solidFill>
-                <a:latin typeface="Microsoft JhengHei" pitchFamily="34" charset="0"/>
-                <a:ea typeface="Microsoft JhengHei" pitchFamily="34" charset="-122"/>
-                <a:cs typeface="Microsoft JhengHei" pitchFamily="34" charset="-120"/>
+                <a:latin typeface="Hiragino Sans" pitchFamily="34" charset="0"/>
+                <a:ea typeface="Hiragino Sans" pitchFamily="34" charset="-122"/>
+                <a:cs typeface="Hiragino Sans" pitchFamily="34" charset="-120"/>
               </a:rPr>
               <a:t>② VPC 隔離</a:t>
             </a:r>
@@ -33346,9 +33324,9 @@
                 <a:solidFill>
                   <a:srgbClr val="C7D6E4"/>
                 </a:solidFill>
-                <a:latin typeface="Microsoft JhengHei" pitchFamily="34" charset="0"/>
-                <a:ea typeface="Microsoft JhengHei" pitchFamily="34" charset="-122"/>
-                <a:cs typeface="Microsoft JhengHei" pitchFamily="34" charset="-120"/>
+                <a:latin typeface="Hiragino Sans" pitchFamily="34" charset="0"/>
+                <a:ea typeface="Hiragino Sans" pitchFamily="34" charset="-122"/>
+                <a:cs typeface="Hiragino Sans" pitchFamily="34" charset="-120"/>
               </a:rPr>
               <a:t>最小暴露面</a:t>
             </a:r>
@@ -33446,9 +33424,9 @@
                 <a:solidFill>
                   <a:srgbClr val="FFFFFF"/>
                 </a:solidFill>
-                <a:latin typeface="Microsoft JhengHei" pitchFamily="34" charset="0"/>
-                <a:ea typeface="Microsoft JhengHei" pitchFamily="34" charset="-122"/>
-                <a:cs typeface="Microsoft JhengHei" pitchFamily="34" charset="-120"/>
+                <a:latin typeface="Hiragino Sans" pitchFamily="34" charset="0"/>
+                <a:ea typeface="Hiragino Sans" pitchFamily="34" charset="-122"/>
+                <a:cs typeface="Hiragino Sans" pitchFamily="34" charset="-120"/>
               </a:rPr>
               <a:t>ALB</a:t>
             </a:r>
@@ -33488,9 +33466,9 @@
                 <a:solidFill>
                   <a:srgbClr val="FFFFFF"/>
                 </a:solidFill>
-                <a:latin typeface="Microsoft JhengHei" pitchFamily="34" charset="0"/>
-                <a:ea typeface="Microsoft JhengHei" pitchFamily="34" charset="-122"/>
-                <a:cs typeface="Microsoft JhengHei" pitchFamily="34" charset="-120"/>
+                <a:latin typeface="Hiragino Sans" pitchFamily="34" charset="0"/>
+                <a:ea typeface="Hiragino Sans" pitchFamily="34" charset="-122"/>
+                <a:cs typeface="Hiragino Sans" pitchFamily="34" charset="-120"/>
               </a:rPr>
               <a:t>公有子網 · ALB</a:t>
             </a:r>
@@ -33530,9 +33508,9 @@
                 <a:solidFill>
                   <a:srgbClr val="C7D6E4"/>
                 </a:solidFill>
-                <a:latin typeface="Microsoft JhengHei" pitchFamily="34" charset="0"/>
-                <a:ea typeface="Microsoft JhengHei" pitchFamily="34" charset="-122"/>
-                <a:cs typeface="Microsoft JhengHei" pitchFamily="34" charset="-120"/>
+                <a:latin typeface="Hiragino Sans" pitchFamily="34" charset="0"/>
+                <a:ea typeface="Hiragino Sans" pitchFamily="34" charset="-122"/>
+                <a:cs typeface="Hiragino Sans" pitchFamily="34" charset="-120"/>
               </a:rPr>
               <a:t>唯一對外入口</a:t>
             </a:r>
@@ -33630,9 +33608,9 @@
                 <a:solidFill>
                   <a:srgbClr val="FFFFFF"/>
                 </a:solidFill>
-                <a:latin typeface="Microsoft JhengHei" pitchFamily="34" charset="0"/>
-                <a:ea typeface="Microsoft JhengHei" pitchFamily="34" charset="-122"/>
-                <a:cs typeface="Microsoft JhengHei" pitchFamily="34" charset="-120"/>
+                <a:latin typeface="Hiragino Sans" pitchFamily="34" charset="0"/>
+                <a:ea typeface="Hiragino Sans" pitchFamily="34" charset="-122"/>
+                <a:cs typeface="Hiragino Sans" pitchFamily="34" charset="-120"/>
               </a:rPr>
               <a:t>ECS</a:t>
             </a:r>
@@ -33672,9 +33650,9 @@
                 <a:solidFill>
                   <a:srgbClr val="FFFFFF"/>
                 </a:solidFill>
-                <a:latin typeface="Microsoft JhengHei" pitchFamily="34" charset="0"/>
-                <a:ea typeface="Microsoft JhengHei" pitchFamily="34" charset="-122"/>
-                <a:cs typeface="Microsoft JhengHei" pitchFamily="34" charset="-120"/>
+                <a:latin typeface="Hiragino Sans" pitchFamily="34" charset="0"/>
+                <a:ea typeface="Hiragino Sans" pitchFamily="34" charset="-122"/>
+                <a:cs typeface="Hiragino Sans" pitchFamily="34" charset="-120"/>
               </a:rPr>
               <a:t>私有子網 · ECS</a:t>
             </a:r>
@@ -33714,9 +33692,9 @@
                 <a:solidFill>
                   <a:srgbClr val="C7D6E4"/>
                 </a:solidFill>
-                <a:latin typeface="Microsoft JhengHei" pitchFamily="34" charset="0"/>
-                <a:ea typeface="Microsoft JhengHei" pitchFamily="34" charset="-122"/>
-                <a:cs typeface="Microsoft JhengHei" pitchFamily="34" charset="-120"/>
+                <a:latin typeface="Hiragino Sans" pitchFamily="34" charset="0"/>
+                <a:ea typeface="Hiragino Sans" pitchFamily="34" charset="-122"/>
+                <a:cs typeface="Hiragino Sans" pitchFamily="34" charset="-120"/>
               </a:rPr>
               <a:t>無公網 IP</a:t>
             </a:r>
@@ -33806,9 +33784,9 @@
                 <a:solidFill>
                   <a:srgbClr val="2A9D8F"/>
                 </a:solidFill>
-                <a:latin typeface="Microsoft JhengHei" pitchFamily="34" charset="0"/>
-                <a:ea typeface="Microsoft JhengHei" pitchFamily="34" charset="-122"/>
-                <a:cs typeface="Microsoft JhengHei" pitchFamily="34" charset="-120"/>
+                <a:latin typeface="Hiragino Sans" pitchFamily="34" charset="0"/>
+                <a:ea typeface="Hiragino Sans" pitchFamily="34" charset="-122"/>
+                <a:cs typeface="Hiragino Sans" pitchFamily="34" charset="-120"/>
               </a:rPr>
               <a:t>③ 帳號偵測</a:t>
             </a:r>
@@ -33845,9 +33823,9 @@
                 <a:solidFill>
                   <a:srgbClr val="C7D6E4"/>
                 </a:solidFill>
-                <a:latin typeface="Microsoft JhengHei" pitchFamily="34" charset="0"/>
-                <a:ea typeface="Microsoft JhengHei" pitchFamily="34" charset="-122"/>
-                <a:cs typeface="Microsoft JhengHei" pitchFamily="34" charset="-120"/>
+                <a:latin typeface="Hiragino Sans" pitchFamily="34" charset="0"/>
+                <a:ea typeface="Hiragino Sans" pitchFamily="34" charset="-122"/>
+                <a:cs typeface="Hiragino Sans" pitchFamily="34" charset="-120"/>
               </a:rPr>
               <a:t>持續監看</a:t>
             </a:r>
@@ -33945,9 +33923,9 @@
                 <a:solidFill>
                   <a:srgbClr val="0A2540"/>
                 </a:solidFill>
-                <a:latin typeface="Microsoft JhengHei" pitchFamily="34" charset="0"/>
-                <a:ea typeface="Microsoft JhengHei" pitchFamily="34" charset="-122"/>
-                <a:cs typeface="Microsoft JhengHei" pitchFamily="34" charset="-120"/>
+                <a:latin typeface="Hiragino Sans" pitchFamily="34" charset="0"/>
+                <a:ea typeface="Hiragino Sans" pitchFamily="34" charset="-122"/>
+                <a:cs typeface="Hiragino Sans" pitchFamily="34" charset="-120"/>
               </a:rPr>
               <a:t>GD</a:t>
             </a:r>
@@ -33987,9 +33965,9 @@
                 <a:solidFill>
                   <a:srgbClr val="FFFFFF"/>
                 </a:solidFill>
-                <a:latin typeface="Microsoft JhengHei" pitchFamily="34" charset="0"/>
-                <a:ea typeface="Microsoft JhengHei" pitchFamily="34" charset="-122"/>
-                <a:cs typeface="Microsoft JhengHei" pitchFamily="34" charset="-120"/>
+                <a:latin typeface="Hiragino Sans" pitchFamily="34" charset="0"/>
+                <a:ea typeface="Hiragino Sans" pitchFamily="34" charset="-122"/>
+                <a:cs typeface="Hiragino Sans" pitchFamily="34" charset="-120"/>
               </a:rPr>
               <a:t>GuardDuty</a:t>
             </a:r>
@@ -34029,9 +34007,9 @@
                 <a:solidFill>
                   <a:srgbClr val="C7D6E4"/>
                 </a:solidFill>
-                <a:latin typeface="Microsoft JhengHei" pitchFamily="34" charset="0"/>
-                <a:ea typeface="Microsoft JhengHei" pitchFamily="34" charset="-122"/>
-                <a:cs typeface="Microsoft JhengHei" pitchFamily="34" charset="-120"/>
+                <a:latin typeface="Hiragino Sans" pitchFamily="34" charset="0"/>
+                <a:ea typeface="Hiragino Sans" pitchFamily="34" charset="-122"/>
+                <a:cs typeface="Hiragino Sans" pitchFamily="34" charset="-120"/>
               </a:rPr>
               <a:t>威脅偵測</a:t>
             </a:r>
@@ -34129,9 +34107,9 @@
                 <a:solidFill>
                   <a:srgbClr val="FFFFFF"/>
                 </a:solidFill>
-                <a:latin typeface="Microsoft JhengHei" pitchFamily="34" charset="0"/>
-                <a:ea typeface="Microsoft JhengHei" pitchFamily="34" charset="-122"/>
-                <a:cs typeface="Microsoft JhengHei" pitchFamily="34" charset="-120"/>
+                <a:latin typeface="Hiragino Sans" pitchFamily="34" charset="0"/>
+                <a:ea typeface="Hiragino Sans" pitchFamily="34" charset="-122"/>
+                <a:cs typeface="Hiragino Sans" pitchFamily="34" charset="-120"/>
               </a:rPr>
               <a:t>CT</a:t>
             </a:r>
@@ -34171,9 +34149,9 @@
                 <a:solidFill>
                   <a:srgbClr val="FFFFFF"/>
                 </a:solidFill>
-                <a:latin typeface="Microsoft JhengHei" pitchFamily="34" charset="0"/>
-                <a:ea typeface="Microsoft JhengHei" pitchFamily="34" charset="-122"/>
-                <a:cs typeface="Microsoft JhengHei" pitchFamily="34" charset="-120"/>
+                <a:latin typeface="Hiragino Sans" pitchFamily="34" charset="0"/>
+                <a:ea typeface="Hiragino Sans" pitchFamily="34" charset="-122"/>
+                <a:cs typeface="Hiragino Sans" pitchFamily="34" charset="-120"/>
               </a:rPr>
               <a:t>CloudTrail</a:t>
             </a:r>
@@ -34213,9 +34191,9 @@
                 <a:solidFill>
                   <a:srgbClr val="C7D6E4"/>
                 </a:solidFill>
-                <a:latin typeface="Microsoft JhengHei" pitchFamily="34" charset="0"/>
-                <a:ea typeface="Microsoft JhengHei" pitchFamily="34" charset="-122"/>
-                <a:cs typeface="Microsoft JhengHei" pitchFamily="34" charset="-120"/>
+                <a:latin typeface="Hiragino Sans" pitchFamily="34" charset="0"/>
+                <a:ea typeface="Hiragino Sans" pitchFamily="34" charset="-122"/>
+                <a:cs typeface="Hiragino Sans" pitchFamily="34" charset="-120"/>
               </a:rPr>
               <a:t>稽核軌跡</a:t>
             </a:r>
@@ -34281,9 +34259,9 @@
                 <a:solidFill>
                   <a:srgbClr val="2A9D8F"/>
                 </a:solidFill>
-                <a:latin typeface="Microsoft JhengHei" pitchFamily="34" charset="0"/>
-                <a:ea typeface="Microsoft JhengHei" pitchFamily="34" charset="-122"/>
-                <a:cs typeface="Microsoft JhengHei" pitchFamily="34" charset="-120"/>
+                <a:latin typeface="Hiragino Sans" pitchFamily="34" charset="0"/>
+                <a:ea typeface="Hiragino Sans" pitchFamily="34" charset="-122"/>
+                <a:cs typeface="Hiragino Sans" pitchFamily="34" charset="-120"/>
               </a:rPr>
               <a:t>④ 機密加密</a:t>
             </a:r>
@@ -34320,9 +34298,9 @@
                 <a:solidFill>
                   <a:srgbClr val="C7D6E4"/>
                 </a:solidFill>
-                <a:latin typeface="Microsoft JhengHei" pitchFamily="34" charset="0"/>
-                <a:ea typeface="Microsoft JhengHei" pitchFamily="34" charset="-122"/>
-                <a:cs typeface="Microsoft JhengHei" pitchFamily="34" charset="-120"/>
+                <a:latin typeface="Hiragino Sans" pitchFamily="34" charset="0"/>
+                <a:ea typeface="Hiragino Sans" pitchFamily="34" charset="-122"/>
+                <a:cs typeface="Hiragino Sans" pitchFamily="34" charset="-120"/>
               </a:rPr>
               <a:t>零信任存取</a:t>
             </a:r>
@@ -34420,9 +34398,9 @@
                 <a:solidFill>
                   <a:srgbClr val="FFFFFF"/>
                 </a:solidFill>
-                <a:latin typeface="Microsoft JhengHei" pitchFamily="34" charset="0"/>
-                <a:ea typeface="Microsoft JhengHei" pitchFamily="34" charset="-122"/>
-                <a:cs typeface="Microsoft JhengHei" pitchFamily="34" charset="-120"/>
+                <a:latin typeface="Hiragino Sans" pitchFamily="34" charset="0"/>
+                <a:ea typeface="Hiragino Sans" pitchFamily="34" charset="-122"/>
+                <a:cs typeface="Hiragino Sans" pitchFamily="34" charset="-120"/>
               </a:rPr>
               <a:t>SM</a:t>
             </a:r>
@@ -34462,9 +34440,9 @@
                 <a:solidFill>
                   <a:srgbClr val="FFFFFF"/>
                 </a:solidFill>
-                <a:latin typeface="Microsoft JhengHei" pitchFamily="34" charset="0"/>
-                <a:ea typeface="Microsoft JhengHei" pitchFamily="34" charset="-122"/>
-                <a:cs typeface="Microsoft JhengHei" pitchFamily="34" charset="-120"/>
+                <a:latin typeface="Hiragino Sans" pitchFamily="34" charset="0"/>
+                <a:ea typeface="Hiragino Sans" pitchFamily="34" charset="-122"/>
+                <a:cs typeface="Hiragino Sans" pitchFamily="34" charset="-120"/>
               </a:rPr>
               <a:t>Secrets Manager</a:t>
             </a:r>
@@ -34504,9 +34482,9 @@
                 <a:solidFill>
                   <a:srgbClr val="C7D6E4"/>
                 </a:solidFill>
-                <a:latin typeface="Microsoft JhengHei" pitchFamily="34" charset="0"/>
-                <a:ea typeface="Microsoft JhengHei" pitchFamily="34" charset="-122"/>
-                <a:cs typeface="Microsoft JhengHei" pitchFamily="34" charset="-120"/>
+                <a:latin typeface="Hiragino Sans" pitchFamily="34" charset="0"/>
+                <a:ea typeface="Hiragino Sans" pitchFamily="34" charset="-122"/>
+                <a:cs typeface="Hiragino Sans" pitchFamily="34" charset="-120"/>
               </a:rPr>
               <a:t>憑證託管</a:t>
             </a:r>
@@ -34604,9 +34582,9 @@
                 <a:solidFill>
                   <a:srgbClr val="FFFFFF"/>
                 </a:solidFill>
-                <a:latin typeface="Microsoft JhengHei" pitchFamily="34" charset="0"/>
-                <a:ea typeface="Microsoft JhengHei" pitchFamily="34" charset="-122"/>
-                <a:cs typeface="Microsoft JhengHei" pitchFamily="34" charset="-120"/>
+                <a:latin typeface="Hiragino Sans" pitchFamily="34" charset="0"/>
+                <a:ea typeface="Hiragino Sans" pitchFamily="34" charset="-122"/>
+                <a:cs typeface="Hiragino Sans" pitchFamily="34" charset="-120"/>
               </a:rPr>
               <a:t>KMS</a:t>
             </a:r>
@@ -34646,9 +34624,9 @@
                 <a:solidFill>
                   <a:srgbClr val="FFFFFF"/>
                 </a:solidFill>
-                <a:latin typeface="Microsoft JhengHei" pitchFamily="34" charset="0"/>
-                <a:ea typeface="Microsoft JhengHei" pitchFamily="34" charset="-122"/>
-                <a:cs typeface="Microsoft JhengHei" pitchFamily="34" charset="-120"/>
+                <a:latin typeface="Hiragino Sans" pitchFamily="34" charset="0"/>
+                <a:ea typeface="Hiragino Sans" pitchFamily="34" charset="-122"/>
+                <a:cs typeface="Hiragino Sans" pitchFamily="34" charset="-120"/>
               </a:rPr>
               <a:t>KMS</a:t>
             </a:r>
@@ -34688,9 +34666,9 @@
                 <a:solidFill>
                   <a:srgbClr val="C7D6E4"/>
                 </a:solidFill>
-                <a:latin typeface="Microsoft JhengHei" pitchFamily="34" charset="0"/>
-                <a:ea typeface="Microsoft JhengHei" pitchFamily="34" charset="-122"/>
-                <a:cs typeface="Microsoft JhengHei" pitchFamily="34" charset="-120"/>
+                <a:latin typeface="Hiragino Sans" pitchFamily="34" charset="0"/>
+                <a:ea typeface="Hiragino Sans" pitchFamily="34" charset="-122"/>
+                <a:cs typeface="Hiragino Sans" pitchFamily="34" charset="-120"/>
               </a:rPr>
               <a:t>金鑰加密</a:t>
             </a:r>
@@ -34788,9 +34766,9 @@
                 <a:solidFill>
                   <a:srgbClr val="FFFFFF"/>
                 </a:solidFill>
-                <a:latin typeface="Microsoft JhengHei" pitchFamily="34" charset="0"/>
-                <a:ea typeface="Microsoft JhengHei" pitchFamily="34" charset="-122"/>
-                <a:cs typeface="Microsoft JhengHei" pitchFamily="34" charset="-120"/>
+                <a:latin typeface="Hiragino Sans" pitchFamily="34" charset="0"/>
+                <a:ea typeface="Hiragino Sans" pitchFamily="34" charset="-122"/>
+                <a:cs typeface="Hiragino Sans" pitchFamily="34" charset="-120"/>
               </a:rPr>
               <a:t>IAM</a:t>
             </a:r>
@@ -34830,9 +34808,9 @@
                 <a:solidFill>
                   <a:srgbClr val="FFFFFF"/>
                 </a:solidFill>
-                <a:latin typeface="Microsoft JhengHei" pitchFamily="34" charset="0"/>
-                <a:ea typeface="Microsoft JhengHei" pitchFamily="34" charset="-122"/>
-                <a:cs typeface="Microsoft JhengHei" pitchFamily="34" charset="-120"/>
+                <a:latin typeface="Hiragino Sans" pitchFamily="34" charset="0"/>
+                <a:ea typeface="Hiragino Sans" pitchFamily="34" charset="-122"/>
+                <a:cs typeface="Hiragino Sans" pitchFamily="34" charset="-120"/>
               </a:rPr>
               <a:t>IAM</a:t>
             </a:r>
@@ -34872,9 +34850,9 @@
                 <a:solidFill>
                   <a:srgbClr val="C7D6E4"/>
                 </a:solidFill>
-                <a:latin typeface="Microsoft JhengHei" pitchFamily="34" charset="0"/>
-                <a:ea typeface="Microsoft JhengHei" pitchFamily="34" charset="-122"/>
-                <a:cs typeface="Microsoft JhengHei" pitchFamily="34" charset="-120"/>
+                <a:latin typeface="Hiragino Sans" pitchFamily="34" charset="0"/>
+                <a:ea typeface="Hiragino Sans" pitchFamily="34" charset="-122"/>
+                <a:cs typeface="Hiragino Sans" pitchFamily="34" charset="-120"/>
               </a:rPr>
               <a:t>最小權限</a:t>
             </a:r>
@@ -34943,9 +34921,9 @@
                 <a:solidFill>
                   <a:srgbClr val="F4A72B"/>
                 </a:solidFill>
-                <a:latin typeface="Microsoft JhengHei" pitchFamily="34" charset="0"/>
-                <a:ea typeface="Microsoft JhengHei" pitchFamily="34" charset="-122"/>
-                <a:cs typeface="Microsoft JhengHei" pitchFamily="34" charset="-120"/>
+                <a:latin typeface="Hiragino Sans" pitchFamily="34" charset="0"/>
+                <a:ea typeface="Hiragino Sans" pitchFamily="34" charset="-122"/>
+                <a:cs typeface="Hiragino Sans" pitchFamily="34" charset="-120"/>
               </a:rPr>
               <a:t>◆ 縱深防禦　</a:t>
             </a:r>
@@ -34960,9 +34938,9 @@
                 <a:solidFill>
                   <a:srgbClr val="FFFFFF"/>
                 </a:solidFill>
-                <a:latin typeface="Microsoft JhengHei" pitchFamily="34" charset="0"/>
-                <a:ea typeface="Microsoft JhengHei" pitchFamily="34" charset="-122"/>
-                <a:cs typeface="Microsoft JhengHei" pitchFamily="34" charset="-120"/>
+                <a:latin typeface="Hiragino Sans" pitchFamily="34" charset="0"/>
+                <a:ea typeface="Hiragino Sans" pitchFamily="34" charset="-122"/>
+                <a:cs typeface="Hiragino Sans" pitchFamily="34" charset="-120"/>
               </a:rPr>
               <a:t>邊緣擋量、VPC 隔離、帳號偵測、加密兜底 — 攻擊者要連過四關；憑證進 Secrets Manager、資料以 KMS 加密、操作全入 CloudTrail，IAM 全程最小權限。</a:t>
             </a:r>

--- a/presentation/fleetmind-aws-architecture.pptx
+++ b/presentation/fleetmind-aws-architecture.pptx
@@ -20026,7 +20026,7 @@
                 <a:ea typeface="Hiragino Sans" pitchFamily="34" charset="-122"/>
                 <a:cs typeface="Hiragino Sans" pitchFamily="34" charset="-120"/>
               </a:rPr>
-              <a:t>Runtime　評審 → ALB → Fargate 回決策看板 + REST（/fleet/summary、/vessels/{id}/decision、/config/threshold…）</a:t>
+              <a:t>Runtime　評審 → ALB → Fargate 回決策看板 + REST：/fleet/summary、/vessels/{id}/decision、/config/threshold…</a:t>
             </a:r>
             <a:endParaRPr lang="en-US" sz="1050" dirty="0"/>
           </a:p>
@@ -22964,7 +22964,7 @@
               <a:buNone/>
             </a:pPr>
             <a:r>
-              <a:rPr lang="en-US" sz="3355" b="1" dirty="0">
+              <a:rPr lang="en-US" sz="3066" b="1" dirty="0">
                 <a:solidFill>
                   <a:srgbClr val="FFFFFF"/>
                 </a:solidFill>
@@ -22974,7 +22974,7 @@
               </a:rPr>
               <a:t>API Gateway + Lambda + DynamoDB（資料驅動）</a:t>
             </a:r>
-            <a:endParaRPr lang="en-US" sz="3355" dirty="0"/>
+            <a:endParaRPr lang="en-US" sz="3066" dirty="0"/>
           </a:p>
         </p:txBody>
       </p:sp>
@@ -25537,7 +25537,7 @@
               <a:buNone/>
             </a:pPr>
             <a:r>
-              <a:rPr lang="en-US" sz="3600" b="1" dirty="0">
+              <a:rPr lang="en-US" sz="3560" b="1" dirty="0">
                 <a:solidFill>
                   <a:srgbClr val="FFFFFF"/>
                 </a:solidFill>
@@ -25547,7 +25547,7 @@
               </a:rPr>
               <a:t>全託管容器，零 infra（本次受帳號權限阻擋）</a:t>
             </a:r>
-            <a:endParaRPr lang="en-US" sz="3600" dirty="0"/>
+            <a:endParaRPr lang="en-US" sz="3560" dirty="0"/>
           </a:p>
         </p:txBody>
       </p:sp>
@@ -27654,7 +27654,7 @@
               <a:buNone/>
             </a:pPr>
             <a:r>
-              <a:rPr lang="en-US" sz="3600" b="1" dirty="0">
+              <a:rPr lang="en-US" sz="3544" b="1" dirty="0">
                 <a:solidFill>
                   <a:srgbClr val="FFFFFF"/>
                 </a:solidFill>
@@ -27664,7 +27664,7 @@
               </a:rPr>
               <a:t>單台虛機 docker run，最省最可控的保底路線</a:t>
             </a:r>
-            <a:endParaRPr lang="en-US" sz="3600" dirty="0"/>
+            <a:endParaRPr lang="en-US" sz="3544" dirty="0"/>
           </a:p>
         </p:txBody>
       </p:sp>
@@ -30039,7 +30039,7 @@
               <a:buNone/>
             </a:pPr>
             <a:r>
-              <a:rPr lang="en-US" sz="2869" b="1" dirty="0">
+              <a:rPr lang="en-US" sz="2545" b="1" dirty="0">
                 <a:solidFill>
                   <a:srgbClr val="FFFFFF"/>
                 </a:solidFill>
@@ -30049,7 +30049,7 @@
               </a:rPr>
               <a:t>S3 Lake → ETL → Athena/Timestream → App + BI + ML</a:t>
             </a:r>
-            <a:endParaRPr lang="en-US" sz="2869" dirty="0"/>
+            <a:endParaRPr lang="en-US" sz="2545" dirty="0"/>
           </a:p>
         </p:txBody>
       </p:sp>

--- a/presentation/fleetmind-aws-architecture.pptx
+++ b/presentation/fleetmind-aws-architecture.pptx
@@ -2174,28 +2174,6 @@
         </p:nvSpPr>
         <p:spPr>
           <a:xfrm>
-            <a:off x="0" y="4480560"/>
-            <a:ext cx="12191695" cy="2377440"/>
-          </a:xfrm>
-          <a:prstGeom prst="rect">
-            <a:avLst/>
-          </a:prstGeom>
-          <a:solidFill>
-            <a:srgbClr val="0A2540">
-              <a:alpha val="82000"/>
-            </a:srgbClr>
-          </a:solidFill>
-          <a:ln/>
-        </p:spPr>
-      </p:sp>
-      <p:sp>
-        <p:nvSpPr>
-          <p:cNvPr id="5" name="Shape 2"/>
-          <p:cNvSpPr/>
-          <p:nvPr/>
-        </p:nvSpPr>
-        <p:spPr>
-          <a:xfrm>
             <a:off x="457200" y="868680"/>
             <a:ext cx="7132320" cy="3703320"/>
           </a:xfrm>
@@ -2221,7 +2199,7 @@
       </p:sp>
       <p:sp>
         <p:nvSpPr>
-          <p:cNvPr id="6" name="Shape 3"/>
+          <p:cNvPr id="5" name="Shape 2"/>
           <p:cNvSpPr/>
           <p:nvPr/>
         </p:nvSpPr>
@@ -2243,7 +2221,7 @@
       </p:sp>
       <p:sp>
         <p:nvSpPr>
-          <p:cNvPr id="7" name="Shape 4"/>
+          <p:cNvPr id="6" name="Shape 3"/>
           <p:cNvSpPr/>
           <p:nvPr/>
         </p:nvSpPr>
@@ -2265,7 +2243,7 @@
       </p:sp>
       <p:sp>
         <p:nvSpPr>
-          <p:cNvPr id="8" name="Shape 5"/>
+          <p:cNvPr id="7" name="Shape 4"/>
           <p:cNvSpPr/>
           <p:nvPr/>
         </p:nvSpPr>
@@ -2285,7 +2263,7 @@
       </p:sp>
       <p:sp>
         <p:nvSpPr>
-          <p:cNvPr id="9" name="Shape 6"/>
+          <p:cNvPr id="8" name="Shape 5"/>
           <p:cNvSpPr/>
           <p:nvPr/>
         </p:nvSpPr>
@@ -2307,7 +2285,7 @@
       </p:sp>
       <p:sp>
         <p:nvSpPr>
-          <p:cNvPr id="10" name="Shape 7"/>
+          <p:cNvPr id="9" name="Shape 6"/>
           <p:cNvSpPr/>
           <p:nvPr/>
         </p:nvSpPr>
@@ -2329,7 +2307,7 @@
       </p:sp>
       <p:sp>
         <p:nvSpPr>
-          <p:cNvPr id="11" name="Shape 8"/>
+          <p:cNvPr id="10" name="Shape 7"/>
           <p:cNvSpPr/>
           <p:nvPr/>
         </p:nvSpPr>
@@ -2349,7 +2327,7 @@
       </p:sp>
       <p:sp>
         <p:nvSpPr>
-          <p:cNvPr id="12" name="Shape 9"/>
+          <p:cNvPr id="11" name="Shape 8"/>
           <p:cNvSpPr/>
           <p:nvPr/>
         </p:nvSpPr>
@@ -2385,46 +2363,46 @@
       </p:sp>
       <p:sp>
         <p:nvSpPr>
+          <p:cNvPr id="12" name="Text 9"/>
+          <p:cNvSpPr/>
+          <p:nvPr/>
+        </p:nvSpPr>
+        <p:spPr>
+          <a:xfrm>
+            <a:off x="7818120" y="1165860"/>
+            <a:ext cx="1097280" cy="2331720"/>
+          </a:xfrm>
+          <a:prstGeom prst="rect">
+            <a:avLst/>
+          </a:prstGeom>
+          <a:noFill/>
+          <a:ln/>
+        </p:spPr>
+        <p:txBody>
+          <a:bodyPr wrap="square" lIns="0" tIns="0" rIns="0" bIns="0" rtlCol="0" anchor="ctr"/>
+          <a:lstStyle/>
+          <a:p>
+            <a:pPr algn="ctr" indent="0" marL="0">
+              <a:buNone/>
+            </a:pPr>
+            <a:r>
+              <a:rPr lang="en-US" sz="4000" b="1" dirty="0">
+                <a:solidFill>
+                  <a:srgbClr val="FFFFFF"/>
+                </a:solidFill>
+                <a:latin typeface="Hiragino Sans" pitchFamily="34" charset="0"/>
+                <a:ea typeface="Hiragino Sans" pitchFamily="34" charset="-122"/>
+                <a:cs typeface="Hiragino Sans" pitchFamily="34" charset="-120"/>
+              </a:rPr>
+              <a:t>k =</a:t>
+            </a:r>
+            <a:endParaRPr lang="en-US" sz="4000" dirty="0"/>
+          </a:p>
+        </p:txBody>
+      </p:sp>
+      <p:sp>
+        <p:nvSpPr>
           <p:cNvPr id="13" name="Text 10"/>
-          <p:cNvSpPr/>
-          <p:nvPr/>
-        </p:nvSpPr>
-        <p:spPr>
-          <a:xfrm>
-            <a:off x="7818120" y="1371600"/>
-            <a:ext cx="1097280" cy="2331720"/>
-          </a:xfrm>
-          <a:prstGeom prst="rect">
-            <a:avLst/>
-          </a:prstGeom>
-          <a:noFill/>
-          <a:ln/>
-        </p:spPr>
-        <p:txBody>
-          <a:bodyPr wrap="square" lIns="0" tIns="0" rIns="0" bIns="0" rtlCol="0" anchor="ctr"/>
-          <a:lstStyle/>
-          <a:p>
-            <a:pPr algn="ctr" indent="0" marL="0">
-              <a:buNone/>
-            </a:pPr>
-            <a:r>
-              <a:rPr lang="en-US" sz="4000" b="1" dirty="0">
-                <a:solidFill>
-                  <a:srgbClr val="FFFFFF"/>
-                </a:solidFill>
-                <a:latin typeface="Hiragino Sans" pitchFamily="34" charset="0"/>
-                <a:ea typeface="Hiragino Sans" pitchFamily="34" charset="-122"/>
-                <a:cs typeface="Hiragino Sans" pitchFamily="34" charset="-120"/>
-              </a:rPr>
-              <a:t>k =</a:t>
-            </a:r>
-            <a:endParaRPr lang="en-US" sz="4000" dirty="0"/>
-          </a:p>
-        </p:txBody>
-      </p:sp>
-      <p:sp>
-        <p:nvSpPr>
-          <p:cNvPr id="14" name="Text 11"/>
           <p:cNvSpPr/>
           <p:nvPr/>
         </p:nvSpPr>
@@ -2463,7 +2441,7 @@
       </p:sp>
       <p:sp>
         <p:nvSpPr>
-          <p:cNvPr id="15" name="Shape 12"/>
+          <p:cNvPr id="14" name="Shape 11"/>
           <p:cNvSpPr/>
           <p:nvPr/>
         </p:nvSpPr>
@@ -2486,7 +2464,7 @@
       </p:sp>
       <p:sp>
         <p:nvSpPr>
-          <p:cNvPr id="16" name="Text 13"/>
+          <p:cNvPr id="15" name="Text 12"/>
           <p:cNvSpPr/>
           <p:nvPr/>
         </p:nvSpPr>
@@ -2525,7 +2503,7 @@
       </p:sp>
       <p:sp>
         <p:nvSpPr>
-          <p:cNvPr id="17" name="Text 14"/>
+          <p:cNvPr id="16" name="Text 13"/>
           <p:cNvSpPr/>
           <p:nvPr/>
         </p:nvSpPr>
@@ -2564,7 +2542,7 @@
       </p:sp>
       <p:sp>
         <p:nvSpPr>
-          <p:cNvPr id="18" name="Text 15"/>
+          <p:cNvPr id="17" name="Text 14"/>
           <p:cNvSpPr/>
           <p:nvPr/>
         </p:nvSpPr>
@@ -2603,7 +2581,7 @@
       </p:sp>
       <p:sp>
         <p:nvSpPr>
-          <p:cNvPr id="19" name="Text 16"/>
+          <p:cNvPr id="18" name="Text 15"/>
           <p:cNvSpPr/>
           <p:nvPr/>
         </p:nvSpPr>
@@ -2665,7 +2643,7 @@
       </p:sp>
       <p:sp>
         <p:nvSpPr>
-          <p:cNvPr id="20" name="Text 17"/>
+          <p:cNvPr id="19" name="Text 16"/>
           <p:cNvSpPr/>
           <p:nvPr/>
         </p:nvSpPr>
@@ -2707,7 +2685,7 @@
       </p:sp>
       <p:sp>
         <p:nvSpPr>
-          <p:cNvPr id="21" name="Text 18"/>
+          <p:cNvPr id="20" name="Text 17"/>
           <p:cNvSpPr/>
           <p:nvPr/>
         </p:nvSpPr>
@@ -2746,7 +2724,7 @@
       </p:sp>
       <p:sp>
         <p:nvSpPr>
-          <p:cNvPr id="22" name="Shape 19"/>
+          <p:cNvPr id="21" name="Shape 18"/>
           <p:cNvSpPr/>
           <p:nvPr/>
         </p:nvSpPr>
@@ -2782,7 +2760,7 @@
       </p:sp>
       <p:sp>
         <p:nvSpPr>
-          <p:cNvPr id="23" name="Text 20"/>
+          <p:cNvPr id="22" name="Text 19"/>
           <p:cNvSpPr/>
           <p:nvPr/>
         </p:nvSpPr>
@@ -2821,7 +2799,7 @@
       </p:sp>
       <p:sp>
         <p:nvSpPr>
-          <p:cNvPr id="24" name="Text 21"/>
+          <p:cNvPr id="23" name="Text 20"/>
           <p:cNvSpPr/>
           <p:nvPr/>
         </p:nvSpPr>
@@ -2860,7 +2838,7 @@
       </p:sp>
       <p:sp>
         <p:nvSpPr>
-          <p:cNvPr id="25" name="Text 22"/>
+          <p:cNvPr id="24" name="Text 21"/>
           <p:cNvSpPr/>
           <p:nvPr/>
         </p:nvSpPr>
@@ -2899,7 +2877,7 @@
       </p:sp>
       <p:sp>
         <p:nvSpPr>
-          <p:cNvPr id="26" name="Text 23"/>
+          <p:cNvPr id="25" name="Text 22"/>
           <p:cNvSpPr/>
           <p:nvPr/>
         </p:nvSpPr>
@@ -2938,7 +2916,7 @@
       </p:sp>
       <p:sp>
         <p:nvSpPr>
-          <p:cNvPr id="27" name="Text 24"/>
+          <p:cNvPr id="26" name="Text 23"/>
           <p:cNvSpPr/>
           <p:nvPr/>
         </p:nvSpPr>
@@ -2977,7 +2955,7 @@
       </p:sp>
       <p:sp>
         <p:nvSpPr>
-          <p:cNvPr id="28" name="Text 25"/>
+          <p:cNvPr id="27" name="Text 24"/>
           <p:cNvSpPr/>
           <p:nvPr/>
         </p:nvSpPr>
@@ -3016,7 +2994,7 @@
       </p:sp>
       <p:sp>
         <p:nvSpPr>
-          <p:cNvPr id="29" name="Shape 26"/>
+          <p:cNvPr id="28" name="Shape 25"/>
           <p:cNvSpPr/>
           <p:nvPr/>
         </p:nvSpPr>
@@ -3039,7 +3017,7 @@
       </p:sp>
       <p:sp>
         <p:nvSpPr>
-          <p:cNvPr id="30" name="Shape 27"/>
+          <p:cNvPr id="29" name="Shape 26"/>
           <p:cNvSpPr/>
           <p:nvPr/>
         </p:nvSpPr>
@@ -3062,7 +3040,7 @@
       </p:sp>
       <p:sp>
         <p:nvSpPr>
-          <p:cNvPr id="31" name="Shape 28"/>
+          <p:cNvPr id="30" name="Shape 27"/>
           <p:cNvSpPr/>
           <p:nvPr/>
         </p:nvSpPr>
@@ -3091,7 +3069,7 @@
       </p:sp>
       <p:sp>
         <p:nvSpPr>
-          <p:cNvPr id="32" name="Text 29"/>
+          <p:cNvPr id="31" name="Text 28"/>
           <p:cNvSpPr/>
           <p:nvPr/>
         </p:nvSpPr>

--- a/presentation/fleetmind-aws-architecture.pptx
+++ b/presentation/fleetmind-aws-architecture.pptx
@@ -2174,28 +2174,6 @@
         </p:nvSpPr>
         <p:spPr>
           <a:xfrm>
-            <a:off x="0" y="4480560"/>
-            <a:ext cx="12191695" cy="2377440"/>
-          </a:xfrm>
-          <a:prstGeom prst="rect">
-            <a:avLst/>
-          </a:prstGeom>
-          <a:solidFill>
-            <a:srgbClr val="0A2540">
-              <a:alpha val="82000"/>
-            </a:srgbClr>
-          </a:solidFill>
-          <a:ln/>
-        </p:spPr>
-      </p:sp>
-      <p:sp>
-        <p:nvSpPr>
-          <p:cNvPr id="5" name="Shape 2"/>
-          <p:cNvSpPr/>
-          <p:nvPr/>
-        </p:nvSpPr>
-        <p:spPr>
-          <a:xfrm>
             <a:off x="457200" y="868680"/>
             <a:ext cx="7132320" cy="3703320"/>
           </a:xfrm>
@@ -2221,7 +2199,7 @@
       </p:sp>
       <p:sp>
         <p:nvSpPr>
-          <p:cNvPr id="6" name="Shape 3"/>
+          <p:cNvPr id="5" name="Shape 2"/>
           <p:cNvSpPr/>
           <p:nvPr/>
         </p:nvSpPr>
@@ -2243,7 +2221,7 @@
       </p:sp>
       <p:sp>
         <p:nvSpPr>
-          <p:cNvPr id="7" name="Shape 4"/>
+          <p:cNvPr id="6" name="Shape 3"/>
           <p:cNvSpPr/>
           <p:nvPr/>
         </p:nvSpPr>
@@ -2265,7 +2243,7 @@
       </p:sp>
       <p:sp>
         <p:nvSpPr>
-          <p:cNvPr id="8" name="Shape 5"/>
+          <p:cNvPr id="7" name="Shape 4"/>
           <p:cNvSpPr/>
           <p:nvPr/>
         </p:nvSpPr>
@@ -2285,7 +2263,7 @@
       </p:sp>
       <p:sp>
         <p:nvSpPr>
-          <p:cNvPr id="9" name="Shape 6"/>
+          <p:cNvPr id="8" name="Shape 5"/>
           <p:cNvSpPr/>
           <p:nvPr/>
         </p:nvSpPr>
@@ -2307,7 +2285,7 @@
       </p:sp>
       <p:sp>
         <p:nvSpPr>
-          <p:cNvPr id="10" name="Shape 7"/>
+          <p:cNvPr id="9" name="Shape 6"/>
           <p:cNvSpPr/>
           <p:nvPr/>
         </p:nvSpPr>
@@ -2329,7 +2307,7 @@
       </p:sp>
       <p:sp>
         <p:nvSpPr>
-          <p:cNvPr id="11" name="Shape 8"/>
+          <p:cNvPr id="10" name="Shape 7"/>
           <p:cNvSpPr/>
           <p:nvPr/>
         </p:nvSpPr>
@@ -2349,7 +2327,7 @@
       </p:sp>
       <p:sp>
         <p:nvSpPr>
-          <p:cNvPr id="12" name="Shape 9"/>
+          <p:cNvPr id="11" name="Shape 8"/>
           <p:cNvSpPr/>
           <p:nvPr/>
         </p:nvSpPr>
@@ -2385,46 +2363,46 @@
       </p:sp>
       <p:sp>
         <p:nvSpPr>
+          <p:cNvPr id="12" name="Text 9"/>
+          <p:cNvSpPr/>
+          <p:nvPr/>
+        </p:nvSpPr>
+        <p:spPr>
+          <a:xfrm>
+            <a:off x="7818120" y="1165860"/>
+            <a:ext cx="1097280" cy="2331720"/>
+          </a:xfrm>
+          <a:prstGeom prst="rect">
+            <a:avLst/>
+          </a:prstGeom>
+          <a:noFill/>
+          <a:ln/>
+        </p:spPr>
+        <p:txBody>
+          <a:bodyPr wrap="square" lIns="0" tIns="0" rIns="0" bIns="0" rtlCol="0" anchor="ctr"/>
+          <a:lstStyle/>
+          <a:p>
+            <a:pPr algn="ctr" indent="0" marL="0">
+              <a:buNone/>
+            </a:pPr>
+            <a:r>
+              <a:rPr lang="en-US" sz="4000" b="1" dirty="0">
+                <a:solidFill>
+                  <a:srgbClr val="FFFFFF"/>
+                </a:solidFill>
+                <a:latin typeface="Hiragino Sans" pitchFamily="34" charset="0"/>
+                <a:ea typeface="Hiragino Sans" pitchFamily="34" charset="-122"/>
+                <a:cs typeface="Hiragino Sans" pitchFamily="34" charset="-120"/>
+              </a:rPr>
+              <a:t>k =</a:t>
+            </a:r>
+            <a:endParaRPr lang="en-US" sz="4000" dirty="0"/>
+          </a:p>
+        </p:txBody>
+      </p:sp>
+      <p:sp>
+        <p:nvSpPr>
           <p:cNvPr id="13" name="Text 10"/>
-          <p:cNvSpPr/>
-          <p:nvPr/>
-        </p:nvSpPr>
-        <p:spPr>
-          <a:xfrm>
-            <a:off x="7818120" y="1371600"/>
-            <a:ext cx="1097280" cy="2331720"/>
-          </a:xfrm>
-          <a:prstGeom prst="rect">
-            <a:avLst/>
-          </a:prstGeom>
-          <a:noFill/>
-          <a:ln/>
-        </p:spPr>
-        <p:txBody>
-          <a:bodyPr wrap="square" lIns="0" tIns="0" rIns="0" bIns="0" rtlCol="0" anchor="ctr"/>
-          <a:lstStyle/>
-          <a:p>
-            <a:pPr algn="ctr" indent="0" marL="0">
-              <a:buNone/>
-            </a:pPr>
-            <a:r>
-              <a:rPr lang="en-US" sz="4000" b="1" dirty="0">
-                <a:solidFill>
-                  <a:srgbClr val="FFFFFF"/>
-                </a:solidFill>
-                <a:latin typeface="Microsoft JhengHei" pitchFamily="34" charset="0"/>
-                <a:ea typeface="Microsoft JhengHei" pitchFamily="34" charset="-122"/>
-                <a:cs typeface="Microsoft JhengHei" pitchFamily="34" charset="-120"/>
-              </a:rPr>
-              <a:t>k =</a:t>
-            </a:r>
-            <a:endParaRPr lang="en-US" sz="4000" dirty="0"/>
-          </a:p>
-        </p:txBody>
-      </p:sp>
-      <p:sp>
-        <p:nvSpPr>
-          <p:cNvPr id="14" name="Text 11"/>
           <p:cNvSpPr/>
           <p:nvPr/>
         </p:nvSpPr>
@@ -2451,9 +2429,9 @@
                 <a:solidFill>
                   <a:srgbClr val="2A9D8F"/>
                 </a:solidFill>
-                <a:latin typeface="Microsoft JhengHei" pitchFamily="34" charset="0"/>
-                <a:ea typeface="Microsoft JhengHei" pitchFamily="34" charset="-122"/>
-                <a:cs typeface="Microsoft JhengHei" pitchFamily="34" charset="-120"/>
+                <a:latin typeface="Hiragino Sans" pitchFamily="34" charset="0"/>
+                <a:ea typeface="Hiragino Sans" pitchFamily="34" charset="-122"/>
+                <a:cs typeface="Hiragino Sans" pitchFamily="34" charset="-120"/>
               </a:rPr>
               <a:t>FOC</a:t>
             </a:r>
@@ -2463,7 +2441,7 @@
       </p:sp>
       <p:sp>
         <p:nvSpPr>
-          <p:cNvPr id="15" name="Shape 12"/>
+          <p:cNvPr id="14" name="Shape 11"/>
           <p:cNvSpPr/>
           <p:nvPr/>
         </p:nvSpPr>
@@ -2486,7 +2464,7 @@
       </p:sp>
       <p:sp>
         <p:nvSpPr>
-          <p:cNvPr id="16" name="Text 13"/>
+          <p:cNvPr id="15" name="Text 12"/>
           <p:cNvSpPr/>
           <p:nvPr/>
         </p:nvSpPr>
@@ -2513,9 +2491,9 @@
                 <a:solidFill>
                   <a:srgbClr val="F4A72B"/>
                 </a:solidFill>
-                <a:latin typeface="Microsoft JhengHei" pitchFamily="34" charset="0"/>
-                <a:ea typeface="Microsoft JhengHei" pitchFamily="34" charset="-122"/>
-                <a:cs typeface="Microsoft JhengHei" pitchFamily="34" charset="-120"/>
+                <a:latin typeface="Hiragino Sans" pitchFamily="34" charset="0"/>
+                <a:ea typeface="Hiragino Sans" pitchFamily="34" charset="-122"/>
+                <a:cs typeface="Hiragino Sans" pitchFamily="34" charset="-120"/>
               </a:rPr>
               <a:t>STW³</a:t>
             </a:r>
@@ -2525,7 +2503,7 @@
       </p:sp>
       <p:sp>
         <p:nvSpPr>
-          <p:cNvPr id="17" name="Text 14"/>
+          <p:cNvPr id="16" name="Text 13"/>
           <p:cNvSpPr/>
           <p:nvPr/>
         </p:nvSpPr>
@@ -2552,9 +2530,9 @@
                 <a:solidFill>
                   <a:srgbClr val="C7D6E4"/>
                 </a:solidFill>
-                <a:latin typeface="Microsoft JhengHei" pitchFamily="34" charset="0"/>
-                <a:ea typeface="Microsoft JhengHei" pitchFamily="34" charset="-122"/>
-                <a:cs typeface="Microsoft JhengHei" pitchFamily="34" charset="-120"/>
+                <a:latin typeface="Hiragino Sans" pitchFamily="34" charset="0"/>
+                <a:ea typeface="Hiragino Sans" pitchFamily="34" charset="-122"/>
+                <a:cs typeface="Hiragino Sans" pitchFamily="34" charset="-120"/>
               </a:rPr>
               <a:t>ISO 19030 · 船體效能指標</a:t>
             </a:r>
@@ -2564,7 +2542,7 @@
       </p:sp>
       <p:sp>
         <p:nvSpPr>
-          <p:cNvPr id="18" name="Text 15"/>
+          <p:cNvPr id="17" name="Text 14"/>
           <p:cNvSpPr/>
           <p:nvPr/>
         </p:nvSpPr>
@@ -2591,9 +2569,9 @@
                 <a:solidFill>
                   <a:srgbClr val="F4A72B"/>
                 </a:solidFill>
-                <a:latin typeface="Microsoft JhengHei" pitchFamily="34" charset="0"/>
-                <a:ea typeface="Microsoft JhengHei" pitchFamily="34" charset="-122"/>
-                <a:cs typeface="Microsoft JhengHei" pitchFamily="34" charset="-120"/>
+                <a:latin typeface="Hiragino Sans" pitchFamily="34" charset="0"/>
+                <a:ea typeface="Hiragino Sans" pitchFamily="34" charset="-122"/>
+                <a:cs typeface="Hiragino Sans" pitchFamily="34" charset="-120"/>
               </a:rPr>
               <a:t>FLEETMIND · AWS ARCHITECTURE</a:t>
             </a:r>
@@ -2603,7 +2581,7 @@
       </p:sp>
       <p:sp>
         <p:nvSpPr>
-          <p:cNvPr id="19" name="Text 16"/>
+          <p:cNvPr id="18" name="Text 15"/>
           <p:cNvSpPr/>
           <p:nvPr/>
         </p:nvSpPr>
@@ -2633,9 +2611,9 @@
                 <a:solidFill>
                   <a:srgbClr val="FFFFFF"/>
                 </a:solidFill>
-                <a:latin typeface="Microsoft JhengHei" pitchFamily="34" charset="0"/>
-                <a:ea typeface="Microsoft JhengHei" pitchFamily="34" charset="-122"/>
-                <a:cs typeface="Microsoft JhengHei" pitchFamily="34" charset="-120"/>
+                <a:latin typeface="Hiragino Sans" pitchFamily="34" charset="0"/>
+                <a:ea typeface="Hiragino Sans" pitchFamily="34" charset="-122"/>
+                <a:cs typeface="Hiragino Sans" pitchFamily="34" charset="-120"/>
               </a:rPr>
               <a:t>AWS 架構藍圖</a:t>
             </a:r>
@@ -2653,9 +2631,9 @@
                 <a:solidFill>
                   <a:srgbClr val="FFFFFF"/>
                 </a:solidFill>
-                <a:latin typeface="Microsoft JhengHei" pitchFamily="34" charset="0"/>
-                <a:ea typeface="Microsoft JhengHei" pitchFamily="34" charset="-122"/>
-                <a:cs typeface="Microsoft JhengHei" pitchFamily="34" charset="-120"/>
+                <a:latin typeface="Hiragino Sans" pitchFamily="34" charset="0"/>
+                <a:ea typeface="Hiragino Sans" pitchFamily="34" charset="-122"/>
+                <a:cs typeface="Hiragino Sans" pitchFamily="34" charset="-120"/>
               </a:rPr>
               <a:t>與五種上雲路徑</a:t>
             </a:r>
@@ -2665,7 +2643,7 @@
       </p:sp>
       <p:sp>
         <p:nvSpPr>
-          <p:cNvPr id="20" name="Text 17"/>
+          <p:cNvPr id="19" name="Text 16"/>
           <p:cNvSpPr/>
           <p:nvPr/>
         </p:nvSpPr>
@@ -2695,9 +2673,9 @@
                 <a:solidFill>
                   <a:srgbClr val="2A9D8F"/>
                 </a:solidFill>
-                <a:latin typeface="Microsoft JhengHei" pitchFamily="34" charset="0"/>
-                <a:ea typeface="Microsoft JhengHei" pitchFamily="34" charset="-122"/>
-                <a:cs typeface="Microsoft JhengHei" pitchFamily="34" charset="-120"/>
+                <a:latin typeface="Hiragino Sans" pitchFamily="34" charset="0"/>
+                <a:ea typeface="Hiragino Sans" pitchFamily="34" charset="-122"/>
+                <a:cs typeface="Hiragino Sans" pitchFamily="34" charset="-120"/>
               </a:rPr>
               <a:t>一套船舶效能決策系統 — 從已上線的 Fargate demo 到全艦隊營運平台</a:t>
             </a:r>
@@ -2707,7 +2685,7 @@
       </p:sp>
       <p:sp>
         <p:nvSpPr>
-          <p:cNvPr id="21" name="Text 18"/>
+          <p:cNvPr id="20" name="Text 17"/>
           <p:cNvSpPr/>
           <p:nvPr/>
         </p:nvSpPr>
@@ -2730,13 +2708,13 @@
               <a:buNone/>
             </a:pPr>
             <a:r>
-              <a:rPr lang="en-US" sz="1600" i="1" dirty="0">
+              <a:rPr lang="en-US" sz="1600" dirty="0">
                 <a:solidFill>
                   <a:srgbClr val="F4A72B"/>
                 </a:solidFill>
-                <a:latin typeface="Microsoft JhengHei" pitchFamily="34" charset="0"/>
-                <a:ea typeface="Microsoft JhengHei" pitchFamily="34" charset="-122"/>
-                <a:cs typeface="Microsoft JhengHei" pitchFamily="34" charset="-120"/>
+                <a:latin typeface="Hiragino Sans" pitchFamily="34" charset="0"/>
+                <a:ea typeface="Hiragino Sans" pitchFamily="34" charset="-122"/>
+                <a:cs typeface="Hiragino Sans" pitchFamily="34" charset="-120"/>
               </a:rPr>
               <a:t>數字來自計算　語言來自 AI　決策留給人</a:t>
             </a:r>
@@ -2746,7 +2724,7 @@
       </p:sp>
       <p:sp>
         <p:nvSpPr>
-          <p:cNvPr id="22" name="Shape 19"/>
+          <p:cNvPr id="21" name="Shape 18"/>
           <p:cNvSpPr/>
           <p:nvPr/>
         </p:nvSpPr>
@@ -2782,7 +2760,7 @@
       </p:sp>
       <p:sp>
         <p:nvSpPr>
-          <p:cNvPr id="23" name="Text 20"/>
+          <p:cNvPr id="22" name="Text 19"/>
           <p:cNvSpPr/>
           <p:nvPr/>
         </p:nvSpPr>
@@ -2809,9 +2787,9 @@
                 <a:solidFill>
                   <a:srgbClr val="FFFFFF"/>
                 </a:solidFill>
-                <a:latin typeface="Microsoft JhengHei" pitchFamily="34" charset="0"/>
-                <a:ea typeface="Microsoft JhengHei" pitchFamily="34" charset="-122"/>
-                <a:cs typeface="Microsoft JhengHei" pitchFamily="34" charset="-120"/>
+                <a:latin typeface="Hiragino Sans" pitchFamily="34" charset="0"/>
+                <a:ea typeface="Hiragino Sans" pitchFamily="34" charset="-122"/>
+                <a:cs typeface="Hiragino Sans" pitchFamily="34" charset="-120"/>
               </a:rPr>
               <a:t>15 艘 × 5 年</a:t>
             </a:r>
@@ -2821,7 +2799,7 @@
       </p:sp>
       <p:sp>
         <p:nvSpPr>
-          <p:cNvPr id="24" name="Text 21"/>
+          <p:cNvPr id="23" name="Text 20"/>
           <p:cNvSpPr/>
           <p:nvPr/>
         </p:nvSpPr>
@@ -2848,9 +2826,9 @@
                 <a:solidFill>
                   <a:srgbClr val="C7D6E4"/>
                 </a:solidFill>
-                <a:latin typeface="Microsoft JhengHei" pitchFamily="34" charset="0"/>
-                <a:ea typeface="Microsoft JhengHei" pitchFamily="34" charset="-122"/>
-                <a:cs typeface="Microsoft JhengHei" pitchFamily="34" charset="-120"/>
+                <a:latin typeface="Hiragino Sans" pitchFamily="34" charset="0"/>
+                <a:ea typeface="Hiragino Sans" pitchFamily="34" charset="-122"/>
+                <a:cs typeface="Hiragino Sans" pitchFamily="34" charset="-120"/>
               </a:rPr>
               <a:t>同型船 · 2021–2025 正午報表</a:t>
             </a:r>
@@ -2860,7 +2838,7 @@
       </p:sp>
       <p:sp>
         <p:nvSpPr>
-          <p:cNvPr id="25" name="Text 22"/>
+          <p:cNvPr id="24" name="Text 21"/>
           <p:cNvSpPr/>
           <p:nvPr/>
         </p:nvSpPr>
@@ -2887,9 +2865,9 @@
                 <a:solidFill>
                   <a:srgbClr val="FFFFFF"/>
                 </a:solidFill>
-                <a:latin typeface="Microsoft JhengHei" pitchFamily="34" charset="0"/>
-                <a:ea typeface="Microsoft JhengHei" pitchFamily="34" charset="-122"/>
-                <a:cs typeface="Microsoft JhengHei" pitchFamily="34" charset="-120"/>
+                <a:latin typeface="Hiragino Sans" pitchFamily="34" charset="0"/>
+                <a:ea typeface="Hiragino Sans" pitchFamily="34" charset="-122"/>
+                <a:cs typeface="Hiragino Sans" pitchFamily="34" charset="-120"/>
               </a:rPr>
               <a:t>21.8%</a:t>
             </a:r>
@@ -2899,7 +2877,7 @@
       </p:sp>
       <p:sp>
         <p:nvSpPr>
-          <p:cNvPr id="26" name="Text 23"/>
+          <p:cNvPr id="25" name="Text 22"/>
           <p:cNvSpPr/>
           <p:nvPr/>
         </p:nvSpPr>
@@ -2926,9 +2904,9 @@
                 <a:solidFill>
                   <a:srgbClr val="C7D6E4"/>
                 </a:solidFill>
-                <a:latin typeface="Microsoft JhengHei" pitchFamily="34" charset="0"/>
-                <a:ea typeface="Microsoft JhengHei" pitchFamily="34" charset="-122"/>
-                <a:cs typeface="Microsoft JhengHei" pitchFamily="34" charset="-120"/>
+                <a:latin typeface="Hiragino Sans" pitchFamily="34" charset="0"/>
+                <a:ea typeface="Hiragino Sans" pitchFamily="34" charset="-122"/>
+                <a:cs typeface="Hiragino Sans" pitchFamily="34" charset="-120"/>
               </a:rPr>
               <a:t>S11 最嚴重 Speed Loss · 539 有效日</a:t>
             </a:r>
@@ -2938,7 +2916,7 @@
       </p:sp>
       <p:sp>
         <p:nvSpPr>
-          <p:cNvPr id="27" name="Text 24"/>
+          <p:cNvPr id="26" name="Text 23"/>
           <p:cNvSpPr/>
           <p:nvPr/>
         </p:nvSpPr>
@@ -2965,9 +2943,9 @@
                 <a:solidFill>
                   <a:srgbClr val="FFFFFF"/>
                 </a:solidFill>
-                <a:latin typeface="Microsoft JhengHei" pitchFamily="34" charset="0"/>
-                <a:ea typeface="Microsoft JhengHei" pitchFamily="34" charset="-122"/>
-                <a:cs typeface="Microsoft JhengHei" pitchFamily="34" charset="-120"/>
+                <a:latin typeface="Hiragino Sans" pitchFamily="34" charset="0"/>
+                <a:ea typeface="Hiragino Sans" pitchFamily="34" charset="-122"/>
+                <a:cs typeface="Hiragino Sans" pitchFamily="34" charset="-120"/>
               </a:rPr>
               <a:t>Day1 上線</a:t>
             </a:r>
@@ -2977,7 +2955,7 @@
       </p:sp>
       <p:sp>
         <p:nvSpPr>
-          <p:cNvPr id="28" name="Text 25"/>
+          <p:cNvPr id="27" name="Text 24"/>
           <p:cNvSpPr/>
           <p:nvPr/>
         </p:nvSpPr>
@@ -3004,9 +2982,9 @@
                 <a:solidFill>
                   <a:srgbClr val="C7D6E4"/>
                 </a:solidFill>
-                <a:latin typeface="Microsoft JhengHei" pitchFamily="34" charset="0"/>
-                <a:ea typeface="Microsoft JhengHei" pitchFamily="34" charset="-122"/>
-                <a:cs typeface="Microsoft JhengHei" pitchFamily="34" charset="-120"/>
+                <a:latin typeface="Hiragino Sans" pitchFamily="34" charset="0"/>
+                <a:ea typeface="Hiragino Sans" pitchFamily="34" charset="-122"/>
+                <a:cs typeface="Hiragino Sans" pitchFamily="34" charset="-120"/>
               </a:rPr>
               <a:t>帳號 516665228894 · us-east-1</a:t>
             </a:r>
@@ -3016,7 +2994,7 @@
       </p:sp>
       <p:sp>
         <p:nvSpPr>
-          <p:cNvPr id="29" name="Shape 26"/>
+          <p:cNvPr id="28" name="Shape 25"/>
           <p:cNvSpPr/>
           <p:nvPr/>
         </p:nvSpPr>
@@ -3039,7 +3017,7 @@
       </p:sp>
       <p:sp>
         <p:nvSpPr>
-          <p:cNvPr id="30" name="Shape 27"/>
+          <p:cNvPr id="29" name="Shape 26"/>
           <p:cNvSpPr/>
           <p:nvPr/>
         </p:nvSpPr>
@@ -3062,7 +3040,7 @@
       </p:sp>
       <p:sp>
         <p:nvSpPr>
-          <p:cNvPr id="31" name="Shape 28"/>
+          <p:cNvPr id="30" name="Shape 27"/>
           <p:cNvSpPr/>
           <p:nvPr/>
         </p:nvSpPr>
@@ -3091,7 +3069,7 @@
       </p:sp>
       <p:sp>
         <p:nvSpPr>
-          <p:cNvPr id="32" name="Text 29"/>
+          <p:cNvPr id="31" name="Text 28"/>
           <p:cNvSpPr/>
           <p:nvPr/>
         </p:nvSpPr>
@@ -3118,9 +3096,9 @@
                 <a:solidFill>
                   <a:srgbClr val="F4A72B"/>
                 </a:solidFill>
-                <a:latin typeface="Microsoft JhengHei" pitchFamily="34" charset="0"/>
-                <a:ea typeface="Microsoft JhengHei" pitchFamily="34" charset="-122"/>
-                <a:cs typeface="Microsoft JhengHei" pitchFamily="34" charset="-120"/>
+                <a:latin typeface="Hiragino Sans" pitchFamily="34" charset="0"/>
+                <a:ea typeface="Hiragino Sans" pitchFamily="34" charset="-122"/>
+                <a:cs typeface="Hiragino Sans" pitchFamily="34" charset="-120"/>
               </a:rPr>
               <a:t>Live　</a:t>
             </a:r>
@@ -3132,9 +3110,9 @@
                 <a:solidFill>
                   <a:srgbClr val="2A9D8F"/>
                 </a:solidFill>
-                <a:latin typeface="Microsoft JhengHei" pitchFamily="34" charset="0"/>
-                <a:ea typeface="Microsoft JhengHei" pitchFamily="34" charset="-122"/>
-                <a:cs typeface="Microsoft JhengHei" pitchFamily="34" charset="-120"/>
+                <a:latin typeface="Hiragino Sans" pitchFamily="34" charset="0"/>
+                <a:ea typeface="Hiragino Sans" pitchFamily="34" charset="-122"/>
+                <a:cs typeface="Hiragino Sans" pitchFamily="34" charset="-120"/>
               </a:rPr>
               <a:t>http://fleetmind-alb-330672315.us-east-1.elb.amazonaws.com</a:t>
             </a:r>
@@ -3356,9 +3334,9 @@
                 <a:solidFill>
                   <a:srgbClr val="FFFFFF"/>
                 </a:solidFill>
-                <a:latin typeface="Microsoft JhengHei" pitchFamily="34" charset="0"/>
-                <a:ea typeface="Microsoft JhengHei" pitchFamily="34" charset="-122"/>
-                <a:cs typeface="Microsoft JhengHei" pitchFamily="34" charset="-120"/>
+                <a:latin typeface="Hiragino Sans" pitchFamily="34" charset="0"/>
+                <a:ea typeface="Hiragino Sans" pitchFamily="34" charset="-122"/>
+                <a:cs typeface="Hiragino Sans" pitchFamily="34" charset="-120"/>
               </a:rPr>
               <a:t>10</a:t>
             </a:r>
@@ -3370,9 +3348,9 @@
                 <a:solidFill>
                   <a:srgbClr val="8FA8BD"/>
                 </a:solidFill>
-                <a:latin typeface="Microsoft JhengHei" pitchFamily="34" charset="0"/>
-                <a:ea typeface="Microsoft JhengHei" pitchFamily="34" charset="-122"/>
-                <a:cs typeface="Microsoft JhengHei" pitchFamily="34" charset="-120"/>
+                <a:latin typeface="Hiragino Sans" pitchFamily="34" charset="0"/>
+                <a:ea typeface="Hiragino Sans" pitchFamily="34" charset="-122"/>
+                <a:cs typeface="Hiragino Sans" pitchFamily="34" charset="-120"/>
               </a:rPr>
               <a:t>  /  15</a:t>
             </a:r>
@@ -3409,9 +3387,9 @@
                 <a:solidFill>
                   <a:srgbClr val="F4A72B"/>
                 </a:solidFill>
-                <a:latin typeface="Microsoft JhengHei" pitchFamily="34" charset="0"/>
-                <a:ea typeface="Microsoft JhengHei" pitchFamily="34" charset="-122"/>
-                <a:cs typeface="Microsoft JhengHei" pitchFamily="34" charset="-120"/>
+                <a:latin typeface="Hiragino Sans" pitchFamily="34" charset="0"/>
+                <a:ea typeface="Hiragino Sans" pitchFamily="34" charset="-122"/>
+                <a:cs typeface="Hiragino Sans" pitchFamily="34" charset="-120"/>
               </a:rPr>
               <a:t>MULTI-REGION · ACTIVE-ACTIVE</a:t>
             </a:r>
@@ -3448,9 +3426,9 @@
                 <a:solidFill>
                   <a:srgbClr val="FFFFFF"/>
                 </a:solidFill>
-                <a:latin typeface="Microsoft JhengHei" pitchFamily="34" charset="0"/>
-                <a:ea typeface="Microsoft JhengHei" pitchFamily="34" charset="-122"/>
-                <a:cs typeface="Microsoft JhengHei" pitchFamily="34" charset="-120"/>
+                <a:latin typeface="Hiragino Sans" pitchFamily="34" charset="0"/>
+                <a:ea typeface="Hiragino Sans" pitchFamily="34" charset="-122"/>
+                <a:cs typeface="Hiragino Sans" pitchFamily="34" charset="-120"/>
               </a:rPr>
               <a:t>多區域 Active-Active + 即時告警與災備</a:t>
             </a:r>
@@ -3510,13 +3488,13 @@
               <a:buNone/>
             </a:pPr>
             <a:r>
-              <a:rPr lang="en-US" sz="1250" i="1" dirty="0">
+              <a:rPr lang="en-US" sz="1250" dirty="0">
                 <a:solidFill>
                   <a:srgbClr val="C7D6E4"/>
                 </a:solidFill>
-                <a:latin typeface="Microsoft JhengHei" pitchFamily="34" charset="0"/>
-                <a:ea typeface="Microsoft JhengHei" pitchFamily="34" charset="-122"/>
-                <a:cs typeface="Microsoft JhengHei" pitchFamily="34" charset="-120"/>
+                <a:latin typeface="Hiragino Sans" pitchFamily="34" charset="0"/>
+                <a:ea typeface="Hiragino Sans" pitchFamily="34" charset="-122"/>
+                <a:cs typeface="Hiragino Sans" pitchFamily="34" charset="-120"/>
               </a:rPr>
               <a:t>不同國家船務端就近接入 → Route 53 智慧路由到兩個 active 區域；一區故障自動切換、跨區雙向複製，資料不丟、服務不中斷。</a:t>
             </a:r>
@@ -3585,9 +3563,9 @@
                 <a:solidFill>
                   <a:srgbClr val="FFFFFF"/>
                 </a:solidFill>
-                <a:latin typeface="Microsoft JhengHei" pitchFamily="34" charset="0"/>
-                <a:ea typeface="Microsoft JhengHei" pitchFamily="34" charset="-122"/>
-                <a:cs typeface="Microsoft JhengHei" pitchFamily="34" charset="-120"/>
+                <a:latin typeface="Hiragino Sans" pitchFamily="34" charset="0"/>
+                <a:ea typeface="Hiragino Sans" pitchFamily="34" charset="-122"/>
+                <a:cs typeface="Hiragino Sans" pitchFamily="34" charset="-120"/>
               </a:rPr>
               <a:t>亞洲船務端
 </a:t>
@@ -3603,9 +3581,9 @@
                 <a:solidFill>
                   <a:srgbClr val="C7D6E4"/>
                 </a:solidFill>
-                <a:latin typeface="Microsoft JhengHei" pitchFamily="34" charset="0"/>
-                <a:ea typeface="Microsoft JhengHei" pitchFamily="34" charset="-122"/>
-                <a:cs typeface="Microsoft JhengHei" pitchFamily="34" charset="-120"/>
+                <a:latin typeface="Hiragino Sans" pitchFamily="34" charset="0"/>
+                <a:ea typeface="Hiragino Sans" pitchFamily="34" charset="-122"/>
+                <a:cs typeface="Hiragino Sans" pitchFamily="34" charset="-120"/>
               </a:rPr>
               <a:t>日 · 台 · 韓 · 星</a:t>
             </a:r>
@@ -3674,9 +3652,9 @@
                 <a:solidFill>
                   <a:srgbClr val="FFFFFF"/>
                 </a:solidFill>
-                <a:latin typeface="Microsoft JhengHei" pitchFamily="34" charset="0"/>
-                <a:ea typeface="Microsoft JhengHei" pitchFamily="34" charset="-122"/>
-                <a:cs typeface="Microsoft JhengHei" pitchFamily="34" charset="-120"/>
+                <a:latin typeface="Hiragino Sans" pitchFamily="34" charset="0"/>
+                <a:ea typeface="Hiragino Sans" pitchFamily="34" charset="-122"/>
+                <a:cs typeface="Hiragino Sans" pitchFamily="34" charset="-120"/>
               </a:rPr>
               <a:t>歐美船務端
 </a:t>
@@ -3692,9 +3670,9 @@
                 <a:solidFill>
                   <a:srgbClr val="C7D6E4"/>
                 </a:solidFill>
-                <a:latin typeface="Microsoft JhengHei" pitchFamily="34" charset="0"/>
-                <a:ea typeface="Microsoft JhengHei" pitchFamily="34" charset="-122"/>
-                <a:cs typeface="Microsoft JhengHei" pitchFamily="34" charset="-120"/>
+                <a:latin typeface="Hiragino Sans" pitchFamily="34" charset="0"/>
+                <a:ea typeface="Hiragino Sans" pitchFamily="34" charset="-122"/>
+                <a:cs typeface="Hiragino Sans" pitchFamily="34" charset="-120"/>
               </a:rPr>
               <a:t>EU · US</a:t>
             </a:r>
@@ -3785,9 +3763,9 @@
                 <a:solidFill>
                   <a:srgbClr val="FFFFFF"/>
                 </a:solidFill>
-                <a:latin typeface="Microsoft JhengHei" pitchFamily="34" charset="0"/>
-                <a:ea typeface="Microsoft JhengHei" pitchFamily="34" charset="-122"/>
-                <a:cs typeface="Microsoft JhengHei" pitchFamily="34" charset="-120"/>
+                <a:latin typeface="Hiragino Sans" pitchFamily="34" charset="0"/>
+                <a:ea typeface="Hiragino Sans" pitchFamily="34" charset="-122"/>
+                <a:cs typeface="Hiragino Sans" pitchFamily="34" charset="-120"/>
               </a:rPr>
               <a:t>R53</a:t>
             </a:r>
@@ -3827,9 +3805,9 @@
                 <a:solidFill>
                   <a:srgbClr val="FFFFFF"/>
                 </a:solidFill>
-                <a:latin typeface="Microsoft JhengHei" pitchFamily="34" charset="0"/>
-                <a:ea typeface="Microsoft JhengHei" pitchFamily="34" charset="-122"/>
-                <a:cs typeface="Microsoft JhengHei" pitchFamily="34" charset="-120"/>
+                <a:latin typeface="Hiragino Sans" pitchFamily="34" charset="0"/>
+                <a:ea typeface="Hiragino Sans" pitchFamily="34" charset="-122"/>
+                <a:cs typeface="Hiragino Sans" pitchFamily="34" charset="-120"/>
               </a:rPr>
               <a:t>Route 53
 </a:t>
@@ -3845,9 +3823,9 @@
                 <a:solidFill>
                   <a:srgbClr val="2A9D8F"/>
                 </a:solidFill>
-                <a:latin typeface="Microsoft JhengHei" pitchFamily="34" charset="0"/>
-                <a:ea typeface="Microsoft JhengHei" pitchFamily="34" charset="-122"/>
-                <a:cs typeface="Microsoft JhengHei" pitchFamily="34" charset="-120"/>
+                <a:latin typeface="Hiragino Sans" pitchFamily="34" charset="0"/>
+                <a:ea typeface="Hiragino Sans" pitchFamily="34" charset="-122"/>
+                <a:cs typeface="Hiragino Sans" pitchFamily="34" charset="-120"/>
               </a:rPr>
               <a:t>地理 / 延遲路由 · 健康檢查 failover</a:t>
             </a:r>
@@ -4097,9 +4075,9 @@
                 <a:solidFill>
                   <a:srgbClr val="FFFFFF"/>
                 </a:solidFill>
-                <a:latin typeface="Microsoft JhengHei" pitchFamily="34" charset="0"/>
-                <a:ea typeface="Microsoft JhengHei" pitchFamily="34" charset="-122"/>
-                <a:cs typeface="Microsoft JhengHei" pitchFamily="34" charset="-120"/>
+                <a:latin typeface="Hiragino Sans" pitchFamily="34" charset="0"/>
+                <a:ea typeface="Hiragino Sans" pitchFamily="34" charset="-122"/>
+                <a:cs typeface="Hiragino Sans" pitchFamily="34" charset="-120"/>
               </a:rPr>
               <a:t>區域 A</a:t>
             </a:r>
@@ -4111,9 +4089,9 @@
                 <a:solidFill>
                   <a:srgbClr val="C7D6E4"/>
                 </a:solidFill>
-                <a:latin typeface="Microsoft JhengHei" pitchFamily="34" charset="0"/>
-                <a:ea typeface="Microsoft JhengHei" pitchFamily="34" charset="-122"/>
-                <a:cs typeface="Microsoft JhengHei" pitchFamily="34" charset="-120"/>
+                <a:latin typeface="Hiragino Sans" pitchFamily="34" charset="0"/>
+                <a:ea typeface="Hiragino Sans" pitchFamily="34" charset="-122"/>
+                <a:cs typeface="Hiragino Sans" pitchFamily="34" charset="-120"/>
               </a:rPr>
               <a:t>　ap-northeast-1（東京）</a:t>
             </a:r>
@@ -4172,9 +4150,9 @@
                 <a:solidFill>
                   <a:srgbClr val="FFFFFF"/>
                 </a:solidFill>
-                <a:latin typeface="Microsoft JhengHei" pitchFamily="34" charset="0"/>
-                <a:ea typeface="Microsoft JhengHei" pitchFamily="34" charset="-122"/>
-                <a:cs typeface="Microsoft JhengHei" pitchFamily="34" charset="-120"/>
+                <a:latin typeface="Hiragino Sans" pitchFamily="34" charset="0"/>
+                <a:ea typeface="Hiragino Sans" pitchFamily="34" charset="-122"/>
+                <a:cs typeface="Hiragino Sans" pitchFamily="34" charset="-120"/>
               </a:rPr>
               <a:t>ACTIVE</a:t>
             </a:r>
@@ -4272,9 +4250,9 @@
                 <a:solidFill>
                   <a:srgbClr val="FFFFFF"/>
                 </a:solidFill>
-                <a:latin typeface="Microsoft JhengHei" pitchFamily="34" charset="0"/>
-                <a:ea typeface="Microsoft JhengHei" pitchFamily="34" charset="-122"/>
-                <a:cs typeface="Microsoft JhengHei" pitchFamily="34" charset="-120"/>
+                <a:latin typeface="Hiragino Sans" pitchFamily="34" charset="0"/>
+                <a:ea typeface="Hiragino Sans" pitchFamily="34" charset="-122"/>
+                <a:cs typeface="Hiragino Sans" pitchFamily="34" charset="-120"/>
               </a:rPr>
               <a:t>ALB</a:t>
             </a:r>
@@ -4314,9 +4292,9 @@
                 <a:solidFill>
                   <a:srgbClr val="FFFFFF"/>
                 </a:solidFill>
-                <a:latin typeface="Microsoft JhengHei" pitchFamily="34" charset="0"/>
-                <a:ea typeface="Microsoft JhengHei" pitchFamily="34" charset="-122"/>
-                <a:cs typeface="Microsoft JhengHei" pitchFamily="34" charset="-120"/>
+                <a:latin typeface="Hiragino Sans" pitchFamily="34" charset="0"/>
+                <a:ea typeface="Hiragino Sans" pitchFamily="34" charset="-122"/>
+                <a:cs typeface="Hiragino Sans" pitchFamily="34" charset="-120"/>
               </a:rPr>
               <a:t>ALB</a:t>
             </a:r>
@@ -4356,9 +4334,9 @@
                 <a:solidFill>
                   <a:srgbClr val="C7D6E4"/>
                 </a:solidFill>
-                <a:latin typeface="Microsoft JhengHei" pitchFamily="34" charset="0"/>
-                <a:ea typeface="Microsoft JhengHei" pitchFamily="34" charset="-122"/>
-                <a:cs typeface="Microsoft JhengHei" pitchFamily="34" charset="-120"/>
+                <a:latin typeface="Hiragino Sans" pitchFamily="34" charset="0"/>
+                <a:ea typeface="Hiragino Sans" pitchFamily="34" charset="-122"/>
+                <a:cs typeface="Hiragino Sans" pitchFamily="34" charset="-120"/>
               </a:rPr>
               <a:t>區域入口</a:t>
             </a:r>
@@ -4456,9 +4434,9 @@
                 <a:solidFill>
                   <a:srgbClr val="FFFFFF"/>
                 </a:solidFill>
-                <a:latin typeface="Microsoft JhengHei" pitchFamily="34" charset="0"/>
-                <a:ea typeface="Microsoft JhengHei" pitchFamily="34" charset="-122"/>
-                <a:cs typeface="Microsoft JhengHei" pitchFamily="34" charset="-120"/>
+                <a:latin typeface="Hiragino Sans" pitchFamily="34" charset="0"/>
+                <a:ea typeface="Hiragino Sans" pitchFamily="34" charset="-122"/>
+                <a:cs typeface="Hiragino Sans" pitchFamily="34" charset="-120"/>
               </a:rPr>
               <a:t>ECS</a:t>
             </a:r>
@@ -4498,9 +4476,9 @@
                 <a:solidFill>
                   <a:srgbClr val="FFFFFF"/>
                 </a:solidFill>
-                <a:latin typeface="Microsoft JhengHei" pitchFamily="34" charset="0"/>
-                <a:ea typeface="Microsoft JhengHei" pitchFamily="34" charset="-122"/>
-                <a:cs typeface="Microsoft JhengHei" pitchFamily="34" charset="-120"/>
+                <a:latin typeface="Hiragino Sans" pitchFamily="34" charset="0"/>
+                <a:ea typeface="Hiragino Sans" pitchFamily="34" charset="-122"/>
+                <a:cs typeface="Hiragino Sans" pitchFamily="34" charset="-120"/>
               </a:rPr>
               <a:t>ECS</a:t>
             </a:r>
@@ -4540,9 +4518,9 @@
                 <a:solidFill>
                   <a:srgbClr val="C7D6E4"/>
                 </a:solidFill>
-                <a:latin typeface="Microsoft JhengHei" pitchFamily="34" charset="0"/>
-                <a:ea typeface="Microsoft JhengHei" pitchFamily="34" charset="-122"/>
-                <a:cs typeface="Microsoft JhengHei" pitchFamily="34" charset="-120"/>
+                <a:latin typeface="Hiragino Sans" pitchFamily="34" charset="0"/>
+                <a:ea typeface="Hiragino Sans" pitchFamily="34" charset="-122"/>
+                <a:cs typeface="Hiragino Sans" pitchFamily="34" charset="-120"/>
               </a:rPr>
               <a:t>私有子網</a:t>
             </a:r>
@@ -4664,9 +4642,9 @@
                 <a:solidFill>
                   <a:srgbClr val="0A2540"/>
                 </a:solidFill>
-                <a:latin typeface="Microsoft JhengHei" pitchFamily="34" charset="0"/>
-                <a:ea typeface="Microsoft JhengHei" pitchFamily="34" charset="-122"/>
-                <a:cs typeface="Microsoft JhengHei" pitchFamily="34" charset="-120"/>
+                <a:latin typeface="Hiragino Sans" pitchFamily="34" charset="0"/>
+                <a:ea typeface="Hiragino Sans" pitchFamily="34" charset="-122"/>
+                <a:cs typeface="Hiragino Sans" pitchFamily="34" charset="-120"/>
               </a:rPr>
               <a:t>DDB</a:t>
             </a:r>
@@ -4706,9 +4684,9 @@
                 <a:solidFill>
                   <a:srgbClr val="FFFFFF"/>
                 </a:solidFill>
-                <a:latin typeface="Microsoft JhengHei" pitchFamily="34" charset="0"/>
-                <a:ea typeface="Microsoft JhengHei" pitchFamily="34" charset="-122"/>
-                <a:cs typeface="Microsoft JhengHei" pitchFamily="34" charset="-120"/>
+                <a:latin typeface="Hiragino Sans" pitchFamily="34" charset="0"/>
+                <a:ea typeface="Hiragino Sans" pitchFamily="34" charset="-122"/>
+                <a:cs typeface="Hiragino Sans" pitchFamily="34" charset="-120"/>
               </a:rPr>
               <a:t>DynamoDB</a:t>
             </a:r>
@@ -4748,9 +4726,9 @@
                 <a:solidFill>
                   <a:srgbClr val="C7D6E4"/>
                 </a:solidFill>
-                <a:latin typeface="Microsoft JhengHei" pitchFamily="34" charset="0"/>
-                <a:ea typeface="Microsoft JhengHei" pitchFamily="34" charset="-122"/>
-                <a:cs typeface="Microsoft JhengHei" pitchFamily="34" charset="-120"/>
+                <a:latin typeface="Hiragino Sans" pitchFamily="34" charset="0"/>
+                <a:ea typeface="Hiragino Sans" pitchFamily="34" charset="-122"/>
+                <a:cs typeface="Hiragino Sans" pitchFamily="34" charset="-120"/>
               </a:rPr>
               <a:t>Global Table</a:t>
             </a:r>
@@ -4848,9 +4826,9 @@
                 <a:solidFill>
                   <a:srgbClr val="FFFFFF"/>
                 </a:solidFill>
-                <a:latin typeface="Microsoft JhengHei" pitchFamily="34" charset="0"/>
-                <a:ea typeface="Microsoft JhengHei" pitchFamily="34" charset="-122"/>
-                <a:cs typeface="Microsoft JhengHei" pitchFamily="34" charset="-120"/>
+                <a:latin typeface="Hiragino Sans" pitchFamily="34" charset="0"/>
+                <a:ea typeface="Hiragino Sans" pitchFamily="34" charset="-122"/>
+                <a:cs typeface="Hiragino Sans" pitchFamily="34" charset="-120"/>
               </a:rPr>
               <a:t>S3</a:t>
             </a:r>
@@ -4890,9 +4868,9 @@
                 <a:solidFill>
                   <a:srgbClr val="FFFFFF"/>
                 </a:solidFill>
-                <a:latin typeface="Microsoft JhengHei" pitchFamily="34" charset="0"/>
-                <a:ea typeface="Microsoft JhengHei" pitchFamily="34" charset="-122"/>
-                <a:cs typeface="Microsoft JhengHei" pitchFamily="34" charset="-120"/>
+                <a:latin typeface="Hiragino Sans" pitchFamily="34" charset="0"/>
+                <a:ea typeface="Hiragino Sans" pitchFamily="34" charset="-122"/>
+                <a:cs typeface="Hiragino Sans" pitchFamily="34" charset="-120"/>
               </a:rPr>
               <a:t>S3</a:t>
             </a:r>
@@ -4932,9 +4910,9 @@
                 <a:solidFill>
                   <a:srgbClr val="C7D6E4"/>
                 </a:solidFill>
-                <a:latin typeface="Microsoft JhengHei" pitchFamily="34" charset="0"/>
-                <a:ea typeface="Microsoft JhengHei" pitchFamily="34" charset="-122"/>
-                <a:cs typeface="Microsoft JhengHei" pitchFamily="34" charset="-120"/>
+                <a:latin typeface="Hiragino Sans" pitchFamily="34" charset="0"/>
+                <a:ea typeface="Hiragino Sans" pitchFamily="34" charset="-122"/>
+                <a:cs typeface="Hiragino Sans" pitchFamily="34" charset="-120"/>
               </a:rPr>
               <a:t>跨區複製源</a:t>
             </a:r>
@@ -5042,9 +5020,9 @@
                 <a:solidFill>
                   <a:srgbClr val="FFFFFF"/>
                 </a:solidFill>
-                <a:latin typeface="Microsoft JhengHei" pitchFamily="34" charset="0"/>
-                <a:ea typeface="Microsoft JhengHei" pitchFamily="34" charset="-122"/>
-                <a:cs typeface="Microsoft JhengHei" pitchFamily="34" charset="-120"/>
+                <a:latin typeface="Hiragino Sans" pitchFamily="34" charset="0"/>
+                <a:ea typeface="Hiragino Sans" pitchFamily="34" charset="-122"/>
+                <a:cs typeface="Hiragino Sans" pitchFamily="34" charset="-120"/>
               </a:rPr>
               <a:t>區域 B</a:t>
             </a:r>
@@ -5056,9 +5034,9 @@
                 <a:solidFill>
                   <a:srgbClr val="C7D6E4"/>
                 </a:solidFill>
-                <a:latin typeface="Microsoft JhengHei" pitchFamily="34" charset="0"/>
-                <a:ea typeface="Microsoft JhengHei" pitchFamily="34" charset="-122"/>
-                <a:cs typeface="Microsoft JhengHei" pitchFamily="34" charset="-120"/>
+                <a:latin typeface="Hiragino Sans" pitchFamily="34" charset="0"/>
+                <a:ea typeface="Hiragino Sans" pitchFamily="34" charset="-122"/>
+                <a:cs typeface="Hiragino Sans" pitchFamily="34" charset="-120"/>
               </a:rPr>
               <a:t>　us-east-1（維吉尼亞）</a:t>
             </a:r>
@@ -5117,9 +5095,9 @@
                 <a:solidFill>
                   <a:srgbClr val="FFFFFF"/>
                 </a:solidFill>
-                <a:latin typeface="Microsoft JhengHei" pitchFamily="34" charset="0"/>
-                <a:ea typeface="Microsoft JhengHei" pitchFamily="34" charset="-122"/>
-                <a:cs typeface="Microsoft JhengHei" pitchFamily="34" charset="-120"/>
+                <a:latin typeface="Hiragino Sans" pitchFamily="34" charset="0"/>
+                <a:ea typeface="Hiragino Sans" pitchFamily="34" charset="-122"/>
+                <a:cs typeface="Hiragino Sans" pitchFamily="34" charset="-120"/>
               </a:rPr>
               <a:t>ACTIVE</a:t>
             </a:r>
@@ -5217,9 +5195,9 @@
                 <a:solidFill>
                   <a:srgbClr val="FFFFFF"/>
                 </a:solidFill>
-                <a:latin typeface="Microsoft JhengHei" pitchFamily="34" charset="0"/>
-                <a:ea typeface="Microsoft JhengHei" pitchFamily="34" charset="-122"/>
-                <a:cs typeface="Microsoft JhengHei" pitchFamily="34" charset="-120"/>
+                <a:latin typeface="Hiragino Sans" pitchFamily="34" charset="0"/>
+                <a:ea typeface="Hiragino Sans" pitchFamily="34" charset="-122"/>
+                <a:cs typeface="Hiragino Sans" pitchFamily="34" charset="-120"/>
               </a:rPr>
               <a:t>ALB</a:t>
             </a:r>
@@ -5259,9 +5237,9 @@
                 <a:solidFill>
                   <a:srgbClr val="FFFFFF"/>
                 </a:solidFill>
-                <a:latin typeface="Microsoft JhengHei" pitchFamily="34" charset="0"/>
-                <a:ea typeface="Microsoft JhengHei" pitchFamily="34" charset="-122"/>
-                <a:cs typeface="Microsoft JhengHei" pitchFamily="34" charset="-120"/>
+                <a:latin typeface="Hiragino Sans" pitchFamily="34" charset="0"/>
+                <a:ea typeface="Hiragino Sans" pitchFamily="34" charset="-122"/>
+                <a:cs typeface="Hiragino Sans" pitchFamily="34" charset="-120"/>
               </a:rPr>
               <a:t>ALB</a:t>
             </a:r>
@@ -5301,9 +5279,9 @@
                 <a:solidFill>
                   <a:srgbClr val="C7D6E4"/>
                 </a:solidFill>
-                <a:latin typeface="Microsoft JhengHei" pitchFamily="34" charset="0"/>
-                <a:ea typeface="Microsoft JhengHei" pitchFamily="34" charset="-122"/>
-                <a:cs typeface="Microsoft JhengHei" pitchFamily="34" charset="-120"/>
+                <a:latin typeface="Hiragino Sans" pitchFamily="34" charset="0"/>
+                <a:ea typeface="Hiragino Sans" pitchFamily="34" charset="-122"/>
+                <a:cs typeface="Hiragino Sans" pitchFamily="34" charset="-120"/>
               </a:rPr>
               <a:t>區域入口</a:t>
             </a:r>
@@ -5401,9 +5379,9 @@
                 <a:solidFill>
                   <a:srgbClr val="FFFFFF"/>
                 </a:solidFill>
-                <a:latin typeface="Microsoft JhengHei" pitchFamily="34" charset="0"/>
-                <a:ea typeface="Microsoft JhengHei" pitchFamily="34" charset="-122"/>
-                <a:cs typeface="Microsoft JhengHei" pitchFamily="34" charset="-120"/>
+                <a:latin typeface="Hiragino Sans" pitchFamily="34" charset="0"/>
+                <a:ea typeface="Hiragino Sans" pitchFamily="34" charset="-122"/>
+                <a:cs typeface="Hiragino Sans" pitchFamily="34" charset="-120"/>
               </a:rPr>
               <a:t>ECS</a:t>
             </a:r>
@@ -5443,9 +5421,9 @@
                 <a:solidFill>
                   <a:srgbClr val="FFFFFF"/>
                 </a:solidFill>
-                <a:latin typeface="Microsoft JhengHei" pitchFamily="34" charset="0"/>
-                <a:ea typeface="Microsoft JhengHei" pitchFamily="34" charset="-122"/>
-                <a:cs typeface="Microsoft JhengHei" pitchFamily="34" charset="-120"/>
+                <a:latin typeface="Hiragino Sans" pitchFamily="34" charset="0"/>
+                <a:ea typeface="Hiragino Sans" pitchFamily="34" charset="-122"/>
+                <a:cs typeface="Hiragino Sans" pitchFamily="34" charset="-120"/>
               </a:rPr>
               <a:t>ECS</a:t>
             </a:r>
@@ -5485,9 +5463,9 @@
                 <a:solidFill>
                   <a:srgbClr val="C7D6E4"/>
                 </a:solidFill>
-                <a:latin typeface="Microsoft JhengHei" pitchFamily="34" charset="0"/>
-                <a:ea typeface="Microsoft JhengHei" pitchFamily="34" charset="-122"/>
-                <a:cs typeface="Microsoft JhengHei" pitchFamily="34" charset="-120"/>
+                <a:latin typeface="Hiragino Sans" pitchFamily="34" charset="0"/>
+                <a:ea typeface="Hiragino Sans" pitchFamily="34" charset="-122"/>
+                <a:cs typeface="Hiragino Sans" pitchFamily="34" charset="-120"/>
               </a:rPr>
               <a:t>私有子網</a:t>
             </a:r>
@@ -5609,9 +5587,9 @@
                 <a:solidFill>
                   <a:srgbClr val="0A2540"/>
                 </a:solidFill>
-                <a:latin typeface="Microsoft JhengHei" pitchFamily="34" charset="0"/>
-                <a:ea typeface="Microsoft JhengHei" pitchFamily="34" charset="-122"/>
-                <a:cs typeface="Microsoft JhengHei" pitchFamily="34" charset="-120"/>
+                <a:latin typeface="Hiragino Sans" pitchFamily="34" charset="0"/>
+                <a:ea typeface="Hiragino Sans" pitchFamily="34" charset="-122"/>
+                <a:cs typeface="Hiragino Sans" pitchFamily="34" charset="-120"/>
               </a:rPr>
               <a:t>DDB</a:t>
             </a:r>
@@ -5651,9 +5629,9 @@
                 <a:solidFill>
                   <a:srgbClr val="FFFFFF"/>
                 </a:solidFill>
-                <a:latin typeface="Microsoft JhengHei" pitchFamily="34" charset="0"/>
-                <a:ea typeface="Microsoft JhengHei" pitchFamily="34" charset="-122"/>
-                <a:cs typeface="Microsoft JhengHei" pitchFamily="34" charset="-120"/>
+                <a:latin typeface="Hiragino Sans" pitchFamily="34" charset="0"/>
+                <a:ea typeface="Hiragino Sans" pitchFamily="34" charset="-122"/>
+                <a:cs typeface="Hiragino Sans" pitchFamily="34" charset="-120"/>
               </a:rPr>
               <a:t>DynamoDB</a:t>
             </a:r>
@@ -5693,9 +5671,9 @@
                 <a:solidFill>
                   <a:srgbClr val="C7D6E4"/>
                 </a:solidFill>
-                <a:latin typeface="Microsoft JhengHei" pitchFamily="34" charset="0"/>
-                <a:ea typeface="Microsoft JhengHei" pitchFamily="34" charset="-122"/>
-                <a:cs typeface="Microsoft JhengHei" pitchFamily="34" charset="-120"/>
+                <a:latin typeface="Hiragino Sans" pitchFamily="34" charset="0"/>
+                <a:ea typeface="Hiragino Sans" pitchFamily="34" charset="-122"/>
+                <a:cs typeface="Hiragino Sans" pitchFamily="34" charset="-120"/>
               </a:rPr>
               <a:t>Global Table</a:t>
             </a:r>
@@ -5793,9 +5771,9 @@
                 <a:solidFill>
                   <a:srgbClr val="FFFFFF"/>
                 </a:solidFill>
-                <a:latin typeface="Microsoft JhengHei" pitchFamily="34" charset="0"/>
-                <a:ea typeface="Microsoft JhengHei" pitchFamily="34" charset="-122"/>
-                <a:cs typeface="Microsoft JhengHei" pitchFamily="34" charset="-120"/>
+                <a:latin typeface="Hiragino Sans" pitchFamily="34" charset="0"/>
+                <a:ea typeface="Hiragino Sans" pitchFamily="34" charset="-122"/>
+                <a:cs typeface="Hiragino Sans" pitchFamily="34" charset="-120"/>
               </a:rPr>
               <a:t>S3</a:t>
             </a:r>
@@ -5835,9 +5813,9 @@
                 <a:solidFill>
                   <a:srgbClr val="FFFFFF"/>
                 </a:solidFill>
-                <a:latin typeface="Microsoft JhengHei" pitchFamily="34" charset="0"/>
-                <a:ea typeface="Microsoft JhengHei" pitchFamily="34" charset="-122"/>
-                <a:cs typeface="Microsoft JhengHei" pitchFamily="34" charset="-120"/>
+                <a:latin typeface="Hiragino Sans" pitchFamily="34" charset="0"/>
+                <a:ea typeface="Hiragino Sans" pitchFamily="34" charset="-122"/>
+                <a:cs typeface="Hiragino Sans" pitchFamily="34" charset="-120"/>
               </a:rPr>
               <a:t>S3</a:t>
             </a:r>
@@ -5877,9 +5855,9 @@
                 <a:solidFill>
                   <a:srgbClr val="C7D6E4"/>
                 </a:solidFill>
-                <a:latin typeface="Microsoft JhengHei" pitchFamily="34" charset="0"/>
-                <a:ea typeface="Microsoft JhengHei" pitchFamily="34" charset="-122"/>
-                <a:cs typeface="Microsoft JhengHei" pitchFamily="34" charset="-120"/>
+                <a:latin typeface="Hiragino Sans" pitchFamily="34" charset="0"/>
+                <a:ea typeface="Hiragino Sans" pitchFamily="34" charset="-122"/>
+                <a:cs typeface="Hiragino Sans" pitchFamily="34" charset="-120"/>
               </a:rPr>
               <a:t>跨區複製源</a:t>
             </a:r>
@@ -5945,9 +5923,9 @@
                 <a:solidFill>
                   <a:srgbClr val="F4A72B"/>
                 </a:solidFill>
-                <a:latin typeface="Microsoft JhengHei" pitchFamily="34" charset="0"/>
-                <a:ea typeface="Microsoft JhengHei" pitchFamily="34" charset="-122"/>
-                <a:cs typeface="Microsoft JhengHei" pitchFamily="34" charset="-120"/>
+                <a:latin typeface="Hiragino Sans" pitchFamily="34" charset="0"/>
+                <a:ea typeface="Hiragino Sans" pitchFamily="34" charset="-122"/>
+                <a:cs typeface="Hiragino Sans" pitchFamily="34" charset="-120"/>
               </a:rPr>
               <a:t>跨區複製 · 匯總</a:t>
             </a:r>
@@ -6009,9 +5987,9 @@
                 <a:solidFill>
                   <a:srgbClr val="F4A72B"/>
                 </a:solidFill>
-                <a:latin typeface="Microsoft JhengHei" pitchFamily="34" charset="0"/>
-                <a:ea typeface="Microsoft JhengHei" pitchFamily="34" charset="-122"/>
-                <a:cs typeface="Microsoft JhengHei" pitchFamily="34" charset="-120"/>
+                <a:latin typeface="Hiragino Sans" pitchFamily="34" charset="0"/>
+                <a:ea typeface="Hiragino Sans" pitchFamily="34" charset="-122"/>
+                <a:cs typeface="Hiragino Sans" pitchFamily="34" charset="-120"/>
               </a:rPr>
               <a:t>DynamoDB
 </a:t>
@@ -6027,9 +6005,9 @@
                 <a:solidFill>
                   <a:srgbClr val="C7D6E4"/>
                 </a:solidFill>
-                <a:latin typeface="Microsoft JhengHei" pitchFamily="34" charset="0"/>
-                <a:ea typeface="Microsoft JhengHei" pitchFamily="34" charset="-122"/>
-                <a:cs typeface="Microsoft JhengHei" pitchFamily="34" charset="-120"/>
+                <a:latin typeface="Hiragino Sans" pitchFamily="34" charset="0"/>
+                <a:ea typeface="Hiragino Sans" pitchFamily="34" charset="-122"/>
+                <a:cs typeface="Hiragino Sans" pitchFamily="34" charset="-120"/>
               </a:rPr>
               <a:t>Global Tables ⇄ 雙向</a:t>
             </a:r>
@@ -6091,9 +6069,9 @@
                 <a:solidFill>
                   <a:srgbClr val="2A9D8F"/>
                 </a:solidFill>
-                <a:latin typeface="Microsoft JhengHei" pitchFamily="34" charset="0"/>
-                <a:ea typeface="Microsoft JhengHei" pitchFamily="34" charset="-122"/>
-                <a:cs typeface="Microsoft JhengHei" pitchFamily="34" charset="-120"/>
+                <a:latin typeface="Hiragino Sans" pitchFamily="34" charset="0"/>
+                <a:ea typeface="Hiragino Sans" pitchFamily="34" charset="-122"/>
+                <a:cs typeface="Hiragino Sans" pitchFamily="34" charset="-120"/>
               </a:rPr>
               <a:t>S3 CRR
 </a:t>
@@ -6109,9 +6087,9 @@
                 <a:solidFill>
                   <a:srgbClr val="C7D6E4"/>
                 </a:solidFill>
-                <a:latin typeface="Microsoft JhengHei" pitchFamily="34" charset="0"/>
-                <a:ea typeface="Microsoft JhengHei" pitchFamily="34" charset="-122"/>
-                <a:cs typeface="Microsoft JhengHei" pitchFamily="34" charset="-120"/>
+                <a:latin typeface="Hiragino Sans" pitchFamily="34" charset="0"/>
+                <a:ea typeface="Hiragino Sans" pitchFamily="34" charset="-122"/>
+                <a:cs typeface="Hiragino Sans" pitchFamily="34" charset="-120"/>
               </a:rPr>
               <a:t>跨區複製備份</a:t>
             </a:r>
@@ -6173,9 +6151,9 @@
                 <a:solidFill>
                   <a:srgbClr val="C7D6E4"/>
                 </a:solidFill>
-                <a:latin typeface="Microsoft JhengHei" pitchFamily="34" charset="0"/>
-                <a:ea typeface="Microsoft JhengHei" pitchFamily="34" charset="-122"/>
-                <a:cs typeface="Microsoft JhengHei" pitchFamily="34" charset="-120"/>
+                <a:latin typeface="Hiragino Sans" pitchFamily="34" charset="0"/>
+                <a:ea typeface="Hiragino Sans" pitchFamily="34" charset="-122"/>
+                <a:cs typeface="Hiragino Sans" pitchFamily="34" charset="-120"/>
               </a:rPr>
               <a:t>EventBridge
 </a:t>
@@ -6191,9 +6169,9 @@
                 <a:solidFill>
                   <a:srgbClr val="C7D6E4"/>
                 </a:solidFill>
-                <a:latin typeface="Microsoft JhengHei" pitchFamily="34" charset="0"/>
-                <a:ea typeface="Microsoft JhengHei" pitchFamily="34" charset="-122"/>
-                <a:cs typeface="Microsoft JhengHei" pitchFamily="34" charset="-120"/>
+                <a:latin typeface="Hiragino Sans" pitchFamily="34" charset="0"/>
+                <a:ea typeface="Hiragino Sans" pitchFamily="34" charset="-122"/>
+                <a:cs typeface="Hiragino Sans" pitchFamily="34" charset="-120"/>
               </a:rPr>
               <a:t>跨區匯總</a:t>
             </a:r>
@@ -6255,9 +6233,9 @@
                 <a:solidFill>
                   <a:srgbClr val="E76F51"/>
                 </a:solidFill>
-                <a:latin typeface="Microsoft JhengHei" pitchFamily="34" charset="0"/>
-                <a:ea typeface="Microsoft JhengHei" pitchFamily="34" charset="-122"/>
-                <a:cs typeface="Microsoft JhengHei" pitchFamily="34" charset="-120"/>
+                <a:latin typeface="Hiragino Sans" pitchFamily="34" charset="0"/>
+                <a:ea typeface="Hiragino Sans" pitchFamily="34" charset="-122"/>
+                <a:cs typeface="Hiragino Sans" pitchFamily="34" charset="-120"/>
               </a:rPr>
               <a:t>SNS / SES
 </a:t>
@@ -6273,9 +6251,9 @@
                 <a:solidFill>
                   <a:srgbClr val="C7D6E4"/>
                 </a:solidFill>
-                <a:latin typeface="Microsoft JhengHei" pitchFamily="34" charset="0"/>
-                <a:ea typeface="Microsoft JhengHei" pitchFamily="34" charset="-122"/>
-                <a:cs typeface="Microsoft JhengHei" pitchFamily="34" charset="-120"/>
+                <a:latin typeface="Hiragino Sans" pitchFamily="34" charset="0"/>
+                <a:ea typeface="Hiragino Sans" pitchFamily="34" charset="-122"/>
+                <a:cs typeface="Hiragino Sans" pitchFamily="34" charset="-120"/>
               </a:rPr>
               <a:t>即時告警</a:t>
             </a:r>
@@ -6394,9 +6372,9 @@
                 <a:solidFill>
                   <a:srgbClr val="F4A72B"/>
                 </a:solidFill>
-                <a:latin typeface="Microsoft JhengHei" pitchFamily="34" charset="0"/>
-                <a:ea typeface="Microsoft JhengHei" pitchFamily="34" charset="-122"/>
-                <a:cs typeface="Microsoft JhengHei" pitchFamily="34" charset="-120"/>
+                <a:latin typeface="Hiragino Sans" pitchFamily="34" charset="0"/>
+                <a:ea typeface="Hiragino Sans" pitchFamily="34" charset="-122"/>
+                <a:cs typeface="Hiragino Sans" pitchFamily="34" charset="-120"/>
               </a:rPr>
               <a:t>◆ 一區故障　</a:t>
             </a:r>
@@ -6411,9 +6389,9 @@
                 <a:solidFill>
                   <a:srgbClr val="FFFFFF"/>
                 </a:solidFill>
-                <a:latin typeface="Microsoft JhengHei" pitchFamily="34" charset="0"/>
-                <a:ea typeface="Microsoft JhengHei" pitchFamily="34" charset="-122"/>
-                <a:cs typeface="Microsoft JhengHei" pitchFamily="34" charset="-120"/>
+                <a:latin typeface="Hiragino Sans" pitchFamily="34" charset="0"/>
+                <a:ea typeface="Hiragino Sans" pitchFamily="34" charset="-122"/>
+                <a:cs typeface="Hiragino Sans" pitchFamily="34" charset="-120"/>
               </a:rPr>
               <a:t>健康檢查失敗 → Route 53 自動剔除故障區、流量全導健康區；DynamoDB Global Tables 已雙向同步、S3 CRR 已備份 → RPO≈0、資料不丟、對外服務不中斷。</a:t>
             </a:r>
@@ -6635,9 +6613,9 @@
                 <a:solidFill>
                   <a:srgbClr val="FFFFFF"/>
                 </a:solidFill>
-                <a:latin typeface="Microsoft JhengHei" pitchFamily="34" charset="0"/>
-                <a:ea typeface="Microsoft JhengHei" pitchFamily="34" charset="-122"/>
-                <a:cs typeface="Microsoft JhengHei" pitchFamily="34" charset="-120"/>
+                <a:latin typeface="Hiragino Sans" pitchFamily="34" charset="0"/>
+                <a:ea typeface="Hiragino Sans" pitchFamily="34" charset="-122"/>
+                <a:cs typeface="Hiragino Sans" pitchFamily="34" charset="-120"/>
               </a:rPr>
               <a:t>11</a:t>
             </a:r>
@@ -6649,9 +6627,9 @@
                 <a:solidFill>
                   <a:srgbClr val="8FA8BD"/>
                 </a:solidFill>
-                <a:latin typeface="Microsoft JhengHei" pitchFamily="34" charset="0"/>
-                <a:ea typeface="Microsoft JhengHei" pitchFamily="34" charset="-122"/>
-                <a:cs typeface="Microsoft JhengHei" pitchFamily="34" charset="-120"/>
+                <a:latin typeface="Hiragino Sans" pitchFamily="34" charset="0"/>
+                <a:ea typeface="Hiragino Sans" pitchFamily="34" charset="-122"/>
+                <a:cs typeface="Hiragino Sans" pitchFamily="34" charset="-120"/>
               </a:rPr>
               <a:t>  /  15</a:t>
             </a:r>
@@ -6688,9 +6666,9 @@
                 <a:solidFill>
                   <a:srgbClr val="F4A72B"/>
                 </a:solidFill>
-                <a:latin typeface="Microsoft JhengHei" pitchFamily="34" charset="0"/>
-                <a:ea typeface="Microsoft JhengHei" pitchFamily="34" charset="-122"/>
-                <a:cs typeface="Microsoft JhengHei" pitchFamily="34" charset="-120"/>
+                <a:latin typeface="Hiragino Sans" pitchFamily="34" charset="0"/>
+                <a:ea typeface="Hiragino Sans" pitchFamily="34" charset="-122"/>
+                <a:cs typeface="Hiragino Sans" pitchFamily="34" charset="-120"/>
               </a:rPr>
               <a:t>SIDE-BY-SIDE</a:t>
             </a:r>
@@ -6727,9 +6705,9 @@
                 <a:solidFill>
                   <a:srgbClr val="FFFFFF"/>
                 </a:solidFill>
-                <a:latin typeface="Microsoft JhengHei" pitchFamily="34" charset="0"/>
-                <a:ea typeface="Microsoft JhengHei" pitchFamily="34" charset="-122"/>
-                <a:cs typeface="Microsoft JhengHei" pitchFamily="34" charset="-120"/>
+                <a:latin typeface="Hiragino Sans" pitchFamily="34" charset="0"/>
+                <a:ea typeface="Hiragino Sans" pitchFamily="34" charset="-122"/>
+                <a:cs typeface="Hiragino Sans" pitchFamily="34" charset="-120"/>
               </a:rPr>
               <a:t>五案比較 — 現行方案 A 為出賽基準線</a:t>
             </a:r>
@@ -6782,16 +6760,16 @@
                           <a:solidFill>
                             <a:srgbClr val="FFFFFF"/>
                           </a:solidFill>
-                          <a:latin typeface="Microsoft JhengHei" pitchFamily="34" charset="0"/>
-                          <a:ea typeface="Microsoft JhengHei" pitchFamily="34" charset="-122"/>
-                          <a:cs typeface="Microsoft JhengHei" pitchFamily="34" charset="-120"/>
+                          <a:latin typeface="Hiragino Sans" pitchFamily="34" charset="0"/>
+                          <a:ea typeface="Hiragino Sans" pitchFamily="34" charset="-122"/>
+                          <a:cs typeface="Hiragino Sans" pitchFamily="34" charset="-120"/>
                         </a:rPr>
                         <a:t>方案</a:t>
                       </a:r>
                       <a:endParaRPr lang="en-US" sz="1150" dirty="0">
-                        <a:latin typeface="Microsoft JhengHei" charset="0"/>
-                        <a:ea typeface="Microsoft JhengHei" charset="0"/>
-                        <a:cs typeface="Microsoft JhengHei" charset="0"/>
+                        <a:latin typeface="Hiragino Sans" charset="0"/>
+                        <a:ea typeface="Hiragino Sans" charset="0"/>
+                        <a:cs typeface="Hiragino Sans" charset="0"/>
                       </a:endParaRPr>
                     </a:p>
                   </a:txBody>
@@ -6850,16 +6828,16 @@
                           <a:solidFill>
                             <a:srgbClr val="FFFFFF"/>
                           </a:solidFill>
-                          <a:latin typeface="Microsoft JhengHei" pitchFamily="34" charset="0"/>
-                          <a:ea typeface="Microsoft JhengHei" pitchFamily="34" charset="-122"/>
-                          <a:cs typeface="Microsoft JhengHei" pitchFamily="34" charset="-120"/>
+                          <a:latin typeface="Hiragino Sans" pitchFamily="34" charset="0"/>
+                          <a:ea typeface="Hiragino Sans" pitchFamily="34" charset="-122"/>
+                          <a:cs typeface="Hiragino Sans" pitchFamily="34" charset="-120"/>
                         </a:rPr>
                         <a:t>運算</a:t>
                       </a:r>
                       <a:endParaRPr lang="en-US" sz="1150" dirty="0">
-                        <a:latin typeface="Microsoft JhengHei" charset="0"/>
-                        <a:ea typeface="Microsoft JhengHei" charset="0"/>
-                        <a:cs typeface="Microsoft JhengHei" charset="0"/>
+                        <a:latin typeface="Hiragino Sans" charset="0"/>
+                        <a:ea typeface="Hiragino Sans" charset="0"/>
+                        <a:cs typeface="Hiragino Sans" charset="0"/>
                       </a:endParaRPr>
                     </a:p>
                   </a:txBody>
@@ -6918,16 +6896,16 @@
                           <a:solidFill>
                             <a:srgbClr val="FFFFFF"/>
                           </a:solidFill>
-                          <a:latin typeface="Microsoft JhengHei" pitchFamily="34" charset="0"/>
-                          <a:ea typeface="Microsoft JhengHei" pitchFamily="34" charset="-122"/>
-                          <a:cs typeface="Microsoft JhengHei" pitchFamily="34" charset="-120"/>
+                          <a:latin typeface="Hiragino Sans" pitchFamily="34" charset="0"/>
+                          <a:ea typeface="Hiragino Sans" pitchFamily="34" charset="-122"/>
+                          <a:cs typeface="Hiragino Sans" pitchFamily="34" charset="-120"/>
                         </a:rPr>
                         <a:t>入口 / URL</a:t>
                       </a:r>
                       <a:endParaRPr lang="en-US" sz="1150" dirty="0">
-                        <a:latin typeface="Microsoft JhengHei" charset="0"/>
-                        <a:ea typeface="Microsoft JhengHei" charset="0"/>
-                        <a:cs typeface="Microsoft JhengHei" charset="0"/>
+                        <a:latin typeface="Hiragino Sans" charset="0"/>
+                        <a:ea typeface="Hiragino Sans" charset="0"/>
+                        <a:cs typeface="Hiragino Sans" charset="0"/>
                       </a:endParaRPr>
                     </a:p>
                   </a:txBody>
@@ -6986,16 +6964,16 @@
                           <a:solidFill>
                             <a:srgbClr val="FFFFFF"/>
                           </a:solidFill>
-                          <a:latin typeface="Microsoft JhengHei" pitchFamily="34" charset="0"/>
-                          <a:ea typeface="Microsoft JhengHei" pitchFamily="34" charset="-122"/>
-                          <a:cs typeface="Microsoft JhengHei" pitchFamily="34" charset="-120"/>
+                          <a:latin typeface="Hiragino Sans" pitchFamily="34" charset="0"/>
+                          <a:ea typeface="Hiragino Sans" pitchFamily="34" charset="-122"/>
+                          <a:cs typeface="Hiragino Sans" pitchFamily="34" charset="-120"/>
                         </a:rPr>
                         <a:t>閒置成本</a:t>
                       </a:r>
                       <a:endParaRPr lang="en-US" sz="1150" dirty="0">
-                        <a:latin typeface="Microsoft JhengHei" charset="0"/>
-                        <a:ea typeface="Microsoft JhengHei" charset="0"/>
-                        <a:cs typeface="Microsoft JhengHei" charset="0"/>
+                        <a:latin typeface="Hiragino Sans" charset="0"/>
+                        <a:ea typeface="Hiragino Sans" charset="0"/>
+                        <a:cs typeface="Hiragino Sans" charset="0"/>
                       </a:endParaRPr>
                     </a:p>
                   </a:txBody>
@@ -7054,16 +7032,16 @@
                           <a:solidFill>
                             <a:srgbClr val="FFFFFF"/>
                           </a:solidFill>
-                          <a:latin typeface="Microsoft JhengHei" pitchFamily="34" charset="0"/>
-                          <a:ea typeface="Microsoft JhengHei" pitchFamily="34" charset="-122"/>
-                          <a:cs typeface="Microsoft JhengHei" pitchFamily="34" charset="-120"/>
+                          <a:latin typeface="Hiragino Sans" pitchFamily="34" charset="0"/>
+                          <a:ea typeface="Hiragino Sans" pitchFamily="34" charset="-122"/>
+                          <a:cs typeface="Hiragino Sans" pitchFamily="34" charset="-120"/>
                         </a:rPr>
                         <a:t>維運</a:t>
                       </a:r>
                       <a:endParaRPr lang="en-US" sz="1150" dirty="0">
-                        <a:latin typeface="Microsoft JhengHei" charset="0"/>
-                        <a:ea typeface="Microsoft JhengHei" charset="0"/>
-                        <a:cs typeface="Microsoft JhengHei" charset="0"/>
+                        <a:latin typeface="Hiragino Sans" charset="0"/>
+                        <a:ea typeface="Hiragino Sans" charset="0"/>
+                        <a:cs typeface="Hiragino Sans" charset="0"/>
                       </a:endParaRPr>
                     </a:p>
                   </a:txBody>
@@ -7122,16 +7100,16 @@
                           <a:solidFill>
                             <a:srgbClr val="FFFFFF"/>
                           </a:solidFill>
-                          <a:latin typeface="Microsoft JhengHei" pitchFamily="34" charset="0"/>
-                          <a:ea typeface="Microsoft JhengHei" pitchFamily="34" charset="-122"/>
-                          <a:cs typeface="Microsoft JhengHei" pitchFamily="34" charset="-120"/>
+                          <a:latin typeface="Hiragino Sans" pitchFamily="34" charset="0"/>
+                          <a:ea typeface="Hiragino Sans" pitchFamily="34" charset="-122"/>
+                          <a:cs typeface="Hiragino Sans" pitchFamily="34" charset="-120"/>
                         </a:rPr>
                         <a:t>冷啟</a:t>
                       </a:r>
                       <a:endParaRPr lang="en-US" sz="1150" dirty="0">
-                        <a:latin typeface="Microsoft JhengHei" charset="0"/>
-                        <a:ea typeface="Microsoft JhengHei" charset="0"/>
-                        <a:cs typeface="Microsoft JhengHei" charset="0"/>
+                        <a:latin typeface="Hiragino Sans" charset="0"/>
+                        <a:ea typeface="Hiragino Sans" charset="0"/>
+                        <a:cs typeface="Hiragino Sans" charset="0"/>
                       </a:endParaRPr>
                     </a:p>
                   </a:txBody>
@@ -7190,16 +7168,16 @@
                           <a:solidFill>
                             <a:srgbClr val="FFFFFF"/>
                           </a:solidFill>
-                          <a:latin typeface="Microsoft JhengHei" pitchFamily="34" charset="0"/>
-                          <a:ea typeface="Microsoft JhengHei" pitchFamily="34" charset="-122"/>
-                          <a:cs typeface="Microsoft JhengHei" pitchFamily="34" charset="-120"/>
+                          <a:latin typeface="Hiragino Sans" pitchFamily="34" charset="0"/>
+                          <a:ea typeface="Hiragino Sans" pitchFamily="34" charset="-122"/>
+                          <a:cs typeface="Hiragino Sans" pitchFamily="34" charset="-120"/>
                         </a:rPr>
                         <a:t>黑客松適配</a:t>
                       </a:r>
                       <a:endParaRPr lang="en-US" sz="1150" dirty="0">
-                        <a:latin typeface="Microsoft JhengHei" charset="0"/>
-                        <a:ea typeface="Microsoft JhengHei" charset="0"/>
-                        <a:cs typeface="Microsoft JhengHei" charset="0"/>
+                        <a:latin typeface="Hiragino Sans" charset="0"/>
+                        <a:ea typeface="Hiragino Sans" charset="0"/>
+                        <a:cs typeface="Hiragino Sans" charset="0"/>
                       </a:endParaRPr>
                     </a:p>
                   </a:txBody>
@@ -7260,16 +7238,16 @@
                           <a:solidFill>
                             <a:srgbClr val="FFFFFF"/>
                           </a:solidFill>
-                          <a:latin typeface="Microsoft JhengHei" pitchFamily="34" charset="0"/>
-                          <a:ea typeface="Microsoft JhengHei" pitchFamily="34" charset="-122"/>
-                          <a:cs typeface="Microsoft JhengHei" pitchFamily="34" charset="-120"/>
+                          <a:latin typeface="Hiragino Sans" pitchFamily="34" charset="0"/>
+                          <a:ea typeface="Hiragino Sans" pitchFamily="34" charset="-122"/>
+                          <a:cs typeface="Hiragino Sans" pitchFamily="34" charset="-120"/>
                         </a:rPr>
                         <a:t>A 現行 ★</a:t>
                       </a:r>
                       <a:endParaRPr lang="en-US" sz="1050" dirty="0">
-                        <a:latin typeface="Microsoft JhengHei" charset="0"/>
-                        <a:ea typeface="Microsoft JhengHei" charset="0"/>
-                        <a:cs typeface="Microsoft JhengHei" charset="0"/>
+                        <a:latin typeface="Hiragino Sans" charset="0"/>
+                        <a:ea typeface="Hiragino Sans" charset="0"/>
+                        <a:cs typeface="Hiragino Sans" charset="0"/>
                       </a:endParaRPr>
                     </a:p>
                   </a:txBody>
@@ -7328,16 +7306,16 @@
                           <a:solidFill>
                             <a:srgbClr val="C7D6E4"/>
                           </a:solidFill>
-                          <a:latin typeface="Microsoft JhengHei" pitchFamily="34" charset="0"/>
-                          <a:ea typeface="Microsoft JhengHei" pitchFamily="34" charset="-122"/>
-                          <a:cs typeface="Microsoft JhengHei" pitchFamily="34" charset="-120"/>
+                          <a:latin typeface="Hiragino Sans" pitchFamily="34" charset="0"/>
+                          <a:ea typeface="Hiragino Sans" pitchFamily="34" charset="-122"/>
+                          <a:cs typeface="Hiragino Sans" pitchFamily="34" charset="-120"/>
                         </a:rPr>
                         <a:t>ECS Fargate 容器常駐</a:t>
                       </a:r>
                       <a:endParaRPr lang="en-US" sz="1050" dirty="0">
-                        <a:latin typeface="Microsoft JhengHei" charset="0"/>
-                        <a:ea typeface="Microsoft JhengHei" charset="0"/>
-                        <a:cs typeface="Microsoft JhengHei" charset="0"/>
+                        <a:latin typeface="Hiragino Sans" charset="0"/>
+                        <a:ea typeface="Hiragino Sans" charset="0"/>
+                        <a:cs typeface="Hiragino Sans" charset="0"/>
                       </a:endParaRPr>
                     </a:p>
                   </a:txBody>
@@ -7396,16 +7374,16 @@
                           <a:solidFill>
                             <a:srgbClr val="C7D6E4"/>
                           </a:solidFill>
-                          <a:latin typeface="Microsoft JhengHei" pitchFamily="34" charset="0"/>
-                          <a:ea typeface="Microsoft JhengHei" pitchFamily="34" charset="-122"/>
-                          <a:cs typeface="Microsoft JhengHei" pitchFamily="34" charset="-120"/>
+                          <a:latin typeface="Hiragino Sans" pitchFamily="34" charset="0"/>
+                          <a:ea typeface="Hiragino Sans" pitchFamily="34" charset="-122"/>
+                          <a:cs typeface="Hiragino Sans" pitchFamily="34" charset="-120"/>
                         </a:rPr>
                         <a:t>ALB 靜態 URL</a:t>
                       </a:r>
                       <a:endParaRPr lang="en-US" sz="1050" dirty="0">
-                        <a:latin typeface="Microsoft JhengHei" charset="0"/>
-                        <a:ea typeface="Microsoft JhengHei" charset="0"/>
-                        <a:cs typeface="Microsoft JhengHei" charset="0"/>
+                        <a:latin typeface="Hiragino Sans" charset="0"/>
+                        <a:ea typeface="Hiragino Sans" charset="0"/>
+                        <a:cs typeface="Hiragino Sans" charset="0"/>
                       </a:endParaRPr>
                     </a:p>
                   </a:txBody>
@@ -7464,16 +7442,16 @@
                           <a:solidFill>
                             <a:srgbClr val="C7D6E4"/>
                           </a:solidFill>
-                          <a:latin typeface="Microsoft JhengHei" pitchFamily="34" charset="0"/>
-                          <a:ea typeface="Microsoft JhengHei" pitchFamily="34" charset="-122"/>
-                          <a:cs typeface="Microsoft JhengHei" pitchFamily="34" charset="-120"/>
+                          <a:latin typeface="Hiragino Sans" pitchFamily="34" charset="0"/>
+                          <a:ea typeface="Hiragino Sans" pitchFamily="34" charset="-122"/>
+                          <a:cs typeface="Hiragino Sans" pitchFamily="34" charset="-120"/>
                         </a:rPr>
                         <a:t>低（小時費）</a:t>
                       </a:r>
                       <a:endParaRPr lang="en-US" sz="1050" dirty="0">
-                        <a:latin typeface="Microsoft JhengHei" charset="0"/>
-                        <a:ea typeface="Microsoft JhengHei" charset="0"/>
-                        <a:cs typeface="Microsoft JhengHei" charset="0"/>
+                        <a:latin typeface="Hiragino Sans" charset="0"/>
+                        <a:ea typeface="Hiragino Sans" charset="0"/>
+                        <a:cs typeface="Hiragino Sans" charset="0"/>
                       </a:endParaRPr>
                     </a:p>
                   </a:txBody>
@@ -7532,16 +7510,16 @@
                           <a:solidFill>
                             <a:srgbClr val="C7D6E4"/>
                           </a:solidFill>
-                          <a:latin typeface="Microsoft JhengHei" pitchFamily="34" charset="0"/>
-                          <a:ea typeface="Microsoft JhengHei" pitchFamily="34" charset="-122"/>
-                          <a:cs typeface="Microsoft JhengHei" pitchFamily="34" charset="-120"/>
+                          <a:latin typeface="Hiragino Sans" pitchFamily="34" charset="0"/>
+                          <a:ea typeface="Hiragino Sans" pitchFamily="34" charset="-122"/>
+                          <a:cs typeface="Hiragino Sans" pitchFamily="34" charset="-120"/>
                         </a:rPr>
                         <a:t>中（VPC/IAM）</a:t>
                       </a:r>
                       <a:endParaRPr lang="en-US" sz="1050" dirty="0">
-                        <a:latin typeface="Microsoft JhengHei" charset="0"/>
-                        <a:ea typeface="Microsoft JhengHei" charset="0"/>
-                        <a:cs typeface="Microsoft JhengHei" charset="0"/>
+                        <a:latin typeface="Hiragino Sans" charset="0"/>
+                        <a:ea typeface="Hiragino Sans" charset="0"/>
+                        <a:cs typeface="Hiragino Sans" charset="0"/>
                       </a:endParaRPr>
                     </a:p>
                   </a:txBody>
@@ -7600,16 +7578,16 @@
                           <a:solidFill>
                             <a:srgbClr val="C7D6E4"/>
                           </a:solidFill>
-                          <a:latin typeface="Microsoft JhengHei" pitchFamily="34" charset="0"/>
-                          <a:ea typeface="Microsoft JhengHei" pitchFamily="34" charset="-122"/>
-                          <a:cs typeface="Microsoft JhengHei" pitchFamily="34" charset="-120"/>
+                          <a:latin typeface="Hiragino Sans" pitchFamily="34" charset="0"/>
+                          <a:ea typeface="Hiragino Sans" pitchFamily="34" charset="-122"/>
+                          <a:cs typeface="Hiragino Sans" pitchFamily="34" charset="-120"/>
                         </a:rPr>
                         <a:t>無冷啟（常駐）</a:t>
                       </a:r>
                       <a:endParaRPr lang="en-US" sz="1050" dirty="0">
-                        <a:latin typeface="Microsoft JhengHei" charset="0"/>
-                        <a:ea typeface="Microsoft JhengHei" charset="0"/>
-                        <a:cs typeface="Microsoft JhengHei" charset="0"/>
+                        <a:latin typeface="Hiragino Sans" charset="0"/>
+                        <a:ea typeface="Hiragino Sans" charset="0"/>
+                        <a:cs typeface="Hiragino Sans" charset="0"/>
                       </a:endParaRPr>
                     </a:p>
                   </a:txBody>
@@ -7668,16 +7646,16 @@
                           <a:solidFill>
                             <a:srgbClr val="2A9D8F"/>
                           </a:solidFill>
-                          <a:latin typeface="Microsoft JhengHei" pitchFamily="34" charset="0"/>
-                          <a:ea typeface="Microsoft JhengHei" pitchFamily="34" charset="-122"/>
-                          <a:cs typeface="Microsoft JhengHei" pitchFamily="34" charset="-120"/>
+                          <a:latin typeface="Hiragino Sans" pitchFamily="34" charset="0"/>
+                          <a:ea typeface="Hiragino Sans" pitchFamily="34" charset="-122"/>
+                          <a:cs typeface="Hiragino Sans" pitchFamily="34" charset="-120"/>
                         </a:rPr>
                         <a:t>★ 最高 · 已上線</a:t>
                       </a:r>
                       <a:endParaRPr lang="en-US" sz="1050" dirty="0">
-                        <a:latin typeface="Microsoft JhengHei" charset="0"/>
-                        <a:ea typeface="Microsoft JhengHei" charset="0"/>
-                        <a:cs typeface="Microsoft JhengHei" charset="0"/>
+                        <a:latin typeface="Hiragino Sans" charset="0"/>
+                        <a:ea typeface="Hiragino Sans" charset="0"/>
+                        <a:cs typeface="Hiragino Sans" charset="0"/>
                       </a:endParaRPr>
                     </a:p>
                   </a:txBody>
@@ -7738,16 +7716,16 @@
                           <a:solidFill>
                             <a:srgbClr val="FFFFFF"/>
                           </a:solidFill>
-                          <a:latin typeface="Microsoft JhengHei" pitchFamily="34" charset="0"/>
-                          <a:ea typeface="Microsoft JhengHei" pitchFamily="34" charset="-122"/>
-                          <a:cs typeface="Microsoft JhengHei" pitchFamily="34" charset="-120"/>
+                          <a:latin typeface="Hiragino Sans" pitchFamily="34" charset="0"/>
+                          <a:ea typeface="Hiragino Sans" pitchFamily="34" charset="-122"/>
+                          <a:cs typeface="Hiragino Sans" pitchFamily="34" charset="-120"/>
                         </a:rPr>
                         <a:t>B Serverless</a:t>
                       </a:r>
                       <a:endParaRPr lang="en-US" sz="1050" dirty="0">
-                        <a:latin typeface="Microsoft JhengHei" charset="0"/>
-                        <a:ea typeface="Microsoft JhengHei" charset="0"/>
-                        <a:cs typeface="Microsoft JhengHei" charset="0"/>
+                        <a:latin typeface="Hiragino Sans" charset="0"/>
+                        <a:ea typeface="Hiragino Sans" charset="0"/>
+                        <a:cs typeface="Hiragino Sans" charset="0"/>
                       </a:endParaRPr>
                     </a:p>
                   </a:txBody>
@@ -7806,16 +7784,16 @@
                           <a:solidFill>
                             <a:srgbClr val="C7D6E4"/>
                           </a:solidFill>
-                          <a:latin typeface="Microsoft JhengHei" pitchFamily="34" charset="0"/>
-                          <a:ea typeface="Microsoft JhengHei" pitchFamily="34" charset="-122"/>
-                          <a:cs typeface="Microsoft JhengHei" pitchFamily="34" charset="-120"/>
+                          <a:latin typeface="Hiragino Sans" pitchFamily="34" charset="0"/>
+                          <a:ea typeface="Hiragino Sans" pitchFamily="34" charset="-122"/>
+                          <a:cs typeface="Hiragino Sans" pitchFamily="34" charset="-120"/>
                         </a:rPr>
                         <a:t>Lambda 按呼叫</a:t>
                       </a:r>
                       <a:endParaRPr lang="en-US" sz="1050" dirty="0">
-                        <a:latin typeface="Microsoft JhengHei" charset="0"/>
-                        <a:ea typeface="Microsoft JhengHei" charset="0"/>
-                        <a:cs typeface="Microsoft JhengHei" charset="0"/>
+                        <a:latin typeface="Hiragino Sans" charset="0"/>
+                        <a:ea typeface="Hiragino Sans" charset="0"/>
+                        <a:cs typeface="Hiragino Sans" charset="0"/>
                       </a:endParaRPr>
                     </a:p>
                   </a:txBody>
@@ -7874,16 +7852,16 @@
                           <a:solidFill>
                             <a:srgbClr val="C7D6E4"/>
                           </a:solidFill>
-                          <a:latin typeface="Microsoft JhengHei" pitchFamily="34" charset="0"/>
-                          <a:ea typeface="Microsoft JhengHei" pitchFamily="34" charset="-122"/>
-                          <a:cs typeface="Microsoft JhengHei" pitchFamily="34" charset="-120"/>
+                          <a:latin typeface="Hiragino Sans" pitchFamily="34" charset="0"/>
+                          <a:ea typeface="Hiragino Sans" pitchFamily="34" charset="-122"/>
+                          <a:cs typeface="Hiragino Sans" pitchFamily="34" charset="-120"/>
                         </a:rPr>
                         <a:t>API Gateway</a:t>
                       </a:r>
                       <a:endParaRPr lang="en-US" sz="1050" dirty="0">
-                        <a:latin typeface="Microsoft JhengHei" charset="0"/>
-                        <a:ea typeface="Microsoft JhengHei" charset="0"/>
-                        <a:cs typeface="Microsoft JhengHei" charset="0"/>
+                        <a:latin typeface="Hiragino Sans" charset="0"/>
+                        <a:ea typeface="Hiragino Sans" charset="0"/>
+                        <a:cs typeface="Hiragino Sans" charset="0"/>
                       </a:endParaRPr>
                     </a:p>
                   </a:txBody>
@@ -7942,16 +7920,16 @@
                           <a:solidFill>
                             <a:srgbClr val="2A9D8F"/>
                           </a:solidFill>
-                          <a:latin typeface="Microsoft JhengHei" pitchFamily="34" charset="0"/>
-                          <a:ea typeface="Microsoft JhengHei" pitchFamily="34" charset="-122"/>
-                          <a:cs typeface="Microsoft JhengHei" pitchFamily="34" charset="-120"/>
+                          <a:latin typeface="Hiragino Sans" pitchFamily="34" charset="0"/>
+                          <a:ea typeface="Hiragino Sans" pitchFamily="34" charset="-122"/>
+                          <a:cs typeface="Hiragino Sans" pitchFamily="34" charset="-120"/>
                         </a:rPr>
                         <a:t>極低（近零）</a:t>
                       </a:r>
                       <a:endParaRPr lang="en-US" sz="1050" dirty="0">
-                        <a:latin typeface="Microsoft JhengHei" charset="0"/>
-                        <a:ea typeface="Microsoft JhengHei" charset="0"/>
-                        <a:cs typeface="Microsoft JhengHei" charset="0"/>
+                        <a:latin typeface="Hiragino Sans" charset="0"/>
+                        <a:ea typeface="Hiragino Sans" charset="0"/>
+                        <a:cs typeface="Hiragino Sans" charset="0"/>
                       </a:endParaRPr>
                     </a:p>
                   </a:txBody>
@@ -8010,16 +7988,16 @@
                           <a:solidFill>
                             <a:srgbClr val="C7D6E4"/>
                           </a:solidFill>
-                          <a:latin typeface="Microsoft JhengHei" pitchFamily="34" charset="0"/>
-                          <a:ea typeface="Microsoft JhengHei" pitchFamily="34" charset="-122"/>
-                          <a:cs typeface="Microsoft JhengHei" pitchFamily="34" charset="-120"/>
+                          <a:latin typeface="Hiragino Sans" pitchFamily="34" charset="0"/>
+                          <a:ea typeface="Hiragino Sans" pitchFamily="34" charset="-122"/>
+                          <a:cs typeface="Hiragino Sans" pitchFamily="34" charset="-120"/>
                         </a:rPr>
                         <a:t>中（元件多）</a:t>
                       </a:r>
                       <a:endParaRPr lang="en-US" sz="1050" dirty="0">
-                        <a:latin typeface="Microsoft JhengHei" charset="0"/>
-                        <a:ea typeface="Microsoft JhengHei" charset="0"/>
-                        <a:cs typeface="Microsoft JhengHei" charset="0"/>
+                        <a:latin typeface="Hiragino Sans" charset="0"/>
+                        <a:ea typeface="Hiragino Sans" charset="0"/>
+                        <a:cs typeface="Hiragino Sans" charset="0"/>
                       </a:endParaRPr>
                     </a:p>
                   </a:txBody>
@@ -8078,16 +8056,16 @@
                           <a:solidFill>
                             <a:srgbClr val="E76F51"/>
                           </a:solidFill>
-                          <a:latin typeface="Microsoft JhengHei" pitchFamily="34" charset="0"/>
-                          <a:ea typeface="Microsoft JhengHei" pitchFamily="34" charset="-122"/>
-                          <a:cs typeface="Microsoft JhengHei" pitchFamily="34" charset="-120"/>
+                          <a:latin typeface="Hiragino Sans" pitchFamily="34" charset="0"/>
+                          <a:ea typeface="Hiragino Sans" pitchFamily="34" charset="-122"/>
+                          <a:cs typeface="Hiragino Sans" pitchFamily="34" charset="-120"/>
                         </a:rPr>
                         <a:t>冷（Java Lambda）</a:t>
                       </a:r>
                       <a:endParaRPr lang="en-US" sz="1050" dirty="0">
-                        <a:latin typeface="Microsoft JhengHei" charset="0"/>
-                        <a:ea typeface="Microsoft JhengHei" charset="0"/>
-                        <a:cs typeface="Microsoft JhengHei" charset="0"/>
+                        <a:latin typeface="Hiragino Sans" charset="0"/>
+                        <a:ea typeface="Hiragino Sans" charset="0"/>
+                        <a:cs typeface="Hiragino Sans" charset="0"/>
                       </a:endParaRPr>
                     </a:p>
                   </a:txBody>
@@ -8146,16 +8124,16 @@
                           <a:solidFill>
                             <a:srgbClr val="F4A72B"/>
                           </a:solidFill>
-                          <a:latin typeface="Microsoft JhengHei" pitchFamily="34" charset="0"/>
-                          <a:ea typeface="Microsoft JhengHei" pitchFamily="34" charset="-122"/>
-                          <a:cs typeface="Microsoft JhengHei" pitchFamily="34" charset="-120"/>
+                          <a:latin typeface="Hiragino Sans" pitchFamily="34" charset="0"/>
+                          <a:ea typeface="Hiragino Sans" pitchFamily="34" charset="-122"/>
+                          <a:cs typeface="Hiragino Sans" pitchFamily="34" charset="-120"/>
                         </a:rPr>
                         <a:t>中</a:t>
                       </a:r>
                       <a:endParaRPr lang="en-US" sz="1050" dirty="0">
-                        <a:latin typeface="Microsoft JhengHei" charset="0"/>
-                        <a:ea typeface="Microsoft JhengHei" charset="0"/>
-                        <a:cs typeface="Microsoft JhengHei" charset="0"/>
+                        <a:latin typeface="Hiragino Sans" charset="0"/>
+                        <a:ea typeface="Hiragino Sans" charset="0"/>
+                        <a:cs typeface="Hiragino Sans" charset="0"/>
                       </a:endParaRPr>
                     </a:p>
                   </a:txBody>
@@ -8216,16 +8194,16 @@
                           <a:solidFill>
                             <a:srgbClr val="FFFFFF"/>
                           </a:solidFill>
-                          <a:latin typeface="Microsoft JhengHei" pitchFamily="34" charset="0"/>
-                          <a:ea typeface="Microsoft JhengHei" pitchFamily="34" charset="-122"/>
-                          <a:cs typeface="Microsoft JhengHei" pitchFamily="34" charset="-120"/>
+                          <a:latin typeface="Hiragino Sans" pitchFamily="34" charset="0"/>
+                          <a:ea typeface="Hiragino Sans" pitchFamily="34" charset="-122"/>
+                          <a:cs typeface="Hiragino Sans" pitchFamily="34" charset="-120"/>
                         </a:rPr>
                         <a:t>C App Runner</a:t>
                       </a:r>
                       <a:endParaRPr lang="en-US" sz="1050" dirty="0">
-                        <a:latin typeface="Microsoft JhengHei" charset="0"/>
-                        <a:ea typeface="Microsoft JhengHei" charset="0"/>
-                        <a:cs typeface="Microsoft JhengHei" charset="0"/>
+                        <a:latin typeface="Hiragino Sans" charset="0"/>
+                        <a:ea typeface="Hiragino Sans" charset="0"/>
+                        <a:cs typeface="Hiragino Sans" charset="0"/>
                       </a:endParaRPr>
                     </a:p>
                   </a:txBody>
@@ -8284,16 +8262,16 @@
                           <a:solidFill>
                             <a:srgbClr val="C7D6E4"/>
                           </a:solidFill>
-                          <a:latin typeface="Microsoft JhengHei" pitchFamily="34" charset="0"/>
-                          <a:ea typeface="Microsoft JhengHei" pitchFamily="34" charset="-122"/>
-                          <a:cs typeface="Microsoft JhengHei" pitchFamily="34" charset="-120"/>
+                          <a:latin typeface="Hiragino Sans" pitchFamily="34" charset="0"/>
+                          <a:ea typeface="Hiragino Sans" pitchFamily="34" charset="-122"/>
+                          <a:cs typeface="Hiragino Sans" pitchFamily="34" charset="-120"/>
                         </a:rPr>
                         <a:t>全託管容器</a:t>
                       </a:r>
                       <a:endParaRPr lang="en-US" sz="1050" dirty="0">
-                        <a:latin typeface="Microsoft JhengHei" charset="0"/>
-                        <a:ea typeface="Microsoft JhengHei" charset="0"/>
-                        <a:cs typeface="Microsoft JhengHei" charset="0"/>
+                        <a:latin typeface="Hiragino Sans" charset="0"/>
+                        <a:ea typeface="Hiragino Sans" charset="0"/>
+                        <a:cs typeface="Hiragino Sans" charset="0"/>
                       </a:endParaRPr>
                     </a:p>
                   </a:txBody>
@@ -8352,16 +8330,16 @@
                           <a:solidFill>
                             <a:srgbClr val="C7D6E4"/>
                           </a:solidFill>
-                          <a:latin typeface="Microsoft JhengHei" pitchFamily="34" charset="0"/>
-                          <a:ea typeface="Microsoft JhengHei" pitchFamily="34" charset="-122"/>
-                          <a:cs typeface="Microsoft JhengHei" pitchFamily="34" charset="-120"/>
+                          <a:latin typeface="Hiragino Sans" pitchFamily="34" charset="0"/>
+                          <a:ea typeface="Hiragino Sans" pitchFamily="34" charset="-122"/>
+                          <a:cs typeface="Hiragino Sans" pitchFamily="34" charset="-120"/>
                         </a:rPr>
                         <a:t>App Runner HTTPS</a:t>
                       </a:r>
                       <a:endParaRPr lang="en-US" sz="1050" dirty="0">
-                        <a:latin typeface="Microsoft JhengHei" charset="0"/>
-                        <a:ea typeface="Microsoft JhengHei" charset="0"/>
-                        <a:cs typeface="Microsoft JhengHei" charset="0"/>
+                        <a:latin typeface="Hiragino Sans" charset="0"/>
+                        <a:ea typeface="Hiragino Sans" charset="0"/>
+                        <a:cs typeface="Hiragino Sans" charset="0"/>
                       </a:endParaRPr>
                     </a:p>
                   </a:txBody>
@@ -8420,16 +8398,16 @@
                           <a:solidFill>
                             <a:srgbClr val="C7D6E4"/>
                           </a:solidFill>
-                          <a:latin typeface="Microsoft JhengHei" pitchFamily="34" charset="0"/>
-                          <a:ea typeface="Microsoft JhengHei" pitchFamily="34" charset="-122"/>
-                          <a:cs typeface="Microsoft JhengHei" pitchFamily="34" charset="-120"/>
+                          <a:latin typeface="Hiragino Sans" pitchFamily="34" charset="0"/>
+                          <a:ea typeface="Hiragino Sans" pitchFamily="34" charset="-122"/>
+                          <a:cs typeface="Hiragino Sans" pitchFamily="34" charset="-120"/>
                         </a:rPr>
                         <a:t>低-中</a:t>
                       </a:r>
                       <a:endParaRPr lang="en-US" sz="1050" dirty="0">
-                        <a:latin typeface="Microsoft JhengHei" charset="0"/>
-                        <a:ea typeface="Microsoft JhengHei" charset="0"/>
-                        <a:cs typeface="Microsoft JhengHei" charset="0"/>
+                        <a:latin typeface="Hiragino Sans" charset="0"/>
+                        <a:ea typeface="Hiragino Sans" charset="0"/>
+                        <a:cs typeface="Hiragino Sans" charset="0"/>
                       </a:endParaRPr>
                     </a:p>
                   </a:txBody>
@@ -8488,16 +8466,16 @@
                           <a:solidFill>
                             <a:srgbClr val="2A9D8F"/>
                           </a:solidFill>
-                          <a:latin typeface="Microsoft JhengHei" pitchFamily="34" charset="0"/>
-                          <a:ea typeface="Microsoft JhengHei" pitchFamily="34" charset="-122"/>
-                          <a:cs typeface="Microsoft JhengHei" pitchFamily="34" charset="-120"/>
+                          <a:latin typeface="Hiragino Sans" pitchFamily="34" charset="0"/>
+                          <a:ea typeface="Hiragino Sans" pitchFamily="34" charset="-122"/>
+                          <a:cs typeface="Hiragino Sans" pitchFamily="34" charset="-120"/>
                         </a:rPr>
                         <a:t>最低（免 ALB/VPC）</a:t>
                       </a:r>
                       <a:endParaRPr lang="en-US" sz="1050" dirty="0">
-                        <a:latin typeface="Microsoft JhengHei" charset="0"/>
-                        <a:ea typeface="Microsoft JhengHei" charset="0"/>
-                        <a:cs typeface="Microsoft JhengHei" charset="0"/>
+                        <a:latin typeface="Hiragino Sans" charset="0"/>
+                        <a:ea typeface="Hiragino Sans" charset="0"/>
+                        <a:cs typeface="Hiragino Sans" charset="0"/>
                       </a:endParaRPr>
                     </a:p>
                   </a:txBody>
@@ -8556,16 +8534,16 @@
                           <a:solidFill>
                             <a:srgbClr val="C7D6E4"/>
                           </a:solidFill>
-                          <a:latin typeface="Microsoft JhengHei" pitchFamily="34" charset="0"/>
-                          <a:ea typeface="Microsoft JhengHei" pitchFamily="34" charset="-122"/>
-                          <a:cs typeface="Microsoft JhengHei" pitchFamily="34" charset="-120"/>
+                          <a:latin typeface="Hiragino Sans" pitchFamily="34" charset="0"/>
+                          <a:ea typeface="Hiragino Sans" pitchFamily="34" charset="-122"/>
+                          <a:cs typeface="Hiragino Sans" pitchFamily="34" charset="-120"/>
                         </a:rPr>
                         <a:t>無冷啟</a:t>
                       </a:r>
                       <a:endParaRPr lang="en-US" sz="1050" dirty="0">
-                        <a:latin typeface="Microsoft JhengHei" charset="0"/>
-                        <a:ea typeface="Microsoft JhengHei" charset="0"/>
-                        <a:cs typeface="Microsoft JhengHei" charset="0"/>
+                        <a:latin typeface="Hiragino Sans" charset="0"/>
+                        <a:ea typeface="Hiragino Sans" charset="0"/>
+                        <a:cs typeface="Hiragino Sans" charset="0"/>
                       </a:endParaRPr>
                     </a:p>
                   </a:txBody>
@@ -8624,16 +8602,16 @@
                           <a:solidFill>
                             <a:srgbClr val="E76F51"/>
                           </a:solidFill>
-                          <a:latin typeface="Microsoft JhengHei" pitchFamily="34" charset="0"/>
-                          <a:ea typeface="Microsoft JhengHei" pitchFamily="34" charset="-122"/>
-                          <a:cs typeface="Microsoft JhengHei" pitchFamily="34" charset="-120"/>
+                          <a:latin typeface="Hiragino Sans" pitchFamily="34" charset="0"/>
+                          <a:ea typeface="Hiragino Sans" pitchFamily="34" charset="-122"/>
+                          <a:cs typeface="Hiragino Sans" pitchFamily="34" charset="-120"/>
                         </a:rPr>
                         <a:t>低 · 帳號受阻</a:t>
                       </a:r>
                       <a:endParaRPr lang="en-US" sz="1050" dirty="0">
-                        <a:latin typeface="Microsoft JhengHei" charset="0"/>
-                        <a:ea typeface="Microsoft JhengHei" charset="0"/>
-                        <a:cs typeface="Microsoft JhengHei" charset="0"/>
+                        <a:latin typeface="Hiragino Sans" charset="0"/>
+                        <a:ea typeface="Hiragino Sans" charset="0"/>
+                        <a:cs typeface="Hiragino Sans" charset="0"/>
                       </a:endParaRPr>
                     </a:p>
                   </a:txBody>
@@ -8694,16 +8672,16 @@
                           <a:solidFill>
                             <a:srgbClr val="FFFFFF"/>
                           </a:solidFill>
-                          <a:latin typeface="Microsoft JhengHei" pitchFamily="34" charset="0"/>
-                          <a:ea typeface="Microsoft JhengHei" pitchFamily="34" charset="-122"/>
-                          <a:cs typeface="Microsoft JhengHei" pitchFamily="34" charset="-120"/>
+                          <a:latin typeface="Hiragino Sans" pitchFamily="34" charset="0"/>
+                          <a:ea typeface="Hiragino Sans" pitchFamily="34" charset="-122"/>
+                          <a:cs typeface="Hiragino Sans" pitchFamily="34" charset="-120"/>
                         </a:rPr>
                         <a:t>D EC2+Docker</a:t>
                       </a:r>
                       <a:endParaRPr lang="en-US" sz="1050" dirty="0">
-                        <a:latin typeface="Microsoft JhengHei" charset="0"/>
-                        <a:ea typeface="Microsoft JhengHei" charset="0"/>
-                        <a:cs typeface="Microsoft JhengHei" charset="0"/>
+                        <a:latin typeface="Hiragino Sans" charset="0"/>
+                        <a:ea typeface="Hiragino Sans" charset="0"/>
+                        <a:cs typeface="Hiragino Sans" charset="0"/>
                       </a:endParaRPr>
                     </a:p>
                   </a:txBody>
@@ -8762,16 +8740,16 @@
                           <a:solidFill>
                             <a:srgbClr val="C7D6E4"/>
                           </a:solidFill>
-                          <a:latin typeface="Microsoft JhengHei" pitchFamily="34" charset="0"/>
-                          <a:ea typeface="Microsoft JhengHei" pitchFamily="34" charset="-122"/>
-                          <a:cs typeface="Microsoft JhengHei" pitchFamily="34" charset="-120"/>
+                          <a:latin typeface="Hiragino Sans" pitchFamily="34" charset="0"/>
+                          <a:ea typeface="Hiragino Sans" pitchFamily="34" charset="-122"/>
+                          <a:cs typeface="Hiragino Sans" pitchFamily="34" charset="-120"/>
                         </a:rPr>
                         <a:t>單台 EC2 常駐</a:t>
                       </a:r>
                       <a:endParaRPr lang="en-US" sz="1050" dirty="0">
-                        <a:latin typeface="Microsoft JhengHei" charset="0"/>
-                        <a:ea typeface="Microsoft JhengHei" charset="0"/>
-                        <a:cs typeface="Microsoft JhengHei" charset="0"/>
+                        <a:latin typeface="Hiragino Sans" charset="0"/>
+                        <a:ea typeface="Hiragino Sans" charset="0"/>
+                        <a:cs typeface="Hiragino Sans" charset="0"/>
                       </a:endParaRPr>
                     </a:p>
                   </a:txBody>
@@ -8830,16 +8808,16 @@
                           <a:solidFill>
                             <a:srgbClr val="C7D6E4"/>
                           </a:solidFill>
-                          <a:latin typeface="Microsoft JhengHei" pitchFamily="34" charset="0"/>
-                          <a:ea typeface="Microsoft JhengHei" pitchFamily="34" charset="-122"/>
-                          <a:cs typeface="Microsoft JhengHei" pitchFamily="34" charset="-120"/>
+                          <a:latin typeface="Hiragino Sans" pitchFamily="34" charset="0"/>
+                          <a:ea typeface="Hiragino Sans" pitchFamily="34" charset="-122"/>
+                          <a:cs typeface="Hiragino Sans" pitchFamily="34" charset="-120"/>
                         </a:rPr>
                         <a:t>Elastic IP</a:t>
                       </a:r>
                       <a:endParaRPr lang="en-US" sz="1050" dirty="0">
-                        <a:latin typeface="Microsoft JhengHei" charset="0"/>
-                        <a:ea typeface="Microsoft JhengHei" charset="0"/>
-                        <a:cs typeface="Microsoft JhengHei" charset="0"/>
+                        <a:latin typeface="Hiragino Sans" charset="0"/>
+                        <a:ea typeface="Hiragino Sans" charset="0"/>
+                        <a:cs typeface="Hiragino Sans" charset="0"/>
                       </a:endParaRPr>
                     </a:p>
                   </a:txBody>
@@ -8898,16 +8876,16 @@
                           <a:solidFill>
                             <a:srgbClr val="2A9D8F"/>
                           </a:solidFill>
-                          <a:latin typeface="Microsoft JhengHei" pitchFamily="34" charset="0"/>
-                          <a:ea typeface="Microsoft JhengHei" pitchFamily="34" charset="-122"/>
-                          <a:cs typeface="Microsoft JhengHei" pitchFamily="34" charset="-120"/>
+                          <a:latin typeface="Hiragino Sans" pitchFamily="34" charset="0"/>
+                          <a:ea typeface="Hiragino Sans" pitchFamily="34" charset="-122"/>
+                          <a:cs typeface="Hiragino Sans" pitchFamily="34" charset="-120"/>
                         </a:rPr>
                         <a:t>最低（單台）</a:t>
                       </a:r>
                       <a:endParaRPr lang="en-US" sz="1050" dirty="0">
-                        <a:latin typeface="Microsoft JhengHei" charset="0"/>
-                        <a:ea typeface="Microsoft JhengHei" charset="0"/>
-                        <a:cs typeface="Microsoft JhengHei" charset="0"/>
+                        <a:latin typeface="Hiragino Sans" charset="0"/>
+                        <a:ea typeface="Hiragino Sans" charset="0"/>
+                        <a:cs typeface="Hiragino Sans" charset="0"/>
                       </a:endParaRPr>
                     </a:p>
                   </a:txBody>
@@ -8966,16 +8944,16 @@
                           <a:solidFill>
                             <a:srgbClr val="E76F51"/>
                           </a:solidFill>
-                          <a:latin typeface="Microsoft JhengHei" pitchFamily="34" charset="0"/>
-                          <a:ea typeface="Microsoft JhengHei" pitchFamily="34" charset="-122"/>
-                          <a:cs typeface="Microsoft JhengHei" pitchFamily="34" charset="-120"/>
+                          <a:latin typeface="Hiragino Sans" pitchFamily="34" charset="0"/>
+                          <a:ea typeface="Hiragino Sans" pitchFamily="34" charset="-122"/>
+                          <a:cs typeface="Hiragino Sans" pitchFamily="34" charset="-120"/>
                         </a:rPr>
                         <a:t>高（自管/單點）</a:t>
                       </a:r>
                       <a:endParaRPr lang="en-US" sz="1050" dirty="0">
-                        <a:latin typeface="Microsoft JhengHei" charset="0"/>
-                        <a:ea typeface="Microsoft JhengHei" charset="0"/>
-                        <a:cs typeface="Microsoft JhengHei" charset="0"/>
+                        <a:latin typeface="Hiragino Sans" charset="0"/>
+                        <a:ea typeface="Hiragino Sans" charset="0"/>
+                        <a:cs typeface="Hiragino Sans" charset="0"/>
                       </a:endParaRPr>
                     </a:p>
                   </a:txBody>
@@ -9034,16 +9012,16 @@
                           <a:solidFill>
                             <a:srgbClr val="C7D6E4"/>
                           </a:solidFill>
-                          <a:latin typeface="Microsoft JhengHei" pitchFamily="34" charset="0"/>
-                          <a:ea typeface="Microsoft JhengHei" pitchFamily="34" charset="-122"/>
-                          <a:cs typeface="Microsoft JhengHei" pitchFamily="34" charset="-120"/>
+                          <a:latin typeface="Hiragino Sans" pitchFamily="34" charset="0"/>
+                          <a:ea typeface="Hiragino Sans" pitchFamily="34" charset="-122"/>
+                          <a:cs typeface="Hiragino Sans" pitchFamily="34" charset="-120"/>
                         </a:rPr>
                         <a:t>無冷啟</a:t>
                       </a:r>
                       <a:endParaRPr lang="en-US" sz="1050" dirty="0">
-                        <a:latin typeface="Microsoft JhengHei" charset="0"/>
-                        <a:ea typeface="Microsoft JhengHei" charset="0"/>
-                        <a:cs typeface="Microsoft JhengHei" charset="0"/>
+                        <a:latin typeface="Hiragino Sans" charset="0"/>
+                        <a:ea typeface="Hiragino Sans" charset="0"/>
+                        <a:cs typeface="Hiragino Sans" charset="0"/>
                       </a:endParaRPr>
                     </a:p>
                   </a:txBody>
@@ -9102,16 +9080,16 @@
                           <a:solidFill>
                             <a:srgbClr val="F4A72B"/>
                           </a:solidFill>
-                          <a:latin typeface="Microsoft JhengHei" pitchFamily="34" charset="0"/>
-                          <a:ea typeface="Microsoft JhengHei" pitchFamily="34" charset="-122"/>
-                          <a:cs typeface="Microsoft JhengHei" pitchFamily="34" charset="-120"/>
+                          <a:latin typeface="Hiragino Sans" pitchFamily="34" charset="0"/>
+                          <a:ea typeface="Hiragino Sans" pitchFamily="34" charset="-122"/>
+                          <a:cs typeface="Hiragino Sans" pitchFamily="34" charset="-120"/>
                         </a:rPr>
                         <a:t>中 · 保底</a:t>
                       </a:r>
                       <a:endParaRPr lang="en-US" sz="1050" dirty="0">
-                        <a:latin typeface="Microsoft JhengHei" charset="0"/>
-                        <a:ea typeface="Microsoft JhengHei" charset="0"/>
-                        <a:cs typeface="Microsoft JhengHei" charset="0"/>
+                        <a:latin typeface="Hiragino Sans" charset="0"/>
+                        <a:ea typeface="Hiragino Sans" charset="0"/>
+                        <a:cs typeface="Hiragino Sans" charset="0"/>
                       </a:endParaRPr>
                     </a:p>
                   </a:txBody>
@@ -9172,16 +9150,16 @@
                           <a:solidFill>
                             <a:srgbClr val="FFFFFF"/>
                           </a:solidFill>
-                          <a:latin typeface="Microsoft JhengHei" pitchFamily="34" charset="0"/>
-                          <a:ea typeface="Microsoft JhengHei" pitchFamily="34" charset="-122"/>
-                          <a:cs typeface="Microsoft JhengHei" pitchFamily="34" charset="-120"/>
+                          <a:latin typeface="Hiragino Sans" pitchFamily="34" charset="0"/>
+                          <a:ea typeface="Hiragino Sans" pitchFamily="34" charset="-122"/>
+                          <a:cs typeface="Hiragino Sans" pitchFamily="34" charset="-120"/>
                         </a:rPr>
                         <a:t>E 資料管線</a:t>
                       </a:r>
                       <a:endParaRPr lang="en-US" sz="1050" dirty="0">
-                        <a:latin typeface="Microsoft JhengHei" charset="0"/>
-                        <a:ea typeface="Microsoft JhengHei" charset="0"/>
-                        <a:cs typeface="Microsoft JhengHei" charset="0"/>
+                        <a:latin typeface="Hiragino Sans" charset="0"/>
+                        <a:ea typeface="Hiragino Sans" charset="0"/>
+                        <a:cs typeface="Hiragino Sans" charset="0"/>
                       </a:endParaRPr>
                     </a:p>
                   </a:txBody>
@@ -9240,16 +9218,16 @@
                           <a:solidFill>
                             <a:srgbClr val="C7D6E4"/>
                           </a:solidFill>
-                          <a:latin typeface="Microsoft JhengHei" pitchFamily="34" charset="0"/>
-                          <a:ea typeface="Microsoft JhengHei" pitchFamily="34" charset="-122"/>
-                          <a:cs typeface="Microsoft JhengHei" pitchFamily="34" charset="-120"/>
+                          <a:latin typeface="Hiragino Sans" pitchFamily="34" charset="0"/>
+                          <a:ea typeface="Hiragino Sans" pitchFamily="34" charset="-122"/>
+                          <a:cs typeface="Hiragino Sans" pitchFamily="34" charset="-120"/>
                         </a:rPr>
                         <a:t>Fargate + Glue/Athena</a:t>
                       </a:r>
                       <a:endParaRPr lang="en-US" sz="1050" dirty="0">
-                        <a:latin typeface="Microsoft JhengHei" charset="0"/>
-                        <a:ea typeface="Microsoft JhengHei" charset="0"/>
-                        <a:cs typeface="Microsoft JhengHei" charset="0"/>
+                        <a:latin typeface="Hiragino Sans" charset="0"/>
+                        <a:ea typeface="Hiragino Sans" charset="0"/>
+                        <a:cs typeface="Hiragino Sans" charset="0"/>
                       </a:endParaRPr>
                     </a:p>
                   </a:txBody>
@@ -9308,16 +9286,16 @@
                           <a:solidFill>
                             <a:srgbClr val="C7D6E4"/>
                           </a:solidFill>
-                          <a:latin typeface="Microsoft JhengHei" pitchFamily="34" charset="0"/>
-                          <a:ea typeface="Microsoft JhengHei" pitchFamily="34" charset="-122"/>
-                          <a:cs typeface="Microsoft JhengHei" pitchFamily="34" charset="-120"/>
+                          <a:latin typeface="Hiragino Sans" pitchFamily="34" charset="0"/>
+                          <a:ea typeface="Hiragino Sans" pitchFamily="34" charset="-122"/>
+                          <a:cs typeface="Hiragino Sans" pitchFamily="34" charset="-120"/>
                         </a:rPr>
                         <a:t>App / QuickSight</a:t>
                       </a:r>
                       <a:endParaRPr lang="en-US" sz="1050" dirty="0">
-                        <a:latin typeface="Microsoft JhengHei" charset="0"/>
-                        <a:ea typeface="Microsoft JhengHei" charset="0"/>
-                        <a:cs typeface="Microsoft JhengHei" charset="0"/>
+                        <a:latin typeface="Hiragino Sans" charset="0"/>
+                        <a:ea typeface="Hiragino Sans" charset="0"/>
+                        <a:cs typeface="Hiragino Sans" charset="0"/>
                       </a:endParaRPr>
                     </a:p>
                   </a:txBody>
@@ -9376,16 +9354,16 @@
                           <a:solidFill>
                             <a:srgbClr val="E76F51"/>
                           </a:solidFill>
-                          <a:latin typeface="Microsoft JhengHei" pitchFamily="34" charset="0"/>
-                          <a:ea typeface="Microsoft JhengHei" pitchFamily="34" charset="-122"/>
-                          <a:cs typeface="Microsoft JhengHei" pitchFamily="34" charset="-120"/>
+                          <a:latin typeface="Hiragino Sans" pitchFamily="34" charset="0"/>
+                          <a:ea typeface="Hiragino Sans" pitchFamily="34" charset="-122"/>
+                          <a:cs typeface="Hiragino Sans" pitchFamily="34" charset="-120"/>
                         </a:rPr>
                         <a:t>中高（掃描+授權）</a:t>
                       </a:r>
                       <a:endParaRPr lang="en-US" sz="1050" dirty="0">
-                        <a:latin typeface="Microsoft JhengHei" charset="0"/>
-                        <a:ea typeface="Microsoft JhengHei" charset="0"/>
-                        <a:cs typeface="Microsoft JhengHei" charset="0"/>
+                        <a:latin typeface="Hiragino Sans" charset="0"/>
+                        <a:ea typeface="Hiragino Sans" charset="0"/>
+                        <a:cs typeface="Hiragino Sans" charset="0"/>
                       </a:endParaRPr>
                     </a:p>
                   </a:txBody>
@@ -9444,16 +9422,16 @@
                           <a:solidFill>
                             <a:srgbClr val="E76F51"/>
                           </a:solidFill>
-                          <a:latin typeface="Microsoft JhengHei" pitchFamily="34" charset="0"/>
-                          <a:ea typeface="Microsoft JhengHei" pitchFamily="34" charset="-122"/>
-                          <a:cs typeface="Microsoft JhengHei" pitchFamily="34" charset="-120"/>
+                          <a:latin typeface="Hiragino Sans" pitchFamily="34" charset="0"/>
+                          <a:ea typeface="Hiragino Sans" pitchFamily="34" charset="-122"/>
+                          <a:cs typeface="Hiragino Sans" pitchFamily="34" charset="-120"/>
                         </a:rPr>
                         <a:t>高（多層）</a:t>
                       </a:r>
                       <a:endParaRPr lang="en-US" sz="1050" dirty="0">
-                        <a:latin typeface="Microsoft JhengHei" charset="0"/>
-                        <a:ea typeface="Microsoft JhengHei" charset="0"/>
-                        <a:cs typeface="Microsoft JhengHei" charset="0"/>
+                        <a:latin typeface="Hiragino Sans" charset="0"/>
+                        <a:ea typeface="Hiragino Sans" charset="0"/>
+                        <a:cs typeface="Hiragino Sans" charset="0"/>
                       </a:endParaRPr>
                     </a:p>
                   </a:txBody>
@@ -9512,16 +9490,16 @@
                           <a:solidFill>
                             <a:srgbClr val="C7D6E4"/>
                           </a:solidFill>
-                          <a:latin typeface="Microsoft JhengHei" pitchFamily="34" charset="0"/>
-                          <a:ea typeface="Microsoft JhengHei" pitchFamily="34" charset="-122"/>
-                          <a:cs typeface="Microsoft JhengHei" pitchFamily="34" charset="-120"/>
+                          <a:latin typeface="Hiragino Sans" pitchFamily="34" charset="0"/>
+                          <a:ea typeface="Hiragino Sans" pitchFamily="34" charset="-122"/>
+                          <a:cs typeface="Hiragino Sans" pitchFamily="34" charset="-120"/>
                         </a:rPr>
                         <a:t>—</a:t>
                       </a:r>
                       <a:endParaRPr lang="en-US" sz="1050" dirty="0">
-                        <a:latin typeface="Microsoft JhengHei" charset="0"/>
-                        <a:ea typeface="Microsoft JhengHei" charset="0"/>
-                        <a:cs typeface="Microsoft JhengHei" charset="0"/>
+                        <a:latin typeface="Hiragino Sans" charset="0"/>
+                        <a:ea typeface="Hiragino Sans" charset="0"/>
+                        <a:cs typeface="Hiragino Sans" charset="0"/>
                       </a:endParaRPr>
                     </a:p>
                   </a:txBody>
@@ -9580,16 +9558,16 @@
                           <a:solidFill>
                             <a:srgbClr val="F4A72B"/>
                           </a:solidFill>
-                          <a:latin typeface="Microsoft JhengHei" pitchFamily="34" charset="0"/>
-                          <a:ea typeface="Microsoft JhengHei" pitchFamily="34" charset="-122"/>
-                          <a:cs typeface="Microsoft JhengHei" pitchFamily="34" charset="-120"/>
+                          <a:latin typeface="Hiragino Sans" pitchFamily="34" charset="0"/>
+                          <a:ea typeface="Hiragino Sans" pitchFamily="34" charset="-122"/>
+                          <a:cs typeface="Hiragino Sans" pitchFamily="34" charset="-120"/>
                         </a:rPr>
                         <a:t>低 · 藍圖價值高</a:t>
                       </a:r>
                       <a:endParaRPr lang="en-US" sz="1050" dirty="0">
-                        <a:latin typeface="Microsoft JhengHei" charset="0"/>
-                        <a:ea typeface="Microsoft JhengHei" charset="0"/>
-                        <a:cs typeface="Microsoft JhengHei" charset="0"/>
+                        <a:latin typeface="Hiragino Sans" charset="0"/>
+                        <a:ea typeface="Hiragino Sans" charset="0"/>
+                        <a:cs typeface="Hiragino Sans" charset="0"/>
                       </a:endParaRPr>
                     </a:p>
                   </a:txBody>
@@ -9689,9 +9667,9 @@
                 <a:solidFill>
                   <a:srgbClr val="C7D6E4"/>
                 </a:solidFill>
-                <a:latin typeface="Microsoft JhengHei" pitchFamily="34" charset="0"/>
-                <a:ea typeface="Microsoft JhengHei" pitchFamily="34" charset="-122"/>
-                <a:cs typeface="Microsoft JhengHei" pitchFamily="34" charset="-120"/>
+                <a:latin typeface="Hiragino Sans" pitchFamily="34" charset="0"/>
+                <a:ea typeface="Hiragino Sans" pitchFamily="34" charset="-122"/>
+                <a:cs typeface="Hiragino Sans" pitchFamily="34" charset="-120"/>
               </a:rPr>
               <a:t>已上線 / 佳</a:t>
             </a:r>
@@ -9748,9 +9726,9 @@
                 <a:solidFill>
                   <a:srgbClr val="C7D6E4"/>
                 </a:solidFill>
-                <a:latin typeface="Microsoft JhengHei" pitchFamily="34" charset="0"/>
-                <a:ea typeface="Microsoft JhengHei" pitchFamily="34" charset="-122"/>
-                <a:cs typeface="Microsoft JhengHei" pitchFamily="34" charset="-120"/>
+                <a:latin typeface="Hiragino Sans" pitchFamily="34" charset="0"/>
+                <a:ea typeface="Hiragino Sans" pitchFamily="34" charset="-122"/>
+                <a:cs typeface="Hiragino Sans" pitchFamily="34" charset="-120"/>
               </a:rPr>
               <a:t>需注意</a:t>
             </a:r>
@@ -9807,9 +9785,9 @@
                 <a:solidFill>
                   <a:srgbClr val="C7D6E4"/>
                 </a:solidFill>
-                <a:latin typeface="Microsoft JhengHei" pitchFamily="34" charset="0"/>
-                <a:ea typeface="Microsoft JhengHei" pitchFamily="34" charset="-122"/>
-                <a:cs typeface="Microsoft JhengHei" pitchFamily="34" charset="-120"/>
+                <a:latin typeface="Hiragino Sans" pitchFamily="34" charset="0"/>
+                <a:ea typeface="Hiragino Sans" pitchFamily="34" charset="-122"/>
+                <a:cs typeface="Hiragino Sans" pitchFamily="34" charset="-120"/>
               </a:rPr>
               <a:t>受阻 / 高風險</a:t>
             </a:r>
@@ -9885,9 +9863,9 @@
                 <a:solidFill>
                   <a:srgbClr val="2A9D8F"/>
                 </a:solidFill>
-                <a:latin typeface="Microsoft JhengHei" pitchFamily="34" charset="0"/>
-                <a:ea typeface="Microsoft JhengHei" pitchFamily="34" charset="-122"/>
-                <a:cs typeface="Microsoft JhengHei" pitchFamily="34" charset="-120"/>
+                <a:latin typeface="Hiragino Sans" pitchFamily="34" charset="0"/>
+                <a:ea typeface="Hiragino Sans" pitchFamily="34" charset="-122"/>
+                <a:cs typeface="Hiragino Sans" pitchFamily="34" charset="-120"/>
               </a:rPr>
               <a:t>判讀　</a:t>
             </a:r>
@@ -9902,9 +9880,9 @@
                 <a:solidFill>
                   <a:srgbClr val="FFFFFF"/>
                 </a:solidFill>
-                <a:latin typeface="Microsoft JhengHei" pitchFamily="34" charset="0"/>
-                <a:ea typeface="Microsoft JhengHei" pitchFamily="34" charset="-122"/>
-                <a:cs typeface="Microsoft JhengHei" pitchFamily="34" charset="-120"/>
+                <a:latin typeface="Hiragino Sans" pitchFamily="34" charset="0"/>
+                <a:ea typeface="Hiragino Sans" pitchFamily="34" charset="-122"/>
+                <a:cs typeface="Hiragino Sans" pitchFamily="34" charset="-120"/>
               </a:rPr>
               <a:t>3 天黑客松以 </a:t>
             </a:r>
@@ -9919,9 +9897,9 @@
                 <a:solidFill>
                   <a:srgbClr val="F4A72B"/>
                 </a:solidFill>
-                <a:latin typeface="Microsoft JhengHei" pitchFamily="34" charset="0"/>
-                <a:ea typeface="Microsoft JhengHei" pitchFamily="34" charset="-122"/>
-                <a:cs typeface="Microsoft JhengHei" pitchFamily="34" charset="-120"/>
+                <a:latin typeface="Hiragino Sans" pitchFamily="34" charset="0"/>
+                <a:ea typeface="Hiragino Sans" pitchFamily="34" charset="-122"/>
+                <a:cs typeface="Hiragino Sans" pitchFamily="34" charset="-120"/>
               </a:rPr>
               <a:t>A（現行強化）</a:t>
             </a:r>
@@ -9936,9 +9914,9 @@
                 <a:solidFill>
                   <a:srgbClr val="FFFFFF"/>
                 </a:solidFill>
-                <a:latin typeface="Microsoft JhengHei" pitchFamily="34" charset="0"/>
-                <a:ea typeface="Microsoft JhengHei" pitchFamily="34" charset="-122"/>
-                <a:cs typeface="Microsoft JhengHei" pitchFamily="34" charset="-120"/>
+                <a:latin typeface="Hiragino Sans" pitchFamily="34" charset="0"/>
+                <a:ea typeface="Hiragino Sans" pitchFamily="34" charset="-122"/>
+                <a:cs typeface="Hiragino Sans" pitchFamily="34" charset="-120"/>
               </a:rPr>
               <a:t> 為主線出賽（已上線、風險最低）；</a:t>
             </a:r>
@@ -9953,9 +9931,9 @@
                 <a:solidFill>
                   <a:srgbClr val="F4A72B"/>
                 </a:solidFill>
-                <a:latin typeface="Microsoft JhengHei" pitchFamily="34" charset="0"/>
-                <a:ea typeface="Microsoft JhengHei" pitchFamily="34" charset="-122"/>
-                <a:cs typeface="Microsoft JhengHei" pitchFamily="34" charset="-120"/>
+                <a:latin typeface="Hiragino Sans" pitchFamily="34" charset="0"/>
+                <a:ea typeface="Hiragino Sans" pitchFamily="34" charset="-122"/>
+                <a:cs typeface="Hiragino Sans" pitchFamily="34" charset="-120"/>
               </a:rPr>
               <a:t>D（EC2）</a:t>
             </a:r>
@@ -9970,9 +9948,9 @@
                 <a:solidFill>
                   <a:srgbClr val="FFFFFF"/>
                 </a:solidFill>
-                <a:latin typeface="Microsoft JhengHei" pitchFamily="34" charset="0"/>
-                <a:ea typeface="Microsoft JhengHei" pitchFamily="34" charset="-122"/>
-                <a:cs typeface="Microsoft JhengHei" pitchFamily="34" charset="-120"/>
+                <a:latin typeface="Hiragino Sans" pitchFamily="34" charset="0"/>
+                <a:ea typeface="Hiragino Sans" pitchFamily="34" charset="-122"/>
+                <a:cs typeface="Hiragino Sans" pitchFamily="34" charset="-120"/>
               </a:rPr>
               <a:t> 為托管服務受阻時的保底；</a:t>
             </a:r>
@@ -9987,9 +9965,9 @@
                 <a:solidFill>
                   <a:srgbClr val="F4A72B"/>
                 </a:solidFill>
-                <a:latin typeface="Microsoft JhengHei" pitchFamily="34" charset="0"/>
-                <a:ea typeface="Microsoft JhengHei" pitchFamily="34" charset="-122"/>
-                <a:cs typeface="Microsoft JhengHei" pitchFamily="34" charset="-120"/>
+                <a:latin typeface="Hiragino Sans" pitchFamily="34" charset="0"/>
+                <a:ea typeface="Hiragino Sans" pitchFamily="34" charset="-122"/>
+                <a:cs typeface="Hiragino Sans" pitchFamily="34" charset="-120"/>
               </a:rPr>
               <a:t>B / E</a:t>
             </a:r>
@@ -10004,9 +9982,9 @@
                 <a:solidFill>
                   <a:srgbClr val="FFFFFF"/>
                 </a:solidFill>
-                <a:latin typeface="Microsoft JhengHei" pitchFamily="34" charset="0"/>
-                <a:ea typeface="Microsoft JhengHei" pitchFamily="34" charset="-122"/>
-                <a:cs typeface="Microsoft JhengHei" pitchFamily="34" charset="-120"/>
+                <a:latin typeface="Hiragino Sans" pitchFamily="34" charset="0"/>
+                <a:ea typeface="Hiragino Sans" pitchFamily="34" charset="-122"/>
+                <a:cs typeface="Hiragino Sans" pitchFamily="34" charset="-120"/>
               </a:rPr>
               <a:t> 作為資料驅動與全艦隊願景的演進方向寫進簡報。C 因帳號 AccessDenied 暫不採用。</a:t>
             </a:r>
@@ -10228,9 +10206,9 @@
                 <a:solidFill>
                   <a:srgbClr val="FFFFFF"/>
                 </a:solidFill>
-                <a:latin typeface="Microsoft JhengHei" pitchFamily="34" charset="0"/>
-                <a:ea typeface="Microsoft JhengHei" pitchFamily="34" charset="-122"/>
-                <a:cs typeface="Microsoft JhengHei" pitchFamily="34" charset="-120"/>
+                <a:latin typeface="Hiragino Sans" pitchFamily="34" charset="0"/>
+                <a:ea typeface="Hiragino Sans" pitchFamily="34" charset="-122"/>
+                <a:cs typeface="Hiragino Sans" pitchFamily="34" charset="-120"/>
               </a:rPr>
               <a:t>12</a:t>
             </a:r>
@@ -10242,9 +10220,9 @@
                 <a:solidFill>
                   <a:srgbClr val="8FA8BD"/>
                 </a:solidFill>
-                <a:latin typeface="Microsoft JhengHei" pitchFamily="34" charset="0"/>
-                <a:ea typeface="Microsoft JhengHei" pitchFamily="34" charset="-122"/>
-                <a:cs typeface="Microsoft JhengHei" pitchFamily="34" charset="-120"/>
+                <a:latin typeface="Hiragino Sans" pitchFamily="34" charset="0"/>
+                <a:ea typeface="Hiragino Sans" pitchFamily="34" charset="-122"/>
+                <a:cs typeface="Hiragino Sans" pitchFamily="34" charset="-120"/>
               </a:rPr>
               <a:t>  /  15</a:t>
             </a:r>
@@ -10281,9 +10259,9 @@
                 <a:solidFill>
                   <a:srgbClr val="F4A72B"/>
                 </a:solidFill>
-                <a:latin typeface="Microsoft JhengHei" pitchFamily="34" charset="0"/>
-                <a:ea typeface="Microsoft JhengHei" pitchFamily="34" charset="-122"/>
-                <a:cs typeface="Microsoft JhengHei" pitchFamily="34" charset="-120"/>
+                <a:latin typeface="Hiragino Sans" pitchFamily="34" charset="0"/>
+                <a:ea typeface="Hiragino Sans" pitchFamily="34" charset="-122"/>
+                <a:cs typeface="Hiragino Sans" pitchFamily="34" charset="-120"/>
               </a:rPr>
               <a:t>ROADMAP</a:t>
             </a:r>
@@ -10320,9 +10298,9 @@
                 <a:solidFill>
                   <a:srgbClr val="FFFFFF"/>
                 </a:solidFill>
-                <a:latin typeface="Microsoft JhengHei" pitchFamily="34" charset="0"/>
-                <a:ea typeface="Microsoft JhengHei" pitchFamily="34" charset="-122"/>
-                <a:cs typeface="Microsoft JhengHei" pitchFamily="34" charset="-120"/>
+                <a:latin typeface="Hiragino Sans" pitchFamily="34" charset="0"/>
+                <a:ea typeface="Hiragino Sans" pitchFamily="34" charset="-122"/>
+                <a:cs typeface="Hiragino Sans" pitchFamily="34" charset="-120"/>
               </a:rPr>
               <a:t>從 15 艘 demo 到全艦隊即時營運平台</a:t>
             </a:r>
@@ -10429,9 +10407,9 @@
                 <a:solidFill>
                   <a:srgbClr val="FFFFFF"/>
                 </a:solidFill>
-                <a:latin typeface="Microsoft JhengHei" pitchFamily="34" charset="0"/>
-                <a:ea typeface="Microsoft JhengHei" pitchFamily="34" charset="-122"/>
-                <a:cs typeface="Microsoft JhengHei" pitchFamily="34" charset="-120"/>
+                <a:latin typeface="Hiragino Sans" pitchFamily="34" charset="0"/>
+                <a:ea typeface="Hiragino Sans" pitchFamily="34" charset="-122"/>
+                <a:cs typeface="Hiragino Sans" pitchFamily="34" charset="-120"/>
               </a:rPr>
               <a:t>現在</a:t>
             </a:r>
@@ -10546,9 +10524,9 @@
                 <a:solidFill>
                   <a:srgbClr val="FFFFFF"/>
                 </a:solidFill>
-                <a:latin typeface="Microsoft JhengHei" pitchFamily="34" charset="0"/>
-                <a:ea typeface="Microsoft JhengHei" pitchFamily="34" charset="-122"/>
-                <a:cs typeface="Microsoft JhengHei" pitchFamily="34" charset="-120"/>
+                <a:latin typeface="Hiragino Sans" pitchFamily="34" charset="0"/>
+                <a:ea typeface="Hiragino Sans" pitchFamily="34" charset="-122"/>
+                <a:cs typeface="Hiragino Sans" pitchFamily="34" charset="-120"/>
               </a:rPr>
               <a:t>Phase 0 · Demo</a:t>
             </a:r>
@@ -10592,9 +10570,9 @@
                 <a:solidFill>
                   <a:srgbClr val="C7D6E4"/>
                 </a:solidFill>
-                <a:latin typeface="Microsoft JhengHei" pitchFamily="34" charset="0"/>
-                <a:ea typeface="Microsoft JhengHei" pitchFamily="34" charset="-122"/>
-                <a:cs typeface="Microsoft JhengHei" pitchFamily="34" charset="-120"/>
+                <a:latin typeface="Hiragino Sans" pitchFamily="34" charset="0"/>
+                <a:ea typeface="Hiragino Sans" pitchFamily="34" charset="-122"/>
+                <a:cs typeface="Hiragino Sans" pitchFamily="34" charset="-120"/>
               </a:rPr>
               <a:t>15 艘 · 5 年報表</a:t>
             </a:r>
@@ -10616,9 +10594,9 @@
                 <a:solidFill>
                   <a:srgbClr val="C7D6E4"/>
                 </a:solidFill>
-                <a:latin typeface="Microsoft JhengHei" pitchFamily="34" charset="0"/>
-                <a:ea typeface="Microsoft JhengHei" pitchFamily="34" charset="-122"/>
-                <a:cs typeface="Microsoft JhengHei" pitchFamily="34" charset="-120"/>
+                <a:latin typeface="Hiragino Sans" pitchFamily="34" charset="0"/>
+                <a:ea typeface="Hiragino Sans" pitchFamily="34" charset="-122"/>
+                <a:cs typeface="Hiragino Sans" pitchFamily="34" charset="-120"/>
               </a:rPr>
               <a:t>baked real-metrics.json</a:t>
             </a:r>
@@ -10640,9 +10618,9 @@
                 <a:solidFill>
                   <a:srgbClr val="C7D6E4"/>
                 </a:solidFill>
-                <a:latin typeface="Microsoft JhengHei" pitchFamily="34" charset="0"/>
-                <a:ea typeface="Microsoft JhengHei" pitchFamily="34" charset="-122"/>
-                <a:cs typeface="Microsoft JhengHei" pitchFamily="34" charset="-120"/>
+                <a:latin typeface="Hiragino Sans" pitchFamily="34" charset="0"/>
+                <a:ea typeface="Hiragino Sans" pitchFamily="34" charset="-122"/>
+                <a:cs typeface="Hiragino Sans" pitchFamily="34" charset="-120"/>
               </a:rPr>
               <a:t>ECS Fargate + ALB 已上線</a:t>
             </a:r>
@@ -10726,9 +10704,9 @@
                 <a:solidFill>
                   <a:srgbClr val="FFFFFF"/>
                 </a:solidFill>
-                <a:latin typeface="Microsoft JhengHei" pitchFamily="34" charset="0"/>
-                <a:ea typeface="Microsoft JhengHei" pitchFamily="34" charset="-122"/>
-                <a:cs typeface="Microsoft JhengHei" pitchFamily="34" charset="-120"/>
+                <a:latin typeface="Hiragino Sans" pitchFamily="34" charset="0"/>
+                <a:ea typeface="Hiragino Sans" pitchFamily="34" charset="-122"/>
+                <a:cs typeface="Hiragino Sans" pitchFamily="34" charset="-120"/>
               </a:rPr>
               <a:t>近期</a:t>
             </a:r>
@@ -10843,9 +10821,9 @@
                 <a:solidFill>
                   <a:srgbClr val="FFFFFF"/>
                 </a:solidFill>
-                <a:latin typeface="Microsoft JhengHei" pitchFamily="34" charset="0"/>
-                <a:ea typeface="Microsoft JhengHei" pitchFamily="34" charset="-122"/>
-                <a:cs typeface="Microsoft JhengHei" pitchFamily="34" charset="-120"/>
+                <a:latin typeface="Hiragino Sans" pitchFamily="34" charset="0"/>
+                <a:ea typeface="Hiragino Sans" pitchFamily="34" charset="-122"/>
+                <a:cs typeface="Hiragino Sans" pitchFamily="34" charset="-120"/>
               </a:rPr>
               <a:t>Phase 1 · 資料驅動</a:t>
             </a:r>
@@ -10889,9 +10867,9 @@
                 <a:solidFill>
                   <a:srgbClr val="C7D6E4"/>
                 </a:solidFill>
-                <a:latin typeface="Microsoft JhengHei" pitchFamily="34" charset="0"/>
-                <a:ea typeface="Microsoft JhengHei" pitchFamily="34" charset="-122"/>
-                <a:cs typeface="Microsoft JhengHei" pitchFamily="34" charset="-120"/>
+                <a:latin typeface="Hiragino Sans" pitchFamily="34" charset="0"/>
+                <a:ea typeface="Hiragino Sans" pitchFamily="34" charset="-122"/>
+                <a:cs typeface="Hiragino Sans" pitchFamily="34" charset="-120"/>
               </a:rPr>
               <a:t>系統介接 ingest API</a:t>
             </a:r>
@@ -10913,9 +10891,9 @@
                 <a:solidFill>
                   <a:srgbClr val="C7D6E4"/>
                 </a:solidFill>
-                <a:latin typeface="Microsoft JhengHei" pitchFamily="34" charset="0"/>
-                <a:ea typeface="Microsoft JhengHei" pitchFamily="34" charset="-122"/>
-                <a:cs typeface="Microsoft JhengHei" pitchFamily="34" charset="-120"/>
+                <a:latin typeface="Hiragino Sans" pitchFamily="34" charset="0"/>
+                <a:ea typeface="Hiragino Sans" pitchFamily="34" charset="-122"/>
+                <a:cs typeface="Hiragino Sans" pitchFamily="34" charset="-120"/>
               </a:rPr>
               <a:t>檔案上傳 CSV/xlsx</a:t>
             </a:r>
@@ -10937,9 +10915,9 @@
                 <a:solidFill>
                   <a:srgbClr val="C7D6E4"/>
                 </a:solidFill>
-                <a:latin typeface="Microsoft JhengHei" pitchFamily="34" charset="0"/>
-                <a:ea typeface="Microsoft JhengHei" pitchFamily="34" charset="-122"/>
-                <a:cs typeface="Microsoft JhengHei" pitchFamily="34" charset="-120"/>
+                <a:latin typeface="Hiragino Sans" pitchFamily="34" charset="0"/>
+                <a:ea typeface="Hiragino Sans" pitchFamily="34" charset="-122"/>
+                <a:cs typeface="Hiragino Sans" pitchFamily="34" charset="-120"/>
               </a:rPr>
               <a:t>後台設定門檻/通道/燃料對應</a:t>
             </a:r>
@@ -11023,9 +11001,9 @@
                 <a:solidFill>
                   <a:srgbClr val="FFFFFF"/>
                 </a:solidFill>
-                <a:latin typeface="Microsoft JhengHei" pitchFamily="34" charset="0"/>
-                <a:ea typeface="Microsoft JhengHei" pitchFamily="34" charset="-122"/>
-                <a:cs typeface="Microsoft JhengHei" pitchFamily="34" charset="-120"/>
+                <a:latin typeface="Hiragino Sans" pitchFamily="34" charset="0"/>
+                <a:ea typeface="Hiragino Sans" pitchFamily="34" charset="-122"/>
+                <a:cs typeface="Hiragino Sans" pitchFamily="34" charset="-120"/>
               </a:rPr>
               <a:t>中期</a:t>
             </a:r>
@@ -11140,9 +11118,9 @@
                 <a:solidFill>
                   <a:srgbClr val="FFFFFF"/>
                 </a:solidFill>
-                <a:latin typeface="Microsoft JhengHei" pitchFamily="34" charset="0"/>
-                <a:ea typeface="Microsoft JhengHei" pitchFamily="34" charset="-122"/>
-                <a:cs typeface="Microsoft JhengHei" pitchFamily="34" charset="-120"/>
+                <a:latin typeface="Hiragino Sans" pitchFamily="34" charset="0"/>
+                <a:ea typeface="Hiragino Sans" pitchFamily="34" charset="-122"/>
+                <a:cs typeface="Hiragino Sans" pitchFamily="34" charset="-120"/>
               </a:rPr>
               <a:t>Phase 2 · 全艦隊 + BI</a:t>
             </a:r>
@@ -11186,9 +11164,9 @@
                 <a:solidFill>
                   <a:srgbClr val="C7D6E4"/>
                 </a:solidFill>
-                <a:latin typeface="Microsoft JhengHei" pitchFamily="34" charset="0"/>
-                <a:ea typeface="Microsoft JhengHei" pitchFamily="34" charset="-122"/>
-                <a:cs typeface="Microsoft JhengHei" pitchFamily="34" charset="-120"/>
+                <a:latin typeface="Hiragino Sans" pitchFamily="34" charset="0"/>
+                <a:ea typeface="Hiragino Sans" pitchFamily="34" charset="-122"/>
+                <a:cs typeface="Hiragino Sans" pitchFamily="34" charset="-120"/>
               </a:rPr>
               <a:t>Serverless / 事件驅動重算</a:t>
             </a:r>
@@ -11210,9 +11188,9 @@
                 <a:solidFill>
                   <a:srgbClr val="C7D6E4"/>
                 </a:solidFill>
-                <a:latin typeface="Microsoft JhengHei" pitchFamily="34" charset="0"/>
-                <a:ea typeface="Microsoft JhengHei" pitchFamily="34" charset="-122"/>
-                <a:cs typeface="Microsoft JhengHei" pitchFamily="34" charset="-120"/>
+                <a:latin typeface="Hiragino Sans" pitchFamily="34" charset="0"/>
+                <a:ea typeface="Hiragino Sans" pitchFamily="34" charset="-122"/>
+                <a:cs typeface="Hiragino Sans" pitchFamily="34" charset="-120"/>
               </a:rPr>
               <a:t>擴到 97 艘同架構</a:t>
             </a:r>
@@ -11234,9 +11212,9 @@
                 <a:solidFill>
                   <a:srgbClr val="C7D6E4"/>
                 </a:solidFill>
-                <a:latin typeface="Microsoft JhengHei" pitchFamily="34" charset="0"/>
-                <a:ea typeface="Microsoft JhengHei" pitchFamily="34" charset="-122"/>
-                <a:cs typeface="Microsoft JhengHei" pitchFamily="34" charset="-120"/>
+                <a:latin typeface="Hiragino Sans" pitchFamily="34" charset="0"/>
+                <a:ea typeface="Hiragino Sans" pitchFamily="34" charset="-122"/>
+                <a:cs typeface="Hiragino Sans" pitchFamily="34" charset="-120"/>
               </a:rPr>
               <a:t>QuickSight / Athena 自助 BI</a:t>
             </a:r>
@@ -11320,9 +11298,9 @@
                 <a:solidFill>
                   <a:srgbClr val="0A2540"/>
                 </a:solidFill>
-                <a:latin typeface="Microsoft JhengHei" pitchFamily="34" charset="0"/>
-                <a:ea typeface="Microsoft JhengHei" pitchFamily="34" charset="-122"/>
-                <a:cs typeface="Microsoft JhengHei" pitchFamily="34" charset="-120"/>
+                <a:latin typeface="Hiragino Sans" pitchFamily="34" charset="0"/>
+                <a:ea typeface="Hiragino Sans" pitchFamily="34" charset="-122"/>
+                <a:cs typeface="Hiragino Sans" pitchFamily="34" charset="-120"/>
               </a:rPr>
               <a:t>願景</a:t>
             </a:r>
@@ -11437,9 +11415,9 @@
                 <a:solidFill>
                   <a:srgbClr val="0A2540"/>
                 </a:solidFill>
-                <a:latin typeface="Microsoft JhengHei" pitchFamily="34" charset="0"/>
-                <a:ea typeface="Microsoft JhengHei" pitchFamily="34" charset="-122"/>
-                <a:cs typeface="Microsoft JhengHei" pitchFamily="34" charset="-120"/>
+                <a:latin typeface="Hiragino Sans" pitchFamily="34" charset="0"/>
+                <a:ea typeface="Hiragino Sans" pitchFamily="34" charset="-122"/>
+                <a:cs typeface="Hiragino Sans" pitchFamily="34" charset="-120"/>
               </a:rPr>
               <a:t>Phase 3 · 即時 + ML</a:t>
             </a:r>
@@ -11483,9 +11461,9 @@
                 <a:solidFill>
                   <a:srgbClr val="C7D6E4"/>
                 </a:solidFill>
-                <a:latin typeface="Microsoft JhengHei" pitchFamily="34" charset="0"/>
-                <a:ea typeface="Microsoft JhengHei" pitchFamily="34" charset="-122"/>
-                <a:cs typeface="Microsoft JhengHei" pitchFamily="34" charset="-120"/>
+                <a:latin typeface="Hiragino Sans" pitchFamily="34" charset="0"/>
+                <a:ea typeface="Hiragino Sans" pitchFamily="34" charset="-122"/>
+                <a:cs typeface="Hiragino Sans" pitchFamily="34" charset="-120"/>
               </a:rPr>
               <a:t>IoT Core 船端即時遙測</a:t>
             </a:r>
@@ -11507,9 +11485,9 @@
                 <a:solidFill>
                   <a:srgbClr val="C7D6E4"/>
                 </a:solidFill>
-                <a:latin typeface="Microsoft JhengHei" pitchFamily="34" charset="0"/>
-                <a:ea typeface="Microsoft JhengHei" pitchFamily="34" charset="-122"/>
-                <a:cs typeface="Microsoft JhengHei" pitchFamily="34" charset="-120"/>
+                <a:latin typeface="Hiragino Sans" pitchFamily="34" charset="0"/>
+                <a:ea typeface="Hiragino Sans" pitchFamily="34" charset="-122"/>
+                <a:cs typeface="Hiragino Sans" pitchFamily="34" charset="-120"/>
               </a:rPr>
               <a:t>SageMaker 油耗/衰退預測</a:t>
             </a:r>
@@ -11531,9 +11509,9 @@
                 <a:solidFill>
                   <a:srgbClr val="C7D6E4"/>
                 </a:solidFill>
-                <a:latin typeface="Microsoft JhengHei" pitchFamily="34" charset="0"/>
-                <a:ea typeface="Microsoft JhengHei" pitchFamily="34" charset="-122"/>
-                <a:cs typeface="Microsoft JhengHei" pitchFamily="34" charset="-120"/>
+                <a:latin typeface="Hiragino Sans" pitchFamily="34" charset="0"/>
+                <a:ea typeface="Hiragino Sans" pitchFamily="34" charset="-122"/>
+                <a:cs typeface="Hiragino Sans" pitchFamily="34" charset="-120"/>
               </a:rPr>
               <a:t>近即時 Speed Loss 偵測</a:t>
             </a:r>
@@ -11602,9 +11580,9 @@
                 <a:solidFill>
                   <a:srgbClr val="F4A72B"/>
                 </a:solidFill>
-                <a:latin typeface="Microsoft JhengHei" pitchFamily="34" charset="0"/>
-                <a:ea typeface="Microsoft JhengHei" pitchFamily="34" charset="-122"/>
-                <a:cs typeface="Microsoft JhengHei" pitchFamily="34" charset="-120"/>
+                <a:latin typeface="Hiragino Sans" pitchFamily="34" charset="0"/>
+                <a:ea typeface="Hiragino Sans" pitchFamily="34" charset="-122"/>
+                <a:cs typeface="Hiragino Sans" pitchFamily="34" charset="-120"/>
               </a:rPr>
               <a:t>落地三扇門　</a:t>
             </a:r>
@@ -11619,9 +11597,9 @@
                 <a:solidFill>
                   <a:srgbClr val="FFFFFF"/>
                 </a:solidFill>
-                <a:latin typeface="Microsoft JhengHei" pitchFamily="34" charset="0"/>
-                <a:ea typeface="Microsoft JhengHei" pitchFamily="34" charset="-122"/>
-                <a:cs typeface="Microsoft JhengHei" pitchFamily="34" charset="-120"/>
+                <a:latin typeface="Hiragino Sans" pitchFamily="34" charset="0"/>
+                <a:ea typeface="Hiragino Sans" pitchFamily="34" charset="-122"/>
+                <a:cs typeface="Hiragino Sans" pitchFamily="34" charset="-120"/>
               </a:rPr>
               <a:t>① 系統介接（TMS 推 noon report → 觸發重算）　② 檔案上傳（CSV/xlsx dryRun 預覽再落庫）　③ 後台設定（門檻 / 告警通道 / 燃料對應表 / 資料來源模式）</a:t>
             </a:r>
@@ -11843,9 +11821,9 @@
                 <a:solidFill>
                   <a:srgbClr val="FFFFFF"/>
                 </a:solidFill>
-                <a:latin typeface="Microsoft JhengHei" pitchFamily="34" charset="0"/>
-                <a:ea typeface="Microsoft JhengHei" pitchFamily="34" charset="-122"/>
-                <a:cs typeface="Microsoft JhengHei" pitchFamily="34" charset="-120"/>
+                <a:latin typeface="Hiragino Sans" pitchFamily="34" charset="0"/>
+                <a:ea typeface="Hiragino Sans" pitchFamily="34" charset="-122"/>
+                <a:cs typeface="Hiragino Sans" pitchFamily="34" charset="-120"/>
               </a:rPr>
               <a:t>13</a:t>
             </a:r>
@@ -11857,9 +11835,9 @@
                 <a:solidFill>
                   <a:srgbClr val="8FA8BD"/>
                 </a:solidFill>
-                <a:latin typeface="Microsoft JhengHei" pitchFamily="34" charset="0"/>
-                <a:ea typeface="Microsoft JhengHei" pitchFamily="34" charset="-122"/>
-                <a:cs typeface="Microsoft JhengHei" pitchFamily="34" charset="-120"/>
+                <a:latin typeface="Hiragino Sans" pitchFamily="34" charset="0"/>
+                <a:ea typeface="Hiragino Sans" pitchFamily="34" charset="-122"/>
+                <a:cs typeface="Hiragino Sans" pitchFamily="34" charset="-120"/>
               </a:rPr>
               <a:t>  /  15</a:t>
             </a:r>
@@ -11896,9 +11874,9 @@
                 <a:solidFill>
                   <a:srgbClr val="F4A72B"/>
                 </a:solidFill>
-                <a:latin typeface="Microsoft JhengHei" pitchFamily="34" charset="0"/>
-                <a:ea typeface="Microsoft JhengHei" pitchFamily="34" charset="-122"/>
-                <a:cs typeface="Microsoft JhengHei" pitchFamily="34" charset="-120"/>
+                <a:latin typeface="Hiragino Sans" pitchFamily="34" charset="0"/>
+                <a:ea typeface="Hiragino Sans" pitchFamily="34" charset="-122"/>
+                <a:cs typeface="Hiragino Sans" pitchFamily="34" charset="-120"/>
               </a:rPr>
               <a:t>DECISION CASCADE</a:t>
             </a:r>
@@ -11935,9 +11913,9 @@
                 <a:solidFill>
                   <a:srgbClr val="FFFFFF"/>
                 </a:solidFill>
-                <a:latin typeface="Microsoft JhengHei" pitchFamily="34" charset="0"/>
-                <a:ea typeface="Microsoft JhengHei" pitchFamily="34" charset="-122"/>
-                <a:cs typeface="Microsoft JhengHei" pitchFamily="34" charset="-120"/>
+                <a:latin typeface="Hiragino Sans" pitchFamily="34" charset="0"/>
+                <a:ea typeface="Hiragino Sans" pitchFamily="34" charset="-122"/>
+                <a:cs typeface="Hiragino Sans" pitchFamily="34" charset="-120"/>
               </a:rPr>
               <a:t>決策級聯：正常 → 注意 → 行動</a:t>
             </a:r>
@@ -11997,13 +11975,13 @@
               <a:buNone/>
             </a:pPr>
             <a:r>
-              <a:rPr lang="en-US" sz="1250" i="1" dirty="0">
+              <a:rPr lang="en-US" sz="1250" dirty="0">
                 <a:solidFill>
                   <a:srgbClr val="C7D6E4"/>
                 </a:solidFill>
-                <a:latin typeface="Microsoft JhengHei" pitchFamily="34" charset="0"/>
-                <a:ea typeface="Microsoft JhengHei" pitchFamily="34" charset="-122"/>
-                <a:cs typeface="Microsoft JhengHei" pitchFamily="34" charset="-120"/>
+                <a:latin typeface="Hiragino Sans" pitchFamily="34" charset="0"/>
+                <a:ea typeface="Hiragino Sans" pitchFamily="34" charset="-122"/>
+                <a:cs typeface="Hiragino Sans" pitchFamily="34" charset="-120"/>
               </a:rPr>
               <a:t>同一套已上線服務，依 Speed Loss 對可調門檻的位置，把船分成三種決策狀態 — 數字觸發流程，最後一步永遠留給人。</a:t>
             </a:r>
@@ -12118,9 +12096,9 @@
                 <a:solidFill>
                   <a:srgbClr val="FFFFFF"/>
                 </a:solidFill>
-                <a:latin typeface="Microsoft JhengHei" pitchFamily="34" charset="0"/>
-                <a:ea typeface="Microsoft JhengHei" pitchFamily="34" charset="-122"/>
-                <a:cs typeface="Microsoft JhengHei" pitchFamily="34" charset="-120"/>
+                <a:latin typeface="Hiragino Sans" pitchFamily="34" charset="0"/>
+                <a:ea typeface="Hiragino Sans" pitchFamily="34" charset="-122"/>
+                <a:cs typeface="Hiragino Sans" pitchFamily="34" charset="-120"/>
               </a:rPr>
               <a:t>01　</a:t>
             </a:r>
@@ -12132,9 +12110,9 @@
                 <a:solidFill>
                   <a:srgbClr val="FFFFFF"/>
                 </a:solidFill>
-                <a:latin typeface="Microsoft JhengHei" pitchFamily="34" charset="0"/>
-                <a:ea typeface="Microsoft JhengHei" pitchFamily="34" charset="-122"/>
-                <a:cs typeface="Microsoft JhengHei" pitchFamily="34" charset="-120"/>
+                <a:latin typeface="Hiragino Sans" pitchFamily="34" charset="0"/>
+                <a:ea typeface="Hiragino Sans" pitchFamily="34" charset="-122"/>
+                <a:cs typeface="Hiragino Sans" pitchFamily="34" charset="-120"/>
               </a:rPr>
               <a:t>正常</a:t>
             </a:r>
@@ -12171,9 +12149,9 @@
                 <a:solidFill>
                   <a:srgbClr val="2A9D8F"/>
                 </a:solidFill>
-                <a:latin typeface="Microsoft JhengHei" pitchFamily="34" charset="0"/>
-                <a:ea typeface="Microsoft JhengHei" pitchFamily="34" charset="-122"/>
-                <a:cs typeface="Microsoft JhengHei" pitchFamily="34" charset="-120"/>
+                <a:latin typeface="Hiragino Sans" pitchFamily="34" charset="0"/>
+                <a:ea typeface="Hiragino Sans" pitchFamily="34" charset="-122"/>
+                <a:cs typeface="Hiragino Sans" pitchFamily="34" charset="-120"/>
               </a:rPr>
               <a:t>條件</a:t>
             </a:r>
@@ -12213,9 +12191,9 @@
                 <a:solidFill>
                   <a:srgbClr val="FFFFFF"/>
                 </a:solidFill>
-                <a:latin typeface="Microsoft JhengHei" pitchFamily="34" charset="0"/>
-                <a:ea typeface="Microsoft JhengHei" pitchFamily="34" charset="-122"/>
-                <a:cs typeface="Microsoft JhengHei" pitchFamily="34" charset="-120"/>
+                <a:latin typeface="Hiragino Sans" pitchFamily="34" charset="0"/>
+                <a:ea typeface="Hiragino Sans" pitchFamily="34" charset="-122"/>
+                <a:cs typeface="Hiragino Sans" pitchFamily="34" charset="-120"/>
               </a:rPr>
               <a:t>Speed Loss 低於門檻</a:t>
             </a:r>
@@ -12233,9 +12211,9 @@
                 <a:solidFill>
                   <a:srgbClr val="FFFFFF"/>
                 </a:solidFill>
-                <a:latin typeface="Microsoft JhengHei" pitchFamily="34" charset="0"/>
-                <a:ea typeface="Microsoft JhengHei" pitchFamily="34" charset="-122"/>
-                <a:cs typeface="Microsoft JhengHei" pitchFamily="34" charset="-120"/>
+                <a:latin typeface="Hiragino Sans" pitchFamily="34" charset="0"/>
+                <a:ea typeface="Hiragino Sans" pitchFamily="34" charset="-122"/>
+                <a:cs typeface="Hiragino Sans" pitchFamily="34" charset="-120"/>
               </a:rPr>
               <a:t>品質旗標通過</a:t>
             </a:r>
@@ -12272,9 +12250,9 @@
                 <a:solidFill>
                   <a:srgbClr val="2A9D8F"/>
                 </a:solidFill>
-                <a:latin typeface="Microsoft JhengHei" pitchFamily="34" charset="0"/>
-                <a:ea typeface="Microsoft JhengHei" pitchFamily="34" charset="-122"/>
-                <a:cs typeface="Microsoft JhengHei" pitchFamily="34" charset="-120"/>
+                <a:latin typeface="Hiragino Sans" pitchFamily="34" charset="0"/>
+                <a:ea typeface="Hiragino Sans" pitchFamily="34" charset="-122"/>
+                <a:cs typeface="Hiragino Sans" pitchFamily="34" charset="-120"/>
               </a:rPr>
               <a:t>系統動作</a:t>
             </a:r>
@@ -12318,9 +12296,9 @@
                 <a:solidFill>
                   <a:srgbClr val="C7D6E4"/>
                 </a:solidFill>
-                <a:latin typeface="Microsoft JhengHei" pitchFamily="34" charset="0"/>
-                <a:ea typeface="Microsoft JhengHei" pitchFamily="34" charset="-122"/>
-                <a:cs typeface="Microsoft JhengHei" pitchFamily="34" charset="-120"/>
+                <a:latin typeface="Hiragino Sans" pitchFamily="34" charset="0"/>
+                <a:ea typeface="Hiragino Sans" pitchFamily="34" charset="-122"/>
+                <a:cs typeface="Hiragino Sans" pitchFamily="34" charset="-120"/>
               </a:rPr>
               <a:t>看板綠燈、持續監測</a:t>
             </a:r>
@@ -12342,9 +12320,9 @@
                 <a:solidFill>
                   <a:srgbClr val="C7D6E4"/>
                 </a:solidFill>
-                <a:latin typeface="Microsoft JhengHei" pitchFamily="34" charset="0"/>
-                <a:ea typeface="Microsoft JhengHei" pitchFamily="34" charset="-122"/>
-                <a:cs typeface="Microsoft JhengHei" pitchFamily="34" charset="-120"/>
+                <a:latin typeface="Hiragino Sans" pitchFamily="34" charset="0"/>
+                <a:ea typeface="Hiragino Sans" pitchFamily="34" charset="-122"/>
+                <a:cs typeface="Hiragino Sans" pitchFamily="34" charset="-120"/>
               </a:rPr>
               <a:t>無需人工介入</a:t>
             </a:r>
@@ -12403,9 +12381,9 @@
                 <a:solidFill>
                   <a:srgbClr val="5A6B7B"/>
                 </a:solidFill>
-                <a:latin typeface="Microsoft JhengHei" pitchFamily="34" charset="0"/>
-                <a:ea typeface="Microsoft JhengHei" pitchFamily="34" charset="-122"/>
-                <a:cs typeface="Microsoft JhengHei" pitchFamily="34" charset="-120"/>
+                <a:latin typeface="Hiragino Sans" pitchFamily="34" charset="0"/>
+                <a:ea typeface="Hiragino Sans" pitchFamily="34" charset="-122"/>
+                <a:cs typeface="Hiragino Sans" pitchFamily="34" charset="-120"/>
               </a:rPr>
               <a:t>例　</a:t>
             </a:r>
@@ -12417,9 +12395,9 @@
                 <a:solidFill>
                   <a:srgbClr val="0A2540"/>
                 </a:solidFill>
-                <a:latin typeface="Microsoft JhengHei" pitchFamily="34" charset="0"/>
-                <a:ea typeface="Microsoft JhengHei" pitchFamily="34" charset="-122"/>
-                <a:cs typeface="Microsoft JhengHei" pitchFamily="34" charset="-120"/>
+                <a:latin typeface="Hiragino Sans" pitchFamily="34" charset="0"/>
+                <a:ea typeface="Hiragino Sans" pitchFamily="34" charset="-122"/>
+                <a:cs typeface="Hiragino Sans" pitchFamily="34" charset="-120"/>
               </a:rPr>
               <a:t>多數船</a:t>
             </a:r>
@@ -12558,9 +12536,9 @@
                 <a:solidFill>
                   <a:srgbClr val="0A2540"/>
                 </a:solidFill>
-                <a:latin typeface="Microsoft JhengHei" pitchFamily="34" charset="0"/>
-                <a:ea typeface="Microsoft JhengHei" pitchFamily="34" charset="-122"/>
-                <a:cs typeface="Microsoft JhengHei" pitchFamily="34" charset="-120"/>
+                <a:latin typeface="Hiragino Sans" pitchFamily="34" charset="0"/>
+                <a:ea typeface="Hiragino Sans" pitchFamily="34" charset="-122"/>
+                <a:cs typeface="Hiragino Sans" pitchFamily="34" charset="-120"/>
               </a:rPr>
               <a:t>02　</a:t>
             </a:r>
@@ -12572,9 +12550,9 @@
                 <a:solidFill>
                   <a:srgbClr val="0A2540"/>
                 </a:solidFill>
-                <a:latin typeface="Microsoft JhengHei" pitchFamily="34" charset="0"/>
-                <a:ea typeface="Microsoft JhengHei" pitchFamily="34" charset="-122"/>
-                <a:cs typeface="Microsoft JhengHei" pitchFamily="34" charset="-120"/>
+                <a:latin typeface="Hiragino Sans" pitchFamily="34" charset="0"/>
+                <a:ea typeface="Hiragino Sans" pitchFamily="34" charset="-122"/>
+                <a:cs typeface="Hiragino Sans" pitchFamily="34" charset="-120"/>
               </a:rPr>
               <a:t>注意</a:t>
             </a:r>
@@ -12611,9 +12589,9 @@
                 <a:solidFill>
                   <a:srgbClr val="2A9D8F"/>
                 </a:solidFill>
-                <a:latin typeface="Microsoft JhengHei" pitchFamily="34" charset="0"/>
-                <a:ea typeface="Microsoft JhengHei" pitchFamily="34" charset="-122"/>
-                <a:cs typeface="Microsoft JhengHei" pitchFamily="34" charset="-120"/>
+                <a:latin typeface="Hiragino Sans" pitchFamily="34" charset="0"/>
+                <a:ea typeface="Hiragino Sans" pitchFamily="34" charset="-122"/>
+                <a:cs typeface="Hiragino Sans" pitchFamily="34" charset="-120"/>
               </a:rPr>
               <a:t>條件</a:t>
             </a:r>
@@ -12653,9 +12631,9 @@
                 <a:solidFill>
                   <a:srgbClr val="FFFFFF"/>
                 </a:solidFill>
-                <a:latin typeface="Microsoft JhengHei" pitchFamily="34" charset="0"/>
-                <a:ea typeface="Microsoft JhengHei" pitchFamily="34" charset="-122"/>
-                <a:cs typeface="Microsoft JhengHei" pitchFamily="34" charset="-120"/>
+                <a:latin typeface="Hiragino Sans" pitchFamily="34" charset="0"/>
+                <a:ea typeface="Hiragino Sans" pitchFamily="34" charset="-122"/>
+                <a:cs typeface="Hiragino Sans" pitchFamily="34" charset="-120"/>
               </a:rPr>
               <a:t>接近 / 跨越門檻</a:t>
             </a:r>
@@ -12673,9 +12651,9 @@
                 <a:solidFill>
                   <a:srgbClr val="FFFFFF"/>
                 </a:solidFill>
-                <a:latin typeface="Microsoft JhengHei" pitchFamily="34" charset="0"/>
-                <a:ea typeface="Microsoft JhengHei" pitchFamily="34" charset="-122"/>
-                <a:cs typeface="Microsoft JhengHei" pitchFamily="34" charset="-120"/>
+                <a:latin typeface="Hiragino Sans" pitchFamily="34" charset="0"/>
+                <a:ea typeface="Hiragino Sans" pitchFamily="34" charset="-122"/>
+                <a:cs typeface="Hiragino Sans" pitchFamily="34" charset="-120"/>
               </a:rPr>
               <a:t>進 review 佇列</a:t>
             </a:r>
@@ -12712,9 +12690,9 @@
                 <a:solidFill>
                   <a:srgbClr val="2A9D8F"/>
                 </a:solidFill>
-                <a:latin typeface="Microsoft JhengHei" pitchFamily="34" charset="0"/>
-                <a:ea typeface="Microsoft JhengHei" pitchFamily="34" charset="-122"/>
-                <a:cs typeface="Microsoft JhengHei" pitchFamily="34" charset="-120"/>
+                <a:latin typeface="Hiragino Sans" pitchFamily="34" charset="0"/>
+                <a:ea typeface="Hiragino Sans" pitchFamily="34" charset="-122"/>
+                <a:cs typeface="Hiragino Sans" pitchFamily="34" charset="-120"/>
               </a:rPr>
               <a:t>系統動作</a:t>
             </a:r>
@@ -12758,9 +12736,9 @@
                 <a:solidFill>
                   <a:srgbClr val="C7D6E4"/>
                 </a:solidFill>
-                <a:latin typeface="Microsoft JhengHei" pitchFamily="34" charset="0"/>
-                <a:ea typeface="Microsoft JhengHei" pitchFamily="34" charset="-122"/>
-                <a:cs typeface="Microsoft JhengHei" pitchFamily="34" charset="-120"/>
+                <a:latin typeface="Hiragino Sans" pitchFamily="34" charset="0"/>
+                <a:ea typeface="Hiragino Sans" pitchFamily="34" charset="-122"/>
+                <a:cs typeface="Hiragino Sans" pitchFamily="34" charset="-120"/>
               </a:rPr>
               <a:t>Bedrock 產證據簡報</a:t>
             </a:r>
@@ -12782,9 +12760,9 @@
                 <a:solidFill>
                   <a:srgbClr val="C7D6E4"/>
                 </a:solidFill>
-                <a:latin typeface="Microsoft JhengHei" pitchFamily="34" charset="0"/>
-                <a:ea typeface="Microsoft JhengHei" pitchFamily="34" charset="-122"/>
-                <a:cs typeface="Microsoft JhengHei" pitchFamily="34" charset="-120"/>
+                <a:latin typeface="Hiragino Sans" pitchFamily="34" charset="0"/>
+                <a:ea typeface="Hiragino Sans" pitchFamily="34" charset="-122"/>
+                <a:cs typeface="Hiragino Sans" pitchFamily="34" charset="-120"/>
               </a:rPr>
               <a:t>看板黃燈、reviewPriority 排序</a:t>
             </a:r>
@@ -12843,9 +12821,9 @@
                 <a:solidFill>
                   <a:srgbClr val="5A6B7B"/>
                 </a:solidFill>
-                <a:latin typeface="Microsoft JhengHei" pitchFamily="34" charset="0"/>
-                <a:ea typeface="Microsoft JhengHei" pitchFamily="34" charset="-122"/>
-                <a:cs typeface="Microsoft JhengHei" pitchFamily="34" charset="-120"/>
+                <a:latin typeface="Hiragino Sans" pitchFamily="34" charset="0"/>
+                <a:ea typeface="Hiragino Sans" pitchFamily="34" charset="-122"/>
+                <a:cs typeface="Hiragino Sans" pitchFamily="34" charset="-120"/>
               </a:rPr>
               <a:t>例　</a:t>
             </a:r>
@@ -12857,9 +12835,9 @@
                 <a:solidFill>
                   <a:srgbClr val="0A2540"/>
                 </a:solidFill>
-                <a:latin typeface="Microsoft JhengHei" pitchFamily="34" charset="0"/>
-                <a:ea typeface="Microsoft JhengHei" pitchFamily="34" charset="-122"/>
-                <a:cs typeface="Microsoft JhengHei" pitchFamily="34" charset="-120"/>
+                <a:latin typeface="Hiragino Sans" pitchFamily="34" charset="0"/>
+                <a:ea typeface="Hiragino Sans" pitchFamily="34" charset="-122"/>
+                <a:cs typeface="Hiragino Sans" pitchFamily="34" charset="-120"/>
               </a:rPr>
               <a:t>S23 · 8.9%</a:t>
             </a:r>
@@ -12998,9 +12976,9 @@
                 <a:solidFill>
                   <a:srgbClr val="FFFFFF"/>
                 </a:solidFill>
-                <a:latin typeface="Microsoft JhengHei" pitchFamily="34" charset="0"/>
-                <a:ea typeface="Microsoft JhengHei" pitchFamily="34" charset="-122"/>
-                <a:cs typeface="Microsoft JhengHei" pitchFamily="34" charset="-120"/>
+                <a:latin typeface="Hiragino Sans" pitchFamily="34" charset="0"/>
+                <a:ea typeface="Hiragino Sans" pitchFamily="34" charset="-122"/>
+                <a:cs typeface="Hiragino Sans" pitchFamily="34" charset="-120"/>
               </a:rPr>
               <a:t>03　</a:t>
             </a:r>
@@ -13012,9 +12990,9 @@
                 <a:solidFill>
                   <a:srgbClr val="FFFFFF"/>
                 </a:solidFill>
-                <a:latin typeface="Microsoft JhengHei" pitchFamily="34" charset="0"/>
-                <a:ea typeface="Microsoft JhengHei" pitchFamily="34" charset="-122"/>
-                <a:cs typeface="Microsoft JhengHei" pitchFamily="34" charset="-120"/>
+                <a:latin typeface="Hiragino Sans" pitchFamily="34" charset="0"/>
+                <a:ea typeface="Hiragino Sans" pitchFamily="34" charset="-122"/>
+                <a:cs typeface="Hiragino Sans" pitchFamily="34" charset="-120"/>
               </a:rPr>
               <a:t>行動</a:t>
             </a:r>
@@ -13051,9 +13029,9 @@
                 <a:solidFill>
                   <a:srgbClr val="2A9D8F"/>
                 </a:solidFill>
-                <a:latin typeface="Microsoft JhengHei" pitchFamily="34" charset="0"/>
-                <a:ea typeface="Microsoft JhengHei" pitchFamily="34" charset="-122"/>
-                <a:cs typeface="Microsoft JhengHei" pitchFamily="34" charset="-120"/>
+                <a:latin typeface="Hiragino Sans" pitchFamily="34" charset="0"/>
+                <a:ea typeface="Hiragino Sans" pitchFamily="34" charset="-122"/>
+                <a:cs typeface="Hiragino Sans" pitchFamily="34" charset="-120"/>
               </a:rPr>
               <a:t>條件</a:t>
             </a:r>
@@ -13093,9 +13071,9 @@
                 <a:solidFill>
                   <a:srgbClr val="FFFFFF"/>
                 </a:solidFill>
-                <a:latin typeface="Microsoft JhengHei" pitchFamily="34" charset="0"/>
-                <a:ea typeface="Microsoft JhengHei" pitchFamily="34" charset="-122"/>
-                <a:cs typeface="Microsoft JhengHei" pitchFamily="34" charset="-120"/>
+                <a:latin typeface="Hiragino Sans" pitchFamily="34" charset="0"/>
+                <a:ea typeface="Hiragino Sans" pitchFamily="34" charset="-122"/>
+                <a:cs typeface="Hiragino Sans" pitchFamily="34" charset="-120"/>
               </a:rPr>
               <a:t>持續跨越 + 高信心</a:t>
             </a:r>
@@ -13113,9 +13091,9 @@
                 <a:solidFill>
                   <a:srgbClr val="FFFFFF"/>
                 </a:solidFill>
-                <a:latin typeface="Microsoft JhengHei" pitchFamily="34" charset="0"/>
-                <a:ea typeface="Microsoft JhengHei" pitchFamily="34" charset="-122"/>
-                <a:cs typeface="Microsoft JhengHei" pitchFamily="34" charset="-120"/>
+                <a:latin typeface="Hiragino Sans" pitchFamily="34" charset="0"/>
+                <a:ea typeface="Hiragino Sans" pitchFamily="34" charset="-122"/>
+                <a:cs typeface="Hiragino Sans" pitchFamily="34" charset="-120"/>
               </a:rPr>
               <a:t>觸發告警扇出</a:t>
             </a:r>
@@ -13152,9 +13130,9 @@
                 <a:solidFill>
                   <a:srgbClr val="2A9D8F"/>
                 </a:solidFill>
-                <a:latin typeface="Microsoft JhengHei" pitchFamily="34" charset="0"/>
-                <a:ea typeface="Microsoft JhengHei" pitchFamily="34" charset="-122"/>
-                <a:cs typeface="Microsoft JhengHei" pitchFamily="34" charset="-120"/>
+                <a:latin typeface="Hiragino Sans" pitchFamily="34" charset="0"/>
+                <a:ea typeface="Hiragino Sans" pitchFamily="34" charset="-122"/>
+                <a:cs typeface="Hiragino Sans" pitchFamily="34" charset="-120"/>
               </a:rPr>
               <a:t>系統動作</a:t>
             </a:r>
@@ -13198,9 +13176,9 @@
                 <a:solidFill>
                   <a:srgbClr val="C7D6E4"/>
                 </a:solidFill>
-                <a:latin typeface="Microsoft JhengHei" pitchFamily="34" charset="0"/>
-                <a:ea typeface="Microsoft JhengHei" pitchFamily="34" charset="-122"/>
-                <a:cs typeface="Microsoft JhengHei" pitchFamily="34" charset="-120"/>
+                <a:latin typeface="Hiragino Sans" pitchFamily="34" charset="0"/>
+                <a:ea typeface="Hiragino Sans" pitchFamily="34" charset="-122"/>
+                <a:cs typeface="Hiragino Sans" pitchFamily="34" charset="-120"/>
               </a:rPr>
               <a:t>/alerts/notify → SNS 告警</a:t>
             </a:r>
@@ -13222,9 +13200,9 @@
                 <a:solidFill>
                   <a:srgbClr val="C7D6E4"/>
                 </a:solidFill>
-                <a:latin typeface="Microsoft JhengHei" pitchFamily="34" charset="0"/>
-                <a:ea typeface="Microsoft JhengHei" pitchFamily="34" charset="-122"/>
-                <a:cs typeface="Microsoft JhengHei" pitchFamily="34" charset="-120"/>
+                <a:latin typeface="Hiragino Sans" pitchFamily="34" charset="0"/>
+                <a:ea typeface="Hiragino Sans" pitchFamily="34" charset="-122"/>
+                <a:cs typeface="Hiragino Sans" pitchFamily="34" charset="-120"/>
               </a:rPr>
               <a:t>人安排水下檢查 / 清洗 / 打磨</a:t>
             </a:r>
@@ -13283,9 +13261,9 @@
                 <a:solidFill>
                   <a:srgbClr val="5A6B7B"/>
                 </a:solidFill>
-                <a:latin typeface="Microsoft JhengHei" pitchFamily="34" charset="0"/>
-                <a:ea typeface="Microsoft JhengHei" pitchFamily="34" charset="-122"/>
-                <a:cs typeface="Microsoft JhengHei" pitchFamily="34" charset="-120"/>
+                <a:latin typeface="Hiragino Sans" pitchFamily="34" charset="0"/>
+                <a:ea typeface="Hiragino Sans" pitchFamily="34" charset="-122"/>
+                <a:cs typeface="Hiragino Sans" pitchFamily="34" charset="-120"/>
               </a:rPr>
               <a:t>例　</a:t>
             </a:r>
@@ -13297,9 +13275,9 @@
                 <a:solidFill>
                   <a:srgbClr val="0A2540"/>
                 </a:solidFill>
-                <a:latin typeface="Microsoft JhengHei" pitchFamily="34" charset="0"/>
-                <a:ea typeface="Microsoft JhengHei" pitchFamily="34" charset="-122"/>
-                <a:cs typeface="Microsoft JhengHei" pitchFamily="34" charset="-120"/>
+                <a:latin typeface="Hiragino Sans" pitchFamily="34" charset="0"/>
+                <a:ea typeface="Hiragino Sans" pitchFamily="34" charset="-122"/>
+                <a:cs typeface="Hiragino Sans" pitchFamily="34" charset="-120"/>
               </a:rPr>
               <a:t>S11 · 21.8%</a:t>
             </a:r>
@@ -13336,9 +13314,9 @@
                 <a:solidFill>
                   <a:srgbClr val="C7D6E4"/>
                 </a:solidFill>
-                <a:latin typeface="Microsoft JhengHei" pitchFamily="34" charset="0"/>
-                <a:ea typeface="Microsoft JhengHei" pitchFamily="34" charset="-122"/>
-                <a:cs typeface="Microsoft JhengHei" pitchFamily="34" charset="-120"/>
+                <a:latin typeface="Hiragino Sans" pitchFamily="34" charset="0"/>
+                <a:ea typeface="Hiragino Sans" pitchFamily="34" charset="-122"/>
+                <a:cs typeface="Hiragino Sans" pitchFamily="34" charset="-120"/>
               </a:rPr>
               <a:t>常態監測中</a:t>
             </a:r>
@@ -13375,9 +13353,9 @@
                 <a:solidFill>
                   <a:srgbClr val="C7D6E4"/>
                 </a:solidFill>
-                <a:latin typeface="Microsoft JhengHei" pitchFamily="34" charset="0"/>
-                <a:ea typeface="Microsoft JhengHei" pitchFamily="34" charset="-122"/>
-                <a:cs typeface="Microsoft JhengHei" pitchFamily="34" charset="-120"/>
+                <a:latin typeface="Hiragino Sans" pitchFamily="34" charset="0"/>
+                <a:ea typeface="Hiragino Sans" pitchFamily="34" charset="-122"/>
+                <a:cs typeface="Hiragino Sans" pitchFamily="34" charset="-120"/>
               </a:rPr>
               <a:t>n=506 · HIGH · priority 2</a:t>
             </a:r>
@@ -13414,9 +13392,9 @@
                 <a:solidFill>
                   <a:srgbClr val="C7D6E4"/>
                 </a:solidFill>
-                <a:latin typeface="Microsoft JhengHei" pitchFamily="34" charset="0"/>
-                <a:ea typeface="Microsoft JhengHei" pitchFamily="34" charset="-122"/>
-                <a:cs typeface="Microsoft JhengHei" pitchFamily="34" charset="-120"/>
+                <a:latin typeface="Hiragino Sans" pitchFamily="34" charset="0"/>
+                <a:ea typeface="Hiragino Sans" pitchFamily="34" charset="-122"/>
+                <a:cs typeface="Hiragino Sans" pitchFamily="34" charset="-120"/>
               </a:rPr>
               <a:t>539 有效日 · 691 天未清 · priority 1</a:t>
             </a:r>
@@ -13485,9 +13463,9 @@
                 <a:solidFill>
                   <a:srgbClr val="F4A72B"/>
                 </a:solidFill>
-                <a:latin typeface="Microsoft JhengHei" pitchFamily="34" charset="0"/>
-                <a:ea typeface="Microsoft JhengHei" pitchFamily="34" charset="-122"/>
-                <a:cs typeface="Microsoft JhengHei" pitchFamily="34" charset="-120"/>
+                <a:latin typeface="Hiragino Sans" pitchFamily="34" charset="0"/>
+                <a:ea typeface="Hiragino Sans" pitchFamily="34" charset="-122"/>
+                <a:cs typeface="Hiragino Sans" pitchFamily="34" charset="-120"/>
               </a:rPr>
               <a:t>◆ 人在迴路　</a:t>
             </a:r>
@@ -13502,9 +13480,9 @@
                 <a:solidFill>
                   <a:srgbClr val="FFFFFF"/>
                 </a:solidFill>
-                <a:latin typeface="Microsoft JhengHei" pitchFamily="34" charset="0"/>
-                <a:ea typeface="Microsoft JhengHei" pitchFamily="34" charset="-122"/>
-                <a:cs typeface="Microsoft JhengHei" pitchFamily="34" charset="-120"/>
+                <a:latin typeface="Hiragino Sans" pitchFamily="34" charset="0"/>
+                <a:ea typeface="Hiragino Sans" pitchFamily="34" charset="-122"/>
+                <a:cs typeface="Hiragino Sans" pitchFamily="34" charset="-120"/>
               </a:rPr>
               <a:t>門檻可調（/config/threshold）、扇出通道可換（SNS → SES / Slack）。系統只做「更快、可解釋、可行動」的證據，清不清、何時清由海事專家拍板。</a:t>
             </a:r>
@@ -13726,9 +13704,9 @@
                 <a:solidFill>
                   <a:srgbClr val="FFFFFF"/>
                 </a:solidFill>
-                <a:latin typeface="Microsoft JhengHei" pitchFamily="34" charset="0"/>
-                <a:ea typeface="Microsoft JhengHei" pitchFamily="34" charset="-122"/>
-                <a:cs typeface="Microsoft JhengHei" pitchFamily="34" charset="-120"/>
+                <a:latin typeface="Hiragino Sans" pitchFamily="34" charset="0"/>
+                <a:ea typeface="Hiragino Sans" pitchFamily="34" charset="-122"/>
+                <a:cs typeface="Hiragino Sans" pitchFamily="34" charset="-120"/>
               </a:rPr>
               <a:t>14</a:t>
             </a:r>
@@ -13740,9 +13718,9 @@
                 <a:solidFill>
                   <a:srgbClr val="8FA8BD"/>
                 </a:solidFill>
-                <a:latin typeface="Microsoft JhengHei" pitchFamily="34" charset="0"/>
-                <a:ea typeface="Microsoft JhengHei" pitchFamily="34" charset="-122"/>
-                <a:cs typeface="Microsoft JhengHei" pitchFamily="34" charset="-120"/>
+                <a:latin typeface="Hiragino Sans" pitchFamily="34" charset="0"/>
+                <a:ea typeface="Hiragino Sans" pitchFamily="34" charset="-122"/>
+                <a:cs typeface="Hiragino Sans" pitchFamily="34" charset="-120"/>
               </a:rPr>
               <a:t>  /  15</a:t>
             </a:r>
@@ -13843,9 +13821,9 @@
                 <a:solidFill>
                   <a:srgbClr val="F4A72B"/>
                 </a:solidFill>
-                <a:latin typeface="Microsoft JhengHei" pitchFamily="34" charset="0"/>
-                <a:ea typeface="Microsoft JhengHei" pitchFamily="34" charset="-122"/>
-                <a:cs typeface="Microsoft JhengHei" pitchFamily="34" charset="-120"/>
+                <a:latin typeface="Hiragino Sans" pitchFamily="34" charset="0"/>
+                <a:ea typeface="Hiragino Sans" pitchFamily="34" charset="-122"/>
+                <a:cs typeface="Hiragino Sans" pitchFamily="34" charset="-120"/>
               </a:rPr>
               <a:t>LIVE DEMO</a:t>
             </a:r>
@@ -13882,9 +13860,9 @@
                 <a:solidFill>
                   <a:srgbClr val="FFFFFF"/>
                 </a:solidFill>
-                <a:latin typeface="Microsoft JhengHei" pitchFamily="34" charset="0"/>
-                <a:ea typeface="Microsoft JhengHei" pitchFamily="34" charset="-122"/>
-                <a:cs typeface="Microsoft JhengHei" pitchFamily="34" charset="-120"/>
+                <a:latin typeface="Hiragino Sans" pitchFamily="34" charset="0"/>
+                <a:ea typeface="Hiragino Sans" pitchFamily="34" charset="-122"/>
+                <a:cs typeface="Hiragino Sans" pitchFamily="34" charset="-120"/>
               </a:rPr>
               <a:t>現場導覽：一個穩定 URL，三個入口</a:t>
             </a:r>
@@ -13948,9 +13926,9 @@
                 <a:solidFill>
                   <a:srgbClr val="C7D6E4"/>
                 </a:solidFill>
-                <a:latin typeface="Microsoft JhengHei" pitchFamily="34" charset="0"/>
-                <a:ea typeface="Microsoft JhengHei" pitchFamily="34" charset="-122"/>
-                <a:cs typeface="Microsoft JhengHei" pitchFamily="34" charset="-120"/>
+                <a:latin typeface="Hiragino Sans" pitchFamily="34" charset="0"/>
+                <a:ea typeface="Hiragino Sans" pitchFamily="34" charset="-122"/>
+                <a:cs typeface="Hiragino Sans" pitchFamily="34" charset="-120"/>
               </a:rPr>
               <a:t>同一顆 Fargate 容器、同一個 ALB 靜態網域，task 重啟不換位址 — 三個頁面現場可直接打開。</a:t>
             </a:r>
@@ -14048,9 +14026,9 @@
                 <a:solidFill>
                   <a:srgbClr val="FFFFFF"/>
                 </a:solidFill>
-                <a:latin typeface="Microsoft JhengHei" pitchFamily="34" charset="0"/>
-                <a:ea typeface="Microsoft JhengHei" pitchFamily="34" charset="-122"/>
-                <a:cs typeface="Microsoft JhengHei" pitchFamily="34" charset="-120"/>
+                <a:latin typeface="Hiragino Sans" pitchFamily="34" charset="0"/>
+                <a:ea typeface="Hiragino Sans" pitchFamily="34" charset="-122"/>
+                <a:cs typeface="Hiragino Sans" pitchFamily="34" charset="-120"/>
               </a:rPr>
               <a:t>1</a:t>
             </a:r>
@@ -14087,9 +14065,9 @@
                 <a:solidFill>
                   <a:srgbClr val="FFFFFF"/>
                 </a:solidFill>
-                <a:latin typeface="Microsoft JhengHei" pitchFamily="34" charset="0"/>
-                <a:ea typeface="Microsoft JhengHei" pitchFamily="34" charset="-122"/>
-                <a:cs typeface="Microsoft JhengHei" pitchFamily="34" charset="-120"/>
+                <a:latin typeface="Hiragino Sans" pitchFamily="34" charset="0"/>
+                <a:ea typeface="Hiragino Sans" pitchFamily="34" charset="-122"/>
+                <a:cs typeface="Hiragino Sans" pitchFamily="34" charset="-120"/>
               </a:rPr>
               <a:t>產品首頁</a:t>
             </a:r>
@@ -14148,9 +14126,9 @@
                 <a:solidFill>
                   <a:srgbClr val="F4A72B"/>
                 </a:solidFill>
-                <a:latin typeface="Microsoft JhengHei" pitchFamily="34" charset="0"/>
-                <a:ea typeface="Microsoft JhengHei" pitchFamily="34" charset="-122"/>
-                <a:cs typeface="Microsoft JhengHei" pitchFamily="34" charset="-120"/>
+                <a:latin typeface="Hiragino Sans" pitchFamily="34" charset="0"/>
+                <a:ea typeface="Hiragino Sans" pitchFamily="34" charset="-122"/>
+                <a:cs typeface="Hiragino Sans" pitchFamily="34" charset="-120"/>
               </a:rPr>
               <a:t>/</a:t>
             </a:r>
@@ -14190,9 +14168,9 @@
                 <a:solidFill>
                   <a:srgbClr val="C7D6E4"/>
                 </a:solidFill>
-                <a:latin typeface="Microsoft JhengHei" pitchFamily="34" charset="0"/>
-                <a:ea typeface="Microsoft JhengHei" pitchFamily="34" charset="-122"/>
-                <a:cs typeface="Microsoft JhengHei" pitchFamily="34" charset="-120"/>
+                <a:latin typeface="Hiragino Sans" pitchFamily="34" charset="0"/>
+                <a:ea typeface="Hiragino Sans" pitchFamily="34" charset="-122"/>
+                <a:cs typeface="Hiragino Sans" pitchFamily="34" charset="-120"/>
               </a:rPr>
               <a:t>命題、方法（ISO 19030 · k=FOC/STW³）與價值主張概覽</a:t>
             </a:r>
@@ -14290,9 +14268,9 @@
                 <a:solidFill>
                   <a:srgbClr val="FFFFFF"/>
                 </a:solidFill>
-                <a:latin typeface="Microsoft JhengHei" pitchFamily="34" charset="0"/>
-                <a:ea typeface="Microsoft JhengHei" pitchFamily="34" charset="-122"/>
-                <a:cs typeface="Microsoft JhengHei" pitchFamily="34" charset="-120"/>
+                <a:latin typeface="Hiragino Sans" pitchFamily="34" charset="0"/>
+                <a:ea typeface="Hiragino Sans" pitchFamily="34" charset="-122"/>
+                <a:cs typeface="Hiragino Sans" pitchFamily="34" charset="-120"/>
               </a:rPr>
               <a:t>2</a:t>
             </a:r>
@@ -14329,9 +14307,9 @@
                 <a:solidFill>
                   <a:srgbClr val="FFFFFF"/>
                 </a:solidFill>
-                <a:latin typeface="Microsoft JhengHei" pitchFamily="34" charset="0"/>
-                <a:ea typeface="Microsoft JhengHei" pitchFamily="34" charset="-122"/>
-                <a:cs typeface="Microsoft JhengHei" pitchFamily="34" charset="-120"/>
+                <a:latin typeface="Hiragino Sans" pitchFamily="34" charset="0"/>
+                <a:ea typeface="Hiragino Sans" pitchFamily="34" charset="-122"/>
+                <a:cs typeface="Hiragino Sans" pitchFamily="34" charset="-120"/>
               </a:rPr>
               <a:t>決策看板</a:t>
             </a:r>
@@ -14390,9 +14368,9 @@
                 <a:solidFill>
                   <a:srgbClr val="F4A72B"/>
                 </a:solidFill>
-                <a:latin typeface="Microsoft JhengHei" pitchFamily="34" charset="0"/>
-                <a:ea typeface="Microsoft JhengHei" pitchFamily="34" charset="-122"/>
-                <a:cs typeface="Microsoft JhengHei" pitchFamily="34" charset="-120"/>
+                <a:latin typeface="Hiragino Sans" pitchFamily="34" charset="0"/>
+                <a:ea typeface="Hiragino Sans" pitchFamily="34" charset="-122"/>
+                <a:cs typeface="Hiragino Sans" pitchFamily="34" charset="-120"/>
               </a:rPr>
               <a:t>/dashboard.html</a:t>
             </a:r>
@@ -14432,9 +14410,9 @@
                 <a:solidFill>
                   <a:srgbClr val="C7D6E4"/>
                 </a:solidFill>
-                <a:latin typeface="Microsoft JhengHei" pitchFamily="34" charset="0"/>
-                <a:ea typeface="Microsoft JhengHei" pitchFamily="34" charset="-122"/>
-                <a:cs typeface="Microsoft JhengHei" pitchFamily="34" charset="-120"/>
+                <a:latin typeface="Hiragino Sans" pitchFamily="34" charset="0"/>
+                <a:ea typeface="Hiragino Sans" pitchFamily="34" charset="-122"/>
+                <a:cs typeface="Hiragino Sans" pitchFamily="34" charset="-120"/>
               </a:rPr>
               <a:t>15 艘 Speed Loss 排序、證據序列、AI 簡報與可調門檻</a:t>
             </a:r>
@@ -14532,9 +14510,9 @@
                 <a:solidFill>
                   <a:srgbClr val="FFFFFF"/>
                 </a:solidFill>
-                <a:latin typeface="Microsoft JhengHei" pitchFamily="34" charset="0"/>
-                <a:ea typeface="Microsoft JhengHei" pitchFamily="34" charset="-122"/>
-                <a:cs typeface="Microsoft JhengHei" pitchFamily="34" charset="-120"/>
+                <a:latin typeface="Hiragino Sans" pitchFamily="34" charset="0"/>
+                <a:ea typeface="Hiragino Sans" pitchFamily="34" charset="-122"/>
+                <a:cs typeface="Hiragino Sans" pitchFamily="34" charset="-120"/>
               </a:rPr>
               <a:t>3</a:t>
             </a:r>
@@ -14571,9 +14549,9 @@
                 <a:solidFill>
                   <a:srgbClr val="FFFFFF"/>
                 </a:solidFill>
-                <a:latin typeface="Microsoft JhengHei" pitchFamily="34" charset="0"/>
-                <a:ea typeface="Microsoft JhengHei" pitchFamily="34" charset="-122"/>
-                <a:cs typeface="Microsoft JhengHei" pitchFamily="34" charset="-120"/>
+                <a:latin typeface="Hiragino Sans" pitchFamily="34" charset="0"/>
+                <a:ea typeface="Hiragino Sans" pitchFamily="34" charset="-122"/>
+                <a:cs typeface="Hiragino Sans" pitchFamily="34" charset="-120"/>
               </a:rPr>
               <a:t>架構互動圖</a:t>
             </a:r>
@@ -14632,9 +14610,9 @@
                 <a:solidFill>
                   <a:srgbClr val="F4A72B"/>
                 </a:solidFill>
-                <a:latin typeface="Microsoft JhengHei" pitchFamily="34" charset="0"/>
-                <a:ea typeface="Microsoft JhengHei" pitchFamily="34" charset="-122"/>
-                <a:cs typeface="Microsoft JhengHei" pitchFamily="34" charset="-120"/>
+                <a:latin typeface="Hiragino Sans" pitchFamily="34" charset="0"/>
+                <a:ea typeface="Hiragino Sans" pitchFamily="34" charset="-122"/>
+                <a:cs typeface="Hiragino Sans" pitchFamily="34" charset="-120"/>
               </a:rPr>
               <a:t>/architecture.html</a:t>
             </a:r>
@@ -14674,9 +14652,9 @@
                 <a:solidFill>
                   <a:srgbClr val="C7D6E4"/>
                 </a:solidFill>
-                <a:latin typeface="Microsoft JhengHei" pitchFamily="34" charset="0"/>
-                <a:ea typeface="Microsoft JhengHei" pitchFamily="34" charset="-122"/>
-                <a:cs typeface="Microsoft JhengHei" pitchFamily="34" charset="-120"/>
+                <a:latin typeface="Hiragino Sans" pitchFamily="34" charset="0"/>
+                <a:ea typeface="Hiragino Sans" pitchFamily="34" charset="-122"/>
+                <a:cs typeface="Hiragino Sans" pitchFamily="34" charset="-120"/>
               </a:rPr>
               <a:t>本簡報架構的網頁版：服務節點、資料流與方案對照</a:t>
             </a:r>
@@ -14742,9 +14720,9 @@
                 <a:solidFill>
                   <a:srgbClr val="2A9D8F"/>
                 </a:solidFill>
-                <a:latin typeface="Microsoft JhengHei" pitchFamily="34" charset="0"/>
-                <a:ea typeface="Microsoft JhengHei" pitchFamily="34" charset="-122"/>
-                <a:cs typeface="Microsoft JhengHei" pitchFamily="34" charset="-120"/>
+                <a:latin typeface="Hiragino Sans" pitchFamily="34" charset="0"/>
+                <a:ea typeface="Hiragino Sans" pitchFamily="34" charset="-122"/>
+                <a:cs typeface="Hiragino Sans" pitchFamily="34" charset="-120"/>
               </a:rPr>
               <a:t>Base　</a:t>
             </a:r>
@@ -14756,9 +14734,9 @@
                 <a:solidFill>
                   <a:srgbClr val="FFFFFF"/>
                 </a:solidFill>
-                <a:latin typeface="Microsoft JhengHei" pitchFamily="34" charset="0"/>
-                <a:ea typeface="Microsoft JhengHei" pitchFamily="34" charset="-122"/>
-                <a:cs typeface="Microsoft JhengHei" pitchFamily="34" charset="-120"/>
+                <a:latin typeface="Hiragino Sans" pitchFamily="34" charset="0"/>
+                <a:ea typeface="Hiragino Sans" pitchFamily="34" charset="-122"/>
+                <a:cs typeface="Hiragino Sans" pitchFamily="34" charset="-120"/>
               </a:rPr>
               <a:t>http://fleetmind-alb-330672315.us-east-1.elb.amazonaws.com</a:t>
             </a:r>
@@ -14795,9 +14773,9 @@
                 <a:solidFill>
                   <a:srgbClr val="C7D6E4"/>
                 </a:solidFill>
-                <a:latin typeface="Microsoft JhengHei" pitchFamily="34" charset="0"/>
-                <a:ea typeface="Microsoft JhengHei" pitchFamily="34" charset="-122"/>
-                <a:cs typeface="Microsoft JhengHei" pitchFamily="34" charset="-120"/>
+                <a:latin typeface="Hiragino Sans" pitchFamily="34" charset="0"/>
+                <a:ea typeface="Hiragino Sans" pitchFamily="34" charset="-122"/>
+                <a:cs typeface="Hiragino Sans" pitchFamily="34" charset="-120"/>
               </a:rPr>
               <a:t>帳號 516665228894 · us-east-1 · ECS Fargate (ARM64) 常駐 · ALB 靜態 URL 不換位址</a:t>
             </a:r>
@@ -14890,8 +14868,8 @@
         </p:nvSpPr>
         <p:spPr>
           <a:xfrm>
-            <a:off x="0" y="0"/>
-            <a:ext cx="12191695" cy="1280160"/>
+            <a:off x="0" y="5303520"/>
+            <a:ext cx="12191695" cy="1554480"/>
           </a:xfrm>
           <a:prstGeom prst="rect">
             <a:avLst/>
@@ -14907,28 +14885,6 @@
       <p:sp>
         <p:nvSpPr>
           <p:cNvPr id="5" name="Shape 2"/>
-          <p:cNvSpPr/>
-          <p:nvPr/>
-        </p:nvSpPr>
-        <p:spPr>
-          <a:xfrm>
-            <a:off x="0" y="5303520"/>
-            <a:ext cx="12191695" cy="1554480"/>
-          </a:xfrm>
-          <a:prstGeom prst="rect">
-            <a:avLst/>
-          </a:prstGeom>
-          <a:solidFill>
-            <a:srgbClr val="0A2540">
-              <a:alpha val="86000"/>
-            </a:srgbClr>
-          </a:solidFill>
-          <a:ln/>
-        </p:spPr>
-      </p:sp>
-      <p:sp>
-        <p:nvSpPr>
-          <p:cNvPr id="6" name="Shape 3"/>
           <p:cNvSpPr/>
           <p:nvPr/>
         </p:nvSpPr>
@@ -14950,7 +14906,7 @@
       </p:sp>
       <p:sp>
         <p:nvSpPr>
-          <p:cNvPr id="7" name="Shape 4"/>
+          <p:cNvPr id="6" name="Shape 3"/>
           <p:cNvSpPr/>
           <p:nvPr/>
         </p:nvSpPr>
@@ -14972,7 +14928,7 @@
       </p:sp>
       <p:sp>
         <p:nvSpPr>
-          <p:cNvPr id="8" name="Shape 5"/>
+          <p:cNvPr id="7" name="Shape 4"/>
           <p:cNvSpPr/>
           <p:nvPr/>
         </p:nvSpPr>
@@ -14992,7 +14948,7 @@
       </p:sp>
       <p:sp>
         <p:nvSpPr>
-          <p:cNvPr id="9" name="Shape 6"/>
+          <p:cNvPr id="8" name="Shape 5"/>
           <p:cNvSpPr/>
           <p:nvPr/>
         </p:nvSpPr>
@@ -15014,7 +14970,7 @@
       </p:sp>
       <p:sp>
         <p:nvSpPr>
-          <p:cNvPr id="10" name="Shape 7"/>
+          <p:cNvPr id="9" name="Shape 6"/>
           <p:cNvSpPr/>
           <p:nvPr/>
         </p:nvSpPr>
@@ -15036,7 +14992,7 @@
       </p:sp>
       <p:sp>
         <p:nvSpPr>
-          <p:cNvPr id="11" name="Shape 8"/>
+          <p:cNvPr id="10" name="Shape 7"/>
           <p:cNvSpPr/>
           <p:nvPr/>
         </p:nvSpPr>
@@ -15056,7 +15012,7 @@
       </p:sp>
       <p:sp>
         <p:nvSpPr>
-          <p:cNvPr id="12" name="Shape 9"/>
+          <p:cNvPr id="11" name="Shape 8"/>
           <p:cNvSpPr/>
           <p:nvPr/>
         </p:nvSpPr>
@@ -15087,7 +15043,7 @@
       </p:sp>
       <p:sp>
         <p:nvSpPr>
-          <p:cNvPr id="13" name="Text 10"/>
+          <p:cNvPr id="12" name="Text 9"/>
           <p:cNvSpPr/>
           <p:nvPr/>
         </p:nvSpPr>
@@ -15114,9 +15070,9 @@
                 <a:solidFill>
                   <a:srgbClr val="2A9D8F"/>
                 </a:solidFill>
-                <a:latin typeface="Microsoft JhengHei" pitchFamily="34" charset="0"/>
-                <a:ea typeface="Microsoft JhengHei" pitchFamily="34" charset="-122"/>
-                <a:cs typeface="Microsoft JhengHei" pitchFamily="34" charset="-120"/>
+                <a:latin typeface="Hiragino Sans" pitchFamily="34" charset="0"/>
+                <a:ea typeface="Hiragino Sans" pitchFamily="34" charset="-122"/>
+                <a:cs typeface="Hiragino Sans" pitchFamily="34" charset="-120"/>
               </a:rPr>
               <a:t>一個命題，五種上雲路徑</a:t>
             </a:r>
@@ -15126,7 +15082,7 @@
       </p:sp>
       <p:sp>
         <p:nvSpPr>
-          <p:cNvPr id="14" name="Text 11"/>
+          <p:cNvPr id="13" name="Text 10"/>
           <p:cNvSpPr/>
           <p:nvPr/>
         </p:nvSpPr>
@@ -15156,9 +15112,9 @@
                 <a:solidFill>
                   <a:srgbClr val="FFFFFF"/>
                 </a:solidFill>
-                <a:latin typeface="Microsoft JhengHei" pitchFamily="34" charset="0"/>
-                <a:ea typeface="Microsoft JhengHei" pitchFamily="34" charset="-122"/>
-                <a:cs typeface="Microsoft JhengHei" pitchFamily="34" charset="-120"/>
+                <a:latin typeface="Hiragino Sans" pitchFamily="34" charset="0"/>
+                <a:ea typeface="Hiragino Sans" pitchFamily="34" charset="-122"/>
+                <a:cs typeface="Hiragino Sans" pitchFamily="34" charset="-120"/>
               </a:rPr>
               <a:t>穩穩 demo，</a:t>
             </a:r>
@@ -15176,9 +15132,9 @@
                 <a:solidFill>
                   <a:srgbClr val="FFFFFF"/>
                 </a:solidFill>
-                <a:latin typeface="Microsoft JhengHei" pitchFamily="34" charset="0"/>
-                <a:ea typeface="Microsoft JhengHei" pitchFamily="34" charset="-122"/>
-                <a:cs typeface="Microsoft JhengHei" pitchFamily="34" charset="-120"/>
+                <a:latin typeface="Hiragino Sans" pitchFamily="34" charset="0"/>
+                <a:ea typeface="Hiragino Sans" pitchFamily="34" charset="-122"/>
+                <a:cs typeface="Hiragino Sans" pitchFamily="34" charset="-120"/>
               </a:rPr>
               <a:t>也留得住未來</a:t>
             </a:r>
@@ -15188,7 +15144,7 @@
       </p:sp>
       <p:sp>
         <p:nvSpPr>
-          <p:cNvPr id="15" name="Text 12"/>
+          <p:cNvPr id="14" name="Text 11"/>
           <p:cNvSpPr/>
           <p:nvPr/>
         </p:nvSpPr>
@@ -15218,9 +15174,9 @@
                 <a:solidFill>
                   <a:srgbClr val="C7D6E4"/>
                 </a:solidFill>
-                <a:latin typeface="Microsoft JhengHei" pitchFamily="34" charset="0"/>
-                <a:ea typeface="Microsoft JhengHei" pitchFamily="34" charset="-122"/>
-                <a:cs typeface="Microsoft JhengHei" pitchFamily="34" charset="-120"/>
+                <a:latin typeface="Hiragino Sans" pitchFamily="34" charset="0"/>
+                <a:ea typeface="Hiragino Sans" pitchFamily="34" charset="-122"/>
+                <a:cs typeface="Hiragino Sans" pitchFamily="34" charset="-120"/>
               </a:rPr>
               <a:t>以已上線的 Fargate + ALB 為基準線穩定出賽，用 EC2 保底、用 Serverless 與資料分析管線描繪從 15 艘到全艦隊的營運藍圖 — 讓數字站得住、決策留給人。</a:t>
             </a:r>
@@ -15230,7 +15186,7 @@
       </p:sp>
       <p:sp>
         <p:nvSpPr>
-          <p:cNvPr id="16" name="Shape 13"/>
+          <p:cNvPr id="15" name="Shape 12"/>
           <p:cNvSpPr/>
           <p:nvPr/>
         </p:nvSpPr>
@@ -15266,7 +15222,7 @@
       </p:sp>
       <p:sp>
         <p:nvSpPr>
-          <p:cNvPr id="17" name="Text 14"/>
+          <p:cNvPr id="16" name="Text 13"/>
           <p:cNvSpPr/>
           <p:nvPr/>
         </p:nvSpPr>
@@ -15293,9 +15249,9 @@
                 <a:solidFill>
                   <a:srgbClr val="F4A72B"/>
                 </a:solidFill>
-                <a:latin typeface="Microsoft JhengHei" pitchFamily="34" charset="0"/>
-                <a:ea typeface="Microsoft JhengHei" pitchFamily="34" charset="-122"/>
-                <a:cs typeface="Microsoft JhengHei" pitchFamily="34" charset="-120"/>
+                <a:latin typeface="Hiragino Sans" pitchFamily="34" charset="0"/>
+                <a:ea typeface="Hiragino Sans" pitchFamily="34" charset="-122"/>
+                <a:cs typeface="Hiragino Sans" pitchFamily="34" charset="-120"/>
               </a:rPr>
               <a:t>Live Demo　</a:t>
             </a:r>
@@ -15307,9 +15263,9 @@
                 <a:solidFill>
                   <a:srgbClr val="FFFFFF"/>
                 </a:solidFill>
-                <a:latin typeface="Microsoft JhengHei" pitchFamily="34" charset="0"/>
-                <a:ea typeface="Microsoft JhengHei" pitchFamily="34" charset="-122"/>
-                <a:cs typeface="Microsoft JhengHei" pitchFamily="34" charset="-120"/>
+                <a:latin typeface="Hiragino Sans" pitchFamily="34" charset="0"/>
+                <a:ea typeface="Hiragino Sans" pitchFamily="34" charset="-122"/>
+                <a:cs typeface="Hiragino Sans" pitchFamily="34" charset="-120"/>
               </a:rPr>
               <a:t>http://fleetmind-alb-330672315.us-east-1.elb.amazonaws.com</a:t>
             </a:r>
@@ -15319,7 +15275,7 @@
       </p:sp>
       <p:sp>
         <p:nvSpPr>
-          <p:cNvPr id="18" name="Text 15"/>
+          <p:cNvPr id="17" name="Text 14"/>
           <p:cNvSpPr/>
           <p:nvPr/>
         </p:nvSpPr>
@@ -15346,9 +15302,9 @@
                 <a:solidFill>
                   <a:srgbClr val="C7D6E4"/>
                 </a:solidFill>
-                <a:latin typeface="Microsoft JhengHei" pitchFamily="34" charset="0"/>
-                <a:ea typeface="Microsoft JhengHei" pitchFamily="34" charset="-122"/>
-                <a:cs typeface="Microsoft JhengHei" pitchFamily="34" charset="-120"/>
+                <a:latin typeface="Hiragino Sans" pitchFamily="34" charset="0"/>
+                <a:ea typeface="Hiragino Sans" pitchFamily="34" charset="-122"/>
+                <a:cs typeface="Hiragino Sans" pitchFamily="34" charset="-120"/>
               </a:rPr>
               <a:t>帳號 516665228894 · us-east-1 · ECS Fargate (ARM64) + ALB + ECR + Bedrock (Claude Haiku) + SNS</a:t>
             </a:r>
@@ -15358,7 +15314,7 @@
       </p:sp>
       <p:sp>
         <p:nvSpPr>
-          <p:cNvPr id="19" name="Text 16"/>
+          <p:cNvPr id="18" name="Text 15"/>
           <p:cNvSpPr/>
           <p:nvPr/>
         </p:nvSpPr>
@@ -15381,13 +15337,13 @@
               <a:buNone/>
             </a:pPr>
             <a:r>
-              <a:rPr lang="en-US" sz="1400" i="1" dirty="0">
+              <a:rPr lang="en-US" sz="1400" dirty="0">
                 <a:solidFill>
                   <a:srgbClr val="2A9D8F"/>
                 </a:solidFill>
-                <a:latin typeface="Microsoft JhengHei" pitchFamily="34" charset="0"/>
-                <a:ea typeface="Microsoft JhengHei" pitchFamily="34" charset="-122"/>
-                <a:cs typeface="Microsoft JhengHei" pitchFamily="34" charset="-120"/>
+                <a:latin typeface="Hiragino Sans" pitchFamily="34" charset="0"/>
+                <a:ea typeface="Hiragino Sans" pitchFamily="34" charset="-122"/>
+                <a:cs typeface="Hiragino Sans" pitchFamily="34" charset="-120"/>
               </a:rPr>
               <a:t>FleetMind　數字來自計算　語言來自 AI　決策留給人</a:t>
             </a:r>
@@ -15609,9 +15565,9 @@
                 <a:solidFill>
                   <a:srgbClr val="FFFFFF"/>
                 </a:solidFill>
-                <a:latin typeface="Microsoft JhengHei" pitchFamily="34" charset="0"/>
-                <a:ea typeface="Microsoft JhengHei" pitchFamily="34" charset="-122"/>
-                <a:cs typeface="Microsoft JhengHei" pitchFamily="34" charset="-120"/>
+                <a:latin typeface="Hiragino Sans" pitchFamily="34" charset="0"/>
+                <a:ea typeface="Hiragino Sans" pitchFamily="34" charset="-122"/>
+                <a:cs typeface="Hiragino Sans" pitchFamily="34" charset="-120"/>
               </a:rPr>
               <a:t>02</a:t>
             </a:r>
@@ -15623,9 +15579,9 @@
                 <a:solidFill>
                   <a:srgbClr val="8FA8BD"/>
                 </a:solidFill>
-                <a:latin typeface="Microsoft JhengHei" pitchFamily="34" charset="0"/>
-                <a:ea typeface="Microsoft JhengHei" pitchFamily="34" charset="-122"/>
-                <a:cs typeface="Microsoft JhengHei" pitchFamily="34" charset="-120"/>
+                <a:latin typeface="Hiragino Sans" pitchFamily="34" charset="0"/>
+                <a:ea typeface="Hiragino Sans" pitchFamily="34" charset="-122"/>
+                <a:cs typeface="Hiragino Sans" pitchFamily="34" charset="-120"/>
               </a:rPr>
               <a:t>  /  15</a:t>
             </a:r>
@@ -15662,9 +15618,9 @@
                 <a:solidFill>
                   <a:srgbClr val="F4A72B"/>
                 </a:solidFill>
-                <a:latin typeface="Microsoft JhengHei" pitchFamily="34" charset="0"/>
-                <a:ea typeface="Microsoft JhengHei" pitchFamily="34" charset="-122"/>
-                <a:cs typeface="Microsoft JhengHei" pitchFamily="34" charset="-120"/>
+                <a:latin typeface="Hiragino Sans" pitchFamily="34" charset="0"/>
+                <a:ea typeface="Hiragino Sans" pitchFamily="34" charset="-122"/>
+                <a:cs typeface="Hiragino Sans" pitchFamily="34" charset="-120"/>
               </a:rPr>
               <a:t>ONE-PAGER</a:t>
             </a:r>
@@ -15701,9 +15657,9 @@
                 <a:solidFill>
                   <a:srgbClr val="FFFFFF"/>
                 </a:solidFill>
-                <a:latin typeface="Microsoft JhengHei" pitchFamily="34" charset="0"/>
-                <a:ea typeface="Microsoft JhengHei" pitchFamily="34" charset="-122"/>
-                <a:cs typeface="Microsoft JhengHei" pitchFamily="34" charset="-120"/>
+                <a:latin typeface="Hiragino Sans" pitchFamily="34" charset="0"/>
+                <a:ea typeface="Hiragino Sans" pitchFamily="34" charset="-122"/>
+                <a:cs typeface="Hiragino Sans" pitchFamily="34" charset="-120"/>
               </a:rPr>
               <a:t>一頁看懂：一個命題、一套現行架構、五種方案</a:t>
             </a:r>
@@ -15779,9 +15735,9 @@
                 <a:solidFill>
                   <a:srgbClr val="F4A72B"/>
                 </a:solidFill>
-                <a:latin typeface="Microsoft JhengHei" pitchFamily="34" charset="0"/>
-                <a:ea typeface="Microsoft JhengHei" pitchFamily="34" charset="-122"/>
-                <a:cs typeface="Microsoft JhengHei" pitchFamily="34" charset="-120"/>
+                <a:latin typeface="Hiragino Sans" pitchFamily="34" charset="0"/>
+                <a:ea typeface="Hiragino Sans" pitchFamily="34" charset="-122"/>
+                <a:cs typeface="Hiragino Sans" pitchFamily="34" charset="-120"/>
               </a:rPr>
               <a:t>命題　</a:t>
             </a:r>
@@ -15796,9 +15752,9 @@
                 <a:solidFill>
                   <a:srgbClr val="FFFFFF"/>
                 </a:solidFill>
-                <a:latin typeface="Microsoft JhengHei" pitchFamily="34" charset="0"/>
-                <a:ea typeface="Microsoft JhengHei" pitchFamily="34" charset="-122"/>
-                <a:cs typeface="Microsoft JhengHei" pitchFamily="34" charset="-120"/>
+                <a:latin typeface="Hiragino Sans" pitchFamily="34" charset="0"/>
+                <a:ea typeface="Hiragino Sans" pitchFamily="34" charset="-122"/>
+                <a:cs typeface="Hiragino Sans" pitchFamily="34" charset="-120"/>
               </a:rPr>
               <a:t>15 艘同型船、5 年正午報表，依 ISO 19030 以 k=FOC/STW³ 偵測船體污損 Speed Loss，把「何時清、值不值、省多少」變成可計算、可解釋、人可拍板的決策支援。</a:t>
             </a:r>
@@ -15835,9 +15791,9 @@
                 <a:solidFill>
                   <a:srgbClr val="2A9D8F"/>
                 </a:solidFill>
-                <a:latin typeface="Microsoft JhengHei" pitchFamily="34" charset="0"/>
-                <a:ea typeface="Microsoft JhengHei" pitchFamily="34" charset="-122"/>
-                <a:cs typeface="Microsoft JhengHei" pitchFamily="34" charset="-120"/>
+                <a:latin typeface="Hiragino Sans" pitchFamily="34" charset="0"/>
+                <a:ea typeface="Hiragino Sans" pitchFamily="34" charset="-122"/>
+                <a:cs typeface="Hiragino Sans" pitchFamily="34" charset="-120"/>
               </a:rPr>
               <a:t>現行架構（已部署）</a:t>
             </a:r>
@@ -15935,9 +15891,9 @@
                 <a:solidFill>
                   <a:srgbClr val="FFFFFF"/>
                 </a:solidFill>
-                <a:latin typeface="Microsoft JhengHei" pitchFamily="34" charset="0"/>
-                <a:ea typeface="Microsoft JhengHei" pitchFamily="34" charset="-122"/>
-                <a:cs typeface="Microsoft JhengHei" pitchFamily="34" charset="-120"/>
+                <a:latin typeface="Hiragino Sans" pitchFamily="34" charset="0"/>
+                <a:ea typeface="Hiragino Sans" pitchFamily="34" charset="-122"/>
+                <a:cs typeface="Hiragino Sans" pitchFamily="34" charset="-120"/>
               </a:rPr>
               <a:t>F</a:t>
             </a:r>
@@ -15977,9 +15933,9 @@
                 <a:solidFill>
                   <a:srgbClr val="FFFFFF"/>
                 </a:solidFill>
-                <a:latin typeface="Microsoft JhengHei" pitchFamily="34" charset="0"/>
-                <a:ea typeface="Microsoft JhengHei" pitchFamily="34" charset="-122"/>
-                <a:cs typeface="Microsoft JhengHei" pitchFamily="34" charset="-120"/>
+                <a:latin typeface="Hiragino Sans" pitchFamily="34" charset="0"/>
+                <a:ea typeface="Hiragino Sans" pitchFamily="34" charset="-122"/>
+                <a:cs typeface="Hiragino Sans" pitchFamily="34" charset="-120"/>
               </a:rPr>
               <a:t>ECS Fargate</a:t>
             </a:r>
@@ -16019,9 +15975,9 @@
                 <a:solidFill>
                   <a:srgbClr val="C7D6E4"/>
                 </a:solidFill>
-                <a:latin typeface="Microsoft JhengHei" pitchFamily="34" charset="0"/>
-                <a:ea typeface="Microsoft JhengHei" pitchFamily="34" charset="-122"/>
-                <a:cs typeface="Microsoft JhengHei" pitchFamily="34" charset="-120"/>
+                <a:latin typeface="Hiragino Sans" pitchFamily="34" charset="0"/>
+                <a:ea typeface="Hiragino Sans" pitchFamily="34" charset="-122"/>
+                <a:cs typeface="Hiragino Sans" pitchFamily="34" charset="-120"/>
               </a:rPr>
               <a:t>ARM64 容器</a:t>
             </a:r>
@@ -16143,9 +16099,9 @@
                 <a:solidFill>
                   <a:srgbClr val="FFFFFF"/>
                 </a:solidFill>
-                <a:latin typeface="Microsoft JhengHei" pitchFamily="34" charset="0"/>
-                <a:ea typeface="Microsoft JhengHei" pitchFamily="34" charset="-122"/>
-                <a:cs typeface="Microsoft JhengHei" pitchFamily="34" charset="-120"/>
+                <a:latin typeface="Hiragino Sans" pitchFamily="34" charset="0"/>
+                <a:ea typeface="Hiragino Sans" pitchFamily="34" charset="-122"/>
+                <a:cs typeface="Hiragino Sans" pitchFamily="34" charset="-120"/>
               </a:rPr>
               <a:t>ALB</a:t>
             </a:r>
@@ -16185,9 +16141,9 @@
                 <a:solidFill>
                   <a:srgbClr val="FFFFFF"/>
                 </a:solidFill>
-                <a:latin typeface="Microsoft JhengHei" pitchFamily="34" charset="0"/>
-                <a:ea typeface="Microsoft JhengHei" pitchFamily="34" charset="-122"/>
-                <a:cs typeface="Microsoft JhengHei" pitchFamily="34" charset="-120"/>
+                <a:latin typeface="Hiragino Sans" pitchFamily="34" charset="0"/>
+                <a:ea typeface="Hiragino Sans" pitchFamily="34" charset="-122"/>
+                <a:cs typeface="Hiragino Sans" pitchFamily="34" charset="-120"/>
               </a:rPr>
               <a:t>ALB</a:t>
             </a:r>
@@ -16227,9 +16183,9 @@
                 <a:solidFill>
                   <a:srgbClr val="C7D6E4"/>
                 </a:solidFill>
-                <a:latin typeface="Microsoft JhengHei" pitchFamily="34" charset="0"/>
-                <a:ea typeface="Microsoft JhengHei" pitchFamily="34" charset="-122"/>
-                <a:cs typeface="Microsoft JhengHei" pitchFamily="34" charset="-120"/>
+                <a:latin typeface="Hiragino Sans" pitchFamily="34" charset="0"/>
+                <a:ea typeface="Hiragino Sans" pitchFamily="34" charset="-122"/>
+                <a:cs typeface="Hiragino Sans" pitchFamily="34" charset="-120"/>
               </a:rPr>
               <a:t>靜態 URL</a:t>
             </a:r>
@@ -16351,9 +16307,9 @@
                 <a:solidFill>
                   <a:srgbClr val="FFFFFF"/>
                 </a:solidFill>
-                <a:latin typeface="Microsoft JhengHei" pitchFamily="34" charset="0"/>
-                <a:ea typeface="Microsoft JhengHei" pitchFamily="34" charset="-122"/>
-                <a:cs typeface="Microsoft JhengHei" pitchFamily="34" charset="-120"/>
+                <a:latin typeface="Hiragino Sans" pitchFamily="34" charset="0"/>
+                <a:ea typeface="Hiragino Sans" pitchFamily="34" charset="-122"/>
+                <a:cs typeface="Hiragino Sans" pitchFamily="34" charset="-120"/>
               </a:rPr>
               <a:t>ECR</a:t>
             </a:r>
@@ -16393,9 +16349,9 @@
                 <a:solidFill>
                   <a:srgbClr val="FFFFFF"/>
                 </a:solidFill>
-                <a:latin typeface="Microsoft JhengHei" pitchFamily="34" charset="0"/>
-                <a:ea typeface="Microsoft JhengHei" pitchFamily="34" charset="-122"/>
-                <a:cs typeface="Microsoft JhengHei" pitchFamily="34" charset="-120"/>
+                <a:latin typeface="Hiragino Sans" pitchFamily="34" charset="0"/>
+                <a:ea typeface="Hiragino Sans" pitchFamily="34" charset="-122"/>
+                <a:cs typeface="Hiragino Sans" pitchFamily="34" charset="-120"/>
               </a:rPr>
               <a:t>ECR</a:t>
             </a:r>
@@ -16435,9 +16391,9 @@
                 <a:solidFill>
                   <a:srgbClr val="C7D6E4"/>
                 </a:solidFill>
-                <a:latin typeface="Microsoft JhengHei" pitchFamily="34" charset="0"/>
-                <a:ea typeface="Microsoft JhengHei" pitchFamily="34" charset="-122"/>
-                <a:cs typeface="Microsoft JhengHei" pitchFamily="34" charset="-120"/>
+                <a:latin typeface="Hiragino Sans" pitchFamily="34" charset="0"/>
+                <a:ea typeface="Hiragino Sans" pitchFamily="34" charset="-122"/>
+                <a:cs typeface="Hiragino Sans" pitchFamily="34" charset="-120"/>
               </a:rPr>
               <a:t>映像倉庫</a:t>
             </a:r>
@@ -16559,9 +16515,9 @@
                 <a:solidFill>
                   <a:srgbClr val="FFFFFF"/>
                 </a:solidFill>
-                <a:latin typeface="Microsoft JhengHei" pitchFamily="34" charset="0"/>
-                <a:ea typeface="Microsoft JhengHei" pitchFamily="34" charset="-122"/>
-                <a:cs typeface="Microsoft JhengHei" pitchFamily="34" charset="-120"/>
+                <a:latin typeface="Hiragino Sans" pitchFamily="34" charset="0"/>
+                <a:ea typeface="Hiragino Sans" pitchFamily="34" charset="-122"/>
+                <a:cs typeface="Hiragino Sans" pitchFamily="34" charset="-120"/>
               </a:rPr>
               <a:t>AI</a:t>
             </a:r>
@@ -16601,9 +16557,9 @@
                 <a:solidFill>
                   <a:srgbClr val="FFFFFF"/>
                 </a:solidFill>
-                <a:latin typeface="Microsoft JhengHei" pitchFamily="34" charset="0"/>
-                <a:ea typeface="Microsoft JhengHei" pitchFamily="34" charset="-122"/>
-                <a:cs typeface="Microsoft JhengHei" pitchFamily="34" charset="-120"/>
+                <a:latin typeface="Hiragino Sans" pitchFamily="34" charset="0"/>
+                <a:ea typeface="Hiragino Sans" pitchFamily="34" charset="-122"/>
+                <a:cs typeface="Hiragino Sans" pitchFamily="34" charset="-120"/>
               </a:rPr>
               <a:t>Bedrock</a:t>
             </a:r>
@@ -16643,9 +16599,9 @@
                 <a:solidFill>
                   <a:srgbClr val="C7D6E4"/>
                 </a:solidFill>
-                <a:latin typeface="Microsoft JhengHei" pitchFamily="34" charset="0"/>
-                <a:ea typeface="Microsoft JhengHei" pitchFamily="34" charset="-122"/>
-                <a:cs typeface="Microsoft JhengHei" pitchFamily="34" charset="-120"/>
+                <a:latin typeface="Hiragino Sans" pitchFamily="34" charset="0"/>
+                <a:ea typeface="Hiragino Sans" pitchFamily="34" charset="-122"/>
+                <a:cs typeface="Hiragino Sans" pitchFamily="34" charset="-120"/>
               </a:rPr>
               <a:t>Claude Haiku</a:t>
             </a:r>
@@ -16767,9 +16723,9 @@
                 <a:solidFill>
                   <a:srgbClr val="FFFFFF"/>
                 </a:solidFill>
-                <a:latin typeface="Microsoft JhengHei" pitchFamily="34" charset="0"/>
-                <a:ea typeface="Microsoft JhengHei" pitchFamily="34" charset="-122"/>
-                <a:cs typeface="Microsoft JhengHei" pitchFamily="34" charset="-120"/>
+                <a:latin typeface="Hiragino Sans" pitchFamily="34" charset="0"/>
+                <a:ea typeface="Hiragino Sans" pitchFamily="34" charset="-122"/>
+                <a:cs typeface="Hiragino Sans" pitchFamily="34" charset="-120"/>
               </a:rPr>
               <a:t>SNS</a:t>
             </a:r>
@@ -16809,9 +16765,9 @@
                 <a:solidFill>
                   <a:srgbClr val="FFFFFF"/>
                 </a:solidFill>
-                <a:latin typeface="Microsoft JhengHei" pitchFamily="34" charset="0"/>
-                <a:ea typeface="Microsoft JhengHei" pitchFamily="34" charset="-122"/>
-                <a:cs typeface="Microsoft JhengHei" pitchFamily="34" charset="-120"/>
+                <a:latin typeface="Hiragino Sans" pitchFamily="34" charset="0"/>
+                <a:ea typeface="Hiragino Sans" pitchFamily="34" charset="-122"/>
+                <a:cs typeface="Hiragino Sans" pitchFamily="34" charset="-120"/>
               </a:rPr>
               <a:t>SNS</a:t>
             </a:r>
@@ -16851,9 +16807,9 @@
                 <a:solidFill>
                   <a:srgbClr val="C7D6E4"/>
                 </a:solidFill>
-                <a:latin typeface="Microsoft JhengHei" pitchFamily="34" charset="0"/>
-                <a:ea typeface="Microsoft JhengHei" pitchFamily="34" charset="-122"/>
-                <a:cs typeface="Microsoft JhengHei" pitchFamily="34" charset="-120"/>
+                <a:latin typeface="Hiragino Sans" pitchFamily="34" charset="0"/>
+                <a:ea typeface="Hiragino Sans" pitchFamily="34" charset="-122"/>
+                <a:cs typeface="Hiragino Sans" pitchFamily="34" charset="-120"/>
               </a:rPr>
               <a:t>告警扇出</a:t>
             </a:r>
@@ -16890,9 +16846,9 @@
                 <a:solidFill>
                   <a:srgbClr val="2A9D8F"/>
                 </a:solidFill>
-                <a:latin typeface="Microsoft JhengHei" pitchFamily="34" charset="0"/>
-                <a:ea typeface="Microsoft JhengHei" pitchFamily="34" charset="-122"/>
-                <a:cs typeface="Microsoft JhengHei" pitchFamily="34" charset="-120"/>
+                <a:latin typeface="Hiragino Sans" pitchFamily="34" charset="0"/>
+                <a:ea typeface="Hiragino Sans" pitchFamily="34" charset="-122"/>
+                <a:cs typeface="Hiragino Sans" pitchFamily="34" charset="-120"/>
               </a:rPr>
               <a:t>五種上雲方案</a:t>
             </a:r>
@@ -16990,9 +16946,9 @@
                 <a:solidFill>
                   <a:srgbClr val="FFFFFF"/>
                 </a:solidFill>
-                <a:latin typeface="Microsoft JhengHei" pitchFamily="34" charset="0"/>
-                <a:ea typeface="Microsoft JhengHei" pitchFamily="34" charset="-122"/>
-                <a:cs typeface="Microsoft JhengHei" pitchFamily="34" charset="-120"/>
+                <a:latin typeface="Hiragino Sans" pitchFamily="34" charset="0"/>
+                <a:ea typeface="Hiragino Sans" pitchFamily="34" charset="-122"/>
+                <a:cs typeface="Hiragino Sans" pitchFamily="34" charset="-120"/>
               </a:rPr>
               <a:t>A</a:t>
             </a:r>
@@ -17029,9 +16985,9 @@
                 <a:solidFill>
                   <a:srgbClr val="FFFFFF"/>
                 </a:solidFill>
-                <a:latin typeface="Microsoft JhengHei" pitchFamily="34" charset="0"/>
-                <a:ea typeface="Microsoft JhengHei" pitchFamily="34" charset="-122"/>
-                <a:cs typeface="Microsoft JhengHei" pitchFamily="34" charset="-120"/>
+                <a:latin typeface="Hiragino Sans" pitchFamily="34" charset="0"/>
+                <a:ea typeface="Hiragino Sans" pitchFamily="34" charset="-122"/>
+                <a:cs typeface="Hiragino Sans" pitchFamily="34" charset="-120"/>
               </a:rPr>
               <a:t>現行強化</a:t>
             </a:r>
@@ -17068,9 +17024,9 @@
                 <a:solidFill>
                   <a:srgbClr val="C7D6E4"/>
                 </a:solidFill>
-                <a:latin typeface="Microsoft JhengHei" pitchFamily="34" charset="0"/>
-                <a:ea typeface="Microsoft JhengHei" pitchFamily="34" charset="-122"/>
-                <a:cs typeface="Microsoft JhengHei" pitchFamily="34" charset="-120"/>
+                <a:latin typeface="Hiragino Sans" pitchFamily="34" charset="0"/>
+                <a:ea typeface="Hiragino Sans" pitchFamily="34" charset="-122"/>
+                <a:cs typeface="Hiragino Sans" pitchFamily="34" charset="-120"/>
               </a:rPr>
               <a:t>Fargate + ALB</a:t>
             </a:r>
@@ -17168,9 +17124,9 @@
                 <a:solidFill>
                   <a:srgbClr val="FFFFFF"/>
                 </a:solidFill>
-                <a:latin typeface="Microsoft JhengHei" pitchFamily="34" charset="0"/>
-                <a:ea typeface="Microsoft JhengHei" pitchFamily="34" charset="-122"/>
-                <a:cs typeface="Microsoft JhengHei" pitchFamily="34" charset="-120"/>
+                <a:latin typeface="Hiragino Sans" pitchFamily="34" charset="0"/>
+                <a:ea typeface="Hiragino Sans" pitchFamily="34" charset="-122"/>
+                <a:cs typeface="Hiragino Sans" pitchFamily="34" charset="-120"/>
               </a:rPr>
               <a:t>B</a:t>
             </a:r>
@@ -17207,9 +17163,9 @@
                 <a:solidFill>
                   <a:srgbClr val="FFFFFF"/>
                 </a:solidFill>
-                <a:latin typeface="Microsoft JhengHei" pitchFamily="34" charset="0"/>
-                <a:ea typeface="Microsoft JhengHei" pitchFamily="34" charset="-122"/>
-                <a:cs typeface="Microsoft JhengHei" pitchFamily="34" charset="-120"/>
+                <a:latin typeface="Hiragino Sans" pitchFamily="34" charset="0"/>
+                <a:ea typeface="Hiragino Sans" pitchFamily="34" charset="-122"/>
+                <a:cs typeface="Hiragino Sans" pitchFamily="34" charset="-120"/>
               </a:rPr>
               <a:t>全 Serverless</a:t>
             </a:r>
@@ -17246,9 +17202,9 @@
                 <a:solidFill>
                   <a:srgbClr val="C7D6E4"/>
                 </a:solidFill>
-                <a:latin typeface="Microsoft JhengHei" pitchFamily="34" charset="0"/>
-                <a:ea typeface="Microsoft JhengHei" pitchFamily="34" charset="-122"/>
-                <a:cs typeface="Microsoft JhengHei" pitchFamily="34" charset="-120"/>
+                <a:latin typeface="Hiragino Sans" pitchFamily="34" charset="0"/>
+                <a:ea typeface="Hiragino Sans" pitchFamily="34" charset="-122"/>
+                <a:cs typeface="Hiragino Sans" pitchFamily="34" charset="-120"/>
               </a:rPr>
               <a:t>APIGW + Lambda</a:t>
             </a:r>
@@ -17346,9 +17302,9 @@
                 <a:solidFill>
                   <a:srgbClr val="FFFFFF"/>
                 </a:solidFill>
-                <a:latin typeface="Microsoft JhengHei" pitchFamily="34" charset="0"/>
-                <a:ea typeface="Microsoft JhengHei" pitchFamily="34" charset="-122"/>
-                <a:cs typeface="Microsoft JhengHei" pitchFamily="34" charset="-120"/>
+                <a:latin typeface="Hiragino Sans" pitchFamily="34" charset="0"/>
+                <a:ea typeface="Hiragino Sans" pitchFamily="34" charset="-122"/>
+                <a:cs typeface="Hiragino Sans" pitchFamily="34" charset="-120"/>
               </a:rPr>
               <a:t>C</a:t>
             </a:r>
@@ -17385,9 +17341,9 @@
                 <a:solidFill>
                   <a:srgbClr val="FFFFFF"/>
                 </a:solidFill>
-                <a:latin typeface="Microsoft JhengHei" pitchFamily="34" charset="0"/>
-                <a:ea typeface="Microsoft JhengHei" pitchFamily="34" charset="-122"/>
-                <a:cs typeface="Microsoft JhengHei" pitchFamily="34" charset="-120"/>
+                <a:latin typeface="Hiragino Sans" pitchFamily="34" charset="0"/>
+                <a:ea typeface="Hiragino Sans" pitchFamily="34" charset="-122"/>
+                <a:cs typeface="Hiragino Sans" pitchFamily="34" charset="-120"/>
               </a:rPr>
               <a:t>App Runner</a:t>
             </a:r>
@@ -17424,9 +17380,9 @@
                 <a:solidFill>
                   <a:srgbClr val="C7D6E4"/>
                 </a:solidFill>
-                <a:latin typeface="Microsoft JhengHei" pitchFamily="34" charset="0"/>
-                <a:ea typeface="Microsoft JhengHei" pitchFamily="34" charset="-122"/>
-                <a:cs typeface="Microsoft JhengHei" pitchFamily="34" charset="-120"/>
+                <a:latin typeface="Hiragino Sans" pitchFamily="34" charset="0"/>
+                <a:ea typeface="Hiragino Sans" pitchFamily="34" charset="-122"/>
+                <a:cs typeface="Hiragino Sans" pitchFamily="34" charset="-120"/>
               </a:rPr>
               <a:t>零 infra（受阻）</a:t>
             </a:r>
@@ -17524,9 +17480,9 @@
                 <a:solidFill>
                   <a:srgbClr val="FFFFFF"/>
                 </a:solidFill>
-                <a:latin typeface="Microsoft JhengHei" pitchFamily="34" charset="0"/>
-                <a:ea typeface="Microsoft JhengHei" pitchFamily="34" charset="-122"/>
-                <a:cs typeface="Microsoft JhengHei" pitchFamily="34" charset="-120"/>
+                <a:latin typeface="Hiragino Sans" pitchFamily="34" charset="0"/>
+                <a:ea typeface="Hiragino Sans" pitchFamily="34" charset="-122"/>
+                <a:cs typeface="Hiragino Sans" pitchFamily="34" charset="-120"/>
               </a:rPr>
               <a:t>D</a:t>
             </a:r>
@@ -17563,9 +17519,9 @@
                 <a:solidFill>
                   <a:srgbClr val="FFFFFF"/>
                 </a:solidFill>
-                <a:latin typeface="Microsoft JhengHei" pitchFamily="34" charset="0"/>
-                <a:ea typeface="Microsoft JhengHei" pitchFamily="34" charset="-122"/>
-                <a:cs typeface="Microsoft JhengHei" pitchFamily="34" charset="-120"/>
+                <a:latin typeface="Hiragino Sans" pitchFamily="34" charset="0"/>
+                <a:ea typeface="Hiragino Sans" pitchFamily="34" charset="-122"/>
+                <a:cs typeface="Hiragino Sans" pitchFamily="34" charset="-120"/>
               </a:rPr>
               <a:t>EC2 + Docker</a:t>
             </a:r>
@@ -17602,9 +17558,9 @@
                 <a:solidFill>
                   <a:srgbClr val="C7D6E4"/>
                 </a:solidFill>
-                <a:latin typeface="Microsoft JhengHei" pitchFamily="34" charset="0"/>
-                <a:ea typeface="Microsoft JhengHei" pitchFamily="34" charset="-122"/>
-                <a:cs typeface="Microsoft JhengHei" pitchFamily="34" charset="-120"/>
+                <a:latin typeface="Hiragino Sans" pitchFamily="34" charset="0"/>
+                <a:ea typeface="Hiragino Sans" pitchFamily="34" charset="-122"/>
+                <a:cs typeface="Hiragino Sans" pitchFamily="34" charset="-120"/>
               </a:rPr>
               <a:t>最省保底</a:t>
             </a:r>
@@ -17702,9 +17658,9 @@
                 <a:solidFill>
                   <a:srgbClr val="0A2540"/>
                 </a:solidFill>
-                <a:latin typeface="Microsoft JhengHei" pitchFamily="34" charset="0"/>
-                <a:ea typeface="Microsoft JhengHei" pitchFamily="34" charset="-122"/>
-                <a:cs typeface="Microsoft JhengHei" pitchFamily="34" charset="-120"/>
+                <a:latin typeface="Hiragino Sans" pitchFamily="34" charset="0"/>
+                <a:ea typeface="Hiragino Sans" pitchFamily="34" charset="-122"/>
+                <a:cs typeface="Hiragino Sans" pitchFamily="34" charset="-120"/>
               </a:rPr>
               <a:t>E</a:t>
             </a:r>
@@ -17741,9 +17697,9 @@
                 <a:solidFill>
                   <a:srgbClr val="FFFFFF"/>
                 </a:solidFill>
-                <a:latin typeface="Microsoft JhengHei" pitchFamily="34" charset="0"/>
-                <a:ea typeface="Microsoft JhengHei" pitchFamily="34" charset="-122"/>
-                <a:cs typeface="Microsoft JhengHei" pitchFamily="34" charset="-120"/>
+                <a:latin typeface="Hiragino Sans" pitchFamily="34" charset="0"/>
+                <a:ea typeface="Hiragino Sans" pitchFamily="34" charset="-122"/>
+                <a:cs typeface="Hiragino Sans" pitchFamily="34" charset="-120"/>
               </a:rPr>
               <a:t>資料分析管線</a:t>
             </a:r>
@@ -17780,9 +17736,9 @@
                 <a:solidFill>
                   <a:srgbClr val="C7D6E4"/>
                 </a:solidFill>
-                <a:latin typeface="Microsoft JhengHei" pitchFamily="34" charset="0"/>
-                <a:ea typeface="Microsoft JhengHei" pitchFamily="34" charset="-122"/>
-                <a:cs typeface="Microsoft JhengHei" pitchFamily="34" charset="-120"/>
+                <a:latin typeface="Hiragino Sans" pitchFamily="34" charset="0"/>
+                <a:ea typeface="Hiragino Sans" pitchFamily="34" charset="-122"/>
+                <a:cs typeface="Hiragino Sans" pitchFamily="34" charset="-120"/>
               </a:rPr>
               <a:t>S3 + BI + ML 未來式</a:t>
             </a:r>
@@ -17815,13 +17771,13 @@
               <a:buNone/>
             </a:pPr>
             <a:r>
-              <a:rPr lang="en-US" sz="1150" i="1" dirty="0">
+              <a:rPr lang="en-US" sz="1150" dirty="0">
                 <a:solidFill>
                   <a:srgbClr val="C7D6E4"/>
                 </a:solidFill>
-                <a:latin typeface="Microsoft JhengHei" pitchFamily="34" charset="0"/>
-                <a:ea typeface="Microsoft JhengHei" pitchFamily="34" charset="-122"/>
-                <a:cs typeface="Microsoft JhengHei" pitchFamily="34" charset="-120"/>
+                <a:latin typeface="Hiragino Sans" pitchFamily="34" charset="0"/>
+                <a:ea typeface="Hiragino Sans" pitchFamily="34" charset="-122"/>
+                <a:cs typeface="Hiragino Sans" pitchFamily="34" charset="-120"/>
               </a:rPr>
               <a:t>A 是已上線基準線；E 是全艦隊願景路線圖；B / C / D 是中間的取捨光譜。</a:t>
             </a:r>
@@ -18043,9 +17999,9 @@
                 <a:solidFill>
                   <a:srgbClr val="FFFFFF"/>
                 </a:solidFill>
-                <a:latin typeface="Microsoft JhengHei" pitchFamily="34" charset="0"/>
-                <a:ea typeface="Microsoft JhengHei" pitchFamily="34" charset="-122"/>
-                <a:cs typeface="Microsoft JhengHei" pitchFamily="34" charset="-120"/>
+                <a:latin typeface="Hiragino Sans" pitchFamily="34" charset="0"/>
+                <a:ea typeface="Hiragino Sans" pitchFamily="34" charset="-122"/>
+                <a:cs typeface="Hiragino Sans" pitchFamily="34" charset="-120"/>
               </a:rPr>
               <a:t>03</a:t>
             </a:r>
@@ -18057,9 +18013,9 @@
                 <a:solidFill>
                   <a:srgbClr val="8FA8BD"/>
                 </a:solidFill>
-                <a:latin typeface="Microsoft JhengHei" pitchFamily="34" charset="0"/>
-                <a:ea typeface="Microsoft JhengHei" pitchFamily="34" charset="-122"/>
-                <a:cs typeface="Microsoft JhengHei" pitchFamily="34" charset="-120"/>
+                <a:latin typeface="Hiragino Sans" pitchFamily="34" charset="0"/>
+                <a:ea typeface="Hiragino Sans" pitchFamily="34" charset="-122"/>
+                <a:cs typeface="Hiragino Sans" pitchFamily="34" charset="-120"/>
               </a:rPr>
               <a:t>  /  15</a:t>
             </a:r>
@@ -18096,9 +18052,9 @@
                 <a:solidFill>
                   <a:srgbClr val="F4A72B"/>
                 </a:solidFill>
-                <a:latin typeface="Microsoft JhengHei" pitchFamily="34" charset="0"/>
-                <a:ea typeface="Microsoft JhengHei" pitchFamily="34" charset="-122"/>
-                <a:cs typeface="Microsoft JhengHei" pitchFamily="34" charset="-120"/>
+                <a:latin typeface="Hiragino Sans" pitchFamily="34" charset="0"/>
+                <a:ea typeface="Hiragino Sans" pitchFamily="34" charset="-122"/>
+                <a:cs typeface="Hiragino Sans" pitchFamily="34" charset="-120"/>
               </a:rPr>
               <a:t>DEPLOYED · DAY1 實測上線</a:t>
             </a:r>
@@ -18135,9 +18091,9 @@
                 <a:solidFill>
                   <a:srgbClr val="FFFFFF"/>
                 </a:solidFill>
-                <a:latin typeface="Microsoft JhengHei" pitchFamily="34" charset="0"/>
-                <a:ea typeface="Microsoft JhengHei" pitchFamily="34" charset="-122"/>
-                <a:cs typeface="Microsoft JhengHei" pitchFamily="34" charset="-120"/>
+                <a:latin typeface="Hiragino Sans" pitchFamily="34" charset="0"/>
+                <a:ea typeface="Hiragino Sans" pitchFamily="34" charset="-122"/>
+                <a:cs typeface="Hiragino Sans" pitchFamily="34" charset="-120"/>
               </a:rPr>
               <a:t>現行架構：ECS Fargate + ALB 單服務容器</a:t>
             </a:r>
@@ -18196,9 +18152,9 @@
                 <a:solidFill>
                   <a:srgbClr val="FFFFFF"/>
                 </a:solidFill>
-                <a:latin typeface="Microsoft JhengHei" pitchFamily="34" charset="0"/>
-                <a:ea typeface="Microsoft JhengHei" pitchFamily="34" charset="-122"/>
-                <a:cs typeface="Microsoft JhengHei" pitchFamily="34" charset="-120"/>
+                <a:latin typeface="Hiragino Sans" pitchFamily="34" charset="0"/>
+                <a:ea typeface="Hiragino Sans" pitchFamily="34" charset="-122"/>
+                <a:cs typeface="Hiragino Sans" pitchFamily="34" charset="-120"/>
               </a:rPr>
               <a:t>成本 低</a:t>
             </a:r>
@@ -18257,9 +18213,9 @@
                 <a:solidFill>
                   <a:srgbClr val="FFFFFF"/>
                 </a:solidFill>
-                <a:latin typeface="Microsoft JhengHei" pitchFamily="34" charset="0"/>
-                <a:ea typeface="Microsoft JhengHei" pitchFamily="34" charset="-122"/>
-                <a:cs typeface="Microsoft JhengHei" pitchFamily="34" charset="-120"/>
+                <a:latin typeface="Hiragino Sans" pitchFamily="34" charset="0"/>
+                <a:ea typeface="Hiragino Sans" pitchFamily="34" charset="-122"/>
+                <a:cs typeface="Hiragino Sans" pitchFamily="34" charset="-120"/>
               </a:rPr>
               <a:t>黑客松 ★ 最高</a:t>
             </a:r>
@@ -18325,9 +18281,9 @@
                 <a:solidFill>
                   <a:srgbClr val="C7D6E4"/>
                 </a:solidFill>
-                <a:latin typeface="Microsoft JhengHei" pitchFamily="34" charset="0"/>
-                <a:ea typeface="Microsoft JhengHei" pitchFamily="34" charset="-122"/>
-                <a:cs typeface="Microsoft JhengHei" pitchFamily="34" charset="-120"/>
+                <a:latin typeface="Hiragino Sans" pitchFamily="34" charset="0"/>
+                <a:ea typeface="Hiragino Sans" pitchFamily="34" charset="-122"/>
+                <a:cs typeface="Hiragino Sans" pitchFamily="34" charset="-120"/>
               </a:rPr>
               <a:t>存取</a:t>
             </a:r>
@@ -18393,9 +18349,9 @@
                 <a:solidFill>
                   <a:srgbClr val="C7D6E4"/>
                 </a:solidFill>
-                <a:latin typeface="Microsoft JhengHei" pitchFamily="34" charset="0"/>
-                <a:ea typeface="Microsoft JhengHei" pitchFamily="34" charset="-122"/>
-                <a:cs typeface="Microsoft JhengHei" pitchFamily="34" charset="-120"/>
+                <a:latin typeface="Hiragino Sans" pitchFamily="34" charset="0"/>
+                <a:ea typeface="Hiragino Sans" pitchFamily="34" charset="-122"/>
+                <a:cs typeface="Hiragino Sans" pitchFamily="34" charset="-120"/>
               </a:rPr>
               <a:t>入口</a:t>
             </a:r>
@@ -18461,9 +18417,9 @@
                 <a:solidFill>
                   <a:srgbClr val="2A9D8F"/>
                 </a:solidFill>
-                <a:latin typeface="Microsoft JhengHei" pitchFamily="34" charset="0"/>
-                <a:ea typeface="Microsoft JhengHei" pitchFamily="34" charset="-122"/>
-                <a:cs typeface="Microsoft JhengHei" pitchFamily="34" charset="-120"/>
+                <a:latin typeface="Hiragino Sans" pitchFamily="34" charset="0"/>
+                <a:ea typeface="Hiragino Sans" pitchFamily="34" charset="-122"/>
+                <a:cs typeface="Hiragino Sans" pitchFamily="34" charset="-120"/>
               </a:rPr>
               <a:t>執行 · 映像</a:t>
             </a:r>
@@ -18529,9 +18485,9 @@
                 <a:solidFill>
                   <a:srgbClr val="F4A72B"/>
                 </a:solidFill>
-                <a:latin typeface="Microsoft JhengHei" pitchFamily="34" charset="0"/>
-                <a:ea typeface="Microsoft JhengHei" pitchFamily="34" charset="-122"/>
-                <a:cs typeface="Microsoft JhengHei" pitchFamily="34" charset="-120"/>
+                <a:latin typeface="Hiragino Sans" pitchFamily="34" charset="0"/>
+                <a:ea typeface="Hiragino Sans" pitchFamily="34" charset="-122"/>
+                <a:cs typeface="Hiragino Sans" pitchFamily="34" charset="-120"/>
               </a:rPr>
               <a:t>AI · 通知</a:t>
             </a:r>
@@ -18629,9 +18585,9 @@
                 <a:solidFill>
                   <a:srgbClr val="0A2540"/>
                 </a:solidFill>
-                <a:latin typeface="Microsoft JhengHei" pitchFamily="34" charset="0"/>
-                <a:ea typeface="Microsoft JhengHei" pitchFamily="34" charset="-122"/>
-                <a:cs typeface="Microsoft JhengHei" pitchFamily="34" charset="-120"/>
+                <a:latin typeface="Hiragino Sans" pitchFamily="34" charset="0"/>
+                <a:ea typeface="Hiragino Sans" pitchFamily="34" charset="-122"/>
+                <a:cs typeface="Hiragino Sans" pitchFamily="34" charset="-120"/>
               </a:rPr>
               <a:t>GET</a:t>
             </a:r>
@@ -18671,9 +18627,9 @@
                 <a:solidFill>
                   <a:srgbClr val="FFFFFF"/>
                 </a:solidFill>
-                <a:latin typeface="Microsoft JhengHei" pitchFamily="34" charset="0"/>
-                <a:ea typeface="Microsoft JhengHei" pitchFamily="34" charset="-122"/>
-                <a:cs typeface="Microsoft JhengHei" pitchFamily="34" charset="-120"/>
+                <a:latin typeface="Hiragino Sans" pitchFamily="34" charset="0"/>
+                <a:ea typeface="Hiragino Sans" pitchFamily="34" charset="-122"/>
+                <a:cs typeface="Hiragino Sans" pitchFamily="34" charset="-120"/>
               </a:rPr>
               <a:t>評審 / 瀏覽器</a:t>
             </a:r>
@@ -18713,9 +18669,9 @@
                 <a:solidFill>
                   <a:srgbClr val="C7D6E4"/>
                 </a:solidFill>
-                <a:latin typeface="Microsoft JhengHei" pitchFamily="34" charset="0"/>
-                <a:ea typeface="Microsoft JhengHei" pitchFamily="34" charset="-122"/>
-                <a:cs typeface="Microsoft JhengHei" pitchFamily="34" charset="-120"/>
+                <a:latin typeface="Hiragino Sans" pitchFamily="34" charset="0"/>
+                <a:ea typeface="Hiragino Sans" pitchFamily="34" charset="-122"/>
+                <a:cs typeface="Hiragino Sans" pitchFamily="34" charset="-120"/>
               </a:rPr>
               <a:t>HTTP 請求</a:t>
             </a:r>
@@ -18813,9 +18769,9 @@
                 <a:solidFill>
                   <a:srgbClr val="FFFFFF"/>
                 </a:solidFill>
-                <a:latin typeface="Microsoft JhengHei" pitchFamily="34" charset="0"/>
-                <a:ea typeface="Microsoft JhengHei" pitchFamily="34" charset="-122"/>
-                <a:cs typeface="Microsoft JhengHei" pitchFamily="34" charset="-120"/>
+                <a:latin typeface="Hiragino Sans" pitchFamily="34" charset="0"/>
+                <a:ea typeface="Hiragino Sans" pitchFamily="34" charset="-122"/>
+                <a:cs typeface="Hiragino Sans" pitchFamily="34" charset="-120"/>
               </a:rPr>
               <a:t>ALB</a:t>
             </a:r>
@@ -18855,9 +18811,9 @@
                 <a:solidFill>
                   <a:srgbClr val="FFFFFF"/>
                 </a:solidFill>
-                <a:latin typeface="Microsoft JhengHei" pitchFamily="34" charset="0"/>
-                <a:ea typeface="Microsoft JhengHei" pitchFamily="34" charset="-122"/>
-                <a:cs typeface="Microsoft JhengHei" pitchFamily="34" charset="-120"/>
+                <a:latin typeface="Hiragino Sans" pitchFamily="34" charset="0"/>
+                <a:ea typeface="Hiragino Sans" pitchFamily="34" charset="-122"/>
+                <a:cs typeface="Hiragino Sans" pitchFamily="34" charset="-120"/>
               </a:rPr>
               <a:t>ALB</a:t>
             </a:r>
@@ -18897,9 +18853,9 @@
                 <a:solidFill>
                   <a:srgbClr val="C7D6E4"/>
                 </a:solidFill>
-                <a:latin typeface="Microsoft JhengHei" pitchFamily="34" charset="0"/>
-                <a:ea typeface="Microsoft JhengHei" pitchFamily="34" charset="-122"/>
-                <a:cs typeface="Microsoft JhengHei" pitchFamily="34" charset="-120"/>
+                <a:latin typeface="Hiragino Sans" pitchFamily="34" charset="0"/>
+                <a:ea typeface="Hiragino Sans" pitchFamily="34" charset="-122"/>
+                <a:cs typeface="Hiragino Sans" pitchFamily="34" charset="-120"/>
               </a:rPr>
               <a:t>靜態 URL</a:t>
             </a:r>
@@ -18997,9 +18953,9 @@
                 <a:solidFill>
                   <a:srgbClr val="FFFFFF"/>
                 </a:solidFill>
-                <a:latin typeface="Microsoft JhengHei" pitchFamily="34" charset="0"/>
-                <a:ea typeface="Microsoft JhengHei" pitchFamily="34" charset="-122"/>
-                <a:cs typeface="Microsoft JhengHei" pitchFamily="34" charset="-120"/>
+                <a:latin typeface="Hiragino Sans" pitchFamily="34" charset="0"/>
+                <a:ea typeface="Hiragino Sans" pitchFamily="34" charset="-122"/>
+                <a:cs typeface="Hiragino Sans" pitchFamily="34" charset="-120"/>
               </a:rPr>
               <a:t>F</a:t>
             </a:r>
@@ -19039,9 +18995,9 @@
                 <a:solidFill>
                   <a:srgbClr val="FFFFFF"/>
                 </a:solidFill>
-                <a:latin typeface="Microsoft JhengHei" pitchFamily="34" charset="0"/>
-                <a:ea typeface="Microsoft JhengHei" pitchFamily="34" charset="-122"/>
-                <a:cs typeface="Microsoft JhengHei" pitchFamily="34" charset="-120"/>
+                <a:latin typeface="Hiragino Sans" pitchFamily="34" charset="0"/>
+                <a:ea typeface="Hiragino Sans" pitchFamily="34" charset="-122"/>
+                <a:cs typeface="Hiragino Sans" pitchFamily="34" charset="-120"/>
               </a:rPr>
               <a:t>ECS Fargate</a:t>
             </a:r>
@@ -19081,9 +19037,9 @@
                 <a:solidFill>
                   <a:srgbClr val="C7D6E4"/>
                 </a:solidFill>
-                <a:latin typeface="Microsoft JhengHei" pitchFamily="34" charset="0"/>
-                <a:ea typeface="Microsoft JhengHei" pitchFamily="34" charset="-122"/>
-                <a:cs typeface="Microsoft JhengHei" pitchFamily="34" charset="-120"/>
+                <a:latin typeface="Hiragino Sans" pitchFamily="34" charset="0"/>
+                <a:ea typeface="Hiragino Sans" pitchFamily="34" charset="-122"/>
+                <a:cs typeface="Hiragino Sans" pitchFamily="34" charset="-120"/>
               </a:rPr>
               <a:t>ARM64 · :8080</a:t>
             </a:r>
@@ -19181,9 +19137,9 @@
                 <a:solidFill>
                   <a:srgbClr val="FFFFFF"/>
                 </a:solidFill>
-                <a:latin typeface="Microsoft JhengHei" pitchFamily="34" charset="0"/>
-                <a:ea typeface="Microsoft JhengHei" pitchFamily="34" charset="-122"/>
-                <a:cs typeface="Microsoft JhengHei" pitchFamily="34" charset="-120"/>
+                <a:latin typeface="Hiragino Sans" pitchFamily="34" charset="0"/>
+                <a:ea typeface="Hiragino Sans" pitchFamily="34" charset="-122"/>
+                <a:cs typeface="Hiragino Sans" pitchFamily="34" charset="-120"/>
               </a:rPr>
               <a:t>ECR</a:t>
             </a:r>
@@ -19223,9 +19179,9 @@
                 <a:solidFill>
                   <a:srgbClr val="FFFFFF"/>
                 </a:solidFill>
-                <a:latin typeface="Microsoft JhengHei" pitchFamily="34" charset="0"/>
-                <a:ea typeface="Microsoft JhengHei" pitchFamily="34" charset="-122"/>
-                <a:cs typeface="Microsoft JhengHei" pitchFamily="34" charset="-120"/>
+                <a:latin typeface="Hiragino Sans" pitchFamily="34" charset="0"/>
+                <a:ea typeface="Hiragino Sans" pitchFamily="34" charset="-122"/>
+                <a:cs typeface="Hiragino Sans" pitchFamily="34" charset="-120"/>
               </a:rPr>
               <a:t>ECR</a:t>
             </a:r>
@@ -19265,9 +19221,9 @@
                 <a:solidFill>
                   <a:srgbClr val="C7D6E4"/>
                 </a:solidFill>
-                <a:latin typeface="Microsoft JhengHei" pitchFamily="34" charset="0"/>
-                <a:ea typeface="Microsoft JhengHei" pitchFamily="34" charset="-122"/>
-                <a:cs typeface="Microsoft JhengHei" pitchFamily="34" charset="-120"/>
+                <a:latin typeface="Hiragino Sans" pitchFamily="34" charset="0"/>
+                <a:ea typeface="Hiragino Sans" pitchFamily="34" charset="-122"/>
+                <a:cs typeface="Hiragino Sans" pitchFamily="34" charset="-120"/>
               </a:rPr>
               <a:t>映像 · 資料烤入</a:t>
             </a:r>
@@ -19365,9 +19321,9 @@
                 <a:solidFill>
                   <a:srgbClr val="FFFFFF"/>
                 </a:solidFill>
-                <a:latin typeface="Microsoft JhengHei" pitchFamily="34" charset="0"/>
-                <a:ea typeface="Microsoft JhengHei" pitchFamily="34" charset="-122"/>
-                <a:cs typeface="Microsoft JhengHei" pitchFamily="34" charset="-120"/>
+                <a:latin typeface="Hiragino Sans" pitchFamily="34" charset="0"/>
+                <a:ea typeface="Hiragino Sans" pitchFamily="34" charset="-122"/>
+                <a:cs typeface="Hiragino Sans" pitchFamily="34" charset="-120"/>
               </a:rPr>
               <a:t>AI</a:t>
             </a:r>
@@ -19407,9 +19363,9 @@
                 <a:solidFill>
                   <a:srgbClr val="FFFFFF"/>
                 </a:solidFill>
-                <a:latin typeface="Microsoft JhengHei" pitchFamily="34" charset="0"/>
-                <a:ea typeface="Microsoft JhengHei" pitchFamily="34" charset="-122"/>
-                <a:cs typeface="Microsoft JhengHei" pitchFamily="34" charset="-120"/>
+                <a:latin typeface="Hiragino Sans" pitchFamily="34" charset="0"/>
+                <a:ea typeface="Hiragino Sans" pitchFamily="34" charset="-122"/>
+                <a:cs typeface="Hiragino Sans" pitchFamily="34" charset="-120"/>
               </a:rPr>
               <a:t>Bedrock · Claude Haiku</a:t>
             </a:r>
@@ -19449,9 +19405,9 @@
                 <a:solidFill>
                   <a:srgbClr val="C7D6E4"/>
                 </a:solidFill>
-                <a:latin typeface="Microsoft JhengHei" pitchFamily="34" charset="0"/>
-                <a:ea typeface="Microsoft JhengHei" pitchFamily="34" charset="-122"/>
-                <a:cs typeface="Microsoft JhengHei" pitchFamily="34" charset="-120"/>
+                <a:latin typeface="Hiragino Sans" pitchFamily="34" charset="0"/>
+                <a:ea typeface="Hiragino Sans" pitchFamily="34" charset="-122"/>
+                <a:cs typeface="Hiragino Sans" pitchFamily="34" charset="-120"/>
               </a:rPr>
               <a:t>Converse · guardrail 驗 cited 數值</a:t>
             </a:r>
@@ -19549,9 +19505,9 @@
                 <a:solidFill>
                   <a:srgbClr val="FFFFFF"/>
                 </a:solidFill>
-                <a:latin typeface="Microsoft JhengHei" pitchFamily="34" charset="0"/>
-                <a:ea typeface="Microsoft JhengHei" pitchFamily="34" charset="-122"/>
-                <a:cs typeface="Microsoft JhengHei" pitchFamily="34" charset="-120"/>
+                <a:latin typeface="Hiragino Sans" pitchFamily="34" charset="0"/>
+                <a:ea typeface="Hiragino Sans" pitchFamily="34" charset="-122"/>
+                <a:cs typeface="Hiragino Sans" pitchFamily="34" charset="-120"/>
               </a:rPr>
               <a:t>SNS</a:t>
             </a:r>
@@ -19591,9 +19547,9 @@
                 <a:solidFill>
                   <a:srgbClr val="FFFFFF"/>
                 </a:solidFill>
-                <a:latin typeface="Microsoft JhengHei" pitchFamily="34" charset="0"/>
-                <a:ea typeface="Microsoft JhengHei" pitchFamily="34" charset="-122"/>
-                <a:cs typeface="Microsoft JhengHei" pitchFamily="34" charset="-120"/>
+                <a:latin typeface="Hiragino Sans" pitchFamily="34" charset="0"/>
+                <a:ea typeface="Hiragino Sans" pitchFamily="34" charset="-122"/>
+                <a:cs typeface="Hiragino Sans" pitchFamily="34" charset="-120"/>
               </a:rPr>
               <a:t>SNS · fleetmind-alerts</a:t>
             </a:r>
@@ -19633,9 +19589,9 @@
                 <a:solidFill>
                   <a:srgbClr val="C7D6E4"/>
                 </a:solidFill>
-                <a:latin typeface="Microsoft JhengHei" pitchFamily="34" charset="0"/>
-                <a:ea typeface="Microsoft JhengHei" pitchFamily="34" charset="-122"/>
-                <a:cs typeface="Microsoft JhengHei" pitchFamily="34" charset="-120"/>
+                <a:latin typeface="Hiragino Sans" pitchFamily="34" charset="0"/>
+                <a:ea typeface="Hiragino Sans" pitchFamily="34" charset="-122"/>
+                <a:cs typeface="Hiragino Sans" pitchFamily="34" charset="-120"/>
               </a:rPr>
               <a:t>告警扇出</a:t>
             </a:r>
@@ -19814,9 +19770,9 @@
                 <a:solidFill>
                   <a:srgbClr val="FFFFFF"/>
                 </a:solidFill>
-                <a:latin typeface="Microsoft JhengHei" pitchFamily="34" charset="0"/>
-                <a:ea typeface="Microsoft JhengHei" pitchFamily="34" charset="-122"/>
-                <a:cs typeface="Microsoft JhengHei" pitchFamily="34" charset="-120"/>
+                <a:latin typeface="Hiragino Sans" pitchFamily="34" charset="0"/>
+                <a:ea typeface="Hiragino Sans" pitchFamily="34" charset="-122"/>
+                <a:cs typeface="Hiragino Sans" pitchFamily="34" charset="-120"/>
               </a:rPr>
               <a:t>IAM　exec role 拉 ECR · task role 授 Bedrock + SNS</a:t>
             </a:r>
@@ -19875,9 +19831,9 @@
                 <a:solidFill>
                   <a:srgbClr val="FFFFFF"/>
                 </a:solidFill>
-                <a:latin typeface="Microsoft JhengHei" pitchFamily="34" charset="0"/>
-                <a:ea typeface="Microsoft JhengHei" pitchFamily="34" charset="-122"/>
-                <a:cs typeface="Microsoft JhengHei" pitchFamily="34" charset="-120"/>
+                <a:latin typeface="Hiragino Sans" pitchFamily="34" charset="0"/>
+                <a:ea typeface="Hiragino Sans" pitchFamily="34" charset="-122"/>
+                <a:cs typeface="Hiragino Sans" pitchFamily="34" charset="-120"/>
               </a:rPr>
               <a:t>CloudWatch Logs　/fleetmind/api</a:t>
             </a:r>
@@ -19950,9 +19906,9 @@
                 <a:solidFill>
                   <a:srgbClr val="2A9D8F"/>
                 </a:solidFill>
-                <a:latin typeface="Microsoft JhengHei" pitchFamily="34" charset="0"/>
-                <a:ea typeface="Microsoft JhengHei" pitchFamily="34" charset="-122"/>
-                <a:cs typeface="Microsoft JhengHei" pitchFamily="34" charset="-120"/>
+                <a:latin typeface="Hiragino Sans" pitchFamily="34" charset="0"/>
+                <a:ea typeface="Hiragino Sans" pitchFamily="34" charset="-122"/>
+                <a:cs typeface="Hiragino Sans" pitchFamily="34" charset="-120"/>
               </a:rPr>
               <a:t>資料流</a:t>
             </a:r>
@@ -19996,9 +19952,9 @@
                 <a:solidFill>
                   <a:srgbClr val="C7D6E4"/>
                 </a:solidFill>
-                <a:latin typeface="Microsoft JhengHei" pitchFamily="34" charset="0"/>
-                <a:ea typeface="Microsoft JhengHei" pitchFamily="34" charset="-122"/>
-                <a:cs typeface="Microsoft JhengHei" pitchFamily="34" charset="-120"/>
+                <a:latin typeface="Hiragino Sans" pitchFamily="34" charset="0"/>
+                <a:ea typeface="Hiragino Sans" pitchFamily="34" charset="-122"/>
+                <a:cs typeface="Hiragino Sans" pitchFamily="34" charset="-120"/>
               </a:rPr>
               <a:t>離線　core-calc 讀 15 船 2021–2025 正午報表，跑 ISO 19030 k 與品質旗標 → MetricsExportCli 產 real-metrics.json</a:t>
             </a:r>
@@ -20020,9 +19976,9 @@
                 <a:solidFill>
                   <a:srgbClr val="C7D6E4"/>
                 </a:solidFill>
-                <a:latin typeface="Microsoft JhengHei" pitchFamily="34" charset="0"/>
-                <a:ea typeface="Microsoft JhengHei" pitchFamily="34" charset="-122"/>
-                <a:cs typeface="Microsoft JhengHei" pitchFamily="34" charset="-120"/>
+                <a:latin typeface="Hiragino Sans" pitchFamily="34" charset="0"/>
+                <a:ea typeface="Hiragino Sans" pitchFamily="34" charset="-122"/>
+                <a:cs typeface="Hiragino Sans" pitchFamily="34" charset="-120"/>
               </a:rPr>
               <a:t>Build　Dockerfile COPY real-metrics.json 一起打包 jar → 推 ECR</a:t>
             </a:r>
@@ -20044,11 +20000,11 @@
                 <a:solidFill>
                   <a:srgbClr val="C7D6E4"/>
                 </a:solidFill>
-                <a:latin typeface="Microsoft JhengHei" pitchFamily="34" charset="0"/>
-                <a:ea typeface="Microsoft JhengHei" pitchFamily="34" charset="-122"/>
-                <a:cs typeface="Microsoft JhengHei" pitchFamily="34" charset="-120"/>
-              </a:rPr>
-              <a:t>Runtime　評審 → ALB → Fargate 回決策看板 + REST（/fleet/summary、/vessels/{id}/decision、/config/threshold…）</a:t>
+                <a:latin typeface="Hiragino Sans" pitchFamily="34" charset="0"/>
+                <a:ea typeface="Hiragino Sans" pitchFamily="34" charset="-122"/>
+                <a:cs typeface="Hiragino Sans" pitchFamily="34" charset="-120"/>
+              </a:rPr>
+              <a:t>Runtime　評審 → ALB → Fargate 回決策看板 + REST：/fleet/summary、/vessels/{id}/decision、/config/threshold…</a:t>
             </a:r>
             <a:endParaRPr lang="en-US" sz="1050" dirty="0"/>
           </a:p>
@@ -20068,9 +20024,9 @@
                 <a:solidFill>
                   <a:srgbClr val="C7D6E4"/>
                 </a:solidFill>
-                <a:latin typeface="Microsoft JhengHei" pitchFamily="34" charset="0"/>
-                <a:ea typeface="Microsoft JhengHei" pitchFamily="34" charset="-122"/>
-                <a:cs typeface="Microsoft JhengHei" pitchFamily="34" charset="-120"/>
+                <a:latin typeface="Hiragino Sans" pitchFamily="34" charset="0"/>
+                <a:ea typeface="Hiragino Sans" pitchFamily="34" charset="-122"/>
+                <a:cs typeface="Hiragino Sans" pitchFamily="34" charset="-120"/>
               </a:rPr>
               <a:t>AI 簡報　/ai-brief → Bedrock Converse → guardrail 驗 cited 數值</a:t>
             </a:r>
@@ -20092,9 +20048,9 @@
                 <a:solidFill>
                   <a:srgbClr val="C7D6E4"/>
                 </a:solidFill>
-                <a:latin typeface="Microsoft JhengHei" pitchFamily="34" charset="0"/>
-                <a:ea typeface="Microsoft JhengHei" pitchFamily="34" charset="-122"/>
-                <a:cs typeface="Microsoft JhengHei" pitchFamily="34" charset="-120"/>
+                <a:latin typeface="Hiragino Sans" pitchFamily="34" charset="0"/>
+                <a:ea typeface="Hiragino Sans" pitchFamily="34" charset="-122"/>
+                <a:cs typeface="Hiragino Sans" pitchFamily="34" charset="-120"/>
               </a:rPr>
               <a:t>告警　門檻跨越 → /alerts/notify → SNS Publish</a:t>
             </a:r>
@@ -20167,9 +20123,9 @@
                 <a:solidFill>
                   <a:srgbClr val="F4A72B"/>
                 </a:solidFill>
-                <a:latin typeface="Microsoft JhengHei" pitchFamily="34" charset="0"/>
-                <a:ea typeface="Microsoft JhengHei" pitchFamily="34" charset="-122"/>
-                <a:cs typeface="Microsoft JhengHei" pitchFamily="34" charset="-120"/>
+                <a:latin typeface="Hiragino Sans" pitchFamily="34" charset="0"/>
+                <a:ea typeface="Hiragino Sans" pitchFamily="34" charset="-122"/>
+                <a:cs typeface="Hiragino Sans" pitchFamily="34" charset="-120"/>
               </a:rPr>
               <a:t>為什麼是它 — demo 風險最低</a:t>
             </a:r>
@@ -20213,9 +20169,9 @@
                 <a:solidFill>
                   <a:srgbClr val="FFFFFF"/>
                 </a:solidFill>
-                <a:latin typeface="Microsoft JhengHei" pitchFamily="34" charset="0"/>
-                <a:ea typeface="Microsoft JhengHei" pitchFamily="34" charset="-122"/>
-                <a:cs typeface="Microsoft JhengHei" pitchFamily="34" charset="-120"/>
+                <a:latin typeface="Hiragino Sans" pitchFamily="34" charset="0"/>
+                <a:ea typeface="Hiragino Sans" pitchFamily="34" charset="-122"/>
+                <a:cs typeface="Hiragino Sans" pitchFamily="34" charset="-120"/>
               </a:rPr>
               <a:t>單一部署單元、單一 codebase，3 天內最好 debug 與彩排</a:t>
             </a:r>
@@ -20237,9 +20193,9 @@
                 <a:solidFill>
                   <a:srgbClr val="FFFFFF"/>
                 </a:solidFill>
-                <a:latin typeface="Microsoft JhengHei" pitchFamily="34" charset="0"/>
-                <a:ea typeface="Microsoft JhengHei" pitchFamily="34" charset="-122"/>
-                <a:cs typeface="Microsoft JhengHei" pitchFamily="34" charset="-120"/>
+                <a:latin typeface="Hiragino Sans" pitchFamily="34" charset="0"/>
+                <a:ea typeface="Hiragino Sans" pitchFamily="34" charset="-122"/>
+                <a:cs typeface="Hiragino Sans" pitchFamily="34" charset="-120"/>
               </a:rPr>
               <a:t>資料烤進映像＝零外部資料相依，冷啟即有真資料（repo 不含企業資料）</a:t>
             </a:r>
@@ -20261,9 +20217,9 @@
                 <a:solidFill>
                   <a:srgbClr val="FFFFFF"/>
                 </a:solidFill>
-                <a:latin typeface="Microsoft JhengHei" pitchFamily="34" charset="0"/>
-                <a:ea typeface="Microsoft JhengHei" pitchFamily="34" charset="-122"/>
-                <a:cs typeface="Microsoft JhengHei" pitchFamily="34" charset="-120"/>
+                <a:latin typeface="Hiragino Sans" pitchFamily="34" charset="0"/>
+                <a:ea typeface="Hiragino Sans" pitchFamily="34" charset="-122"/>
+                <a:cs typeface="Hiragino Sans" pitchFamily="34" charset="-120"/>
               </a:rPr>
               <a:t>ALB 給穩定 URL，task 重啟換 IP 不會讓 live demo 連結失效</a:t>
             </a:r>
@@ -20285,9 +20241,9 @@
                 <a:solidFill>
                   <a:srgbClr val="FFFFFF"/>
                 </a:solidFill>
-                <a:latin typeface="Microsoft JhengHei" pitchFamily="34" charset="0"/>
-                <a:ea typeface="Microsoft JhengHei" pitchFamily="34" charset="-122"/>
-                <a:cs typeface="Microsoft JhengHei" pitchFamily="34" charset="-120"/>
+                <a:latin typeface="Hiragino Sans" pitchFamily="34" charset="0"/>
+                <a:ea typeface="Hiragino Sans" pitchFamily="34" charset="-122"/>
+                <a:cs typeface="Hiragino Sans" pitchFamily="34" charset="-120"/>
               </a:rPr>
               <a:t>Bedrock + SNS 已實測打通，Email 告警與可調門檻需求已滿足</a:t>
             </a:r>
@@ -20309,9 +20265,9 @@
                 <a:solidFill>
                   <a:srgbClr val="FFFFFF"/>
                 </a:solidFill>
-                <a:latin typeface="Microsoft JhengHei" pitchFamily="34" charset="0"/>
-                <a:ea typeface="Microsoft JhengHei" pitchFamily="34" charset="-122"/>
-                <a:cs typeface="Microsoft JhengHei" pitchFamily="34" charset="-120"/>
+                <a:latin typeface="Hiragino Sans" pitchFamily="34" charset="0"/>
+                <a:ea typeface="Hiragino Sans" pitchFamily="34" charset="-122"/>
+                <a:cs typeface="Hiragino Sans" pitchFamily="34" charset="-120"/>
               </a:rPr>
               <a:t>ARM64 Fargate 成本低、免管 EC2 / OS patch</a:t>
             </a:r>
@@ -20533,9 +20489,9 @@
                 <a:solidFill>
                   <a:srgbClr val="FFFFFF"/>
                 </a:solidFill>
-                <a:latin typeface="Microsoft JhengHei" pitchFamily="34" charset="0"/>
-                <a:ea typeface="Microsoft JhengHei" pitchFamily="34" charset="-122"/>
-                <a:cs typeface="Microsoft JhengHei" pitchFamily="34" charset="-120"/>
+                <a:latin typeface="Hiragino Sans" pitchFamily="34" charset="0"/>
+                <a:ea typeface="Hiragino Sans" pitchFamily="34" charset="-122"/>
+                <a:cs typeface="Hiragino Sans" pitchFamily="34" charset="-120"/>
               </a:rPr>
               <a:t>04</a:t>
             </a:r>
@@ -20547,9 +20503,9 @@
                 <a:solidFill>
                   <a:srgbClr val="8FA8BD"/>
                 </a:solidFill>
-                <a:latin typeface="Microsoft JhengHei" pitchFamily="34" charset="0"/>
-                <a:ea typeface="Microsoft JhengHei" pitchFamily="34" charset="-122"/>
-                <a:cs typeface="Microsoft JhengHei" pitchFamily="34" charset="-120"/>
+                <a:latin typeface="Hiragino Sans" pitchFamily="34" charset="0"/>
+                <a:ea typeface="Hiragino Sans" pitchFamily="34" charset="-122"/>
+                <a:cs typeface="Hiragino Sans" pitchFamily="34" charset="-120"/>
               </a:rPr>
               <a:t>  /  15</a:t>
             </a:r>
@@ -20586,9 +20542,9 @@
                 <a:solidFill>
                   <a:srgbClr val="F4A72B"/>
                 </a:solidFill>
-                <a:latin typeface="Microsoft JhengHei" pitchFamily="34" charset="0"/>
-                <a:ea typeface="Microsoft JhengHei" pitchFamily="34" charset="-122"/>
-                <a:cs typeface="Microsoft JhengHei" pitchFamily="34" charset="-120"/>
+                <a:latin typeface="Hiragino Sans" pitchFamily="34" charset="0"/>
+                <a:ea typeface="Hiragino Sans" pitchFamily="34" charset="-122"/>
+                <a:cs typeface="Hiragino Sans" pitchFamily="34" charset="-120"/>
               </a:rPr>
               <a:t>方案 A · 現行強化版</a:t>
             </a:r>
@@ -20625,9 +20581,9 @@
                 <a:solidFill>
                   <a:srgbClr val="FFFFFF"/>
                 </a:solidFill>
-                <a:latin typeface="Microsoft JhengHei" pitchFamily="34" charset="0"/>
-                <a:ea typeface="Microsoft JhengHei" pitchFamily="34" charset="-122"/>
-                <a:cs typeface="Microsoft JhengHei" pitchFamily="34" charset="-120"/>
+                <a:latin typeface="Hiragino Sans" pitchFamily="34" charset="0"/>
+                <a:ea typeface="Hiragino Sans" pitchFamily="34" charset="-122"/>
+                <a:cs typeface="Hiragino Sans" pitchFamily="34" charset="-120"/>
               </a:rPr>
               <a:t>維持 Fargate + ALB + Bedrock + SNS</a:t>
             </a:r>
@@ -20686,9 +20642,9 @@
                 <a:solidFill>
                   <a:srgbClr val="FFFFFF"/>
                 </a:solidFill>
-                <a:latin typeface="Microsoft JhengHei" pitchFamily="34" charset="0"/>
-                <a:ea typeface="Microsoft JhengHei" pitchFamily="34" charset="-122"/>
-                <a:cs typeface="Microsoft JhengHei" pitchFamily="34" charset="-120"/>
+                <a:latin typeface="Hiragino Sans" pitchFamily="34" charset="0"/>
+                <a:ea typeface="Hiragino Sans" pitchFamily="34" charset="-122"/>
+                <a:cs typeface="Hiragino Sans" pitchFamily="34" charset="-120"/>
               </a:rPr>
               <a:t>成本 低</a:t>
             </a:r>
@@ -20747,9 +20703,9 @@
                 <a:solidFill>
                   <a:srgbClr val="FFFFFF"/>
                 </a:solidFill>
-                <a:latin typeface="Microsoft JhengHei" pitchFamily="34" charset="0"/>
-                <a:ea typeface="Microsoft JhengHei" pitchFamily="34" charset="-122"/>
-                <a:cs typeface="Microsoft JhengHei" pitchFamily="34" charset="-120"/>
+                <a:latin typeface="Hiragino Sans" pitchFamily="34" charset="0"/>
+                <a:ea typeface="Hiragino Sans" pitchFamily="34" charset="-122"/>
+                <a:cs typeface="Hiragino Sans" pitchFamily="34" charset="-120"/>
               </a:rPr>
               <a:t>黑客松 ★ 最高</a:t>
             </a:r>
@@ -20809,13 +20765,13 @@
               <a:buNone/>
             </a:pPr>
             <a:r>
-              <a:rPr lang="en-US" sz="1200" i="1" dirty="0">
+              <a:rPr lang="en-US" sz="1200" dirty="0">
                 <a:solidFill>
                   <a:srgbClr val="C7D6E4"/>
                 </a:solidFill>
-                <a:latin typeface="Microsoft JhengHei" pitchFamily="34" charset="0"/>
-                <a:ea typeface="Microsoft JhengHei" pitchFamily="34" charset="-122"/>
-                <a:cs typeface="Microsoft JhengHei" pitchFamily="34" charset="-120"/>
+                <a:latin typeface="Hiragino Sans" pitchFamily="34" charset="0"/>
+                <a:ea typeface="Hiragino Sans" pitchFamily="34" charset="-122"/>
+                <a:cs typeface="Hiragino Sans" pitchFamily="34" charset="-120"/>
               </a:rPr>
               <a:t>沿用現行單服務容器，把 demo 臨時做法收斂為正式 ECS Service（desiredCount 維持、健檢失敗自動重拉）。評審計分板上可交付性最高、demo 風險最低的基準線。</a:t>
             </a:r>
@@ -20852,9 +20808,9 @@
                 <a:solidFill>
                   <a:srgbClr val="2A9D8F"/>
                 </a:solidFill>
-                <a:latin typeface="Microsoft JhengHei" pitchFamily="34" charset="0"/>
-                <a:ea typeface="Microsoft JhengHei" pitchFamily="34" charset="-122"/>
-                <a:cs typeface="Microsoft JhengHei" pitchFamily="34" charset="-120"/>
+                <a:latin typeface="Hiragino Sans" pitchFamily="34" charset="0"/>
+                <a:ea typeface="Hiragino Sans" pitchFamily="34" charset="-122"/>
+                <a:cs typeface="Hiragino Sans" pitchFamily="34" charset="-120"/>
               </a:rPr>
               <a:t>服務組成</a:t>
             </a:r>
@@ -20952,9 +20908,9 @@
                 <a:solidFill>
                   <a:srgbClr val="FFFFFF"/>
                 </a:solidFill>
-                <a:latin typeface="Microsoft JhengHei" pitchFamily="34" charset="0"/>
-                <a:ea typeface="Microsoft JhengHei" pitchFamily="34" charset="-122"/>
-                <a:cs typeface="Microsoft JhengHei" pitchFamily="34" charset="-120"/>
+                <a:latin typeface="Hiragino Sans" pitchFamily="34" charset="0"/>
+                <a:ea typeface="Hiragino Sans" pitchFamily="34" charset="-122"/>
+                <a:cs typeface="Hiragino Sans" pitchFamily="34" charset="-120"/>
               </a:rPr>
               <a:t>F</a:t>
             </a:r>
@@ -20994,9 +20950,9 @@
                 <a:solidFill>
                   <a:srgbClr val="FFFFFF"/>
                 </a:solidFill>
-                <a:latin typeface="Microsoft JhengHei" pitchFamily="34" charset="0"/>
-                <a:ea typeface="Microsoft JhengHei" pitchFamily="34" charset="-122"/>
-                <a:cs typeface="Microsoft JhengHei" pitchFamily="34" charset="-120"/>
+                <a:latin typeface="Hiragino Sans" pitchFamily="34" charset="0"/>
+                <a:ea typeface="Hiragino Sans" pitchFamily="34" charset="-122"/>
+                <a:cs typeface="Hiragino Sans" pitchFamily="34" charset="-120"/>
               </a:rPr>
               <a:t>ECS Service</a:t>
             </a:r>
@@ -21014,9 +20970,9 @@
                 <a:solidFill>
                   <a:srgbClr val="FFFFFF"/>
                 </a:solidFill>
-                <a:latin typeface="Microsoft JhengHei" pitchFamily="34" charset="0"/>
-                <a:ea typeface="Microsoft JhengHei" pitchFamily="34" charset="-122"/>
-                <a:cs typeface="Microsoft JhengHei" pitchFamily="34" charset="-120"/>
+                <a:latin typeface="Hiragino Sans" pitchFamily="34" charset="0"/>
+                <a:ea typeface="Hiragino Sans" pitchFamily="34" charset="-122"/>
+                <a:cs typeface="Hiragino Sans" pitchFamily="34" charset="-120"/>
               </a:rPr>
               <a:t>+ Fargate</a:t>
             </a:r>
@@ -21056,9 +21012,9 @@
                 <a:solidFill>
                   <a:srgbClr val="C7D6E4"/>
                 </a:solidFill>
-                <a:latin typeface="Microsoft JhengHei" pitchFamily="34" charset="0"/>
-                <a:ea typeface="Microsoft JhengHei" pitchFamily="34" charset="-122"/>
-                <a:cs typeface="Microsoft JhengHei" pitchFamily="34" charset="-120"/>
+                <a:latin typeface="Hiragino Sans" pitchFamily="34" charset="0"/>
+                <a:ea typeface="Hiragino Sans" pitchFamily="34" charset="-122"/>
+                <a:cs typeface="Hiragino Sans" pitchFamily="34" charset="-120"/>
               </a:rPr>
               <a:t>常駐 · 自動重拉</a:t>
             </a:r>
@@ -21180,9 +21136,9 @@
                 <a:solidFill>
                   <a:srgbClr val="FFFFFF"/>
                 </a:solidFill>
-                <a:latin typeface="Microsoft JhengHei" pitchFamily="34" charset="0"/>
-                <a:ea typeface="Microsoft JhengHei" pitchFamily="34" charset="-122"/>
-                <a:cs typeface="Microsoft JhengHei" pitchFamily="34" charset="-120"/>
+                <a:latin typeface="Hiragino Sans" pitchFamily="34" charset="0"/>
+                <a:ea typeface="Hiragino Sans" pitchFamily="34" charset="-122"/>
+                <a:cs typeface="Hiragino Sans" pitchFamily="34" charset="-120"/>
               </a:rPr>
               <a:t>ALB</a:t>
             </a:r>
@@ -21222,9 +21178,9 @@
                 <a:solidFill>
                   <a:srgbClr val="FFFFFF"/>
                 </a:solidFill>
-                <a:latin typeface="Microsoft JhengHei" pitchFamily="34" charset="0"/>
-                <a:ea typeface="Microsoft JhengHei" pitchFamily="34" charset="-122"/>
-                <a:cs typeface="Microsoft JhengHei" pitchFamily="34" charset="-120"/>
+                <a:latin typeface="Hiragino Sans" pitchFamily="34" charset="0"/>
+                <a:ea typeface="Hiragino Sans" pitchFamily="34" charset="-122"/>
+                <a:cs typeface="Hiragino Sans" pitchFamily="34" charset="-120"/>
               </a:rPr>
               <a:t>ALB</a:t>
             </a:r>
@@ -21264,9 +21220,9 @@
                 <a:solidFill>
                   <a:srgbClr val="C7D6E4"/>
                 </a:solidFill>
-                <a:latin typeface="Microsoft JhengHei" pitchFamily="34" charset="0"/>
-                <a:ea typeface="Microsoft JhengHei" pitchFamily="34" charset="-122"/>
-                <a:cs typeface="Microsoft JhengHei" pitchFamily="34" charset="-120"/>
+                <a:latin typeface="Hiragino Sans" pitchFamily="34" charset="0"/>
+                <a:ea typeface="Hiragino Sans" pitchFamily="34" charset="-122"/>
+                <a:cs typeface="Hiragino Sans" pitchFamily="34" charset="-120"/>
               </a:rPr>
               <a:t>靜態 URL</a:t>
             </a:r>
@@ -21388,9 +21344,9 @@
                 <a:solidFill>
                   <a:srgbClr val="FFFFFF"/>
                 </a:solidFill>
-                <a:latin typeface="Microsoft JhengHei" pitchFamily="34" charset="0"/>
-                <a:ea typeface="Microsoft JhengHei" pitchFamily="34" charset="-122"/>
-                <a:cs typeface="Microsoft JhengHei" pitchFamily="34" charset="-120"/>
+                <a:latin typeface="Hiragino Sans" pitchFamily="34" charset="0"/>
+                <a:ea typeface="Hiragino Sans" pitchFamily="34" charset="-122"/>
+                <a:cs typeface="Hiragino Sans" pitchFamily="34" charset="-120"/>
               </a:rPr>
               <a:t>ECR</a:t>
             </a:r>
@@ -21430,9 +21386,9 @@
                 <a:solidFill>
                   <a:srgbClr val="FFFFFF"/>
                 </a:solidFill>
-                <a:latin typeface="Microsoft JhengHei" pitchFamily="34" charset="0"/>
-                <a:ea typeface="Microsoft JhengHei" pitchFamily="34" charset="-122"/>
-                <a:cs typeface="Microsoft JhengHei" pitchFamily="34" charset="-120"/>
+                <a:latin typeface="Hiragino Sans" pitchFamily="34" charset="0"/>
+                <a:ea typeface="Hiragino Sans" pitchFamily="34" charset="-122"/>
+                <a:cs typeface="Hiragino Sans" pitchFamily="34" charset="-120"/>
               </a:rPr>
               <a:t>ECR</a:t>
             </a:r>
@@ -21472,9 +21428,9 @@
                 <a:solidFill>
                   <a:srgbClr val="C7D6E4"/>
                 </a:solidFill>
-                <a:latin typeface="Microsoft JhengHei" pitchFamily="34" charset="0"/>
-                <a:ea typeface="Microsoft JhengHei" pitchFamily="34" charset="-122"/>
-                <a:cs typeface="Microsoft JhengHei" pitchFamily="34" charset="-120"/>
+                <a:latin typeface="Hiragino Sans" pitchFamily="34" charset="0"/>
+                <a:ea typeface="Hiragino Sans" pitchFamily="34" charset="-122"/>
+                <a:cs typeface="Hiragino Sans" pitchFamily="34" charset="-120"/>
               </a:rPr>
               <a:t>arm64 映像</a:t>
             </a:r>
@@ -21596,9 +21552,9 @@
                 <a:solidFill>
                   <a:srgbClr val="FFFFFF"/>
                 </a:solidFill>
-                <a:latin typeface="Microsoft JhengHei" pitchFamily="34" charset="0"/>
-                <a:ea typeface="Microsoft JhengHei" pitchFamily="34" charset="-122"/>
-                <a:cs typeface="Microsoft JhengHei" pitchFamily="34" charset="-120"/>
+                <a:latin typeface="Hiragino Sans" pitchFamily="34" charset="0"/>
+                <a:ea typeface="Hiragino Sans" pitchFamily="34" charset="-122"/>
+                <a:cs typeface="Hiragino Sans" pitchFamily="34" charset="-120"/>
               </a:rPr>
               <a:t>AI</a:t>
             </a:r>
@@ -21638,9 +21594,9 @@
                 <a:solidFill>
                   <a:srgbClr val="FFFFFF"/>
                 </a:solidFill>
-                <a:latin typeface="Microsoft JhengHei" pitchFamily="34" charset="0"/>
-                <a:ea typeface="Microsoft JhengHei" pitchFamily="34" charset="-122"/>
-                <a:cs typeface="Microsoft JhengHei" pitchFamily="34" charset="-120"/>
+                <a:latin typeface="Hiragino Sans" pitchFamily="34" charset="0"/>
+                <a:ea typeface="Hiragino Sans" pitchFamily="34" charset="-122"/>
+                <a:cs typeface="Hiragino Sans" pitchFamily="34" charset="-120"/>
               </a:rPr>
               <a:t>Bedrock</a:t>
             </a:r>
@@ -21680,9 +21636,9 @@
                 <a:solidFill>
                   <a:srgbClr val="C7D6E4"/>
                 </a:solidFill>
-                <a:latin typeface="Microsoft JhengHei" pitchFamily="34" charset="0"/>
-                <a:ea typeface="Microsoft JhengHei" pitchFamily="34" charset="-122"/>
-                <a:cs typeface="Microsoft JhengHei" pitchFamily="34" charset="-120"/>
+                <a:latin typeface="Hiragino Sans" pitchFamily="34" charset="0"/>
+                <a:ea typeface="Hiragino Sans" pitchFamily="34" charset="-122"/>
+                <a:cs typeface="Hiragino Sans" pitchFamily="34" charset="-120"/>
               </a:rPr>
               <a:t>Claude Haiku</a:t>
             </a:r>
@@ -21804,9 +21760,9 @@
                 <a:solidFill>
                   <a:srgbClr val="FFFFFF"/>
                 </a:solidFill>
-                <a:latin typeface="Microsoft JhengHei" pitchFamily="34" charset="0"/>
-                <a:ea typeface="Microsoft JhengHei" pitchFamily="34" charset="-122"/>
-                <a:cs typeface="Microsoft JhengHei" pitchFamily="34" charset="-120"/>
+                <a:latin typeface="Hiragino Sans" pitchFamily="34" charset="0"/>
+                <a:ea typeface="Hiragino Sans" pitchFamily="34" charset="-122"/>
+                <a:cs typeface="Hiragino Sans" pitchFamily="34" charset="-120"/>
               </a:rPr>
               <a:t>SNS</a:t>
             </a:r>
@@ -21846,9 +21802,9 @@
                 <a:solidFill>
                   <a:srgbClr val="FFFFFF"/>
                 </a:solidFill>
-                <a:latin typeface="Microsoft JhengHei" pitchFamily="34" charset="0"/>
-                <a:ea typeface="Microsoft JhengHei" pitchFamily="34" charset="-122"/>
-                <a:cs typeface="Microsoft JhengHei" pitchFamily="34" charset="-120"/>
+                <a:latin typeface="Hiragino Sans" pitchFamily="34" charset="0"/>
+                <a:ea typeface="Hiragino Sans" pitchFamily="34" charset="-122"/>
+                <a:cs typeface="Hiragino Sans" pitchFamily="34" charset="-120"/>
               </a:rPr>
               <a:t>SNS</a:t>
             </a:r>
@@ -21888,9 +21844,9 @@
                 <a:solidFill>
                   <a:srgbClr val="C7D6E4"/>
                 </a:solidFill>
-                <a:latin typeface="Microsoft JhengHei" pitchFamily="34" charset="0"/>
-                <a:ea typeface="Microsoft JhengHei" pitchFamily="34" charset="-122"/>
-                <a:cs typeface="Microsoft JhengHei" pitchFamily="34" charset="-120"/>
+                <a:latin typeface="Hiragino Sans" pitchFamily="34" charset="0"/>
+                <a:ea typeface="Hiragino Sans" pitchFamily="34" charset="-122"/>
+                <a:cs typeface="Hiragino Sans" pitchFamily="34" charset="-120"/>
               </a:rPr>
               <a:t>告警</a:t>
             </a:r>
@@ -22012,9 +21968,9 @@
                 <a:solidFill>
                   <a:srgbClr val="FFFFFF"/>
                 </a:solidFill>
-                <a:latin typeface="Microsoft JhengHei" pitchFamily="34" charset="0"/>
-                <a:ea typeface="Microsoft JhengHei" pitchFamily="34" charset="-122"/>
-                <a:cs typeface="Microsoft JhengHei" pitchFamily="34" charset="-120"/>
+                <a:latin typeface="Hiragino Sans" pitchFamily="34" charset="0"/>
+                <a:ea typeface="Hiragino Sans" pitchFamily="34" charset="-122"/>
+                <a:cs typeface="Hiragino Sans" pitchFamily="34" charset="-120"/>
               </a:rPr>
               <a:t>CW</a:t>
             </a:r>
@@ -22054,9 +22010,9 @@
                 <a:solidFill>
                   <a:srgbClr val="FFFFFF"/>
                 </a:solidFill>
-                <a:latin typeface="Microsoft JhengHei" pitchFamily="34" charset="0"/>
-                <a:ea typeface="Microsoft JhengHei" pitchFamily="34" charset="-122"/>
-                <a:cs typeface="Microsoft JhengHei" pitchFamily="34" charset="-120"/>
+                <a:latin typeface="Hiragino Sans" pitchFamily="34" charset="0"/>
+                <a:ea typeface="Hiragino Sans" pitchFamily="34" charset="-122"/>
+                <a:cs typeface="Hiragino Sans" pitchFamily="34" charset="-120"/>
               </a:rPr>
               <a:t>CloudWatch</a:t>
             </a:r>
@@ -22074,9 +22030,9 @@
                 <a:solidFill>
                   <a:srgbClr val="FFFFFF"/>
                 </a:solidFill>
-                <a:latin typeface="Microsoft JhengHei" pitchFamily="34" charset="0"/>
-                <a:ea typeface="Microsoft JhengHei" pitchFamily="34" charset="-122"/>
-                <a:cs typeface="Microsoft JhengHei" pitchFamily="34" charset="-120"/>
+                <a:latin typeface="Hiragino Sans" pitchFamily="34" charset="0"/>
+                <a:ea typeface="Hiragino Sans" pitchFamily="34" charset="-122"/>
+                <a:cs typeface="Hiragino Sans" pitchFamily="34" charset="-120"/>
               </a:rPr>
               <a:t>Alarms</a:t>
             </a:r>
@@ -22116,9 +22072,9 @@
                 <a:solidFill>
                   <a:srgbClr val="C7D6E4"/>
                 </a:solidFill>
-                <a:latin typeface="Microsoft JhengHei" pitchFamily="34" charset="0"/>
-                <a:ea typeface="Microsoft JhengHei" pitchFamily="34" charset="-122"/>
-                <a:cs typeface="Microsoft JhengHei" pitchFamily="34" charset="-120"/>
+                <a:latin typeface="Hiragino Sans" pitchFamily="34" charset="0"/>
+                <a:ea typeface="Hiragino Sans" pitchFamily="34" charset="-122"/>
+                <a:cs typeface="Hiragino Sans" pitchFamily="34" charset="-120"/>
               </a:rPr>
               <a:t>日誌 + 健康</a:t>
             </a:r>
@@ -22233,9 +22189,9 @@
                 <a:solidFill>
                   <a:srgbClr val="FFFFFF"/>
                 </a:solidFill>
-                <a:latin typeface="Microsoft JhengHei" pitchFamily="34" charset="0"/>
-                <a:ea typeface="Microsoft JhengHei" pitchFamily="34" charset="-122"/>
-                <a:cs typeface="Microsoft JhengHei" pitchFamily="34" charset="-120"/>
+                <a:latin typeface="Hiragino Sans" pitchFamily="34" charset="0"/>
+                <a:ea typeface="Hiragino Sans" pitchFamily="34" charset="-122"/>
+                <a:cs typeface="Hiragino Sans" pitchFamily="34" charset="-120"/>
               </a:rPr>
               <a:t>● 優勢</a:t>
             </a:r>
@@ -22279,9 +22235,9 @@
                 <a:solidFill>
                   <a:srgbClr val="C7D6E4"/>
                 </a:solidFill>
-                <a:latin typeface="Microsoft JhengHei" pitchFamily="34" charset="0"/>
-                <a:ea typeface="Microsoft JhengHei" pitchFamily="34" charset="-122"/>
-                <a:cs typeface="Microsoft JhengHei" pitchFamily="34" charset="-120"/>
+                <a:latin typeface="Hiragino Sans" pitchFamily="34" charset="0"/>
+                <a:ea typeface="Hiragino Sans" pitchFamily="34" charset="-122"/>
+                <a:cs typeface="Hiragino Sans" pitchFamily="34" charset="-120"/>
               </a:rPr>
               <a:t>與已上線架構一致，Day3 重跑成本最低、最可靠</a:t>
             </a:r>
@@ -22303,9 +22259,9 @@
                 <a:solidFill>
                   <a:srgbClr val="C7D6E4"/>
                 </a:solidFill>
-                <a:latin typeface="Microsoft JhengHei" pitchFamily="34" charset="0"/>
-                <a:ea typeface="Microsoft JhengHei" pitchFamily="34" charset="-122"/>
-                <a:cs typeface="Microsoft JhengHei" pitchFamily="34" charset="-120"/>
+                <a:latin typeface="Hiragino Sans" pitchFamily="34" charset="0"/>
+                <a:ea typeface="Hiragino Sans" pitchFamily="34" charset="-122"/>
+                <a:cs typeface="Hiragino Sans" pitchFamily="34" charset="-120"/>
               </a:rPr>
               <a:t>單 codebase 好維護、好彩排</a:t>
             </a:r>
@@ -22327,9 +22283,9 @@
                 <a:solidFill>
                   <a:srgbClr val="C7D6E4"/>
                 </a:solidFill>
-                <a:latin typeface="Microsoft JhengHei" pitchFamily="34" charset="0"/>
-                <a:ea typeface="Microsoft JhengHei" pitchFamily="34" charset="-122"/>
-                <a:cs typeface="Microsoft JhengHei" pitchFamily="34" charset="-120"/>
+                <a:latin typeface="Hiragino Sans" pitchFamily="34" charset="0"/>
+                <a:ea typeface="Hiragino Sans" pitchFamily="34" charset="-122"/>
+                <a:cs typeface="Hiragino Sans" pitchFamily="34" charset="-120"/>
               </a:rPr>
               <a:t>ALB 靜態 URL 解決臨時 IP 問題</a:t>
             </a:r>
@@ -22351,9 +22307,9 @@
                 <a:solidFill>
                   <a:srgbClr val="C7D6E4"/>
                 </a:solidFill>
-                <a:latin typeface="Microsoft JhengHei" pitchFamily="34" charset="0"/>
-                <a:ea typeface="Microsoft JhengHei" pitchFamily="34" charset="-122"/>
-                <a:cs typeface="Microsoft JhengHei" pitchFamily="34" charset="-120"/>
+                <a:latin typeface="Hiragino Sans" pitchFamily="34" charset="0"/>
+                <a:ea typeface="Hiragino Sans" pitchFamily="34" charset="-122"/>
+                <a:cs typeface="Hiragino Sans" pitchFamily="34" charset="-120"/>
               </a:rPr>
               <a:t>Bedrock / SNS 已實測，Email + 門檻需求即刻滿足</a:t>
             </a:r>
@@ -22468,9 +22424,9 @@
                 <a:solidFill>
                   <a:srgbClr val="FFFFFF"/>
                 </a:solidFill>
-                <a:latin typeface="Microsoft JhengHei" pitchFamily="34" charset="0"/>
-                <a:ea typeface="Microsoft JhengHei" pitchFamily="34" charset="-122"/>
-                <a:cs typeface="Microsoft JhengHei" pitchFamily="34" charset="-120"/>
+                <a:latin typeface="Hiragino Sans" pitchFamily="34" charset="0"/>
+                <a:ea typeface="Hiragino Sans" pitchFamily="34" charset="-122"/>
+                <a:cs typeface="Hiragino Sans" pitchFamily="34" charset="-120"/>
               </a:rPr>
               <a:t>▲ 取捨 / 風險</a:t>
             </a:r>
@@ -22514,9 +22470,9 @@
                 <a:solidFill>
                   <a:srgbClr val="C7D6E4"/>
                 </a:solidFill>
-                <a:latin typeface="Microsoft JhengHei" pitchFamily="34" charset="0"/>
-                <a:ea typeface="Microsoft JhengHei" pitchFamily="34" charset="-122"/>
-                <a:cs typeface="Microsoft JhengHei" pitchFamily="34" charset="-120"/>
+                <a:latin typeface="Hiragino Sans" pitchFamily="34" charset="0"/>
+                <a:ea typeface="Hiragino Sans" pitchFamily="34" charset="-122"/>
+                <a:cs typeface="Hiragino Sans" pitchFamily="34" charset="-120"/>
               </a:rPr>
               <a:t>非資料驅動，更新資料要重 build / 重部署</a:t>
             </a:r>
@@ -22538,9 +22494,9 @@
                 <a:solidFill>
                   <a:srgbClr val="C7D6E4"/>
                 </a:solidFill>
-                <a:latin typeface="Microsoft JhengHei" pitchFamily="34" charset="0"/>
-                <a:ea typeface="Microsoft JhengHei" pitchFamily="34" charset="-122"/>
-                <a:cs typeface="Microsoft JhengHei" pitchFamily="34" charset="-120"/>
+                <a:latin typeface="Hiragino Sans" pitchFamily="34" charset="0"/>
+                <a:ea typeface="Hiragino Sans" pitchFamily="34" charset="-122"/>
+                <a:cs typeface="Hiragino Sans" pitchFamily="34" charset="-120"/>
               </a:rPr>
               <a:t>無 BI 自助分析層</a:t>
             </a:r>
@@ -22562,9 +22518,9 @@
                 <a:solidFill>
                   <a:srgbClr val="C7D6E4"/>
                 </a:solidFill>
-                <a:latin typeface="Microsoft JhengHei" pitchFamily="34" charset="0"/>
-                <a:ea typeface="Microsoft JhengHei" pitchFamily="34" charset="-122"/>
-                <a:cs typeface="Microsoft JhengHei" pitchFamily="34" charset="-120"/>
+                <a:latin typeface="Hiragino Sans" pitchFamily="34" charset="0"/>
+                <a:ea typeface="Hiragino Sans" pitchFamily="34" charset="-122"/>
+                <a:cs typeface="Hiragino Sans" pitchFamily="34" charset="-120"/>
               </a:rPr>
               <a:t>VPC / ALB / 雙 IAM 設定較多，臨時憑證到期需重跑</a:t>
             </a:r>
@@ -22586,9 +22542,9 @@
                 <a:solidFill>
                   <a:srgbClr val="C7D6E4"/>
                 </a:solidFill>
-                <a:latin typeface="Microsoft JhengHei" pitchFamily="34" charset="0"/>
-                <a:ea typeface="Microsoft JhengHei" pitchFamily="34" charset="-122"/>
-                <a:cs typeface="Microsoft JhengHei" pitchFamily="34" charset="-120"/>
+                <a:latin typeface="Hiragino Sans" pitchFamily="34" charset="0"/>
+                <a:ea typeface="Hiragino Sans" pitchFamily="34" charset="-122"/>
+                <a:cs typeface="Hiragino Sans" pitchFamily="34" charset="-120"/>
               </a:rPr>
               <a:t>架構創新度普通，技術 / 創意分不突出</a:t>
             </a:r>
@@ -22657,9 +22613,9 @@
                 <a:solidFill>
                   <a:srgbClr val="F4A72B"/>
                 </a:solidFill>
-                <a:latin typeface="Microsoft JhengHei" pitchFamily="34" charset="0"/>
-                <a:ea typeface="Microsoft JhengHei" pitchFamily="34" charset="-122"/>
-                <a:cs typeface="Microsoft JhengHei" pitchFamily="34" charset="-120"/>
+                <a:latin typeface="Hiragino Sans" pitchFamily="34" charset="0"/>
+                <a:ea typeface="Hiragino Sans" pitchFamily="34" charset="-122"/>
+                <a:cs typeface="Hiragino Sans" pitchFamily="34" charset="-120"/>
               </a:rPr>
               <a:t>◆ 何時選　</a:t>
             </a:r>
@@ -22674,9 +22630,9 @@
                 <a:solidFill>
                   <a:srgbClr val="FFFFFF"/>
                 </a:solidFill>
-                <a:latin typeface="Microsoft JhengHei" pitchFamily="34" charset="0"/>
-                <a:ea typeface="Microsoft JhengHei" pitchFamily="34" charset="-122"/>
-                <a:cs typeface="Microsoft JhengHei" pitchFamily="34" charset="-120"/>
+                <a:latin typeface="Hiragino Sans" pitchFamily="34" charset="0"/>
+                <a:ea typeface="Hiragino Sans" pitchFamily="34" charset="-122"/>
+                <a:cs typeface="Hiragino Sans" pitchFamily="34" charset="-120"/>
               </a:rPr>
               <a:t>首要目標是穩穩 demo、時間有限、要把工程師的 Email／告警／可調門檻需求確定交付時的預設選擇。</a:t>
             </a:r>
@@ -22898,9 +22854,9 @@
                 <a:solidFill>
                   <a:srgbClr val="FFFFFF"/>
                 </a:solidFill>
-                <a:latin typeface="Microsoft JhengHei" pitchFamily="34" charset="0"/>
-                <a:ea typeface="Microsoft JhengHei" pitchFamily="34" charset="-122"/>
-                <a:cs typeface="Microsoft JhengHei" pitchFamily="34" charset="-120"/>
+                <a:latin typeface="Hiragino Sans" pitchFamily="34" charset="0"/>
+                <a:ea typeface="Hiragino Sans" pitchFamily="34" charset="-122"/>
+                <a:cs typeface="Hiragino Sans" pitchFamily="34" charset="-120"/>
               </a:rPr>
               <a:t>05</a:t>
             </a:r>
@@ -22912,9 +22868,9 @@
                 <a:solidFill>
                   <a:srgbClr val="8FA8BD"/>
                 </a:solidFill>
-                <a:latin typeface="Microsoft JhengHei" pitchFamily="34" charset="0"/>
-                <a:ea typeface="Microsoft JhengHei" pitchFamily="34" charset="-122"/>
-                <a:cs typeface="Microsoft JhengHei" pitchFamily="34" charset="-120"/>
+                <a:latin typeface="Hiragino Sans" pitchFamily="34" charset="0"/>
+                <a:ea typeface="Hiragino Sans" pitchFamily="34" charset="-122"/>
+                <a:cs typeface="Hiragino Sans" pitchFamily="34" charset="-120"/>
               </a:rPr>
               <a:t>  /  15</a:t>
             </a:r>
@@ -22951,9 +22907,9 @@
                 <a:solidFill>
                   <a:srgbClr val="F4A72B"/>
                 </a:solidFill>
-                <a:latin typeface="Microsoft JhengHei" pitchFamily="34" charset="0"/>
-                <a:ea typeface="Microsoft JhengHei" pitchFamily="34" charset="-122"/>
-                <a:cs typeface="Microsoft JhengHei" pitchFamily="34" charset="-120"/>
+                <a:latin typeface="Hiragino Sans" pitchFamily="34" charset="0"/>
+                <a:ea typeface="Hiragino Sans" pitchFamily="34" charset="-122"/>
+                <a:cs typeface="Hiragino Sans" pitchFamily="34" charset="-120"/>
               </a:rPr>
               <a:t>方案 B · 全 SERVERLESS</a:t>
             </a:r>
@@ -22986,17 +22942,17 @@
               <a:buNone/>
             </a:pPr>
             <a:r>
-              <a:rPr lang="en-US" sz="3355" b="1" dirty="0">
+              <a:rPr lang="en-US" sz="3066" b="1" dirty="0">
                 <a:solidFill>
                   <a:srgbClr val="FFFFFF"/>
                 </a:solidFill>
-                <a:latin typeface="Microsoft JhengHei" pitchFamily="34" charset="0"/>
-                <a:ea typeface="Microsoft JhengHei" pitchFamily="34" charset="-122"/>
-                <a:cs typeface="Microsoft JhengHei" pitchFamily="34" charset="-120"/>
+                <a:latin typeface="Hiragino Sans" pitchFamily="34" charset="0"/>
+                <a:ea typeface="Hiragino Sans" pitchFamily="34" charset="-122"/>
+                <a:cs typeface="Hiragino Sans" pitchFamily="34" charset="-120"/>
               </a:rPr>
               <a:t>API Gateway + Lambda + DynamoDB（資料驅動）</a:t>
             </a:r>
-            <a:endParaRPr lang="en-US" sz="3355" dirty="0"/>
+            <a:endParaRPr lang="en-US" sz="3066" dirty="0"/>
           </a:p>
         </p:txBody>
       </p:sp>
@@ -23051,9 +23007,9 @@
                 <a:solidFill>
                   <a:srgbClr val="FFFFFF"/>
                 </a:solidFill>
-                <a:latin typeface="Microsoft JhengHei" pitchFamily="34" charset="0"/>
-                <a:ea typeface="Microsoft JhengHei" pitchFamily="34" charset="-122"/>
-                <a:cs typeface="Microsoft JhengHei" pitchFamily="34" charset="-120"/>
+                <a:latin typeface="Hiragino Sans" pitchFamily="34" charset="0"/>
+                <a:ea typeface="Hiragino Sans" pitchFamily="34" charset="-122"/>
+                <a:cs typeface="Hiragino Sans" pitchFamily="34" charset="-120"/>
               </a:rPr>
               <a:t>成本 極低</a:t>
             </a:r>
@@ -23112,9 +23068,9 @@
                 <a:solidFill>
                   <a:srgbClr val="18293B"/>
                 </a:solidFill>
-                <a:latin typeface="Microsoft JhengHei" pitchFamily="34" charset="0"/>
-                <a:ea typeface="Microsoft JhengHei" pitchFamily="34" charset="-122"/>
-                <a:cs typeface="Microsoft JhengHei" pitchFamily="34" charset="-120"/>
+                <a:latin typeface="Hiragino Sans" pitchFamily="34" charset="0"/>
+                <a:ea typeface="Hiragino Sans" pitchFamily="34" charset="-122"/>
+                <a:cs typeface="Hiragino Sans" pitchFamily="34" charset="-120"/>
               </a:rPr>
               <a:t>黑客松 中</a:t>
             </a:r>
@@ -23174,13 +23130,13 @@
               <a:buNone/>
             </a:pPr>
             <a:r>
-              <a:rPr lang="en-US" sz="1200" i="1" dirty="0">
+              <a:rPr lang="en-US" sz="1200" dirty="0">
                 <a:solidFill>
                   <a:srgbClr val="C7D6E4"/>
                 </a:solidFill>
-                <a:latin typeface="Microsoft JhengHei" pitchFamily="34" charset="0"/>
-                <a:ea typeface="Microsoft JhengHei" pitchFamily="34" charset="-122"/>
-                <a:cs typeface="Microsoft JhengHei" pitchFamily="34" charset="-120"/>
+                <a:latin typeface="Hiragino Sans" pitchFamily="34" charset="0"/>
+                <a:ea typeface="Hiragino Sans" pitchFamily="34" charset="-122"/>
+                <a:cs typeface="Hiragino Sans" pitchFamily="34" charset="-120"/>
               </a:rPr>
               <a:t>把單服務拆成 API Gateway + Lambda 後端、S3 托管前端與原始報表、DynamoDB 存 metrics 與門檻、EventBridge 排程重算。零常駐、按呼叫計費、天生資料驅動。</a:t>
             </a:r>
@@ -23217,9 +23173,9 @@
                 <a:solidFill>
                   <a:srgbClr val="2A9D8F"/>
                 </a:solidFill>
-                <a:latin typeface="Microsoft JhengHei" pitchFamily="34" charset="0"/>
-                <a:ea typeface="Microsoft JhengHei" pitchFamily="34" charset="-122"/>
-                <a:cs typeface="Microsoft JhengHei" pitchFamily="34" charset="-120"/>
+                <a:latin typeface="Hiragino Sans" pitchFamily="34" charset="0"/>
+                <a:ea typeface="Hiragino Sans" pitchFamily="34" charset="-122"/>
+                <a:cs typeface="Hiragino Sans" pitchFamily="34" charset="-120"/>
               </a:rPr>
               <a:t>服務組成</a:t>
             </a:r>
@@ -23317,9 +23273,9 @@
                 <a:solidFill>
                   <a:srgbClr val="FFFFFF"/>
                 </a:solidFill>
-                <a:latin typeface="Microsoft JhengHei" pitchFamily="34" charset="0"/>
-                <a:ea typeface="Microsoft JhengHei" pitchFamily="34" charset="-122"/>
-                <a:cs typeface="Microsoft JhengHei" pitchFamily="34" charset="-120"/>
+                <a:latin typeface="Hiragino Sans" pitchFamily="34" charset="0"/>
+                <a:ea typeface="Hiragino Sans" pitchFamily="34" charset="-122"/>
+                <a:cs typeface="Hiragino Sans" pitchFamily="34" charset="-120"/>
               </a:rPr>
               <a:t>API</a:t>
             </a:r>
@@ -23359,9 +23315,9 @@
                 <a:solidFill>
                   <a:srgbClr val="FFFFFF"/>
                 </a:solidFill>
-                <a:latin typeface="Microsoft JhengHei" pitchFamily="34" charset="0"/>
-                <a:ea typeface="Microsoft JhengHei" pitchFamily="34" charset="-122"/>
-                <a:cs typeface="Microsoft JhengHei" pitchFamily="34" charset="-120"/>
+                <a:latin typeface="Hiragino Sans" pitchFamily="34" charset="0"/>
+                <a:ea typeface="Hiragino Sans" pitchFamily="34" charset="-122"/>
+                <a:cs typeface="Hiragino Sans" pitchFamily="34" charset="-120"/>
               </a:rPr>
               <a:t>API</a:t>
             </a:r>
@@ -23379,9 +23335,9 @@
                 <a:solidFill>
                   <a:srgbClr val="FFFFFF"/>
                 </a:solidFill>
-                <a:latin typeface="Microsoft JhengHei" pitchFamily="34" charset="0"/>
-                <a:ea typeface="Microsoft JhengHei" pitchFamily="34" charset="-122"/>
-                <a:cs typeface="Microsoft JhengHei" pitchFamily="34" charset="-120"/>
+                <a:latin typeface="Hiragino Sans" pitchFamily="34" charset="0"/>
+                <a:ea typeface="Hiragino Sans" pitchFamily="34" charset="-122"/>
+                <a:cs typeface="Hiragino Sans" pitchFamily="34" charset="-120"/>
               </a:rPr>
               <a:t>Gateway</a:t>
             </a:r>
@@ -23421,9 +23377,9 @@
                 <a:solidFill>
                   <a:srgbClr val="C7D6E4"/>
                 </a:solidFill>
-                <a:latin typeface="Microsoft JhengHei" pitchFamily="34" charset="0"/>
-                <a:ea typeface="Microsoft JhengHei" pitchFamily="34" charset="-122"/>
-                <a:cs typeface="Microsoft JhengHei" pitchFamily="34" charset="-120"/>
+                <a:latin typeface="Hiragino Sans" pitchFamily="34" charset="0"/>
+                <a:ea typeface="Hiragino Sans" pitchFamily="34" charset="-122"/>
+                <a:cs typeface="Hiragino Sans" pitchFamily="34" charset="-120"/>
               </a:rPr>
               <a:t>HTTP API 入口</a:t>
             </a:r>
@@ -23545,9 +23501,9 @@
                 <a:solidFill>
                   <a:srgbClr val="FFFFFF"/>
                 </a:solidFill>
-                <a:latin typeface="Microsoft JhengHei" pitchFamily="34" charset="0"/>
-                <a:ea typeface="Microsoft JhengHei" pitchFamily="34" charset="-122"/>
-                <a:cs typeface="Microsoft JhengHei" pitchFamily="34" charset="-120"/>
+                <a:latin typeface="Hiragino Sans" pitchFamily="34" charset="0"/>
+                <a:ea typeface="Hiragino Sans" pitchFamily="34" charset="-122"/>
+                <a:cs typeface="Hiragino Sans" pitchFamily="34" charset="-120"/>
               </a:rPr>
               <a:t>λ</a:t>
             </a:r>
@@ -23587,9 +23543,9 @@
                 <a:solidFill>
                   <a:srgbClr val="FFFFFF"/>
                 </a:solidFill>
-                <a:latin typeface="Microsoft JhengHei" pitchFamily="34" charset="0"/>
-                <a:ea typeface="Microsoft JhengHei" pitchFamily="34" charset="-122"/>
-                <a:cs typeface="Microsoft JhengHei" pitchFamily="34" charset="-120"/>
+                <a:latin typeface="Hiragino Sans" pitchFamily="34" charset="0"/>
+                <a:ea typeface="Hiragino Sans" pitchFamily="34" charset="-122"/>
+                <a:cs typeface="Hiragino Sans" pitchFamily="34" charset="-120"/>
               </a:rPr>
               <a:t>Lambda</a:t>
             </a:r>
@@ -23607,9 +23563,9 @@
                 <a:solidFill>
                   <a:srgbClr val="FFFFFF"/>
                 </a:solidFill>
-                <a:latin typeface="Microsoft JhengHei" pitchFamily="34" charset="0"/>
-                <a:ea typeface="Microsoft JhengHei" pitchFamily="34" charset="-122"/>
-                <a:cs typeface="Microsoft JhengHei" pitchFamily="34" charset="-120"/>
+                <a:latin typeface="Hiragino Sans" pitchFamily="34" charset="0"/>
+                <a:ea typeface="Hiragino Sans" pitchFamily="34" charset="-122"/>
+                <a:cs typeface="Hiragino Sans" pitchFamily="34" charset="-120"/>
               </a:rPr>
               <a:t>Java 21</a:t>
             </a:r>
@@ -23649,9 +23605,9 @@
                 <a:solidFill>
                   <a:srgbClr val="C7D6E4"/>
                 </a:solidFill>
-                <a:latin typeface="Microsoft JhengHei" pitchFamily="34" charset="0"/>
-                <a:ea typeface="Microsoft JhengHei" pitchFamily="34" charset="-122"/>
-                <a:cs typeface="Microsoft JhengHei" pitchFamily="34" charset="-120"/>
+                <a:latin typeface="Hiragino Sans" pitchFamily="34" charset="0"/>
+                <a:ea typeface="Hiragino Sans" pitchFamily="34" charset="-122"/>
+                <a:cs typeface="Hiragino Sans" pitchFamily="34" charset="-120"/>
               </a:rPr>
               <a:t>無狀態運算</a:t>
             </a:r>
@@ -23773,9 +23729,9 @@
                 <a:solidFill>
                   <a:srgbClr val="FFFFFF"/>
                 </a:solidFill>
-                <a:latin typeface="Microsoft JhengHei" pitchFamily="34" charset="0"/>
-                <a:ea typeface="Microsoft JhengHei" pitchFamily="34" charset="-122"/>
-                <a:cs typeface="Microsoft JhengHei" pitchFamily="34" charset="-120"/>
+                <a:latin typeface="Hiragino Sans" pitchFamily="34" charset="0"/>
+                <a:ea typeface="Hiragino Sans" pitchFamily="34" charset="-122"/>
+                <a:cs typeface="Hiragino Sans" pitchFamily="34" charset="-120"/>
               </a:rPr>
               <a:t>S3</a:t>
             </a:r>
@@ -23815,9 +23771,9 @@
                 <a:solidFill>
                   <a:srgbClr val="FFFFFF"/>
                 </a:solidFill>
-                <a:latin typeface="Microsoft JhengHei" pitchFamily="34" charset="0"/>
-                <a:ea typeface="Microsoft JhengHei" pitchFamily="34" charset="-122"/>
-                <a:cs typeface="Microsoft JhengHei" pitchFamily="34" charset="-120"/>
+                <a:latin typeface="Hiragino Sans" pitchFamily="34" charset="0"/>
+                <a:ea typeface="Hiragino Sans" pitchFamily="34" charset="-122"/>
+                <a:cs typeface="Hiragino Sans" pitchFamily="34" charset="-120"/>
               </a:rPr>
               <a:t>S3</a:t>
             </a:r>
@@ -23857,9 +23813,9 @@
                 <a:solidFill>
                   <a:srgbClr val="C7D6E4"/>
                 </a:solidFill>
-                <a:latin typeface="Microsoft JhengHei" pitchFamily="34" charset="0"/>
-                <a:ea typeface="Microsoft JhengHei" pitchFamily="34" charset="-122"/>
-                <a:cs typeface="Microsoft JhengHei" pitchFamily="34" charset="-120"/>
+                <a:latin typeface="Hiragino Sans" pitchFamily="34" charset="0"/>
+                <a:ea typeface="Hiragino Sans" pitchFamily="34" charset="-122"/>
+                <a:cs typeface="Hiragino Sans" pitchFamily="34" charset="-120"/>
               </a:rPr>
               <a:t>靜態站 + raw 報表</a:t>
             </a:r>
@@ -23981,9 +23937,9 @@
                 <a:solidFill>
                   <a:srgbClr val="FFFFFF"/>
                 </a:solidFill>
-                <a:latin typeface="Microsoft JhengHei" pitchFamily="34" charset="0"/>
-                <a:ea typeface="Microsoft JhengHei" pitchFamily="34" charset="-122"/>
-                <a:cs typeface="Microsoft JhengHei" pitchFamily="34" charset="-120"/>
+                <a:latin typeface="Hiragino Sans" pitchFamily="34" charset="0"/>
+                <a:ea typeface="Hiragino Sans" pitchFamily="34" charset="-122"/>
+                <a:cs typeface="Hiragino Sans" pitchFamily="34" charset="-120"/>
               </a:rPr>
               <a:t>DB</a:t>
             </a:r>
@@ -24023,9 +23979,9 @@
                 <a:solidFill>
                   <a:srgbClr val="FFFFFF"/>
                 </a:solidFill>
-                <a:latin typeface="Microsoft JhengHei" pitchFamily="34" charset="0"/>
-                <a:ea typeface="Microsoft JhengHei" pitchFamily="34" charset="-122"/>
-                <a:cs typeface="Microsoft JhengHei" pitchFamily="34" charset="-120"/>
+                <a:latin typeface="Hiragino Sans" pitchFamily="34" charset="0"/>
+                <a:ea typeface="Hiragino Sans" pitchFamily="34" charset="-122"/>
+                <a:cs typeface="Hiragino Sans" pitchFamily="34" charset="-120"/>
               </a:rPr>
               <a:t>DynamoDB</a:t>
             </a:r>
@@ -24065,9 +24021,9 @@
                 <a:solidFill>
                   <a:srgbClr val="C7D6E4"/>
                 </a:solidFill>
-                <a:latin typeface="Microsoft JhengHei" pitchFamily="34" charset="0"/>
-                <a:ea typeface="Microsoft JhengHei" pitchFamily="34" charset="-122"/>
-                <a:cs typeface="Microsoft JhengHei" pitchFamily="34" charset="-120"/>
+                <a:latin typeface="Hiragino Sans" pitchFamily="34" charset="0"/>
+                <a:ea typeface="Hiragino Sans" pitchFamily="34" charset="-122"/>
+                <a:cs typeface="Hiragino Sans" pitchFamily="34" charset="-120"/>
               </a:rPr>
               <a:t>metrics / 門檻</a:t>
             </a:r>
@@ -24189,9 +24145,9 @@
                 <a:solidFill>
                   <a:srgbClr val="FFFFFF"/>
                 </a:solidFill>
-                <a:latin typeface="Microsoft JhengHei" pitchFamily="34" charset="0"/>
-                <a:ea typeface="Microsoft JhengHei" pitchFamily="34" charset="-122"/>
-                <a:cs typeface="Microsoft JhengHei" pitchFamily="34" charset="-120"/>
+                <a:latin typeface="Hiragino Sans" pitchFamily="34" charset="0"/>
+                <a:ea typeface="Hiragino Sans" pitchFamily="34" charset="-122"/>
+                <a:cs typeface="Hiragino Sans" pitchFamily="34" charset="-120"/>
               </a:rPr>
               <a:t>EVT</a:t>
             </a:r>
@@ -24231,9 +24187,9 @@
                 <a:solidFill>
                   <a:srgbClr val="FFFFFF"/>
                 </a:solidFill>
-                <a:latin typeface="Microsoft JhengHei" pitchFamily="34" charset="0"/>
-                <a:ea typeface="Microsoft JhengHei" pitchFamily="34" charset="-122"/>
-                <a:cs typeface="Microsoft JhengHei" pitchFamily="34" charset="-120"/>
+                <a:latin typeface="Hiragino Sans" pitchFamily="34" charset="0"/>
+                <a:ea typeface="Hiragino Sans" pitchFamily="34" charset="-122"/>
+                <a:cs typeface="Hiragino Sans" pitchFamily="34" charset="-120"/>
               </a:rPr>
               <a:t>EventBridge</a:t>
             </a:r>
@@ -24273,9 +24229,9 @@
                 <a:solidFill>
                   <a:srgbClr val="C7D6E4"/>
                 </a:solidFill>
-                <a:latin typeface="Microsoft JhengHei" pitchFamily="34" charset="0"/>
-                <a:ea typeface="Microsoft JhengHei" pitchFamily="34" charset="-122"/>
-                <a:cs typeface="Microsoft JhengHei" pitchFamily="34" charset="-120"/>
+                <a:latin typeface="Hiragino Sans" pitchFamily="34" charset="0"/>
+                <a:ea typeface="Hiragino Sans" pitchFamily="34" charset="-122"/>
+                <a:cs typeface="Hiragino Sans" pitchFamily="34" charset="-120"/>
               </a:rPr>
               <a:t>排程重算</a:t>
             </a:r>
@@ -24397,9 +24353,9 @@
                 <a:solidFill>
                   <a:srgbClr val="FFFFFF"/>
                 </a:solidFill>
-                <a:latin typeface="Microsoft JhengHei" pitchFamily="34" charset="0"/>
-                <a:ea typeface="Microsoft JhengHei" pitchFamily="34" charset="-122"/>
-                <a:cs typeface="Microsoft JhengHei" pitchFamily="34" charset="-120"/>
+                <a:latin typeface="Hiragino Sans" pitchFamily="34" charset="0"/>
+                <a:ea typeface="Hiragino Sans" pitchFamily="34" charset="-122"/>
+                <a:cs typeface="Hiragino Sans" pitchFamily="34" charset="-120"/>
               </a:rPr>
               <a:t>AI</a:t>
             </a:r>
@@ -24439,9 +24395,9 @@
                 <a:solidFill>
                   <a:srgbClr val="FFFFFF"/>
                 </a:solidFill>
-                <a:latin typeface="Microsoft JhengHei" pitchFamily="34" charset="0"/>
-                <a:ea typeface="Microsoft JhengHei" pitchFamily="34" charset="-122"/>
-                <a:cs typeface="Microsoft JhengHei" pitchFamily="34" charset="-120"/>
+                <a:latin typeface="Hiragino Sans" pitchFamily="34" charset="0"/>
+                <a:ea typeface="Hiragino Sans" pitchFamily="34" charset="-122"/>
+                <a:cs typeface="Hiragino Sans" pitchFamily="34" charset="-120"/>
               </a:rPr>
               <a:t>Bedrock</a:t>
             </a:r>
@@ -24481,9 +24437,9 @@
                 <a:solidFill>
                   <a:srgbClr val="C7D6E4"/>
                 </a:solidFill>
-                <a:latin typeface="Microsoft JhengHei" pitchFamily="34" charset="0"/>
-                <a:ea typeface="Microsoft JhengHei" pitchFamily="34" charset="-122"/>
-                <a:cs typeface="Microsoft JhengHei" pitchFamily="34" charset="-120"/>
+                <a:latin typeface="Hiragino Sans" pitchFamily="34" charset="0"/>
+                <a:ea typeface="Hiragino Sans" pitchFamily="34" charset="-122"/>
+                <a:cs typeface="Hiragino Sans" pitchFamily="34" charset="-120"/>
               </a:rPr>
               <a:t>AI 簡報</a:t>
             </a:r>
@@ -24605,9 +24561,9 @@
                 <a:solidFill>
                   <a:srgbClr val="FFFFFF"/>
                 </a:solidFill>
-                <a:latin typeface="Microsoft JhengHei" pitchFamily="34" charset="0"/>
-                <a:ea typeface="Microsoft JhengHei" pitchFamily="34" charset="-122"/>
-                <a:cs typeface="Microsoft JhengHei" pitchFamily="34" charset="-120"/>
+                <a:latin typeface="Hiragino Sans" pitchFamily="34" charset="0"/>
+                <a:ea typeface="Hiragino Sans" pitchFamily="34" charset="-122"/>
+                <a:cs typeface="Hiragino Sans" pitchFamily="34" charset="-120"/>
               </a:rPr>
               <a:t>SES</a:t>
             </a:r>
@@ -24647,9 +24603,9 @@
                 <a:solidFill>
                   <a:srgbClr val="FFFFFF"/>
                 </a:solidFill>
-                <a:latin typeface="Microsoft JhengHei" pitchFamily="34" charset="0"/>
-                <a:ea typeface="Microsoft JhengHei" pitchFamily="34" charset="-122"/>
-                <a:cs typeface="Microsoft JhengHei" pitchFamily="34" charset="-120"/>
+                <a:latin typeface="Hiragino Sans" pitchFamily="34" charset="0"/>
+                <a:ea typeface="Hiragino Sans" pitchFamily="34" charset="-122"/>
+                <a:cs typeface="Hiragino Sans" pitchFamily="34" charset="-120"/>
               </a:rPr>
               <a:t>SES / SNS</a:t>
             </a:r>
@@ -24689,9 +24645,9 @@
                 <a:solidFill>
                   <a:srgbClr val="C7D6E4"/>
                 </a:solidFill>
-                <a:latin typeface="Microsoft JhengHei" pitchFamily="34" charset="0"/>
-                <a:ea typeface="Microsoft JhengHei" pitchFamily="34" charset="-122"/>
-                <a:cs typeface="Microsoft JhengHei" pitchFamily="34" charset="-120"/>
+                <a:latin typeface="Hiragino Sans" pitchFamily="34" charset="0"/>
+                <a:ea typeface="Hiragino Sans" pitchFamily="34" charset="-122"/>
+                <a:cs typeface="Hiragino Sans" pitchFamily="34" charset="-120"/>
               </a:rPr>
               <a:t>Email 告警</a:t>
             </a:r>
@@ -24806,9 +24762,9 @@
                 <a:solidFill>
                   <a:srgbClr val="FFFFFF"/>
                 </a:solidFill>
-                <a:latin typeface="Microsoft JhengHei" pitchFamily="34" charset="0"/>
-                <a:ea typeface="Microsoft JhengHei" pitchFamily="34" charset="-122"/>
-                <a:cs typeface="Microsoft JhengHei" pitchFamily="34" charset="-120"/>
+                <a:latin typeface="Hiragino Sans" pitchFamily="34" charset="0"/>
+                <a:ea typeface="Hiragino Sans" pitchFamily="34" charset="-122"/>
+                <a:cs typeface="Hiragino Sans" pitchFamily="34" charset="-120"/>
               </a:rPr>
               <a:t>● 優勢</a:t>
             </a:r>
@@ -24852,9 +24808,9 @@
                 <a:solidFill>
                   <a:srgbClr val="C7D6E4"/>
                 </a:solidFill>
-                <a:latin typeface="Microsoft JhengHei" pitchFamily="34" charset="0"/>
-                <a:ea typeface="Microsoft JhengHei" pitchFamily="34" charset="-122"/>
-                <a:cs typeface="Microsoft JhengHei" pitchFamily="34" charset="-120"/>
+                <a:latin typeface="Hiragino Sans" pitchFamily="34" charset="0"/>
+                <a:ea typeface="Hiragino Sans" pitchFamily="34" charset="-122"/>
+                <a:cs typeface="Hiragino Sans" pitchFamily="34" charset="-120"/>
               </a:rPr>
               <a:t>天生資料驅動：新報表進 S3 自動重算，命中 15→97 艘敘事</a:t>
             </a:r>
@@ -24876,9 +24832,9 @@
                 <a:solidFill>
                   <a:srgbClr val="C7D6E4"/>
                 </a:solidFill>
-                <a:latin typeface="Microsoft JhengHei" pitchFamily="34" charset="0"/>
-                <a:ea typeface="Microsoft JhengHei" pitchFamily="34" charset="-122"/>
-                <a:cs typeface="Microsoft JhengHei" pitchFamily="34" charset="-120"/>
+                <a:latin typeface="Hiragino Sans" pitchFamily="34" charset="0"/>
+                <a:ea typeface="Hiragino Sans" pitchFamily="34" charset="-122"/>
+                <a:cs typeface="Hiragino Sans" pitchFamily="34" charset="-120"/>
               </a:rPr>
               <a:t>按呼叫計費、零閒置成本、自動擴縮</a:t>
             </a:r>
@@ -24900,9 +24856,9 @@
                 <a:solidFill>
                   <a:srgbClr val="C7D6E4"/>
                 </a:solidFill>
-                <a:latin typeface="Microsoft JhengHei" pitchFamily="34" charset="0"/>
-                <a:ea typeface="Microsoft JhengHei" pitchFamily="34" charset="-122"/>
-                <a:cs typeface="Microsoft JhengHei" pitchFamily="34" charset="-120"/>
+                <a:latin typeface="Hiragino Sans" pitchFamily="34" charset="0"/>
+                <a:ea typeface="Hiragino Sans" pitchFamily="34" charset="-122"/>
+                <a:cs typeface="Hiragino Sans" pitchFamily="34" charset="-120"/>
               </a:rPr>
               <a:t>EventBridge 排程 + SES Email 直接命中告警需求</a:t>
             </a:r>
@@ -24924,9 +24880,9 @@
                 <a:solidFill>
                   <a:srgbClr val="C7D6E4"/>
                 </a:solidFill>
-                <a:latin typeface="Microsoft JhengHei" pitchFamily="34" charset="0"/>
-                <a:ea typeface="Microsoft JhengHei" pitchFamily="34" charset="-122"/>
-                <a:cs typeface="Microsoft JhengHei" pitchFamily="34" charset="-120"/>
+                <a:latin typeface="Hiragino Sans" pitchFamily="34" charset="0"/>
+                <a:ea typeface="Hiragino Sans" pitchFamily="34" charset="-122"/>
+                <a:cs typeface="Hiragino Sans" pitchFamily="34" charset="-120"/>
               </a:rPr>
               <a:t>各 handler 解耦，單點改動不動全局</a:t>
             </a:r>
@@ -25041,9 +24997,9 @@
                 <a:solidFill>
                   <a:srgbClr val="FFFFFF"/>
                 </a:solidFill>
-                <a:latin typeface="Microsoft JhengHei" pitchFamily="34" charset="0"/>
-                <a:ea typeface="Microsoft JhengHei" pitchFamily="34" charset="-122"/>
-                <a:cs typeface="Microsoft JhengHei" pitchFamily="34" charset="-120"/>
+                <a:latin typeface="Hiragino Sans" pitchFamily="34" charset="0"/>
+                <a:ea typeface="Hiragino Sans" pitchFamily="34" charset="-122"/>
+                <a:cs typeface="Hiragino Sans" pitchFamily="34" charset="-120"/>
               </a:rPr>
               <a:t>▲ 取捨 / 風險</a:t>
             </a:r>
@@ -25087,9 +25043,9 @@
                 <a:solidFill>
                   <a:srgbClr val="C7D6E4"/>
                 </a:solidFill>
-                <a:latin typeface="Microsoft JhengHei" pitchFamily="34" charset="0"/>
-                <a:ea typeface="Microsoft JhengHei" pitchFamily="34" charset="-122"/>
-                <a:cs typeface="Microsoft JhengHei" pitchFamily="34" charset="-120"/>
+                <a:latin typeface="Hiragino Sans" pitchFamily="34" charset="0"/>
+                <a:ea typeface="Hiragino Sans" pitchFamily="34" charset="-122"/>
+                <a:cs typeface="Hiragino Sans" pitchFamily="34" charset="-120"/>
               </a:rPr>
               <a:t>monolith 拆多 Lambda + IaC，3 天工作量與整合風險大增</a:t>
             </a:r>
@@ -25111,9 +25067,9 @@
                 <a:solidFill>
                   <a:srgbClr val="C7D6E4"/>
                 </a:solidFill>
-                <a:latin typeface="Microsoft JhengHei" pitchFamily="34" charset="0"/>
-                <a:ea typeface="Microsoft JhengHei" pitchFamily="34" charset="-122"/>
-                <a:cs typeface="Microsoft JhengHei" pitchFamily="34" charset="-120"/>
+                <a:latin typeface="Hiragino Sans" pitchFamily="34" charset="0"/>
+                <a:ea typeface="Hiragino Sans" pitchFamily="34" charset="-122"/>
+                <a:cs typeface="Hiragino Sans" pitchFamily="34" charset="-120"/>
               </a:rPr>
               <a:t>Java Lambda 冷啟延遲可能拖慢 demo 首打</a:t>
             </a:r>
@@ -25135,9 +25091,9 @@
                 <a:solidFill>
                   <a:srgbClr val="C7D6E4"/>
                 </a:solidFill>
-                <a:latin typeface="Microsoft JhengHei" pitchFamily="34" charset="0"/>
-                <a:ea typeface="Microsoft JhengHei" pitchFamily="34" charset="-122"/>
-                <a:cs typeface="Microsoft JhengHei" pitchFamily="34" charset="-120"/>
+                <a:latin typeface="Hiragino Sans" pitchFamily="34" charset="0"/>
+                <a:ea typeface="Hiragino Sans" pitchFamily="34" charset="-122"/>
+                <a:cs typeface="Hiragino Sans" pitchFamily="34" charset="-120"/>
               </a:rPr>
               <a:t>本機難完整重現 APIGW+Lambda+DynamoDB，除錯較難</a:t>
             </a:r>
@@ -25159,9 +25115,9 @@
                 <a:solidFill>
                   <a:srgbClr val="C7D6E4"/>
                 </a:solidFill>
-                <a:latin typeface="Microsoft JhengHei" pitchFamily="34" charset="0"/>
-                <a:ea typeface="Microsoft JhengHei" pitchFamily="34" charset="-122"/>
-                <a:cs typeface="Microsoft JhengHei" pitchFamily="34" charset="-120"/>
+                <a:latin typeface="Hiragino Sans" pitchFamily="34" charset="0"/>
+                <a:ea typeface="Hiragino Sans" pitchFamily="34" charset="-122"/>
+                <a:cs typeface="Hiragino Sans" pitchFamily="34" charset="-120"/>
               </a:rPr>
               <a:t>元件變多，臨時憑證下佈署面更廣、易出錯</a:t>
             </a:r>
@@ -25230,9 +25186,9 @@
                 <a:solidFill>
                   <a:srgbClr val="F4A72B"/>
                 </a:solidFill>
-                <a:latin typeface="Microsoft JhengHei" pitchFamily="34" charset="0"/>
-                <a:ea typeface="Microsoft JhengHei" pitchFamily="34" charset="-122"/>
-                <a:cs typeface="Microsoft JhengHei" pitchFamily="34" charset="-120"/>
+                <a:latin typeface="Hiragino Sans" pitchFamily="34" charset="0"/>
+                <a:ea typeface="Hiragino Sans" pitchFamily="34" charset="-122"/>
+                <a:cs typeface="Hiragino Sans" pitchFamily="34" charset="-120"/>
               </a:rPr>
               <a:t>◆ 何時選　</a:t>
             </a:r>
@@ -25247,9 +25203,9 @@
                 <a:solidFill>
                   <a:srgbClr val="FFFFFF"/>
                 </a:solidFill>
-                <a:latin typeface="Microsoft JhengHei" pitchFamily="34" charset="0"/>
-                <a:ea typeface="Microsoft JhengHei" pitchFamily="34" charset="-122"/>
-                <a:cs typeface="Microsoft JhengHei" pitchFamily="34" charset="-120"/>
+                <a:latin typeface="Hiragino Sans" pitchFamily="34" charset="0"/>
+                <a:ea typeface="Hiragino Sans" pitchFamily="34" charset="-122"/>
+                <a:cs typeface="Hiragino Sans" pitchFamily="34" charset="-120"/>
               </a:rPr>
               <a:t>要強調資料驅動、自動擴縮與『15→97 艘同架構』，且團隊有把握在時限內完成拆分與整合時。</a:t>
             </a:r>
@@ -25471,9 +25427,9 @@
                 <a:solidFill>
                   <a:srgbClr val="FFFFFF"/>
                 </a:solidFill>
-                <a:latin typeface="Microsoft JhengHei" pitchFamily="34" charset="0"/>
-                <a:ea typeface="Microsoft JhengHei" pitchFamily="34" charset="-122"/>
-                <a:cs typeface="Microsoft JhengHei" pitchFamily="34" charset="-120"/>
+                <a:latin typeface="Hiragino Sans" pitchFamily="34" charset="0"/>
+                <a:ea typeface="Hiragino Sans" pitchFamily="34" charset="-122"/>
+                <a:cs typeface="Hiragino Sans" pitchFamily="34" charset="-120"/>
               </a:rPr>
               <a:t>06</a:t>
             </a:r>
@@ -25485,9 +25441,9 @@
                 <a:solidFill>
                   <a:srgbClr val="8FA8BD"/>
                 </a:solidFill>
-                <a:latin typeface="Microsoft JhengHei" pitchFamily="34" charset="0"/>
-                <a:ea typeface="Microsoft JhengHei" pitchFamily="34" charset="-122"/>
-                <a:cs typeface="Microsoft JhengHei" pitchFamily="34" charset="-120"/>
+                <a:latin typeface="Hiragino Sans" pitchFamily="34" charset="0"/>
+                <a:ea typeface="Hiragino Sans" pitchFamily="34" charset="-122"/>
+                <a:cs typeface="Hiragino Sans" pitchFamily="34" charset="-120"/>
               </a:rPr>
               <a:t>  /  15</a:t>
             </a:r>
@@ -25524,9 +25480,9 @@
                 <a:solidFill>
                   <a:srgbClr val="F4A72B"/>
                 </a:solidFill>
-                <a:latin typeface="Microsoft JhengHei" pitchFamily="34" charset="0"/>
-                <a:ea typeface="Microsoft JhengHei" pitchFamily="34" charset="-122"/>
-                <a:cs typeface="Microsoft JhengHei" pitchFamily="34" charset="-120"/>
+                <a:latin typeface="Hiragino Sans" pitchFamily="34" charset="0"/>
+                <a:ea typeface="Hiragino Sans" pitchFamily="34" charset="-122"/>
+                <a:cs typeface="Hiragino Sans" pitchFamily="34" charset="-120"/>
               </a:rPr>
               <a:t>方案 C · APP RUNNER</a:t>
             </a:r>
@@ -25559,17 +25515,17 @@
               <a:buNone/>
             </a:pPr>
             <a:r>
-              <a:rPr lang="en-US" sz="3600" b="1" dirty="0">
+              <a:rPr lang="en-US" sz="3560" b="1" dirty="0">
                 <a:solidFill>
                   <a:srgbClr val="FFFFFF"/>
                 </a:solidFill>
-                <a:latin typeface="Microsoft JhengHei" pitchFamily="34" charset="0"/>
-                <a:ea typeface="Microsoft JhengHei" pitchFamily="34" charset="-122"/>
-                <a:cs typeface="Microsoft JhengHei" pitchFamily="34" charset="-120"/>
+                <a:latin typeface="Hiragino Sans" pitchFamily="34" charset="0"/>
+                <a:ea typeface="Hiragino Sans" pitchFamily="34" charset="-122"/>
+                <a:cs typeface="Hiragino Sans" pitchFamily="34" charset="-120"/>
               </a:rPr>
               <a:t>全託管容器，零 infra（本次受帳號權限阻擋）</a:t>
             </a:r>
-            <a:endParaRPr lang="en-US" sz="3600" dirty="0"/>
+            <a:endParaRPr lang="en-US" sz="3560" dirty="0"/>
           </a:p>
         </p:txBody>
       </p:sp>
@@ -25624,9 +25580,9 @@
                 <a:solidFill>
                   <a:srgbClr val="FFFFFF"/>
                 </a:solidFill>
-                <a:latin typeface="Microsoft JhengHei" pitchFamily="34" charset="0"/>
-                <a:ea typeface="Microsoft JhengHei" pitchFamily="34" charset="-122"/>
-                <a:cs typeface="Microsoft JhengHei" pitchFamily="34" charset="-120"/>
+                <a:latin typeface="Hiragino Sans" pitchFamily="34" charset="0"/>
+                <a:ea typeface="Hiragino Sans" pitchFamily="34" charset="-122"/>
+                <a:cs typeface="Hiragino Sans" pitchFamily="34" charset="-120"/>
               </a:rPr>
               <a:t>成本 低-中</a:t>
             </a:r>
@@ -25685,9 +25641,9 @@
                 <a:solidFill>
                   <a:srgbClr val="18293B"/>
                 </a:solidFill>
-                <a:latin typeface="Microsoft JhengHei" pitchFamily="34" charset="0"/>
-                <a:ea typeface="Microsoft JhengHei" pitchFamily="34" charset="-122"/>
-                <a:cs typeface="Microsoft JhengHei" pitchFamily="34" charset="-120"/>
+                <a:latin typeface="Hiragino Sans" pitchFamily="34" charset="0"/>
+                <a:ea typeface="Hiragino Sans" pitchFamily="34" charset="-122"/>
+                <a:cs typeface="Hiragino Sans" pitchFamily="34" charset="-120"/>
               </a:rPr>
               <a:t>黑客松 低 · 受阻</a:t>
             </a:r>
@@ -25747,13 +25703,13 @@
               <a:buNone/>
             </a:pPr>
             <a:r>
-              <a:rPr lang="en-US" sz="1200" i="1" dirty="0">
+              <a:rPr lang="en-US" sz="1200" dirty="0">
                 <a:solidFill>
                   <a:srgbClr val="C7D6E4"/>
                 </a:solidFill>
-                <a:latin typeface="Microsoft JhengHei" pitchFamily="34" charset="0"/>
-                <a:ea typeface="Microsoft JhengHei" pitchFamily="34" charset="-122"/>
-                <a:cs typeface="Microsoft JhengHei" pitchFamily="34" charset="-120"/>
+                <a:latin typeface="Hiragino Sans" pitchFamily="34" charset="0"/>
+                <a:ea typeface="Hiragino Sans" pitchFamily="34" charset="-122"/>
+                <a:cs typeface="Hiragino Sans" pitchFamily="34" charset="-120"/>
               </a:rPr>
               <a:t>同一顆 Spring Boot 映像改由 App Runner 從 ECR 拉起，AWS 全託管 HTTPS / 負載平衡 / 自動擴縮，免自建 ALB/VPC/SG。惟本 workshop 帳號 App Runner 實測 AccessDenied，只能列對照。</a:t>
             </a:r>
@@ -25790,9 +25746,9 @@
                 <a:solidFill>
                   <a:srgbClr val="2A9D8F"/>
                 </a:solidFill>
-                <a:latin typeface="Microsoft JhengHei" pitchFamily="34" charset="0"/>
-                <a:ea typeface="Microsoft JhengHei" pitchFamily="34" charset="-122"/>
-                <a:cs typeface="Microsoft JhengHei" pitchFamily="34" charset="-120"/>
+                <a:latin typeface="Hiragino Sans" pitchFamily="34" charset="0"/>
+                <a:ea typeface="Hiragino Sans" pitchFamily="34" charset="-122"/>
+                <a:cs typeface="Hiragino Sans" pitchFamily="34" charset="-120"/>
               </a:rPr>
               <a:t>服務組成</a:t>
             </a:r>
@@ -25890,9 +25846,9 @@
                 <a:solidFill>
                   <a:srgbClr val="FFFFFF"/>
                 </a:solidFill>
-                <a:latin typeface="Microsoft JhengHei" pitchFamily="34" charset="0"/>
-                <a:ea typeface="Microsoft JhengHei" pitchFamily="34" charset="-122"/>
-                <a:cs typeface="Microsoft JhengHei" pitchFamily="34" charset="-120"/>
+                <a:latin typeface="Hiragino Sans" pitchFamily="34" charset="0"/>
+                <a:ea typeface="Hiragino Sans" pitchFamily="34" charset="-122"/>
+                <a:cs typeface="Hiragino Sans" pitchFamily="34" charset="-120"/>
               </a:rPr>
               <a:t>AR</a:t>
             </a:r>
@@ -25932,9 +25888,9 @@
                 <a:solidFill>
                   <a:srgbClr val="FFFFFF"/>
                 </a:solidFill>
-                <a:latin typeface="Microsoft JhengHei" pitchFamily="34" charset="0"/>
-                <a:ea typeface="Microsoft JhengHei" pitchFamily="34" charset="-122"/>
-                <a:cs typeface="Microsoft JhengHei" pitchFamily="34" charset="-120"/>
+                <a:latin typeface="Hiragino Sans" pitchFamily="34" charset="0"/>
+                <a:ea typeface="Hiragino Sans" pitchFamily="34" charset="-122"/>
+                <a:cs typeface="Hiragino Sans" pitchFamily="34" charset="-120"/>
               </a:rPr>
               <a:t>App Runner</a:t>
             </a:r>
@@ -25974,9 +25930,9 @@
                 <a:solidFill>
                   <a:srgbClr val="C7D6E4"/>
                 </a:solidFill>
-                <a:latin typeface="Microsoft JhengHei" pitchFamily="34" charset="0"/>
-                <a:ea typeface="Microsoft JhengHei" pitchFamily="34" charset="-122"/>
-                <a:cs typeface="Microsoft JhengHei" pitchFamily="34" charset="-120"/>
+                <a:latin typeface="Hiragino Sans" pitchFamily="34" charset="0"/>
+                <a:ea typeface="Hiragino Sans" pitchFamily="34" charset="-122"/>
+                <a:cs typeface="Hiragino Sans" pitchFamily="34" charset="-120"/>
               </a:rPr>
               <a:t>全託管 · HTTPS</a:t>
             </a:r>
@@ -26098,9 +26054,9 @@
                 <a:solidFill>
                   <a:srgbClr val="FFFFFF"/>
                 </a:solidFill>
-                <a:latin typeface="Microsoft JhengHei" pitchFamily="34" charset="0"/>
-                <a:ea typeface="Microsoft JhengHei" pitchFamily="34" charset="-122"/>
-                <a:cs typeface="Microsoft JhengHei" pitchFamily="34" charset="-120"/>
+                <a:latin typeface="Hiragino Sans" pitchFamily="34" charset="0"/>
+                <a:ea typeface="Hiragino Sans" pitchFamily="34" charset="-122"/>
+                <a:cs typeface="Hiragino Sans" pitchFamily="34" charset="-120"/>
               </a:rPr>
               <a:t>ECR</a:t>
             </a:r>
@@ -26140,9 +26096,9 @@
                 <a:solidFill>
                   <a:srgbClr val="FFFFFF"/>
                 </a:solidFill>
-                <a:latin typeface="Microsoft JhengHei" pitchFamily="34" charset="0"/>
-                <a:ea typeface="Microsoft JhengHei" pitchFamily="34" charset="-122"/>
-                <a:cs typeface="Microsoft JhengHei" pitchFamily="34" charset="-120"/>
+                <a:latin typeface="Hiragino Sans" pitchFamily="34" charset="0"/>
+                <a:ea typeface="Hiragino Sans" pitchFamily="34" charset="-122"/>
+                <a:cs typeface="Hiragino Sans" pitchFamily="34" charset="-120"/>
               </a:rPr>
               <a:t>ECR</a:t>
             </a:r>
@@ -26182,9 +26138,9 @@
                 <a:solidFill>
                   <a:srgbClr val="C7D6E4"/>
                 </a:solidFill>
-                <a:latin typeface="Microsoft JhengHei" pitchFamily="34" charset="0"/>
-                <a:ea typeface="Microsoft JhengHei" pitchFamily="34" charset="-122"/>
-                <a:cs typeface="Microsoft JhengHei" pitchFamily="34" charset="-120"/>
+                <a:latin typeface="Hiragino Sans" pitchFamily="34" charset="0"/>
+                <a:ea typeface="Hiragino Sans" pitchFamily="34" charset="-122"/>
+                <a:cs typeface="Hiragino Sans" pitchFamily="34" charset="-120"/>
               </a:rPr>
               <a:t>同一顆 arm64 映像</a:t>
             </a:r>
@@ -26306,9 +26262,9 @@
                 <a:solidFill>
                   <a:srgbClr val="FFFFFF"/>
                 </a:solidFill>
-                <a:latin typeface="Microsoft JhengHei" pitchFamily="34" charset="0"/>
-                <a:ea typeface="Microsoft JhengHei" pitchFamily="34" charset="-122"/>
-                <a:cs typeface="Microsoft JhengHei" pitchFamily="34" charset="-120"/>
+                <a:latin typeface="Hiragino Sans" pitchFamily="34" charset="0"/>
+                <a:ea typeface="Hiragino Sans" pitchFamily="34" charset="-122"/>
+                <a:cs typeface="Hiragino Sans" pitchFamily="34" charset="-120"/>
               </a:rPr>
               <a:t>AI</a:t>
             </a:r>
@@ -26348,9 +26304,9 @@
                 <a:solidFill>
                   <a:srgbClr val="FFFFFF"/>
                 </a:solidFill>
-                <a:latin typeface="Microsoft JhengHei" pitchFamily="34" charset="0"/>
-                <a:ea typeface="Microsoft JhengHei" pitchFamily="34" charset="-122"/>
-                <a:cs typeface="Microsoft JhengHei" pitchFamily="34" charset="-120"/>
+                <a:latin typeface="Hiragino Sans" pitchFamily="34" charset="0"/>
+                <a:ea typeface="Hiragino Sans" pitchFamily="34" charset="-122"/>
+                <a:cs typeface="Hiragino Sans" pitchFamily="34" charset="-120"/>
               </a:rPr>
               <a:t>Bedrock</a:t>
             </a:r>
@@ -26390,9 +26346,9 @@
                 <a:solidFill>
                   <a:srgbClr val="C7D6E4"/>
                 </a:solidFill>
-                <a:latin typeface="Microsoft JhengHei" pitchFamily="34" charset="0"/>
-                <a:ea typeface="Microsoft JhengHei" pitchFamily="34" charset="-122"/>
-                <a:cs typeface="Microsoft JhengHei" pitchFamily="34" charset="-120"/>
+                <a:latin typeface="Hiragino Sans" pitchFamily="34" charset="0"/>
+                <a:ea typeface="Hiragino Sans" pitchFamily="34" charset="-122"/>
+                <a:cs typeface="Hiragino Sans" pitchFamily="34" charset="-120"/>
               </a:rPr>
               <a:t>AI 簡報</a:t>
             </a:r>
@@ -26514,9 +26470,9 @@
                 <a:solidFill>
                   <a:srgbClr val="FFFFFF"/>
                 </a:solidFill>
-                <a:latin typeface="Microsoft JhengHei" pitchFamily="34" charset="0"/>
-                <a:ea typeface="Microsoft JhengHei" pitchFamily="34" charset="-122"/>
-                <a:cs typeface="Microsoft JhengHei" pitchFamily="34" charset="-120"/>
+                <a:latin typeface="Hiragino Sans" pitchFamily="34" charset="0"/>
+                <a:ea typeface="Hiragino Sans" pitchFamily="34" charset="-122"/>
+                <a:cs typeface="Hiragino Sans" pitchFamily="34" charset="-120"/>
               </a:rPr>
               <a:t>SNS</a:t>
             </a:r>
@@ -26556,9 +26512,9 @@
                 <a:solidFill>
                   <a:srgbClr val="FFFFFF"/>
                 </a:solidFill>
-                <a:latin typeface="Microsoft JhengHei" pitchFamily="34" charset="0"/>
-                <a:ea typeface="Microsoft JhengHei" pitchFamily="34" charset="-122"/>
-                <a:cs typeface="Microsoft JhengHei" pitchFamily="34" charset="-120"/>
+                <a:latin typeface="Hiragino Sans" pitchFamily="34" charset="0"/>
+                <a:ea typeface="Hiragino Sans" pitchFamily="34" charset="-122"/>
+                <a:cs typeface="Hiragino Sans" pitchFamily="34" charset="-120"/>
               </a:rPr>
               <a:t>SNS</a:t>
             </a:r>
@@ -26598,9 +26554,9 @@
                 <a:solidFill>
                   <a:srgbClr val="C7D6E4"/>
                 </a:solidFill>
-                <a:latin typeface="Microsoft JhengHei" pitchFamily="34" charset="0"/>
-                <a:ea typeface="Microsoft JhengHei" pitchFamily="34" charset="-122"/>
-                <a:cs typeface="Microsoft JhengHei" pitchFamily="34" charset="-120"/>
+                <a:latin typeface="Hiragino Sans" pitchFamily="34" charset="0"/>
+                <a:ea typeface="Hiragino Sans" pitchFamily="34" charset="-122"/>
+                <a:cs typeface="Hiragino Sans" pitchFamily="34" charset="-120"/>
               </a:rPr>
               <a:t>告警</a:t>
             </a:r>
@@ -26722,9 +26678,9 @@
                 <a:solidFill>
                   <a:srgbClr val="FFFFFF"/>
                 </a:solidFill>
-                <a:latin typeface="Microsoft JhengHei" pitchFamily="34" charset="0"/>
-                <a:ea typeface="Microsoft JhengHei" pitchFamily="34" charset="-122"/>
-                <a:cs typeface="Microsoft JhengHei" pitchFamily="34" charset="-120"/>
+                <a:latin typeface="Hiragino Sans" pitchFamily="34" charset="0"/>
+                <a:ea typeface="Hiragino Sans" pitchFamily="34" charset="-122"/>
+                <a:cs typeface="Hiragino Sans" pitchFamily="34" charset="-120"/>
               </a:rPr>
               <a:t>IAM</a:t>
             </a:r>
@@ -26764,9 +26720,9 @@
                 <a:solidFill>
                   <a:srgbClr val="FFFFFF"/>
                 </a:solidFill>
-                <a:latin typeface="Microsoft JhengHei" pitchFamily="34" charset="0"/>
-                <a:ea typeface="Microsoft JhengHei" pitchFamily="34" charset="-122"/>
-                <a:cs typeface="Microsoft JhengHei" pitchFamily="34" charset="-120"/>
+                <a:latin typeface="Hiragino Sans" pitchFamily="34" charset="0"/>
+                <a:ea typeface="Hiragino Sans" pitchFamily="34" charset="-122"/>
+                <a:cs typeface="Hiragino Sans" pitchFamily="34" charset="-120"/>
               </a:rPr>
               <a:t>IAM</a:t>
             </a:r>
@@ -26806,9 +26762,9 @@
                 <a:solidFill>
                   <a:srgbClr val="C7D6E4"/>
                 </a:solidFill>
-                <a:latin typeface="Microsoft JhengHei" pitchFamily="34" charset="0"/>
-                <a:ea typeface="Microsoft JhengHei" pitchFamily="34" charset="-122"/>
-                <a:cs typeface="Microsoft JhengHei" pitchFamily="34" charset="-120"/>
+                <a:latin typeface="Hiragino Sans" pitchFamily="34" charset="0"/>
+                <a:ea typeface="Hiragino Sans" pitchFamily="34" charset="-122"/>
+                <a:cs typeface="Hiragino Sans" pitchFamily="34" charset="-120"/>
               </a:rPr>
               <a:t>access / instance role</a:t>
             </a:r>
@@ -26923,9 +26879,9 @@
                 <a:solidFill>
                   <a:srgbClr val="FFFFFF"/>
                 </a:solidFill>
-                <a:latin typeface="Microsoft JhengHei" pitchFamily="34" charset="0"/>
-                <a:ea typeface="Microsoft JhengHei" pitchFamily="34" charset="-122"/>
-                <a:cs typeface="Microsoft JhengHei" pitchFamily="34" charset="-120"/>
+                <a:latin typeface="Hiragino Sans" pitchFamily="34" charset="0"/>
+                <a:ea typeface="Hiragino Sans" pitchFamily="34" charset="-122"/>
+                <a:cs typeface="Hiragino Sans" pitchFamily="34" charset="-120"/>
               </a:rPr>
               <a:t>● 優勢</a:t>
             </a:r>
@@ -26969,9 +26925,9 @@
                 <a:solidFill>
                   <a:srgbClr val="C7D6E4"/>
                 </a:solidFill>
-                <a:latin typeface="Microsoft JhengHei" pitchFamily="34" charset="0"/>
-                <a:ea typeface="Microsoft JhengHei" pitchFamily="34" charset="-122"/>
-                <a:cs typeface="Microsoft JhengHei" pitchFamily="34" charset="-120"/>
+                <a:latin typeface="Hiragino Sans" pitchFamily="34" charset="0"/>
+                <a:ea typeface="Hiragino Sans" pitchFamily="34" charset="-122"/>
+                <a:cs typeface="Hiragino Sans" pitchFamily="34" charset="-120"/>
               </a:rPr>
               <a:t>管理面最少：免 ALB/VPC/SG/target group，設定步驟最短</a:t>
             </a:r>
@@ -26993,9 +26949,9 @@
                 <a:solidFill>
                   <a:srgbClr val="C7D6E4"/>
                 </a:solidFill>
-                <a:latin typeface="Microsoft JhengHei" pitchFamily="34" charset="0"/>
-                <a:ea typeface="Microsoft JhengHei" pitchFamily="34" charset="-122"/>
-                <a:cs typeface="Microsoft JhengHei" pitchFamily="34" charset="-120"/>
+                <a:latin typeface="Hiragino Sans" pitchFamily="34" charset="0"/>
+                <a:ea typeface="Hiragino Sans" pitchFamily="34" charset="-122"/>
+                <a:cs typeface="Hiragino Sans" pitchFamily="34" charset="-120"/>
               </a:rPr>
               <a:t>沿用同一映像與 codebase，遷移成本近零</a:t>
             </a:r>
@@ -27017,9 +26973,9 @@
                 <a:solidFill>
                   <a:srgbClr val="C7D6E4"/>
                 </a:solidFill>
-                <a:latin typeface="Microsoft JhengHei" pitchFamily="34" charset="0"/>
-                <a:ea typeface="Microsoft JhengHei" pitchFamily="34" charset="-122"/>
-                <a:cs typeface="Microsoft JhengHei" pitchFamily="34" charset="-120"/>
+                <a:latin typeface="Hiragino Sans" pitchFamily="34" charset="0"/>
+                <a:ea typeface="Hiragino Sans" pitchFamily="34" charset="-122"/>
+                <a:cs typeface="Hiragino Sans" pitchFamily="34" charset="-120"/>
               </a:rPr>
               <a:t>內建 HTTPS + 穩定網域 + 自動擴縮，demo URL 天生穩定</a:t>
             </a:r>
@@ -27041,9 +26997,9 @@
                 <a:solidFill>
                   <a:srgbClr val="C7D6E4"/>
                 </a:solidFill>
-                <a:latin typeface="Microsoft JhengHei" pitchFamily="34" charset="0"/>
-                <a:ea typeface="Microsoft JhengHei" pitchFamily="34" charset="-122"/>
-                <a:cs typeface="Microsoft JhengHei" pitchFamily="34" charset="-120"/>
+                <a:latin typeface="Hiragino Sans" pitchFamily="34" charset="0"/>
+                <a:ea typeface="Hiragino Sans" pitchFamily="34" charset="-122"/>
+                <a:cs typeface="Hiragino Sans" pitchFamily="34" charset="-120"/>
               </a:rPr>
               <a:t>維持單服務好除錯特性</a:t>
             </a:r>
@@ -27158,9 +27114,9 @@
                 <a:solidFill>
                   <a:srgbClr val="FFFFFF"/>
                 </a:solidFill>
-                <a:latin typeface="Microsoft JhengHei" pitchFamily="34" charset="0"/>
-                <a:ea typeface="Microsoft JhengHei" pitchFamily="34" charset="-122"/>
-                <a:cs typeface="Microsoft JhengHei" pitchFamily="34" charset="-120"/>
+                <a:latin typeface="Hiragino Sans" pitchFamily="34" charset="0"/>
+                <a:ea typeface="Hiragino Sans" pitchFamily="34" charset="-122"/>
+                <a:cs typeface="Hiragino Sans" pitchFamily="34" charset="-120"/>
               </a:rPr>
               <a:t>▲ 取捨 / 風險</a:t>
             </a:r>
@@ -27204,9 +27160,9 @@
                 <a:solidFill>
                   <a:srgbClr val="C7D6E4"/>
                 </a:solidFill>
-                <a:latin typeface="Microsoft JhengHei" pitchFamily="34" charset="0"/>
-                <a:ea typeface="Microsoft JhengHei" pitchFamily="34" charset="-122"/>
-                <a:cs typeface="Microsoft JhengHei" pitchFamily="34" charset="-120"/>
+                <a:latin typeface="Hiragino Sans" pitchFamily="34" charset="0"/>
+                <a:ea typeface="Hiragino Sans" pitchFamily="34" charset="-122"/>
+                <a:cs typeface="Hiragino Sans" pitchFamily="34" charset="-120"/>
               </a:rPr>
               <a:t>本 workshop 帳號 App Runner AccessDenied → 決定性阻斷</a:t>
             </a:r>
@@ -27228,9 +27184,9 @@
                 <a:solidFill>
                   <a:srgbClr val="C7D6E4"/>
                 </a:solidFill>
-                <a:latin typeface="Microsoft JhengHei" pitchFamily="34" charset="0"/>
-                <a:ea typeface="Microsoft JhengHei" pitchFamily="34" charset="-122"/>
-                <a:cs typeface="Microsoft JhengHei" pitchFamily="34" charset="-120"/>
+                <a:latin typeface="Hiragino Sans" pitchFamily="34" charset="0"/>
+                <a:ea typeface="Hiragino Sans" pitchFamily="34" charset="-122"/>
+                <a:cs typeface="Hiragino Sans" pitchFamily="34" charset="-120"/>
               </a:rPr>
               <a:t>與 Fargate 一樣非資料驅動、更新要重 build 映像</a:t>
             </a:r>
@@ -27252,9 +27208,9 @@
                 <a:solidFill>
                   <a:srgbClr val="C7D6E4"/>
                 </a:solidFill>
-                <a:latin typeface="Microsoft JhengHei" pitchFamily="34" charset="0"/>
-                <a:ea typeface="Microsoft JhengHei" pitchFamily="34" charset="-122"/>
-                <a:cs typeface="Microsoft JhengHei" pitchFamily="34" charset="-120"/>
+                <a:latin typeface="Hiragino Sans" pitchFamily="34" charset="0"/>
+                <a:ea typeface="Hiragino Sans" pitchFamily="34" charset="-122"/>
+                <a:cs typeface="Hiragino Sans" pitchFamily="34" charset="-120"/>
               </a:rPr>
               <a:t>客製網路 / 私有子網彈性不如 ECS</a:t>
             </a:r>
@@ -27276,9 +27232,9 @@
                 <a:solidFill>
                   <a:srgbClr val="C7D6E4"/>
                 </a:solidFill>
-                <a:latin typeface="Microsoft JhengHei" pitchFamily="34" charset="0"/>
-                <a:ea typeface="Microsoft JhengHei" pitchFamily="34" charset="-122"/>
-                <a:cs typeface="Microsoft JhengHei" pitchFamily="34" charset="-120"/>
+                <a:latin typeface="Hiragino Sans" pitchFamily="34" charset="0"/>
+                <a:ea typeface="Hiragino Sans" pitchFamily="34" charset="-122"/>
+                <a:cs typeface="Hiragino Sans" pitchFamily="34" charset="-120"/>
               </a:rPr>
               <a:t>區域 / 映像限制較多，遇權限問題無替代路徑</a:t>
             </a:r>
@@ -27347,9 +27303,9 @@
                 <a:solidFill>
                   <a:srgbClr val="F4A72B"/>
                 </a:solidFill>
-                <a:latin typeface="Microsoft JhengHei" pitchFamily="34" charset="0"/>
-                <a:ea typeface="Microsoft JhengHei" pitchFamily="34" charset="-122"/>
-                <a:cs typeface="Microsoft JhengHei" pitchFamily="34" charset="-120"/>
+                <a:latin typeface="Hiragino Sans" pitchFamily="34" charset="0"/>
+                <a:ea typeface="Hiragino Sans" pitchFamily="34" charset="-122"/>
+                <a:cs typeface="Hiragino Sans" pitchFamily="34" charset="-120"/>
               </a:rPr>
               <a:t>◆ 何時選　</a:t>
             </a:r>
@@ -27364,9 +27320,9 @@
                 <a:solidFill>
                   <a:srgbClr val="FFFFFF"/>
                 </a:solidFill>
-                <a:latin typeface="Microsoft JhengHei" pitchFamily="34" charset="0"/>
-                <a:ea typeface="Microsoft JhengHei" pitchFamily="34" charset="-122"/>
-                <a:cs typeface="Microsoft JhengHei" pitchFamily="34" charset="-120"/>
+                <a:latin typeface="Hiragino Sans" pitchFamily="34" charset="0"/>
+                <a:ea typeface="Hiragino Sans" pitchFamily="34" charset="-122"/>
+                <a:cs typeface="Hiragino Sans" pitchFamily="34" charset="-120"/>
               </a:rPr>
               <a:t>帳號放行 App Runner、想用最少 infra 步驟托管同一顆容器、不想碰 ALB/VPC 時（本次因 AccessDenied 不建議作主線）。</a:t>
             </a:r>
@@ -27588,9 +27544,9 @@
                 <a:solidFill>
                   <a:srgbClr val="FFFFFF"/>
                 </a:solidFill>
-                <a:latin typeface="Microsoft JhengHei" pitchFamily="34" charset="0"/>
-                <a:ea typeface="Microsoft JhengHei" pitchFamily="34" charset="-122"/>
-                <a:cs typeface="Microsoft JhengHei" pitchFamily="34" charset="-120"/>
+                <a:latin typeface="Hiragino Sans" pitchFamily="34" charset="0"/>
+                <a:ea typeface="Hiragino Sans" pitchFamily="34" charset="-122"/>
+                <a:cs typeface="Hiragino Sans" pitchFamily="34" charset="-120"/>
               </a:rPr>
               <a:t>07</a:t>
             </a:r>
@@ -27602,9 +27558,9 @@
                 <a:solidFill>
                   <a:srgbClr val="8FA8BD"/>
                 </a:solidFill>
-                <a:latin typeface="Microsoft JhengHei" pitchFamily="34" charset="0"/>
-                <a:ea typeface="Microsoft JhengHei" pitchFamily="34" charset="-122"/>
-                <a:cs typeface="Microsoft JhengHei" pitchFamily="34" charset="-120"/>
+                <a:latin typeface="Hiragino Sans" pitchFamily="34" charset="0"/>
+                <a:ea typeface="Hiragino Sans" pitchFamily="34" charset="-122"/>
+                <a:cs typeface="Hiragino Sans" pitchFamily="34" charset="-120"/>
               </a:rPr>
               <a:t>  /  15</a:t>
             </a:r>
@@ -27641,9 +27597,9 @@
                 <a:solidFill>
                   <a:srgbClr val="F4A72B"/>
                 </a:solidFill>
-                <a:latin typeface="Microsoft JhengHei" pitchFamily="34" charset="0"/>
-                <a:ea typeface="Microsoft JhengHei" pitchFamily="34" charset="-122"/>
-                <a:cs typeface="Microsoft JhengHei" pitchFamily="34" charset="-120"/>
+                <a:latin typeface="Hiragino Sans" pitchFamily="34" charset="0"/>
+                <a:ea typeface="Hiragino Sans" pitchFamily="34" charset="-122"/>
+                <a:cs typeface="Hiragino Sans" pitchFamily="34" charset="-120"/>
               </a:rPr>
               <a:t>方案 D · EC2 + DOCKER</a:t>
             </a:r>
@@ -27676,17 +27632,17 @@
               <a:buNone/>
             </a:pPr>
             <a:r>
-              <a:rPr lang="en-US" sz="3600" b="1" dirty="0">
+              <a:rPr lang="en-US" sz="3544" b="1" dirty="0">
                 <a:solidFill>
                   <a:srgbClr val="FFFFFF"/>
                 </a:solidFill>
-                <a:latin typeface="Microsoft JhengHei" pitchFamily="34" charset="0"/>
-                <a:ea typeface="Microsoft JhengHei" pitchFamily="34" charset="-122"/>
-                <a:cs typeface="Microsoft JhengHei" pitchFamily="34" charset="-120"/>
+                <a:latin typeface="Hiragino Sans" pitchFamily="34" charset="0"/>
+                <a:ea typeface="Hiragino Sans" pitchFamily="34" charset="-122"/>
+                <a:cs typeface="Hiragino Sans" pitchFamily="34" charset="-120"/>
               </a:rPr>
               <a:t>單台虛機 docker run，最省最可控的保底路線</a:t>
             </a:r>
-            <a:endParaRPr lang="en-US" sz="3600" dirty="0"/>
+            <a:endParaRPr lang="en-US" sz="3544" dirty="0"/>
           </a:p>
         </p:txBody>
       </p:sp>
@@ -27741,9 +27697,9 @@
                 <a:solidFill>
                   <a:srgbClr val="FFFFFF"/>
                 </a:solidFill>
-                <a:latin typeface="Microsoft JhengHei" pitchFamily="34" charset="0"/>
-                <a:ea typeface="Microsoft JhengHei" pitchFamily="34" charset="-122"/>
-                <a:cs typeface="Microsoft JhengHei" pitchFamily="34" charset="-120"/>
+                <a:latin typeface="Hiragino Sans" pitchFamily="34" charset="0"/>
+                <a:ea typeface="Hiragino Sans" pitchFamily="34" charset="-122"/>
+                <a:cs typeface="Hiragino Sans" pitchFamily="34" charset="-120"/>
               </a:rPr>
               <a:t>成本 最低</a:t>
             </a:r>
@@ -27802,9 +27758,9 @@
                 <a:solidFill>
                   <a:srgbClr val="18293B"/>
                 </a:solidFill>
-                <a:latin typeface="Microsoft JhengHei" pitchFamily="34" charset="0"/>
-                <a:ea typeface="Microsoft JhengHei" pitchFamily="34" charset="-122"/>
-                <a:cs typeface="Microsoft JhengHei" pitchFamily="34" charset="-120"/>
+                <a:latin typeface="Hiragino Sans" pitchFamily="34" charset="0"/>
+                <a:ea typeface="Hiragino Sans" pitchFamily="34" charset="-122"/>
+                <a:cs typeface="Hiragino Sans" pitchFamily="34" charset="-120"/>
               </a:rPr>
               <a:t>黑客松 中 · 保底</a:t>
             </a:r>
@@ -27864,13 +27820,13 @@
               <a:buNone/>
             </a:pPr>
             <a:r>
-              <a:rPr lang="en-US" sz="1200" i="1" dirty="0">
+              <a:rPr lang="en-US" sz="1200" dirty="0">
                 <a:solidFill>
                   <a:srgbClr val="C7D6E4"/>
                 </a:solidFill>
-                <a:latin typeface="Microsoft JhengHei" pitchFamily="34" charset="0"/>
-                <a:ea typeface="Microsoft JhengHei" pitchFamily="34" charset="-122"/>
-                <a:cs typeface="Microsoft JhengHei" pitchFamily="34" charset="-120"/>
+                <a:latin typeface="Hiragino Sans" pitchFamily="34" charset="0"/>
+                <a:ea typeface="Hiragino Sans" pitchFamily="34" charset="-122"/>
+                <a:cs typeface="Hiragino Sans" pitchFamily="34" charset="-120"/>
               </a:rPr>
               <a:t>開一台 EC2（Graviton t4g / x86），docker run 同一顆映像，綁 Elastic IP 得固定位址，安全群組開 8080/443。完全掌控 OS / 網路 / 生命週期，成本壓到最低，無託管服務依賴。</a:t>
             </a:r>
@@ -27907,9 +27863,9 @@
                 <a:solidFill>
                   <a:srgbClr val="2A9D8F"/>
                 </a:solidFill>
-                <a:latin typeface="Microsoft JhengHei" pitchFamily="34" charset="0"/>
-                <a:ea typeface="Microsoft JhengHei" pitchFamily="34" charset="-122"/>
-                <a:cs typeface="Microsoft JhengHei" pitchFamily="34" charset="-120"/>
+                <a:latin typeface="Hiragino Sans" pitchFamily="34" charset="0"/>
+                <a:ea typeface="Hiragino Sans" pitchFamily="34" charset="-122"/>
+                <a:cs typeface="Hiragino Sans" pitchFamily="34" charset="-120"/>
               </a:rPr>
               <a:t>服務組成</a:t>
             </a:r>
@@ -28007,9 +27963,9 @@
                 <a:solidFill>
                   <a:srgbClr val="FFFFFF"/>
                 </a:solidFill>
-                <a:latin typeface="Microsoft JhengHei" pitchFamily="34" charset="0"/>
-                <a:ea typeface="Microsoft JhengHei" pitchFamily="34" charset="-122"/>
-                <a:cs typeface="Microsoft JhengHei" pitchFamily="34" charset="-120"/>
+                <a:latin typeface="Hiragino Sans" pitchFamily="34" charset="0"/>
+                <a:ea typeface="Hiragino Sans" pitchFamily="34" charset="-122"/>
+                <a:cs typeface="Hiragino Sans" pitchFamily="34" charset="-120"/>
               </a:rPr>
               <a:t>EC2</a:t>
             </a:r>
@@ -28049,9 +28005,9 @@
                 <a:solidFill>
                   <a:srgbClr val="FFFFFF"/>
                 </a:solidFill>
-                <a:latin typeface="Microsoft JhengHei" pitchFamily="34" charset="0"/>
-                <a:ea typeface="Microsoft JhengHei" pitchFamily="34" charset="-122"/>
-                <a:cs typeface="Microsoft JhengHei" pitchFamily="34" charset="-120"/>
+                <a:latin typeface="Hiragino Sans" pitchFamily="34" charset="0"/>
+                <a:ea typeface="Hiragino Sans" pitchFamily="34" charset="-122"/>
+                <a:cs typeface="Hiragino Sans" pitchFamily="34" charset="-120"/>
               </a:rPr>
               <a:t>EC2</a:t>
             </a:r>
@@ -28069,9 +28025,9 @@
                 <a:solidFill>
                   <a:srgbClr val="FFFFFF"/>
                 </a:solidFill>
-                <a:latin typeface="Microsoft JhengHei" pitchFamily="34" charset="0"/>
-                <a:ea typeface="Microsoft JhengHei" pitchFamily="34" charset="-122"/>
-                <a:cs typeface="Microsoft JhengHei" pitchFamily="34" charset="-120"/>
+                <a:latin typeface="Hiragino Sans" pitchFamily="34" charset="0"/>
+                <a:ea typeface="Hiragino Sans" pitchFamily="34" charset="-122"/>
+                <a:cs typeface="Hiragino Sans" pitchFamily="34" charset="-120"/>
               </a:rPr>
               <a:t>Graviton</a:t>
             </a:r>
@@ -28111,9 +28067,9 @@
                 <a:solidFill>
                   <a:srgbClr val="C7D6E4"/>
                 </a:solidFill>
-                <a:latin typeface="Microsoft JhengHei" pitchFamily="34" charset="0"/>
-                <a:ea typeface="Microsoft JhengHei" pitchFamily="34" charset="-122"/>
-                <a:cs typeface="Microsoft JhengHei" pitchFamily="34" charset="-120"/>
+                <a:latin typeface="Hiragino Sans" pitchFamily="34" charset="0"/>
+                <a:ea typeface="Hiragino Sans" pitchFamily="34" charset="-122"/>
+                <a:cs typeface="Hiragino Sans" pitchFamily="34" charset="-120"/>
               </a:rPr>
               <a:t>docker run 容器</a:t>
             </a:r>
@@ -28235,9 +28191,9 @@
                 <a:solidFill>
                   <a:srgbClr val="FFFFFF"/>
                 </a:solidFill>
-                <a:latin typeface="Microsoft JhengHei" pitchFamily="34" charset="0"/>
-                <a:ea typeface="Microsoft JhengHei" pitchFamily="34" charset="-122"/>
-                <a:cs typeface="Microsoft JhengHei" pitchFamily="34" charset="-120"/>
+                <a:latin typeface="Hiragino Sans" pitchFamily="34" charset="0"/>
+                <a:ea typeface="Hiragino Sans" pitchFamily="34" charset="-122"/>
+                <a:cs typeface="Hiragino Sans" pitchFamily="34" charset="-120"/>
               </a:rPr>
               <a:t>IP</a:t>
             </a:r>
@@ -28277,9 +28233,9 @@
                 <a:solidFill>
                   <a:srgbClr val="FFFFFF"/>
                 </a:solidFill>
-                <a:latin typeface="Microsoft JhengHei" pitchFamily="34" charset="0"/>
-                <a:ea typeface="Microsoft JhengHei" pitchFamily="34" charset="-122"/>
-                <a:cs typeface="Microsoft JhengHei" pitchFamily="34" charset="-120"/>
+                <a:latin typeface="Hiragino Sans" pitchFamily="34" charset="0"/>
+                <a:ea typeface="Hiragino Sans" pitchFamily="34" charset="-122"/>
+                <a:cs typeface="Hiragino Sans" pitchFamily="34" charset="-120"/>
               </a:rPr>
               <a:t>Elastic IP</a:t>
             </a:r>
@@ -28319,9 +28275,9 @@
                 <a:solidFill>
                   <a:srgbClr val="C7D6E4"/>
                 </a:solidFill>
-                <a:latin typeface="Microsoft JhengHei" pitchFamily="34" charset="0"/>
-                <a:ea typeface="Microsoft JhengHei" pitchFamily="34" charset="-122"/>
-                <a:cs typeface="Microsoft JhengHei" pitchFamily="34" charset="-120"/>
+                <a:latin typeface="Hiragino Sans" pitchFamily="34" charset="0"/>
+                <a:ea typeface="Hiragino Sans" pitchFamily="34" charset="-122"/>
+                <a:cs typeface="Hiragino Sans" pitchFamily="34" charset="-120"/>
               </a:rPr>
               <a:t>固定公網位址</a:t>
             </a:r>
@@ -28443,9 +28399,9 @@
                 <a:solidFill>
                   <a:srgbClr val="FFFFFF"/>
                 </a:solidFill>
-                <a:latin typeface="Microsoft JhengHei" pitchFamily="34" charset="0"/>
-                <a:ea typeface="Microsoft JhengHei" pitchFamily="34" charset="-122"/>
-                <a:cs typeface="Microsoft JhengHei" pitchFamily="34" charset="-120"/>
+                <a:latin typeface="Hiragino Sans" pitchFamily="34" charset="0"/>
+                <a:ea typeface="Hiragino Sans" pitchFamily="34" charset="-122"/>
+                <a:cs typeface="Hiragino Sans" pitchFamily="34" charset="-120"/>
               </a:rPr>
               <a:t>ECR</a:t>
             </a:r>
@@ -28485,9 +28441,9 @@
                 <a:solidFill>
                   <a:srgbClr val="FFFFFF"/>
                 </a:solidFill>
-                <a:latin typeface="Microsoft JhengHei" pitchFamily="34" charset="0"/>
-                <a:ea typeface="Microsoft JhengHei" pitchFamily="34" charset="-122"/>
-                <a:cs typeface="Microsoft JhengHei" pitchFamily="34" charset="-120"/>
+                <a:latin typeface="Hiragino Sans" pitchFamily="34" charset="0"/>
+                <a:ea typeface="Hiragino Sans" pitchFamily="34" charset="-122"/>
+                <a:cs typeface="Hiragino Sans" pitchFamily="34" charset="-120"/>
               </a:rPr>
               <a:t>ECR /</a:t>
             </a:r>
@@ -28505,9 +28461,9 @@
                 <a:solidFill>
                   <a:srgbClr val="FFFFFF"/>
                 </a:solidFill>
-                <a:latin typeface="Microsoft JhengHei" pitchFamily="34" charset="0"/>
-                <a:ea typeface="Microsoft JhengHei" pitchFamily="34" charset="-122"/>
-                <a:cs typeface="Microsoft JhengHei" pitchFamily="34" charset="-120"/>
+                <a:latin typeface="Hiragino Sans" pitchFamily="34" charset="0"/>
+                <a:ea typeface="Hiragino Sans" pitchFamily="34" charset="-122"/>
+                <a:cs typeface="Hiragino Sans" pitchFamily="34" charset="-120"/>
               </a:rPr>
               <a:t>本機映像</a:t>
             </a:r>
@@ -28547,9 +28503,9 @@
                 <a:solidFill>
                   <a:srgbClr val="C7D6E4"/>
                 </a:solidFill>
-                <a:latin typeface="Microsoft JhengHei" pitchFamily="34" charset="0"/>
-                <a:ea typeface="Microsoft JhengHei" pitchFamily="34" charset="-122"/>
-                <a:cs typeface="Microsoft JhengHei" pitchFamily="34" charset="-120"/>
+                <a:latin typeface="Hiragino Sans" pitchFamily="34" charset="0"/>
+                <a:ea typeface="Hiragino Sans" pitchFamily="34" charset="-122"/>
+                <a:cs typeface="Hiragino Sans" pitchFamily="34" charset="-120"/>
               </a:rPr>
               <a:t>pull 或 docker load</a:t>
             </a:r>
@@ -28671,9 +28627,9 @@
                 <a:solidFill>
                   <a:srgbClr val="FFFFFF"/>
                 </a:solidFill>
-                <a:latin typeface="Microsoft JhengHei" pitchFamily="34" charset="0"/>
-                <a:ea typeface="Microsoft JhengHei" pitchFamily="34" charset="-122"/>
-                <a:cs typeface="Microsoft JhengHei" pitchFamily="34" charset="-120"/>
+                <a:latin typeface="Hiragino Sans" pitchFamily="34" charset="0"/>
+                <a:ea typeface="Hiragino Sans" pitchFamily="34" charset="-122"/>
+                <a:cs typeface="Hiragino Sans" pitchFamily="34" charset="-120"/>
               </a:rPr>
               <a:t>SG</a:t>
             </a:r>
@@ -28713,9 +28669,9 @@
                 <a:solidFill>
                   <a:srgbClr val="FFFFFF"/>
                 </a:solidFill>
-                <a:latin typeface="Microsoft JhengHei" pitchFamily="34" charset="0"/>
-                <a:ea typeface="Microsoft JhengHei" pitchFamily="34" charset="-122"/>
-                <a:cs typeface="Microsoft JhengHei" pitchFamily="34" charset="-120"/>
+                <a:latin typeface="Hiragino Sans" pitchFamily="34" charset="0"/>
+                <a:ea typeface="Hiragino Sans" pitchFamily="34" charset="-122"/>
+                <a:cs typeface="Hiragino Sans" pitchFamily="34" charset="-120"/>
               </a:rPr>
               <a:t>Security</a:t>
             </a:r>
@@ -28733,9 +28689,9 @@
                 <a:solidFill>
                   <a:srgbClr val="FFFFFF"/>
                 </a:solidFill>
-                <a:latin typeface="Microsoft JhengHei" pitchFamily="34" charset="0"/>
-                <a:ea typeface="Microsoft JhengHei" pitchFamily="34" charset="-122"/>
-                <a:cs typeface="Microsoft JhengHei" pitchFamily="34" charset="-120"/>
+                <a:latin typeface="Hiragino Sans" pitchFamily="34" charset="0"/>
+                <a:ea typeface="Hiragino Sans" pitchFamily="34" charset="-122"/>
+                <a:cs typeface="Hiragino Sans" pitchFamily="34" charset="-120"/>
               </a:rPr>
               <a:t>Group</a:t>
             </a:r>
@@ -28775,9 +28731,9 @@
                 <a:solidFill>
                   <a:srgbClr val="C7D6E4"/>
                 </a:solidFill>
-                <a:latin typeface="Microsoft JhengHei" pitchFamily="34" charset="0"/>
-                <a:ea typeface="Microsoft JhengHei" pitchFamily="34" charset="-122"/>
-                <a:cs typeface="Microsoft JhengHei" pitchFamily="34" charset="-120"/>
+                <a:latin typeface="Hiragino Sans" pitchFamily="34" charset="0"/>
+                <a:ea typeface="Hiragino Sans" pitchFamily="34" charset="-122"/>
+                <a:cs typeface="Hiragino Sans" pitchFamily="34" charset="-120"/>
               </a:rPr>
               <a:t>開 8080/443</a:t>
             </a:r>
@@ -28899,9 +28855,9 @@
                 <a:solidFill>
                   <a:srgbClr val="FFFFFF"/>
                 </a:solidFill>
-                <a:latin typeface="Microsoft JhengHei" pitchFamily="34" charset="0"/>
-                <a:ea typeface="Microsoft JhengHei" pitchFamily="34" charset="-122"/>
-                <a:cs typeface="Microsoft JhengHei" pitchFamily="34" charset="-120"/>
+                <a:latin typeface="Hiragino Sans" pitchFamily="34" charset="0"/>
+                <a:ea typeface="Hiragino Sans" pitchFamily="34" charset="-122"/>
+                <a:cs typeface="Hiragino Sans" pitchFamily="34" charset="-120"/>
               </a:rPr>
               <a:t>AI</a:t>
             </a:r>
@@ -28941,9 +28897,9 @@
                 <a:solidFill>
                   <a:srgbClr val="FFFFFF"/>
                 </a:solidFill>
-                <a:latin typeface="Microsoft JhengHei" pitchFamily="34" charset="0"/>
-                <a:ea typeface="Microsoft JhengHei" pitchFamily="34" charset="-122"/>
-                <a:cs typeface="Microsoft JhengHei" pitchFamily="34" charset="-120"/>
+                <a:latin typeface="Hiragino Sans" pitchFamily="34" charset="0"/>
+                <a:ea typeface="Hiragino Sans" pitchFamily="34" charset="-122"/>
+                <a:cs typeface="Hiragino Sans" pitchFamily="34" charset="-120"/>
               </a:rPr>
               <a:t>Bedrock</a:t>
             </a:r>
@@ -28983,9 +28939,9 @@
                 <a:solidFill>
                   <a:srgbClr val="C7D6E4"/>
                 </a:solidFill>
-                <a:latin typeface="Microsoft JhengHei" pitchFamily="34" charset="0"/>
-                <a:ea typeface="Microsoft JhengHei" pitchFamily="34" charset="-122"/>
-                <a:cs typeface="Microsoft JhengHei" pitchFamily="34" charset="-120"/>
+                <a:latin typeface="Hiragino Sans" pitchFamily="34" charset="0"/>
+                <a:ea typeface="Hiragino Sans" pitchFamily="34" charset="-122"/>
+                <a:cs typeface="Hiragino Sans" pitchFamily="34" charset="-120"/>
               </a:rPr>
               <a:t>instance role</a:t>
             </a:r>
@@ -29107,9 +29063,9 @@
                 <a:solidFill>
                   <a:srgbClr val="FFFFFF"/>
                 </a:solidFill>
-                <a:latin typeface="Microsoft JhengHei" pitchFamily="34" charset="0"/>
-                <a:ea typeface="Microsoft JhengHei" pitchFamily="34" charset="-122"/>
-                <a:cs typeface="Microsoft JhengHei" pitchFamily="34" charset="-120"/>
+                <a:latin typeface="Hiragino Sans" pitchFamily="34" charset="0"/>
+                <a:ea typeface="Hiragino Sans" pitchFamily="34" charset="-122"/>
+                <a:cs typeface="Hiragino Sans" pitchFamily="34" charset="-120"/>
               </a:rPr>
               <a:t>SNS</a:t>
             </a:r>
@@ -29149,9 +29105,9 @@
                 <a:solidFill>
                   <a:srgbClr val="FFFFFF"/>
                 </a:solidFill>
-                <a:latin typeface="Microsoft JhengHei" pitchFamily="34" charset="0"/>
-                <a:ea typeface="Microsoft JhengHei" pitchFamily="34" charset="-122"/>
-                <a:cs typeface="Microsoft JhengHei" pitchFamily="34" charset="-120"/>
+                <a:latin typeface="Hiragino Sans" pitchFamily="34" charset="0"/>
+                <a:ea typeface="Hiragino Sans" pitchFamily="34" charset="-122"/>
+                <a:cs typeface="Hiragino Sans" pitchFamily="34" charset="-120"/>
               </a:rPr>
               <a:t>SNS</a:t>
             </a:r>
@@ -29191,9 +29147,9 @@
                 <a:solidFill>
                   <a:srgbClr val="C7D6E4"/>
                 </a:solidFill>
-                <a:latin typeface="Microsoft JhengHei" pitchFamily="34" charset="0"/>
-                <a:ea typeface="Microsoft JhengHei" pitchFamily="34" charset="-122"/>
-                <a:cs typeface="Microsoft JhengHei" pitchFamily="34" charset="-120"/>
+                <a:latin typeface="Hiragino Sans" pitchFamily="34" charset="0"/>
+                <a:ea typeface="Hiragino Sans" pitchFamily="34" charset="-122"/>
+                <a:cs typeface="Hiragino Sans" pitchFamily="34" charset="-120"/>
               </a:rPr>
               <a:t>告警</a:t>
             </a:r>
@@ -29308,9 +29264,9 @@
                 <a:solidFill>
                   <a:srgbClr val="FFFFFF"/>
                 </a:solidFill>
-                <a:latin typeface="Microsoft JhengHei" pitchFamily="34" charset="0"/>
-                <a:ea typeface="Microsoft JhengHei" pitchFamily="34" charset="-122"/>
-                <a:cs typeface="Microsoft JhengHei" pitchFamily="34" charset="-120"/>
+                <a:latin typeface="Hiragino Sans" pitchFamily="34" charset="0"/>
+                <a:ea typeface="Hiragino Sans" pitchFamily="34" charset="-122"/>
+                <a:cs typeface="Hiragino Sans" pitchFamily="34" charset="-120"/>
               </a:rPr>
               <a:t>● 優勢</a:t>
             </a:r>
@@ -29354,9 +29310,9 @@
                 <a:solidFill>
                   <a:srgbClr val="C7D6E4"/>
                 </a:solidFill>
-                <a:latin typeface="Microsoft JhengHei" pitchFamily="34" charset="0"/>
-                <a:ea typeface="Microsoft JhengHei" pitchFamily="34" charset="-122"/>
-                <a:cs typeface="Microsoft JhengHei" pitchFamily="34" charset="-120"/>
+                <a:latin typeface="Hiragino Sans" pitchFamily="34" charset="0"/>
+                <a:ea typeface="Hiragino Sans" pitchFamily="34" charset="-122"/>
+                <a:cs typeface="Hiragino Sans" pitchFamily="34" charset="-120"/>
               </a:rPr>
               <a:t>成本最低、最可控：一台機器全包，無託管服務加價</a:t>
             </a:r>
@@ -29378,9 +29334,9 @@
                 <a:solidFill>
                   <a:srgbClr val="C7D6E4"/>
                 </a:solidFill>
-                <a:latin typeface="Microsoft JhengHei" pitchFamily="34" charset="0"/>
-                <a:ea typeface="Microsoft JhengHei" pitchFamily="34" charset="-122"/>
-                <a:cs typeface="Microsoft JhengHei" pitchFamily="34" charset="-120"/>
+                <a:latin typeface="Hiragino Sans" pitchFamily="34" charset="0"/>
+                <a:ea typeface="Hiragino Sans" pitchFamily="34" charset="-122"/>
+                <a:cs typeface="Hiragino Sans" pitchFamily="34" charset="-120"/>
               </a:rPr>
               <a:t>Elastic IP 給固定位址，重啟不換 IP</a:t>
             </a:r>
@@ -29402,9 +29358,9 @@
                 <a:solidFill>
                   <a:srgbClr val="C7D6E4"/>
                 </a:solidFill>
-                <a:latin typeface="Microsoft JhengHei" pitchFamily="34" charset="0"/>
-                <a:ea typeface="Microsoft JhengHei" pitchFamily="34" charset="-122"/>
-                <a:cs typeface="Microsoft JhengHei" pitchFamily="34" charset="-120"/>
+                <a:latin typeface="Hiragino Sans" pitchFamily="34" charset="0"/>
+                <a:ea typeface="Hiragino Sans" pitchFamily="34" charset="-122"/>
+                <a:cs typeface="Hiragino Sans" pitchFamily="34" charset="-120"/>
               </a:rPr>
               <a:t>本機 docker 行為與 EC2 幾乎一致，除錯最直覺</a:t>
             </a:r>
@@ -29426,9 +29382,9 @@
                 <a:solidFill>
                   <a:srgbClr val="C7D6E4"/>
                 </a:solidFill>
-                <a:latin typeface="Microsoft JhengHei" pitchFamily="34" charset="0"/>
-                <a:ea typeface="Microsoft JhengHei" pitchFamily="34" charset="-122"/>
-                <a:cs typeface="Microsoft JhengHei" pitchFamily="34" charset="-120"/>
+                <a:latin typeface="Hiragino Sans" pitchFamily="34" charset="0"/>
+                <a:ea typeface="Hiragino Sans" pitchFamily="34" charset="-122"/>
+                <a:cs typeface="Hiragino Sans" pitchFamily="34" charset="-120"/>
               </a:rPr>
               <a:t>無 App Runner/ALB 權限依賴，帳號 EC2 已實測可用</a:t>
             </a:r>
@@ -29543,9 +29499,9 @@
                 <a:solidFill>
                   <a:srgbClr val="FFFFFF"/>
                 </a:solidFill>
-                <a:latin typeface="Microsoft JhengHei" pitchFamily="34" charset="0"/>
-                <a:ea typeface="Microsoft JhengHei" pitchFamily="34" charset="-122"/>
-                <a:cs typeface="Microsoft JhengHei" pitchFamily="34" charset="-120"/>
+                <a:latin typeface="Hiragino Sans" pitchFamily="34" charset="0"/>
+                <a:ea typeface="Hiragino Sans" pitchFamily="34" charset="-122"/>
+                <a:cs typeface="Hiragino Sans" pitchFamily="34" charset="-120"/>
               </a:rPr>
               <a:t>▲ 取捨 / 風險</a:t>
             </a:r>
@@ -29589,9 +29545,9 @@
                 <a:solidFill>
                   <a:srgbClr val="C7D6E4"/>
                 </a:solidFill>
-                <a:latin typeface="Microsoft JhengHei" pitchFamily="34" charset="0"/>
-                <a:ea typeface="Microsoft JhengHei" pitchFamily="34" charset="-122"/>
-                <a:cs typeface="Microsoft JhengHei" pitchFamily="34" charset="-120"/>
+                <a:latin typeface="Hiragino Sans" pitchFamily="34" charset="0"/>
+                <a:ea typeface="Hiragino Sans" pitchFamily="34" charset="-122"/>
+                <a:cs typeface="Hiragino Sans" pitchFamily="34" charset="-120"/>
               </a:rPr>
               <a:t>要自管 OS patch / Docker / 重啟 / 健康監控，無自動復原</a:t>
             </a:r>
@@ -29613,9 +29569,9 @@
                 <a:solidFill>
                   <a:srgbClr val="C7D6E4"/>
                 </a:solidFill>
-                <a:latin typeface="Microsoft JhengHei" pitchFamily="34" charset="0"/>
-                <a:ea typeface="Microsoft JhengHei" pitchFamily="34" charset="-122"/>
-                <a:cs typeface="Microsoft JhengHei" pitchFamily="34" charset="-120"/>
+                <a:latin typeface="Hiragino Sans" pitchFamily="34" charset="0"/>
+                <a:ea typeface="Hiragino Sans" pitchFamily="34" charset="-122"/>
+                <a:cs typeface="Hiragino Sans" pitchFamily="34" charset="-120"/>
               </a:rPr>
               <a:t>單台＝單點故障，掛了 demo 就斷（需手動重拉）</a:t>
             </a:r>
@@ -29637,9 +29593,9 @@
                 <a:solidFill>
                   <a:srgbClr val="C7D6E4"/>
                 </a:solidFill>
-                <a:latin typeface="Microsoft JhengHei" pitchFamily="34" charset="0"/>
-                <a:ea typeface="Microsoft JhengHei" pitchFamily="34" charset="-122"/>
-                <a:cs typeface="Microsoft JhengHei" pitchFamily="34" charset="-120"/>
+                <a:latin typeface="Hiragino Sans" pitchFamily="34" charset="0"/>
+                <a:ea typeface="Hiragino Sans" pitchFamily="34" charset="-122"/>
+                <a:cs typeface="Hiragino Sans" pitchFamily="34" charset="-120"/>
               </a:rPr>
               <a:t>HTTPS 要自己配（反代 / 憑證），比 ALB 麻煩</a:t>
             </a:r>
@@ -29661,9 +29617,9 @@
                 <a:solidFill>
                   <a:srgbClr val="C7D6E4"/>
                 </a:solidFill>
-                <a:latin typeface="Microsoft JhengHei" pitchFamily="34" charset="0"/>
-                <a:ea typeface="Microsoft JhengHei" pitchFamily="34" charset="-122"/>
-                <a:cs typeface="Microsoft JhengHei" pitchFamily="34" charset="-120"/>
+                <a:latin typeface="Hiragino Sans" pitchFamily="34" charset="0"/>
+                <a:ea typeface="Hiragino Sans" pitchFamily="34" charset="-122"/>
+                <a:cs typeface="Hiragino Sans" pitchFamily="34" charset="-120"/>
               </a:rPr>
               <a:t>非資料驅動、無自動擴縮，擴展敘事最弱</a:t>
             </a:r>
@@ -29732,9 +29688,9 @@
                 <a:solidFill>
                   <a:srgbClr val="F4A72B"/>
                 </a:solidFill>
-                <a:latin typeface="Microsoft JhengHei" pitchFamily="34" charset="0"/>
-                <a:ea typeface="Microsoft JhengHei" pitchFamily="34" charset="-122"/>
-                <a:cs typeface="Microsoft JhengHei" pitchFamily="34" charset="-120"/>
+                <a:latin typeface="Hiragino Sans" pitchFamily="34" charset="0"/>
+                <a:ea typeface="Hiragino Sans" pitchFamily="34" charset="-122"/>
+                <a:cs typeface="Hiragino Sans" pitchFamily="34" charset="-120"/>
               </a:rPr>
               <a:t>◆ 何時選　</a:t>
             </a:r>
@@ -29749,9 +29705,9 @@
                 <a:solidFill>
                   <a:srgbClr val="FFFFFF"/>
                 </a:solidFill>
-                <a:latin typeface="Microsoft JhengHei" pitchFamily="34" charset="0"/>
-                <a:ea typeface="Microsoft JhengHei" pitchFamily="34" charset="-122"/>
-                <a:cs typeface="Microsoft JhengHei" pitchFamily="34" charset="-120"/>
+                <a:latin typeface="Hiragino Sans" pitchFamily="34" charset="0"/>
+                <a:ea typeface="Hiragino Sans" pitchFamily="34" charset="-122"/>
+                <a:cs typeface="Hiragino Sans" pitchFamily="34" charset="-120"/>
               </a:rPr>
               <a:t>要極致省成本、完全掌控，或托管服務權限受阻時，需要一條一定跑得起來的保底部署。</a:t>
             </a:r>
@@ -29973,9 +29929,9 @@
                 <a:solidFill>
                   <a:srgbClr val="FFFFFF"/>
                 </a:solidFill>
-                <a:latin typeface="Microsoft JhengHei" pitchFamily="34" charset="0"/>
-                <a:ea typeface="Microsoft JhengHei" pitchFamily="34" charset="-122"/>
-                <a:cs typeface="Microsoft JhengHei" pitchFamily="34" charset="-120"/>
+                <a:latin typeface="Hiragino Sans" pitchFamily="34" charset="0"/>
+                <a:ea typeface="Hiragino Sans" pitchFamily="34" charset="-122"/>
+                <a:cs typeface="Hiragino Sans" pitchFamily="34" charset="-120"/>
               </a:rPr>
               <a:t>08</a:t>
             </a:r>
@@ -29987,9 +29943,9 @@
                 <a:solidFill>
                   <a:srgbClr val="8FA8BD"/>
                 </a:solidFill>
-                <a:latin typeface="Microsoft JhengHei" pitchFamily="34" charset="0"/>
-                <a:ea typeface="Microsoft JhengHei" pitchFamily="34" charset="-122"/>
-                <a:cs typeface="Microsoft JhengHei" pitchFamily="34" charset="-120"/>
+                <a:latin typeface="Hiragino Sans" pitchFamily="34" charset="0"/>
+                <a:ea typeface="Hiragino Sans" pitchFamily="34" charset="-122"/>
+                <a:cs typeface="Hiragino Sans" pitchFamily="34" charset="-120"/>
               </a:rPr>
               <a:t>  /  15</a:t>
             </a:r>
@@ -30026,9 +29982,9 @@
                 <a:solidFill>
                   <a:srgbClr val="F4A72B"/>
                 </a:solidFill>
-                <a:latin typeface="Microsoft JhengHei" pitchFamily="34" charset="0"/>
-                <a:ea typeface="Microsoft JhengHei" pitchFamily="34" charset="-122"/>
-                <a:cs typeface="Microsoft JhengHei" pitchFamily="34" charset="-120"/>
+                <a:latin typeface="Hiragino Sans" pitchFamily="34" charset="0"/>
+                <a:ea typeface="Hiragino Sans" pitchFamily="34" charset="-122"/>
+                <a:cs typeface="Hiragino Sans" pitchFamily="34" charset="-120"/>
               </a:rPr>
               <a:t>方案 E · 完整資料分析管線（未來式）</a:t>
             </a:r>
@@ -30061,17 +30017,17 @@
               <a:buNone/>
             </a:pPr>
             <a:r>
-              <a:rPr lang="en-US" sz="2869" b="1" dirty="0">
+              <a:rPr lang="en-US" sz="2545" b="1" dirty="0">
                 <a:solidFill>
                   <a:srgbClr val="FFFFFF"/>
                 </a:solidFill>
-                <a:latin typeface="Microsoft JhengHei" pitchFamily="34" charset="0"/>
-                <a:ea typeface="Microsoft JhengHei" pitchFamily="34" charset="-122"/>
-                <a:cs typeface="Microsoft JhengHei" pitchFamily="34" charset="-120"/>
+                <a:latin typeface="Hiragino Sans" pitchFamily="34" charset="0"/>
+                <a:ea typeface="Hiragino Sans" pitchFamily="34" charset="-122"/>
+                <a:cs typeface="Hiragino Sans" pitchFamily="34" charset="-120"/>
               </a:rPr>
               <a:t>S3 Lake → ETL → Athena/Timestream → App + BI + ML</a:t>
             </a:r>
-            <a:endParaRPr lang="en-US" sz="2869" dirty="0"/>
+            <a:endParaRPr lang="en-US" sz="2545" dirty="0"/>
           </a:p>
         </p:txBody>
       </p:sp>
@@ -30126,9 +30082,9 @@
                 <a:solidFill>
                   <a:srgbClr val="FFFFFF"/>
                 </a:solidFill>
-                <a:latin typeface="Microsoft JhengHei" pitchFamily="34" charset="0"/>
-                <a:ea typeface="Microsoft JhengHei" pitchFamily="34" charset="-122"/>
-                <a:cs typeface="Microsoft JhengHei" pitchFamily="34" charset="-120"/>
+                <a:latin typeface="Hiragino Sans" pitchFamily="34" charset="0"/>
+                <a:ea typeface="Hiragino Sans" pitchFamily="34" charset="-122"/>
+                <a:cs typeface="Hiragino Sans" pitchFamily="34" charset="-120"/>
               </a:rPr>
               <a:t>成本 中高</a:t>
             </a:r>
@@ -30187,9 +30143,9 @@
                 <a:solidFill>
                   <a:srgbClr val="18293B"/>
                 </a:solidFill>
-                <a:latin typeface="Microsoft JhengHei" pitchFamily="34" charset="0"/>
-                <a:ea typeface="Microsoft JhengHei" pitchFamily="34" charset="-122"/>
-                <a:cs typeface="Microsoft JhengHei" pitchFamily="34" charset="-120"/>
+                <a:latin typeface="Hiragino Sans" pitchFamily="34" charset="0"/>
+                <a:ea typeface="Hiragino Sans" pitchFamily="34" charset="-122"/>
+                <a:cs typeface="Hiragino Sans" pitchFamily="34" charset="-120"/>
               </a:rPr>
               <a:t>黑客松 低 · 藍圖高</a:t>
             </a:r>
@@ -30249,13 +30205,13 @@
               <a:buNone/>
             </a:pPr>
             <a:r>
-              <a:rPr lang="en-US" sz="1200" i="1" dirty="0">
+              <a:rPr lang="en-US" sz="1200" dirty="0">
                 <a:solidFill>
                   <a:srgbClr val="C7D6E4"/>
                 </a:solidFill>
-                <a:latin typeface="Microsoft JhengHei" pitchFamily="34" charset="0"/>
-                <a:ea typeface="Microsoft JhengHei" pitchFamily="34" charset="-122"/>
-                <a:cs typeface="Microsoft JhengHei" pitchFamily="34" charset="-120"/>
+                <a:latin typeface="Hiragino Sans" pitchFamily="34" charset="0"/>
+                <a:ea typeface="Hiragino Sans" pitchFamily="34" charset="-122"/>
+                <a:cs typeface="Hiragino Sans" pitchFamily="34" charset="-120"/>
               </a:rPr>
               <a:t>企業級藍圖：正午報表落 S3 data lake，Glue/Lambda ETL 清洗換算，Athena（批量）/ Timestream（時序）查詢，App 供決策看板，QuickSight 自助 BI，Bedrock/SageMaker 預測，未來接 IoT Core 收船端遙測。</a:t>
             </a:r>
@@ -30292,9 +30248,9 @@
                 <a:solidFill>
                   <a:srgbClr val="2A9D8F"/>
                 </a:solidFill>
-                <a:latin typeface="Microsoft JhengHei" pitchFamily="34" charset="0"/>
-                <a:ea typeface="Microsoft JhengHei" pitchFamily="34" charset="-122"/>
-                <a:cs typeface="Microsoft JhengHei" pitchFamily="34" charset="-120"/>
+                <a:latin typeface="Hiragino Sans" pitchFamily="34" charset="0"/>
+                <a:ea typeface="Hiragino Sans" pitchFamily="34" charset="-122"/>
+                <a:cs typeface="Hiragino Sans" pitchFamily="34" charset="-120"/>
               </a:rPr>
               <a:t>服務組成</a:t>
             </a:r>
@@ -30392,9 +30348,9 @@
                 <a:solidFill>
                   <a:srgbClr val="FFFFFF"/>
                 </a:solidFill>
-                <a:latin typeface="Microsoft JhengHei" pitchFamily="34" charset="0"/>
-                <a:ea typeface="Microsoft JhengHei" pitchFamily="34" charset="-122"/>
-                <a:cs typeface="Microsoft JhengHei" pitchFamily="34" charset="-120"/>
+                <a:latin typeface="Hiragino Sans" pitchFamily="34" charset="0"/>
+                <a:ea typeface="Hiragino Sans" pitchFamily="34" charset="-122"/>
+                <a:cs typeface="Hiragino Sans" pitchFamily="34" charset="-120"/>
               </a:rPr>
               <a:t>S3</a:t>
             </a:r>
@@ -30434,9 +30390,9 @@
                 <a:solidFill>
                   <a:srgbClr val="FFFFFF"/>
                 </a:solidFill>
-                <a:latin typeface="Microsoft JhengHei" pitchFamily="34" charset="0"/>
-                <a:ea typeface="Microsoft JhengHei" pitchFamily="34" charset="-122"/>
-                <a:cs typeface="Microsoft JhengHei" pitchFamily="34" charset="-120"/>
+                <a:latin typeface="Hiragino Sans" pitchFamily="34" charset="0"/>
+                <a:ea typeface="Hiragino Sans" pitchFamily="34" charset="-122"/>
+                <a:cs typeface="Hiragino Sans" pitchFamily="34" charset="-120"/>
               </a:rPr>
               <a:t>S3</a:t>
             </a:r>
@@ -30454,9 +30410,9 @@
                 <a:solidFill>
                   <a:srgbClr val="FFFFFF"/>
                 </a:solidFill>
-                <a:latin typeface="Microsoft JhengHei" pitchFamily="34" charset="0"/>
-                <a:ea typeface="Microsoft JhengHei" pitchFamily="34" charset="-122"/>
-                <a:cs typeface="Microsoft JhengHei" pitchFamily="34" charset="-120"/>
+                <a:latin typeface="Hiragino Sans" pitchFamily="34" charset="0"/>
+                <a:ea typeface="Hiragino Sans" pitchFamily="34" charset="-122"/>
+                <a:cs typeface="Hiragino Sans" pitchFamily="34" charset="-120"/>
               </a:rPr>
               <a:t>Data Lake</a:t>
             </a:r>
@@ -30496,9 +30452,9 @@
                 <a:solidFill>
                   <a:srgbClr val="C7D6E4"/>
                 </a:solidFill>
-                <a:latin typeface="Microsoft JhengHei" pitchFamily="34" charset="0"/>
-                <a:ea typeface="Microsoft JhengHei" pitchFamily="34" charset="-122"/>
-                <a:cs typeface="Microsoft JhengHei" pitchFamily="34" charset="-120"/>
+                <a:latin typeface="Hiragino Sans" pitchFamily="34" charset="0"/>
+                <a:ea typeface="Hiragino Sans" pitchFamily="34" charset="-122"/>
+                <a:cs typeface="Hiragino Sans" pitchFamily="34" charset="-120"/>
               </a:rPr>
               <a:t>raw / curated</a:t>
             </a:r>
@@ -30620,9 +30576,9 @@
                 <a:solidFill>
                   <a:srgbClr val="0A2540"/>
                 </a:solidFill>
-                <a:latin typeface="Microsoft JhengHei" pitchFamily="34" charset="0"/>
-                <a:ea typeface="Microsoft JhengHei" pitchFamily="34" charset="-122"/>
-                <a:cs typeface="Microsoft JhengHei" pitchFamily="34" charset="-120"/>
+                <a:latin typeface="Hiragino Sans" pitchFamily="34" charset="0"/>
+                <a:ea typeface="Hiragino Sans" pitchFamily="34" charset="-122"/>
+                <a:cs typeface="Hiragino Sans" pitchFamily="34" charset="-120"/>
               </a:rPr>
               <a:t>ETL</a:t>
             </a:r>
@@ -30662,9 +30618,9 @@
                 <a:solidFill>
                   <a:srgbClr val="FFFFFF"/>
                 </a:solidFill>
-                <a:latin typeface="Microsoft JhengHei" pitchFamily="34" charset="0"/>
-                <a:ea typeface="Microsoft JhengHei" pitchFamily="34" charset="-122"/>
-                <a:cs typeface="Microsoft JhengHei" pitchFamily="34" charset="-120"/>
+                <a:latin typeface="Hiragino Sans" pitchFamily="34" charset="0"/>
+                <a:ea typeface="Hiragino Sans" pitchFamily="34" charset="-122"/>
+                <a:cs typeface="Hiragino Sans" pitchFamily="34" charset="-120"/>
               </a:rPr>
               <a:t>Glue /</a:t>
             </a:r>
@@ -30682,9 +30638,9 @@
                 <a:solidFill>
                   <a:srgbClr val="FFFFFF"/>
                 </a:solidFill>
-                <a:latin typeface="Microsoft JhengHei" pitchFamily="34" charset="0"/>
-                <a:ea typeface="Microsoft JhengHei" pitchFamily="34" charset="-122"/>
-                <a:cs typeface="Microsoft JhengHei" pitchFamily="34" charset="-120"/>
+                <a:latin typeface="Hiragino Sans" pitchFamily="34" charset="0"/>
+                <a:ea typeface="Hiragino Sans" pitchFamily="34" charset="-122"/>
+                <a:cs typeface="Hiragino Sans" pitchFamily="34" charset="-120"/>
               </a:rPr>
               <a:t>Lambda ETL</a:t>
             </a:r>
@@ -30724,9 +30680,9 @@
                 <a:solidFill>
                   <a:srgbClr val="C7D6E4"/>
                 </a:solidFill>
-                <a:latin typeface="Microsoft JhengHei" pitchFamily="34" charset="0"/>
-                <a:ea typeface="Microsoft JhengHei" pitchFamily="34" charset="-122"/>
-                <a:cs typeface="Microsoft JhengHei" pitchFamily="34" charset="-120"/>
+                <a:latin typeface="Hiragino Sans" pitchFamily="34" charset="0"/>
+                <a:ea typeface="Hiragino Sans" pitchFamily="34" charset="-122"/>
+                <a:cs typeface="Hiragino Sans" pitchFamily="34" charset="-120"/>
               </a:rPr>
               <a:t>ISO 19030 換算</a:t>
             </a:r>
@@ -30848,9 +30804,9 @@
                 <a:solidFill>
                   <a:srgbClr val="0A2540"/>
                 </a:solidFill>
-                <a:latin typeface="Microsoft JhengHei" pitchFamily="34" charset="0"/>
-                <a:ea typeface="Microsoft JhengHei" pitchFamily="34" charset="-122"/>
-                <a:cs typeface="Microsoft JhengHei" pitchFamily="34" charset="-120"/>
+                <a:latin typeface="Hiragino Sans" pitchFamily="34" charset="0"/>
+                <a:ea typeface="Hiragino Sans" pitchFamily="34" charset="-122"/>
+                <a:cs typeface="Hiragino Sans" pitchFamily="34" charset="-120"/>
               </a:rPr>
               <a:t>SQL</a:t>
             </a:r>
@@ -30890,9 +30846,9 @@
                 <a:solidFill>
                   <a:srgbClr val="FFFFFF"/>
                 </a:solidFill>
-                <a:latin typeface="Microsoft JhengHei" pitchFamily="34" charset="0"/>
-                <a:ea typeface="Microsoft JhengHei" pitchFamily="34" charset="-122"/>
-                <a:cs typeface="Microsoft JhengHei" pitchFamily="34" charset="-120"/>
+                <a:latin typeface="Hiragino Sans" pitchFamily="34" charset="0"/>
+                <a:ea typeface="Hiragino Sans" pitchFamily="34" charset="-122"/>
+                <a:cs typeface="Hiragino Sans" pitchFamily="34" charset="-120"/>
               </a:rPr>
               <a:t>Athena /</a:t>
             </a:r>
@@ -30910,9 +30866,9 @@
                 <a:solidFill>
                   <a:srgbClr val="FFFFFF"/>
                 </a:solidFill>
-                <a:latin typeface="Microsoft JhengHei" pitchFamily="34" charset="0"/>
-                <a:ea typeface="Microsoft JhengHei" pitchFamily="34" charset="-122"/>
-                <a:cs typeface="Microsoft JhengHei" pitchFamily="34" charset="-120"/>
+                <a:latin typeface="Hiragino Sans" pitchFamily="34" charset="0"/>
+                <a:ea typeface="Hiragino Sans" pitchFamily="34" charset="-122"/>
+                <a:cs typeface="Hiragino Sans" pitchFamily="34" charset="-120"/>
               </a:rPr>
               <a:t>Timestream</a:t>
             </a:r>
@@ -30952,9 +30908,9 @@
                 <a:solidFill>
                   <a:srgbClr val="C7D6E4"/>
                 </a:solidFill>
-                <a:latin typeface="Microsoft JhengHei" pitchFamily="34" charset="0"/>
-                <a:ea typeface="Microsoft JhengHei" pitchFamily="34" charset="-122"/>
-                <a:cs typeface="Microsoft JhengHei" pitchFamily="34" charset="-120"/>
+                <a:latin typeface="Hiragino Sans" pitchFamily="34" charset="0"/>
+                <a:ea typeface="Hiragino Sans" pitchFamily="34" charset="-122"/>
+                <a:cs typeface="Hiragino Sans" pitchFamily="34" charset="-120"/>
               </a:rPr>
               <a:t>SQL / 時序</a:t>
             </a:r>
@@ -31076,9 +31032,9 @@
                 <a:solidFill>
                   <a:srgbClr val="FFFFFF"/>
                 </a:solidFill>
-                <a:latin typeface="Microsoft JhengHei" pitchFamily="34" charset="0"/>
-                <a:ea typeface="Microsoft JhengHei" pitchFamily="34" charset="-122"/>
-                <a:cs typeface="Microsoft JhengHei" pitchFamily="34" charset="-120"/>
+                <a:latin typeface="Hiragino Sans" pitchFamily="34" charset="0"/>
+                <a:ea typeface="Hiragino Sans" pitchFamily="34" charset="-122"/>
+                <a:cs typeface="Hiragino Sans" pitchFamily="34" charset="-120"/>
               </a:rPr>
               <a:t>APP</a:t>
             </a:r>
@@ -31118,9 +31074,9 @@
                 <a:solidFill>
                   <a:srgbClr val="FFFFFF"/>
                 </a:solidFill>
-                <a:latin typeface="Microsoft JhengHei" pitchFamily="34" charset="0"/>
-                <a:ea typeface="Microsoft JhengHei" pitchFamily="34" charset="-122"/>
-                <a:cs typeface="Microsoft JhengHei" pitchFamily="34" charset="-120"/>
+                <a:latin typeface="Hiragino Sans" pitchFamily="34" charset="0"/>
+                <a:ea typeface="Hiragino Sans" pitchFamily="34" charset="-122"/>
+                <a:cs typeface="Hiragino Sans" pitchFamily="34" charset="-120"/>
               </a:rPr>
               <a:t>Spring</a:t>
             </a:r>
@@ -31138,9 +31094,9 @@
                 <a:solidFill>
                   <a:srgbClr val="FFFFFF"/>
                 </a:solidFill>
-                <a:latin typeface="Microsoft JhengHei" pitchFamily="34" charset="0"/>
-                <a:ea typeface="Microsoft JhengHei" pitchFamily="34" charset="-122"/>
-                <a:cs typeface="Microsoft JhengHei" pitchFamily="34" charset="-120"/>
+                <a:latin typeface="Hiragino Sans" pitchFamily="34" charset="0"/>
+                <a:ea typeface="Hiragino Sans" pitchFamily="34" charset="-122"/>
+                <a:cs typeface="Hiragino Sans" pitchFamily="34" charset="-120"/>
               </a:rPr>
               <a:t>Boot App</a:t>
             </a:r>
@@ -31180,9 +31136,9 @@
                 <a:solidFill>
                   <a:srgbClr val="C7D6E4"/>
                 </a:solidFill>
-                <a:latin typeface="Microsoft JhengHei" pitchFamily="34" charset="0"/>
-                <a:ea typeface="Microsoft JhengHei" pitchFamily="34" charset="-122"/>
-                <a:cs typeface="Microsoft JhengHei" pitchFamily="34" charset="-120"/>
+                <a:latin typeface="Hiragino Sans" pitchFamily="34" charset="0"/>
+                <a:ea typeface="Hiragino Sans" pitchFamily="34" charset="-122"/>
+                <a:cs typeface="Hiragino Sans" pitchFamily="34" charset="-120"/>
               </a:rPr>
               <a:t>決策看板</a:t>
             </a:r>
@@ -31304,9 +31260,9 @@
                 <a:solidFill>
                   <a:srgbClr val="0A2540"/>
                 </a:solidFill>
-                <a:latin typeface="Microsoft JhengHei" pitchFamily="34" charset="0"/>
-                <a:ea typeface="Microsoft JhengHei" pitchFamily="34" charset="-122"/>
-                <a:cs typeface="Microsoft JhengHei" pitchFamily="34" charset="-120"/>
+                <a:latin typeface="Hiragino Sans" pitchFamily="34" charset="0"/>
+                <a:ea typeface="Hiragino Sans" pitchFamily="34" charset="-122"/>
+                <a:cs typeface="Hiragino Sans" pitchFamily="34" charset="-120"/>
               </a:rPr>
               <a:t>BI</a:t>
             </a:r>
@@ -31346,9 +31302,9 @@
                 <a:solidFill>
                   <a:srgbClr val="FFFFFF"/>
                 </a:solidFill>
-                <a:latin typeface="Microsoft JhengHei" pitchFamily="34" charset="0"/>
-                <a:ea typeface="Microsoft JhengHei" pitchFamily="34" charset="-122"/>
-                <a:cs typeface="Microsoft JhengHei" pitchFamily="34" charset="-120"/>
+                <a:latin typeface="Hiragino Sans" pitchFamily="34" charset="0"/>
+                <a:ea typeface="Hiragino Sans" pitchFamily="34" charset="-122"/>
+                <a:cs typeface="Hiragino Sans" pitchFamily="34" charset="-120"/>
               </a:rPr>
               <a:t>QuickSight</a:t>
             </a:r>
@@ -31388,9 +31344,9 @@
                 <a:solidFill>
                   <a:srgbClr val="C7D6E4"/>
                 </a:solidFill>
-                <a:latin typeface="Microsoft JhengHei" pitchFamily="34" charset="0"/>
-                <a:ea typeface="Microsoft JhengHei" pitchFamily="34" charset="-122"/>
-                <a:cs typeface="Microsoft JhengHei" pitchFamily="34" charset="-120"/>
+                <a:latin typeface="Hiragino Sans" pitchFamily="34" charset="0"/>
+                <a:ea typeface="Hiragino Sans" pitchFamily="34" charset="-122"/>
+                <a:cs typeface="Hiragino Sans" pitchFamily="34" charset="-120"/>
               </a:rPr>
               <a:t>自助 BI</a:t>
             </a:r>
@@ -31512,9 +31468,9 @@
                 <a:solidFill>
                   <a:srgbClr val="FFFFFF"/>
                 </a:solidFill>
-                <a:latin typeface="Microsoft JhengHei" pitchFamily="34" charset="0"/>
-                <a:ea typeface="Microsoft JhengHei" pitchFamily="34" charset="-122"/>
-                <a:cs typeface="Microsoft JhengHei" pitchFamily="34" charset="-120"/>
+                <a:latin typeface="Hiragino Sans" pitchFamily="34" charset="0"/>
+                <a:ea typeface="Hiragino Sans" pitchFamily="34" charset="-122"/>
+                <a:cs typeface="Hiragino Sans" pitchFamily="34" charset="-120"/>
               </a:rPr>
               <a:t>ML</a:t>
             </a:r>
@@ -31554,9 +31510,9 @@
                 <a:solidFill>
                   <a:srgbClr val="FFFFFF"/>
                 </a:solidFill>
-                <a:latin typeface="Microsoft JhengHei" pitchFamily="34" charset="0"/>
-                <a:ea typeface="Microsoft JhengHei" pitchFamily="34" charset="-122"/>
-                <a:cs typeface="Microsoft JhengHei" pitchFamily="34" charset="-120"/>
+                <a:latin typeface="Hiragino Sans" pitchFamily="34" charset="0"/>
+                <a:ea typeface="Hiragino Sans" pitchFamily="34" charset="-122"/>
+                <a:cs typeface="Hiragino Sans" pitchFamily="34" charset="-120"/>
               </a:rPr>
               <a:t>Bedrock /</a:t>
             </a:r>
@@ -31574,9 +31530,9 @@
                 <a:solidFill>
                   <a:srgbClr val="FFFFFF"/>
                 </a:solidFill>
-                <a:latin typeface="Microsoft JhengHei" pitchFamily="34" charset="0"/>
-                <a:ea typeface="Microsoft JhengHei" pitchFamily="34" charset="-122"/>
-                <a:cs typeface="Microsoft JhengHei" pitchFamily="34" charset="-120"/>
+                <a:latin typeface="Hiragino Sans" pitchFamily="34" charset="0"/>
+                <a:ea typeface="Hiragino Sans" pitchFamily="34" charset="-122"/>
+                <a:cs typeface="Hiragino Sans" pitchFamily="34" charset="-120"/>
               </a:rPr>
               <a:t>SageMaker</a:t>
             </a:r>
@@ -31616,9 +31572,9 @@
                 <a:solidFill>
                   <a:srgbClr val="C7D6E4"/>
                 </a:solidFill>
-                <a:latin typeface="Microsoft JhengHei" pitchFamily="34" charset="0"/>
-                <a:ea typeface="Microsoft JhengHei" pitchFamily="34" charset="-122"/>
-                <a:cs typeface="Microsoft JhengHei" pitchFamily="34" charset="-120"/>
+                <a:latin typeface="Hiragino Sans" pitchFamily="34" charset="0"/>
+                <a:ea typeface="Hiragino Sans" pitchFamily="34" charset="-122"/>
+                <a:cs typeface="Hiragino Sans" pitchFamily="34" charset="-120"/>
               </a:rPr>
               <a:t>簡報 + 預測</a:t>
             </a:r>
@@ -31740,9 +31696,9 @@
                 <a:solidFill>
                   <a:srgbClr val="FFFFFF"/>
                 </a:solidFill>
-                <a:latin typeface="Microsoft JhengHei" pitchFamily="34" charset="0"/>
-                <a:ea typeface="Microsoft JhengHei" pitchFamily="34" charset="-122"/>
-                <a:cs typeface="Microsoft JhengHei" pitchFamily="34" charset="-120"/>
+                <a:latin typeface="Hiragino Sans" pitchFamily="34" charset="0"/>
+                <a:ea typeface="Hiragino Sans" pitchFamily="34" charset="-122"/>
+                <a:cs typeface="Hiragino Sans" pitchFamily="34" charset="-120"/>
               </a:rPr>
               <a:t>IoT</a:t>
             </a:r>
@@ -31782,9 +31738,9 @@
                 <a:solidFill>
                   <a:srgbClr val="FFFFFF"/>
                 </a:solidFill>
-                <a:latin typeface="Microsoft JhengHei" pitchFamily="34" charset="0"/>
-                <a:ea typeface="Microsoft JhengHei" pitchFamily="34" charset="-122"/>
-                <a:cs typeface="Microsoft JhengHei" pitchFamily="34" charset="-120"/>
+                <a:latin typeface="Hiragino Sans" pitchFamily="34" charset="0"/>
+                <a:ea typeface="Hiragino Sans" pitchFamily="34" charset="-122"/>
+                <a:cs typeface="Hiragino Sans" pitchFamily="34" charset="-120"/>
               </a:rPr>
               <a:t>IoT Core</a:t>
             </a:r>
@@ -31824,9 +31780,9 @@
                 <a:solidFill>
                   <a:srgbClr val="C7D6E4"/>
                 </a:solidFill>
-                <a:latin typeface="Microsoft JhengHei" pitchFamily="34" charset="0"/>
-                <a:ea typeface="Microsoft JhengHei" pitchFamily="34" charset="-122"/>
-                <a:cs typeface="Microsoft JhengHei" pitchFamily="34" charset="-120"/>
+                <a:latin typeface="Hiragino Sans" pitchFamily="34" charset="0"/>
+                <a:ea typeface="Hiragino Sans" pitchFamily="34" charset="-122"/>
+                <a:cs typeface="Hiragino Sans" pitchFamily="34" charset="-120"/>
               </a:rPr>
               <a:t>未來遙測</a:t>
             </a:r>
@@ -31941,9 +31897,9 @@
                 <a:solidFill>
                   <a:srgbClr val="FFFFFF"/>
                 </a:solidFill>
-                <a:latin typeface="Microsoft JhengHei" pitchFamily="34" charset="0"/>
-                <a:ea typeface="Microsoft JhengHei" pitchFamily="34" charset="-122"/>
-                <a:cs typeface="Microsoft JhengHei" pitchFamily="34" charset="-120"/>
+                <a:latin typeface="Hiragino Sans" pitchFamily="34" charset="0"/>
+                <a:ea typeface="Hiragino Sans" pitchFamily="34" charset="-122"/>
+                <a:cs typeface="Hiragino Sans" pitchFamily="34" charset="-120"/>
               </a:rPr>
               <a:t>● 優勢</a:t>
             </a:r>
@@ -31987,9 +31943,9 @@
                 <a:solidFill>
                   <a:srgbClr val="C7D6E4"/>
                 </a:solidFill>
-                <a:latin typeface="Microsoft JhengHei" pitchFamily="34" charset="0"/>
-                <a:ea typeface="Microsoft JhengHei" pitchFamily="34" charset="-122"/>
-                <a:cs typeface="Microsoft JhengHei" pitchFamily="34" charset="-120"/>
+                <a:latin typeface="Hiragino Sans" pitchFamily="34" charset="0"/>
+                <a:ea typeface="Hiragino Sans" pitchFamily="34" charset="-122"/>
+                <a:cs typeface="Hiragino Sans" pitchFamily="34" charset="-120"/>
               </a:rPr>
               <a:t>最完整企業級藍圖，命中『企業資料應用說明』與 15→97 艘擴展敘事</a:t>
             </a:r>
@@ -32011,9 +31967,9 @@
                 <a:solidFill>
                   <a:srgbClr val="C7D6E4"/>
                 </a:solidFill>
-                <a:latin typeface="Microsoft JhengHei" pitchFamily="34" charset="0"/>
-                <a:ea typeface="Microsoft JhengHei" pitchFamily="34" charset="-122"/>
-                <a:cs typeface="Microsoft JhengHei" pitchFamily="34" charset="-120"/>
+                <a:latin typeface="Hiragino Sans" pitchFamily="34" charset="0"/>
+                <a:ea typeface="Hiragino Sans" pitchFamily="34" charset="-122"/>
+                <a:cs typeface="Hiragino Sans" pitchFamily="34" charset="-120"/>
               </a:rPr>
               <a:t>資料驅動 + BI 自助分析 + 預測 + 即時遙測，商用與願景分最高</a:t>
             </a:r>
@@ -32035,9 +31991,9 @@
                 <a:solidFill>
                   <a:srgbClr val="C7D6E4"/>
                 </a:solidFill>
-                <a:latin typeface="Microsoft JhengHei" pitchFamily="34" charset="0"/>
-                <a:ea typeface="Microsoft JhengHei" pitchFamily="34" charset="-122"/>
-                <a:cs typeface="Microsoft JhengHei" pitchFamily="34" charset="-120"/>
+                <a:latin typeface="Hiragino Sans" pitchFamily="34" charset="0"/>
+                <a:ea typeface="Hiragino Sans" pitchFamily="34" charset="-122"/>
+                <a:cs typeface="Hiragino Sans" pitchFamily="34" charset="-120"/>
               </a:rPr>
               <a:t>S3 單一資料源、分層清晰，符合資料治理與封存要求</a:t>
             </a:r>
@@ -32059,9 +32015,9 @@
                 <a:solidFill>
                   <a:srgbClr val="C7D6E4"/>
                 </a:solidFill>
-                <a:latin typeface="Microsoft JhengHei" pitchFamily="34" charset="0"/>
-                <a:ea typeface="Microsoft JhengHei" pitchFamily="34" charset="-122"/>
-                <a:cs typeface="Microsoft JhengHei" pitchFamily="34" charset="-120"/>
+                <a:latin typeface="Hiragino Sans" pitchFamily="34" charset="0"/>
+                <a:ea typeface="Hiragino Sans" pitchFamily="34" charset="-122"/>
+                <a:cs typeface="Hiragino Sans" pitchFamily="34" charset="-120"/>
               </a:rPr>
               <a:t>Athena/Timestream/QuickSight 全託管，長期可營運</a:t>
             </a:r>
@@ -32176,9 +32132,9 @@
                 <a:solidFill>
                   <a:srgbClr val="FFFFFF"/>
                 </a:solidFill>
-                <a:latin typeface="Microsoft JhengHei" pitchFamily="34" charset="0"/>
-                <a:ea typeface="Microsoft JhengHei" pitchFamily="34" charset="-122"/>
-                <a:cs typeface="Microsoft JhengHei" pitchFamily="34" charset="-120"/>
+                <a:latin typeface="Hiragino Sans" pitchFamily="34" charset="0"/>
+                <a:ea typeface="Hiragino Sans" pitchFamily="34" charset="-122"/>
+                <a:cs typeface="Hiragino Sans" pitchFamily="34" charset="-120"/>
               </a:rPr>
               <a:t>▲ 取捨 / 風險</a:t>
             </a:r>
@@ -32222,9 +32178,9 @@
                 <a:solidFill>
                   <a:srgbClr val="C7D6E4"/>
                 </a:solidFill>
-                <a:latin typeface="Microsoft JhengHei" pitchFamily="34" charset="0"/>
-                <a:ea typeface="Microsoft JhengHei" pitchFamily="34" charset="-122"/>
-                <a:cs typeface="Microsoft JhengHei" pitchFamily="34" charset="-120"/>
+                <a:latin typeface="Hiragino Sans" pitchFamily="34" charset="0"/>
+                <a:ea typeface="Hiragino Sans" pitchFamily="34" charset="-122"/>
+                <a:cs typeface="Hiragino Sans" pitchFamily="34" charset="-120"/>
               </a:rPr>
               <a:t>元件最多、整合最重，3 天內不可能全做完，只能藍圖 + 局部 PoC</a:t>
             </a:r>
@@ -32246,9 +32202,9 @@
                 <a:solidFill>
                   <a:srgbClr val="C7D6E4"/>
                 </a:solidFill>
-                <a:latin typeface="Microsoft JhengHei" pitchFamily="34" charset="0"/>
-                <a:ea typeface="Microsoft JhengHei" pitchFamily="34" charset="-122"/>
-                <a:cs typeface="Microsoft JhengHei" pitchFamily="34" charset="-120"/>
+                <a:latin typeface="Hiragino Sans" pitchFamily="34" charset="0"/>
+                <a:ea typeface="Hiragino Sans" pitchFamily="34" charset="-122"/>
+                <a:cs typeface="Hiragino Sans" pitchFamily="34" charset="-120"/>
               </a:rPr>
               <a:t>SageMaker / IoT Core 屬 stretch，現場跑真流程風險高</a:t>
             </a:r>
@@ -32270,9 +32226,9 @@
                 <a:solidFill>
                   <a:srgbClr val="C7D6E4"/>
                 </a:solidFill>
-                <a:latin typeface="Microsoft JhengHei" pitchFamily="34" charset="0"/>
-                <a:ea typeface="Microsoft JhengHei" pitchFamily="34" charset="-122"/>
-                <a:cs typeface="Microsoft JhengHei" pitchFamily="34" charset="-120"/>
+                <a:latin typeface="Hiragino Sans" pitchFamily="34" charset="0"/>
+                <a:ea typeface="Hiragino Sans" pitchFamily="34" charset="-122"/>
+                <a:cs typeface="Hiragino Sans" pitchFamily="34" charset="-120"/>
               </a:rPr>
               <a:t>多查詢 / BI 層學習與設定成本高，易在時限內卡住</a:t>
             </a:r>
@@ -32294,9 +32250,9 @@
                 <a:solidFill>
                   <a:srgbClr val="C7D6E4"/>
                 </a:solidFill>
-                <a:latin typeface="Microsoft JhengHei" pitchFamily="34" charset="0"/>
-                <a:ea typeface="Microsoft JhengHei" pitchFamily="34" charset="-122"/>
-                <a:cs typeface="Microsoft JhengHei" pitchFamily="34" charset="-120"/>
+                <a:latin typeface="Hiragino Sans" pitchFamily="34" charset="0"/>
+                <a:ea typeface="Hiragino Sans" pitchFamily="34" charset="-122"/>
+                <a:cs typeface="Hiragino Sans" pitchFamily="34" charset="-120"/>
               </a:rPr>
               <a:t>過度工程對 hackathon 反而稀釋 demo 焦點</a:t>
             </a:r>
@@ -32365,9 +32321,9 @@
                 <a:solidFill>
                   <a:srgbClr val="F4A72B"/>
                 </a:solidFill>
-                <a:latin typeface="Microsoft JhengHei" pitchFamily="34" charset="0"/>
-                <a:ea typeface="Microsoft JhengHei" pitchFamily="34" charset="-122"/>
-                <a:cs typeface="Microsoft JhengHei" pitchFamily="34" charset="-120"/>
+                <a:latin typeface="Hiragino Sans" pitchFamily="34" charset="0"/>
+                <a:ea typeface="Hiragino Sans" pitchFamily="34" charset="-122"/>
+                <a:cs typeface="Hiragino Sans" pitchFamily="34" charset="-120"/>
               </a:rPr>
               <a:t>◆ 何時選　</a:t>
             </a:r>
@@ -32382,9 +32338,9 @@
                 <a:solidFill>
                   <a:srgbClr val="FFFFFF"/>
                 </a:solidFill>
-                <a:latin typeface="Microsoft JhengHei" pitchFamily="34" charset="0"/>
-                <a:ea typeface="Microsoft JhengHei" pitchFamily="34" charset="-122"/>
-                <a:cs typeface="Microsoft JhengHei" pitchFamily="34" charset="-120"/>
+                <a:latin typeface="Hiragino Sans" pitchFamily="34" charset="0"/>
+                <a:ea typeface="Hiragino Sans" pitchFamily="34" charset="-122"/>
+                <a:cs typeface="Hiragino Sans" pitchFamily="34" charset="-120"/>
               </a:rPr>
               <a:t>要在簡報中展示從 hackathon demo 到全艦隊營運平台的完整演進路線圖、拿商用價值與願景分，而非現場實跑時。</a:t>
             </a:r>
@@ -32606,9 +32562,9 @@
                 <a:solidFill>
                   <a:srgbClr val="FFFFFF"/>
                 </a:solidFill>
-                <a:latin typeface="Microsoft JhengHei" pitchFamily="34" charset="0"/>
-                <a:ea typeface="Microsoft JhengHei" pitchFamily="34" charset="-122"/>
-                <a:cs typeface="Microsoft JhengHei" pitchFamily="34" charset="-120"/>
+                <a:latin typeface="Hiragino Sans" pitchFamily="34" charset="0"/>
+                <a:ea typeface="Hiragino Sans" pitchFamily="34" charset="-122"/>
+                <a:cs typeface="Hiragino Sans" pitchFamily="34" charset="-120"/>
               </a:rPr>
               <a:t>09</a:t>
             </a:r>
@@ -32620,9 +32576,9 @@
                 <a:solidFill>
                   <a:srgbClr val="8FA8BD"/>
                 </a:solidFill>
-                <a:latin typeface="Microsoft JhengHei" pitchFamily="34" charset="0"/>
-                <a:ea typeface="Microsoft JhengHei" pitchFamily="34" charset="-122"/>
-                <a:cs typeface="Microsoft JhengHei" pitchFamily="34" charset="-120"/>
+                <a:latin typeface="Hiragino Sans" pitchFamily="34" charset="0"/>
+                <a:ea typeface="Hiragino Sans" pitchFamily="34" charset="-122"/>
+                <a:cs typeface="Hiragino Sans" pitchFamily="34" charset="-120"/>
               </a:rPr>
               <a:t>  /  15</a:t>
             </a:r>
@@ -32659,9 +32615,9 @@
                 <a:solidFill>
                   <a:srgbClr val="F4A72B"/>
                 </a:solidFill>
-                <a:latin typeface="Microsoft JhengHei" pitchFamily="34" charset="0"/>
-                <a:ea typeface="Microsoft JhengHei" pitchFamily="34" charset="-122"/>
-                <a:cs typeface="Microsoft JhengHei" pitchFamily="34" charset="-120"/>
+                <a:latin typeface="Hiragino Sans" pitchFamily="34" charset="0"/>
+                <a:ea typeface="Hiragino Sans" pitchFamily="34" charset="-122"/>
+                <a:cs typeface="Hiragino Sans" pitchFamily="34" charset="-120"/>
               </a:rPr>
               <a:t>SECURITY · 縱深防禦</a:t>
             </a:r>
@@ -32698,9 +32654,9 @@
                 <a:solidFill>
                   <a:srgbClr val="FFFFFF"/>
                 </a:solidFill>
-                <a:latin typeface="Microsoft JhengHei" pitchFamily="34" charset="0"/>
-                <a:ea typeface="Microsoft JhengHei" pitchFamily="34" charset="-122"/>
-                <a:cs typeface="Microsoft JhengHei" pitchFamily="34" charset="-120"/>
+                <a:latin typeface="Hiragino Sans" pitchFamily="34" charset="0"/>
+                <a:ea typeface="Hiragino Sans" pitchFamily="34" charset="-122"/>
+                <a:cs typeface="Hiragino Sans" pitchFamily="34" charset="-120"/>
               </a:rPr>
               <a:t>資安：VPC 隔離 + GuardDuty</a:t>
             </a:r>
@@ -32760,13 +32716,13 @@
               <a:buNone/>
             </a:pPr>
             <a:r>
-              <a:rPr lang="en-US" sz="1250" i="1" dirty="0">
+              <a:rPr lang="en-US" sz="1250" dirty="0">
                 <a:solidFill>
                   <a:srgbClr val="C7D6E4"/>
                 </a:solidFill>
-                <a:latin typeface="Microsoft JhengHei" pitchFamily="34" charset="0"/>
-                <a:ea typeface="Microsoft JhengHei" pitchFamily="34" charset="-122"/>
-                <a:cs typeface="Microsoft JhengHei" pitchFamily="34" charset="-120"/>
+                <a:latin typeface="Hiragino Sans" pitchFamily="34" charset="0"/>
+                <a:ea typeface="Hiragino Sans" pitchFamily="34" charset="-122"/>
+                <a:cs typeface="Hiragino Sans" pitchFamily="34" charset="-120"/>
               </a:rPr>
               <a:t>縱深防禦 (defense in depth)：邊緣擋量、VPC 最小暴露、帳號級偵測、全程加密與稽核 — 逐層收斂攻擊面，任一層被突破，下一層仍在。</a:t>
             </a:r>
@@ -32832,9 +32788,9 @@
                 <a:solidFill>
                   <a:srgbClr val="2A9D8F"/>
                 </a:solidFill>
-                <a:latin typeface="Microsoft JhengHei" pitchFamily="34" charset="0"/>
-                <a:ea typeface="Microsoft JhengHei" pitchFamily="34" charset="-122"/>
-                <a:cs typeface="Microsoft JhengHei" pitchFamily="34" charset="-120"/>
+                <a:latin typeface="Hiragino Sans" pitchFamily="34" charset="0"/>
+                <a:ea typeface="Hiragino Sans" pitchFamily="34" charset="-122"/>
+                <a:cs typeface="Hiragino Sans" pitchFamily="34" charset="-120"/>
               </a:rPr>
               <a:t>① 邊緣</a:t>
             </a:r>
@@ -32871,9 +32827,9 @@
                 <a:solidFill>
                   <a:srgbClr val="C7D6E4"/>
                 </a:solidFill>
-                <a:latin typeface="Microsoft JhengHei" pitchFamily="34" charset="0"/>
-                <a:ea typeface="Microsoft JhengHei" pitchFamily="34" charset="-122"/>
-                <a:cs typeface="Microsoft JhengHei" pitchFamily="34" charset="-120"/>
+                <a:latin typeface="Hiragino Sans" pitchFamily="34" charset="0"/>
+                <a:ea typeface="Hiragino Sans" pitchFamily="34" charset="-122"/>
+                <a:cs typeface="Hiragino Sans" pitchFamily="34" charset="-120"/>
               </a:rPr>
               <a:t>擋量 · L7 過濾</a:t>
             </a:r>
@@ -32971,9 +32927,9 @@
                 <a:solidFill>
                   <a:srgbClr val="FFFFFF"/>
                 </a:solidFill>
-                <a:latin typeface="Microsoft JhengHei" pitchFamily="34" charset="0"/>
-                <a:ea typeface="Microsoft JhengHei" pitchFamily="34" charset="-122"/>
-                <a:cs typeface="Microsoft JhengHei" pitchFamily="34" charset="-120"/>
+                <a:latin typeface="Hiragino Sans" pitchFamily="34" charset="0"/>
+                <a:ea typeface="Hiragino Sans" pitchFamily="34" charset="-122"/>
+                <a:cs typeface="Hiragino Sans" pitchFamily="34" charset="-120"/>
               </a:rPr>
               <a:t>SLD</a:t>
             </a:r>
@@ -33013,9 +32969,9 @@
                 <a:solidFill>
                   <a:srgbClr val="FFFFFF"/>
                 </a:solidFill>
-                <a:latin typeface="Microsoft JhengHei" pitchFamily="34" charset="0"/>
-                <a:ea typeface="Microsoft JhengHei" pitchFamily="34" charset="-122"/>
-                <a:cs typeface="Microsoft JhengHei" pitchFamily="34" charset="-120"/>
+                <a:latin typeface="Hiragino Sans" pitchFamily="34" charset="0"/>
+                <a:ea typeface="Hiragino Sans" pitchFamily="34" charset="-122"/>
+                <a:cs typeface="Hiragino Sans" pitchFamily="34" charset="-120"/>
               </a:rPr>
               <a:t>AWS Shield</a:t>
             </a:r>
@@ -33055,9 +33011,9 @@
                 <a:solidFill>
                   <a:srgbClr val="C7D6E4"/>
                 </a:solidFill>
-                <a:latin typeface="Microsoft JhengHei" pitchFamily="34" charset="0"/>
-                <a:ea typeface="Microsoft JhengHei" pitchFamily="34" charset="-122"/>
-                <a:cs typeface="Microsoft JhengHei" pitchFamily="34" charset="-120"/>
+                <a:latin typeface="Hiragino Sans" pitchFamily="34" charset="0"/>
+                <a:ea typeface="Hiragino Sans" pitchFamily="34" charset="-122"/>
+                <a:cs typeface="Hiragino Sans" pitchFamily="34" charset="-120"/>
               </a:rPr>
               <a:t>DDoS 防護</a:t>
             </a:r>
@@ -33155,9 +33111,9 @@
                 <a:solidFill>
                   <a:srgbClr val="FFFFFF"/>
                 </a:solidFill>
-                <a:latin typeface="Microsoft JhengHei" pitchFamily="34" charset="0"/>
-                <a:ea typeface="Microsoft JhengHei" pitchFamily="34" charset="-122"/>
-                <a:cs typeface="Microsoft JhengHei" pitchFamily="34" charset="-120"/>
+                <a:latin typeface="Hiragino Sans" pitchFamily="34" charset="0"/>
+                <a:ea typeface="Hiragino Sans" pitchFamily="34" charset="-122"/>
+                <a:cs typeface="Hiragino Sans" pitchFamily="34" charset="-120"/>
               </a:rPr>
               <a:t>WAF</a:t>
             </a:r>
@@ -33197,9 +33153,9 @@
                 <a:solidFill>
                   <a:srgbClr val="FFFFFF"/>
                 </a:solidFill>
-                <a:latin typeface="Microsoft JhengHei" pitchFamily="34" charset="0"/>
-                <a:ea typeface="Microsoft JhengHei" pitchFamily="34" charset="-122"/>
-                <a:cs typeface="Microsoft JhengHei" pitchFamily="34" charset="-120"/>
+                <a:latin typeface="Hiragino Sans" pitchFamily="34" charset="0"/>
+                <a:ea typeface="Hiragino Sans" pitchFamily="34" charset="-122"/>
+                <a:cs typeface="Hiragino Sans" pitchFamily="34" charset="-120"/>
               </a:rPr>
               <a:t>AWS WAF</a:t>
             </a:r>
@@ -33239,9 +33195,9 @@
                 <a:solidFill>
                   <a:srgbClr val="C7D6E4"/>
                 </a:solidFill>
-                <a:latin typeface="Microsoft JhengHei" pitchFamily="34" charset="0"/>
-                <a:ea typeface="Microsoft JhengHei" pitchFamily="34" charset="-122"/>
-                <a:cs typeface="Microsoft JhengHei" pitchFamily="34" charset="-120"/>
+                <a:latin typeface="Hiragino Sans" pitchFamily="34" charset="0"/>
+                <a:ea typeface="Hiragino Sans" pitchFamily="34" charset="-122"/>
+                <a:cs typeface="Hiragino Sans" pitchFamily="34" charset="-120"/>
               </a:rPr>
               <a:t>L7 規則過濾</a:t>
             </a:r>
@@ -33307,9 +33263,9 @@
                 <a:solidFill>
                   <a:srgbClr val="2A9D8F"/>
                 </a:solidFill>
-                <a:latin typeface="Microsoft JhengHei" pitchFamily="34" charset="0"/>
-                <a:ea typeface="Microsoft JhengHei" pitchFamily="34" charset="-122"/>
-                <a:cs typeface="Microsoft JhengHei" pitchFamily="34" charset="-120"/>
+                <a:latin typeface="Hiragino Sans" pitchFamily="34" charset="0"/>
+                <a:ea typeface="Hiragino Sans" pitchFamily="34" charset="-122"/>
+                <a:cs typeface="Hiragino Sans" pitchFamily="34" charset="-120"/>
               </a:rPr>
               <a:t>② VPC 隔離</a:t>
             </a:r>
@@ -33346,9 +33302,9 @@
                 <a:solidFill>
                   <a:srgbClr val="C7D6E4"/>
                 </a:solidFill>
-                <a:latin typeface="Microsoft JhengHei" pitchFamily="34" charset="0"/>
-                <a:ea typeface="Microsoft JhengHei" pitchFamily="34" charset="-122"/>
-                <a:cs typeface="Microsoft JhengHei" pitchFamily="34" charset="-120"/>
+                <a:latin typeface="Hiragino Sans" pitchFamily="34" charset="0"/>
+                <a:ea typeface="Hiragino Sans" pitchFamily="34" charset="-122"/>
+                <a:cs typeface="Hiragino Sans" pitchFamily="34" charset="-120"/>
               </a:rPr>
               <a:t>最小暴露面</a:t>
             </a:r>
@@ -33446,9 +33402,9 @@
                 <a:solidFill>
                   <a:srgbClr val="FFFFFF"/>
                 </a:solidFill>
-                <a:latin typeface="Microsoft JhengHei" pitchFamily="34" charset="0"/>
-                <a:ea typeface="Microsoft JhengHei" pitchFamily="34" charset="-122"/>
-                <a:cs typeface="Microsoft JhengHei" pitchFamily="34" charset="-120"/>
+                <a:latin typeface="Hiragino Sans" pitchFamily="34" charset="0"/>
+                <a:ea typeface="Hiragino Sans" pitchFamily="34" charset="-122"/>
+                <a:cs typeface="Hiragino Sans" pitchFamily="34" charset="-120"/>
               </a:rPr>
               <a:t>ALB</a:t>
             </a:r>
@@ -33488,9 +33444,9 @@
                 <a:solidFill>
                   <a:srgbClr val="FFFFFF"/>
                 </a:solidFill>
-                <a:latin typeface="Microsoft JhengHei" pitchFamily="34" charset="0"/>
-                <a:ea typeface="Microsoft JhengHei" pitchFamily="34" charset="-122"/>
-                <a:cs typeface="Microsoft JhengHei" pitchFamily="34" charset="-120"/>
+                <a:latin typeface="Hiragino Sans" pitchFamily="34" charset="0"/>
+                <a:ea typeface="Hiragino Sans" pitchFamily="34" charset="-122"/>
+                <a:cs typeface="Hiragino Sans" pitchFamily="34" charset="-120"/>
               </a:rPr>
               <a:t>公有子網 · ALB</a:t>
             </a:r>
@@ -33530,9 +33486,9 @@
                 <a:solidFill>
                   <a:srgbClr val="C7D6E4"/>
                 </a:solidFill>
-                <a:latin typeface="Microsoft JhengHei" pitchFamily="34" charset="0"/>
-                <a:ea typeface="Microsoft JhengHei" pitchFamily="34" charset="-122"/>
-                <a:cs typeface="Microsoft JhengHei" pitchFamily="34" charset="-120"/>
+                <a:latin typeface="Hiragino Sans" pitchFamily="34" charset="0"/>
+                <a:ea typeface="Hiragino Sans" pitchFamily="34" charset="-122"/>
+                <a:cs typeface="Hiragino Sans" pitchFamily="34" charset="-120"/>
               </a:rPr>
               <a:t>唯一對外入口</a:t>
             </a:r>
@@ -33630,9 +33586,9 @@
                 <a:solidFill>
                   <a:srgbClr val="FFFFFF"/>
                 </a:solidFill>
-                <a:latin typeface="Microsoft JhengHei" pitchFamily="34" charset="0"/>
-                <a:ea typeface="Microsoft JhengHei" pitchFamily="34" charset="-122"/>
-                <a:cs typeface="Microsoft JhengHei" pitchFamily="34" charset="-120"/>
+                <a:latin typeface="Hiragino Sans" pitchFamily="34" charset="0"/>
+                <a:ea typeface="Hiragino Sans" pitchFamily="34" charset="-122"/>
+                <a:cs typeface="Hiragino Sans" pitchFamily="34" charset="-120"/>
               </a:rPr>
               <a:t>ECS</a:t>
             </a:r>
@@ -33672,9 +33628,9 @@
                 <a:solidFill>
                   <a:srgbClr val="FFFFFF"/>
                 </a:solidFill>
-                <a:latin typeface="Microsoft JhengHei" pitchFamily="34" charset="0"/>
-                <a:ea typeface="Microsoft JhengHei" pitchFamily="34" charset="-122"/>
-                <a:cs typeface="Microsoft JhengHei" pitchFamily="34" charset="-120"/>
+                <a:latin typeface="Hiragino Sans" pitchFamily="34" charset="0"/>
+                <a:ea typeface="Hiragino Sans" pitchFamily="34" charset="-122"/>
+                <a:cs typeface="Hiragino Sans" pitchFamily="34" charset="-120"/>
               </a:rPr>
               <a:t>私有子網 · ECS</a:t>
             </a:r>
@@ -33714,9 +33670,9 @@
                 <a:solidFill>
                   <a:srgbClr val="C7D6E4"/>
                 </a:solidFill>
-                <a:latin typeface="Microsoft JhengHei" pitchFamily="34" charset="0"/>
-                <a:ea typeface="Microsoft JhengHei" pitchFamily="34" charset="-122"/>
-                <a:cs typeface="Microsoft JhengHei" pitchFamily="34" charset="-120"/>
+                <a:latin typeface="Hiragino Sans" pitchFamily="34" charset="0"/>
+                <a:ea typeface="Hiragino Sans" pitchFamily="34" charset="-122"/>
+                <a:cs typeface="Hiragino Sans" pitchFamily="34" charset="-120"/>
               </a:rPr>
               <a:t>無公網 IP</a:t>
             </a:r>
@@ -33806,9 +33762,9 @@
                 <a:solidFill>
                   <a:srgbClr val="2A9D8F"/>
                 </a:solidFill>
-                <a:latin typeface="Microsoft JhengHei" pitchFamily="34" charset="0"/>
-                <a:ea typeface="Microsoft JhengHei" pitchFamily="34" charset="-122"/>
-                <a:cs typeface="Microsoft JhengHei" pitchFamily="34" charset="-120"/>
+                <a:latin typeface="Hiragino Sans" pitchFamily="34" charset="0"/>
+                <a:ea typeface="Hiragino Sans" pitchFamily="34" charset="-122"/>
+                <a:cs typeface="Hiragino Sans" pitchFamily="34" charset="-120"/>
               </a:rPr>
               <a:t>③ 帳號偵測</a:t>
             </a:r>
@@ -33845,9 +33801,9 @@
                 <a:solidFill>
                   <a:srgbClr val="C7D6E4"/>
                 </a:solidFill>
-                <a:latin typeface="Microsoft JhengHei" pitchFamily="34" charset="0"/>
-                <a:ea typeface="Microsoft JhengHei" pitchFamily="34" charset="-122"/>
-                <a:cs typeface="Microsoft JhengHei" pitchFamily="34" charset="-120"/>
+                <a:latin typeface="Hiragino Sans" pitchFamily="34" charset="0"/>
+                <a:ea typeface="Hiragino Sans" pitchFamily="34" charset="-122"/>
+                <a:cs typeface="Hiragino Sans" pitchFamily="34" charset="-120"/>
               </a:rPr>
               <a:t>持續監看</a:t>
             </a:r>
@@ -33945,9 +33901,9 @@
                 <a:solidFill>
                   <a:srgbClr val="0A2540"/>
                 </a:solidFill>
-                <a:latin typeface="Microsoft JhengHei" pitchFamily="34" charset="0"/>
-                <a:ea typeface="Microsoft JhengHei" pitchFamily="34" charset="-122"/>
-                <a:cs typeface="Microsoft JhengHei" pitchFamily="34" charset="-120"/>
+                <a:latin typeface="Hiragino Sans" pitchFamily="34" charset="0"/>
+                <a:ea typeface="Hiragino Sans" pitchFamily="34" charset="-122"/>
+                <a:cs typeface="Hiragino Sans" pitchFamily="34" charset="-120"/>
               </a:rPr>
               <a:t>GD</a:t>
             </a:r>
@@ -33987,9 +33943,9 @@
                 <a:solidFill>
                   <a:srgbClr val="FFFFFF"/>
                 </a:solidFill>
-                <a:latin typeface="Microsoft JhengHei" pitchFamily="34" charset="0"/>
-                <a:ea typeface="Microsoft JhengHei" pitchFamily="34" charset="-122"/>
-                <a:cs typeface="Microsoft JhengHei" pitchFamily="34" charset="-120"/>
+                <a:latin typeface="Hiragino Sans" pitchFamily="34" charset="0"/>
+                <a:ea typeface="Hiragino Sans" pitchFamily="34" charset="-122"/>
+                <a:cs typeface="Hiragino Sans" pitchFamily="34" charset="-120"/>
               </a:rPr>
               <a:t>GuardDuty</a:t>
             </a:r>
@@ -34029,9 +33985,9 @@
                 <a:solidFill>
                   <a:srgbClr val="C7D6E4"/>
                 </a:solidFill>
-                <a:latin typeface="Microsoft JhengHei" pitchFamily="34" charset="0"/>
-                <a:ea typeface="Microsoft JhengHei" pitchFamily="34" charset="-122"/>
-                <a:cs typeface="Microsoft JhengHei" pitchFamily="34" charset="-120"/>
+                <a:latin typeface="Hiragino Sans" pitchFamily="34" charset="0"/>
+                <a:ea typeface="Hiragino Sans" pitchFamily="34" charset="-122"/>
+                <a:cs typeface="Hiragino Sans" pitchFamily="34" charset="-120"/>
               </a:rPr>
               <a:t>威脅偵測</a:t>
             </a:r>
@@ -34129,9 +34085,9 @@
                 <a:solidFill>
                   <a:srgbClr val="FFFFFF"/>
                 </a:solidFill>
-                <a:latin typeface="Microsoft JhengHei" pitchFamily="34" charset="0"/>
-                <a:ea typeface="Microsoft JhengHei" pitchFamily="34" charset="-122"/>
-                <a:cs typeface="Microsoft JhengHei" pitchFamily="34" charset="-120"/>
+                <a:latin typeface="Hiragino Sans" pitchFamily="34" charset="0"/>
+                <a:ea typeface="Hiragino Sans" pitchFamily="34" charset="-122"/>
+                <a:cs typeface="Hiragino Sans" pitchFamily="34" charset="-120"/>
               </a:rPr>
               <a:t>CT</a:t>
             </a:r>
@@ -34171,9 +34127,9 @@
                 <a:solidFill>
                   <a:srgbClr val="FFFFFF"/>
                 </a:solidFill>
-                <a:latin typeface="Microsoft JhengHei" pitchFamily="34" charset="0"/>
-                <a:ea typeface="Microsoft JhengHei" pitchFamily="34" charset="-122"/>
-                <a:cs typeface="Microsoft JhengHei" pitchFamily="34" charset="-120"/>
+                <a:latin typeface="Hiragino Sans" pitchFamily="34" charset="0"/>
+                <a:ea typeface="Hiragino Sans" pitchFamily="34" charset="-122"/>
+                <a:cs typeface="Hiragino Sans" pitchFamily="34" charset="-120"/>
               </a:rPr>
               <a:t>CloudTrail</a:t>
             </a:r>
@@ -34213,9 +34169,9 @@
                 <a:solidFill>
                   <a:srgbClr val="C7D6E4"/>
                 </a:solidFill>
-                <a:latin typeface="Microsoft JhengHei" pitchFamily="34" charset="0"/>
-                <a:ea typeface="Microsoft JhengHei" pitchFamily="34" charset="-122"/>
-                <a:cs typeface="Microsoft JhengHei" pitchFamily="34" charset="-120"/>
+                <a:latin typeface="Hiragino Sans" pitchFamily="34" charset="0"/>
+                <a:ea typeface="Hiragino Sans" pitchFamily="34" charset="-122"/>
+                <a:cs typeface="Hiragino Sans" pitchFamily="34" charset="-120"/>
               </a:rPr>
               <a:t>稽核軌跡</a:t>
             </a:r>
@@ -34281,9 +34237,9 @@
                 <a:solidFill>
                   <a:srgbClr val="2A9D8F"/>
                 </a:solidFill>
-                <a:latin typeface="Microsoft JhengHei" pitchFamily="34" charset="0"/>
-                <a:ea typeface="Microsoft JhengHei" pitchFamily="34" charset="-122"/>
-                <a:cs typeface="Microsoft JhengHei" pitchFamily="34" charset="-120"/>
+                <a:latin typeface="Hiragino Sans" pitchFamily="34" charset="0"/>
+                <a:ea typeface="Hiragino Sans" pitchFamily="34" charset="-122"/>
+                <a:cs typeface="Hiragino Sans" pitchFamily="34" charset="-120"/>
               </a:rPr>
               <a:t>④ 機密加密</a:t>
             </a:r>
@@ -34320,9 +34276,9 @@
                 <a:solidFill>
                   <a:srgbClr val="C7D6E4"/>
                 </a:solidFill>
-                <a:latin typeface="Microsoft JhengHei" pitchFamily="34" charset="0"/>
-                <a:ea typeface="Microsoft JhengHei" pitchFamily="34" charset="-122"/>
-                <a:cs typeface="Microsoft JhengHei" pitchFamily="34" charset="-120"/>
+                <a:latin typeface="Hiragino Sans" pitchFamily="34" charset="0"/>
+                <a:ea typeface="Hiragino Sans" pitchFamily="34" charset="-122"/>
+                <a:cs typeface="Hiragino Sans" pitchFamily="34" charset="-120"/>
               </a:rPr>
               <a:t>零信任存取</a:t>
             </a:r>
@@ -34420,9 +34376,9 @@
                 <a:solidFill>
                   <a:srgbClr val="FFFFFF"/>
                 </a:solidFill>
-                <a:latin typeface="Microsoft JhengHei" pitchFamily="34" charset="0"/>
-                <a:ea typeface="Microsoft JhengHei" pitchFamily="34" charset="-122"/>
-                <a:cs typeface="Microsoft JhengHei" pitchFamily="34" charset="-120"/>
+                <a:latin typeface="Hiragino Sans" pitchFamily="34" charset="0"/>
+                <a:ea typeface="Hiragino Sans" pitchFamily="34" charset="-122"/>
+                <a:cs typeface="Hiragino Sans" pitchFamily="34" charset="-120"/>
               </a:rPr>
               <a:t>SM</a:t>
             </a:r>
@@ -34462,9 +34418,9 @@
                 <a:solidFill>
                   <a:srgbClr val="FFFFFF"/>
                 </a:solidFill>
-                <a:latin typeface="Microsoft JhengHei" pitchFamily="34" charset="0"/>
-                <a:ea typeface="Microsoft JhengHei" pitchFamily="34" charset="-122"/>
-                <a:cs typeface="Microsoft JhengHei" pitchFamily="34" charset="-120"/>
+                <a:latin typeface="Hiragino Sans" pitchFamily="34" charset="0"/>
+                <a:ea typeface="Hiragino Sans" pitchFamily="34" charset="-122"/>
+                <a:cs typeface="Hiragino Sans" pitchFamily="34" charset="-120"/>
               </a:rPr>
               <a:t>Secrets Manager</a:t>
             </a:r>
@@ -34504,9 +34460,9 @@
                 <a:solidFill>
                   <a:srgbClr val="C7D6E4"/>
                 </a:solidFill>
-                <a:latin typeface="Microsoft JhengHei" pitchFamily="34" charset="0"/>
-                <a:ea typeface="Microsoft JhengHei" pitchFamily="34" charset="-122"/>
-                <a:cs typeface="Microsoft JhengHei" pitchFamily="34" charset="-120"/>
+                <a:latin typeface="Hiragino Sans" pitchFamily="34" charset="0"/>
+                <a:ea typeface="Hiragino Sans" pitchFamily="34" charset="-122"/>
+                <a:cs typeface="Hiragino Sans" pitchFamily="34" charset="-120"/>
               </a:rPr>
               <a:t>憑證託管</a:t>
             </a:r>
@@ -34604,9 +34560,9 @@
                 <a:solidFill>
                   <a:srgbClr val="FFFFFF"/>
                 </a:solidFill>
-                <a:latin typeface="Microsoft JhengHei" pitchFamily="34" charset="0"/>
-                <a:ea typeface="Microsoft JhengHei" pitchFamily="34" charset="-122"/>
-                <a:cs typeface="Microsoft JhengHei" pitchFamily="34" charset="-120"/>
+                <a:latin typeface="Hiragino Sans" pitchFamily="34" charset="0"/>
+                <a:ea typeface="Hiragino Sans" pitchFamily="34" charset="-122"/>
+                <a:cs typeface="Hiragino Sans" pitchFamily="34" charset="-120"/>
               </a:rPr>
               <a:t>KMS</a:t>
             </a:r>
@@ -34646,9 +34602,9 @@
                 <a:solidFill>
                   <a:srgbClr val="FFFFFF"/>
                 </a:solidFill>
-                <a:latin typeface="Microsoft JhengHei" pitchFamily="34" charset="0"/>
-                <a:ea typeface="Microsoft JhengHei" pitchFamily="34" charset="-122"/>
-                <a:cs typeface="Microsoft JhengHei" pitchFamily="34" charset="-120"/>
+                <a:latin typeface="Hiragino Sans" pitchFamily="34" charset="0"/>
+                <a:ea typeface="Hiragino Sans" pitchFamily="34" charset="-122"/>
+                <a:cs typeface="Hiragino Sans" pitchFamily="34" charset="-120"/>
               </a:rPr>
               <a:t>KMS</a:t>
             </a:r>
@@ -34688,9 +34644,9 @@
                 <a:solidFill>
                   <a:srgbClr val="C7D6E4"/>
                 </a:solidFill>
-                <a:latin typeface="Microsoft JhengHei" pitchFamily="34" charset="0"/>
-                <a:ea typeface="Microsoft JhengHei" pitchFamily="34" charset="-122"/>
-                <a:cs typeface="Microsoft JhengHei" pitchFamily="34" charset="-120"/>
+                <a:latin typeface="Hiragino Sans" pitchFamily="34" charset="0"/>
+                <a:ea typeface="Hiragino Sans" pitchFamily="34" charset="-122"/>
+                <a:cs typeface="Hiragino Sans" pitchFamily="34" charset="-120"/>
               </a:rPr>
               <a:t>金鑰加密</a:t>
             </a:r>
@@ -34788,9 +34744,9 @@
                 <a:solidFill>
                   <a:srgbClr val="FFFFFF"/>
                 </a:solidFill>
-                <a:latin typeface="Microsoft JhengHei" pitchFamily="34" charset="0"/>
-                <a:ea typeface="Microsoft JhengHei" pitchFamily="34" charset="-122"/>
-                <a:cs typeface="Microsoft JhengHei" pitchFamily="34" charset="-120"/>
+                <a:latin typeface="Hiragino Sans" pitchFamily="34" charset="0"/>
+                <a:ea typeface="Hiragino Sans" pitchFamily="34" charset="-122"/>
+                <a:cs typeface="Hiragino Sans" pitchFamily="34" charset="-120"/>
               </a:rPr>
               <a:t>IAM</a:t>
             </a:r>
@@ -34830,9 +34786,9 @@
                 <a:solidFill>
                   <a:srgbClr val="FFFFFF"/>
                 </a:solidFill>
-                <a:latin typeface="Microsoft JhengHei" pitchFamily="34" charset="0"/>
-                <a:ea typeface="Microsoft JhengHei" pitchFamily="34" charset="-122"/>
-                <a:cs typeface="Microsoft JhengHei" pitchFamily="34" charset="-120"/>
+                <a:latin typeface="Hiragino Sans" pitchFamily="34" charset="0"/>
+                <a:ea typeface="Hiragino Sans" pitchFamily="34" charset="-122"/>
+                <a:cs typeface="Hiragino Sans" pitchFamily="34" charset="-120"/>
               </a:rPr>
               <a:t>IAM</a:t>
             </a:r>
@@ -34872,9 +34828,9 @@
                 <a:solidFill>
                   <a:srgbClr val="C7D6E4"/>
                 </a:solidFill>
-                <a:latin typeface="Microsoft JhengHei" pitchFamily="34" charset="0"/>
-                <a:ea typeface="Microsoft JhengHei" pitchFamily="34" charset="-122"/>
-                <a:cs typeface="Microsoft JhengHei" pitchFamily="34" charset="-120"/>
+                <a:latin typeface="Hiragino Sans" pitchFamily="34" charset="0"/>
+                <a:ea typeface="Hiragino Sans" pitchFamily="34" charset="-122"/>
+                <a:cs typeface="Hiragino Sans" pitchFamily="34" charset="-120"/>
               </a:rPr>
               <a:t>最小權限</a:t>
             </a:r>
@@ -34943,9 +34899,9 @@
                 <a:solidFill>
                   <a:srgbClr val="F4A72B"/>
                 </a:solidFill>
-                <a:latin typeface="Microsoft JhengHei" pitchFamily="34" charset="0"/>
-                <a:ea typeface="Microsoft JhengHei" pitchFamily="34" charset="-122"/>
-                <a:cs typeface="Microsoft JhengHei" pitchFamily="34" charset="-120"/>
+                <a:latin typeface="Hiragino Sans" pitchFamily="34" charset="0"/>
+                <a:ea typeface="Hiragino Sans" pitchFamily="34" charset="-122"/>
+                <a:cs typeface="Hiragino Sans" pitchFamily="34" charset="-120"/>
               </a:rPr>
               <a:t>◆ 縱深防禦　</a:t>
             </a:r>
@@ -34960,9 +34916,9 @@
                 <a:solidFill>
                   <a:srgbClr val="FFFFFF"/>
                 </a:solidFill>
-                <a:latin typeface="Microsoft JhengHei" pitchFamily="34" charset="0"/>
-                <a:ea typeface="Microsoft JhengHei" pitchFamily="34" charset="-122"/>
-                <a:cs typeface="Microsoft JhengHei" pitchFamily="34" charset="-120"/>
+                <a:latin typeface="Hiragino Sans" pitchFamily="34" charset="0"/>
+                <a:ea typeface="Hiragino Sans" pitchFamily="34" charset="-122"/>
+                <a:cs typeface="Hiragino Sans" pitchFamily="34" charset="-120"/>
               </a:rPr>
               <a:t>邊緣擋量、VPC 隔離、帳號偵測、加密兜底 — 攻擊者要連過四關；憑證進 Secrets Manager、資料以 KMS 加密、操作全入 CloudTrail，IAM 全程最小權限。</a:t>
             </a:r>

--- a/presentation/fleetmind-aws-architecture.pptx
+++ b/presentation/fleetmind-aws-architecture.pptx
@@ -1748,7 +1748,7 @@
           <a:p>
             <a:r>
               <a:rPr lang="en-US" dirty="0"/>
-              <a:t>資安採縱深防禦：① 邊緣 Shield 擋 DDoS + WAF 過濾 L7；② VPC 隔離 — ALB 放公有子網當唯一入口、ECS 放私有子網無公網 IP；③ 帳號級 GuardDuty 威脅偵測 + CloudTrail 稽核；④ 機密與加密 — Secrets Manager 託管憑證、KMS 金鑰加密、IAM 最小權限。逐層收斂攻擊面，任一層被突破下一層仍在。</a:t>
+              <a:t>資安採縱深防禦：① 邊緣 Shield 擋 DDoS + WAF 過濾 L7；② VPC 收斂 — ALB 是唯一對外入口，ECS task 的 SG 只放行 ALB SG 的 8080（實測：直打 task 公網 IP 已 timeout，走 ALB 仍 200）。誠實補充：兩個子網都是公有、task 仍有公網 IP（無 NAT 要拉 ECR），收口靠的是 SG 不是子網；③ 帳號級 GuardDuty 威脅偵測 + CloudTrail 稽核；④ 機密與加密 — Secrets Manager 託管憑證、KMS 金鑰加密、IAM 職責分離（execution role 拉 ECR/寫 log、task role 只有 Bedrock/SNS/SES；動作已收斂，SNS 綁單一 topic ARN，Bedrock 與 SES 仍為 Resource *）。</a:t>
             </a:r>
             <a:endParaRPr lang="en-US" dirty="0"/>
           </a:p>
@@ -4522,7 +4522,7 @@
                 <a:ea typeface="Hiragino Sans" pitchFamily="34" charset="-122"/>
                 <a:cs typeface="Hiragino Sans" pitchFamily="34" charset="-120"/>
               </a:rPr>
-              <a:t>私有子網</a:t>
+              <a:t>SG 收口</a:t>
             </a:r>
             <a:endParaRPr lang="en-US" sz="850" dirty="0"/>
           </a:p>
@@ -5467,7 +5467,7 @@
                 <a:ea typeface="Hiragino Sans" pitchFamily="34" charset="-122"/>
                 <a:cs typeface="Hiragino Sans" pitchFamily="34" charset="-120"/>
               </a:rPr>
-              <a:t>私有子網</a:t>
+              <a:t>SG 收口</a:t>
             </a:r>
             <a:endParaRPr lang="en-US" sz="850" dirty="0"/>
           </a:p>
@@ -32619,7 +32619,7 @@
                 <a:ea typeface="Hiragino Sans" pitchFamily="34" charset="-122"/>
                 <a:cs typeface="Hiragino Sans" pitchFamily="34" charset="-120"/>
               </a:rPr>
-              <a:t>SECURITY · 縱深防禦</a:t>
+              <a:t>SECURITY · 現況與規劃</a:t>
             </a:r>
             <a:endParaRPr lang="en-US" sz="1200" dirty="0"/>
           </a:p>
@@ -32658,7 +32658,7 @@
                 <a:ea typeface="Hiragino Sans" pitchFamily="34" charset="-122"/>
                 <a:cs typeface="Hiragino Sans" pitchFamily="34" charset="-120"/>
               </a:rPr>
-              <a:t>資安：VPC 隔離 + GuardDuty</a:t>
+              <a:t>資安：已收口的入口 + 規劃中的縱深</a:t>
             </a:r>
             <a:endParaRPr lang="en-US" sz="3600" dirty="0"/>
           </a:p>
@@ -32724,7 +32724,7 @@
                 <a:ea typeface="Hiragino Sans" pitchFamily="34" charset="-122"/>
                 <a:cs typeface="Hiragino Sans" pitchFamily="34" charset="-120"/>
               </a:rPr>
-              <a:t>縱深防禦 (defense in depth)：邊緣擋量、VPC 最小暴露、帳號級偵測、全程加密與稽核 — 逐層收斂攻擊面，任一層被突破，下一層仍在。</a:t>
+              <a:t>縱深防禦是目標；這頁把「已經在跑的」和「還沒做的」分開講。入口已用 SG 收成 ALB 單點、IAM 已職責分離 — 這兩項可當場驗。其餘是下一步。</a:t>
             </a:r>
             <a:endParaRPr lang="en-US" sz="1250" dirty="0"/>
           </a:p>
@@ -32738,12 +32738,12 @@
         </p:nvSpPr>
         <p:spPr>
           <a:xfrm>
-            <a:off x="640080" y="2057400"/>
-            <a:ext cx="10911535" cy="786384"/>
+            <a:off x="640080" y="2103120"/>
+            <a:ext cx="10911535" cy="1755648"/>
           </a:xfrm>
           <a:prstGeom prst="roundRect">
             <a:avLst>
-              <a:gd name="adj" fmla="val 11628"/>
+              <a:gd name="adj" fmla="val 5208"/>
             </a:avLst>
           </a:prstGeom>
           <a:solidFill>
@@ -32753,7 +32753,7 @@
           </a:solidFill>
           <a:ln w="12700">
             <a:solidFill>
-              <a:srgbClr val="1B4D74"/>
+              <a:srgbClr val="2A9D8F"/>
             </a:solidFill>
             <a:prstDash val="solid"/>
           </a:ln>
@@ -32767,8 +32767,8 @@
         </p:nvSpPr>
         <p:spPr>
           <a:xfrm>
-            <a:off x="804672" y="2148840"/>
-            <a:ext cx="1417320" cy="310896"/>
+            <a:off x="841248" y="2212848"/>
+            <a:ext cx="1828800" cy="292608"/>
           </a:xfrm>
           <a:prstGeom prst="rect">
             <a:avLst/>
@@ -32784,7 +32784,7 @@
               <a:buNone/>
             </a:pPr>
             <a:r>
-              <a:rPr lang="en-US" sz="1300" b="1" dirty="0">
+              <a:rPr lang="en-US" sz="1400" b="1" dirty="0">
                 <a:solidFill>
                   <a:srgbClr val="2A9D8F"/>
                 </a:solidFill>
@@ -32792,9 +32792,9 @@
                 <a:ea typeface="Hiragino Sans" pitchFamily="34" charset="-122"/>
                 <a:cs typeface="Hiragino Sans" pitchFamily="34" charset="-120"/>
               </a:rPr>
-              <a:t>① 邊緣</a:t>
-            </a:r>
-            <a:endParaRPr lang="en-US" sz="1300" dirty="0"/>
+              <a:t>已實作</a:t>
+            </a:r>
+            <a:endParaRPr lang="en-US" sz="1400" dirty="0"/>
           </a:p>
         </p:txBody>
       </p:sp>
@@ -32806,8 +32806,8 @@
         </p:nvSpPr>
         <p:spPr>
           <a:xfrm>
-            <a:off x="804672" y="2478024"/>
-            <a:ext cx="1417320" cy="274320"/>
+            <a:off x="2011680" y="2212848"/>
+            <a:ext cx="2194560" cy="292608"/>
           </a:xfrm>
           <a:prstGeom prst="rect">
             <a:avLst/>
@@ -32823,7 +32823,7 @@
               <a:buNone/>
             </a:pPr>
             <a:r>
-              <a:rPr lang="en-US" sz="900" dirty="0">
+              <a:rPr lang="en-US" sz="950" dirty="0">
                 <a:solidFill>
                   <a:srgbClr val="C7D6E4"/>
                 </a:solidFill>
@@ -32831,9 +32831,9 @@
                 <a:ea typeface="Hiragino Sans" pitchFamily="34" charset="-122"/>
                 <a:cs typeface="Hiragino Sans" pitchFamily="34" charset="-120"/>
               </a:rPr>
-              <a:t>擋量 · L7 過濾</a:t>
-            </a:r>
-            <a:endParaRPr lang="en-US" sz="900" dirty="0"/>
+              <a:t>可當場驗證</a:t>
+            </a:r>
+            <a:endParaRPr lang="en-US" sz="950" dirty="0"/>
           </a:p>
         </p:txBody>
       </p:sp>
@@ -32845,12 +32845,12 @@
         </p:nvSpPr>
         <p:spPr>
           <a:xfrm>
-            <a:off x="2340864" y="2176272"/>
-            <a:ext cx="4449928" cy="548640"/>
+            <a:off x="841248" y="2578608"/>
+            <a:ext cx="1992112" cy="566928"/>
           </a:xfrm>
           <a:prstGeom prst="roundRect">
             <a:avLst>
-              <a:gd name="adj" fmla="val 13333"/>
+              <a:gd name="adj" fmla="val 12903"/>
             </a:avLst>
           </a:prstGeom>
           <a:solidFill>
@@ -32881,14 +32881,14 @@
         </p:nvSpPr>
         <p:spPr>
           <a:xfrm>
-            <a:off x="2478024" y="2258568"/>
+            <a:off x="978408" y="2670048"/>
             <a:ext cx="384048" cy="384048"/>
           </a:xfrm>
           <a:prstGeom prst="ellipse">
             <a:avLst/>
           </a:prstGeom>
           <a:solidFill>
-            <a:srgbClr val="5A6B7B"/>
+            <a:srgbClr val="1C7293"/>
           </a:solidFill>
           <a:ln w="15875">
             <a:solidFill>
@@ -32906,7 +32906,7 @@
         </p:nvSpPr>
         <p:spPr>
           <a:xfrm>
-            <a:off x="2478024" y="2249424"/>
+            <a:off x="978408" y="2660904"/>
             <a:ext cx="384048" cy="384048"/>
           </a:xfrm>
           <a:prstGeom prst="rect">
@@ -32931,7 +32931,7 @@
                 <a:ea typeface="Hiragino Sans" pitchFamily="34" charset="-122"/>
                 <a:cs typeface="Hiragino Sans" pitchFamily="34" charset="-120"/>
               </a:rPr>
-              <a:t>SLD</a:t>
+              <a:t>ALB</a:t>
             </a:r>
             <a:endParaRPr lang="en-US" sz="800" dirty="0"/>
           </a:p>
@@ -32945,8 +32945,8 @@
         </p:nvSpPr>
         <p:spPr>
           <a:xfrm>
-            <a:off x="2962656" y="2221992"/>
-            <a:ext cx="3736696" cy="246888"/>
+            <a:off x="1463040" y="2624328"/>
+            <a:ext cx="1278880" cy="256946"/>
           </a:xfrm>
           <a:prstGeom prst="rect">
             <a:avLst/>
@@ -32965,7 +32965,7 @@
               <a:buNone/>
             </a:pPr>
             <a:r>
-              <a:rPr lang="en-US" sz="1100" b="1" dirty="0">
+              <a:rPr lang="en-US" sz="1050" b="1" dirty="0">
                 <a:solidFill>
                   <a:srgbClr val="FFFFFF"/>
                 </a:solidFill>
@@ -32973,9 +32973,9 @@
                 <a:ea typeface="Hiragino Sans" pitchFamily="34" charset="-122"/>
                 <a:cs typeface="Hiragino Sans" pitchFamily="34" charset="-120"/>
               </a:rPr>
-              <a:t>AWS Shield</a:t>
-            </a:r>
-            <a:endParaRPr lang="en-US" sz="1100" dirty="0"/>
+              <a:t>ALB</a:t>
+            </a:r>
+            <a:endParaRPr lang="en-US" sz="1050" dirty="0"/>
           </a:p>
         </p:txBody>
       </p:sp>
@@ -32987,8 +32987,8 @@
         </p:nvSpPr>
         <p:spPr>
           <a:xfrm>
-            <a:off x="2962656" y="2496312"/>
-            <a:ext cx="3736696" cy="201168"/>
+            <a:off x="1463040" y="2908706"/>
+            <a:ext cx="1278880" cy="209398"/>
           </a:xfrm>
           <a:prstGeom prst="rect">
             <a:avLst/>
@@ -33015,7 +33015,7 @@
                 <a:ea typeface="Hiragino Sans" pitchFamily="34" charset="-122"/>
                 <a:cs typeface="Hiragino Sans" pitchFamily="34" charset="-120"/>
               </a:rPr>
-              <a:t>DDoS 防護</a:t>
+              <a:t>唯一對外入口</a:t>
             </a:r>
             <a:endParaRPr lang="en-US" sz="850" dirty="0"/>
           </a:p>
@@ -33023,18 +33023,60 @@
       </p:sp>
       <p:sp>
         <p:nvSpPr>
-          <p:cNvPr id="22" name="Shape 19"/>
-          <p:cNvSpPr/>
-          <p:nvPr/>
-        </p:nvSpPr>
-        <p:spPr>
-          <a:xfrm>
-            <a:off x="6937096" y="2176272"/>
-            <a:ext cx="4449928" cy="548640"/>
+          <p:cNvPr id="22" name="Text 19"/>
+          <p:cNvSpPr/>
+          <p:nvPr/>
+        </p:nvSpPr>
+        <p:spPr>
+          <a:xfrm>
+            <a:off x="877824" y="3218688"/>
+            <a:ext cx="1918960" cy="457200"/>
+          </a:xfrm>
+          <a:prstGeom prst="rect">
+            <a:avLst/>
+          </a:prstGeom>
+          <a:noFill/>
+          <a:ln/>
+        </p:spPr>
+        <p:txBody>
+          <a:bodyPr wrap="square" lIns="0" tIns="0" rIns="0" bIns="0" rtlCol="0" anchor="ctr"/>
+          <a:lstStyle/>
+          <a:p>
+            <a:pPr indent="0" marL="0">
+              <a:lnSpc>
+                <a:spcPct val="105000"/>
+              </a:lnSpc>
+              <a:buNone/>
+            </a:pPr>
+            <a:r>
+              <a:rPr lang="en-US" sz="800" dirty="0">
+                <a:solidFill>
+                  <a:srgbClr val="C7D6E4"/>
+                </a:solidFill>
+                <a:latin typeface="Hiragino Sans" pitchFamily="34" charset="0"/>
+                <a:ea typeface="Hiragino Sans" pitchFamily="34" charset="-122"/>
+                <a:cs typeface="Hiragino Sans" pitchFamily="34" charset="-120"/>
+              </a:rPr>
+              <a:t>直打 task IP:8080 → timeout</a:t>
+            </a:r>
+            <a:endParaRPr lang="en-US" sz="800" dirty="0"/>
+          </a:p>
+        </p:txBody>
+      </p:sp>
+      <p:sp>
+        <p:nvSpPr>
+          <p:cNvPr id="23" name="Shape 20"/>
+          <p:cNvSpPr/>
+          <p:nvPr/>
+        </p:nvSpPr>
+        <p:spPr>
+          <a:xfrm>
+            <a:off x="2970520" y="2578608"/>
+            <a:ext cx="1992112" cy="566928"/>
           </a:xfrm>
           <a:prstGeom prst="roundRect">
             <a:avLst>
-              <a:gd name="adj" fmla="val 13333"/>
+              <a:gd name="adj" fmla="val 12903"/>
             </a:avLst>
           </a:prstGeom>
           <a:solidFill>
@@ -33059,20 +33101,20 @@
       </p:sp>
       <p:sp>
         <p:nvSpPr>
-          <p:cNvPr id="23" name="Shape 20"/>
-          <p:cNvSpPr/>
-          <p:nvPr/>
-        </p:nvSpPr>
-        <p:spPr>
-          <a:xfrm>
-            <a:off x="7074256" y="2258568"/>
+          <p:cNvPr id="24" name="Shape 21"/>
+          <p:cNvSpPr/>
+          <p:nvPr/>
+        </p:nvSpPr>
+        <p:spPr>
+          <a:xfrm>
+            <a:off x="3107680" y="2670048"/>
             <a:ext cx="384048" cy="384048"/>
           </a:xfrm>
           <a:prstGeom prst="ellipse">
             <a:avLst/>
           </a:prstGeom>
           <a:solidFill>
-            <a:srgbClr val="1C7293"/>
+            <a:srgbClr val="5A6B7B"/>
           </a:solidFill>
           <a:ln w="15875">
             <a:solidFill>
@@ -33084,13 +33126,13 @@
       </p:sp>
       <p:sp>
         <p:nvSpPr>
-          <p:cNvPr id="24" name="Text 21"/>
-          <p:cNvSpPr/>
-          <p:nvPr/>
-        </p:nvSpPr>
-        <p:spPr>
-          <a:xfrm>
-            <a:off x="7074256" y="2249424"/>
+          <p:cNvPr id="25" name="Text 22"/>
+          <p:cNvSpPr/>
+          <p:nvPr/>
+        </p:nvSpPr>
+        <p:spPr>
+          <a:xfrm>
+            <a:off x="3107680" y="2660904"/>
             <a:ext cx="384048" cy="384048"/>
           </a:xfrm>
           <a:prstGeom prst="rect">
@@ -33107,7 +33149,7 @@
               <a:buNone/>
             </a:pPr>
             <a:r>
-              <a:rPr lang="en-US" sz="800" b="1" dirty="0">
+              <a:rPr lang="en-US" sz="950" b="1" dirty="0">
                 <a:solidFill>
                   <a:srgbClr val="FFFFFF"/>
                 </a:solidFill>
@@ -33115,22 +33157,22 @@
                 <a:ea typeface="Hiragino Sans" pitchFamily="34" charset="-122"/>
                 <a:cs typeface="Hiragino Sans" pitchFamily="34" charset="-120"/>
               </a:rPr>
-              <a:t>WAF</a:t>
-            </a:r>
-            <a:endParaRPr lang="en-US" sz="800" dirty="0"/>
-          </a:p>
-        </p:txBody>
-      </p:sp>
-      <p:sp>
-        <p:nvSpPr>
-          <p:cNvPr id="25" name="Text 22"/>
-          <p:cNvSpPr/>
-          <p:nvPr/>
-        </p:nvSpPr>
-        <p:spPr>
-          <a:xfrm>
-            <a:off x="7558888" y="2221992"/>
-            <a:ext cx="3736696" cy="246888"/>
+              <a:t>SG</a:t>
+            </a:r>
+            <a:endParaRPr lang="en-US" sz="950" dirty="0"/>
+          </a:p>
+        </p:txBody>
+      </p:sp>
+      <p:sp>
+        <p:nvSpPr>
+          <p:cNvPr id="26" name="Text 23"/>
+          <p:cNvSpPr/>
+          <p:nvPr/>
+        </p:nvSpPr>
+        <p:spPr>
+          <a:xfrm>
+            <a:off x="3592312" y="2624328"/>
+            <a:ext cx="1278880" cy="256946"/>
           </a:xfrm>
           <a:prstGeom prst="rect">
             <a:avLst/>
@@ -33149,7 +33191,7 @@
               <a:buNone/>
             </a:pPr>
             <a:r>
-              <a:rPr lang="en-US" sz="1100" b="1" dirty="0">
+              <a:rPr lang="en-US" sz="1050" b="1" dirty="0">
                 <a:solidFill>
                   <a:srgbClr val="FFFFFF"/>
                 </a:solidFill>
@@ -33157,22 +33199,22 @@
                 <a:ea typeface="Hiragino Sans" pitchFamily="34" charset="-122"/>
                 <a:cs typeface="Hiragino Sans" pitchFamily="34" charset="-120"/>
               </a:rPr>
-              <a:t>AWS WAF</a:t>
-            </a:r>
-            <a:endParaRPr lang="en-US" sz="1100" dirty="0"/>
-          </a:p>
-        </p:txBody>
-      </p:sp>
-      <p:sp>
-        <p:nvSpPr>
-          <p:cNvPr id="26" name="Text 23"/>
-          <p:cNvSpPr/>
-          <p:nvPr/>
-        </p:nvSpPr>
-        <p:spPr>
-          <a:xfrm>
-            <a:off x="7558888" y="2496312"/>
-            <a:ext cx="3736696" cy="201168"/>
+              <a:t>Security Group</a:t>
+            </a:r>
+            <a:endParaRPr lang="en-US" sz="1050" dirty="0"/>
+          </a:p>
+        </p:txBody>
+      </p:sp>
+      <p:sp>
+        <p:nvSpPr>
+          <p:cNvPr id="27" name="Text 24"/>
+          <p:cNvSpPr/>
+          <p:nvPr/>
+        </p:nvSpPr>
+        <p:spPr>
+          <a:xfrm>
+            <a:off x="3592312" y="2908706"/>
+            <a:ext cx="1278880" cy="209398"/>
           </a:xfrm>
           <a:prstGeom prst="rect">
             <a:avLst/>
@@ -33199,7 +33241,7 @@
                 <a:ea typeface="Hiragino Sans" pitchFamily="34" charset="-122"/>
                 <a:cs typeface="Hiragino Sans" pitchFamily="34" charset="-120"/>
               </a:rPr>
-              <a:t>L7 規則過濾</a:t>
+              <a:t>只放行 ALB SG</a:t>
             </a:r>
             <a:endParaRPr lang="en-US" sz="850" dirty="0"/>
           </a:p>
@@ -33207,125 +33249,60 @@
       </p:sp>
       <p:sp>
         <p:nvSpPr>
-          <p:cNvPr id="27" name="Shape 24"/>
-          <p:cNvSpPr/>
-          <p:nvPr/>
-        </p:nvSpPr>
-        <p:spPr>
-          <a:xfrm>
-            <a:off x="896112" y="2980944"/>
-            <a:ext cx="10399471" cy="786384"/>
+          <p:cNvPr id="28" name="Text 25"/>
+          <p:cNvSpPr/>
+          <p:nvPr/>
+        </p:nvSpPr>
+        <p:spPr>
+          <a:xfrm>
+            <a:off x="3007096" y="3218688"/>
+            <a:ext cx="1918960" cy="457200"/>
+          </a:xfrm>
+          <a:prstGeom prst="rect">
+            <a:avLst/>
+          </a:prstGeom>
+          <a:noFill/>
+          <a:ln/>
+        </p:spPr>
+        <p:txBody>
+          <a:bodyPr wrap="square" lIns="0" tIns="0" rIns="0" bIns="0" rtlCol="0" anchor="ctr"/>
+          <a:lstStyle/>
+          <a:p>
+            <a:pPr indent="0" marL="0">
+              <a:lnSpc>
+                <a:spcPct val="105000"/>
+              </a:lnSpc>
+              <a:buNone/>
+            </a:pPr>
+            <a:r>
+              <a:rPr lang="en-US" sz="800" dirty="0">
+                <a:solidFill>
+                  <a:srgbClr val="C7D6E4"/>
+                </a:solidFill>
+                <a:latin typeface="Hiragino Sans" pitchFamily="34" charset="0"/>
+                <a:ea typeface="Hiragino Sans" pitchFamily="34" charset="-122"/>
+                <a:cs typeface="Hiragino Sans" pitchFamily="34" charset="-120"/>
+              </a:rPr>
+              <a:t>fleetmind-sg 無 0.0.0.0/0</a:t>
+            </a:r>
+            <a:endParaRPr lang="en-US" sz="800" dirty="0"/>
+          </a:p>
+        </p:txBody>
+      </p:sp>
+      <p:sp>
+        <p:nvSpPr>
+          <p:cNvPr id="29" name="Shape 26"/>
+          <p:cNvSpPr/>
+          <p:nvPr/>
+        </p:nvSpPr>
+        <p:spPr>
+          <a:xfrm>
+            <a:off x="5099792" y="2578608"/>
+            <a:ext cx="1992112" cy="566928"/>
           </a:xfrm>
           <a:prstGeom prst="roundRect">
             <a:avLst>
-              <a:gd name="adj" fmla="val 11628"/>
-            </a:avLst>
-          </a:prstGeom>
-          <a:solidFill>
-            <a:srgbClr val="0A2540">
-              <a:alpha val="82000"/>
-            </a:srgbClr>
-          </a:solidFill>
-          <a:ln w="12700">
-            <a:solidFill>
-              <a:srgbClr val="1B4D74"/>
-            </a:solidFill>
-            <a:prstDash val="solid"/>
-          </a:ln>
-        </p:spPr>
-      </p:sp>
-      <p:sp>
-        <p:nvSpPr>
-          <p:cNvPr id="28" name="Text 25"/>
-          <p:cNvSpPr/>
-          <p:nvPr/>
-        </p:nvSpPr>
-        <p:spPr>
-          <a:xfrm>
-            <a:off x="1060704" y="3072384"/>
-            <a:ext cx="1417320" cy="310896"/>
-          </a:xfrm>
-          <a:prstGeom prst="rect">
-            <a:avLst/>
-          </a:prstGeom>
-          <a:noFill/>
-          <a:ln/>
-        </p:spPr>
-        <p:txBody>
-          <a:bodyPr wrap="square" lIns="0" tIns="0" rIns="0" bIns="0" rtlCol="0" anchor="ctr"/>
-          <a:lstStyle/>
-          <a:p>
-            <a:pPr indent="0" marL="0">
-              <a:buNone/>
-            </a:pPr>
-            <a:r>
-              <a:rPr lang="en-US" sz="1300" b="1" dirty="0">
-                <a:solidFill>
-                  <a:srgbClr val="2A9D8F"/>
-                </a:solidFill>
-                <a:latin typeface="Hiragino Sans" pitchFamily="34" charset="0"/>
-                <a:ea typeface="Hiragino Sans" pitchFamily="34" charset="-122"/>
-                <a:cs typeface="Hiragino Sans" pitchFamily="34" charset="-120"/>
-              </a:rPr>
-              <a:t>② VPC 隔離</a:t>
-            </a:r>
-            <a:endParaRPr lang="en-US" sz="1300" dirty="0"/>
-          </a:p>
-        </p:txBody>
-      </p:sp>
-      <p:sp>
-        <p:nvSpPr>
-          <p:cNvPr id="29" name="Text 26"/>
-          <p:cNvSpPr/>
-          <p:nvPr/>
-        </p:nvSpPr>
-        <p:spPr>
-          <a:xfrm>
-            <a:off x="1060704" y="3401568"/>
-            <a:ext cx="1417320" cy="274320"/>
-          </a:xfrm>
-          <a:prstGeom prst="rect">
-            <a:avLst/>
-          </a:prstGeom>
-          <a:noFill/>
-          <a:ln/>
-        </p:spPr>
-        <p:txBody>
-          <a:bodyPr wrap="square" lIns="0" tIns="0" rIns="0" bIns="0" rtlCol="0" anchor="ctr"/>
-          <a:lstStyle/>
-          <a:p>
-            <a:pPr indent="0" marL="0">
-              <a:buNone/>
-            </a:pPr>
-            <a:r>
-              <a:rPr lang="en-US" sz="900" dirty="0">
-                <a:solidFill>
-                  <a:srgbClr val="C7D6E4"/>
-                </a:solidFill>
-                <a:latin typeface="Hiragino Sans" pitchFamily="34" charset="0"/>
-                <a:ea typeface="Hiragino Sans" pitchFamily="34" charset="-122"/>
-                <a:cs typeface="Hiragino Sans" pitchFamily="34" charset="-120"/>
-              </a:rPr>
-              <a:t>最小暴露面</a:t>
-            </a:r>
-            <a:endParaRPr lang="en-US" sz="900" dirty="0"/>
-          </a:p>
-        </p:txBody>
-      </p:sp>
-      <p:sp>
-        <p:nvSpPr>
-          <p:cNvPr id="30" name="Shape 27"/>
-          <p:cNvSpPr/>
-          <p:nvPr/>
-        </p:nvSpPr>
-        <p:spPr>
-          <a:xfrm>
-            <a:off x="2596896" y="3099816"/>
-            <a:ext cx="4193896" cy="548640"/>
-          </a:xfrm>
-          <a:prstGeom prst="roundRect">
-            <a:avLst>
-              <a:gd name="adj" fmla="val 13333"/>
+              <a:gd name="adj" fmla="val 12903"/>
             </a:avLst>
           </a:prstGeom>
           <a:solidFill>
@@ -33350,20 +33327,20 @@
       </p:sp>
       <p:sp>
         <p:nvSpPr>
-          <p:cNvPr id="31" name="Shape 28"/>
-          <p:cNvSpPr/>
-          <p:nvPr/>
-        </p:nvSpPr>
-        <p:spPr>
-          <a:xfrm>
-            <a:off x="2734056" y="3182112"/>
+          <p:cNvPr id="30" name="Shape 27"/>
+          <p:cNvSpPr/>
+          <p:nvPr/>
+        </p:nvSpPr>
+        <p:spPr>
+          <a:xfrm>
+            <a:off x="5236952" y="2670048"/>
             <a:ext cx="384048" cy="384048"/>
           </a:xfrm>
           <a:prstGeom prst="ellipse">
             <a:avLst/>
           </a:prstGeom>
           <a:solidFill>
-            <a:srgbClr val="1C7293"/>
+            <a:srgbClr val="5A6B7B"/>
           </a:solidFill>
           <a:ln w="15875">
             <a:solidFill>
@@ -33375,53 +33352,53 @@
       </p:sp>
       <p:sp>
         <p:nvSpPr>
+          <p:cNvPr id="31" name="Text 28"/>
+          <p:cNvSpPr/>
+          <p:nvPr/>
+        </p:nvSpPr>
+        <p:spPr>
+          <a:xfrm>
+            <a:off x="5236952" y="2660904"/>
+            <a:ext cx="384048" cy="384048"/>
+          </a:xfrm>
+          <a:prstGeom prst="rect">
+            <a:avLst/>
+          </a:prstGeom>
+          <a:noFill/>
+          <a:ln/>
+        </p:spPr>
+        <p:txBody>
+          <a:bodyPr wrap="square" lIns="0" tIns="0" rIns="0" bIns="0" rtlCol="0" anchor="ctr"/>
+          <a:lstStyle/>
+          <a:p>
+            <a:pPr algn="ctr" indent="0" marL="0">
+              <a:buNone/>
+            </a:pPr>
+            <a:r>
+              <a:rPr lang="en-US" sz="800" b="1" dirty="0">
+                <a:solidFill>
+                  <a:srgbClr val="FFFFFF"/>
+                </a:solidFill>
+                <a:latin typeface="Hiragino Sans" pitchFamily="34" charset="0"/>
+                <a:ea typeface="Hiragino Sans" pitchFamily="34" charset="-122"/>
+                <a:cs typeface="Hiragino Sans" pitchFamily="34" charset="-120"/>
+              </a:rPr>
+              <a:t>IAM</a:t>
+            </a:r>
+            <a:endParaRPr lang="en-US" sz="800" dirty="0"/>
+          </a:p>
+        </p:txBody>
+      </p:sp>
+      <p:sp>
+        <p:nvSpPr>
           <p:cNvPr id="32" name="Text 29"/>
           <p:cNvSpPr/>
           <p:nvPr/>
         </p:nvSpPr>
         <p:spPr>
           <a:xfrm>
-            <a:off x="2734056" y="3172968"/>
-            <a:ext cx="384048" cy="384048"/>
-          </a:xfrm>
-          <a:prstGeom prst="rect">
-            <a:avLst/>
-          </a:prstGeom>
-          <a:noFill/>
-          <a:ln/>
-        </p:spPr>
-        <p:txBody>
-          <a:bodyPr wrap="square" lIns="0" tIns="0" rIns="0" bIns="0" rtlCol="0" anchor="ctr"/>
-          <a:lstStyle/>
-          <a:p>
-            <a:pPr algn="ctr" indent="0" marL="0">
-              <a:buNone/>
-            </a:pPr>
-            <a:r>
-              <a:rPr lang="en-US" sz="800" b="1" dirty="0">
-                <a:solidFill>
-                  <a:srgbClr val="FFFFFF"/>
-                </a:solidFill>
-                <a:latin typeface="Hiragino Sans" pitchFamily="34" charset="0"/>
-                <a:ea typeface="Hiragino Sans" pitchFamily="34" charset="-122"/>
-                <a:cs typeface="Hiragino Sans" pitchFamily="34" charset="-120"/>
-              </a:rPr>
-              <a:t>ALB</a:t>
-            </a:r>
-            <a:endParaRPr lang="en-US" sz="800" dirty="0"/>
-          </a:p>
-        </p:txBody>
-      </p:sp>
-      <p:sp>
-        <p:nvSpPr>
-          <p:cNvPr id="33" name="Text 30"/>
-          <p:cNvSpPr/>
-          <p:nvPr/>
-        </p:nvSpPr>
-        <p:spPr>
-          <a:xfrm>
-            <a:off x="3218688" y="3145536"/>
-            <a:ext cx="3480664" cy="246888"/>
+            <a:off x="5721584" y="2624328"/>
+            <a:ext cx="1278880" cy="256946"/>
           </a:xfrm>
           <a:prstGeom prst="rect">
             <a:avLst/>
@@ -33440,7 +33417,7 @@
               <a:buNone/>
             </a:pPr>
             <a:r>
-              <a:rPr lang="en-US" sz="1100" b="1" dirty="0">
+              <a:rPr lang="en-US" sz="1050" b="1" dirty="0">
                 <a:solidFill>
                   <a:srgbClr val="FFFFFF"/>
                 </a:solidFill>
@@ -33448,22 +33425,22 @@
                 <a:ea typeface="Hiragino Sans" pitchFamily="34" charset="-122"/>
                 <a:cs typeface="Hiragino Sans" pitchFamily="34" charset="-120"/>
               </a:rPr>
-              <a:t>公有子網 · ALB</a:t>
-            </a:r>
-            <a:endParaRPr lang="en-US" sz="1100" dirty="0"/>
-          </a:p>
-        </p:txBody>
-      </p:sp>
-      <p:sp>
-        <p:nvSpPr>
-          <p:cNvPr id="34" name="Text 31"/>
-          <p:cNvSpPr/>
-          <p:nvPr/>
-        </p:nvSpPr>
-        <p:spPr>
-          <a:xfrm>
-            <a:off x="3218688" y="3419856"/>
-            <a:ext cx="3480664" cy="201168"/>
+              <a:t>IAM 職責分離</a:t>
+            </a:r>
+            <a:endParaRPr lang="en-US" sz="1050" dirty="0"/>
+          </a:p>
+        </p:txBody>
+      </p:sp>
+      <p:sp>
+        <p:nvSpPr>
+          <p:cNvPr id="33" name="Text 30"/>
+          <p:cNvSpPr/>
+          <p:nvPr/>
+        </p:nvSpPr>
+        <p:spPr>
+          <a:xfrm>
+            <a:off x="5721584" y="2908706"/>
+            <a:ext cx="1278880" cy="209398"/>
           </a:xfrm>
           <a:prstGeom prst="rect">
             <a:avLst/>
@@ -33490,7 +33467,7 @@
                 <a:ea typeface="Hiragino Sans" pitchFamily="34" charset="-122"/>
                 <a:cs typeface="Hiragino Sans" pitchFamily="34" charset="-120"/>
               </a:rPr>
-              <a:t>唯一對外入口</a:t>
+              <a:t>task / execution role</a:t>
             </a:r>
             <a:endParaRPr lang="en-US" sz="850" dirty="0"/>
           </a:p>
@@ -33498,18 +33475,60 @@
       </p:sp>
       <p:sp>
         <p:nvSpPr>
+          <p:cNvPr id="34" name="Text 31"/>
+          <p:cNvSpPr/>
+          <p:nvPr/>
+        </p:nvSpPr>
+        <p:spPr>
+          <a:xfrm>
+            <a:off x="5136368" y="3218688"/>
+            <a:ext cx="1918960" cy="457200"/>
+          </a:xfrm>
+          <a:prstGeom prst="rect">
+            <a:avLst/>
+          </a:prstGeom>
+          <a:noFill/>
+          <a:ln/>
+        </p:spPr>
+        <p:txBody>
+          <a:bodyPr wrap="square" lIns="0" tIns="0" rIns="0" bIns="0" rtlCol="0" anchor="ctr"/>
+          <a:lstStyle/>
+          <a:p>
+            <a:pPr indent="0" marL="0">
+              <a:lnSpc>
+                <a:spcPct val="105000"/>
+              </a:lnSpc>
+              <a:buNone/>
+            </a:pPr>
+            <a:r>
+              <a:rPr lang="en-US" sz="800" dirty="0">
+                <a:solidFill>
+                  <a:srgbClr val="C7D6E4"/>
+                </a:solidFill>
+                <a:latin typeface="Hiragino Sans" pitchFamily="34" charset="0"/>
+                <a:ea typeface="Hiragino Sans" pitchFamily="34" charset="-122"/>
+                <a:cs typeface="Hiragino Sans" pitchFamily="34" charset="-120"/>
+              </a:rPr>
+              <a:t>app 拉不到 ECR、寫不了 log</a:t>
+            </a:r>
+            <a:endParaRPr lang="en-US" sz="800" dirty="0"/>
+          </a:p>
+        </p:txBody>
+      </p:sp>
+      <p:sp>
+        <p:nvSpPr>
           <p:cNvPr id="35" name="Shape 32"/>
           <p:cNvSpPr/>
           <p:nvPr/>
         </p:nvSpPr>
         <p:spPr>
           <a:xfrm>
-            <a:off x="6937096" y="3099816"/>
-            <a:ext cx="4193896" cy="548640"/>
+            <a:off x="7229064" y="2578608"/>
+            <a:ext cx="1992112" cy="566928"/>
           </a:xfrm>
           <a:prstGeom prst="roundRect">
             <a:avLst>
-              <a:gd name="adj" fmla="val 13333"/>
+              <a:gd name="adj" fmla="val 12903"/>
             </a:avLst>
           </a:prstGeom>
           <a:solidFill>
@@ -33540,14 +33559,14 @@
         </p:nvSpPr>
         <p:spPr>
           <a:xfrm>
-            <a:off x="7074256" y="3182112"/>
+            <a:off x="7366224" y="2670048"/>
             <a:ext cx="384048" cy="384048"/>
           </a:xfrm>
           <a:prstGeom prst="ellipse">
             <a:avLst/>
           </a:prstGeom>
           <a:solidFill>
-            <a:srgbClr val="2F6E9E"/>
+            <a:srgbClr val="F4A72B"/>
           </a:solidFill>
           <a:ln w="15875">
             <a:solidFill>
@@ -33565,7 +33584,7 @@
         </p:nvSpPr>
         <p:spPr>
           <a:xfrm>
-            <a:off x="7074256" y="3172968"/>
+            <a:off x="7366224" y="2660904"/>
             <a:ext cx="384048" cy="384048"/>
           </a:xfrm>
           <a:prstGeom prst="rect">
@@ -33582,17 +33601,17 @@
               <a:buNone/>
             </a:pPr>
             <a:r>
-              <a:rPr lang="en-US" sz="800" b="1" dirty="0">
-                <a:solidFill>
-                  <a:srgbClr val="FFFFFF"/>
-                </a:solidFill>
-                <a:latin typeface="Hiragino Sans" pitchFamily="34" charset="0"/>
-                <a:ea typeface="Hiragino Sans" pitchFamily="34" charset="-122"/>
-                <a:cs typeface="Hiragino Sans" pitchFamily="34" charset="-120"/>
-              </a:rPr>
-              <a:t>ECS</a:t>
-            </a:r>
-            <a:endParaRPr lang="en-US" sz="800" dirty="0"/>
+              <a:rPr lang="en-US" sz="950" b="1" dirty="0">
+                <a:solidFill>
+                  <a:srgbClr val="0A2540"/>
+                </a:solidFill>
+                <a:latin typeface="Hiragino Sans" pitchFamily="34" charset="0"/>
+                <a:ea typeface="Hiragino Sans" pitchFamily="34" charset="-122"/>
+                <a:cs typeface="Hiragino Sans" pitchFamily="34" charset="-120"/>
+              </a:rPr>
+              <a:t>CW</a:t>
+            </a:r>
+            <a:endParaRPr lang="en-US" sz="950" dirty="0"/>
           </a:p>
         </p:txBody>
       </p:sp>
@@ -33604,8 +33623,8 @@
         </p:nvSpPr>
         <p:spPr>
           <a:xfrm>
-            <a:off x="7558888" y="3145536"/>
-            <a:ext cx="3480664" cy="246888"/>
+            <a:off x="7850856" y="2624328"/>
+            <a:ext cx="1278880" cy="256946"/>
           </a:xfrm>
           <a:prstGeom prst="rect">
             <a:avLst/>
@@ -33624,7 +33643,7 @@
               <a:buNone/>
             </a:pPr>
             <a:r>
-              <a:rPr lang="en-US" sz="1100" b="1" dirty="0">
+              <a:rPr lang="en-US" sz="1050" b="1" dirty="0">
                 <a:solidFill>
                   <a:srgbClr val="FFFFFF"/>
                 </a:solidFill>
@@ -33632,9 +33651,9 @@
                 <a:ea typeface="Hiragino Sans" pitchFamily="34" charset="-122"/>
                 <a:cs typeface="Hiragino Sans" pitchFamily="34" charset="-120"/>
               </a:rPr>
-              <a:t>私有子網 · ECS</a:t>
-            </a:r>
-            <a:endParaRPr lang="en-US" sz="1100" dirty="0"/>
+              <a:t>CloudWatch Logs</a:t>
+            </a:r>
+            <a:endParaRPr lang="en-US" sz="1050" dirty="0"/>
           </a:p>
         </p:txBody>
       </p:sp>
@@ -33646,8 +33665,8 @@
         </p:nvSpPr>
         <p:spPr>
           <a:xfrm>
-            <a:off x="7558888" y="3419856"/>
-            <a:ext cx="3480664" cy="201168"/>
+            <a:off x="7850856" y="2908706"/>
+            <a:ext cx="1278880" cy="209398"/>
           </a:xfrm>
           <a:prstGeom prst="rect">
             <a:avLst/>
@@ -33674,7 +33693,7 @@
                 <a:ea typeface="Hiragino Sans" pitchFamily="34" charset="-122"/>
                 <a:cs typeface="Hiragino Sans" pitchFamily="34" charset="-120"/>
               </a:rPr>
-              <a:t>無公網 IP</a:t>
+              <a:t>/fleetmind/api</a:t>
             </a:r>
             <a:endParaRPr lang="en-US" sz="850" dirty="0"/>
           </a:p>
@@ -33682,27 +33701,45 @@
       </p:sp>
       <p:sp>
         <p:nvSpPr>
-          <p:cNvPr id="40" name="Shape 37"/>
-          <p:cNvSpPr/>
-          <p:nvPr/>
-        </p:nvSpPr>
-        <p:spPr>
-          <a:xfrm>
-            <a:off x="6809080" y="3374136"/>
-            <a:ext cx="109728" cy="0"/>
-          </a:xfrm>
-          <a:prstGeom prst="line">
-            <a:avLst/>
-          </a:prstGeom>
-          <a:noFill/>
-          <a:ln w="22225">
-            <a:solidFill>
-              <a:srgbClr val="F4A72B"/>
-            </a:solidFill>
-            <a:prstDash val="solid"/>
-            <a:tailEnd type="triangle"/>
-          </a:ln>
-        </p:spPr>
+          <p:cNvPr id="40" name="Text 37"/>
+          <p:cNvSpPr/>
+          <p:nvPr/>
+        </p:nvSpPr>
+        <p:spPr>
+          <a:xfrm>
+            <a:off x="7265640" y="3218688"/>
+            <a:ext cx="1918960" cy="457200"/>
+          </a:xfrm>
+          <a:prstGeom prst="rect">
+            <a:avLst/>
+          </a:prstGeom>
+          <a:noFill/>
+          <a:ln/>
+        </p:spPr>
+        <p:txBody>
+          <a:bodyPr wrap="square" lIns="0" tIns="0" rIns="0" bIns="0" rtlCol="0" anchor="ctr"/>
+          <a:lstStyle/>
+          <a:p>
+            <a:pPr indent="0" marL="0">
+              <a:lnSpc>
+                <a:spcPct val="105000"/>
+              </a:lnSpc>
+              <a:buNone/>
+            </a:pPr>
+            <a:r>
+              <a:rPr lang="en-US" sz="800" dirty="0">
+                <a:solidFill>
+                  <a:srgbClr val="C7D6E4"/>
+                </a:solidFill>
+                <a:latin typeface="Hiragino Sans" pitchFamily="34" charset="0"/>
+                <a:ea typeface="Hiragino Sans" pitchFamily="34" charset="-122"/>
+                <a:cs typeface="Hiragino Sans" pitchFamily="34" charset="-120"/>
+              </a:rPr>
+              <a:t>awslogs driver 已設</a:t>
+            </a:r>
+            <a:endParaRPr lang="en-US" sz="800" dirty="0"/>
+          </a:p>
+        </p:txBody>
       </p:sp>
       <p:sp>
         <p:nvSpPr>
@@ -33712,119 +33749,12 @@
         </p:nvSpPr>
         <p:spPr>
           <a:xfrm>
-            <a:off x="1152144" y="3904488"/>
-            <a:ext cx="9887407" cy="786384"/>
+            <a:off x="9358335" y="2578608"/>
+            <a:ext cx="1992112" cy="566928"/>
           </a:xfrm>
           <a:prstGeom prst="roundRect">
             <a:avLst>
-              <a:gd name="adj" fmla="val 11628"/>
-            </a:avLst>
-          </a:prstGeom>
-          <a:solidFill>
-            <a:srgbClr val="0A2540">
-              <a:alpha val="82000"/>
-            </a:srgbClr>
-          </a:solidFill>
-          <a:ln w="12700">
-            <a:solidFill>
-              <a:srgbClr val="1B4D74"/>
-            </a:solidFill>
-            <a:prstDash val="solid"/>
-          </a:ln>
-        </p:spPr>
-      </p:sp>
-      <p:sp>
-        <p:nvSpPr>
-          <p:cNvPr id="42" name="Text 39"/>
-          <p:cNvSpPr/>
-          <p:nvPr/>
-        </p:nvSpPr>
-        <p:spPr>
-          <a:xfrm>
-            <a:off x="1316736" y="3995928"/>
-            <a:ext cx="1417320" cy="310896"/>
-          </a:xfrm>
-          <a:prstGeom prst="rect">
-            <a:avLst/>
-          </a:prstGeom>
-          <a:noFill/>
-          <a:ln/>
-        </p:spPr>
-        <p:txBody>
-          <a:bodyPr wrap="square" lIns="0" tIns="0" rIns="0" bIns="0" rtlCol="0" anchor="ctr"/>
-          <a:lstStyle/>
-          <a:p>
-            <a:pPr indent="0" marL="0">
-              <a:buNone/>
-            </a:pPr>
-            <a:r>
-              <a:rPr lang="en-US" sz="1300" b="1" dirty="0">
-                <a:solidFill>
-                  <a:srgbClr val="2A9D8F"/>
-                </a:solidFill>
-                <a:latin typeface="Hiragino Sans" pitchFamily="34" charset="0"/>
-                <a:ea typeface="Hiragino Sans" pitchFamily="34" charset="-122"/>
-                <a:cs typeface="Hiragino Sans" pitchFamily="34" charset="-120"/>
-              </a:rPr>
-              <a:t>③ 帳號偵測</a:t>
-            </a:r>
-            <a:endParaRPr lang="en-US" sz="1300" dirty="0"/>
-          </a:p>
-        </p:txBody>
-      </p:sp>
-      <p:sp>
-        <p:nvSpPr>
-          <p:cNvPr id="43" name="Text 40"/>
-          <p:cNvSpPr/>
-          <p:nvPr/>
-        </p:nvSpPr>
-        <p:spPr>
-          <a:xfrm>
-            <a:off x="1316736" y="4325112"/>
-            <a:ext cx="1417320" cy="274320"/>
-          </a:xfrm>
-          <a:prstGeom prst="rect">
-            <a:avLst/>
-          </a:prstGeom>
-          <a:noFill/>
-          <a:ln/>
-        </p:spPr>
-        <p:txBody>
-          <a:bodyPr wrap="square" lIns="0" tIns="0" rIns="0" bIns="0" rtlCol="0" anchor="ctr"/>
-          <a:lstStyle/>
-          <a:p>
-            <a:pPr indent="0" marL="0">
-              <a:buNone/>
-            </a:pPr>
-            <a:r>
-              <a:rPr lang="en-US" sz="900" dirty="0">
-                <a:solidFill>
-                  <a:srgbClr val="C7D6E4"/>
-                </a:solidFill>
-                <a:latin typeface="Hiragino Sans" pitchFamily="34" charset="0"/>
-                <a:ea typeface="Hiragino Sans" pitchFamily="34" charset="-122"/>
-                <a:cs typeface="Hiragino Sans" pitchFamily="34" charset="-120"/>
-              </a:rPr>
-              <a:t>持續監看</a:t>
-            </a:r>
-            <a:endParaRPr lang="en-US" sz="900" dirty="0"/>
-          </a:p>
-        </p:txBody>
-      </p:sp>
-      <p:sp>
-        <p:nvSpPr>
-          <p:cNvPr id="44" name="Shape 41"/>
-          <p:cNvSpPr/>
-          <p:nvPr/>
-        </p:nvSpPr>
-        <p:spPr>
-          <a:xfrm>
-            <a:off x="2852928" y="4023360"/>
-            <a:ext cx="3937864" cy="548640"/>
-          </a:xfrm>
-          <a:prstGeom prst="roundRect">
-            <a:avLst>
-              <a:gd name="adj" fmla="val 13333"/>
+              <a:gd name="adj" fmla="val 12903"/>
             </a:avLst>
           </a:prstGeom>
           <a:solidFill>
@@ -33849,20 +33779,20 @@
       </p:sp>
       <p:sp>
         <p:nvSpPr>
-          <p:cNvPr id="45" name="Shape 42"/>
-          <p:cNvSpPr/>
-          <p:nvPr/>
-        </p:nvSpPr>
-        <p:spPr>
-          <a:xfrm>
-            <a:off x="2990088" y="4105656"/>
+          <p:cNvPr id="42" name="Shape 39"/>
+          <p:cNvSpPr/>
+          <p:nvPr/>
+        </p:nvSpPr>
+        <p:spPr>
+          <a:xfrm>
+            <a:off x="9495495" y="2670048"/>
             <a:ext cx="384048" cy="384048"/>
           </a:xfrm>
           <a:prstGeom prst="ellipse">
             <a:avLst/>
           </a:prstGeom>
           <a:solidFill>
-            <a:srgbClr val="F4A72B"/>
+            <a:srgbClr val="5A6B7B"/>
           </a:solidFill>
           <a:ln w="15875">
             <a:solidFill>
@@ -33874,13 +33804,13 @@
       </p:sp>
       <p:sp>
         <p:nvSpPr>
-          <p:cNvPr id="46" name="Text 43"/>
-          <p:cNvSpPr/>
-          <p:nvPr/>
-        </p:nvSpPr>
-        <p:spPr>
-          <a:xfrm>
-            <a:off x="2990088" y="4096512"/>
+          <p:cNvPr id="43" name="Text 40"/>
+          <p:cNvSpPr/>
+          <p:nvPr/>
+        </p:nvSpPr>
+        <p:spPr>
+          <a:xfrm>
+            <a:off x="9495495" y="2660904"/>
             <a:ext cx="384048" cy="384048"/>
           </a:xfrm>
           <a:prstGeom prst="rect">
@@ -33897,30 +33827,30 @@
               <a:buNone/>
             </a:pPr>
             <a:r>
-              <a:rPr lang="en-US" sz="950" b="1" dirty="0">
-                <a:solidFill>
-                  <a:srgbClr val="0A2540"/>
-                </a:solidFill>
-                <a:latin typeface="Hiragino Sans" pitchFamily="34" charset="0"/>
-                <a:ea typeface="Hiragino Sans" pitchFamily="34" charset="-122"/>
-                <a:cs typeface="Hiragino Sans" pitchFamily="34" charset="-120"/>
-              </a:rPr>
-              <a:t>GD</a:t>
-            </a:r>
-            <a:endParaRPr lang="en-US" sz="950" dirty="0"/>
-          </a:p>
-        </p:txBody>
-      </p:sp>
-      <p:sp>
-        <p:nvSpPr>
-          <p:cNvPr id="47" name="Text 44"/>
-          <p:cNvSpPr/>
-          <p:nvPr/>
-        </p:nvSpPr>
-        <p:spPr>
-          <a:xfrm>
-            <a:off x="3474720" y="4069080"/>
-            <a:ext cx="3224632" cy="246888"/>
+              <a:rPr lang="en-US" sz="800" b="1" dirty="0">
+                <a:solidFill>
+                  <a:srgbClr val="FFFFFF"/>
+                </a:solidFill>
+                <a:latin typeface="Hiragino Sans" pitchFamily="34" charset="0"/>
+                <a:ea typeface="Hiragino Sans" pitchFamily="34" charset="-122"/>
+                <a:cs typeface="Hiragino Sans" pitchFamily="34" charset="-120"/>
+              </a:rPr>
+              <a:t>SLD</a:t>
+            </a:r>
+            <a:endParaRPr lang="en-US" sz="800" dirty="0"/>
+          </a:p>
+        </p:txBody>
+      </p:sp>
+      <p:sp>
+        <p:nvSpPr>
+          <p:cNvPr id="44" name="Text 41"/>
+          <p:cNvSpPr/>
+          <p:nvPr/>
+        </p:nvSpPr>
+        <p:spPr>
+          <a:xfrm>
+            <a:off x="9980127" y="2624328"/>
+            <a:ext cx="1278880" cy="256946"/>
           </a:xfrm>
           <a:prstGeom prst="rect">
             <a:avLst/>
@@ -33939,7 +33869,7 @@
               <a:buNone/>
             </a:pPr>
             <a:r>
-              <a:rPr lang="en-US" sz="1100" b="1" dirty="0">
+              <a:rPr lang="en-US" sz="1050" b="1" dirty="0">
                 <a:solidFill>
                   <a:srgbClr val="FFFFFF"/>
                 </a:solidFill>
@@ -33947,22 +33877,22 @@
                 <a:ea typeface="Hiragino Sans" pitchFamily="34" charset="-122"/>
                 <a:cs typeface="Hiragino Sans" pitchFamily="34" charset="-120"/>
               </a:rPr>
-              <a:t>GuardDuty</a:t>
-            </a:r>
-            <a:endParaRPr lang="en-US" sz="1100" dirty="0"/>
-          </a:p>
-        </p:txBody>
-      </p:sp>
-      <p:sp>
-        <p:nvSpPr>
-          <p:cNvPr id="48" name="Text 45"/>
-          <p:cNvSpPr/>
-          <p:nvPr/>
-        </p:nvSpPr>
-        <p:spPr>
-          <a:xfrm>
-            <a:off x="3474720" y="4343400"/>
-            <a:ext cx="3224632" cy="201168"/>
+              <a:t>Shield Standard</a:t>
+            </a:r>
+            <a:endParaRPr lang="en-US" sz="1050" dirty="0"/>
+          </a:p>
+        </p:txBody>
+      </p:sp>
+      <p:sp>
+        <p:nvSpPr>
+          <p:cNvPr id="45" name="Text 42"/>
+          <p:cNvSpPr/>
+          <p:nvPr/>
+        </p:nvSpPr>
+        <p:spPr>
+          <a:xfrm>
+            <a:off x="9980127" y="2908706"/>
+            <a:ext cx="1278880" cy="209398"/>
           </a:xfrm>
           <a:prstGeom prst="rect">
             <a:avLst/>
@@ -33989,7 +33919,7 @@
                 <a:ea typeface="Hiragino Sans" pitchFamily="34" charset="-122"/>
                 <a:cs typeface="Hiragino Sans" pitchFamily="34" charset="-120"/>
               </a:rPr>
-              <a:t>威脅偵測</a:t>
+              <a:t>ALB 自動生效</a:t>
             </a:r>
             <a:endParaRPr lang="en-US" sz="850" dirty="0"/>
           </a:p>
@@ -33997,18 +33927,167 @@
       </p:sp>
       <p:sp>
         <p:nvSpPr>
-          <p:cNvPr id="49" name="Shape 46"/>
-          <p:cNvSpPr/>
-          <p:nvPr/>
-        </p:nvSpPr>
-        <p:spPr>
-          <a:xfrm>
-            <a:off x="6937096" y="4023360"/>
-            <a:ext cx="3937864" cy="548640"/>
+          <p:cNvPr id="46" name="Text 43"/>
+          <p:cNvSpPr/>
+          <p:nvPr/>
+        </p:nvSpPr>
+        <p:spPr>
+          <a:xfrm>
+            <a:off x="9394911" y="3218688"/>
+            <a:ext cx="1918960" cy="457200"/>
+          </a:xfrm>
+          <a:prstGeom prst="rect">
+            <a:avLst/>
+          </a:prstGeom>
+          <a:noFill/>
+          <a:ln/>
+        </p:spPr>
+        <p:txBody>
+          <a:bodyPr wrap="square" lIns="0" tIns="0" rIns="0" bIns="0" rtlCol="0" anchor="ctr"/>
+          <a:lstStyle/>
+          <a:p>
+            <a:pPr indent="0" marL="0">
+              <a:lnSpc>
+                <a:spcPct val="105000"/>
+              </a:lnSpc>
+              <a:buNone/>
+            </a:pPr>
+            <a:r>
+              <a:rPr lang="en-US" sz="800" dirty="0">
+                <a:solidFill>
+                  <a:srgbClr val="C7D6E4"/>
+                </a:solidFill>
+                <a:latin typeface="Hiragino Sans" pitchFamily="34" charset="0"/>
+                <a:ea typeface="Hiragino Sans" pitchFamily="34" charset="-122"/>
+                <a:cs typeface="Hiragino Sans" pitchFamily="34" charset="-120"/>
+              </a:rPr>
+              <a:t>AWS 預設, 非我們部署</a:t>
+            </a:r>
+            <a:endParaRPr lang="en-US" sz="800" dirty="0"/>
+          </a:p>
+        </p:txBody>
+      </p:sp>
+      <p:sp>
+        <p:nvSpPr>
+          <p:cNvPr id="47" name="Shape 44"/>
+          <p:cNvSpPr/>
+          <p:nvPr/>
+        </p:nvSpPr>
+        <p:spPr>
+          <a:xfrm>
+            <a:off x="640080" y="3986784"/>
+            <a:ext cx="10911535" cy="1755648"/>
           </a:xfrm>
           <a:prstGeom prst="roundRect">
             <a:avLst>
-              <a:gd name="adj" fmla="val 13333"/>
+              <a:gd name="adj" fmla="val 5208"/>
+            </a:avLst>
+          </a:prstGeom>
+          <a:solidFill>
+            <a:srgbClr val="0A2540">
+              <a:alpha val="82000"/>
+            </a:srgbClr>
+          </a:solidFill>
+          <a:ln w="12700">
+            <a:solidFill>
+              <a:srgbClr val="F4A72B"/>
+            </a:solidFill>
+            <a:prstDash val="solid"/>
+          </a:ln>
+        </p:spPr>
+      </p:sp>
+      <p:sp>
+        <p:nvSpPr>
+          <p:cNvPr id="48" name="Text 45"/>
+          <p:cNvSpPr/>
+          <p:nvPr/>
+        </p:nvSpPr>
+        <p:spPr>
+          <a:xfrm>
+            <a:off x="841248" y="4096512"/>
+            <a:ext cx="1828800" cy="292608"/>
+          </a:xfrm>
+          <a:prstGeom prst="rect">
+            <a:avLst/>
+          </a:prstGeom>
+          <a:noFill/>
+          <a:ln/>
+        </p:spPr>
+        <p:txBody>
+          <a:bodyPr wrap="square" lIns="0" tIns="0" rIns="0" bIns="0" rtlCol="0" anchor="ctr"/>
+          <a:lstStyle/>
+          <a:p>
+            <a:pPr indent="0" marL="0">
+              <a:buNone/>
+            </a:pPr>
+            <a:r>
+              <a:rPr lang="en-US" sz="1400" b="1" dirty="0">
+                <a:solidFill>
+                  <a:srgbClr val="F4A72B"/>
+                </a:solidFill>
+                <a:latin typeface="Hiragino Sans" pitchFamily="34" charset="0"/>
+                <a:ea typeface="Hiragino Sans" pitchFamily="34" charset="-122"/>
+                <a:cs typeface="Hiragino Sans" pitchFamily="34" charset="-120"/>
+              </a:rPr>
+              <a:t>規劃中</a:t>
+            </a:r>
+            <a:endParaRPr lang="en-US" sz="1400" dirty="0"/>
+          </a:p>
+        </p:txBody>
+      </p:sp>
+      <p:sp>
+        <p:nvSpPr>
+          <p:cNvPr id="49" name="Text 46"/>
+          <p:cNvSpPr/>
+          <p:nvPr/>
+        </p:nvSpPr>
+        <p:spPr>
+          <a:xfrm>
+            <a:off x="2011680" y="4096512"/>
+            <a:ext cx="2194560" cy="292608"/>
+          </a:xfrm>
+          <a:prstGeom prst="rect">
+            <a:avLst/>
+          </a:prstGeom>
+          <a:noFill/>
+          <a:ln/>
+        </p:spPr>
+        <p:txBody>
+          <a:bodyPr wrap="square" lIns="0" tIns="0" rIns="0" bIns="0" rtlCol="0" anchor="ctr"/>
+          <a:lstStyle/>
+          <a:p>
+            <a:pPr indent="0" marL="0">
+              <a:buNone/>
+            </a:pPr>
+            <a:r>
+              <a:rPr lang="en-US" sz="950" dirty="0">
+                <a:solidFill>
+                  <a:srgbClr val="C7D6E4"/>
+                </a:solidFill>
+                <a:latin typeface="Hiragino Sans" pitchFamily="34" charset="0"/>
+                <a:ea typeface="Hiragino Sans" pitchFamily="34" charset="-122"/>
+                <a:cs typeface="Hiragino Sans" pitchFamily="34" charset="-120"/>
+              </a:rPr>
+              <a:t>尚未部署</a:t>
+            </a:r>
+            <a:endParaRPr lang="en-US" sz="950" dirty="0"/>
+          </a:p>
+        </p:txBody>
+      </p:sp>
+      <p:sp>
+        <p:nvSpPr>
+          <p:cNvPr id="50" name="Shape 47"/>
+          <p:cNvSpPr/>
+          <p:nvPr/>
+        </p:nvSpPr>
+        <p:spPr>
+          <a:xfrm>
+            <a:off x="841248" y="4462272"/>
+            <a:ext cx="2524430" cy="566928"/>
+          </a:xfrm>
+          <a:prstGeom prst="roundRect">
+            <a:avLst>
+              <a:gd name="adj" fmla="val 12903"/>
             </a:avLst>
           </a:prstGeom>
           <a:solidFill>
@@ -34033,20 +34112,20 @@
       </p:sp>
       <p:sp>
         <p:nvSpPr>
-          <p:cNvPr id="50" name="Shape 47"/>
-          <p:cNvSpPr/>
-          <p:nvPr/>
-        </p:nvSpPr>
-        <p:spPr>
-          <a:xfrm>
-            <a:off x="7074256" y="4105656"/>
+          <p:cNvPr id="51" name="Shape 48"/>
+          <p:cNvSpPr/>
+          <p:nvPr/>
+        </p:nvSpPr>
+        <p:spPr>
+          <a:xfrm>
+            <a:off x="978408" y="4553712"/>
             <a:ext cx="384048" cy="384048"/>
           </a:xfrm>
           <a:prstGeom prst="ellipse">
             <a:avLst/>
           </a:prstGeom>
           <a:solidFill>
-            <a:srgbClr val="5A6B7B"/>
+            <a:srgbClr val="1C7293"/>
           </a:solidFill>
           <a:ln w="15875">
             <a:solidFill>
@@ -34058,13 +34137,13 @@
       </p:sp>
       <p:sp>
         <p:nvSpPr>
-          <p:cNvPr id="51" name="Text 48"/>
-          <p:cNvSpPr/>
-          <p:nvPr/>
-        </p:nvSpPr>
-        <p:spPr>
-          <a:xfrm>
-            <a:off x="7074256" y="4096512"/>
+          <p:cNvPr id="52" name="Text 49"/>
+          <p:cNvSpPr/>
+          <p:nvPr/>
+        </p:nvSpPr>
+        <p:spPr>
+          <a:xfrm>
+            <a:off x="978408" y="4544568"/>
             <a:ext cx="384048" cy="384048"/>
           </a:xfrm>
           <a:prstGeom prst="rect">
@@ -34081,7 +34160,7 @@
               <a:buNone/>
             </a:pPr>
             <a:r>
-              <a:rPr lang="en-US" sz="950" b="1" dirty="0">
+              <a:rPr lang="en-US" sz="800" b="1" dirty="0">
                 <a:solidFill>
                   <a:srgbClr val="FFFFFF"/>
                 </a:solidFill>
@@ -34089,22 +34168,22 @@
                 <a:ea typeface="Hiragino Sans" pitchFamily="34" charset="-122"/>
                 <a:cs typeface="Hiragino Sans" pitchFamily="34" charset="-120"/>
               </a:rPr>
-              <a:t>CT</a:t>
-            </a:r>
-            <a:endParaRPr lang="en-US" sz="950" dirty="0"/>
-          </a:p>
-        </p:txBody>
-      </p:sp>
-      <p:sp>
-        <p:nvSpPr>
-          <p:cNvPr id="52" name="Text 49"/>
-          <p:cNvSpPr/>
-          <p:nvPr/>
-        </p:nvSpPr>
-        <p:spPr>
-          <a:xfrm>
-            <a:off x="7558888" y="4069080"/>
-            <a:ext cx="3224632" cy="246888"/>
+              <a:t>WAF</a:t>
+            </a:r>
+            <a:endParaRPr lang="en-US" sz="800" dirty="0"/>
+          </a:p>
+        </p:txBody>
+      </p:sp>
+      <p:sp>
+        <p:nvSpPr>
+          <p:cNvPr id="53" name="Text 50"/>
+          <p:cNvSpPr/>
+          <p:nvPr/>
+        </p:nvSpPr>
+        <p:spPr>
+          <a:xfrm>
+            <a:off x="1463040" y="4507992"/>
+            <a:ext cx="1811198" cy="256946"/>
           </a:xfrm>
           <a:prstGeom prst="rect">
             <a:avLst/>
@@ -34123,7 +34202,7 @@
               <a:buNone/>
             </a:pPr>
             <a:r>
-              <a:rPr lang="en-US" sz="1100" b="1" dirty="0">
+              <a:rPr lang="en-US" sz="1050" b="1" dirty="0">
                 <a:solidFill>
                   <a:srgbClr val="FFFFFF"/>
                 </a:solidFill>
@@ -34131,22 +34210,22 @@
                 <a:ea typeface="Hiragino Sans" pitchFamily="34" charset="-122"/>
                 <a:cs typeface="Hiragino Sans" pitchFamily="34" charset="-120"/>
               </a:rPr>
-              <a:t>CloudTrail</a:t>
-            </a:r>
-            <a:endParaRPr lang="en-US" sz="1100" dirty="0"/>
-          </a:p>
-        </p:txBody>
-      </p:sp>
-      <p:sp>
-        <p:nvSpPr>
-          <p:cNvPr id="53" name="Text 50"/>
-          <p:cNvSpPr/>
-          <p:nvPr/>
-        </p:nvSpPr>
-        <p:spPr>
-          <a:xfrm>
-            <a:off x="7558888" y="4343400"/>
-            <a:ext cx="3224632" cy="201168"/>
+              <a:t>AWS WAF</a:t>
+            </a:r>
+            <a:endParaRPr lang="en-US" sz="1050" dirty="0"/>
+          </a:p>
+        </p:txBody>
+      </p:sp>
+      <p:sp>
+        <p:nvSpPr>
+          <p:cNvPr id="54" name="Text 51"/>
+          <p:cNvSpPr/>
+          <p:nvPr/>
+        </p:nvSpPr>
+        <p:spPr>
+          <a:xfrm>
+            <a:off x="1463040" y="4792370"/>
+            <a:ext cx="1811198" cy="209398"/>
           </a:xfrm>
           <a:prstGeom prst="rect">
             <a:avLst/>
@@ -34173,7 +34252,7 @@
                 <a:ea typeface="Hiragino Sans" pitchFamily="34" charset="-122"/>
                 <a:cs typeface="Hiragino Sans" pitchFamily="34" charset="-120"/>
               </a:rPr>
-              <a:t>稽核軌跡</a:t>
+              <a:t>L7 規則過濾</a:t>
             </a:r>
             <a:endParaRPr lang="en-US" sz="850" dirty="0"/>
           </a:p>
@@ -34181,125 +34260,60 @@
       </p:sp>
       <p:sp>
         <p:nvSpPr>
-          <p:cNvPr id="54" name="Shape 51"/>
-          <p:cNvSpPr/>
-          <p:nvPr/>
-        </p:nvSpPr>
-        <p:spPr>
-          <a:xfrm>
-            <a:off x="1408176" y="4828032"/>
-            <a:ext cx="9375343" cy="786384"/>
+          <p:cNvPr id="55" name="Text 52"/>
+          <p:cNvSpPr/>
+          <p:nvPr/>
+        </p:nvSpPr>
+        <p:spPr>
+          <a:xfrm>
+            <a:off x="877824" y="5102352"/>
+            <a:ext cx="2451278" cy="457200"/>
+          </a:xfrm>
+          <a:prstGeom prst="rect">
+            <a:avLst/>
+          </a:prstGeom>
+          <a:noFill/>
+          <a:ln/>
+        </p:spPr>
+        <p:txBody>
+          <a:bodyPr wrap="square" lIns="0" tIns="0" rIns="0" bIns="0" rtlCol="0" anchor="ctr"/>
+          <a:lstStyle/>
+          <a:p>
+            <a:pPr indent="0" marL="0">
+              <a:lnSpc>
+                <a:spcPct val="105000"/>
+              </a:lnSpc>
+              <a:buNone/>
+            </a:pPr>
+            <a:r>
+              <a:rPr lang="en-US" sz="800" dirty="0">
+                <a:solidFill>
+                  <a:srgbClr val="C7D6E4"/>
+                </a:solidFill>
+                <a:latin typeface="Hiragino Sans" pitchFamily="34" charset="0"/>
+                <a:ea typeface="Hiragino Sans" pitchFamily="34" charset="-122"/>
+                <a:cs typeface="Hiragino Sans" pitchFamily="34" charset="-120"/>
+              </a:rPr>
+              <a:t>目前 0 個 WebACL</a:t>
+            </a:r>
+            <a:endParaRPr lang="en-US" sz="800" dirty="0"/>
+          </a:p>
+        </p:txBody>
+      </p:sp>
+      <p:sp>
+        <p:nvSpPr>
+          <p:cNvPr id="56" name="Shape 53"/>
+          <p:cNvSpPr/>
+          <p:nvPr/>
+        </p:nvSpPr>
+        <p:spPr>
+          <a:xfrm>
+            <a:off x="3502838" y="4462272"/>
+            <a:ext cx="2524430" cy="566928"/>
           </a:xfrm>
           <a:prstGeom prst="roundRect">
             <a:avLst>
-              <a:gd name="adj" fmla="val 11628"/>
-            </a:avLst>
-          </a:prstGeom>
-          <a:solidFill>
-            <a:srgbClr val="0A2540">
-              <a:alpha val="82000"/>
-            </a:srgbClr>
-          </a:solidFill>
-          <a:ln w="12700">
-            <a:solidFill>
-              <a:srgbClr val="1B4D74"/>
-            </a:solidFill>
-            <a:prstDash val="solid"/>
-          </a:ln>
-        </p:spPr>
-      </p:sp>
-      <p:sp>
-        <p:nvSpPr>
-          <p:cNvPr id="55" name="Text 52"/>
-          <p:cNvSpPr/>
-          <p:nvPr/>
-        </p:nvSpPr>
-        <p:spPr>
-          <a:xfrm>
-            <a:off x="1572768" y="4919472"/>
-            <a:ext cx="1417320" cy="310896"/>
-          </a:xfrm>
-          <a:prstGeom prst="rect">
-            <a:avLst/>
-          </a:prstGeom>
-          <a:noFill/>
-          <a:ln/>
-        </p:spPr>
-        <p:txBody>
-          <a:bodyPr wrap="square" lIns="0" tIns="0" rIns="0" bIns="0" rtlCol="0" anchor="ctr"/>
-          <a:lstStyle/>
-          <a:p>
-            <a:pPr indent="0" marL="0">
-              <a:buNone/>
-            </a:pPr>
-            <a:r>
-              <a:rPr lang="en-US" sz="1300" b="1" dirty="0">
-                <a:solidFill>
-                  <a:srgbClr val="2A9D8F"/>
-                </a:solidFill>
-                <a:latin typeface="Hiragino Sans" pitchFamily="34" charset="0"/>
-                <a:ea typeface="Hiragino Sans" pitchFamily="34" charset="-122"/>
-                <a:cs typeface="Hiragino Sans" pitchFamily="34" charset="-120"/>
-              </a:rPr>
-              <a:t>④ 機密加密</a:t>
-            </a:r>
-            <a:endParaRPr lang="en-US" sz="1300" dirty="0"/>
-          </a:p>
-        </p:txBody>
-      </p:sp>
-      <p:sp>
-        <p:nvSpPr>
-          <p:cNvPr id="56" name="Text 53"/>
-          <p:cNvSpPr/>
-          <p:nvPr/>
-        </p:nvSpPr>
-        <p:spPr>
-          <a:xfrm>
-            <a:off x="1572768" y="5248656"/>
-            <a:ext cx="1417320" cy="274320"/>
-          </a:xfrm>
-          <a:prstGeom prst="rect">
-            <a:avLst/>
-          </a:prstGeom>
-          <a:noFill/>
-          <a:ln/>
-        </p:spPr>
-        <p:txBody>
-          <a:bodyPr wrap="square" lIns="0" tIns="0" rIns="0" bIns="0" rtlCol="0" anchor="ctr"/>
-          <a:lstStyle/>
-          <a:p>
-            <a:pPr indent="0" marL="0">
-              <a:buNone/>
-            </a:pPr>
-            <a:r>
-              <a:rPr lang="en-US" sz="900" dirty="0">
-                <a:solidFill>
-                  <a:srgbClr val="C7D6E4"/>
-                </a:solidFill>
-                <a:latin typeface="Hiragino Sans" pitchFamily="34" charset="0"/>
-                <a:ea typeface="Hiragino Sans" pitchFamily="34" charset="-122"/>
-                <a:cs typeface="Hiragino Sans" pitchFamily="34" charset="-120"/>
-              </a:rPr>
-              <a:t>零信任存取</a:t>
-            </a:r>
-            <a:endParaRPr lang="en-US" sz="900" dirty="0"/>
-          </a:p>
-        </p:txBody>
-      </p:sp>
-      <p:sp>
-        <p:nvSpPr>
-          <p:cNvPr id="57" name="Shape 54"/>
-          <p:cNvSpPr/>
-          <p:nvPr/>
-        </p:nvSpPr>
-        <p:spPr>
-          <a:xfrm>
-            <a:off x="3108960" y="4946904"/>
-            <a:ext cx="2405786" cy="548640"/>
-          </a:xfrm>
-          <a:prstGeom prst="roundRect">
-            <a:avLst>
-              <a:gd name="adj" fmla="val 13333"/>
+              <a:gd name="adj" fmla="val 12903"/>
             </a:avLst>
           </a:prstGeom>
           <a:solidFill>
@@ -34324,20 +34338,20 @@
       </p:sp>
       <p:sp>
         <p:nvSpPr>
-          <p:cNvPr id="58" name="Shape 55"/>
-          <p:cNvSpPr/>
-          <p:nvPr/>
-        </p:nvSpPr>
-        <p:spPr>
-          <a:xfrm>
-            <a:off x="3246120" y="5029200"/>
+          <p:cNvPr id="57" name="Shape 54"/>
+          <p:cNvSpPr/>
+          <p:nvPr/>
+        </p:nvSpPr>
+        <p:spPr>
+          <a:xfrm>
+            <a:off x="3639998" y="4553712"/>
             <a:ext cx="384048" cy="384048"/>
           </a:xfrm>
           <a:prstGeom prst="ellipse">
             <a:avLst/>
           </a:prstGeom>
           <a:solidFill>
-            <a:srgbClr val="5C7B95"/>
+            <a:srgbClr val="F4A72B"/>
           </a:solidFill>
           <a:ln w="15875">
             <a:solidFill>
@@ -34349,53 +34363,53 @@
       </p:sp>
       <p:sp>
         <p:nvSpPr>
+          <p:cNvPr id="58" name="Text 55"/>
+          <p:cNvSpPr/>
+          <p:nvPr/>
+        </p:nvSpPr>
+        <p:spPr>
+          <a:xfrm>
+            <a:off x="3639998" y="4544568"/>
+            <a:ext cx="384048" cy="384048"/>
+          </a:xfrm>
+          <a:prstGeom prst="rect">
+            <a:avLst/>
+          </a:prstGeom>
+          <a:noFill/>
+          <a:ln/>
+        </p:spPr>
+        <p:txBody>
+          <a:bodyPr wrap="square" lIns="0" tIns="0" rIns="0" bIns="0" rtlCol="0" anchor="ctr"/>
+          <a:lstStyle/>
+          <a:p>
+            <a:pPr algn="ctr" indent="0" marL="0">
+              <a:buNone/>
+            </a:pPr>
+            <a:r>
+              <a:rPr lang="en-US" sz="950" b="1" dirty="0">
+                <a:solidFill>
+                  <a:srgbClr val="0A2540"/>
+                </a:solidFill>
+                <a:latin typeface="Hiragino Sans" pitchFamily="34" charset="0"/>
+                <a:ea typeface="Hiragino Sans" pitchFamily="34" charset="-122"/>
+                <a:cs typeface="Hiragino Sans" pitchFamily="34" charset="-120"/>
+              </a:rPr>
+              <a:t>GD</a:t>
+            </a:r>
+            <a:endParaRPr lang="en-US" sz="950" dirty="0"/>
+          </a:p>
+        </p:txBody>
+      </p:sp>
+      <p:sp>
+        <p:nvSpPr>
           <p:cNvPr id="59" name="Text 56"/>
           <p:cNvSpPr/>
           <p:nvPr/>
         </p:nvSpPr>
         <p:spPr>
           <a:xfrm>
-            <a:off x="3246120" y="5020056"/>
-            <a:ext cx="384048" cy="384048"/>
-          </a:xfrm>
-          <a:prstGeom prst="rect">
-            <a:avLst/>
-          </a:prstGeom>
-          <a:noFill/>
-          <a:ln/>
-        </p:spPr>
-        <p:txBody>
-          <a:bodyPr wrap="square" lIns="0" tIns="0" rIns="0" bIns="0" rtlCol="0" anchor="ctr"/>
-          <a:lstStyle/>
-          <a:p>
-            <a:pPr algn="ctr" indent="0" marL="0">
-              <a:buNone/>
-            </a:pPr>
-            <a:r>
-              <a:rPr lang="en-US" sz="950" b="1" dirty="0">
-                <a:solidFill>
-                  <a:srgbClr val="FFFFFF"/>
-                </a:solidFill>
-                <a:latin typeface="Hiragino Sans" pitchFamily="34" charset="0"/>
-                <a:ea typeface="Hiragino Sans" pitchFamily="34" charset="-122"/>
-                <a:cs typeface="Hiragino Sans" pitchFamily="34" charset="-120"/>
-              </a:rPr>
-              <a:t>SM</a:t>
-            </a:r>
-            <a:endParaRPr lang="en-US" sz="950" dirty="0"/>
-          </a:p>
-        </p:txBody>
-      </p:sp>
-      <p:sp>
-        <p:nvSpPr>
-          <p:cNvPr id="60" name="Text 57"/>
-          <p:cNvSpPr/>
-          <p:nvPr/>
-        </p:nvSpPr>
-        <p:spPr>
-          <a:xfrm>
-            <a:off x="3730752" y="4992624"/>
-            <a:ext cx="1692554" cy="246888"/>
+            <a:off x="4124630" y="4507992"/>
+            <a:ext cx="1811198" cy="256946"/>
           </a:xfrm>
           <a:prstGeom prst="rect">
             <a:avLst/>
@@ -34414,7 +34428,7 @@
               <a:buNone/>
             </a:pPr>
             <a:r>
-              <a:rPr lang="en-US" sz="1100" b="1" dirty="0">
+              <a:rPr lang="en-US" sz="1050" b="1" dirty="0">
                 <a:solidFill>
                   <a:srgbClr val="FFFFFF"/>
                 </a:solidFill>
@@ -34422,22 +34436,22 @@
                 <a:ea typeface="Hiragino Sans" pitchFamily="34" charset="-122"/>
                 <a:cs typeface="Hiragino Sans" pitchFamily="34" charset="-120"/>
               </a:rPr>
-              <a:t>Secrets Manager</a:t>
-            </a:r>
-            <a:endParaRPr lang="en-US" sz="1100" dirty="0"/>
-          </a:p>
-        </p:txBody>
-      </p:sp>
-      <p:sp>
-        <p:nvSpPr>
-          <p:cNvPr id="61" name="Text 58"/>
-          <p:cNvSpPr/>
-          <p:nvPr/>
-        </p:nvSpPr>
-        <p:spPr>
-          <a:xfrm>
-            <a:off x="3730752" y="5266944"/>
-            <a:ext cx="1692554" cy="201168"/>
+              <a:t>GuardDuty</a:t>
+            </a:r>
+            <a:endParaRPr lang="en-US" sz="1050" dirty="0"/>
+          </a:p>
+        </p:txBody>
+      </p:sp>
+      <p:sp>
+        <p:nvSpPr>
+          <p:cNvPr id="60" name="Text 57"/>
+          <p:cNvSpPr/>
+          <p:nvPr/>
+        </p:nvSpPr>
+        <p:spPr>
+          <a:xfrm>
+            <a:off x="4124630" y="4792370"/>
+            <a:ext cx="1811198" cy="209398"/>
           </a:xfrm>
           <a:prstGeom prst="rect">
             <a:avLst/>
@@ -34464,7 +34478,7 @@
                 <a:ea typeface="Hiragino Sans" pitchFamily="34" charset="-122"/>
                 <a:cs typeface="Hiragino Sans" pitchFamily="34" charset="-120"/>
               </a:rPr>
-              <a:t>憑證託管</a:t>
+              <a:t>威脅偵測</a:t>
             </a:r>
             <a:endParaRPr lang="en-US" sz="850" dirty="0"/>
           </a:p>
@@ -34472,18 +34486,60 @@
       </p:sp>
       <p:sp>
         <p:nvSpPr>
+          <p:cNvPr id="61" name="Text 58"/>
+          <p:cNvSpPr/>
+          <p:nvPr/>
+        </p:nvSpPr>
+        <p:spPr>
+          <a:xfrm>
+            <a:off x="3539414" y="5102352"/>
+            <a:ext cx="2451278" cy="457200"/>
+          </a:xfrm>
+          <a:prstGeom prst="rect">
+            <a:avLst/>
+          </a:prstGeom>
+          <a:noFill/>
+          <a:ln/>
+        </p:spPr>
+        <p:txBody>
+          <a:bodyPr wrap="square" lIns="0" tIns="0" rIns="0" bIns="0" rtlCol="0" anchor="ctr"/>
+          <a:lstStyle/>
+          <a:p>
+            <a:pPr indent="0" marL="0">
+              <a:lnSpc>
+                <a:spcPct val="105000"/>
+              </a:lnSpc>
+              <a:buNone/>
+            </a:pPr>
+            <a:r>
+              <a:rPr lang="en-US" sz="800" dirty="0">
+                <a:solidFill>
+                  <a:srgbClr val="C7D6E4"/>
+                </a:solidFill>
+                <a:latin typeface="Hiragino Sans" pitchFamily="34" charset="0"/>
+                <a:ea typeface="Hiragino Sans" pitchFamily="34" charset="-122"/>
+                <a:cs typeface="Hiragino Sans" pitchFamily="34" charset="-120"/>
+              </a:rPr>
+              <a:t>本帳號 AccessDenied, 開不了</a:t>
+            </a:r>
+            <a:endParaRPr lang="en-US" sz="800" dirty="0"/>
+          </a:p>
+        </p:txBody>
+      </p:sp>
+      <p:sp>
+        <p:nvSpPr>
           <p:cNvPr id="62" name="Shape 59"/>
           <p:cNvSpPr/>
           <p:nvPr/>
         </p:nvSpPr>
         <p:spPr>
           <a:xfrm>
-            <a:off x="5661050" y="4946904"/>
-            <a:ext cx="2405786" cy="548640"/>
+            <a:off x="6164428" y="4462272"/>
+            <a:ext cx="2524430" cy="566928"/>
           </a:xfrm>
           <a:prstGeom prst="roundRect">
             <a:avLst>
-              <a:gd name="adj" fmla="val 13333"/>
+              <a:gd name="adj" fmla="val 12903"/>
             </a:avLst>
           </a:prstGeom>
           <a:solidFill>
@@ -34514,14 +34570,14 @@
         </p:nvSpPr>
         <p:spPr>
           <a:xfrm>
-            <a:off x="5798210" y="5029200"/>
+            <a:off x="6301588" y="4553712"/>
             <a:ext cx="384048" cy="384048"/>
           </a:xfrm>
           <a:prstGeom prst="ellipse">
             <a:avLst/>
           </a:prstGeom>
           <a:solidFill>
-            <a:srgbClr val="2A9D8F"/>
+            <a:srgbClr val="5C7B95"/>
           </a:solidFill>
           <a:ln w="15875">
             <a:solidFill>
@@ -34539,7 +34595,7 @@
         </p:nvSpPr>
         <p:spPr>
           <a:xfrm>
-            <a:off x="5798210" y="5020056"/>
+            <a:off x="6301588" y="4544568"/>
             <a:ext cx="384048" cy="384048"/>
           </a:xfrm>
           <a:prstGeom prst="rect">
@@ -34556,7 +34612,7 @@
               <a:buNone/>
             </a:pPr>
             <a:r>
-              <a:rPr lang="en-US" sz="800" b="1" dirty="0">
+              <a:rPr lang="en-US" sz="950" b="1" dirty="0">
                 <a:solidFill>
                   <a:srgbClr val="FFFFFF"/>
                 </a:solidFill>
@@ -34564,9 +34620,9 @@
                 <a:ea typeface="Hiragino Sans" pitchFamily="34" charset="-122"/>
                 <a:cs typeface="Hiragino Sans" pitchFamily="34" charset="-120"/>
               </a:rPr>
-              <a:t>KMS</a:t>
-            </a:r>
-            <a:endParaRPr lang="en-US" sz="800" dirty="0"/>
+              <a:t>SM</a:t>
+            </a:r>
+            <a:endParaRPr lang="en-US" sz="950" dirty="0"/>
           </a:p>
         </p:txBody>
       </p:sp>
@@ -34578,8 +34634,8 @@
         </p:nvSpPr>
         <p:spPr>
           <a:xfrm>
-            <a:off x="6282842" y="4992624"/>
-            <a:ext cx="1692554" cy="246888"/>
+            <a:off x="6786220" y="4507992"/>
+            <a:ext cx="1811198" cy="256946"/>
           </a:xfrm>
           <a:prstGeom prst="rect">
             <a:avLst/>
@@ -34598,7 +34654,7 @@
               <a:buNone/>
             </a:pPr>
             <a:r>
-              <a:rPr lang="en-US" sz="1100" b="1" dirty="0">
+              <a:rPr lang="en-US" sz="1050" b="1" dirty="0">
                 <a:solidFill>
                   <a:srgbClr val="FFFFFF"/>
                 </a:solidFill>
@@ -34606,9 +34662,9 @@
                 <a:ea typeface="Hiragino Sans" pitchFamily="34" charset="-122"/>
                 <a:cs typeface="Hiragino Sans" pitchFamily="34" charset="-120"/>
               </a:rPr>
-              <a:t>KMS</a:t>
-            </a:r>
-            <a:endParaRPr lang="en-US" sz="1100" dirty="0"/>
+              <a:t>Secrets Manager</a:t>
+            </a:r>
+            <a:endParaRPr lang="en-US" sz="1050" dirty="0"/>
           </a:p>
         </p:txBody>
       </p:sp>
@@ -34620,8 +34676,8 @@
         </p:nvSpPr>
         <p:spPr>
           <a:xfrm>
-            <a:off x="6282842" y="5266944"/>
-            <a:ext cx="1692554" cy="201168"/>
+            <a:off x="6786220" y="4792370"/>
+            <a:ext cx="1811198" cy="209398"/>
           </a:xfrm>
           <a:prstGeom prst="rect">
             <a:avLst/>
@@ -34648,7 +34704,7 @@
                 <a:ea typeface="Hiragino Sans" pitchFamily="34" charset="-122"/>
                 <a:cs typeface="Hiragino Sans" pitchFamily="34" charset="-120"/>
               </a:rPr>
-              <a:t>金鑰加密</a:t>
+              <a:t>憑證託管</a:t>
             </a:r>
             <a:endParaRPr lang="en-US" sz="850" dirty="0"/>
           </a:p>
@@ -34656,18 +34712,60 @@
       </p:sp>
       <p:sp>
         <p:nvSpPr>
-          <p:cNvPr id="67" name="Shape 64"/>
-          <p:cNvSpPr/>
-          <p:nvPr/>
-        </p:nvSpPr>
-        <p:spPr>
-          <a:xfrm>
-            <a:off x="8213141" y="4946904"/>
-            <a:ext cx="2405786" cy="548640"/>
+          <p:cNvPr id="67" name="Text 64"/>
+          <p:cNvSpPr/>
+          <p:nvPr/>
+        </p:nvSpPr>
+        <p:spPr>
+          <a:xfrm>
+            <a:off x="6201004" y="5102352"/>
+            <a:ext cx="2451278" cy="457200"/>
+          </a:xfrm>
+          <a:prstGeom prst="rect">
+            <a:avLst/>
+          </a:prstGeom>
+          <a:noFill/>
+          <a:ln/>
+        </p:spPr>
+        <p:txBody>
+          <a:bodyPr wrap="square" lIns="0" tIns="0" rIns="0" bIns="0" rtlCol="0" anchor="ctr"/>
+          <a:lstStyle/>
+          <a:p>
+            <a:pPr indent="0" marL="0">
+              <a:lnSpc>
+                <a:spcPct val="105000"/>
+              </a:lnSpc>
+              <a:buNone/>
+            </a:pPr>
+            <a:r>
+              <a:rPr lang="en-US" sz="800" dirty="0">
+                <a:solidFill>
+                  <a:srgbClr val="C7D6E4"/>
+                </a:solidFill>
+                <a:latin typeface="Hiragino Sans" pitchFamily="34" charset="0"/>
+                <a:ea typeface="Hiragino Sans" pitchFamily="34" charset="-122"/>
+                <a:cs typeface="Hiragino Sans" pitchFamily="34" charset="-120"/>
+              </a:rPr>
+              <a:t>目前 0 個 secret</a:t>
+            </a:r>
+            <a:endParaRPr lang="en-US" sz="800" dirty="0"/>
+          </a:p>
+        </p:txBody>
+      </p:sp>
+      <p:sp>
+        <p:nvSpPr>
+          <p:cNvPr id="68" name="Shape 65"/>
+          <p:cNvSpPr/>
+          <p:nvPr/>
+        </p:nvSpPr>
+        <p:spPr>
+          <a:xfrm>
+            <a:off x="8826017" y="4462272"/>
+            <a:ext cx="2524430" cy="566928"/>
           </a:xfrm>
           <a:prstGeom prst="roundRect">
             <a:avLst>
-              <a:gd name="adj" fmla="val 13333"/>
+              <a:gd name="adj" fmla="val 12903"/>
             </a:avLst>
           </a:prstGeom>
           <a:solidFill>
@@ -34692,20 +34790,20 @@
       </p:sp>
       <p:sp>
         <p:nvSpPr>
-          <p:cNvPr id="68" name="Shape 65"/>
-          <p:cNvSpPr/>
-          <p:nvPr/>
-        </p:nvSpPr>
-        <p:spPr>
-          <a:xfrm>
-            <a:off x="8350301" y="5029200"/>
+          <p:cNvPr id="69" name="Shape 66"/>
+          <p:cNvSpPr/>
+          <p:nvPr/>
+        </p:nvSpPr>
+        <p:spPr>
+          <a:xfrm>
+            <a:off x="8963177" y="4553712"/>
             <a:ext cx="384048" cy="384048"/>
           </a:xfrm>
           <a:prstGeom prst="ellipse">
             <a:avLst/>
           </a:prstGeom>
           <a:solidFill>
-            <a:srgbClr val="5A6B7B"/>
+            <a:srgbClr val="2A9D8F"/>
           </a:solidFill>
           <a:ln w="15875">
             <a:solidFill>
@@ -34717,13 +34815,13 @@
       </p:sp>
       <p:sp>
         <p:nvSpPr>
-          <p:cNvPr id="69" name="Text 66"/>
-          <p:cNvSpPr/>
-          <p:nvPr/>
-        </p:nvSpPr>
-        <p:spPr>
-          <a:xfrm>
-            <a:off x="8350301" y="5020056"/>
+          <p:cNvPr id="70" name="Text 67"/>
+          <p:cNvSpPr/>
+          <p:nvPr/>
+        </p:nvSpPr>
+        <p:spPr>
+          <a:xfrm>
+            <a:off x="8963177" y="4544568"/>
             <a:ext cx="384048" cy="384048"/>
           </a:xfrm>
           <a:prstGeom prst="rect">
@@ -34748,7 +34846,7 @@
                 <a:ea typeface="Hiragino Sans" pitchFamily="34" charset="-122"/>
                 <a:cs typeface="Hiragino Sans" pitchFamily="34" charset="-120"/>
               </a:rPr>
-              <a:t>IAM</a:t>
+              <a:t>KMS</a:t>
             </a:r>
             <a:endParaRPr lang="en-US" sz="800" dirty="0"/>
           </a:p>
@@ -34756,14 +34854,14 @@
       </p:sp>
       <p:sp>
         <p:nvSpPr>
-          <p:cNvPr id="70" name="Text 67"/>
-          <p:cNvSpPr/>
-          <p:nvPr/>
-        </p:nvSpPr>
-        <p:spPr>
-          <a:xfrm>
-            <a:off x="8834933" y="4992624"/>
-            <a:ext cx="1692554" cy="246888"/>
+          <p:cNvPr id="71" name="Text 68"/>
+          <p:cNvSpPr/>
+          <p:nvPr/>
+        </p:nvSpPr>
+        <p:spPr>
+          <a:xfrm>
+            <a:off x="9447809" y="4507992"/>
+            <a:ext cx="1811198" cy="256946"/>
           </a:xfrm>
           <a:prstGeom prst="rect">
             <a:avLst/>
@@ -34782,7 +34880,7 @@
               <a:buNone/>
             </a:pPr>
             <a:r>
-              <a:rPr lang="en-US" sz="1100" b="1" dirty="0">
+              <a:rPr lang="en-US" sz="1050" b="1" dirty="0">
                 <a:solidFill>
                   <a:srgbClr val="FFFFFF"/>
                 </a:solidFill>
@@ -34790,22 +34888,22 @@
                 <a:ea typeface="Hiragino Sans" pitchFamily="34" charset="-122"/>
                 <a:cs typeface="Hiragino Sans" pitchFamily="34" charset="-120"/>
               </a:rPr>
-              <a:t>IAM</a:t>
-            </a:r>
-            <a:endParaRPr lang="en-US" sz="1100" dirty="0"/>
-          </a:p>
-        </p:txBody>
-      </p:sp>
-      <p:sp>
-        <p:nvSpPr>
-          <p:cNvPr id="71" name="Text 68"/>
-          <p:cNvSpPr/>
-          <p:nvPr/>
-        </p:nvSpPr>
-        <p:spPr>
-          <a:xfrm>
-            <a:off x="8834933" y="5266944"/>
-            <a:ext cx="1692554" cy="201168"/>
+              <a:t>KMS CMK</a:t>
+            </a:r>
+            <a:endParaRPr lang="en-US" sz="1050" dirty="0"/>
+          </a:p>
+        </p:txBody>
+      </p:sp>
+      <p:sp>
+        <p:nvSpPr>
+          <p:cNvPr id="72" name="Text 69"/>
+          <p:cNvSpPr/>
+          <p:nvPr/>
+        </p:nvSpPr>
+        <p:spPr>
+          <a:xfrm>
+            <a:off x="9447809" y="4792370"/>
+            <a:ext cx="1811198" cy="209398"/>
           </a:xfrm>
           <a:prstGeom prst="rect">
             <a:avLst/>
@@ -34832,7 +34930,7 @@
                 <a:ea typeface="Hiragino Sans" pitchFamily="34" charset="-122"/>
                 <a:cs typeface="Hiragino Sans" pitchFamily="34" charset="-120"/>
               </a:rPr>
-              <a:t>最小權限</a:t>
+              <a:t>自管金鑰</a:t>
             </a:r>
             <a:endParaRPr lang="en-US" sz="850" dirty="0"/>
           </a:p>
@@ -34840,7 +34938,49 @@
       </p:sp>
       <p:sp>
         <p:nvSpPr>
-          <p:cNvPr id="72" name="Shape 69"/>
+          <p:cNvPr id="73" name="Text 70"/>
+          <p:cNvSpPr/>
+          <p:nvPr/>
+        </p:nvSpPr>
+        <p:spPr>
+          <a:xfrm>
+            <a:off x="8862593" y="5102352"/>
+            <a:ext cx="2451278" cy="457200"/>
+          </a:xfrm>
+          <a:prstGeom prst="rect">
+            <a:avLst/>
+          </a:prstGeom>
+          <a:noFill/>
+          <a:ln/>
+        </p:spPr>
+        <p:txBody>
+          <a:bodyPr wrap="square" lIns="0" tIns="0" rIns="0" bIns="0" rtlCol="0" anchor="ctr"/>
+          <a:lstStyle/>
+          <a:p>
+            <a:pPr indent="0" marL="0">
+              <a:lnSpc>
+                <a:spcPct val="105000"/>
+              </a:lnSpc>
+              <a:buNone/>
+            </a:pPr>
+            <a:r>
+              <a:rPr lang="en-US" sz="800" dirty="0">
+                <a:solidFill>
+                  <a:srgbClr val="C7D6E4"/>
+                </a:solidFill>
+                <a:latin typeface="Hiragino Sans" pitchFamily="34" charset="0"/>
+                <a:ea typeface="Hiragino Sans" pitchFamily="34" charset="-122"/>
+                <a:cs typeface="Hiragino Sans" pitchFamily="34" charset="-120"/>
+              </a:rPr>
+              <a:t>現用 AWS 託管預設金鑰</a:t>
+            </a:r>
+            <a:endParaRPr lang="en-US" sz="800" dirty="0"/>
+          </a:p>
+        </p:txBody>
+      </p:sp>
+      <p:sp>
+        <p:nvSpPr>
+          <p:cNvPr id="74" name="Shape 71"/>
           <p:cNvSpPr/>
           <p:nvPr/>
         </p:nvSpPr>
@@ -34869,7 +35009,7 @@
       </p:sp>
       <p:sp>
         <p:nvSpPr>
-          <p:cNvPr id="73" name="Text 70"/>
+          <p:cNvPr id="75" name="Text 72"/>
           <p:cNvSpPr/>
           <p:nvPr/>
         </p:nvSpPr>
@@ -34903,7 +35043,7 @@
                 <a:ea typeface="Hiragino Sans" pitchFamily="34" charset="-122"/>
                 <a:cs typeface="Hiragino Sans" pitchFamily="34" charset="-120"/>
               </a:rPr>
-              <a:t>◆ 縱深防禦　</a:t>
+              <a:t>◆ 誠實盤點　</a:t>
             </a:r>
             <a:pPr indent="0" marL="0">
               <a:lnSpc>
@@ -34920,7 +35060,7 @@
                 <a:ea typeface="Hiragino Sans" pitchFamily="34" charset="-122"/>
                 <a:cs typeface="Hiragino Sans" pitchFamily="34" charset="-120"/>
               </a:rPr>
-              <a:t>邊緣擋量、VPC 隔離、帳號偵測、加密兜底 — 攻擊者要連過四關；憑證進 Secrets Manager、資料以 KMS 加密、操作全入 CloudTrail，IAM 全程最小權限。</a:t>
+              <a:t>今天真正擋得住的是入口：SG 只放行 ALB，直打 task 公網 IP 已 timeout。IAM 動作已收斂、SNS 綁單一 topic ARN，但 Bedrock 與 SES 仍是 Resource *，不宣稱「全程最小權限」。GuardDuty 受本帳號權限阻擋，WAF / Secrets Manager 是下一步。</a:t>
             </a:r>
             <a:endParaRPr lang="en-US" sz="1150" dirty="0"/>
           </a:p>
